--- a/downloads/presentations/modules/arc-340.pptx
+++ b/downloads/presentations/modules/arc-340.pptx
@@ -615,7 +615,8 @@
               <a:rPr lang="en-US" dirty="0"/>
               <a:t>Why This Topic Matters for Public Health AI
 Integration decisions determine whether AI becomes part of a reliable public health workflow or an isolated tool that adds burden. If staff must copy and paste sensitive information between systems, the AI tool may appear helpful while increasing privacy risk, documentation gaps, and error rates. If an AI service writes back to a system of record without appropriate controls, a technical integration can become an operational safety risk.
-Public health agencies often operate in mixed environments that include legacy surveillance systems, modern cloud platforms, external partners, interface engines, spreadsheets, portals, and vendor-hosted tools. AI implementation requires teams to make these environments visible and decide where automation belongs. A well-integrated workflow preserves accountability by defining what data are exchanged, what actions are allowed, what is logged, and what humans must approve.</a:t>
+Public health agencies often operate in mixed environments that include legacy surveillance systems, modern cloud platforms, external partners, interface engines, spreadsheets, portals, and vendor-hosted tools. AI implementation requires teams to make these environments visible and decide where automation belongs. A well-integrated workflow preserves accountability by defining what data are exchanged, what actions are allowed, what is logged, and what humans must approve.
+Application guidance: Connect the concept to public health purpose, responsible use, required safeguards, documentation, and the next action a department should take.</a:t>
             </a:r>
             <a:endParaRPr lang="en-US" dirty="0"/>
           </a:p>
@@ -705,7 +706,8 @@
               <a:rPr lang="en-US" dirty="0"/>
               <a:t>Public Health Example
 A health department may want an AI assistant to summarize incoming case reports and create follow-up tasks for investigators. A weak integration pattern would require staff to export case data, paste it into an external tool, copy the summary, and manually create a task. A stronger pattern would retrieve approved fields from the surveillance system, generate a draft summary inside the authorized workflow, and require the investigator to approve any task creation.
-The technical design matters because the AI tool is no longer just generating text. It is interacting with operational systems. The agency must decide whether the tool is read-only, whether it can create draft tasks, whether it can update the case record, and how the system logs each action.</a:t>
+The technical design matters because the AI tool is no longer just generating text. It is interacting with operational systems. The agency must decide whether the tool is read-only, whether it can create draft tasks, whether it can update the case record, and how the system logs each action.
+Application guidance: Connect the concept to public health purpose, responsible use, required safeguards, documentation, and the next action a department should take.</a:t>
             </a:r>
             <a:endParaRPr lang="en-US" dirty="0"/>
           </a:p>
@@ -796,7 +798,8 @@
               <a:t>Technical and Operational Deep Dive
 Point-to-point interfaces connect two systems directly. They can be useful when the exchange is stable and narrow, but they become difficult to maintain as the number of systems increases. In public health, too many point-to-point connections can create brittle architecture, inconsistent validation, and high maintenance burden.
 Interface engines and message brokers support more scalable exchange. Interface engines are common in health data exchange because they can transform messages, route them, validate required fields, and provide monitoring. Message brokers and event queues are useful when workflows are triggered by events, such as receipt of a lab result or creation of a new case. AI tools that depend on timely data may need these patterns to avoid polling, manual refreshes, or delayed processing.
-APIs are increasingly important because they allow systems to request data or services in a more modular way. FHIR APIs can support structured access to clinical information, while internal APIs may expose surveillance, laboratory, or operational data to approved applications. API-based integration requires careful attention to authentication, authorization, rate limits, payload design, error handling, and audit logs.</a:t>
+APIs are increasingly important because they allow systems to request data or services in a more modular way. FHIR APIs can support structured access to clinical information, while internal APIs may expose surveillance, laboratory, or operational data to approved applications. API-based integration requires careful attention to authentication, authorization, rate limits, payload design, error handling, and audit logs.
+Application guidance: Connect the concept to public health purpose, responsible use, required safeguards, documentation, and the next action a department should take.</a:t>
             </a:r>
             <a:endParaRPr lang="en-US" dirty="0"/>
           </a:p>
@@ -886,7 +889,8 @@
               <a:rPr lang="en-US" dirty="0"/>
               <a:t>Risks, Failure Modes, and Guardrails
 A common failure mode is integration by workaround. Staff may use manual exports, screenshots, shared drives, or copy-and-paste workflows when a tool is not properly integrated. These practices can create privacy risk, version confusion, and gaps in the official record. A guardrail is to require integration review before operational use and to document whether manual transfer of sensitive data is prohibited.
-Another failure mode is uncontrolled write-back. If an AI tool can update a record, create a task, send a message, or change a status, the agency must define approval points, rollback procedures, and audit logs. The guardrail is to separate draft support from final action unless the workflow has been approved for automation.</a:t>
+Another failure mode is uncontrolled write-back. If an AI tool can update a record, create a task, send a message, or change a status, the agency must define approval points, rollback procedures, and audit logs. The guardrail is to separate draft support from final action unless the workflow has been approved for automation.
+Application guidance: Identify what could go wrong, who could be affected, what safeguards are needed, and what evidence should be reviewed before use expands.</a:t>
             </a:r>
             <a:endParaRPr lang="en-US" dirty="0"/>
           </a:p>
@@ -975,7 +979,8 @@
             <a:r>
               <a:rPr lang="en-US" dirty="0"/>
               <a:t>Application to AI-Supported Workflows
-Generative AI may require integration with document repositories or systems of record so outputs can be grounded in approved content. Predictive models may require scheduled data feeds and monitoring dashboards. Agentic workflows require the strongest integration controls because they may call tools, access data, create tasks, or trigger notifications. For each AI use case, the integration pattern should match the sensitivity and operational consequence of the action.</a:t>
+Generative AI may require integration with document repositories or systems of record so outputs can be grounded in approved content. Predictive models may require scheduled data feeds and monitoring dashboards. Agentic workflows require the strongest integration controls because they may call tools, access data, create tasks, or trigger notifications. For each AI use case, the integration pattern should match the sensitivity and operational consequence of the action.
+Application guidance: Use the concept to clarify workflow changes, dependencies, staffing, procurement requirements, training needs, and implementation checkpoints.</a:t>
             </a:r>
             <a:endParaRPr lang="en-US" dirty="0"/>
           </a:p>
@@ -1066,7 +1071,8 @@
               <a:t>Reflection Questions
 Which workflows currently depend on manual transfer between systems?
 Which systems are the official systems of record?
-Where would API access reduce burden without increasing risk?</a:t>
+Where would API access reduce burden without increasing risk?
+Application guidance: Connect the concept to public health purpose, responsible use, required safeguards, documentation, and the next action a department should take.</a:t>
             </a:r>
             <a:endParaRPr lang="en-US" dirty="0"/>
           </a:p>
@@ -1156,7 +1162,8 @@
               <a:rPr lang="en-US" dirty="0"/>
               <a:t>Reflection Questions
 Which actions should remain read-only?
-What logs would be needed to reconstruct an AI-supported action?</a:t>
+What logs would be needed to reconstruct an AI-supported action?
+Application guidance: Connect the concept to public health purpose, responsible use, required safeguards, documentation, and the next action a department should take.</a:t>
             </a:r>
             <a:endParaRPr lang="en-US" dirty="0"/>
           </a:p>
@@ -1245,7 +1252,8 @@
             <a:r>
               <a:rPr lang="en-US" dirty="0"/>
               <a:t>Practical Exercise
-Create an integration pattern worksheet for one AI-supported workflow. Identify the systems involved, the data exchanged, the integration method, whether the AI tool is read-only or write-back, the human approval point, and the audit log requirements.</a:t>
+Create an integration pattern worksheet for one AI-supported workflow. Identify the systems involved, the data exchanged, the integration method, whether the AI tool is read-only or write-back, the human approval point, and the audit log requirements.
+Application guidance: Use the assignment to test whether you can explain the concept, apply it to a realistic public health situation, and identify what would need review before the work moves forward.</a:t>
             </a:r>
             <a:endParaRPr lang="en-US" dirty="0"/>
           </a:p>
@@ -1336,7 +1344,8 @@
               <a:t>Expected Artifact or Evidence
 Integration pattern worksheet
 System-of-record and source-system list
-Read/write permission recommendation</a:t>
+Read/write permission recommendation
+Application guidance: Connect the concept to public health purpose, responsible use, required safeguards, documentation, and the next action a department should take.</a:t>
             </a:r>
             <a:endParaRPr lang="en-US" dirty="0"/>
           </a:p>
@@ -1425,7 +1434,8 @@
             <a:r>
               <a:rPr lang="en-US" dirty="0"/>
               <a:t>Expected Artifact or Evidence
-Error handling and audit log requirements</a:t>
+Error handling and audit log requirements
+Application guidance: Connect the concept to public health purpose, responsible use, required safeguards, documentation, and the next action a department should take.</a:t>
             </a:r>
             <a:endParaRPr lang="en-US" dirty="0"/>
           </a:p>
@@ -1609,7 +1619,8 @@
 Integration pattern worksheet
 System-of-record and source-system list
 Read/write permission recommendation
-Error handling and audit log requirements</a:t>
+Error handling and audit log requirements
+Application guidance: Use the assignment to test whether you can explain the concept, apply it to a realistic public health situation, and identify what would need review before the work moves forward.</a:t>
             </a:r>
             <a:endParaRPr lang="en-US" dirty="0"/>
           </a:p>
@@ -1702,7 +1713,8 @@
 2. What is the best reason to assign an accountability owner?
 3. When should an AI-supported workflow be escalated for review?
 4. Which practice best supports public accountability?
-5. What should happen when data sources, policy, vendor configuration, or workflow use changes?</a:t>
+5. What should happen when data sources, policy, vendor configuration, or workflow use changes?
+Application guidance: Use the assignment to test whether you can explain the concept, apply it to a realistic public health situation, and identify what would need review before the work moves forward.</a:t>
             </a:r>
             <a:endParaRPr lang="en-US" dirty="0"/>
           </a:p>
@@ -1795,7 +1807,8 @@
 NIST Artificial Intelligence Risk Management Framework and NIST Generative AI Profile: https://www.nist.gov/publications/artificial-intelligence-risk-management-framework-generative-artificial-intelligence
 WHO Ethics and Governance of Artificial Intelligence for Health guidance: https://www.who.int/publications/i/item/9789240029200
 OWASP Top 10 for Large Language Model Applications: https://owasp.org/www-project-top-10-for-large-language-model-applications/
-ONC health IT, interoperability, and information blocking resources: https://www.healthit.gov/</a:t>
+ONC health IT, interoperability, and information blocking resources: https://www.healthit.gov/
+Application guidance: Connect the concept to public health purpose, responsible use, required safeguards, documentation, and the next action a department should take.</a:t>
             </a:r>
             <a:endParaRPr lang="en-US" dirty="0"/>
           </a:p>
@@ -1884,7 +1897,8 @@
             <a:r>
               <a:rPr lang="en-US" dirty="0"/>
               <a:t>References and Resources
-Agency policies for privacy, public records, cybersecurity, procurement, civil rights, accessibility, language access, and emergency communications</a:t>
+Agency policies for privacy, public records, cybersecurity, procurement, civil rights, accessibility, language access, and emergency communications
+Application guidance: Connect the concept to public health purpose, responsible use, required safeguards, documentation, and the next action a department should take.</a:t>
             </a:r>
             <a:endParaRPr lang="en-US" dirty="0"/>
           </a:p>
@@ -2163,7 +2177,8 @@
 Distinguish among common integration patterns such as point-to-point interfaces, APIs, message brokers, interface engines, event queues, and bulk exchange.
 Identify the systems of record, upstream sources, downstream systems, and shared services involved in an AI-supported workflow.
 Assess whether a proposed AI tool requires read-only access, write-back access, embedded workflow integration, or manual review.
-Identify integration risks related to reliability, duplicate entry, routing errors, privacy, security, and vendor lock-in.</a:t>
+Identify integration risks related to reliability, duplicate entry, routing errors, privacy, security, and vendor lock-in.
+Application guidance: Use the assignment to test whether you can explain the concept, apply it to a realistic public health situation, and identify what would need review before the work moves forward.</a:t>
             </a:r>
             <a:endParaRPr lang="en-US" dirty="0"/>
           </a:p>
@@ -2252,7 +2267,8 @@
             <a:r>
               <a:rPr lang="en-US" dirty="0"/>
               <a:t>Learning Objectives
-Produce an integration pattern worksheet for a public health AI use case.</a:t>
+Produce an integration pattern worksheet for a public health AI use case.
+Application guidance: Use the assignment to test whether you can explain the concept, apply it to a realistic public health situation, and identify what would need review before the work moves forward.</a:t>
             </a:r>
             <a:endParaRPr lang="en-US" dirty="0"/>
           </a:p>
@@ -2342,7 +2358,8 @@
               <a:rPr lang="en-US" dirty="0"/>
               <a:t>Module Overview
 Public health AI rarely succeeds as a stand-alone application. The value of an AI-supported workflow depends on how well it is integrated with systems of record, data exchange services, terminology services, identity systems, dashboards, case management tools, and communication channels. This module helps learners understand the integration patterns that allow AI to support public health work without creating fragmented pilots or unsafe workarounds.
-The module focuses on practical integration choices rather than software engineering theory. Learners examine when point-to-point interfaces, interface engines, APIs, event queues, shared services, file exchange, bulk data access, and embedded workflow tools are appropriate. The goal is to help public health teams ask better implementation questions and recognize when a proposed AI tool is not architecturally ready for operational use.</a:t>
+The module focuses on practical integration choices rather than software engineering theory. Learners examine when point-to-point interfaces, interface engines, APIs, event queues, shared services, file exchange, bulk data access, and embedded workflow tools are appropriate. The goal is to help public health teams ask better implementation questions and recognize when a proposed AI tool is not architecturally ready for operational use.
+Application guidance: Connect the concept to public health purpose, responsible use, required safeguards, documentation, and the next action a department should take.</a:t>
             </a:r>
             <a:endParaRPr lang="en-US" dirty="0"/>
           </a:p>
@@ -2435,7 +2452,8 @@
 Interface engine: Software that routes, transforms, validates, and monitors messages between systems.
 Message broker: A service that allows systems to send and receive messages through a managed queue or topic.
 Bulk data exchange: The transfer of large datasets at scheduled intervals or on demand.
-Write-back: A system action that updates, creates, or changes information in another system.</a:t>
+Write-back: A system action that updates, creates, or changes information in another system.
+Application guidance: Connect the concept to public health purpose, responsible use, required safeguards, documentation, and the next action a department should take.</a:t>
             </a:r>
             <a:endParaRPr lang="en-US" dirty="0"/>
           </a:p>
@@ -2524,7 +2542,8 @@
             <a:r>
               <a:rPr lang="en-US" dirty="0"/>
               <a:t>Jurisdiction and Agency Policy Note
-This national-level module is intended for training and planning purposes. It does not replace legal, privacy, procurement, civil rights, records, or agency policy review. Learners should confirm applicable requirements in their own jurisdiction and organization before implementing AI-supported workflows.</a:t>
+This national-level module is intended for training and planning purposes. It does not replace legal, privacy, procurement, civil rights, records, or agency policy review. Learners should confirm applicable requirements in their own jurisdiction and organization before implementing AI-supported workflows.
+Application guidance: Translate this concept into clear decision rights, review steps, documentation expectations, and escalation paths before an AI-supported workflow is approved.</a:t>
             </a:r>
             <a:endParaRPr lang="en-US" dirty="0"/>
           </a:p>
@@ -3295,8 +3314,8 @@
         </p:nvSpPr>
         <p:spPr>
           <a:xfrm>
-            <a:off x="9966960" y="6537960"/>
-            <a:ext cx="1645920" cy="201168"/>
+            <a:off x="9646920" y="6537960"/>
+            <a:ext cx="1965960" cy="201168"/>
           </a:xfrm>
           <a:prstGeom prst="rect">
             <a:avLst/>
@@ -3320,7 +3339,7 @@
                 <a:ea typeface="Aptos" pitchFamily="34" charset="-122"/>
                 <a:cs typeface="Aptos" pitchFamily="34" charset="-120"/>
               </a:rPr>
-              <a:t>Â© Paula Soper</a:t>
+              <a:t>Copyright Paula Soper</a:t>
             </a:r>
             <a:endParaRPr lang="en-US" sz="800" dirty="0"/>
           </a:p>
@@ -3367,77 +3386,13 @@
       </p:sp>
       <p:sp>
         <p:nvSpPr>
-          <p:cNvPr id="8" name="Shape 6"/>
+          <p:cNvPr id="8" name="Text 6"/>
           <p:cNvSpPr/>
           <p:nvPr/>
         </p:nvSpPr>
         <p:spPr>
           <a:xfrm>
             <a:off x="640080" y="658368"/>
-            <a:ext cx="420624" cy="420624"/>
-          </a:xfrm>
-          <a:prstGeom prst="ellipse">
-            <a:avLst/>
-          </a:prstGeom>
-          <a:solidFill>
-            <a:srgbClr val="0068B7"/>
-          </a:solidFill>
-          <a:ln w="12700">
-            <a:solidFill>
-              <a:srgbClr val="0068B7"/>
-            </a:solidFill>
-            <a:prstDash val="solid"/>
-          </a:ln>
-        </p:spPr>
-      </p:sp>
-      <p:sp>
-        <p:nvSpPr>
-          <p:cNvPr id="9" name="Text 7"/>
-          <p:cNvSpPr/>
-          <p:nvPr/>
-        </p:nvSpPr>
-        <p:spPr>
-          <a:xfrm>
-            <a:off x="640080" y="731520"/>
-            <a:ext cx="420624" cy="164592"/>
-          </a:xfrm>
-          <a:prstGeom prst="rect">
-            <a:avLst/>
-          </a:prstGeom>
-          <a:noFill/>
-          <a:ln/>
-        </p:spPr>
-        <p:txBody>
-          <a:bodyPr wrap="square" lIns="0" tIns="0" rIns="0" bIns="0" rtlCol="0" anchor="ctr"/>
-          <a:lstStyle/>
-          <a:p>
-            <a:pPr algn="ctr" indent="0" marL="0">
-              <a:buNone/>
-            </a:pPr>
-            <a:r>
-              <a:rPr lang="en-US" sz="1100" b="1" dirty="0">
-                <a:solidFill>
-                  <a:srgbClr val="FFFFFF"/>
-                </a:solidFill>
-                <a:latin typeface="Aptos" pitchFamily="34" charset="0"/>
-                <a:ea typeface="Aptos" pitchFamily="34" charset="-122"/>
-                <a:cs typeface="Aptos" pitchFamily="34" charset="-120"/>
-              </a:rPr>
-              <a:t>5</a:t>
-            </a:r>
-            <a:endParaRPr lang="en-US" sz="1100" dirty="0"/>
-          </a:p>
-        </p:txBody>
-      </p:sp>
-      <p:sp>
-        <p:nvSpPr>
-          <p:cNvPr id="10" name="Text 8"/>
-          <p:cNvSpPr/>
-          <p:nvPr/>
-        </p:nvSpPr>
-        <p:spPr>
-          <a:xfrm>
-            <a:off x="640080" y="621792"/>
             <a:ext cx="10881360" cy="713232"/>
           </a:xfrm>
           <a:prstGeom prst="rect">
@@ -3472,14 +3427,14 @@
       </p:sp>
       <p:sp>
         <p:nvSpPr>
-          <p:cNvPr id="11" name="Text 9"/>
+          <p:cNvPr id="9" name="Text 7"/>
           <p:cNvSpPr/>
           <p:nvPr/>
         </p:nvSpPr>
         <p:spPr>
           <a:xfrm>
             <a:off x="868680" y="1508760"/>
-            <a:ext cx="6537960" cy="4160520"/>
+            <a:ext cx="6309360" cy="4160520"/>
           </a:xfrm>
           <a:prstGeom prst="rect">
             <a:avLst/>
@@ -3538,18 +3493,18 @@
       </p:sp>
       <p:sp>
         <p:nvSpPr>
-          <p:cNvPr id="12" name="Shape 10"/>
-          <p:cNvSpPr/>
-          <p:nvPr/>
-        </p:nvSpPr>
-        <p:spPr>
-          <a:xfrm>
-            <a:off x="7909560" y="1417320"/>
-            <a:ext cx="3154680" cy="1828800"/>
+          <p:cNvPr id="10" name="Shape 8"/>
+          <p:cNvSpPr/>
+          <p:nvPr/>
+        </p:nvSpPr>
+        <p:spPr>
+          <a:xfrm>
+            <a:off x="7635240" y="1325880"/>
+            <a:ext cx="3474720" cy="1325880"/>
           </a:xfrm>
           <a:prstGeom prst="roundRect">
             <a:avLst>
-              <a:gd name="adj" fmla="val 6000"/>
+              <a:gd name="adj" fmla="val 8276"/>
             </a:avLst>
           </a:prstGeom>
           <a:solidFill>
@@ -3565,14 +3520,14 @@
       </p:sp>
       <p:sp>
         <p:nvSpPr>
-          <p:cNvPr id="13" name="Text 11"/>
-          <p:cNvSpPr/>
-          <p:nvPr/>
-        </p:nvSpPr>
-        <p:spPr>
-          <a:xfrm>
-            <a:off x="8074152" y="1563624"/>
-            <a:ext cx="2825496" cy="256032"/>
+          <p:cNvPr id="11" name="Text 9"/>
+          <p:cNvSpPr/>
+          <p:nvPr/>
+        </p:nvSpPr>
+        <p:spPr>
+          <a:xfrm>
+            <a:off x="7799832" y="1472184"/>
+            <a:ext cx="3145536" cy="256032"/>
           </a:xfrm>
           <a:prstGeom prst="rect">
             <a:avLst/>
@@ -3596,7 +3551,7 @@
                 <a:ea typeface="Aptos" pitchFamily="34" charset="-122"/>
                 <a:cs typeface="Aptos" pitchFamily="34" charset="-120"/>
               </a:rPr>
-              <a:t>Key idea</a:t>
+              <a:t>Core concept</a:t>
             </a:r>
             <a:endParaRPr lang="en-US" sz="1300" dirty="0"/>
           </a:p>
@@ -3604,14 +3559,14 @@
       </p:sp>
       <p:sp>
         <p:nvSpPr>
-          <p:cNvPr id="14" name="Text 12"/>
-          <p:cNvSpPr/>
-          <p:nvPr/>
-        </p:nvSpPr>
-        <p:spPr>
-          <a:xfrm>
-            <a:off x="8074152" y="1920240"/>
-            <a:ext cx="2825496" cy="1188720"/>
+          <p:cNvPr id="12" name="Text 10"/>
+          <p:cNvSpPr/>
+          <p:nvPr/>
+        </p:nvSpPr>
+        <p:spPr>
+          <a:xfrm>
+            <a:off x="7799832" y="1828800"/>
+            <a:ext cx="3145536" cy="685800"/>
           </a:xfrm>
           <a:prstGeom prst="rect">
             <a:avLst/>
@@ -3645,18 +3600,159 @@
       </p:sp>
       <p:sp>
         <p:nvSpPr>
-          <p:cNvPr id="15" name="Shape 13"/>
-          <p:cNvSpPr/>
-          <p:nvPr/>
-        </p:nvSpPr>
-        <p:spPr>
-          <a:xfrm>
-            <a:off x="7909560" y="3520440"/>
-            <a:ext cx="3154680" cy="1737360"/>
+          <p:cNvPr id="13" name="Shape 11"/>
+          <p:cNvSpPr/>
+          <p:nvPr/>
+        </p:nvSpPr>
+        <p:spPr>
+          <a:xfrm>
+            <a:off x="7635240" y="2788920"/>
+            <a:ext cx="3474720" cy="1536192"/>
           </a:xfrm>
           <a:prstGeom prst="roundRect">
             <a:avLst>
-              <a:gd name="adj" fmla="val 6316"/>
+              <a:gd name="adj" fmla="val 7143"/>
+            </a:avLst>
+          </a:prstGeom>
+          <a:solidFill>
+            <a:srgbClr val="FFFFFF">
+              <a:alpha val="88000"/>
+            </a:srgbClr>
+          </a:solidFill>
+          <a:ln w="12700">
+            <a:solidFill>
+              <a:srgbClr val="D6E8F2"/>
+            </a:solidFill>
+            <a:prstDash val="solid"/>
+          </a:ln>
+        </p:spPr>
+      </p:sp>
+      <p:sp>
+        <p:nvSpPr>
+          <p:cNvPr id="14" name="Shape 12"/>
+          <p:cNvSpPr/>
+          <p:nvPr/>
+        </p:nvSpPr>
+        <p:spPr>
+          <a:xfrm>
+            <a:off x="8074152" y="3291840"/>
+            <a:ext cx="2596896" cy="749808"/>
+          </a:xfrm>
+          <a:prstGeom prst="rect">
+            <a:avLst/>
+          </a:prstGeom>
+          <a:solidFill>
+            <a:srgbClr val="EAF6F8"/>
+          </a:solidFill>
+          <a:ln w="12700">
+            <a:solidFill>
+              <a:srgbClr val="8ABBD8"/>
+            </a:solidFill>
+            <a:prstDash val="solid"/>
+          </a:ln>
+        </p:spPr>
+      </p:sp>
+      <p:sp>
+        <p:nvSpPr>
+          <p:cNvPr id="15" name="Shape 13"/>
+          <p:cNvSpPr/>
+          <p:nvPr/>
+        </p:nvSpPr>
+        <p:spPr>
+          <a:xfrm>
+            <a:off x="8202168" y="3721608"/>
+            <a:ext cx="2340864" cy="0"/>
+          </a:xfrm>
+          <a:prstGeom prst="line">
+            <a:avLst/>
+          </a:prstGeom>
+          <a:noFill/>
+          <a:ln w="19050">
+            <a:solidFill>
+              <a:srgbClr val="0068B7"/>
+            </a:solidFill>
+            <a:prstDash val="solid"/>
+          </a:ln>
+        </p:spPr>
+      </p:sp>
+      <p:sp>
+        <p:nvSpPr>
+          <p:cNvPr id="16" name="Shape 14"/>
+          <p:cNvSpPr/>
+          <p:nvPr/>
+        </p:nvSpPr>
+        <p:spPr>
+          <a:xfrm>
+            <a:off x="9198864" y="4206240"/>
+            <a:ext cx="347472" cy="347472"/>
+          </a:xfrm>
+          <a:prstGeom prst="ellipse">
+            <a:avLst/>
+          </a:prstGeom>
+          <a:solidFill>
+            <a:srgbClr val="2F8A28"/>
+          </a:solidFill>
+          <a:ln w="12700">
+            <a:solidFill>
+              <a:srgbClr val="2F8A28"/>
+            </a:solidFill>
+            <a:prstDash val="solid"/>
+          </a:ln>
+        </p:spPr>
+      </p:sp>
+      <p:sp>
+        <p:nvSpPr>
+          <p:cNvPr id="17" name="Text 15"/>
+          <p:cNvSpPr/>
+          <p:nvPr/>
+        </p:nvSpPr>
+        <p:spPr>
+          <a:xfrm>
+            <a:off x="7909560" y="3977640"/>
+            <a:ext cx="2926080" cy="182880"/>
+          </a:xfrm>
+          <a:prstGeom prst="rect">
+            <a:avLst/>
+          </a:prstGeom>
+          <a:noFill/>
+          <a:ln/>
+        </p:spPr>
+        <p:txBody>
+          <a:bodyPr wrap="square" lIns="0" tIns="0" rIns="0" bIns="0" rtlCol="0" anchor="ctr"/>
+          <a:lstStyle/>
+          <a:p>
+            <a:pPr algn="ctr" indent="0" marL="0">
+              <a:buNone/>
+            </a:pPr>
+            <a:r>
+              <a:rPr lang="en-US" sz="1000" dirty="0">
+                <a:solidFill>
+                  <a:srgbClr val="003A63"/>
+                </a:solidFill>
+                <a:latin typeface="Aptos" pitchFamily="34" charset="0"/>
+                <a:ea typeface="Aptos" pitchFamily="34" charset="-122"/>
+                <a:cs typeface="Aptos" pitchFamily="34" charset="-120"/>
+              </a:rPr>
+              <a:t>Concept to action</a:t>
+            </a:r>
+            <a:endParaRPr lang="en-US" sz="1000" dirty="0"/>
+          </a:p>
+        </p:txBody>
+      </p:sp>
+      <p:sp>
+        <p:nvSpPr>
+          <p:cNvPr id="18" name="Shape 16"/>
+          <p:cNvSpPr/>
+          <p:nvPr/>
+        </p:nvSpPr>
+        <p:spPr>
+          <a:xfrm>
+            <a:off x="7635240" y="4498848"/>
+            <a:ext cx="3474720" cy="1143000"/>
+          </a:xfrm>
+          <a:prstGeom prst="roundRect">
+            <a:avLst>
+              <a:gd name="adj" fmla="val 9600"/>
             </a:avLst>
           </a:prstGeom>
           <a:solidFill>
@@ -3672,14 +3768,14 @@
       </p:sp>
       <p:sp>
         <p:nvSpPr>
-          <p:cNvPr id="16" name="Text 14"/>
-          <p:cNvSpPr/>
-          <p:nvPr/>
-        </p:nvSpPr>
-        <p:spPr>
-          <a:xfrm>
-            <a:off x="8074152" y="3666744"/>
-            <a:ext cx="2825496" cy="256032"/>
+          <p:cNvPr id="19" name="Text 17"/>
+          <p:cNvSpPr/>
+          <p:nvPr/>
+        </p:nvSpPr>
+        <p:spPr>
+          <a:xfrm>
+            <a:off x="7799832" y="4645152"/>
+            <a:ext cx="3145536" cy="256032"/>
           </a:xfrm>
           <a:prstGeom prst="rect">
             <a:avLst/>
@@ -3703,7 +3799,7 @@
                 <a:ea typeface="Aptos" pitchFamily="34" charset="-122"/>
                 <a:cs typeface="Aptos" pitchFamily="34" charset="-120"/>
               </a:rPr>
-              <a:t>Use this for</a:t>
+              <a:t>Apply it</a:t>
             </a:r>
             <a:endParaRPr lang="en-US" sz="1300" dirty="0"/>
           </a:p>
@@ -3711,14 +3807,14 @@
       </p:sp>
       <p:sp>
         <p:nvSpPr>
-          <p:cNvPr id="17" name="Text 15"/>
-          <p:cNvSpPr/>
-          <p:nvPr/>
-        </p:nvSpPr>
-        <p:spPr>
-          <a:xfrm>
-            <a:off x="8074152" y="4023360"/>
-            <a:ext cx="2825496" cy="1097280"/>
+          <p:cNvPr id="20" name="Text 18"/>
+          <p:cNvSpPr/>
+          <p:nvPr/>
+        </p:nvSpPr>
+        <p:spPr>
+          <a:xfrm>
+            <a:off x="7799832" y="5001768"/>
+            <a:ext cx="3145536" cy="502920"/>
           </a:xfrm>
           <a:prstGeom prst="rect">
             <a:avLst/>
@@ -3744,7 +3840,7 @@
                 <a:ea typeface="Aptos" pitchFamily="34" charset="-122"/>
                 <a:cs typeface="Aptos" pitchFamily="34" charset="-120"/>
               </a:rPr>
-              <a:t>Connect the concept to public health decisions, safeguards, documentation, or implementation work.</a:t>
+              <a:t>Connect the concept to public health purpose, responsible use, required safeguards, documentation, and the next action a department should take.</a:t>
             </a:r>
             <a:endParaRPr lang="en-US" sz="1550" dirty="0"/>
           </a:p>
@@ -3918,8 +4014,8 @@
         </p:nvSpPr>
         <p:spPr>
           <a:xfrm>
-            <a:off x="9966960" y="6537960"/>
-            <a:ext cx="1645920" cy="201168"/>
+            <a:off x="9646920" y="6537960"/>
+            <a:ext cx="1965960" cy="201168"/>
           </a:xfrm>
           <a:prstGeom prst="rect">
             <a:avLst/>
@@ -3943,7 +4039,7 @@
                 <a:ea typeface="Aptos" pitchFamily="34" charset="-122"/>
                 <a:cs typeface="Aptos" pitchFamily="34" charset="-120"/>
               </a:rPr>
-              <a:t>Â© Paula Soper</a:t>
+              <a:t>Copyright Paula Soper</a:t>
             </a:r>
             <a:endParaRPr lang="en-US" sz="800" dirty="0"/>
           </a:p>
@@ -3990,77 +4086,13 @@
       </p:sp>
       <p:sp>
         <p:nvSpPr>
-          <p:cNvPr id="8" name="Shape 6"/>
+          <p:cNvPr id="8" name="Text 6"/>
           <p:cNvSpPr/>
           <p:nvPr/>
         </p:nvSpPr>
         <p:spPr>
           <a:xfrm>
             <a:off x="640080" y="658368"/>
-            <a:ext cx="420624" cy="420624"/>
-          </a:xfrm>
-          <a:prstGeom prst="ellipse">
-            <a:avLst/>
-          </a:prstGeom>
-          <a:solidFill>
-            <a:srgbClr val="0068B7"/>
-          </a:solidFill>
-          <a:ln w="12700">
-            <a:solidFill>
-              <a:srgbClr val="0068B7"/>
-            </a:solidFill>
-            <a:prstDash val="solid"/>
-          </a:ln>
-        </p:spPr>
-      </p:sp>
-      <p:sp>
-        <p:nvSpPr>
-          <p:cNvPr id="9" name="Text 7"/>
-          <p:cNvSpPr/>
-          <p:nvPr/>
-        </p:nvSpPr>
-        <p:spPr>
-          <a:xfrm>
-            <a:off x="640080" y="731520"/>
-            <a:ext cx="420624" cy="164592"/>
-          </a:xfrm>
-          <a:prstGeom prst="rect">
-            <a:avLst/>
-          </a:prstGeom>
-          <a:noFill/>
-          <a:ln/>
-        </p:spPr>
-        <p:txBody>
-          <a:bodyPr wrap="square" lIns="0" tIns="0" rIns="0" bIns="0" rtlCol="0" anchor="ctr"/>
-          <a:lstStyle/>
-          <a:p>
-            <a:pPr algn="ctr" indent="0" marL="0">
-              <a:buNone/>
-            </a:pPr>
-            <a:r>
-              <a:rPr lang="en-US" sz="1100" b="1" dirty="0">
-                <a:solidFill>
-                  <a:srgbClr val="FFFFFF"/>
-                </a:solidFill>
-                <a:latin typeface="Aptos" pitchFamily="34" charset="0"/>
-                <a:ea typeface="Aptos" pitchFamily="34" charset="-122"/>
-                <a:cs typeface="Aptos" pitchFamily="34" charset="-120"/>
-              </a:rPr>
-              <a:t>6</a:t>
-            </a:r>
-            <a:endParaRPr lang="en-US" sz="1100" dirty="0"/>
-          </a:p>
-        </p:txBody>
-      </p:sp>
-      <p:sp>
-        <p:nvSpPr>
-          <p:cNvPr id="10" name="Text 8"/>
-          <p:cNvSpPr/>
-          <p:nvPr/>
-        </p:nvSpPr>
-        <p:spPr>
-          <a:xfrm>
-            <a:off x="640080" y="621792"/>
             <a:ext cx="10881360" cy="713232"/>
           </a:xfrm>
           <a:prstGeom prst="rect">
@@ -4095,14 +4127,14 @@
       </p:sp>
       <p:sp>
         <p:nvSpPr>
-          <p:cNvPr id="11" name="Text 9"/>
+          <p:cNvPr id="9" name="Text 7"/>
           <p:cNvSpPr/>
           <p:nvPr/>
         </p:nvSpPr>
         <p:spPr>
           <a:xfrm>
             <a:off x="868680" y="1508760"/>
-            <a:ext cx="6537960" cy="4160520"/>
+            <a:ext cx="6309360" cy="4160520"/>
           </a:xfrm>
           <a:prstGeom prst="rect">
             <a:avLst/>
@@ -4161,18 +4193,18 @@
       </p:sp>
       <p:sp>
         <p:nvSpPr>
-          <p:cNvPr id="12" name="Shape 10"/>
-          <p:cNvSpPr/>
-          <p:nvPr/>
-        </p:nvSpPr>
-        <p:spPr>
-          <a:xfrm>
-            <a:off x="7909560" y="1417320"/>
-            <a:ext cx="3154680" cy="1828800"/>
+          <p:cNvPr id="10" name="Shape 8"/>
+          <p:cNvSpPr/>
+          <p:nvPr/>
+        </p:nvSpPr>
+        <p:spPr>
+          <a:xfrm>
+            <a:off x="7635240" y="1325880"/>
+            <a:ext cx="3474720" cy="1325880"/>
           </a:xfrm>
           <a:prstGeom prst="roundRect">
             <a:avLst>
-              <a:gd name="adj" fmla="val 6000"/>
+              <a:gd name="adj" fmla="val 8276"/>
             </a:avLst>
           </a:prstGeom>
           <a:solidFill>
@@ -4188,14 +4220,14 @@
       </p:sp>
       <p:sp>
         <p:nvSpPr>
-          <p:cNvPr id="13" name="Text 11"/>
-          <p:cNvSpPr/>
-          <p:nvPr/>
-        </p:nvSpPr>
-        <p:spPr>
-          <a:xfrm>
-            <a:off x="8074152" y="1563624"/>
-            <a:ext cx="2825496" cy="256032"/>
+          <p:cNvPr id="11" name="Text 9"/>
+          <p:cNvSpPr/>
+          <p:nvPr/>
+        </p:nvSpPr>
+        <p:spPr>
+          <a:xfrm>
+            <a:off x="7799832" y="1472184"/>
+            <a:ext cx="3145536" cy="256032"/>
           </a:xfrm>
           <a:prstGeom prst="rect">
             <a:avLst/>
@@ -4219,7 +4251,7 @@
                 <a:ea typeface="Aptos" pitchFamily="34" charset="-122"/>
                 <a:cs typeface="Aptos" pitchFamily="34" charset="-120"/>
               </a:rPr>
-              <a:t>Key idea</a:t>
+              <a:t>Core concept</a:t>
             </a:r>
             <a:endParaRPr lang="en-US" sz="1300" dirty="0"/>
           </a:p>
@@ -4227,14 +4259,14 @@
       </p:sp>
       <p:sp>
         <p:nvSpPr>
-          <p:cNvPr id="14" name="Text 12"/>
-          <p:cNvSpPr/>
-          <p:nvPr/>
-        </p:nvSpPr>
-        <p:spPr>
-          <a:xfrm>
-            <a:off x="8074152" y="1920240"/>
-            <a:ext cx="2825496" cy="1188720"/>
+          <p:cNvPr id="12" name="Text 10"/>
+          <p:cNvSpPr/>
+          <p:nvPr/>
+        </p:nvSpPr>
+        <p:spPr>
+          <a:xfrm>
+            <a:off x="7799832" y="1828800"/>
+            <a:ext cx="3145536" cy="685800"/>
           </a:xfrm>
           <a:prstGeom prst="rect">
             <a:avLst/>
@@ -4268,18 +4300,159 @@
       </p:sp>
       <p:sp>
         <p:nvSpPr>
-          <p:cNvPr id="15" name="Shape 13"/>
-          <p:cNvSpPr/>
-          <p:nvPr/>
-        </p:nvSpPr>
-        <p:spPr>
-          <a:xfrm>
-            <a:off x="7909560" y="3520440"/>
-            <a:ext cx="3154680" cy="1737360"/>
+          <p:cNvPr id="13" name="Shape 11"/>
+          <p:cNvSpPr/>
+          <p:nvPr/>
+        </p:nvSpPr>
+        <p:spPr>
+          <a:xfrm>
+            <a:off x="7635240" y="2788920"/>
+            <a:ext cx="3474720" cy="1536192"/>
           </a:xfrm>
           <a:prstGeom prst="roundRect">
             <a:avLst>
-              <a:gd name="adj" fmla="val 6316"/>
+              <a:gd name="adj" fmla="val 7143"/>
+            </a:avLst>
+          </a:prstGeom>
+          <a:solidFill>
+            <a:srgbClr val="FFFFFF">
+              <a:alpha val="88000"/>
+            </a:srgbClr>
+          </a:solidFill>
+          <a:ln w="12700">
+            <a:solidFill>
+              <a:srgbClr val="D6E8F2"/>
+            </a:solidFill>
+            <a:prstDash val="solid"/>
+          </a:ln>
+        </p:spPr>
+      </p:sp>
+      <p:sp>
+        <p:nvSpPr>
+          <p:cNvPr id="14" name="Shape 12"/>
+          <p:cNvSpPr/>
+          <p:nvPr/>
+        </p:nvSpPr>
+        <p:spPr>
+          <a:xfrm>
+            <a:off x="8074152" y="3291840"/>
+            <a:ext cx="2596896" cy="749808"/>
+          </a:xfrm>
+          <a:prstGeom prst="rect">
+            <a:avLst/>
+          </a:prstGeom>
+          <a:solidFill>
+            <a:srgbClr val="EAF6F8"/>
+          </a:solidFill>
+          <a:ln w="12700">
+            <a:solidFill>
+              <a:srgbClr val="8ABBD8"/>
+            </a:solidFill>
+            <a:prstDash val="solid"/>
+          </a:ln>
+        </p:spPr>
+      </p:sp>
+      <p:sp>
+        <p:nvSpPr>
+          <p:cNvPr id="15" name="Shape 13"/>
+          <p:cNvSpPr/>
+          <p:nvPr/>
+        </p:nvSpPr>
+        <p:spPr>
+          <a:xfrm>
+            <a:off x="8202168" y="3721608"/>
+            <a:ext cx="2340864" cy="0"/>
+          </a:xfrm>
+          <a:prstGeom prst="line">
+            <a:avLst/>
+          </a:prstGeom>
+          <a:noFill/>
+          <a:ln w="19050">
+            <a:solidFill>
+              <a:srgbClr val="0068B7"/>
+            </a:solidFill>
+            <a:prstDash val="solid"/>
+          </a:ln>
+        </p:spPr>
+      </p:sp>
+      <p:sp>
+        <p:nvSpPr>
+          <p:cNvPr id="16" name="Shape 14"/>
+          <p:cNvSpPr/>
+          <p:nvPr/>
+        </p:nvSpPr>
+        <p:spPr>
+          <a:xfrm>
+            <a:off x="9198864" y="4206240"/>
+            <a:ext cx="347472" cy="347472"/>
+          </a:xfrm>
+          <a:prstGeom prst="ellipse">
+            <a:avLst/>
+          </a:prstGeom>
+          <a:solidFill>
+            <a:srgbClr val="2F8A28"/>
+          </a:solidFill>
+          <a:ln w="12700">
+            <a:solidFill>
+              <a:srgbClr val="2F8A28"/>
+            </a:solidFill>
+            <a:prstDash val="solid"/>
+          </a:ln>
+        </p:spPr>
+      </p:sp>
+      <p:sp>
+        <p:nvSpPr>
+          <p:cNvPr id="17" name="Text 15"/>
+          <p:cNvSpPr/>
+          <p:nvPr/>
+        </p:nvSpPr>
+        <p:spPr>
+          <a:xfrm>
+            <a:off x="7909560" y="3977640"/>
+            <a:ext cx="2926080" cy="182880"/>
+          </a:xfrm>
+          <a:prstGeom prst="rect">
+            <a:avLst/>
+          </a:prstGeom>
+          <a:noFill/>
+          <a:ln/>
+        </p:spPr>
+        <p:txBody>
+          <a:bodyPr wrap="square" lIns="0" tIns="0" rIns="0" bIns="0" rtlCol="0" anchor="ctr"/>
+          <a:lstStyle/>
+          <a:p>
+            <a:pPr algn="ctr" indent="0" marL="0">
+              <a:buNone/>
+            </a:pPr>
+            <a:r>
+              <a:rPr lang="en-US" sz="1000" dirty="0">
+                <a:solidFill>
+                  <a:srgbClr val="003A63"/>
+                </a:solidFill>
+                <a:latin typeface="Aptos" pitchFamily="34" charset="0"/>
+                <a:ea typeface="Aptos" pitchFamily="34" charset="-122"/>
+                <a:cs typeface="Aptos" pitchFamily="34" charset="-120"/>
+              </a:rPr>
+              <a:t>Concept to action</a:t>
+            </a:r>
+            <a:endParaRPr lang="en-US" sz="1000" dirty="0"/>
+          </a:p>
+        </p:txBody>
+      </p:sp>
+      <p:sp>
+        <p:nvSpPr>
+          <p:cNvPr id="18" name="Shape 16"/>
+          <p:cNvSpPr/>
+          <p:nvPr/>
+        </p:nvSpPr>
+        <p:spPr>
+          <a:xfrm>
+            <a:off x="7635240" y="4498848"/>
+            <a:ext cx="3474720" cy="1143000"/>
+          </a:xfrm>
+          <a:prstGeom prst="roundRect">
+            <a:avLst>
+              <a:gd name="adj" fmla="val 9600"/>
             </a:avLst>
           </a:prstGeom>
           <a:solidFill>
@@ -4295,14 +4468,14 @@
       </p:sp>
       <p:sp>
         <p:nvSpPr>
-          <p:cNvPr id="16" name="Text 14"/>
-          <p:cNvSpPr/>
-          <p:nvPr/>
-        </p:nvSpPr>
-        <p:spPr>
-          <a:xfrm>
-            <a:off x="8074152" y="3666744"/>
-            <a:ext cx="2825496" cy="256032"/>
+          <p:cNvPr id="19" name="Text 17"/>
+          <p:cNvSpPr/>
+          <p:nvPr/>
+        </p:nvSpPr>
+        <p:spPr>
+          <a:xfrm>
+            <a:off x="7799832" y="4645152"/>
+            <a:ext cx="3145536" cy="256032"/>
           </a:xfrm>
           <a:prstGeom prst="rect">
             <a:avLst/>
@@ -4326,7 +4499,7 @@
                 <a:ea typeface="Aptos" pitchFamily="34" charset="-122"/>
                 <a:cs typeface="Aptos" pitchFamily="34" charset="-120"/>
               </a:rPr>
-              <a:t>Use this for</a:t>
+              <a:t>Apply it</a:t>
             </a:r>
             <a:endParaRPr lang="en-US" sz="1300" dirty="0"/>
           </a:p>
@@ -4334,14 +4507,14 @@
       </p:sp>
       <p:sp>
         <p:nvSpPr>
-          <p:cNvPr id="17" name="Text 15"/>
-          <p:cNvSpPr/>
-          <p:nvPr/>
-        </p:nvSpPr>
-        <p:spPr>
-          <a:xfrm>
-            <a:off x="8074152" y="4023360"/>
-            <a:ext cx="2825496" cy="1097280"/>
+          <p:cNvPr id="20" name="Text 18"/>
+          <p:cNvSpPr/>
+          <p:nvPr/>
+        </p:nvSpPr>
+        <p:spPr>
+          <a:xfrm>
+            <a:off x="7799832" y="5001768"/>
+            <a:ext cx="3145536" cy="502920"/>
           </a:xfrm>
           <a:prstGeom prst="rect">
             <a:avLst/>
@@ -4367,7 +4540,7 @@
                 <a:ea typeface="Aptos" pitchFamily="34" charset="-122"/>
                 <a:cs typeface="Aptos" pitchFamily="34" charset="-120"/>
               </a:rPr>
-              <a:t>Connect the concept to public health decisions, safeguards, documentation, or implementation work.</a:t>
+              <a:t>Connect the concept to public health purpose, responsible use, required safeguards, documentation, and the next action a department should take.</a:t>
             </a:r>
             <a:endParaRPr lang="en-US" sz="1550" dirty="0"/>
           </a:p>
@@ -4541,8 +4714,8 @@
         </p:nvSpPr>
         <p:spPr>
           <a:xfrm>
-            <a:off x="9966960" y="6537960"/>
-            <a:ext cx="1645920" cy="201168"/>
+            <a:off x="9646920" y="6537960"/>
+            <a:ext cx="1965960" cy="201168"/>
           </a:xfrm>
           <a:prstGeom prst="rect">
             <a:avLst/>
@@ -4566,7 +4739,7 @@
                 <a:ea typeface="Aptos" pitchFamily="34" charset="-122"/>
                 <a:cs typeface="Aptos" pitchFamily="34" charset="-120"/>
               </a:rPr>
-              <a:t>Â© Paula Soper</a:t>
+              <a:t>Copyright Paula Soper</a:t>
             </a:r>
             <a:endParaRPr lang="en-US" sz="800" dirty="0"/>
           </a:p>
@@ -4613,77 +4786,13 @@
       </p:sp>
       <p:sp>
         <p:nvSpPr>
-          <p:cNvPr id="8" name="Shape 6"/>
+          <p:cNvPr id="8" name="Text 6"/>
           <p:cNvSpPr/>
           <p:nvPr/>
         </p:nvSpPr>
         <p:spPr>
           <a:xfrm>
             <a:off x="640080" y="658368"/>
-            <a:ext cx="420624" cy="420624"/>
-          </a:xfrm>
-          <a:prstGeom prst="ellipse">
-            <a:avLst/>
-          </a:prstGeom>
-          <a:solidFill>
-            <a:srgbClr val="0068B7"/>
-          </a:solidFill>
-          <a:ln w="12700">
-            <a:solidFill>
-              <a:srgbClr val="0068B7"/>
-            </a:solidFill>
-            <a:prstDash val="solid"/>
-          </a:ln>
-        </p:spPr>
-      </p:sp>
-      <p:sp>
-        <p:nvSpPr>
-          <p:cNvPr id="9" name="Text 7"/>
-          <p:cNvSpPr/>
-          <p:nvPr/>
-        </p:nvSpPr>
-        <p:spPr>
-          <a:xfrm>
-            <a:off x="640080" y="731520"/>
-            <a:ext cx="420624" cy="164592"/>
-          </a:xfrm>
-          <a:prstGeom prst="rect">
-            <a:avLst/>
-          </a:prstGeom>
-          <a:noFill/>
-          <a:ln/>
-        </p:spPr>
-        <p:txBody>
-          <a:bodyPr wrap="square" lIns="0" tIns="0" rIns="0" bIns="0" rtlCol="0" anchor="ctr"/>
-          <a:lstStyle/>
-          <a:p>
-            <a:pPr algn="ctr" indent="0" marL="0">
-              <a:buNone/>
-            </a:pPr>
-            <a:r>
-              <a:rPr lang="en-US" sz="1100" b="1" dirty="0">
-                <a:solidFill>
-                  <a:srgbClr val="FFFFFF"/>
-                </a:solidFill>
-                <a:latin typeface="Aptos" pitchFamily="34" charset="0"/>
-                <a:ea typeface="Aptos" pitchFamily="34" charset="-122"/>
-                <a:cs typeface="Aptos" pitchFamily="34" charset="-120"/>
-              </a:rPr>
-              <a:t>7</a:t>
-            </a:r>
-            <a:endParaRPr lang="en-US" sz="1100" dirty="0"/>
-          </a:p>
-        </p:txBody>
-      </p:sp>
-      <p:sp>
-        <p:nvSpPr>
-          <p:cNvPr id="10" name="Text 8"/>
-          <p:cNvSpPr/>
-          <p:nvPr/>
-        </p:nvSpPr>
-        <p:spPr>
-          <a:xfrm>
-            <a:off x="640080" y="621792"/>
             <a:ext cx="10881360" cy="713232"/>
           </a:xfrm>
           <a:prstGeom prst="rect">
@@ -4718,14 +4827,14 @@
       </p:sp>
       <p:sp>
         <p:nvSpPr>
-          <p:cNvPr id="11" name="Text 9"/>
+          <p:cNvPr id="9" name="Text 7"/>
           <p:cNvSpPr/>
           <p:nvPr/>
         </p:nvSpPr>
         <p:spPr>
           <a:xfrm>
             <a:off x="868680" y="1508760"/>
-            <a:ext cx="6537960" cy="4160520"/>
+            <a:ext cx="6309360" cy="4160520"/>
           </a:xfrm>
           <a:prstGeom prst="rect">
             <a:avLst/>
@@ -4784,18 +4893,18 @@
       </p:sp>
       <p:sp>
         <p:nvSpPr>
-          <p:cNvPr id="12" name="Shape 10"/>
-          <p:cNvSpPr/>
-          <p:nvPr/>
-        </p:nvSpPr>
-        <p:spPr>
-          <a:xfrm>
-            <a:off x="7909560" y="1417320"/>
-            <a:ext cx="3154680" cy="1828800"/>
+          <p:cNvPr id="10" name="Shape 8"/>
+          <p:cNvSpPr/>
+          <p:nvPr/>
+        </p:nvSpPr>
+        <p:spPr>
+          <a:xfrm>
+            <a:off x="7635240" y="1325880"/>
+            <a:ext cx="3474720" cy="1325880"/>
           </a:xfrm>
           <a:prstGeom prst="roundRect">
             <a:avLst>
-              <a:gd name="adj" fmla="val 6000"/>
+              <a:gd name="adj" fmla="val 8276"/>
             </a:avLst>
           </a:prstGeom>
           <a:solidFill>
@@ -4811,14 +4920,14 @@
       </p:sp>
       <p:sp>
         <p:nvSpPr>
-          <p:cNvPr id="13" name="Text 11"/>
-          <p:cNvSpPr/>
-          <p:nvPr/>
-        </p:nvSpPr>
-        <p:spPr>
-          <a:xfrm>
-            <a:off x="8074152" y="1563624"/>
-            <a:ext cx="2825496" cy="256032"/>
+          <p:cNvPr id="11" name="Text 9"/>
+          <p:cNvSpPr/>
+          <p:nvPr/>
+        </p:nvSpPr>
+        <p:spPr>
+          <a:xfrm>
+            <a:off x="7799832" y="1472184"/>
+            <a:ext cx="3145536" cy="256032"/>
           </a:xfrm>
           <a:prstGeom prst="rect">
             <a:avLst/>
@@ -4842,7 +4951,7 @@
                 <a:ea typeface="Aptos" pitchFamily="34" charset="-122"/>
                 <a:cs typeface="Aptos" pitchFamily="34" charset="-120"/>
               </a:rPr>
-              <a:t>Key idea</a:t>
+              <a:t>Core concept</a:t>
             </a:r>
             <a:endParaRPr lang="en-US" sz="1300" dirty="0"/>
           </a:p>
@@ -4850,14 +4959,14 @@
       </p:sp>
       <p:sp>
         <p:nvSpPr>
-          <p:cNvPr id="14" name="Text 12"/>
-          <p:cNvSpPr/>
-          <p:nvPr/>
-        </p:nvSpPr>
-        <p:spPr>
-          <a:xfrm>
-            <a:off x="8074152" y="1920240"/>
-            <a:ext cx="2825496" cy="1188720"/>
+          <p:cNvPr id="12" name="Text 10"/>
+          <p:cNvSpPr/>
+          <p:nvPr/>
+        </p:nvSpPr>
+        <p:spPr>
+          <a:xfrm>
+            <a:off x="7799832" y="1828800"/>
+            <a:ext cx="3145536" cy="685800"/>
           </a:xfrm>
           <a:prstGeom prst="rect">
             <a:avLst/>
@@ -4891,18 +5000,159 @@
       </p:sp>
       <p:sp>
         <p:nvSpPr>
-          <p:cNvPr id="15" name="Shape 13"/>
-          <p:cNvSpPr/>
-          <p:nvPr/>
-        </p:nvSpPr>
-        <p:spPr>
-          <a:xfrm>
-            <a:off x="7909560" y="3520440"/>
-            <a:ext cx="3154680" cy="1737360"/>
+          <p:cNvPr id="13" name="Shape 11"/>
+          <p:cNvSpPr/>
+          <p:nvPr/>
+        </p:nvSpPr>
+        <p:spPr>
+          <a:xfrm>
+            <a:off x="7635240" y="2788920"/>
+            <a:ext cx="3474720" cy="1536192"/>
           </a:xfrm>
           <a:prstGeom prst="roundRect">
             <a:avLst>
-              <a:gd name="adj" fmla="val 6316"/>
+              <a:gd name="adj" fmla="val 7143"/>
+            </a:avLst>
+          </a:prstGeom>
+          <a:solidFill>
+            <a:srgbClr val="FFFFFF">
+              <a:alpha val="88000"/>
+            </a:srgbClr>
+          </a:solidFill>
+          <a:ln w="12700">
+            <a:solidFill>
+              <a:srgbClr val="D6E8F2"/>
+            </a:solidFill>
+            <a:prstDash val="solid"/>
+          </a:ln>
+        </p:spPr>
+      </p:sp>
+      <p:sp>
+        <p:nvSpPr>
+          <p:cNvPr id="14" name="Shape 12"/>
+          <p:cNvSpPr/>
+          <p:nvPr/>
+        </p:nvSpPr>
+        <p:spPr>
+          <a:xfrm>
+            <a:off x="8074152" y="3291840"/>
+            <a:ext cx="2596896" cy="749808"/>
+          </a:xfrm>
+          <a:prstGeom prst="rect">
+            <a:avLst/>
+          </a:prstGeom>
+          <a:solidFill>
+            <a:srgbClr val="EAF6F8"/>
+          </a:solidFill>
+          <a:ln w="12700">
+            <a:solidFill>
+              <a:srgbClr val="8ABBD8"/>
+            </a:solidFill>
+            <a:prstDash val="solid"/>
+          </a:ln>
+        </p:spPr>
+      </p:sp>
+      <p:sp>
+        <p:nvSpPr>
+          <p:cNvPr id="15" name="Shape 13"/>
+          <p:cNvSpPr/>
+          <p:nvPr/>
+        </p:nvSpPr>
+        <p:spPr>
+          <a:xfrm>
+            <a:off x="8202168" y="3721608"/>
+            <a:ext cx="2340864" cy="0"/>
+          </a:xfrm>
+          <a:prstGeom prst="line">
+            <a:avLst/>
+          </a:prstGeom>
+          <a:noFill/>
+          <a:ln w="19050">
+            <a:solidFill>
+              <a:srgbClr val="0068B7"/>
+            </a:solidFill>
+            <a:prstDash val="solid"/>
+          </a:ln>
+        </p:spPr>
+      </p:sp>
+      <p:sp>
+        <p:nvSpPr>
+          <p:cNvPr id="16" name="Shape 14"/>
+          <p:cNvSpPr/>
+          <p:nvPr/>
+        </p:nvSpPr>
+        <p:spPr>
+          <a:xfrm>
+            <a:off x="9198864" y="4206240"/>
+            <a:ext cx="347472" cy="347472"/>
+          </a:xfrm>
+          <a:prstGeom prst="ellipse">
+            <a:avLst/>
+          </a:prstGeom>
+          <a:solidFill>
+            <a:srgbClr val="2F8A28"/>
+          </a:solidFill>
+          <a:ln w="12700">
+            <a:solidFill>
+              <a:srgbClr val="2F8A28"/>
+            </a:solidFill>
+            <a:prstDash val="solid"/>
+          </a:ln>
+        </p:spPr>
+      </p:sp>
+      <p:sp>
+        <p:nvSpPr>
+          <p:cNvPr id="17" name="Text 15"/>
+          <p:cNvSpPr/>
+          <p:nvPr/>
+        </p:nvSpPr>
+        <p:spPr>
+          <a:xfrm>
+            <a:off x="7909560" y="3977640"/>
+            <a:ext cx="2926080" cy="182880"/>
+          </a:xfrm>
+          <a:prstGeom prst="rect">
+            <a:avLst/>
+          </a:prstGeom>
+          <a:noFill/>
+          <a:ln/>
+        </p:spPr>
+        <p:txBody>
+          <a:bodyPr wrap="square" lIns="0" tIns="0" rIns="0" bIns="0" rtlCol="0" anchor="ctr"/>
+          <a:lstStyle/>
+          <a:p>
+            <a:pPr algn="ctr" indent="0" marL="0">
+              <a:buNone/>
+            </a:pPr>
+            <a:r>
+              <a:rPr lang="en-US" sz="1000" dirty="0">
+                <a:solidFill>
+                  <a:srgbClr val="003A63"/>
+                </a:solidFill>
+                <a:latin typeface="Aptos" pitchFamily="34" charset="0"/>
+                <a:ea typeface="Aptos" pitchFamily="34" charset="-122"/>
+                <a:cs typeface="Aptos" pitchFamily="34" charset="-120"/>
+              </a:rPr>
+              <a:t>Concept to action</a:t>
+            </a:r>
+            <a:endParaRPr lang="en-US" sz="1000" dirty="0"/>
+          </a:p>
+        </p:txBody>
+      </p:sp>
+      <p:sp>
+        <p:nvSpPr>
+          <p:cNvPr id="18" name="Shape 16"/>
+          <p:cNvSpPr/>
+          <p:nvPr/>
+        </p:nvSpPr>
+        <p:spPr>
+          <a:xfrm>
+            <a:off x="7635240" y="4498848"/>
+            <a:ext cx="3474720" cy="1143000"/>
+          </a:xfrm>
+          <a:prstGeom prst="roundRect">
+            <a:avLst>
+              <a:gd name="adj" fmla="val 9600"/>
             </a:avLst>
           </a:prstGeom>
           <a:solidFill>
@@ -4918,14 +5168,14 @@
       </p:sp>
       <p:sp>
         <p:nvSpPr>
-          <p:cNvPr id="16" name="Text 14"/>
-          <p:cNvSpPr/>
-          <p:nvPr/>
-        </p:nvSpPr>
-        <p:spPr>
-          <a:xfrm>
-            <a:off x="8074152" y="3666744"/>
-            <a:ext cx="2825496" cy="256032"/>
+          <p:cNvPr id="19" name="Text 17"/>
+          <p:cNvSpPr/>
+          <p:nvPr/>
+        </p:nvSpPr>
+        <p:spPr>
+          <a:xfrm>
+            <a:off x="7799832" y="4645152"/>
+            <a:ext cx="3145536" cy="256032"/>
           </a:xfrm>
           <a:prstGeom prst="rect">
             <a:avLst/>
@@ -4949,7 +5199,7 @@
                 <a:ea typeface="Aptos" pitchFamily="34" charset="-122"/>
                 <a:cs typeface="Aptos" pitchFamily="34" charset="-120"/>
               </a:rPr>
-              <a:t>Use this for</a:t>
+              <a:t>Apply it</a:t>
             </a:r>
             <a:endParaRPr lang="en-US" sz="1300" dirty="0"/>
           </a:p>
@@ -4957,14 +5207,14 @@
       </p:sp>
       <p:sp>
         <p:nvSpPr>
-          <p:cNvPr id="17" name="Text 15"/>
-          <p:cNvSpPr/>
-          <p:nvPr/>
-        </p:nvSpPr>
-        <p:spPr>
-          <a:xfrm>
-            <a:off x="8074152" y="4023360"/>
-            <a:ext cx="2825496" cy="1097280"/>
+          <p:cNvPr id="20" name="Text 18"/>
+          <p:cNvSpPr/>
+          <p:nvPr/>
+        </p:nvSpPr>
+        <p:spPr>
+          <a:xfrm>
+            <a:off x="7799832" y="5001768"/>
+            <a:ext cx="3145536" cy="502920"/>
           </a:xfrm>
           <a:prstGeom prst="rect">
             <a:avLst/>
@@ -4990,7 +5240,7 @@
                 <a:ea typeface="Aptos" pitchFamily="34" charset="-122"/>
                 <a:cs typeface="Aptos" pitchFamily="34" charset="-120"/>
               </a:rPr>
-              <a:t>Connect the concept to public health decisions, safeguards, documentation, or implementation work.</a:t>
+              <a:t>Connect the concept to public health purpose, responsible use, required safeguards, documentation, and the next action a department should take.</a:t>
             </a:r>
             <a:endParaRPr lang="en-US" sz="1550" dirty="0"/>
           </a:p>
@@ -5164,8 +5414,8 @@
         </p:nvSpPr>
         <p:spPr>
           <a:xfrm>
-            <a:off x="9966960" y="6537960"/>
-            <a:ext cx="1645920" cy="201168"/>
+            <a:off x="9646920" y="6537960"/>
+            <a:ext cx="1965960" cy="201168"/>
           </a:xfrm>
           <a:prstGeom prst="rect">
             <a:avLst/>
@@ -5189,7 +5439,7 @@
                 <a:ea typeface="Aptos" pitchFamily="34" charset="-122"/>
                 <a:cs typeface="Aptos" pitchFamily="34" charset="-120"/>
               </a:rPr>
-              <a:t>Â© Paula Soper</a:t>
+              <a:t>Copyright Paula Soper</a:t>
             </a:r>
             <a:endParaRPr lang="en-US" sz="800" dirty="0"/>
           </a:p>
@@ -5236,77 +5486,13 @@
       </p:sp>
       <p:sp>
         <p:nvSpPr>
-          <p:cNvPr id="8" name="Shape 6"/>
+          <p:cNvPr id="8" name="Text 6"/>
           <p:cNvSpPr/>
           <p:nvPr/>
         </p:nvSpPr>
         <p:spPr>
           <a:xfrm>
             <a:off x="640080" y="658368"/>
-            <a:ext cx="420624" cy="420624"/>
-          </a:xfrm>
-          <a:prstGeom prst="ellipse">
-            <a:avLst/>
-          </a:prstGeom>
-          <a:solidFill>
-            <a:srgbClr val="0068B7"/>
-          </a:solidFill>
-          <a:ln w="12700">
-            <a:solidFill>
-              <a:srgbClr val="0068B7"/>
-            </a:solidFill>
-            <a:prstDash val="solid"/>
-          </a:ln>
-        </p:spPr>
-      </p:sp>
-      <p:sp>
-        <p:nvSpPr>
-          <p:cNvPr id="9" name="Text 7"/>
-          <p:cNvSpPr/>
-          <p:nvPr/>
-        </p:nvSpPr>
-        <p:spPr>
-          <a:xfrm>
-            <a:off x="640080" y="731520"/>
-            <a:ext cx="420624" cy="164592"/>
-          </a:xfrm>
-          <a:prstGeom prst="rect">
-            <a:avLst/>
-          </a:prstGeom>
-          <a:noFill/>
-          <a:ln/>
-        </p:spPr>
-        <p:txBody>
-          <a:bodyPr wrap="square" lIns="0" tIns="0" rIns="0" bIns="0" rtlCol="0" anchor="ctr"/>
-          <a:lstStyle/>
-          <a:p>
-            <a:pPr algn="ctr" indent="0" marL="0">
-              <a:buNone/>
-            </a:pPr>
-            <a:r>
-              <a:rPr lang="en-US" sz="1100" b="1" dirty="0">
-                <a:solidFill>
-                  <a:srgbClr val="FFFFFF"/>
-                </a:solidFill>
-                <a:latin typeface="Aptos" pitchFamily="34" charset="0"/>
-                <a:ea typeface="Aptos" pitchFamily="34" charset="-122"/>
-                <a:cs typeface="Aptos" pitchFamily="34" charset="-120"/>
-              </a:rPr>
-              <a:t>8</a:t>
-            </a:r>
-            <a:endParaRPr lang="en-US" sz="1100" dirty="0"/>
-          </a:p>
-        </p:txBody>
-      </p:sp>
-      <p:sp>
-        <p:nvSpPr>
-          <p:cNvPr id="10" name="Text 8"/>
-          <p:cNvSpPr/>
-          <p:nvPr/>
-        </p:nvSpPr>
-        <p:spPr>
-          <a:xfrm>
-            <a:off x="640080" y="621792"/>
             <a:ext cx="10881360" cy="713232"/>
           </a:xfrm>
           <a:prstGeom prst="rect">
@@ -5341,14 +5527,14 @@
       </p:sp>
       <p:sp>
         <p:nvSpPr>
-          <p:cNvPr id="11" name="Text 9"/>
+          <p:cNvPr id="9" name="Text 7"/>
           <p:cNvSpPr/>
           <p:nvPr/>
         </p:nvSpPr>
         <p:spPr>
           <a:xfrm>
             <a:off x="868680" y="1508760"/>
-            <a:ext cx="6537960" cy="4160520"/>
+            <a:ext cx="6309360" cy="4160520"/>
           </a:xfrm>
           <a:prstGeom prst="rect">
             <a:avLst/>
@@ -5407,18 +5593,18 @@
       </p:sp>
       <p:sp>
         <p:nvSpPr>
-          <p:cNvPr id="12" name="Shape 10"/>
-          <p:cNvSpPr/>
-          <p:nvPr/>
-        </p:nvSpPr>
-        <p:spPr>
-          <a:xfrm>
-            <a:off x="7909560" y="1417320"/>
-            <a:ext cx="3154680" cy="1828800"/>
+          <p:cNvPr id="10" name="Shape 8"/>
+          <p:cNvSpPr/>
+          <p:nvPr/>
+        </p:nvSpPr>
+        <p:spPr>
+          <a:xfrm>
+            <a:off x="7635240" y="1325880"/>
+            <a:ext cx="3474720" cy="1325880"/>
           </a:xfrm>
           <a:prstGeom prst="roundRect">
             <a:avLst>
-              <a:gd name="adj" fmla="val 6000"/>
+              <a:gd name="adj" fmla="val 8276"/>
             </a:avLst>
           </a:prstGeom>
           <a:solidFill>
@@ -5434,14 +5620,14 @@
       </p:sp>
       <p:sp>
         <p:nvSpPr>
-          <p:cNvPr id="13" name="Text 11"/>
-          <p:cNvSpPr/>
-          <p:nvPr/>
-        </p:nvSpPr>
-        <p:spPr>
-          <a:xfrm>
-            <a:off x="8074152" y="1563624"/>
-            <a:ext cx="2825496" cy="256032"/>
+          <p:cNvPr id="11" name="Text 9"/>
+          <p:cNvSpPr/>
+          <p:nvPr/>
+        </p:nvSpPr>
+        <p:spPr>
+          <a:xfrm>
+            <a:off x="7799832" y="1472184"/>
+            <a:ext cx="3145536" cy="256032"/>
           </a:xfrm>
           <a:prstGeom prst="rect">
             <a:avLst/>
@@ -5465,7 +5651,7 @@
                 <a:ea typeface="Aptos" pitchFamily="34" charset="-122"/>
                 <a:cs typeface="Aptos" pitchFamily="34" charset="-120"/>
               </a:rPr>
-              <a:t>Key idea</a:t>
+              <a:t>Risk check</a:t>
             </a:r>
             <a:endParaRPr lang="en-US" sz="1300" dirty="0"/>
           </a:p>
@@ -5473,14 +5659,14 @@
       </p:sp>
       <p:sp>
         <p:nvSpPr>
-          <p:cNvPr id="14" name="Text 12"/>
-          <p:cNvSpPr/>
-          <p:nvPr/>
-        </p:nvSpPr>
-        <p:spPr>
-          <a:xfrm>
-            <a:off x="8074152" y="1920240"/>
-            <a:ext cx="2825496" cy="1188720"/>
+          <p:cNvPr id="12" name="Text 10"/>
+          <p:cNvSpPr/>
+          <p:nvPr/>
+        </p:nvSpPr>
+        <p:spPr>
+          <a:xfrm>
+            <a:off x="7799832" y="1828800"/>
+            <a:ext cx="3145536" cy="685800"/>
           </a:xfrm>
           <a:prstGeom prst="rect">
             <a:avLst/>
@@ -5514,18 +5700,171 @@
       </p:sp>
       <p:sp>
         <p:nvSpPr>
-          <p:cNvPr id="15" name="Shape 13"/>
-          <p:cNvSpPr/>
-          <p:nvPr/>
-        </p:nvSpPr>
-        <p:spPr>
-          <a:xfrm>
-            <a:off x="7909560" y="3520440"/>
-            <a:ext cx="3154680" cy="1737360"/>
+          <p:cNvPr id="13" name="Shape 11"/>
+          <p:cNvSpPr/>
+          <p:nvPr/>
+        </p:nvSpPr>
+        <p:spPr>
+          <a:xfrm>
+            <a:off x="7635240" y="2788920"/>
+            <a:ext cx="3474720" cy="1536192"/>
           </a:xfrm>
           <a:prstGeom prst="roundRect">
             <a:avLst>
-              <a:gd name="adj" fmla="val 6316"/>
+              <a:gd name="adj" fmla="val 7143"/>
+            </a:avLst>
+          </a:prstGeom>
+          <a:solidFill>
+            <a:srgbClr val="FFFFFF">
+              <a:alpha val="88000"/>
+            </a:srgbClr>
+          </a:solidFill>
+          <a:ln w="12700">
+            <a:solidFill>
+              <a:srgbClr val="D6E8F2"/>
+            </a:solidFill>
+            <a:prstDash val="solid"/>
+          </a:ln>
+        </p:spPr>
+      </p:sp>
+      <p:sp>
+        <p:nvSpPr>
+          <p:cNvPr id="14" name="Shape 12"/>
+          <p:cNvSpPr/>
+          <p:nvPr/>
+        </p:nvSpPr>
+        <p:spPr>
+          <a:xfrm>
+            <a:off x="8046720" y="3108960"/>
+            <a:ext cx="2651760" cy="896112"/>
+          </a:xfrm>
+          <a:prstGeom prst="arc">
+            <a:avLst/>
+          </a:prstGeom>
+          <a:noFill/>
+          <a:ln w="25400">
+            <a:solidFill>
+              <a:srgbClr val="0068B7"/>
+            </a:solidFill>
+            <a:prstDash val="solid"/>
+          </a:ln>
+        </p:spPr>
+      </p:sp>
+      <p:sp>
+        <p:nvSpPr>
+          <p:cNvPr id="15" name="Text 13"/>
+          <p:cNvSpPr/>
+          <p:nvPr/>
+        </p:nvSpPr>
+        <p:spPr>
+          <a:xfrm>
+            <a:off x="7909560" y="3099816"/>
+            <a:ext cx="2926080" cy="256032"/>
+          </a:xfrm>
+          <a:prstGeom prst="rect">
+            <a:avLst/>
+          </a:prstGeom>
+          <a:noFill/>
+          <a:ln/>
+        </p:spPr>
+        <p:txBody>
+          <a:bodyPr wrap="square" lIns="0" tIns="0" rIns="0" bIns="0" rtlCol="0" anchor="ctr"/>
+          <a:lstStyle/>
+          <a:p>
+            <a:pPr algn="ctr" indent="0" marL="0">
+              <a:buNone/>
+            </a:pPr>
+            <a:r>
+              <a:rPr lang="en-US" sz="1500" b="1" dirty="0">
+                <a:solidFill>
+                  <a:srgbClr val="003A63"/>
+                </a:solidFill>
+                <a:latin typeface="Aptos" pitchFamily="34" charset="0"/>
+                <a:ea typeface="Aptos" pitchFamily="34" charset="-122"/>
+                <a:cs typeface="Aptos" pitchFamily="34" charset="-120"/>
+              </a:rPr>
+              <a:t>Risk</a:t>
+            </a:r>
+            <a:endParaRPr lang="en-US" sz="1500" dirty="0"/>
+          </a:p>
+        </p:txBody>
+      </p:sp>
+      <p:sp>
+        <p:nvSpPr>
+          <p:cNvPr id="16" name="Shape 14"/>
+          <p:cNvSpPr/>
+          <p:nvPr/>
+        </p:nvSpPr>
+        <p:spPr>
+          <a:xfrm>
+            <a:off x="8366760" y="3639312"/>
+            <a:ext cx="2011680" cy="0"/>
+          </a:xfrm>
+          <a:prstGeom prst="line">
+            <a:avLst/>
+          </a:prstGeom>
+          <a:noFill/>
+          <a:ln w="63500">
+            <a:solidFill>
+              <a:srgbClr val="2F8A28"/>
+            </a:solidFill>
+            <a:prstDash val="solid"/>
+          </a:ln>
+        </p:spPr>
+      </p:sp>
+      <p:sp>
+        <p:nvSpPr>
+          <p:cNvPr id="17" name="Text 15"/>
+          <p:cNvSpPr/>
+          <p:nvPr/>
+        </p:nvSpPr>
+        <p:spPr>
+          <a:xfrm>
+            <a:off x="7909560" y="3849624"/>
+            <a:ext cx="2926080" cy="164592"/>
+          </a:xfrm>
+          <a:prstGeom prst="rect">
+            <a:avLst/>
+          </a:prstGeom>
+          <a:noFill/>
+          <a:ln/>
+        </p:spPr>
+        <p:txBody>
+          <a:bodyPr wrap="square" lIns="0" tIns="0" rIns="0" bIns="0" rtlCol="0" anchor="ctr"/>
+          <a:lstStyle/>
+          <a:p>
+            <a:pPr algn="ctr" indent="0" marL="0">
+              <a:buNone/>
+            </a:pPr>
+            <a:r>
+              <a:rPr lang="en-US" sz="900" dirty="0">
+                <a:solidFill>
+                  <a:srgbClr val="003A63"/>
+                </a:solidFill>
+                <a:latin typeface="Aptos" pitchFamily="34" charset="0"/>
+                <a:ea typeface="Aptos" pitchFamily="34" charset="-122"/>
+                <a:cs typeface="Aptos" pitchFamily="34" charset="-120"/>
+              </a:rPr>
+              <a:t>Human review</a:t>
+            </a:r>
+            <a:endParaRPr lang="en-US" sz="900" dirty="0"/>
+          </a:p>
+        </p:txBody>
+      </p:sp>
+      <p:sp>
+        <p:nvSpPr>
+          <p:cNvPr id="18" name="Shape 16"/>
+          <p:cNvSpPr/>
+          <p:nvPr/>
+        </p:nvSpPr>
+        <p:spPr>
+          <a:xfrm>
+            <a:off x="7635240" y="4498848"/>
+            <a:ext cx="3474720" cy="1143000"/>
+          </a:xfrm>
+          <a:prstGeom prst="roundRect">
+            <a:avLst>
+              <a:gd name="adj" fmla="val 9600"/>
             </a:avLst>
           </a:prstGeom>
           <a:solidFill>
@@ -5541,14 +5880,14 @@
       </p:sp>
       <p:sp>
         <p:nvSpPr>
-          <p:cNvPr id="16" name="Text 14"/>
-          <p:cNvSpPr/>
-          <p:nvPr/>
-        </p:nvSpPr>
-        <p:spPr>
-          <a:xfrm>
-            <a:off x="8074152" y="3666744"/>
-            <a:ext cx="2825496" cy="256032"/>
+          <p:cNvPr id="19" name="Text 17"/>
+          <p:cNvSpPr/>
+          <p:nvPr/>
+        </p:nvSpPr>
+        <p:spPr>
+          <a:xfrm>
+            <a:off x="7799832" y="4645152"/>
+            <a:ext cx="3145536" cy="256032"/>
           </a:xfrm>
           <a:prstGeom prst="rect">
             <a:avLst/>
@@ -5572,7 +5911,7 @@
                 <a:ea typeface="Aptos" pitchFamily="34" charset="-122"/>
                 <a:cs typeface="Aptos" pitchFamily="34" charset="-120"/>
               </a:rPr>
-              <a:t>Use this for</a:t>
+              <a:t>Safeguard to plan</a:t>
             </a:r>
             <a:endParaRPr lang="en-US" sz="1300" dirty="0"/>
           </a:p>
@@ -5580,14 +5919,14 @@
       </p:sp>
       <p:sp>
         <p:nvSpPr>
-          <p:cNvPr id="17" name="Text 15"/>
-          <p:cNvSpPr/>
-          <p:nvPr/>
-        </p:nvSpPr>
-        <p:spPr>
-          <a:xfrm>
-            <a:off x="8074152" y="4023360"/>
-            <a:ext cx="2825496" cy="1097280"/>
+          <p:cNvPr id="20" name="Text 18"/>
+          <p:cNvSpPr/>
+          <p:nvPr/>
+        </p:nvSpPr>
+        <p:spPr>
+          <a:xfrm>
+            <a:off x="7799832" y="5001768"/>
+            <a:ext cx="3145536" cy="502920"/>
           </a:xfrm>
           <a:prstGeom prst="rect">
             <a:avLst/>
@@ -5613,7 +5952,7 @@
                 <a:ea typeface="Aptos" pitchFamily="34" charset="-122"/>
                 <a:cs typeface="Aptos" pitchFamily="34" charset="-120"/>
               </a:rPr>
-              <a:t>Connect the concept to public health decisions, safeguards, documentation, or implementation work.</a:t>
+              <a:t>Identify what could go wrong, who could be affected, what safeguards are needed, and what evidence should be reviewed before use expands.</a:t>
             </a:r>
             <a:endParaRPr lang="en-US" sz="1550" dirty="0"/>
           </a:p>
@@ -5787,8 +6126,8 @@
         </p:nvSpPr>
         <p:spPr>
           <a:xfrm>
-            <a:off x="9966960" y="6537960"/>
-            <a:ext cx="1645920" cy="201168"/>
+            <a:off x="9646920" y="6537960"/>
+            <a:ext cx="1965960" cy="201168"/>
           </a:xfrm>
           <a:prstGeom prst="rect">
             <a:avLst/>
@@ -5812,7 +6151,7 @@
                 <a:ea typeface="Aptos" pitchFamily="34" charset="-122"/>
                 <a:cs typeface="Aptos" pitchFamily="34" charset="-120"/>
               </a:rPr>
-              <a:t>Â© Paula Soper</a:t>
+              <a:t>Copyright Paula Soper</a:t>
             </a:r>
             <a:endParaRPr lang="en-US" sz="800" dirty="0"/>
           </a:p>
@@ -5859,17 +6198,262 @@
       </p:sp>
       <p:sp>
         <p:nvSpPr>
-          <p:cNvPr id="8" name="Shape 6"/>
+          <p:cNvPr id="8" name="Text 6"/>
           <p:cNvSpPr/>
           <p:nvPr/>
         </p:nvSpPr>
         <p:spPr>
           <a:xfrm>
             <a:off x="640080" y="658368"/>
-            <a:ext cx="420624" cy="420624"/>
-          </a:xfrm>
-          <a:prstGeom prst="ellipse">
-            <a:avLst/>
+            <a:ext cx="10881360" cy="713232"/>
+          </a:xfrm>
+          <a:prstGeom prst="rect">
+            <a:avLst/>
+          </a:prstGeom>
+          <a:noFill/>
+          <a:ln/>
+        </p:spPr>
+        <p:txBody>
+          <a:bodyPr wrap="square" lIns="0" tIns="0" rIns="0" bIns="0" rtlCol="0" anchor="ctr">
+            <a:normAutofit/>
+          </a:bodyPr>
+          <a:lstStyle/>
+          <a:p>
+            <a:pPr indent="0" marL="0">
+              <a:buNone/>
+            </a:pPr>
+            <a:r>
+              <a:rPr lang="en-US" sz="3400" b="1" dirty="0">
+                <a:solidFill>
+                  <a:srgbClr val="003A63"/>
+                </a:solidFill>
+                <a:latin typeface="Aptos Display" pitchFamily="34" charset="0"/>
+                <a:ea typeface="Aptos Display" pitchFamily="34" charset="-122"/>
+                <a:cs typeface="Aptos Display" pitchFamily="34" charset="-120"/>
+              </a:rPr>
+              <a:t>Application to AI-Supported Workflows</a:t>
+            </a:r>
+            <a:endParaRPr lang="en-US" sz="3400" dirty="0"/>
+          </a:p>
+        </p:txBody>
+      </p:sp>
+      <p:sp>
+        <p:nvSpPr>
+          <p:cNvPr id="9" name="Text 7"/>
+          <p:cNvSpPr/>
+          <p:nvPr/>
+        </p:nvSpPr>
+        <p:spPr>
+          <a:xfrm>
+            <a:off x="868680" y="1508760"/>
+            <a:ext cx="6309360" cy="4160520"/>
+          </a:xfrm>
+          <a:prstGeom prst="rect">
+            <a:avLst/>
+          </a:prstGeom>
+          <a:noFill/>
+          <a:ln/>
+        </p:spPr>
+        <p:txBody>
+          <a:bodyPr wrap="square" lIns="635" tIns="635" rIns="635" bIns="635" rtlCol="0" anchor="t">
+            <a:normAutofit/>
+          </a:bodyPr>
+          <a:lstStyle/>
+          <a:p>
+            <a:r>
+              <a:rPr lang="en-US" sz="2100" dirty="0">
+                <a:solidFill>
+                  <a:srgbClr val="17364A"/>
+                </a:solidFill>
+                <a:latin typeface="Aptos" pitchFamily="34" charset="0"/>
+                <a:ea typeface="Aptos" pitchFamily="34" charset="-122"/>
+                <a:cs typeface="Aptos" pitchFamily="34" charset="-120"/>
+              </a:rPr>
+              <a:t>Generative AI may require integration with document repositories or systems of record so outputs can be.</a:t>
+            </a:r>
+            <a:endParaRPr lang="en-US" sz="2100" dirty="0"/>
+          </a:p>
+          <a:p>
+            <a:r>
+              <a:rPr lang="en-US" sz="2100" dirty="0">
+                <a:solidFill>
+                  <a:srgbClr val="17364A"/>
+                </a:solidFill>
+                <a:latin typeface="Aptos" pitchFamily="34" charset="0"/>
+                <a:ea typeface="Aptos" pitchFamily="34" charset="-122"/>
+                <a:cs typeface="Aptos" pitchFamily="34" charset="-120"/>
+              </a:rPr>
+              <a:t>Predictive models may require scheduled data feeds and monitoring dashboards.</a:t>
+            </a:r>
+            <a:endParaRPr lang="en-US" sz="2100" dirty="0"/>
+          </a:p>
+          <a:p>
+            <a:r>
+              <a:rPr lang="en-US" sz="2100" dirty="0">
+                <a:solidFill>
+                  <a:srgbClr val="17364A"/>
+                </a:solidFill>
+                <a:latin typeface="Aptos" pitchFamily="34" charset="0"/>
+                <a:ea typeface="Aptos" pitchFamily="34" charset="-122"/>
+                <a:cs typeface="Aptos" pitchFamily="34" charset="-120"/>
+              </a:rPr>
+              <a:t>Agentic workflows require the strongest integration controls because they may call tools, access data,.</a:t>
+            </a:r>
+            <a:endParaRPr lang="en-US" sz="2100" dirty="0"/>
+          </a:p>
+        </p:txBody>
+      </p:sp>
+      <p:sp>
+        <p:nvSpPr>
+          <p:cNvPr id="10" name="Shape 8"/>
+          <p:cNvSpPr/>
+          <p:nvPr/>
+        </p:nvSpPr>
+        <p:spPr>
+          <a:xfrm>
+            <a:off x="7635240" y="1325880"/>
+            <a:ext cx="3474720" cy="1325880"/>
+          </a:xfrm>
+          <a:prstGeom prst="roundRect">
+            <a:avLst>
+              <a:gd name="adj" fmla="val 8276"/>
+            </a:avLst>
+          </a:prstGeom>
+          <a:solidFill>
+            <a:srgbClr val="EEF8ED"/>
+          </a:solidFill>
+          <a:ln w="12700">
+            <a:solidFill>
+              <a:srgbClr val="B9D7E6"/>
+            </a:solidFill>
+            <a:prstDash val="solid"/>
+          </a:ln>
+        </p:spPr>
+      </p:sp>
+      <p:sp>
+        <p:nvSpPr>
+          <p:cNvPr id="11" name="Text 9"/>
+          <p:cNvSpPr/>
+          <p:nvPr/>
+        </p:nvSpPr>
+        <p:spPr>
+          <a:xfrm>
+            <a:off x="7799832" y="1472184"/>
+            <a:ext cx="3145536" cy="256032"/>
+          </a:xfrm>
+          <a:prstGeom prst="rect">
+            <a:avLst/>
+          </a:prstGeom>
+          <a:noFill/>
+          <a:ln/>
+        </p:spPr>
+        <p:txBody>
+          <a:bodyPr wrap="square" lIns="0" tIns="0" rIns="0" bIns="0" rtlCol="0" anchor="ctr"/>
+          <a:lstStyle/>
+          <a:p>
+            <a:pPr indent="0" marL="0">
+              <a:buNone/>
+            </a:pPr>
+            <a:r>
+              <a:rPr lang="en-US" sz="1300" b="1" dirty="0">
+                <a:solidFill>
+                  <a:srgbClr val="0068B7"/>
+                </a:solidFill>
+                <a:latin typeface="Aptos" pitchFamily="34" charset="0"/>
+                <a:ea typeface="Aptos" pitchFamily="34" charset="-122"/>
+                <a:cs typeface="Aptos" pitchFamily="34" charset="-120"/>
+              </a:rPr>
+              <a:t>Implementation cue</a:t>
+            </a:r>
+            <a:endParaRPr lang="en-US" sz="1300" dirty="0"/>
+          </a:p>
+        </p:txBody>
+      </p:sp>
+      <p:sp>
+        <p:nvSpPr>
+          <p:cNvPr id="12" name="Text 10"/>
+          <p:cNvSpPr/>
+          <p:nvPr/>
+        </p:nvSpPr>
+        <p:spPr>
+          <a:xfrm>
+            <a:off x="7799832" y="1828800"/>
+            <a:ext cx="3145536" cy="685800"/>
+          </a:xfrm>
+          <a:prstGeom prst="rect">
+            <a:avLst/>
+          </a:prstGeom>
+          <a:noFill/>
+          <a:ln/>
+        </p:spPr>
+        <p:txBody>
+          <a:bodyPr wrap="square" lIns="0" tIns="0" rIns="0" bIns="0" rtlCol="0" anchor="t">
+            <a:normAutofit/>
+          </a:bodyPr>
+          <a:lstStyle/>
+          <a:p>
+            <a:pPr indent="0" marL="0">
+              <a:buNone/>
+            </a:pPr>
+            <a:r>
+              <a:rPr lang="en-US" sz="1550" dirty="0">
+                <a:solidFill>
+                  <a:srgbClr val="17364A"/>
+                </a:solidFill>
+                <a:latin typeface="Aptos" pitchFamily="34" charset="0"/>
+                <a:ea typeface="Aptos" pitchFamily="34" charset="-122"/>
+                <a:cs typeface="Aptos" pitchFamily="34" charset="-120"/>
+              </a:rPr>
+              <a:t>Generative AI may require integration with document repositories or systems of record so outputs can be.</a:t>
+            </a:r>
+            <a:endParaRPr lang="en-US" sz="1550" dirty="0"/>
+          </a:p>
+        </p:txBody>
+      </p:sp>
+      <p:sp>
+        <p:nvSpPr>
+          <p:cNvPr id="13" name="Shape 11"/>
+          <p:cNvSpPr/>
+          <p:nvPr/>
+        </p:nvSpPr>
+        <p:spPr>
+          <a:xfrm>
+            <a:off x="7635240" y="2788920"/>
+            <a:ext cx="3474720" cy="1536192"/>
+          </a:xfrm>
+          <a:prstGeom prst="roundRect">
+            <a:avLst>
+              <a:gd name="adj" fmla="val 7143"/>
+            </a:avLst>
+          </a:prstGeom>
+          <a:solidFill>
+            <a:srgbClr val="FFFFFF">
+              <a:alpha val="88000"/>
+            </a:srgbClr>
+          </a:solidFill>
+          <a:ln w="12700">
+            <a:solidFill>
+              <a:srgbClr val="D6E8F2"/>
+            </a:solidFill>
+            <a:prstDash val="solid"/>
+          </a:ln>
+        </p:spPr>
+      </p:sp>
+      <p:sp>
+        <p:nvSpPr>
+          <p:cNvPr id="14" name="Shape 12"/>
+          <p:cNvSpPr/>
+          <p:nvPr/>
+        </p:nvSpPr>
+        <p:spPr>
+          <a:xfrm>
+            <a:off x="7927848" y="3319272"/>
+            <a:ext cx="792480" cy="749808"/>
+          </a:xfrm>
+          <a:prstGeom prst="roundRect">
+            <a:avLst>
+              <a:gd name="adj" fmla="val 14634"/>
+            </a:avLst>
           </a:prstGeom>
           <a:solidFill>
             <a:srgbClr val="0068B7"/>
@@ -5884,53 +6468,14 @@
       </p:sp>
       <p:sp>
         <p:nvSpPr>
-          <p:cNvPr id="9" name="Text 7"/>
-          <p:cNvSpPr/>
-          <p:nvPr/>
-        </p:nvSpPr>
-        <p:spPr>
-          <a:xfrm>
-            <a:off x="640080" y="731520"/>
-            <a:ext cx="420624" cy="164592"/>
-          </a:xfrm>
-          <a:prstGeom prst="rect">
-            <a:avLst/>
-          </a:prstGeom>
-          <a:noFill/>
-          <a:ln/>
-        </p:spPr>
-        <p:txBody>
-          <a:bodyPr wrap="square" lIns="0" tIns="0" rIns="0" bIns="0" rtlCol="0" anchor="ctr"/>
-          <a:lstStyle/>
-          <a:p>
-            <a:pPr algn="ctr" indent="0" marL="0">
-              <a:buNone/>
-            </a:pPr>
-            <a:r>
-              <a:rPr lang="en-US" sz="1100" b="1" dirty="0">
-                <a:solidFill>
-                  <a:srgbClr val="FFFFFF"/>
-                </a:solidFill>
-                <a:latin typeface="Aptos" pitchFamily="34" charset="0"/>
-                <a:ea typeface="Aptos" pitchFamily="34" charset="-122"/>
-                <a:cs typeface="Aptos" pitchFamily="34" charset="-120"/>
-              </a:rPr>
-              <a:t>9</a:t>
-            </a:r>
-            <a:endParaRPr lang="en-US" sz="1100" dirty="0"/>
-          </a:p>
-        </p:txBody>
-      </p:sp>
-      <p:sp>
-        <p:nvSpPr>
-          <p:cNvPr id="10" name="Text 8"/>
-          <p:cNvSpPr/>
-          <p:nvPr/>
-        </p:nvSpPr>
-        <p:spPr>
-          <a:xfrm>
-            <a:off x="640080" y="621792"/>
-            <a:ext cx="10881360" cy="713232"/>
+          <p:cNvPr id="15" name="Text 13"/>
+          <p:cNvSpPr/>
+          <p:nvPr/>
+        </p:nvSpPr>
+        <p:spPr>
+          <a:xfrm>
+            <a:off x="8001000" y="3511296"/>
+            <a:ext cx="646176" cy="310896"/>
           </a:xfrm>
           <a:prstGeom prst="rect">
             <a:avLst/>
@@ -5944,112 +6489,46 @@
           </a:bodyPr>
           <a:lstStyle/>
           <a:p>
-            <a:pPr indent="0" marL="0">
-              <a:buNone/>
-            </a:pPr>
-            <a:r>
-              <a:rPr lang="en-US" sz="3400" b="1" dirty="0">
-                <a:solidFill>
-                  <a:srgbClr val="003A63"/>
-                </a:solidFill>
-                <a:latin typeface="Aptos Display" pitchFamily="34" charset="0"/>
-                <a:ea typeface="Aptos Display" pitchFamily="34" charset="-122"/>
-                <a:cs typeface="Aptos Display" pitchFamily="34" charset="-120"/>
-              </a:rPr>
-              <a:t>Application to AI-Supported Workflows</a:t>
-            </a:r>
-            <a:endParaRPr lang="en-US" sz="3400" dirty="0"/>
-          </a:p>
-        </p:txBody>
-      </p:sp>
-      <p:sp>
-        <p:nvSpPr>
-          <p:cNvPr id="11" name="Text 9"/>
-          <p:cNvSpPr/>
-          <p:nvPr/>
-        </p:nvSpPr>
-        <p:spPr>
-          <a:xfrm>
-            <a:off x="868680" y="1508760"/>
-            <a:ext cx="6537960" cy="4160520"/>
-          </a:xfrm>
-          <a:prstGeom prst="rect">
-            <a:avLst/>
-          </a:prstGeom>
-          <a:noFill/>
-          <a:ln/>
-        </p:spPr>
-        <p:txBody>
-          <a:bodyPr wrap="square" lIns="635" tIns="635" rIns="635" bIns="635" rtlCol="0" anchor="t">
-            <a:normAutofit/>
-          </a:bodyPr>
-          <a:lstStyle/>
-          <a:p>
-            <a:r>
-              <a:rPr lang="en-US" sz="2100" dirty="0">
-                <a:solidFill>
-                  <a:srgbClr val="17364A"/>
-                </a:solidFill>
-                <a:latin typeface="Aptos" pitchFamily="34" charset="0"/>
-                <a:ea typeface="Aptos" pitchFamily="34" charset="-122"/>
-                <a:cs typeface="Aptos" pitchFamily="34" charset="-120"/>
-              </a:rPr>
-              <a:t>Generative AI may require integration with document repositories or systems of record so outputs can be.</a:t>
-            </a:r>
-            <a:endParaRPr lang="en-US" sz="2100" dirty="0"/>
-          </a:p>
-          <a:p>
-            <a:r>
-              <a:rPr lang="en-US" sz="2100" dirty="0">
-                <a:solidFill>
-                  <a:srgbClr val="17364A"/>
-                </a:solidFill>
-                <a:latin typeface="Aptos" pitchFamily="34" charset="0"/>
-                <a:ea typeface="Aptos" pitchFamily="34" charset="-122"/>
-                <a:cs typeface="Aptos" pitchFamily="34" charset="-120"/>
-              </a:rPr>
-              <a:t>Predictive models may require scheduled data feeds and monitoring dashboards.</a:t>
-            </a:r>
-            <a:endParaRPr lang="en-US" sz="2100" dirty="0"/>
-          </a:p>
-          <a:p>
-            <a:r>
-              <a:rPr lang="en-US" sz="2100" dirty="0">
-                <a:solidFill>
-                  <a:srgbClr val="17364A"/>
-                </a:solidFill>
-                <a:latin typeface="Aptos" pitchFamily="34" charset="0"/>
-                <a:ea typeface="Aptos" pitchFamily="34" charset="-122"/>
-                <a:cs typeface="Aptos" pitchFamily="34" charset="-120"/>
-              </a:rPr>
-              <a:t>Agentic workflows require the strongest integration controls because they may call tools, access data,.</a:t>
-            </a:r>
-            <a:endParaRPr lang="en-US" sz="2100" dirty="0"/>
-          </a:p>
-        </p:txBody>
-      </p:sp>
-      <p:sp>
-        <p:nvSpPr>
-          <p:cNvPr id="12" name="Shape 10"/>
-          <p:cNvSpPr/>
-          <p:nvPr/>
-        </p:nvSpPr>
-        <p:spPr>
-          <a:xfrm>
-            <a:off x="7909560" y="1417320"/>
-            <a:ext cx="3154680" cy="1828800"/>
+            <a:pPr algn="ctr" indent="0" marL="0">
+              <a:buNone/>
+            </a:pPr>
+            <a:r>
+              <a:rPr lang="en-US" sz="1500" b="1" dirty="0">
+                <a:solidFill>
+                  <a:srgbClr val="FFFFFF"/>
+                </a:solidFill>
+                <a:latin typeface="Aptos" pitchFamily="34" charset="0"/>
+                <a:ea typeface="Aptos" pitchFamily="34" charset="-122"/>
+                <a:cs typeface="Aptos" pitchFamily="34" charset="-120"/>
+              </a:rPr>
+              <a:t>Plan</a:t>
+            </a:r>
+            <a:endParaRPr lang="en-US" sz="1500" dirty="0"/>
+          </a:p>
+        </p:txBody>
+      </p:sp>
+      <p:sp>
+        <p:nvSpPr>
+          <p:cNvPr id="16" name="Shape 14"/>
+          <p:cNvSpPr/>
+          <p:nvPr/>
+        </p:nvSpPr>
+        <p:spPr>
+          <a:xfrm>
+            <a:off x="8976360" y="3319272"/>
+            <a:ext cx="792480" cy="749808"/>
           </a:xfrm>
           <a:prstGeom prst="roundRect">
             <a:avLst>
-              <a:gd name="adj" fmla="val 6000"/>
+              <a:gd name="adj" fmla="val 14634"/>
             </a:avLst>
           </a:prstGeom>
           <a:solidFill>
-            <a:srgbClr val="EEF8ED"/>
+            <a:srgbClr val="2F8A28"/>
           </a:solidFill>
           <a:ln w="12700">
             <a:solidFill>
-              <a:srgbClr val="B9D7E6"/>
+              <a:srgbClr val="2F8A28"/>
             </a:solidFill>
             <a:prstDash val="solid"/>
           </a:ln>
@@ -6057,98 +6536,189 @@
       </p:sp>
       <p:sp>
         <p:nvSpPr>
-          <p:cNvPr id="13" name="Text 11"/>
-          <p:cNvSpPr/>
-          <p:nvPr/>
-        </p:nvSpPr>
-        <p:spPr>
-          <a:xfrm>
-            <a:off x="8074152" y="1563624"/>
-            <a:ext cx="2825496" cy="256032"/>
-          </a:xfrm>
-          <a:prstGeom prst="rect">
-            <a:avLst/>
-          </a:prstGeom>
-          <a:noFill/>
-          <a:ln/>
-        </p:spPr>
-        <p:txBody>
-          <a:bodyPr wrap="square" lIns="0" tIns="0" rIns="0" bIns="0" rtlCol="0" anchor="ctr"/>
-          <a:lstStyle/>
-          <a:p>
-            <a:pPr indent="0" marL="0">
-              <a:buNone/>
-            </a:pPr>
-            <a:r>
-              <a:rPr lang="en-US" sz="1300" b="1" dirty="0">
-                <a:solidFill>
-                  <a:srgbClr val="0068B7"/>
-                </a:solidFill>
-                <a:latin typeface="Aptos" pitchFamily="34" charset="0"/>
-                <a:ea typeface="Aptos" pitchFamily="34" charset="-122"/>
-                <a:cs typeface="Aptos" pitchFamily="34" charset="-120"/>
-              </a:rPr>
-              <a:t>Key idea</a:t>
-            </a:r>
-            <a:endParaRPr lang="en-US" sz="1300" dirty="0"/>
-          </a:p>
-        </p:txBody>
-      </p:sp>
-      <p:sp>
-        <p:nvSpPr>
-          <p:cNvPr id="14" name="Text 12"/>
-          <p:cNvSpPr/>
-          <p:nvPr/>
-        </p:nvSpPr>
-        <p:spPr>
-          <a:xfrm>
-            <a:off x="8074152" y="1920240"/>
-            <a:ext cx="2825496" cy="1188720"/>
-          </a:xfrm>
-          <a:prstGeom prst="rect">
-            <a:avLst/>
-          </a:prstGeom>
-          <a:noFill/>
-          <a:ln/>
-        </p:spPr>
-        <p:txBody>
-          <a:bodyPr wrap="square" lIns="0" tIns="0" rIns="0" bIns="0" rtlCol="0" anchor="t">
+          <p:cNvPr id="17" name="Text 15"/>
+          <p:cNvSpPr/>
+          <p:nvPr/>
+        </p:nvSpPr>
+        <p:spPr>
+          <a:xfrm>
+            <a:off x="9049512" y="3511296"/>
+            <a:ext cx="646176" cy="310896"/>
+          </a:xfrm>
+          <a:prstGeom prst="rect">
+            <a:avLst/>
+          </a:prstGeom>
+          <a:noFill/>
+          <a:ln/>
+        </p:spPr>
+        <p:txBody>
+          <a:bodyPr wrap="square" lIns="0" tIns="0" rIns="0" bIns="0" rtlCol="0" anchor="ctr">
             <a:normAutofit/>
           </a:bodyPr>
           <a:lstStyle/>
           <a:p>
-            <a:pPr indent="0" marL="0">
-              <a:buNone/>
-            </a:pPr>
-            <a:r>
-              <a:rPr lang="en-US" sz="1550" dirty="0">
-                <a:solidFill>
-                  <a:srgbClr val="17364A"/>
-                </a:solidFill>
-                <a:latin typeface="Aptos" pitchFamily="34" charset="0"/>
-                <a:ea typeface="Aptos" pitchFamily="34" charset="-122"/>
-                <a:cs typeface="Aptos" pitchFamily="34" charset="-120"/>
-              </a:rPr>
-              <a:t>Generative AI may require integration with document repositories or systems of record so outputs can be.</a:t>
-            </a:r>
-            <a:endParaRPr lang="en-US" sz="1550" dirty="0"/>
-          </a:p>
-        </p:txBody>
-      </p:sp>
-      <p:sp>
-        <p:nvSpPr>
-          <p:cNvPr id="15" name="Shape 13"/>
-          <p:cNvSpPr/>
-          <p:nvPr/>
-        </p:nvSpPr>
-        <p:spPr>
-          <a:xfrm>
-            <a:off x="7909560" y="3520440"/>
-            <a:ext cx="3154680" cy="1737360"/>
+            <a:pPr algn="ctr" indent="0" marL="0">
+              <a:buNone/>
+            </a:pPr>
+            <a:r>
+              <a:rPr lang="en-US" sz="1500" b="1" dirty="0">
+                <a:solidFill>
+                  <a:srgbClr val="FFFFFF"/>
+                </a:solidFill>
+                <a:latin typeface="Aptos" pitchFamily="34" charset="0"/>
+                <a:ea typeface="Aptos" pitchFamily="34" charset="-122"/>
+                <a:cs typeface="Aptos" pitchFamily="34" charset="-120"/>
+              </a:rPr>
+              <a:t>Do</a:t>
+            </a:r>
+            <a:endParaRPr lang="en-US" sz="1500" dirty="0"/>
+          </a:p>
+        </p:txBody>
+      </p:sp>
+      <p:sp>
+        <p:nvSpPr>
+          <p:cNvPr id="18" name="Shape 16"/>
+          <p:cNvSpPr/>
+          <p:nvPr/>
+        </p:nvSpPr>
+        <p:spPr>
+          <a:xfrm>
+            <a:off x="10024872" y="3319272"/>
+            <a:ext cx="792480" cy="749808"/>
           </a:xfrm>
           <a:prstGeom prst="roundRect">
             <a:avLst>
-              <a:gd name="adj" fmla="val 6316"/>
+              <a:gd name="adj" fmla="val 14634"/>
+            </a:avLst>
+          </a:prstGeom>
+          <a:solidFill>
+            <a:srgbClr val="D69A2D"/>
+          </a:solidFill>
+          <a:ln w="12700">
+            <a:solidFill>
+              <a:srgbClr val="D69A2D"/>
+            </a:solidFill>
+            <a:prstDash val="solid"/>
+          </a:ln>
+        </p:spPr>
+      </p:sp>
+      <p:sp>
+        <p:nvSpPr>
+          <p:cNvPr id="19" name="Text 17"/>
+          <p:cNvSpPr/>
+          <p:nvPr/>
+        </p:nvSpPr>
+        <p:spPr>
+          <a:xfrm>
+            <a:off x="10098024" y="3511296"/>
+            <a:ext cx="646176" cy="310896"/>
+          </a:xfrm>
+          <a:prstGeom prst="rect">
+            <a:avLst/>
+          </a:prstGeom>
+          <a:noFill/>
+          <a:ln/>
+        </p:spPr>
+        <p:txBody>
+          <a:bodyPr wrap="square" lIns="0" tIns="0" rIns="0" bIns="0" rtlCol="0" anchor="ctr">
+            <a:normAutofit/>
+          </a:bodyPr>
+          <a:lstStyle/>
+          <a:p>
+            <a:pPr algn="ctr" indent="0" marL="0">
+              <a:buNone/>
+            </a:pPr>
+            <a:r>
+              <a:rPr lang="en-US" sz="1500" b="1" dirty="0">
+                <a:solidFill>
+                  <a:srgbClr val="FFFFFF"/>
+                </a:solidFill>
+                <a:latin typeface="Aptos" pitchFamily="34" charset="0"/>
+                <a:ea typeface="Aptos" pitchFamily="34" charset="-122"/>
+                <a:cs typeface="Aptos" pitchFamily="34" charset="-120"/>
+              </a:rPr>
+              <a:t>Review</a:t>
+            </a:r>
+            <a:endParaRPr lang="en-US" sz="1500" dirty="0"/>
+          </a:p>
+        </p:txBody>
+      </p:sp>
+      <p:sp>
+        <p:nvSpPr>
+          <p:cNvPr id="20" name="Shape 18"/>
+          <p:cNvSpPr/>
+          <p:nvPr/>
+        </p:nvSpPr>
+        <p:spPr>
+          <a:xfrm>
+            <a:off x="8293608" y="4389120"/>
+            <a:ext cx="2157984" cy="0"/>
+          </a:xfrm>
+          <a:prstGeom prst="line">
+            <a:avLst/>
+          </a:prstGeom>
+          <a:noFill/>
+          <a:ln w="25400">
+            <a:solidFill>
+              <a:srgbClr val="8ABBD8"/>
+            </a:solidFill>
+            <a:prstDash val="solid"/>
+          </a:ln>
+        </p:spPr>
+      </p:sp>
+      <p:sp>
+        <p:nvSpPr>
+          <p:cNvPr id="21" name="Text 19"/>
+          <p:cNvSpPr/>
+          <p:nvPr/>
+        </p:nvSpPr>
+        <p:spPr>
+          <a:xfrm>
+            <a:off x="7909560" y="3977640"/>
+            <a:ext cx="2926080" cy="182880"/>
+          </a:xfrm>
+          <a:prstGeom prst="rect">
+            <a:avLst/>
+          </a:prstGeom>
+          <a:noFill/>
+          <a:ln/>
+        </p:spPr>
+        <p:txBody>
+          <a:bodyPr wrap="square" lIns="0" tIns="0" rIns="0" bIns="0" rtlCol="0" anchor="ctr"/>
+          <a:lstStyle/>
+          <a:p>
+            <a:pPr algn="ctr" indent="0" marL="0">
+              <a:buNone/>
+            </a:pPr>
+            <a:r>
+              <a:rPr lang="en-US" sz="1000" dirty="0">
+                <a:solidFill>
+                  <a:srgbClr val="003A63"/>
+                </a:solidFill>
+                <a:latin typeface="Aptos" pitchFamily="34" charset="0"/>
+                <a:ea typeface="Aptos" pitchFamily="34" charset="-122"/>
+                <a:cs typeface="Aptos" pitchFamily="34" charset="-120"/>
+              </a:rPr>
+              <a:t>Dependencies visible</a:t>
+            </a:r>
+            <a:endParaRPr lang="en-US" sz="1000" dirty="0"/>
+          </a:p>
+        </p:txBody>
+      </p:sp>
+      <p:sp>
+        <p:nvSpPr>
+          <p:cNvPr id="22" name="Shape 20"/>
+          <p:cNvSpPr/>
+          <p:nvPr/>
+        </p:nvSpPr>
+        <p:spPr>
+          <a:xfrm>
+            <a:off x="7635240" y="4498848"/>
+            <a:ext cx="3474720" cy="1143000"/>
+          </a:xfrm>
+          <a:prstGeom prst="roundRect">
+            <a:avLst>
+              <a:gd name="adj" fmla="val 9600"/>
             </a:avLst>
           </a:prstGeom>
           <a:solidFill>
@@ -6164,14 +6734,14 @@
       </p:sp>
       <p:sp>
         <p:nvSpPr>
-          <p:cNvPr id="16" name="Text 14"/>
-          <p:cNvSpPr/>
-          <p:nvPr/>
-        </p:nvSpPr>
-        <p:spPr>
-          <a:xfrm>
-            <a:off x="8074152" y="3666744"/>
-            <a:ext cx="2825496" cy="256032"/>
+          <p:cNvPr id="23" name="Text 21"/>
+          <p:cNvSpPr/>
+          <p:nvPr/>
+        </p:nvSpPr>
+        <p:spPr>
+          <a:xfrm>
+            <a:off x="7799832" y="4645152"/>
+            <a:ext cx="3145536" cy="256032"/>
           </a:xfrm>
           <a:prstGeom prst="rect">
             <a:avLst/>
@@ -6195,7 +6765,7 @@
                 <a:ea typeface="Aptos" pitchFamily="34" charset="-122"/>
                 <a:cs typeface="Aptos" pitchFamily="34" charset="-120"/>
               </a:rPr>
-              <a:t>Use this for</a:t>
+              <a:t>Next action</a:t>
             </a:r>
             <a:endParaRPr lang="en-US" sz="1300" dirty="0"/>
           </a:p>
@@ -6203,14 +6773,14 @@
       </p:sp>
       <p:sp>
         <p:nvSpPr>
-          <p:cNvPr id="17" name="Text 15"/>
-          <p:cNvSpPr/>
-          <p:nvPr/>
-        </p:nvSpPr>
-        <p:spPr>
-          <a:xfrm>
-            <a:off x="8074152" y="4023360"/>
-            <a:ext cx="2825496" cy="1097280"/>
+          <p:cNvPr id="24" name="Text 22"/>
+          <p:cNvSpPr/>
+          <p:nvPr/>
+        </p:nvSpPr>
+        <p:spPr>
+          <a:xfrm>
+            <a:off x="7799832" y="5001768"/>
+            <a:ext cx="3145536" cy="502920"/>
           </a:xfrm>
           <a:prstGeom prst="rect">
             <a:avLst/>
@@ -6236,7 +6806,7 @@
                 <a:ea typeface="Aptos" pitchFamily="34" charset="-122"/>
                 <a:cs typeface="Aptos" pitchFamily="34" charset="-120"/>
               </a:rPr>
-              <a:t>Connect the concept to public health decisions, safeguards, documentation, or implementation work.</a:t>
+              <a:t>Use the concept to clarify workflow changes, dependencies, staffing, procurement requirements, training needs, and implementation checkpoints.</a:t>
             </a:r>
             <a:endParaRPr lang="en-US" sz="1550" dirty="0"/>
           </a:p>
@@ -6410,8 +6980,8 @@
         </p:nvSpPr>
         <p:spPr>
           <a:xfrm>
-            <a:off x="9966960" y="6537960"/>
-            <a:ext cx="1645920" cy="201168"/>
+            <a:off x="9646920" y="6537960"/>
+            <a:ext cx="1965960" cy="201168"/>
           </a:xfrm>
           <a:prstGeom prst="rect">
             <a:avLst/>
@@ -6435,7 +7005,7 @@
                 <a:ea typeface="Aptos" pitchFamily="34" charset="-122"/>
                 <a:cs typeface="Aptos" pitchFamily="34" charset="-120"/>
               </a:rPr>
-              <a:t>Â© Paula Soper</a:t>
+              <a:t>Copyright Paula Soper</a:t>
             </a:r>
             <a:endParaRPr lang="en-US" sz="800" dirty="0"/>
           </a:p>
@@ -6482,77 +7052,13 @@
       </p:sp>
       <p:sp>
         <p:nvSpPr>
-          <p:cNvPr id="8" name="Shape 6"/>
+          <p:cNvPr id="8" name="Text 6"/>
           <p:cNvSpPr/>
           <p:nvPr/>
         </p:nvSpPr>
         <p:spPr>
           <a:xfrm>
             <a:off x="640080" y="658368"/>
-            <a:ext cx="420624" cy="420624"/>
-          </a:xfrm>
-          <a:prstGeom prst="ellipse">
-            <a:avLst/>
-          </a:prstGeom>
-          <a:solidFill>
-            <a:srgbClr val="0068B7"/>
-          </a:solidFill>
-          <a:ln w="12700">
-            <a:solidFill>
-              <a:srgbClr val="0068B7"/>
-            </a:solidFill>
-            <a:prstDash val="solid"/>
-          </a:ln>
-        </p:spPr>
-      </p:sp>
-      <p:sp>
-        <p:nvSpPr>
-          <p:cNvPr id="9" name="Text 7"/>
-          <p:cNvSpPr/>
-          <p:nvPr/>
-        </p:nvSpPr>
-        <p:spPr>
-          <a:xfrm>
-            <a:off x="640080" y="731520"/>
-            <a:ext cx="420624" cy="164592"/>
-          </a:xfrm>
-          <a:prstGeom prst="rect">
-            <a:avLst/>
-          </a:prstGeom>
-          <a:noFill/>
-          <a:ln/>
-        </p:spPr>
-        <p:txBody>
-          <a:bodyPr wrap="square" lIns="0" tIns="0" rIns="0" bIns="0" rtlCol="0" anchor="ctr"/>
-          <a:lstStyle/>
-          <a:p>
-            <a:pPr algn="ctr" indent="0" marL="0">
-              <a:buNone/>
-            </a:pPr>
-            <a:r>
-              <a:rPr lang="en-US" sz="1100" b="1" dirty="0">
-                <a:solidFill>
-                  <a:srgbClr val="FFFFFF"/>
-                </a:solidFill>
-                <a:latin typeface="Aptos" pitchFamily="34" charset="0"/>
-                <a:ea typeface="Aptos" pitchFamily="34" charset="-122"/>
-                <a:cs typeface="Aptos" pitchFamily="34" charset="-120"/>
-              </a:rPr>
-              <a:t>10</a:t>
-            </a:r>
-            <a:endParaRPr lang="en-US" sz="1100" dirty="0"/>
-          </a:p>
-        </p:txBody>
-      </p:sp>
-      <p:sp>
-        <p:nvSpPr>
-          <p:cNvPr id="10" name="Text 8"/>
-          <p:cNvSpPr/>
-          <p:nvPr/>
-        </p:nvSpPr>
-        <p:spPr>
-          <a:xfrm>
-            <a:off x="640080" y="621792"/>
             <a:ext cx="10881360" cy="713232"/>
           </a:xfrm>
           <a:prstGeom prst="rect">
@@ -6587,14 +7093,14 @@
       </p:sp>
       <p:sp>
         <p:nvSpPr>
-          <p:cNvPr id="11" name="Text 9"/>
+          <p:cNvPr id="9" name="Text 7"/>
           <p:cNvSpPr/>
           <p:nvPr/>
         </p:nvSpPr>
         <p:spPr>
           <a:xfrm>
             <a:off x="868680" y="1508760"/>
-            <a:ext cx="6537960" cy="4160520"/>
+            <a:ext cx="6309360" cy="4160520"/>
           </a:xfrm>
           <a:prstGeom prst="rect">
             <a:avLst/>
@@ -6653,18 +7159,18 @@
       </p:sp>
       <p:sp>
         <p:nvSpPr>
-          <p:cNvPr id="12" name="Shape 10"/>
-          <p:cNvSpPr/>
-          <p:nvPr/>
-        </p:nvSpPr>
-        <p:spPr>
-          <a:xfrm>
-            <a:off x="7909560" y="1417320"/>
-            <a:ext cx="3154680" cy="1828800"/>
+          <p:cNvPr id="10" name="Shape 8"/>
+          <p:cNvSpPr/>
+          <p:nvPr/>
+        </p:nvSpPr>
+        <p:spPr>
+          <a:xfrm>
+            <a:off x="7635240" y="1325880"/>
+            <a:ext cx="3474720" cy="1325880"/>
           </a:xfrm>
           <a:prstGeom prst="roundRect">
             <a:avLst>
-              <a:gd name="adj" fmla="val 6000"/>
+              <a:gd name="adj" fmla="val 8276"/>
             </a:avLst>
           </a:prstGeom>
           <a:solidFill>
@@ -6680,14 +7186,14 @@
       </p:sp>
       <p:sp>
         <p:nvSpPr>
-          <p:cNvPr id="13" name="Text 11"/>
-          <p:cNvSpPr/>
-          <p:nvPr/>
-        </p:nvSpPr>
-        <p:spPr>
-          <a:xfrm>
-            <a:off x="8074152" y="1563624"/>
-            <a:ext cx="2825496" cy="256032"/>
+          <p:cNvPr id="11" name="Text 9"/>
+          <p:cNvSpPr/>
+          <p:nvPr/>
+        </p:nvSpPr>
+        <p:spPr>
+          <a:xfrm>
+            <a:off x="7799832" y="1472184"/>
+            <a:ext cx="3145536" cy="256032"/>
           </a:xfrm>
           <a:prstGeom prst="rect">
             <a:avLst/>
@@ -6711,7 +7217,7 @@
                 <a:ea typeface="Aptos" pitchFamily="34" charset="-122"/>
                 <a:cs typeface="Aptos" pitchFamily="34" charset="-120"/>
               </a:rPr>
-              <a:t>Key idea</a:t>
+              <a:t>Core concept</a:t>
             </a:r>
             <a:endParaRPr lang="en-US" sz="1300" dirty="0"/>
           </a:p>
@@ -6719,14 +7225,14 @@
       </p:sp>
       <p:sp>
         <p:nvSpPr>
-          <p:cNvPr id="14" name="Text 12"/>
-          <p:cNvSpPr/>
-          <p:nvPr/>
-        </p:nvSpPr>
-        <p:spPr>
-          <a:xfrm>
-            <a:off x="8074152" y="1920240"/>
-            <a:ext cx="2825496" cy="1188720"/>
+          <p:cNvPr id="12" name="Text 10"/>
+          <p:cNvSpPr/>
+          <p:nvPr/>
+        </p:nvSpPr>
+        <p:spPr>
+          <a:xfrm>
+            <a:off x="7799832" y="1828800"/>
+            <a:ext cx="3145536" cy="685800"/>
           </a:xfrm>
           <a:prstGeom prst="rect">
             <a:avLst/>
@@ -6760,18 +7266,159 @@
       </p:sp>
       <p:sp>
         <p:nvSpPr>
-          <p:cNvPr id="15" name="Shape 13"/>
-          <p:cNvSpPr/>
-          <p:nvPr/>
-        </p:nvSpPr>
-        <p:spPr>
-          <a:xfrm>
-            <a:off x="7909560" y="3520440"/>
-            <a:ext cx="3154680" cy="1737360"/>
+          <p:cNvPr id="13" name="Shape 11"/>
+          <p:cNvSpPr/>
+          <p:nvPr/>
+        </p:nvSpPr>
+        <p:spPr>
+          <a:xfrm>
+            <a:off x="7635240" y="2788920"/>
+            <a:ext cx="3474720" cy="1536192"/>
           </a:xfrm>
           <a:prstGeom prst="roundRect">
             <a:avLst>
-              <a:gd name="adj" fmla="val 6316"/>
+              <a:gd name="adj" fmla="val 7143"/>
+            </a:avLst>
+          </a:prstGeom>
+          <a:solidFill>
+            <a:srgbClr val="FFFFFF">
+              <a:alpha val="88000"/>
+            </a:srgbClr>
+          </a:solidFill>
+          <a:ln w="12700">
+            <a:solidFill>
+              <a:srgbClr val="D6E8F2"/>
+            </a:solidFill>
+            <a:prstDash val="solid"/>
+          </a:ln>
+        </p:spPr>
+      </p:sp>
+      <p:sp>
+        <p:nvSpPr>
+          <p:cNvPr id="14" name="Shape 12"/>
+          <p:cNvSpPr/>
+          <p:nvPr/>
+        </p:nvSpPr>
+        <p:spPr>
+          <a:xfrm>
+            <a:off x="8074152" y="3291840"/>
+            <a:ext cx="2596896" cy="749808"/>
+          </a:xfrm>
+          <a:prstGeom prst="rect">
+            <a:avLst/>
+          </a:prstGeom>
+          <a:solidFill>
+            <a:srgbClr val="EAF6F8"/>
+          </a:solidFill>
+          <a:ln w="12700">
+            <a:solidFill>
+              <a:srgbClr val="8ABBD8"/>
+            </a:solidFill>
+            <a:prstDash val="solid"/>
+          </a:ln>
+        </p:spPr>
+      </p:sp>
+      <p:sp>
+        <p:nvSpPr>
+          <p:cNvPr id="15" name="Shape 13"/>
+          <p:cNvSpPr/>
+          <p:nvPr/>
+        </p:nvSpPr>
+        <p:spPr>
+          <a:xfrm>
+            <a:off x="8202168" y="3721608"/>
+            <a:ext cx="2340864" cy="0"/>
+          </a:xfrm>
+          <a:prstGeom prst="line">
+            <a:avLst/>
+          </a:prstGeom>
+          <a:noFill/>
+          <a:ln w="19050">
+            <a:solidFill>
+              <a:srgbClr val="0068B7"/>
+            </a:solidFill>
+            <a:prstDash val="solid"/>
+          </a:ln>
+        </p:spPr>
+      </p:sp>
+      <p:sp>
+        <p:nvSpPr>
+          <p:cNvPr id="16" name="Shape 14"/>
+          <p:cNvSpPr/>
+          <p:nvPr/>
+        </p:nvSpPr>
+        <p:spPr>
+          <a:xfrm>
+            <a:off x="9198864" y="4206240"/>
+            <a:ext cx="347472" cy="347472"/>
+          </a:xfrm>
+          <a:prstGeom prst="ellipse">
+            <a:avLst/>
+          </a:prstGeom>
+          <a:solidFill>
+            <a:srgbClr val="2F8A28"/>
+          </a:solidFill>
+          <a:ln w="12700">
+            <a:solidFill>
+              <a:srgbClr val="2F8A28"/>
+            </a:solidFill>
+            <a:prstDash val="solid"/>
+          </a:ln>
+        </p:spPr>
+      </p:sp>
+      <p:sp>
+        <p:nvSpPr>
+          <p:cNvPr id="17" name="Text 15"/>
+          <p:cNvSpPr/>
+          <p:nvPr/>
+        </p:nvSpPr>
+        <p:spPr>
+          <a:xfrm>
+            <a:off x="7909560" y="3977640"/>
+            <a:ext cx="2926080" cy="182880"/>
+          </a:xfrm>
+          <a:prstGeom prst="rect">
+            <a:avLst/>
+          </a:prstGeom>
+          <a:noFill/>
+          <a:ln/>
+        </p:spPr>
+        <p:txBody>
+          <a:bodyPr wrap="square" lIns="0" tIns="0" rIns="0" bIns="0" rtlCol="0" anchor="ctr"/>
+          <a:lstStyle/>
+          <a:p>
+            <a:pPr algn="ctr" indent="0" marL="0">
+              <a:buNone/>
+            </a:pPr>
+            <a:r>
+              <a:rPr lang="en-US" sz="1000" dirty="0">
+                <a:solidFill>
+                  <a:srgbClr val="003A63"/>
+                </a:solidFill>
+                <a:latin typeface="Aptos" pitchFamily="34" charset="0"/>
+                <a:ea typeface="Aptos" pitchFamily="34" charset="-122"/>
+                <a:cs typeface="Aptos" pitchFamily="34" charset="-120"/>
+              </a:rPr>
+              <a:t>Concept to action</a:t>
+            </a:r>
+            <a:endParaRPr lang="en-US" sz="1000" dirty="0"/>
+          </a:p>
+        </p:txBody>
+      </p:sp>
+      <p:sp>
+        <p:nvSpPr>
+          <p:cNvPr id="18" name="Shape 16"/>
+          <p:cNvSpPr/>
+          <p:nvPr/>
+        </p:nvSpPr>
+        <p:spPr>
+          <a:xfrm>
+            <a:off x="7635240" y="4498848"/>
+            <a:ext cx="3474720" cy="1143000"/>
+          </a:xfrm>
+          <a:prstGeom prst="roundRect">
+            <a:avLst>
+              <a:gd name="adj" fmla="val 9600"/>
             </a:avLst>
           </a:prstGeom>
           <a:solidFill>
@@ -6787,14 +7434,14 @@
       </p:sp>
       <p:sp>
         <p:nvSpPr>
-          <p:cNvPr id="16" name="Text 14"/>
-          <p:cNvSpPr/>
-          <p:nvPr/>
-        </p:nvSpPr>
-        <p:spPr>
-          <a:xfrm>
-            <a:off x="8074152" y="3666744"/>
-            <a:ext cx="2825496" cy="256032"/>
+          <p:cNvPr id="19" name="Text 17"/>
+          <p:cNvSpPr/>
+          <p:nvPr/>
+        </p:nvSpPr>
+        <p:spPr>
+          <a:xfrm>
+            <a:off x="7799832" y="4645152"/>
+            <a:ext cx="3145536" cy="256032"/>
           </a:xfrm>
           <a:prstGeom prst="rect">
             <a:avLst/>
@@ -6818,7 +7465,7 @@
                 <a:ea typeface="Aptos" pitchFamily="34" charset="-122"/>
                 <a:cs typeface="Aptos" pitchFamily="34" charset="-120"/>
               </a:rPr>
-              <a:t>Use this for</a:t>
+              <a:t>Apply it</a:t>
             </a:r>
             <a:endParaRPr lang="en-US" sz="1300" dirty="0"/>
           </a:p>
@@ -6826,14 +7473,14 @@
       </p:sp>
       <p:sp>
         <p:nvSpPr>
-          <p:cNvPr id="17" name="Text 15"/>
-          <p:cNvSpPr/>
-          <p:nvPr/>
-        </p:nvSpPr>
-        <p:spPr>
-          <a:xfrm>
-            <a:off x="8074152" y="4023360"/>
-            <a:ext cx="2825496" cy="1097280"/>
+          <p:cNvPr id="20" name="Text 18"/>
+          <p:cNvSpPr/>
+          <p:nvPr/>
+        </p:nvSpPr>
+        <p:spPr>
+          <a:xfrm>
+            <a:off x="7799832" y="5001768"/>
+            <a:ext cx="3145536" cy="502920"/>
           </a:xfrm>
           <a:prstGeom prst="rect">
             <a:avLst/>
@@ -6859,7 +7506,7 @@
                 <a:ea typeface="Aptos" pitchFamily="34" charset="-122"/>
                 <a:cs typeface="Aptos" pitchFamily="34" charset="-120"/>
               </a:rPr>
-              <a:t>Connect the concept to public health decisions, safeguards, documentation, or implementation work.</a:t>
+              <a:t>Connect the concept to public health purpose, responsible use, required safeguards, documentation, and the next action a department should take.</a:t>
             </a:r>
             <a:endParaRPr lang="en-US" sz="1550" dirty="0"/>
           </a:p>
@@ -7033,8 +7680,8 @@
         </p:nvSpPr>
         <p:spPr>
           <a:xfrm>
-            <a:off x="9966960" y="6537960"/>
-            <a:ext cx="1645920" cy="201168"/>
+            <a:off x="9646920" y="6537960"/>
+            <a:ext cx="1965960" cy="201168"/>
           </a:xfrm>
           <a:prstGeom prst="rect">
             <a:avLst/>
@@ -7058,7 +7705,7 @@
                 <a:ea typeface="Aptos" pitchFamily="34" charset="-122"/>
                 <a:cs typeface="Aptos" pitchFamily="34" charset="-120"/>
               </a:rPr>
-              <a:t>Â© Paula Soper</a:t>
+              <a:t>Copyright Paula Soper</a:t>
             </a:r>
             <a:endParaRPr lang="en-US" sz="800" dirty="0"/>
           </a:p>
@@ -7153,7 +7800,7 @@
         <p:spPr>
           <a:xfrm>
             <a:off x="868680" y="1508760"/>
-            <a:ext cx="6537960" cy="4160520"/>
+            <a:ext cx="6309360" cy="4160520"/>
           </a:xfrm>
           <a:prstGeom prst="rect">
             <a:avLst/>
@@ -7204,12 +7851,12 @@
         </p:nvSpPr>
         <p:spPr>
           <a:xfrm>
-            <a:off x="7909560" y="1417320"/>
-            <a:ext cx="3154680" cy="1828800"/>
+            <a:off x="7635240" y="1325880"/>
+            <a:ext cx="3474720" cy="1325880"/>
           </a:xfrm>
           <a:prstGeom prst="roundRect">
             <a:avLst>
-              <a:gd name="adj" fmla="val 6000"/>
+              <a:gd name="adj" fmla="val 8276"/>
             </a:avLst>
           </a:prstGeom>
           <a:solidFill>
@@ -7231,8 +7878,8 @@
         </p:nvSpPr>
         <p:spPr>
           <a:xfrm>
-            <a:off x="8074152" y="1563624"/>
-            <a:ext cx="2825496" cy="256032"/>
+            <a:off x="7799832" y="1472184"/>
+            <a:ext cx="3145536" cy="256032"/>
           </a:xfrm>
           <a:prstGeom prst="rect">
             <a:avLst/>
@@ -7256,7 +7903,7 @@
                 <a:ea typeface="Aptos" pitchFamily="34" charset="-122"/>
                 <a:cs typeface="Aptos" pitchFamily="34" charset="-120"/>
               </a:rPr>
-              <a:t>Key idea</a:t>
+              <a:t>Core concept</a:t>
             </a:r>
             <a:endParaRPr lang="en-US" sz="1300" dirty="0"/>
           </a:p>
@@ -7270,8 +7917,8 @@
         </p:nvSpPr>
         <p:spPr>
           <a:xfrm>
-            <a:off x="8074152" y="1920240"/>
-            <a:ext cx="2825496" cy="1188720"/>
+            <a:off x="7799832" y="1828800"/>
+            <a:ext cx="3145536" cy="685800"/>
           </a:xfrm>
           <a:prstGeom prst="rect">
             <a:avLst/>
@@ -7311,12 +7958,153 @@
         </p:nvSpPr>
         <p:spPr>
           <a:xfrm>
-            <a:off x="7909560" y="3520440"/>
-            <a:ext cx="3154680" cy="1737360"/>
+            <a:off x="7635240" y="2788920"/>
+            <a:ext cx="3474720" cy="1536192"/>
           </a:xfrm>
           <a:prstGeom prst="roundRect">
             <a:avLst>
-              <a:gd name="adj" fmla="val 6316"/>
+              <a:gd name="adj" fmla="val 7143"/>
+            </a:avLst>
+          </a:prstGeom>
+          <a:solidFill>
+            <a:srgbClr val="FFFFFF">
+              <a:alpha val="88000"/>
+            </a:srgbClr>
+          </a:solidFill>
+          <a:ln w="12700">
+            <a:solidFill>
+              <a:srgbClr val="D6E8F2"/>
+            </a:solidFill>
+            <a:prstDash val="solid"/>
+          </a:ln>
+        </p:spPr>
+      </p:sp>
+      <p:sp>
+        <p:nvSpPr>
+          <p:cNvPr id="14" name="Shape 12"/>
+          <p:cNvSpPr/>
+          <p:nvPr/>
+        </p:nvSpPr>
+        <p:spPr>
+          <a:xfrm>
+            <a:off x="8074152" y="3291840"/>
+            <a:ext cx="2596896" cy="749808"/>
+          </a:xfrm>
+          <a:prstGeom prst="rect">
+            <a:avLst/>
+          </a:prstGeom>
+          <a:solidFill>
+            <a:srgbClr val="EAF6F8"/>
+          </a:solidFill>
+          <a:ln w="12700">
+            <a:solidFill>
+              <a:srgbClr val="8ABBD8"/>
+            </a:solidFill>
+            <a:prstDash val="solid"/>
+          </a:ln>
+        </p:spPr>
+      </p:sp>
+      <p:sp>
+        <p:nvSpPr>
+          <p:cNvPr id="15" name="Shape 13"/>
+          <p:cNvSpPr/>
+          <p:nvPr/>
+        </p:nvSpPr>
+        <p:spPr>
+          <a:xfrm>
+            <a:off x="8202168" y="3721608"/>
+            <a:ext cx="2340864" cy="0"/>
+          </a:xfrm>
+          <a:prstGeom prst="line">
+            <a:avLst/>
+          </a:prstGeom>
+          <a:noFill/>
+          <a:ln w="19050">
+            <a:solidFill>
+              <a:srgbClr val="0068B7"/>
+            </a:solidFill>
+            <a:prstDash val="solid"/>
+          </a:ln>
+        </p:spPr>
+      </p:sp>
+      <p:sp>
+        <p:nvSpPr>
+          <p:cNvPr id="16" name="Shape 14"/>
+          <p:cNvSpPr/>
+          <p:nvPr/>
+        </p:nvSpPr>
+        <p:spPr>
+          <a:xfrm>
+            <a:off x="9198864" y="4206240"/>
+            <a:ext cx="347472" cy="347472"/>
+          </a:xfrm>
+          <a:prstGeom prst="ellipse">
+            <a:avLst/>
+          </a:prstGeom>
+          <a:solidFill>
+            <a:srgbClr val="2F8A28"/>
+          </a:solidFill>
+          <a:ln w="12700">
+            <a:solidFill>
+              <a:srgbClr val="2F8A28"/>
+            </a:solidFill>
+            <a:prstDash val="solid"/>
+          </a:ln>
+        </p:spPr>
+      </p:sp>
+      <p:sp>
+        <p:nvSpPr>
+          <p:cNvPr id="17" name="Text 15"/>
+          <p:cNvSpPr/>
+          <p:nvPr/>
+        </p:nvSpPr>
+        <p:spPr>
+          <a:xfrm>
+            <a:off x="7909560" y="3977640"/>
+            <a:ext cx="2926080" cy="182880"/>
+          </a:xfrm>
+          <a:prstGeom prst="rect">
+            <a:avLst/>
+          </a:prstGeom>
+          <a:noFill/>
+          <a:ln/>
+        </p:spPr>
+        <p:txBody>
+          <a:bodyPr wrap="square" lIns="0" tIns="0" rIns="0" bIns="0" rtlCol="0" anchor="ctr"/>
+          <a:lstStyle/>
+          <a:p>
+            <a:pPr algn="ctr" indent="0" marL="0">
+              <a:buNone/>
+            </a:pPr>
+            <a:r>
+              <a:rPr lang="en-US" sz="1000" dirty="0">
+                <a:solidFill>
+                  <a:srgbClr val="003A63"/>
+                </a:solidFill>
+                <a:latin typeface="Aptos" pitchFamily="34" charset="0"/>
+                <a:ea typeface="Aptos" pitchFamily="34" charset="-122"/>
+                <a:cs typeface="Aptos" pitchFamily="34" charset="-120"/>
+              </a:rPr>
+              <a:t>Concept to action</a:t>
+            </a:r>
+            <a:endParaRPr lang="en-US" sz="1000" dirty="0"/>
+          </a:p>
+        </p:txBody>
+      </p:sp>
+      <p:sp>
+        <p:nvSpPr>
+          <p:cNvPr id="18" name="Shape 16"/>
+          <p:cNvSpPr/>
+          <p:nvPr/>
+        </p:nvSpPr>
+        <p:spPr>
+          <a:xfrm>
+            <a:off x="7635240" y="4498848"/>
+            <a:ext cx="3474720" cy="1143000"/>
+          </a:xfrm>
+          <a:prstGeom prst="roundRect">
+            <a:avLst>
+              <a:gd name="adj" fmla="val 9600"/>
             </a:avLst>
           </a:prstGeom>
           <a:solidFill>
@@ -7332,14 +8120,14 @@
       </p:sp>
       <p:sp>
         <p:nvSpPr>
-          <p:cNvPr id="14" name="Text 12"/>
-          <p:cNvSpPr/>
-          <p:nvPr/>
-        </p:nvSpPr>
-        <p:spPr>
-          <a:xfrm>
-            <a:off x="8074152" y="3666744"/>
-            <a:ext cx="2825496" cy="256032"/>
+          <p:cNvPr id="19" name="Text 17"/>
+          <p:cNvSpPr/>
+          <p:nvPr/>
+        </p:nvSpPr>
+        <p:spPr>
+          <a:xfrm>
+            <a:off x="7799832" y="4645152"/>
+            <a:ext cx="3145536" cy="256032"/>
           </a:xfrm>
           <a:prstGeom prst="rect">
             <a:avLst/>
@@ -7363,7 +8151,7 @@
                 <a:ea typeface="Aptos" pitchFamily="34" charset="-122"/>
                 <a:cs typeface="Aptos" pitchFamily="34" charset="-120"/>
               </a:rPr>
-              <a:t>Use this for</a:t>
+              <a:t>Apply it</a:t>
             </a:r>
             <a:endParaRPr lang="en-US" sz="1300" dirty="0"/>
           </a:p>
@@ -7371,14 +8159,14 @@
       </p:sp>
       <p:sp>
         <p:nvSpPr>
-          <p:cNvPr id="15" name="Text 13"/>
-          <p:cNvSpPr/>
-          <p:nvPr/>
-        </p:nvSpPr>
-        <p:spPr>
-          <a:xfrm>
-            <a:off x="8074152" y="4023360"/>
-            <a:ext cx="2825496" cy="1097280"/>
+          <p:cNvPr id="20" name="Text 18"/>
+          <p:cNvSpPr/>
+          <p:nvPr/>
+        </p:nvSpPr>
+        <p:spPr>
+          <a:xfrm>
+            <a:off x="7799832" y="5001768"/>
+            <a:ext cx="3145536" cy="502920"/>
           </a:xfrm>
           <a:prstGeom prst="rect">
             <a:avLst/>
@@ -7404,7 +8192,7 @@
                 <a:ea typeface="Aptos" pitchFamily="34" charset="-122"/>
                 <a:cs typeface="Aptos" pitchFamily="34" charset="-120"/>
               </a:rPr>
-              <a:t>Connect the concept to public health decisions, safeguards, documentation, or implementation work.</a:t>
+              <a:t>Connect the concept to public health purpose, responsible use, required safeguards, documentation, and the next action a department should take.</a:t>
             </a:r>
             <a:endParaRPr lang="en-US" sz="1550" dirty="0"/>
           </a:p>
@@ -7578,8 +8366,8 @@
         </p:nvSpPr>
         <p:spPr>
           <a:xfrm>
-            <a:off x="9966960" y="6537960"/>
-            <a:ext cx="1645920" cy="201168"/>
+            <a:off x="9646920" y="6537960"/>
+            <a:ext cx="1965960" cy="201168"/>
           </a:xfrm>
           <a:prstGeom prst="rect">
             <a:avLst/>
@@ -7603,7 +8391,7 @@
                 <a:ea typeface="Aptos" pitchFamily="34" charset="-122"/>
                 <a:cs typeface="Aptos" pitchFamily="34" charset="-120"/>
               </a:rPr>
-              <a:t>Â© Paula Soper</a:t>
+              <a:t>Copyright Paula Soper</a:t>
             </a:r>
             <a:endParaRPr lang="en-US" sz="800" dirty="0"/>
           </a:p>
@@ -7650,77 +8438,13 @@
       </p:sp>
       <p:sp>
         <p:nvSpPr>
-          <p:cNvPr id="8" name="Shape 6"/>
+          <p:cNvPr id="8" name="Text 6"/>
           <p:cNvSpPr/>
           <p:nvPr/>
         </p:nvSpPr>
         <p:spPr>
           <a:xfrm>
             <a:off x="640080" y="658368"/>
-            <a:ext cx="420624" cy="420624"/>
-          </a:xfrm>
-          <a:prstGeom prst="ellipse">
-            <a:avLst/>
-          </a:prstGeom>
-          <a:solidFill>
-            <a:srgbClr val="0068B7"/>
-          </a:solidFill>
-          <a:ln w="12700">
-            <a:solidFill>
-              <a:srgbClr val="0068B7"/>
-            </a:solidFill>
-            <a:prstDash val="solid"/>
-          </a:ln>
-        </p:spPr>
-      </p:sp>
-      <p:sp>
-        <p:nvSpPr>
-          <p:cNvPr id="9" name="Text 7"/>
-          <p:cNvSpPr/>
-          <p:nvPr/>
-        </p:nvSpPr>
-        <p:spPr>
-          <a:xfrm>
-            <a:off x="640080" y="731520"/>
-            <a:ext cx="420624" cy="164592"/>
-          </a:xfrm>
-          <a:prstGeom prst="rect">
-            <a:avLst/>
-          </a:prstGeom>
-          <a:noFill/>
-          <a:ln/>
-        </p:spPr>
-        <p:txBody>
-          <a:bodyPr wrap="square" lIns="0" tIns="0" rIns="0" bIns="0" rtlCol="0" anchor="ctr"/>
-          <a:lstStyle/>
-          <a:p>
-            <a:pPr algn="ctr" indent="0" marL="0">
-              <a:buNone/>
-            </a:pPr>
-            <a:r>
-              <a:rPr lang="en-US" sz="1100" b="1" dirty="0">
-                <a:solidFill>
-                  <a:srgbClr val="FFFFFF"/>
-                </a:solidFill>
-                <a:latin typeface="Aptos" pitchFamily="34" charset="0"/>
-                <a:ea typeface="Aptos" pitchFamily="34" charset="-122"/>
-                <a:cs typeface="Aptos" pitchFamily="34" charset="-120"/>
-              </a:rPr>
-              <a:t>11</a:t>
-            </a:r>
-            <a:endParaRPr lang="en-US" sz="1100" dirty="0"/>
-          </a:p>
-        </p:txBody>
-      </p:sp>
-      <p:sp>
-        <p:nvSpPr>
-          <p:cNvPr id="10" name="Text 8"/>
-          <p:cNvSpPr/>
-          <p:nvPr/>
-        </p:nvSpPr>
-        <p:spPr>
-          <a:xfrm>
-            <a:off x="640080" y="621792"/>
             <a:ext cx="10881360" cy="713232"/>
           </a:xfrm>
           <a:prstGeom prst="rect">
@@ -7755,14 +8479,14 @@
       </p:sp>
       <p:sp>
         <p:nvSpPr>
-          <p:cNvPr id="11" name="Text 9"/>
+          <p:cNvPr id="9" name="Text 7"/>
           <p:cNvSpPr/>
           <p:nvPr/>
         </p:nvSpPr>
         <p:spPr>
           <a:xfrm>
             <a:off x="868680" y="1508760"/>
-            <a:ext cx="6537960" cy="4160520"/>
+            <a:ext cx="6309360" cy="4160520"/>
           </a:xfrm>
           <a:prstGeom prst="rect">
             <a:avLst/>
@@ -7807,18 +8531,18 @@
       </p:sp>
       <p:sp>
         <p:nvSpPr>
-          <p:cNvPr id="12" name="Shape 10"/>
-          <p:cNvSpPr/>
-          <p:nvPr/>
-        </p:nvSpPr>
-        <p:spPr>
-          <a:xfrm>
-            <a:off x="7909560" y="1417320"/>
-            <a:ext cx="3154680" cy="1828800"/>
+          <p:cNvPr id="10" name="Shape 8"/>
+          <p:cNvSpPr/>
+          <p:nvPr/>
+        </p:nvSpPr>
+        <p:spPr>
+          <a:xfrm>
+            <a:off x="7635240" y="1325880"/>
+            <a:ext cx="3474720" cy="1325880"/>
           </a:xfrm>
           <a:prstGeom prst="roundRect">
             <a:avLst>
-              <a:gd name="adj" fmla="val 6000"/>
+              <a:gd name="adj" fmla="val 8276"/>
             </a:avLst>
           </a:prstGeom>
           <a:solidFill>
@@ -7834,14 +8558,14 @@
       </p:sp>
       <p:sp>
         <p:nvSpPr>
-          <p:cNvPr id="13" name="Text 11"/>
-          <p:cNvSpPr/>
-          <p:nvPr/>
-        </p:nvSpPr>
-        <p:spPr>
-          <a:xfrm>
-            <a:off x="8074152" y="1563624"/>
-            <a:ext cx="2825496" cy="256032"/>
+          <p:cNvPr id="11" name="Text 9"/>
+          <p:cNvSpPr/>
+          <p:nvPr/>
+        </p:nvSpPr>
+        <p:spPr>
+          <a:xfrm>
+            <a:off x="7799832" y="1472184"/>
+            <a:ext cx="3145536" cy="256032"/>
           </a:xfrm>
           <a:prstGeom prst="rect">
             <a:avLst/>
@@ -7865,7 +8589,7 @@
                 <a:ea typeface="Aptos" pitchFamily="34" charset="-122"/>
                 <a:cs typeface="Aptos" pitchFamily="34" charset="-120"/>
               </a:rPr>
-              <a:t>Key idea</a:t>
+              <a:t>Practice focus</a:t>
             </a:r>
             <a:endParaRPr lang="en-US" sz="1300" dirty="0"/>
           </a:p>
@@ -7873,14 +8597,14 @@
       </p:sp>
       <p:sp>
         <p:nvSpPr>
-          <p:cNvPr id="14" name="Text 12"/>
-          <p:cNvSpPr/>
-          <p:nvPr/>
-        </p:nvSpPr>
-        <p:spPr>
-          <a:xfrm>
-            <a:off x="8074152" y="1920240"/>
-            <a:ext cx="2825496" cy="1188720"/>
+          <p:cNvPr id="12" name="Text 10"/>
+          <p:cNvSpPr/>
+          <p:nvPr/>
+        </p:nvSpPr>
+        <p:spPr>
+          <a:xfrm>
+            <a:off x="7799832" y="1828800"/>
+            <a:ext cx="3145536" cy="685800"/>
           </a:xfrm>
           <a:prstGeom prst="rect">
             <a:avLst/>
@@ -7914,18 +8638,159 @@
       </p:sp>
       <p:sp>
         <p:nvSpPr>
-          <p:cNvPr id="15" name="Shape 13"/>
-          <p:cNvSpPr/>
-          <p:nvPr/>
-        </p:nvSpPr>
-        <p:spPr>
-          <a:xfrm>
-            <a:off x="7909560" y="3520440"/>
-            <a:ext cx="3154680" cy="1737360"/>
+          <p:cNvPr id="13" name="Shape 11"/>
+          <p:cNvSpPr/>
+          <p:nvPr/>
+        </p:nvSpPr>
+        <p:spPr>
+          <a:xfrm>
+            <a:off x="7635240" y="2788920"/>
+            <a:ext cx="3474720" cy="1536192"/>
           </a:xfrm>
           <a:prstGeom prst="roundRect">
             <a:avLst>
-              <a:gd name="adj" fmla="val 6316"/>
+              <a:gd name="adj" fmla="val 7143"/>
+            </a:avLst>
+          </a:prstGeom>
+          <a:solidFill>
+            <a:srgbClr val="FFFFFF">
+              <a:alpha val="88000"/>
+            </a:srgbClr>
+          </a:solidFill>
+          <a:ln w="12700">
+            <a:solidFill>
+              <a:srgbClr val="D6E8F2"/>
+            </a:solidFill>
+            <a:prstDash val="solid"/>
+          </a:ln>
+        </p:spPr>
+      </p:sp>
+      <p:sp>
+        <p:nvSpPr>
+          <p:cNvPr id="14" name="Shape 12"/>
+          <p:cNvSpPr/>
+          <p:nvPr/>
+        </p:nvSpPr>
+        <p:spPr>
+          <a:xfrm>
+            <a:off x="8074152" y="3291840"/>
+            <a:ext cx="2596896" cy="749808"/>
+          </a:xfrm>
+          <a:prstGeom prst="rect">
+            <a:avLst/>
+          </a:prstGeom>
+          <a:solidFill>
+            <a:srgbClr val="EAF6F8"/>
+          </a:solidFill>
+          <a:ln w="12700">
+            <a:solidFill>
+              <a:srgbClr val="8ABBD8"/>
+            </a:solidFill>
+            <a:prstDash val="solid"/>
+          </a:ln>
+        </p:spPr>
+      </p:sp>
+      <p:sp>
+        <p:nvSpPr>
+          <p:cNvPr id="15" name="Shape 13"/>
+          <p:cNvSpPr/>
+          <p:nvPr/>
+        </p:nvSpPr>
+        <p:spPr>
+          <a:xfrm>
+            <a:off x="8202168" y="3721608"/>
+            <a:ext cx="2340864" cy="0"/>
+          </a:xfrm>
+          <a:prstGeom prst="line">
+            <a:avLst/>
+          </a:prstGeom>
+          <a:noFill/>
+          <a:ln w="19050">
+            <a:solidFill>
+              <a:srgbClr val="0068B7"/>
+            </a:solidFill>
+            <a:prstDash val="solid"/>
+          </a:ln>
+        </p:spPr>
+      </p:sp>
+      <p:sp>
+        <p:nvSpPr>
+          <p:cNvPr id="16" name="Shape 14"/>
+          <p:cNvSpPr/>
+          <p:nvPr/>
+        </p:nvSpPr>
+        <p:spPr>
+          <a:xfrm>
+            <a:off x="9198864" y="4206240"/>
+            <a:ext cx="347472" cy="347472"/>
+          </a:xfrm>
+          <a:prstGeom prst="ellipse">
+            <a:avLst/>
+          </a:prstGeom>
+          <a:solidFill>
+            <a:srgbClr val="2F8A28"/>
+          </a:solidFill>
+          <a:ln w="12700">
+            <a:solidFill>
+              <a:srgbClr val="2F8A28"/>
+            </a:solidFill>
+            <a:prstDash val="solid"/>
+          </a:ln>
+        </p:spPr>
+      </p:sp>
+      <p:sp>
+        <p:nvSpPr>
+          <p:cNvPr id="17" name="Text 15"/>
+          <p:cNvSpPr/>
+          <p:nvPr/>
+        </p:nvSpPr>
+        <p:spPr>
+          <a:xfrm>
+            <a:off x="7909560" y="3977640"/>
+            <a:ext cx="2926080" cy="182880"/>
+          </a:xfrm>
+          <a:prstGeom prst="rect">
+            <a:avLst/>
+          </a:prstGeom>
+          <a:noFill/>
+          <a:ln/>
+        </p:spPr>
+        <p:txBody>
+          <a:bodyPr wrap="square" lIns="0" tIns="0" rIns="0" bIns="0" rtlCol="0" anchor="ctr"/>
+          <a:lstStyle/>
+          <a:p>
+            <a:pPr algn="ctr" indent="0" marL="0">
+              <a:buNone/>
+            </a:pPr>
+            <a:r>
+              <a:rPr lang="en-US" sz="1000" dirty="0">
+                <a:solidFill>
+                  <a:srgbClr val="003A63"/>
+                </a:solidFill>
+                <a:latin typeface="Aptos" pitchFamily="34" charset="0"/>
+                <a:ea typeface="Aptos" pitchFamily="34" charset="-122"/>
+                <a:cs typeface="Aptos" pitchFamily="34" charset="-120"/>
+              </a:rPr>
+              <a:t>Concept to action</a:t>
+            </a:r>
+            <a:endParaRPr lang="en-US" sz="1000" dirty="0"/>
+          </a:p>
+        </p:txBody>
+      </p:sp>
+      <p:sp>
+        <p:nvSpPr>
+          <p:cNvPr id="18" name="Shape 16"/>
+          <p:cNvSpPr/>
+          <p:nvPr/>
+        </p:nvSpPr>
+        <p:spPr>
+          <a:xfrm>
+            <a:off x="7635240" y="4498848"/>
+            <a:ext cx="3474720" cy="1143000"/>
+          </a:xfrm>
+          <a:prstGeom prst="roundRect">
+            <a:avLst>
+              <a:gd name="adj" fmla="val 9600"/>
             </a:avLst>
           </a:prstGeom>
           <a:solidFill>
@@ -7941,14 +8806,14 @@
       </p:sp>
       <p:sp>
         <p:nvSpPr>
-          <p:cNvPr id="16" name="Text 14"/>
-          <p:cNvSpPr/>
-          <p:nvPr/>
-        </p:nvSpPr>
-        <p:spPr>
-          <a:xfrm>
-            <a:off x="8074152" y="3666744"/>
-            <a:ext cx="2825496" cy="256032"/>
+          <p:cNvPr id="19" name="Text 17"/>
+          <p:cNvSpPr/>
+          <p:nvPr/>
+        </p:nvSpPr>
+        <p:spPr>
+          <a:xfrm>
+            <a:off x="7799832" y="4645152"/>
+            <a:ext cx="3145536" cy="256032"/>
           </a:xfrm>
           <a:prstGeom prst="rect">
             <a:avLst/>
@@ -7972,7 +8837,7 @@
                 <a:ea typeface="Aptos" pitchFamily="34" charset="-122"/>
                 <a:cs typeface="Aptos" pitchFamily="34" charset="-120"/>
               </a:rPr>
-              <a:t>Use this for</a:t>
+              <a:t>What to produce</a:t>
             </a:r>
             <a:endParaRPr lang="en-US" sz="1300" dirty="0"/>
           </a:p>
@@ -7980,14 +8845,14 @@
       </p:sp>
       <p:sp>
         <p:nvSpPr>
-          <p:cNvPr id="17" name="Text 15"/>
-          <p:cNvSpPr/>
-          <p:nvPr/>
-        </p:nvSpPr>
-        <p:spPr>
-          <a:xfrm>
-            <a:off x="8074152" y="4023360"/>
-            <a:ext cx="2825496" cy="1097280"/>
+          <p:cNvPr id="20" name="Text 18"/>
+          <p:cNvSpPr/>
+          <p:nvPr/>
+        </p:nvSpPr>
+        <p:spPr>
+          <a:xfrm>
+            <a:off x="7799832" y="5001768"/>
+            <a:ext cx="3145536" cy="502920"/>
           </a:xfrm>
           <a:prstGeom prst="rect">
             <a:avLst/>
@@ -8013,7 +8878,7 @@
                 <a:ea typeface="Aptos" pitchFamily="34" charset="-122"/>
                 <a:cs typeface="Aptos" pitchFamily="34" charset="-120"/>
               </a:rPr>
-              <a:t>Connect the concept to public health decisions, safeguards, documentation, or implementation work.</a:t>
+              <a:t>Use the assignment to test whether you can explain the concept, apply it to a realistic public health situation, and identify what would need review before the work moves forward.</a:t>
             </a:r>
             <a:endParaRPr lang="en-US" sz="1550" dirty="0"/>
           </a:p>
@@ -8187,8 +9052,8 @@
         </p:nvSpPr>
         <p:spPr>
           <a:xfrm>
-            <a:off x="9966960" y="6537960"/>
-            <a:ext cx="1645920" cy="201168"/>
+            <a:off x="9646920" y="6537960"/>
+            <a:ext cx="1965960" cy="201168"/>
           </a:xfrm>
           <a:prstGeom prst="rect">
             <a:avLst/>
@@ -8212,7 +9077,7 @@
                 <a:ea typeface="Aptos" pitchFamily="34" charset="-122"/>
                 <a:cs typeface="Aptos" pitchFamily="34" charset="-120"/>
               </a:rPr>
-              <a:t>Â© Paula Soper</a:t>
+              <a:t>Copyright Paula Soper</a:t>
             </a:r>
             <a:endParaRPr lang="en-US" sz="800" dirty="0"/>
           </a:p>
@@ -8259,77 +9124,13 @@
       </p:sp>
       <p:sp>
         <p:nvSpPr>
-          <p:cNvPr id="8" name="Shape 6"/>
+          <p:cNvPr id="8" name="Text 6"/>
           <p:cNvSpPr/>
           <p:nvPr/>
         </p:nvSpPr>
         <p:spPr>
           <a:xfrm>
             <a:off x="640080" y="658368"/>
-            <a:ext cx="420624" cy="420624"/>
-          </a:xfrm>
-          <a:prstGeom prst="ellipse">
-            <a:avLst/>
-          </a:prstGeom>
-          <a:solidFill>
-            <a:srgbClr val="0068B7"/>
-          </a:solidFill>
-          <a:ln w="12700">
-            <a:solidFill>
-              <a:srgbClr val="0068B7"/>
-            </a:solidFill>
-            <a:prstDash val="solid"/>
-          </a:ln>
-        </p:spPr>
-      </p:sp>
-      <p:sp>
-        <p:nvSpPr>
-          <p:cNvPr id="9" name="Text 7"/>
-          <p:cNvSpPr/>
-          <p:nvPr/>
-        </p:nvSpPr>
-        <p:spPr>
-          <a:xfrm>
-            <a:off x="640080" y="731520"/>
-            <a:ext cx="420624" cy="164592"/>
-          </a:xfrm>
-          <a:prstGeom prst="rect">
-            <a:avLst/>
-          </a:prstGeom>
-          <a:noFill/>
-          <a:ln/>
-        </p:spPr>
-        <p:txBody>
-          <a:bodyPr wrap="square" lIns="0" tIns="0" rIns="0" bIns="0" rtlCol="0" anchor="ctr"/>
-          <a:lstStyle/>
-          <a:p>
-            <a:pPr algn="ctr" indent="0" marL="0">
-              <a:buNone/>
-            </a:pPr>
-            <a:r>
-              <a:rPr lang="en-US" sz="1100" b="1" dirty="0">
-                <a:solidFill>
-                  <a:srgbClr val="FFFFFF"/>
-                </a:solidFill>
-                <a:latin typeface="Aptos" pitchFamily="34" charset="0"/>
-                <a:ea typeface="Aptos" pitchFamily="34" charset="-122"/>
-                <a:cs typeface="Aptos" pitchFamily="34" charset="-120"/>
-              </a:rPr>
-              <a:t>12</a:t>
-            </a:r>
-            <a:endParaRPr lang="en-US" sz="1100" dirty="0"/>
-          </a:p>
-        </p:txBody>
-      </p:sp>
-      <p:sp>
-        <p:nvSpPr>
-          <p:cNvPr id="10" name="Text 8"/>
-          <p:cNvSpPr/>
-          <p:nvPr/>
-        </p:nvSpPr>
-        <p:spPr>
-          <a:xfrm>
-            <a:off x="640080" y="621792"/>
             <a:ext cx="10881360" cy="713232"/>
           </a:xfrm>
           <a:prstGeom prst="rect">
@@ -8364,14 +9165,14 @@
       </p:sp>
       <p:sp>
         <p:nvSpPr>
-          <p:cNvPr id="11" name="Text 9"/>
+          <p:cNvPr id="9" name="Text 7"/>
           <p:cNvSpPr/>
           <p:nvPr/>
         </p:nvSpPr>
         <p:spPr>
           <a:xfrm>
             <a:off x="868680" y="1508760"/>
-            <a:ext cx="6537960" cy="4160520"/>
+            <a:ext cx="6309360" cy="4160520"/>
           </a:xfrm>
           <a:prstGeom prst="rect">
             <a:avLst/>
@@ -8430,18 +9231,18 @@
       </p:sp>
       <p:sp>
         <p:nvSpPr>
-          <p:cNvPr id="12" name="Shape 10"/>
-          <p:cNvSpPr/>
-          <p:nvPr/>
-        </p:nvSpPr>
-        <p:spPr>
-          <a:xfrm>
-            <a:off x="7909560" y="1417320"/>
-            <a:ext cx="3154680" cy="1828800"/>
+          <p:cNvPr id="10" name="Shape 8"/>
+          <p:cNvSpPr/>
+          <p:nvPr/>
+        </p:nvSpPr>
+        <p:spPr>
+          <a:xfrm>
+            <a:off x="7635240" y="1325880"/>
+            <a:ext cx="3474720" cy="1325880"/>
           </a:xfrm>
           <a:prstGeom prst="roundRect">
             <a:avLst>
-              <a:gd name="adj" fmla="val 6000"/>
+              <a:gd name="adj" fmla="val 8276"/>
             </a:avLst>
           </a:prstGeom>
           <a:solidFill>
@@ -8457,14 +9258,14 @@
       </p:sp>
       <p:sp>
         <p:nvSpPr>
-          <p:cNvPr id="13" name="Text 11"/>
-          <p:cNvSpPr/>
-          <p:nvPr/>
-        </p:nvSpPr>
-        <p:spPr>
-          <a:xfrm>
-            <a:off x="8074152" y="1563624"/>
-            <a:ext cx="2825496" cy="256032"/>
+          <p:cNvPr id="11" name="Text 9"/>
+          <p:cNvSpPr/>
+          <p:nvPr/>
+        </p:nvSpPr>
+        <p:spPr>
+          <a:xfrm>
+            <a:off x="7799832" y="1472184"/>
+            <a:ext cx="3145536" cy="256032"/>
           </a:xfrm>
           <a:prstGeom prst="rect">
             <a:avLst/>
@@ -8488,7 +9289,7 @@
                 <a:ea typeface="Aptos" pitchFamily="34" charset="-122"/>
                 <a:cs typeface="Aptos" pitchFamily="34" charset="-120"/>
               </a:rPr>
-              <a:t>Key idea</a:t>
+              <a:t>Core concept</a:t>
             </a:r>
             <a:endParaRPr lang="en-US" sz="1300" dirty="0"/>
           </a:p>
@@ -8496,14 +9297,14 @@
       </p:sp>
       <p:sp>
         <p:nvSpPr>
-          <p:cNvPr id="14" name="Text 12"/>
-          <p:cNvSpPr/>
-          <p:nvPr/>
-        </p:nvSpPr>
-        <p:spPr>
-          <a:xfrm>
-            <a:off x="8074152" y="1920240"/>
-            <a:ext cx="2825496" cy="1188720"/>
+          <p:cNvPr id="12" name="Text 10"/>
+          <p:cNvSpPr/>
+          <p:nvPr/>
+        </p:nvSpPr>
+        <p:spPr>
+          <a:xfrm>
+            <a:off x="7799832" y="1828800"/>
+            <a:ext cx="3145536" cy="685800"/>
           </a:xfrm>
           <a:prstGeom prst="rect">
             <a:avLst/>
@@ -8537,18 +9338,159 @@
       </p:sp>
       <p:sp>
         <p:nvSpPr>
-          <p:cNvPr id="15" name="Shape 13"/>
-          <p:cNvSpPr/>
-          <p:nvPr/>
-        </p:nvSpPr>
-        <p:spPr>
-          <a:xfrm>
-            <a:off x="7909560" y="3520440"/>
-            <a:ext cx="3154680" cy="1737360"/>
+          <p:cNvPr id="13" name="Shape 11"/>
+          <p:cNvSpPr/>
+          <p:nvPr/>
+        </p:nvSpPr>
+        <p:spPr>
+          <a:xfrm>
+            <a:off x="7635240" y="2788920"/>
+            <a:ext cx="3474720" cy="1536192"/>
           </a:xfrm>
           <a:prstGeom prst="roundRect">
             <a:avLst>
-              <a:gd name="adj" fmla="val 6316"/>
+              <a:gd name="adj" fmla="val 7143"/>
+            </a:avLst>
+          </a:prstGeom>
+          <a:solidFill>
+            <a:srgbClr val="FFFFFF">
+              <a:alpha val="88000"/>
+            </a:srgbClr>
+          </a:solidFill>
+          <a:ln w="12700">
+            <a:solidFill>
+              <a:srgbClr val="D6E8F2"/>
+            </a:solidFill>
+            <a:prstDash val="solid"/>
+          </a:ln>
+        </p:spPr>
+      </p:sp>
+      <p:sp>
+        <p:nvSpPr>
+          <p:cNvPr id="14" name="Shape 12"/>
+          <p:cNvSpPr/>
+          <p:nvPr/>
+        </p:nvSpPr>
+        <p:spPr>
+          <a:xfrm>
+            <a:off x="8074152" y="3291840"/>
+            <a:ext cx="2596896" cy="749808"/>
+          </a:xfrm>
+          <a:prstGeom prst="rect">
+            <a:avLst/>
+          </a:prstGeom>
+          <a:solidFill>
+            <a:srgbClr val="EAF6F8"/>
+          </a:solidFill>
+          <a:ln w="12700">
+            <a:solidFill>
+              <a:srgbClr val="8ABBD8"/>
+            </a:solidFill>
+            <a:prstDash val="solid"/>
+          </a:ln>
+        </p:spPr>
+      </p:sp>
+      <p:sp>
+        <p:nvSpPr>
+          <p:cNvPr id="15" name="Shape 13"/>
+          <p:cNvSpPr/>
+          <p:nvPr/>
+        </p:nvSpPr>
+        <p:spPr>
+          <a:xfrm>
+            <a:off x="8202168" y="3721608"/>
+            <a:ext cx="2340864" cy="0"/>
+          </a:xfrm>
+          <a:prstGeom prst="line">
+            <a:avLst/>
+          </a:prstGeom>
+          <a:noFill/>
+          <a:ln w="19050">
+            <a:solidFill>
+              <a:srgbClr val="0068B7"/>
+            </a:solidFill>
+            <a:prstDash val="solid"/>
+          </a:ln>
+        </p:spPr>
+      </p:sp>
+      <p:sp>
+        <p:nvSpPr>
+          <p:cNvPr id="16" name="Shape 14"/>
+          <p:cNvSpPr/>
+          <p:nvPr/>
+        </p:nvSpPr>
+        <p:spPr>
+          <a:xfrm>
+            <a:off x="9198864" y="4206240"/>
+            <a:ext cx="347472" cy="347472"/>
+          </a:xfrm>
+          <a:prstGeom prst="ellipse">
+            <a:avLst/>
+          </a:prstGeom>
+          <a:solidFill>
+            <a:srgbClr val="2F8A28"/>
+          </a:solidFill>
+          <a:ln w="12700">
+            <a:solidFill>
+              <a:srgbClr val="2F8A28"/>
+            </a:solidFill>
+            <a:prstDash val="solid"/>
+          </a:ln>
+        </p:spPr>
+      </p:sp>
+      <p:sp>
+        <p:nvSpPr>
+          <p:cNvPr id="17" name="Text 15"/>
+          <p:cNvSpPr/>
+          <p:nvPr/>
+        </p:nvSpPr>
+        <p:spPr>
+          <a:xfrm>
+            <a:off x="7909560" y="3977640"/>
+            <a:ext cx="2926080" cy="182880"/>
+          </a:xfrm>
+          <a:prstGeom prst="rect">
+            <a:avLst/>
+          </a:prstGeom>
+          <a:noFill/>
+          <a:ln/>
+        </p:spPr>
+        <p:txBody>
+          <a:bodyPr wrap="square" lIns="0" tIns="0" rIns="0" bIns="0" rtlCol="0" anchor="ctr"/>
+          <a:lstStyle/>
+          <a:p>
+            <a:pPr algn="ctr" indent="0" marL="0">
+              <a:buNone/>
+            </a:pPr>
+            <a:r>
+              <a:rPr lang="en-US" sz="1000" dirty="0">
+                <a:solidFill>
+                  <a:srgbClr val="003A63"/>
+                </a:solidFill>
+                <a:latin typeface="Aptos" pitchFamily="34" charset="0"/>
+                <a:ea typeface="Aptos" pitchFamily="34" charset="-122"/>
+                <a:cs typeface="Aptos" pitchFamily="34" charset="-120"/>
+              </a:rPr>
+              <a:t>Concept to action</a:t>
+            </a:r>
+            <a:endParaRPr lang="en-US" sz="1000" dirty="0"/>
+          </a:p>
+        </p:txBody>
+      </p:sp>
+      <p:sp>
+        <p:nvSpPr>
+          <p:cNvPr id="18" name="Shape 16"/>
+          <p:cNvSpPr/>
+          <p:nvPr/>
+        </p:nvSpPr>
+        <p:spPr>
+          <a:xfrm>
+            <a:off x="7635240" y="4498848"/>
+            <a:ext cx="3474720" cy="1143000"/>
+          </a:xfrm>
+          <a:prstGeom prst="roundRect">
+            <a:avLst>
+              <a:gd name="adj" fmla="val 9600"/>
             </a:avLst>
           </a:prstGeom>
           <a:solidFill>
@@ -8564,14 +9506,14 @@
       </p:sp>
       <p:sp>
         <p:nvSpPr>
-          <p:cNvPr id="16" name="Text 14"/>
-          <p:cNvSpPr/>
-          <p:nvPr/>
-        </p:nvSpPr>
-        <p:spPr>
-          <a:xfrm>
-            <a:off x="8074152" y="3666744"/>
-            <a:ext cx="2825496" cy="256032"/>
+          <p:cNvPr id="19" name="Text 17"/>
+          <p:cNvSpPr/>
+          <p:nvPr/>
+        </p:nvSpPr>
+        <p:spPr>
+          <a:xfrm>
+            <a:off x="7799832" y="4645152"/>
+            <a:ext cx="3145536" cy="256032"/>
           </a:xfrm>
           <a:prstGeom prst="rect">
             <a:avLst/>
@@ -8595,7 +9537,7 @@
                 <a:ea typeface="Aptos" pitchFamily="34" charset="-122"/>
                 <a:cs typeface="Aptos" pitchFamily="34" charset="-120"/>
               </a:rPr>
-              <a:t>Use this for</a:t>
+              <a:t>Apply it</a:t>
             </a:r>
             <a:endParaRPr lang="en-US" sz="1300" dirty="0"/>
           </a:p>
@@ -8603,14 +9545,14 @@
       </p:sp>
       <p:sp>
         <p:nvSpPr>
-          <p:cNvPr id="17" name="Text 15"/>
-          <p:cNvSpPr/>
-          <p:nvPr/>
-        </p:nvSpPr>
-        <p:spPr>
-          <a:xfrm>
-            <a:off x="8074152" y="4023360"/>
-            <a:ext cx="2825496" cy="1097280"/>
+          <p:cNvPr id="20" name="Text 18"/>
+          <p:cNvSpPr/>
+          <p:nvPr/>
+        </p:nvSpPr>
+        <p:spPr>
+          <a:xfrm>
+            <a:off x="7799832" y="5001768"/>
+            <a:ext cx="3145536" cy="502920"/>
           </a:xfrm>
           <a:prstGeom prst="rect">
             <a:avLst/>
@@ -8636,7 +9578,7 @@
                 <a:ea typeface="Aptos" pitchFamily="34" charset="-122"/>
                 <a:cs typeface="Aptos" pitchFamily="34" charset="-120"/>
               </a:rPr>
-              <a:t>Connect the concept to public health decisions, safeguards, documentation, or implementation work.</a:t>
+              <a:t>Connect the concept to public health purpose, responsible use, required safeguards, documentation, and the next action a department should take.</a:t>
             </a:r>
             <a:endParaRPr lang="en-US" sz="1550" dirty="0"/>
           </a:p>
@@ -8810,8 +9752,8 @@
         </p:nvSpPr>
         <p:spPr>
           <a:xfrm>
-            <a:off x="9966960" y="6537960"/>
-            <a:ext cx="1645920" cy="201168"/>
+            <a:off x="9646920" y="6537960"/>
+            <a:ext cx="1965960" cy="201168"/>
           </a:xfrm>
           <a:prstGeom prst="rect">
             <a:avLst/>
@@ -8835,7 +9777,7 @@
                 <a:ea typeface="Aptos" pitchFamily="34" charset="-122"/>
                 <a:cs typeface="Aptos" pitchFamily="34" charset="-120"/>
               </a:rPr>
-              <a:t>Â© Paula Soper</a:t>
+              <a:t>Copyright Paula Soper</a:t>
             </a:r>
             <a:endParaRPr lang="en-US" sz="800" dirty="0"/>
           </a:p>
@@ -8930,7 +9872,7 @@
         <p:spPr>
           <a:xfrm>
             <a:off x="868680" y="1508760"/>
-            <a:ext cx="6537960" cy="4160520"/>
+            <a:ext cx="6309360" cy="4160520"/>
           </a:xfrm>
           <a:prstGeom prst="rect">
             <a:avLst/>
@@ -8967,12 +9909,12 @@
         </p:nvSpPr>
         <p:spPr>
           <a:xfrm>
-            <a:off x="7909560" y="1417320"/>
-            <a:ext cx="3154680" cy="1828800"/>
+            <a:off x="7635240" y="1325880"/>
+            <a:ext cx="3474720" cy="1325880"/>
           </a:xfrm>
           <a:prstGeom prst="roundRect">
             <a:avLst>
-              <a:gd name="adj" fmla="val 6000"/>
+              <a:gd name="adj" fmla="val 8276"/>
             </a:avLst>
           </a:prstGeom>
           <a:solidFill>
@@ -8994,8 +9936,8 @@
         </p:nvSpPr>
         <p:spPr>
           <a:xfrm>
-            <a:off x="8074152" y="1563624"/>
-            <a:ext cx="2825496" cy="256032"/>
+            <a:off x="7799832" y="1472184"/>
+            <a:ext cx="3145536" cy="256032"/>
           </a:xfrm>
           <a:prstGeom prst="rect">
             <a:avLst/>
@@ -9019,7 +9961,7 @@
                 <a:ea typeface="Aptos" pitchFamily="34" charset="-122"/>
                 <a:cs typeface="Aptos" pitchFamily="34" charset="-120"/>
               </a:rPr>
-              <a:t>Key idea</a:t>
+              <a:t>Core concept</a:t>
             </a:r>
             <a:endParaRPr lang="en-US" sz="1300" dirty="0"/>
           </a:p>
@@ -9033,8 +9975,8 @@
         </p:nvSpPr>
         <p:spPr>
           <a:xfrm>
-            <a:off x="8074152" y="1920240"/>
-            <a:ext cx="2825496" cy="1188720"/>
+            <a:off x="7799832" y="1828800"/>
+            <a:ext cx="3145536" cy="685800"/>
           </a:xfrm>
           <a:prstGeom prst="rect">
             <a:avLst/>
@@ -9074,12 +10016,153 @@
         </p:nvSpPr>
         <p:spPr>
           <a:xfrm>
-            <a:off x="7909560" y="3520440"/>
-            <a:ext cx="3154680" cy="1737360"/>
+            <a:off x="7635240" y="2788920"/>
+            <a:ext cx="3474720" cy="1536192"/>
           </a:xfrm>
           <a:prstGeom prst="roundRect">
             <a:avLst>
-              <a:gd name="adj" fmla="val 6316"/>
+              <a:gd name="adj" fmla="val 7143"/>
+            </a:avLst>
+          </a:prstGeom>
+          <a:solidFill>
+            <a:srgbClr val="FFFFFF">
+              <a:alpha val="88000"/>
+            </a:srgbClr>
+          </a:solidFill>
+          <a:ln w="12700">
+            <a:solidFill>
+              <a:srgbClr val="D6E8F2"/>
+            </a:solidFill>
+            <a:prstDash val="solid"/>
+          </a:ln>
+        </p:spPr>
+      </p:sp>
+      <p:sp>
+        <p:nvSpPr>
+          <p:cNvPr id="14" name="Shape 12"/>
+          <p:cNvSpPr/>
+          <p:nvPr/>
+        </p:nvSpPr>
+        <p:spPr>
+          <a:xfrm>
+            <a:off x="8074152" y="3291840"/>
+            <a:ext cx="2596896" cy="749808"/>
+          </a:xfrm>
+          <a:prstGeom prst="rect">
+            <a:avLst/>
+          </a:prstGeom>
+          <a:solidFill>
+            <a:srgbClr val="EAF6F8"/>
+          </a:solidFill>
+          <a:ln w="12700">
+            <a:solidFill>
+              <a:srgbClr val="8ABBD8"/>
+            </a:solidFill>
+            <a:prstDash val="solid"/>
+          </a:ln>
+        </p:spPr>
+      </p:sp>
+      <p:sp>
+        <p:nvSpPr>
+          <p:cNvPr id="15" name="Shape 13"/>
+          <p:cNvSpPr/>
+          <p:nvPr/>
+        </p:nvSpPr>
+        <p:spPr>
+          <a:xfrm>
+            <a:off x="8202168" y="3721608"/>
+            <a:ext cx="2340864" cy="0"/>
+          </a:xfrm>
+          <a:prstGeom prst="line">
+            <a:avLst/>
+          </a:prstGeom>
+          <a:noFill/>
+          <a:ln w="19050">
+            <a:solidFill>
+              <a:srgbClr val="0068B7"/>
+            </a:solidFill>
+            <a:prstDash val="solid"/>
+          </a:ln>
+        </p:spPr>
+      </p:sp>
+      <p:sp>
+        <p:nvSpPr>
+          <p:cNvPr id="16" name="Shape 14"/>
+          <p:cNvSpPr/>
+          <p:nvPr/>
+        </p:nvSpPr>
+        <p:spPr>
+          <a:xfrm>
+            <a:off x="9198864" y="4206240"/>
+            <a:ext cx="347472" cy="347472"/>
+          </a:xfrm>
+          <a:prstGeom prst="ellipse">
+            <a:avLst/>
+          </a:prstGeom>
+          <a:solidFill>
+            <a:srgbClr val="2F8A28"/>
+          </a:solidFill>
+          <a:ln w="12700">
+            <a:solidFill>
+              <a:srgbClr val="2F8A28"/>
+            </a:solidFill>
+            <a:prstDash val="solid"/>
+          </a:ln>
+        </p:spPr>
+      </p:sp>
+      <p:sp>
+        <p:nvSpPr>
+          <p:cNvPr id="17" name="Text 15"/>
+          <p:cNvSpPr/>
+          <p:nvPr/>
+        </p:nvSpPr>
+        <p:spPr>
+          <a:xfrm>
+            <a:off x="7909560" y="3977640"/>
+            <a:ext cx="2926080" cy="182880"/>
+          </a:xfrm>
+          <a:prstGeom prst="rect">
+            <a:avLst/>
+          </a:prstGeom>
+          <a:noFill/>
+          <a:ln/>
+        </p:spPr>
+        <p:txBody>
+          <a:bodyPr wrap="square" lIns="0" tIns="0" rIns="0" bIns="0" rtlCol="0" anchor="ctr"/>
+          <a:lstStyle/>
+          <a:p>
+            <a:pPr algn="ctr" indent="0" marL="0">
+              <a:buNone/>
+            </a:pPr>
+            <a:r>
+              <a:rPr lang="en-US" sz="1000" dirty="0">
+                <a:solidFill>
+                  <a:srgbClr val="003A63"/>
+                </a:solidFill>
+                <a:latin typeface="Aptos" pitchFamily="34" charset="0"/>
+                <a:ea typeface="Aptos" pitchFamily="34" charset="-122"/>
+                <a:cs typeface="Aptos" pitchFamily="34" charset="-120"/>
+              </a:rPr>
+              <a:t>Concept to action</a:t>
+            </a:r>
+            <a:endParaRPr lang="en-US" sz="1000" dirty="0"/>
+          </a:p>
+        </p:txBody>
+      </p:sp>
+      <p:sp>
+        <p:nvSpPr>
+          <p:cNvPr id="18" name="Shape 16"/>
+          <p:cNvSpPr/>
+          <p:nvPr/>
+        </p:nvSpPr>
+        <p:spPr>
+          <a:xfrm>
+            <a:off x="7635240" y="4498848"/>
+            <a:ext cx="3474720" cy="1143000"/>
+          </a:xfrm>
+          <a:prstGeom prst="roundRect">
+            <a:avLst>
+              <a:gd name="adj" fmla="val 9600"/>
             </a:avLst>
           </a:prstGeom>
           <a:solidFill>
@@ -9095,14 +10178,14 @@
       </p:sp>
       <p:sp>
         <p:nvSpPr>
-          <p:cNvPr id="14" name="Text 12"/>
-          <p:cNvSpPr/>
-          <p:nvPr/>
-        </p:nvSpPr>
-        <p:spPr>
-          <a:xfrm>
-            <a:off x="8074152" y="3666744"/>
-            <a:ext cx="2825496" cy="256032"/>
+          <p:cNvPr id="19" name="Text 17"/>
+          <p:cNvSpPr/>
+          <p:nvPr/>
+        </p:nvSpPr>
+        <p:spPr>
+          <a:xfrm>
+            <a:off x="7799832" y="4645152"/>
+            <a:ext cx="3145536" cy="256032"/>
           </a:xfrm>
           <a:prstGeom prst="rect">
             <a:avLst/>
@@ -9126,7 +10209,7 @@
                 <a:ea typeface="Aptos" pitchFamily="34" charset="-122"/>
                 <a:cs typeface="Aptos" pitchFamily="34" charset="-120"/>
               </a:rPr>
-              <a:t>Use this for</a:t>
+              <a:t>Apply it</a:t>
             </a:r>
             <a:endParaRPr lang="en-US" sz="1300" dirty="0"/>
           </a:p>
@@ -9134,14 +10217,14 @@
       </p:sp>
       <p:sp>
         <p:nvSpPr>
-          <p:cNvPr id="15" name="Text 13"/>
-          <p:cNvSpPr/>
-          <p:nvPr/>
-        </p:nvSpPr>
-        <p:spPr>
-          <a:xfrm>
-            <a:off x="8074152" y="4023360"/>
-            <a:ext cx="2825496" cy="1097280"/>
+          <p:cNvPr id="20" name="Text 18"/>
+          <p:cNvSpPr/>
+          <p:nvPr/>
+        </p:nvSpPr>
+        <p:spPr>
+          <a:xfrm>
+            <a:off x="7799832" y="5001768"/>
+            <a:ext cx="3145536" cy="502920"/>
           </a:xfrm>
           <a:prstGeom prst="rect">
             <a:avLst/>
@@ -9167,7 +10250,7 @@
                 <a:ea typeface="Aptos" pitchFamily="34" charset="-122"/>
                 <a:cs typeface="Aptos" pitchFamily="34" charset="-120"/>
               </a:rPr>
-              <a:t>Connect the concept to public health decisions, safeguards, documentation, or implementation work.</a:t>
+              <a:t>Connect the concept to public health purpose, responsible use, required safeguards, documentation, and the next action a department should take.</a:t>
             </a:r>
             <a:endParaRPr lang="en-US" sz="1550" dirty="0"/>
           </a:p>
@@ -9341,8 +10424,8 @@
         </p:nvSpPr>
         <p:spPr>
           <a:xfrm>
-            <a:off x="9966960" y="6537960"/>
-            <a:ext cx="1645920" cy="201168"/>
+            <a:off x="9646920" y="6537960"/>
+            <a:ext cx="1965960" cy="201168"/>
           </a:xfrm>
           <a:prstGeom prst="rect">
             <a:avLst/>
@@ -9366,7 +10449,7 @@
                 <a:ea typeface="Aptos" pitchFamily="34" charset="-122"/>
                 <a:cs typeface="Aptos" pitchFamily="34" charset="-120"/>
               </a:rPr>
-              <a:t>Â© Paula Soper</a:t>
+              <a:t>Copyright Paula Soper</a:t>
             </a:r>
             <a:endParaRPr lang="en-US" sz="800" dirty="0"/>
           </a:p>
@@ -9729,46 +10812,7 @@
       </p:sp>
       <p:sp>
         <p:nvSpPr>
-          <p:cNvPr id="15" name="Text 13"/>
-          <p:cNvSpPr/>
-          <p:nvPr/>
-        </p:nvSpPr>
-        <p:spPr>
-          <a:xfrm>
-            <a:off x="8695944" y="3941064"/>
-            <a:ext cx="201168" cy="256032"/>
-          </a:xfrm>
-          <a:prstGeom prst="rect">
-            <a:avLst/>
-          </a:prstGeom>
-          <a:noFill/>
-          <a:ln/>
-        </p:spPr>
-        <p:txBody>
-          <a:bodyPr wrap="square" lIns="0" tIns="0" rIns="0" bIns="0" rtlCol="0" anchor="ctr"/>
-          <a:lstStyle/>
-          <a:p>
-            <a:pPr algn="ctr" indent="0" marL="0">
-              <a:buNone/>
-            </a:pPr>
-            <a:r>
-              <a:rPr lang="en-US" sz="1800" b="1" dirty="0">
-                <a:solidFill>
-                  <a:srgbClr val="0068B7"/>
-                </a:solidFill>
-                <a:latin typeface="Aptos" pitchFamily="34" charset="0"/>
-                <a:ea typeface="Aptos" pitchFamily="34" charset="-122"/>
-                <a:cs typeface="Aptos" pitchFamily="34" charset="-120"/>
-              </a:rPr>
-              <a:t>â†’</a:t>
-            </a:r>
-            <a:endParaRPr lang="en-US" sz="1800" dirty="0"/>
-          </a:p>
-        </p:txBody>
-      </p:sp>
-      <p:sp>
-        <p:nvSpPr>
-          <p:cNvPr id="16" name="Shape 14"/>
+          <p:cNvPr id="15" name="Shape 13"/>
           <p:cNvSpPr/>
           <p:nvPr/>
         </p:nvSpPr>
@@ -9795,7 +10839,7 @@
       </p:sp>
       <p:sp>
         <p:nvSpPr>
-          <p:cNvPr id="17" name="Text 15"/>
+          <p:cNvPr id="16" name="Text 14"/>
           <p:cNvSpPr/>
           <p:nvPr/>
         </p:nvSpPr>
@@ -9836,46 +10880,7 @@
       </p:sp>
       <p:sp>
         <p:nvSpPr>
-          <p:cNvPr id="18" name="Text 16"/>
-          <p:cNvSpPr/>
-          <p:nvPr/>
-        </p:nvSpPr>
-        <p:spPr>
-          <a:xfrm>
-            <a:off x="9985248" y="3941064"/>
-            <a:ext cx="201168" cy="256032"/>
-          </a:xfrm>
-          <a:prstGeom prst="rect">
-            <a:avLst/>
-          </a:prstGeom>
-          <a:noFill/>
-          <a:ln/>
-        </p:spPr>
-        <p:txBody>
-          <a:bodyPr wrap="square" lIns="0" tIns="0" rIns="0" bIns="0" rtlCol="0" anchor="ctr"/>
-          <a:lstStyle/>
-          <a:p>
-            <a:pPr algn="ctr" indent="0" marL="0">
-              <a:buNone/>
-            </a:pPr>
-            <a:r>
-              <a:rPr lang="en-US" sz="1800" b="1" dirty="0">
-                <a:solidFill>
-                  <a:srgbClr val="0068B7"/>
-                </a:solidFill>
-                <a:latin typeface="Aptos" pitchFamily="34" charset="0"/>
-                <a:ea typeface="Aptos" pitchFamily="34" charset="-122"/>
-                <a:cs typeface="Aptos" pitchFamily="34" charset="-120"/>
-              </a:rPr>
-              <a:t>â†’</a:t>
-            </a:r>
-            <a:endParaRPr lang="en-US" sz="1800" dirty="0"/>
-          </a:p>
-        </p:txBody>
-      </p:sp>
-      <p:sp>
-        <p:nvSpPr>
-          <p:cNvPr id="19" name="Shape 17"/>
+          <p:cNvPr id="17" name="Shape 15"/>
           <p:cNvSpPr/>
           <p:nvPr/>
         </p:nvSpPr>
@@ -9902,7 +10907,7 @@
       </p:sp>
       <p:sp>
         <p:nvSpPr>
-          <p:cNvPr id="20" name="Text 18"/>
+          <p:cNvPr id="18" name="Text 16"/>
           <p:cNvSpPr/>
           <p:nvPr/>
         </p:nvSpPr>
@@ -10109,8 +11114,8 @@
         </p:nvSpPr>
         <p:spPr>
           <a:xfrm>
-            <a:off x="9966960" y="6537960"/>
-            <a:ext cx="1645920" cy="201168"/>
+            <a:off x="9646920" y="6537960"/>
+            <a:ext cx="1965960" cy="201168"/>
           </a:xfrm>
           <a:prstGeom prst="rect">
             <a:avLst/>
@@ -10134,7 +11139,7 @@
                 <a:ea typeface="Aptos" pitchFamily="34" charset="-122"/>
                 <a:cs typeface="Aptos" pitchFamily="34" charset="-120"/>
               </a:rPr>
-              <a:t>Â© Paula Soper</a:t>
+              <a:t>Copyright Paula Soper</a:t>
             </a:r>
             <a:endParaRPr lang="en-US" sz="800" dirty="0"/>
           </a:p>
@@ -10181,77 +11186,13 @@
       </p:sp>
       <p:sp>
         <p:nvSpPr>
-          <p:cNvPr id="8" name="Shape 6"/>
+          <p:cNvPr id="8" name="Text 6"/>
           <p:cNvSpPr/>
           <p:nvPr/>
         </p:nvSpPr>
         <p:spPr>
           <a:xfrm>
             <a:off x="640080" y="658368"/>
-            <a:ext cx="420624" cy="420624"/>
-          </a:xfrm>
-          <a:prstGeom prst="ellipse">
-            <a:avLst/>
-          </a:prstGeom>
-          <a:solidFill>
-            <a:srgbClr val="0068B7"/>
-          </a:solidFill>
-          <a:ln w="12700">
-            <a:solidFill>
-              <a:srgbClr val="0068B7"/>
-            </a:solidFill>
-            <a:prstDash val="solid"/>
-          </a:ln>
-        </p:spPr>
-      </p:sp>
-      <p:sp>
-        <p:nvSpPr>
-          <p:cNvPr id="9" name="Text 7"/>
-          <p:cNvSpPr/>
-          <p:nvPr/>
-        </p:nvSpPr>
-        <p:spPr>
-          <a:xfrm>
-            <a:off x="640080" y="731520"/>
-            <a:ext cx="420624" cy="164592"/>
-          </a:xfrm>
-          <a:prstGeom prst="rect">
-            <a:avLst/>
-          </a:prstGeom>
-          <a:noFill/>
-          <a:ln/>
-        </p:spPr>
-        <p:txBody>
-          <a:bodyPr wrap="square" lIns="0" tIns="0" rIns="0" bIns="0" rtlCol="0" anchor="ctr"/>
-          <a:lstStyle/>
-          <a:p>
-            <a:pPr algn="ctr" indent="0" marL="0">
-              <a:buNone/>
-            </a:pPr>
-            <a:r>
-              <a:rPr lang="en-US" sz="1100" b="1" dirty="0">
-                <a:solidFill>
-                  <a:srgbClr val="FFFFFF"/>
-                </a:solidFill>
-                <a:latin typeface="Aptos" pitchFamily="34" charset="0"/>
-                <a:ea typeface="Aptos" pitchFamily="34" charset="-122"/>
-                <a:cs typeface="Aptos" pitchFamily="34" charset="-120"/>
-              </a:rPr>
-              <a:t>13</a:t>
-            </a:r>
-            <a:endParaRPr lang="en-US" sz="1100" dirty="0"/>
-          </a:p>
-        </p:txBody>
-      </p:sp>
-      <p:sp>
-        <p:nvSpPr>
-          <p:cNvPr id="10" name="Text 8"/>
-          <p:cNvSpPr/>
-          <p:nvPr/>
-        </p:nvSpPr>
-        <p:spPr>
-          <a:xfrm>
-            <a:off x="640080" y="621792"/>
             <a:ext cx="10881360" cy="713232"/>
           </a:xfrm>
           <a:prstGeom prst="rect">
@@ -10286,14 +11227,14 @@
       </p:sp>
       <p:sp>
         <p:nvSpPr>
-          <p:cNvPr id="11" name="Text 9"/>
+          <p:cNvPr id="9" name="Text 7"/>
           <p:cNvSpPr/>
           <p:nvPr/>
         </p:nvSpPr>
         <p:spPr>
           <a:xfrm>
             <a:off x="868680" y="1508760"/>
-            <a:ext cx="6537960" cy="4160520"/>
+            <a:ext cx="6309360" cy="4160520"/>
           </a:xfrm>
           <a:prstGeom prst="rect">
             <a:avLst/>
@@ -10352,18 +11293,18 @@
       </p:sp>
       <p:sp>
         <p:nvSpPr>
-          <p:cNvPr id="12" name="Shape 10"/>
-          <p:cNvSpPr/>
-          <p:nvPr/>
-        </p:nvSpPr>
-        <p:spPr>
-          <a:xfrm>
-            <a:off x="7909560" y="1417320"/>
-            <a:ext cx="3154680" cy="1828800"/>
+          <p:cNvPr id="10" name="Shape 8"/>
+          <p:cNvSpPr/>
+          <p:nvPr/>
+        </p:nvSpPr>
+        <p:spPr>
+          <a:xfrm>
+            <a:off x="7635240" y="1325880"/>
+            <a:ext cx="3474720" cy="1325880"/>
           </a:xfrm>
           <a:prstGeom prst="roundRect">
             <a:avLst>
-              <a:gd name="adj" fmla="val 6000"/>
+              <a:gd name="adj" fmla="val 8276"/>
             </a:avLst>
           </a:prstGeom>
           <a:solidFill>
@@ -10379,14 +11320,14 @@
       </p:sp>
       <p:sp>
         <p:nvSpPr>
-          <p:cNvPr id="13" name="Text 11"/>
-          <p:cNvSpPr/>
-          <p:nvPr/>
-        </p:nvSpPr>
-        <p:spPr>
-          <a:xfrm>
-            <a:off x="8074152" y="1563624"/>
-            <a:ext cx="2825496" cy="256032"/>
+          <p:cNvPr id="11" name="Text 9"/>
+          <p:cNvSpPr/>
+          <p:nvPr/>
+        </p:nvSpPr>
+        <p:spPr>
+          <a:xfrm>
+            <a:off x="7799832" y="1472184"/>
+            <a:ext cx="3145536" cy="256032"/>
           </a:xfrm>
           <a:prstGeom prst="rect">
             <a:avLst/>
@@ -10410,7 +11351,7 @@
                 <a:ea typeface="Aptos" pitchFamily="34" charset="-122"/>
                 <a:cs typeface="Aptos" pitchFamily="34" charset="-120"/>
               </a:rPr>
-              <a:t>Key idea</a:t>
+              <a:t>Practice focus</a:t>
             </a:r>
             <a:endParaRPr lang="en-US" sz="1300" dirty="0"/>
           </a:p>
@@ -10418,14 +11359,14 @@
       </p:sp>
       <p:sp>
         <p:nvSpPr>
-          <p:cNvPr id="14" name="Text 12"/>
-          <p:cNvSpPr/>
-          <p:nvPr/>
-        </p:nvSpPr>
-        <p:spPr>
-          <a:xfrm>
-            <a:off x="8074152" y="1920240"/>
-            <a:ext cx="2825496" cy="1188720"/>
+          <p:cNvPr id="12" name="Text 10"/>
+          <p:cNvSpPr/>
+          <p:nvPr/>
+        </p:nvSpPr>
+        <p:spPr>
+          <a:xfrm>
+            <a:off x="7799832" y="1828800"/>
+            <a:ext cx="3145536" cy="685800"/>
           </a:xfrm>
           <a:prstGeom prst="rect">
             <a:avLst/>
@@ -10459,18 +11400,159 @@
       </p:sp>
       <p:sp>
         <p:nvSpPr>
-          <p:cNvPr id="15" name="Shape 13"/>
-          <p:cNvSpPr/>
-          <p:nvPr/>
-        </p:nvSpPr>
-        <p:spPr>
-          <a:xfrm>
-            <a:off x="7909560" y="3520440"/>
-            <a:ext cx="3154680" cy="1737360"/>
+          <p:cNvPr id="13" name="Shape 11"/>
+          <p:cNvSpPr/>
+          <p:nvPr/>
+        </p:nvSpPr>
+        <p:spPr>
+          <a:xfrm>
+            <a:off x="7635240" y="2788920"/>
+            <a:ext cx="3474720" cy="1536192"/>
           </a:xfrm>
           <a:prstGeom prst="roundRect">
             <a:avLst>
-              <a:gd name="adj" fmla="val 6316"/>
+              <a:gd name="adj" fmla="val 7143"/>
+            </a:avLst>
+          </a:prstGeom>
+          <a:solidFill>
+            <a:srgbClr val="FFFFFF">
+              <a:alpha val="88000"/>
+            </a:srgbClr>
+          </a:solidFill>
+          <a:ln w="12700">
+            <a:solidFill>
+              <a:srgbClr val="D6E8F2"/>
+            </a:solidFill>
+            <a:prstDash val="solid"/>
+          </a:ln>
+        </p:spPr>
+      </p:sp>
+      <p:sp>
+        <p:nvSpPr>
+          <p:cNvPr id="14" name="Shape 12"/>
+          <p:cNvSpPr/>
+          <p:nvPr/>
+        </p:nvSpPr>
+        <p:spPr>
+          <a:xfrm>
+            <a:off x="8074152" y="3291840"/>
+            <a:ext cx="2596896" cy="749808"/>
+          </a:xfrm>
+          <a:prstGeom prst="rect">
+            <a:avLst/>
+          </a:prstGeom>
+          <a:solidFill>
+            <a:srgbClr val="EAF6F8"/>
+          </a:solidFill>
+          <a:ln w="12700">
+            <a:solidFill>
+              <a:srgbClr val="8ABBD8"/>
+            </a:solidFill>
+            <a:prstDash val="solid"/>
+          </a:ln>
+        </p:spPr>
+      </p:sp>
+      <p:sp>
+        <p:nvSpPr>
+          <p:cNvPr id="15" name="Shape 13"/>
+          <p:cNvSpPr/>
+          <p:nvPr/>
+        </p:nvSpPr>
+        <p:spPr>
+          <a:xfrm>
+            <a:off x="8202168" y="3721608"/>
+            <a:ext cx="2340864" cy="0"/>
+          </a:xfrm>
+          <a:prstGeom prst="line">
+            <a:avLst/>
+          </a:prstGeom>
+          <a:noFill/>
+          <a:ln w="19050">
+            <a:solidFill>
+              <a:srgbClr val="0068B7"/>
+            </a:solidFill>
+            <a:prstDash val="solid"/>
+          </a:ln>
+        </p:spPr>
+      </p:sp>
+      <p:sp>
+        <p:nvSpPr>
+          <p:cNvPr id="16" name="Shape 14"/>
+          <p:cNvSpPr/>
+          <p:nvPr/>
+        </p:nvSpPr>
+        <p:spPr>
+          <a:xfrm>
+            <a:off x="9198864" y="4206240"/>
+            <a:ext cx="347472" cy="347472"/>
+          </a:xfrm>
+          <a:prstGeom prst="ellipse">
+            <a:avLst/>
+          </a:prstGeom>
+          <a:solidFill>
+            <a:srgbClr val="2F8A28"/>
+          </a:solidFill>
+          <a:ln w="12700">
+            <a:solidFill>
+              <a:srgbClr val="2F8A28"/>
+            </a:solidFill>
+            <a:prstDash val="solid"/>
+          </a:ln>
+        </p:spPr>
+      </p:sp>
+      <p:sp>
+        <p:nvSpPr>
+          <p:cNvPr id="17" name="Text 15"/>
+          <p:cNvSpPr/>
+          <p:nvPr/>
+        </p:nvSpPr>
+        <p:spPr>
+          <a:xfrm>
+            <a:off x="7909560" y="3977640"/>
+            <a:ext cx="2926080" cy="182880"/>
+          </a:xfrm>
+          <a:prstGeom prst="rect">
+            <a:avLst/>
+          </a:prstGeom>
+          <a:noFill/>
+          <a:ln/>
+        </p:spPr>
+        <p:txBody>
+          <a:bodyPr wrap="square" lIns="0" tIns="0" rIns="0" bIns="0" rtlCol="0" anchor="ctr"/>
+          <a:lstStyle/>
+          <a:p>
+            <a:pPr algn="ctr" indent="0" marL="0">
+              <a:buNone/>
+            </a:pPr>
+            <a:r>
+              <a:rPr lang="en-US" sz="1000" dirty="0">
+                <a:solidFill>
+                  <a:srgbClr val="003A63"/>
+                </a:solidFill>
+                <a:latin typeface="Aptos" pitchFamily="34" charset="0"/>
+                <a:ea typeface="Aptos" pitchFamily="34" charset="-122"/>
+                <a:cs typeface="Aptos" pitchFamily="34" charset="-120"/>
+              </a:rPr>
+              <a:t>Concept to action</a:t>
+            </a:r>
+            <a:endParaRPr lang="en-US" sz="1000" dirty="0"/>
+          </a:p>
+        </p:txBody>
+      </p:sp>
+      <p:sp>
+        <p:nvSpPr>
+          <p:cNvPr id="18" name="Shape 16"/>
+          <p:cNvSpPr/>
+          <p:nvPr/>
+        </p:nvSpPr>
+        <p:spPr>
+          <a:xfrm>
+            <a:off x="7635240" y="4498848"/>
+            <a:ext cx="3474720" cy="1143000"/>
+          </a:xfrm>
+          <a:prstGeom prst="roundRect">
+            <a:avLst>
+              <a:gd name="adj" fmla="val 9600"/>
             </a:avLst>
           </a:prstGeom>
           <a:solidFill>
@@ -10486,14 +11568,14 @@
       </p:sp>
       <p:sp>
         <p:nvSpPr>
-          <p:cNvPr id="16" name="Text 14"/>
-          <p:cNvSpPr/>
-          <p:nvPr/>
-        </p:nvSpPr>
-        <p:spPr>
-          <a:xfrm>
-            <a:off x="8074152" y="3666744"/>
-            <a:ext cx="2825496" cy="256032"/>
+          <p:cNvPr id="19" name="Text 17"/>
+          <p:cNvSpPr/>
+          <p:nvPr/>
+        </p:nvSpPr>
+        <p:spPr>
+          <a:xfrm>
+            <a:off x="7799832" y="4645152"/>
+            <a:ext cx="3145536" cy="256032"/>
           </a:xfrm>
           <a:prstGeom prst="rect">
             <a:avLst/>
@@ -10517,7 +11599,7 @@
                 <a:ea typeface="Aptos" pitchFamily="34" charset="-122"/>
                 <a:cs typeface="Aptos" pitchFamily="34" charset="-120"/>
               </a:rPr>
-              <a:t>Use this for</a:t>
+              <a:t>What to produce</a:t>
             </a:r>
             <a:endParaRPr lang="en-US" sz="1300" dirty="0"/>
           </a:p>
@@ -10525,14 +11607,14 @@
       </p:sp>
       <p:sp>
         <p:nvSpPr>
-          <p:cNvPr id="17" name="Text 15"/>
-          <p:cNvSpPr/>
-          <p:nvPr/>
-        </p:nvSpPr>
-        <p:spPr>
-          <a:xfrm>
-            <a:off x="8074152" y="4023360"/>
-            <a:ext cx="2825496" cy="1097280"/>
+          <p:cNvPr id="20" name="Text 18"/>
+          <p:cNvSpPr/>
+          <p:nvPr/>
+        </p:nvSpPr>
+        <p:spPr>
+          <a:xfrm>
+            <a:off x="7799832" y="5001768"/>
+            <a:ext cx="3145536" cy="502920"/>
           </a:xfrm>
           <a:prstGeom prst="rect">
             <a:avLst/>
@@ -10558,7 +11640,7 @@
                 <a:ea typeface="Aptos" pitchFamily="34" charset="-122"/>
                 <a:cs typeface="Aptos" pitchFamily="34" charset="-120"/>
               </a:rPr>
-              <a:t>Connect the concept to public health decisions, safeguards, documentation, or implementation work.</a:t>
+              <a:t>Use the assignment to test whether you can explain the concept, apply it to a realistic public health situation, and identify what would need review before the work moves forward.</a:t>
             </a:r>
             <a:endParaRPr lang="en-US" sz="1550" dirty="0"/>
           </a:p>
@@ -10732,8 +11814,8 @@
         </p:nvSpPr>
         <p:spPr>
           <a:xfrm>
-            <a:off x="9966960" y="6537960"/>
-            <a:ext cx="1645920" cy="201168"/>
+            <a:off x="9646920" y="6537960"/>
+            <a:ext cx="1965960" cy="201168"/>
           </a:xfrm>
           <a:prstGeom prst="rect">
             <a:avLst/>
@@ -10757,7 +11839,7 @@
                 <a:ea typeface="Aptos" pitchFamily="34" charset="-122"/>
                 <a:cs typeface="Aptos" pitchFamily="34" charset="-120"/>
               </a:rPr>
-              <a:t>Â© Paula Soper</a:t>
+              <a:t>Copyright Paula Soper</a:t>
             </a:r>
             <a:endParaRPr lang="en-US" sz="800" dirty="0"/>
           </a:p>
@@ -10804,77 +11886,13 @@
       </p:sp>
       <p:sp>
         <p:nvSpPr>
-          <p:cNvPr id="8" name="Shape 6"/>
+          <p:cNvPr id="8" name="Text 6"/>
           <p:cNvSpPr/>
           <p:nvPr/>
         </p:nvSpPr>
         <p:spPr>
           <a:xfrm>
             <a:off x="640080" y="658368"/>
-            <a:ext cx="420624" cy="420624"/>
-          </a:xfrm>
-          <a:prstGeom prst="ellipse">
-            <a:avLst/>
-          </a:prstGeom>
-          <a:solidFill>
-            <a:srgbClr val="0068B7"/>
-          </a:solidFill>
-          <a:ln w="12700">
-            <a:solidFill>
-              <a:srgbClr val="0068B7"/>
-            </a:solidFill>
-            <a:prstDash val="solid"/>
-          </a:ln>
-        </p:spPr>
-      </p:sp>
-      <p:sp>
-        <p:nvSpPr>
-          <p:cNvPr id="9" name="Text 7"/>
-          <p:cNvSpPr/>
-          <p:nvPr/>
-        </p:nvSpPr>
-        <p:spPr>
-          <a:xfrm>
-            <a:off x="640080" y="731520"/>
-            <a:ext cx="420624" cy="164592"/>
-          </a:xfrm>
-          <a:prstGeom prst="rect">
-            <a:avLst/>
-          </a:prstGeom>
-          <a:noFill/>
-          <a:ln/>
-        </p:spPr>
-        <p:txBody>
-          <a:bodyPr wrap="square" lIns="0" tIns="0" rIns="0" bIns="0" rtlCol="0" anchor="ctr"/>
-          <a:lstStyle/>
-          <a:p>
-            <a:pPr algn="ctr" indent="0" marL="0">
-              <a:buNone/>
-            </a:pPr>
-            <a:r>
-              <a:rPr lang="en-US" sz="1100" b="1" dirty="0">
-                <a:solidFill>
-                  <a:srgbClr val="FFFFFF"/>
-                </a:solidFill>
-                <a:latin typeface="Aptos" pitchFamily="34" charset="0"/>
-                <a:ea typeface="Aptos" pitchFamily="34" charset="-122"/>
-                <a:cs typeface="Aptos" pitchFamily="34" charset="-120"/>
-              </a:rPr>
-              <a:t>14</a:t>
-            </a:r>
-            <a:endParaRPr lang="en-US" sz="1100" dirty="0"/>
-          </a:p>
-        </p:txBody>
-      </p:sp>
-      <p:sp>
-        <p:nvSpPr>
-          <p:cNvPr id="10" name="Text 8"/>
-          <p:cNvSpPr/>
-          <p:nvPr/>
-        </p:nvSpPr>
-        <p:spPr>
-          <a:xfrm>
-            <a:off x="640080" y="621792"/>
             <a:ext cx="10881360" cy="713232"/>
           </a:xfrm>
           <a:prstGeom prst="rect">
@@ -10909,14 +11927,14 @@
       </p:sp>
       <p:sp>
         <p:nvSpPr>
-          <p:cNvPr id="11" name="Text 9"/>
+          <p:cNvPr id="9" name="Text 7"/>
           <p:cNvSpPr/>
           <p:nvPr/>
         </p:nvSpPr>
         <p:spPr>
           <a:xfrm>
             <a:off x="868680" y="1508760"/>
-            <a:ext cx="6537960" cy="4160520"/>
+            <a:ext cx="6309360" cy="4160520"/>
           </a:xfrm>
           <a:prstGeom prst="rect">
             <a:avLst/>
@@ -10975,18 +11993,18 @@
       </p:sp>
       <p:sp>
         <p:nvSpPr>
-          <p:cNvPr id="12" name="Shape 10"/>
-          <p:cNvSpPr/>
-          <p:nvPr/>
-        </p:nvSpPr>
-        <p:spPr>
-          <a:xfrm>
-            <a:off x="7909560" y="1417320"/>
-            <a:ext cx="3154680" cy="1828800"/>
+          <p:cNvPr id="10" name="Shape 8"/>
+          <p:cNvSpPr/>
+          <p:nvPr/>
+        </p:nvSpPr>
+        <p:spPr>
+          <a:xfrm>
+            <a:off x="7635240" y="1325880"/>
+            <a:ext cx="3474720" cy="1325880"/>
           </a:xfrm>
           <a:prstGeom prst="roundRect">
             <a:avLst>
-              <a:gd name="adj" fmla="val 6000"/>
+              <a:gd name="adj" fmla="val 8276"/>
             </a:avLst>
           </a:prstGeom>
           <a:solidFill>
@@ -11002,14 +12020,14 @@
       </p:sp>
       <p:sp>
         <p:nvSpPr>
-          <p:cNvPr id="13" name="Text 11"/>
-          <p:cNvSpPr/>
-          <p:nvPr/>
-        </p:nvSpPr>
-        <p:spPr>
-          <a:xfrm>
-            <a:off x="8074152" y="1563624"/>
-            <a:ext cx="2825496" cy="256032"/>
+          <p:cNvPr id="11" name="Text 9"/>
+          <p:cNvSpPr/>
+          <p:nvPr/>
+        </p:nvSpPr>
+        <p:spPr>
+          <a:xfrm>
+            <a:off x="7799832" y="1472184"/>
+            <a:ext cx="3145536" cy="256032"/>
           </a:xfrm>
           <a:prstGeom prst="rect">
             <a:avLst/>
@@ -11033,7 +12051,7 @@
                 <a:ea typeface="Aptos" pitchFamily="34" charset="-122"/>
                 <a:cs typeface="Aptos" pitchFamily="34" charset="-120"/>
               </a:rPr>
-              <a:t>Key idea</a:t>
+              <a:t>Practice focus</a:t>
             </a:r>
             <a:endParaRPr lang="en-US" sz="1300" dirty="0"/>
           </a:p>
@@ -11041,14 +12059,14 @@
       </p:sp>
       <p:sp>
         <p:nvSpPr>
-          <p:cNvPr id="14" name="Text 12"/>
-          <p:cNvSpPr/>
-          <p:nvPr/>
-        </p:nvSpPr>
-        <p:spPr>
-          <a:xfrm>
-            <a:off x="8074152" y="1920240"/>
-            <a:ext cx="2825496" cy="1188720"/>
+          <p:cNvPr id="12" name="Text 10"/>
+          <p:cNvSpPr/>
+          <p:nvPr/>
+        </p:nvSpPr>
+        <p:spPr>
+          <a:xfrm>
+            <a:off x="7799832" y="1828800"/>
+            <a:ext cx="3145536" cy="685800"/>
           </a:xfrm>
           <a:prstGeom prst="rect">
             <a:avLst/>
@@ -11082,18 +12100,159 @@
       </p:sp>
       <p:sp>
         <p:nvSpPr>
-          <p:cNvPr id="15" name="Shape 13"/>
-          <p:cNvSpPr/>
-          <p:nvPr/>
-        </p:nvSpPr>
-        <p:spPr>
-          <a:xfrm>
-            <a:off x="7909560" y="3520440"/>
-            <a:ext cx="3154680" cy="1737360"/>
+          <p:cNvPr id="13" name="Shape 11"/>
+          <p:cNvSpPr/>
+          <p:nvPr/>
+        </p:nvSpPr>
+        <p:spPr>
+          <a:xfrm>
+            <a:off x="7635240" y="2788920"/>
+            <a:ext cx="3474720" cy="1536192"/>
           </a:xfrm>
           <a:prstGeom prst="roundRect">
             <a:avLst>
-              <a:gd name="adj" fmla="val 6316"/>
+              <a:gd name="adj" fmla="val 7143"/>
+            </a:avLst>
+          </a:prstGeom>
+          <a:solidFill>
+            <a:srgbClr val="FFFFFF">
+              <a:alpha val="88000"/>
+            </a:srgbClr>
+          </a:solidFill>
+          <a:ln w="12700">
+            <a:solidFill>
+              <a:srgbClr val="D6E8F2"/>
+            </a:solidFill>
+            <a:prstDash val="solid"/>
+          </a:ln>
+        </p:spPr>
+      </p:sp>
+      <p:sp>
+        <p:nvSpPr>
+          <p:cNvPr id="14" name="Shape 12"/>
+          <p:cNvSpPr/>
+          <p:nvPr/>
+        </p:nvSpPr>
+        <p:spPr>
+          <a:xfrm>
+            <a:off x="8074152" y="3291840"/>
+            <a:ext cx="2596896" cy="749808"/>
+          </a:xfrm>
+          <a:prstGeom prst="rect">
+            <a:avLst/>
+          </a:prstGeom>
+          <a:solidFill>
+            <a:srgbClr val="EAF6F8"/>
+          </a:solidFill>
+          <a:ln w="12700">
+            <a:solidFill>
+              <a:srgbClr val="8ABBD8"/>
+            </a:solidFill>
+            <a:prstDash val="solid"/>
+          </a:ln>
+        </p:spPr>
+      </p:sp>
+      <p:sp>
+        <p:nvSpPr>
+          <p:cNvPr id="15" name="Shape 13"/>
+          <p:cNvSpPr/>
+          <p:nvPr/>
+        </p:nvSpPr>
+        <p:spPr>
+          <a:xfrm>
+            <a:off x="8202168" y="3721608"/>
+            <a:ext cx="2340864" cy="0"/>
+          </a:xfrm>
+          <a:prstGeom prst="line">
+            <a:avLst/>
+          </a:prstGeom>
+          <a:noFill/>
+          <a:ln w="19050">
+            <a:solidFill>
+              <a:srgbClr val="0068B7"/>
+            </a:solidFill>
+            <a:prstDash val="solid"/>
+          </a:ln>
+        </p:spPr>
+      </p:sp>
+      <p:sp>
+        <p:nvSpPr>
+          <p:cNvPr id="16" name="Shape 14"/>
+          <p:cNvSpPr/>
+          <p:nvPr/>
+        </p:nvSpPr>
+        <p:spPr>
+          <a:xfrm>
+            <a:off x="9198864" y="4206240"/>
+            <a:ext cx="347472" cy="347472"/>
+          </a:xfrm>
+          <a:prstGeom prst="ellipse">
+            <a:avLst/>
+          </a:prstGeom>
+          <a:solidFill>
+            <a:srgbClr val="2F8A28"/>
+          </a:solidFill>
+          <a:ln w="12700">
+            <a:solidFill>
+              <a:srgbClr val="2F8A28"/>
+            </a:solidFill>
+            <a:prstDash val="solid"/>
+          </a:ln>
+        </p:spPr>
+      </p:sp>
+      <p:sp>
+        <p:nvSpPr>
+          <p:cNvPr id="17" name="Text 15"/>
+          <p:cNvSpPr/>
+          <p:nvPr/>
+        </p:nvSpPr>
+        <p:spPr>
+          <a:xfrm>
+            <a:off x="7909560" y="3977640"/>
+            <a:ext cx="2926080" cy="182880"/>
+          </a:xfrm>
+          <a:prstGeom prst="rect">
+            <a:avLst/>
+          </a:prstGeom>
+          <a:noFill/>
+          <a:ln/>
+        </p:spPr>
+        <p:txBody>
+          <a:bodyPr wrap="square" lIns="0" tIns="0" rIns="0" bIns="0" rtlCol="0" anchor="ctr"/>
+          <a:lstStyle/>
+          <a:p>
+            <a:pPr algn="ctr" indent="0" marL="0">
+              <a:buNone/>
+            </a:pPr>
+            <a:r>
+              <a:rPr lang="en-US" sz="1000" dirty="0">
+                <a:solidFill>
+                  <a:srgbClr val="003A63"/>
+                </a:solidFill>
+                <a:latin typeface="Aptos" pitchFamily="34" charset="0"/>
+                <a:ea typeface="Aptos" pitchFamily="34" charset="-122"/>
+                <a:cs typeface="Aptos" pitchFamily="34" charset="-120"/>
+              </a:rPr>
+              <a:t>Concept to action</a:t>
+            </a:r>
+            <a:endParaRPr lang="en-US" sz="1000" dirty="0"/>
+          </a:p>
+        </p:txBody>
+      </p:sp>
+      <p:sp>
+        <p:nvSpPr>
+          <p:cNvPr id="18" name="Shape 16"/>
+          <p:cNvSpPr/>
+          <p:nvPr/>
+        </p:nvSpPr>
+        <p:spPr>
+          <a:xfrm>
+            <a:off x="7635240" y="4498848"/>
+            <a:ext cx="3474720" cy="1143000"/>
+          </a:xfrm>
+          <a:prstGeom prst="roundRect">
+            <a:avLst>
+              <a:gd name="adj" fmla="val 9600"/>
             </a:avLst>
           </a:prstGeom>
           <a:solidFill>
@@ -11109,14 +12268,14 @@
       </p:sp>
       <p:sp>
         <p:nvSpPr>
-          <p:cNvPr id="16" name="Text 14"/>
-          <p:cNvSpPr/>
-          <p:nvPr/>
-        </p:nvSpPr>
-        <p:spPr>
-          <a:xfrm>
-            <a:off x="8074152" y="3666744"/>
-            <a:ext cx="2825496" cy="256032"/>
+          <p:cNvPr id="19" name="Text 17"/>
+          <p:cNvSpPr/>
+          <p:nvPr/>
+        </p:nvSpPr>
+        <p:spPr>
+          <a:xfrm>
+            <a:off x="7799832" y="4645152"/>
+            <a:ext cx="3145536" cy="256032"/>
           </a:xfrm>
           <a:prstGeom prst="rect">
             <a:avLst/>
@@ -11140,7 +12299,7 @@
                 <a:ea typeface="Aptos" pitchFamily="34" charset="-122"/>
                 <a:cs typeface="Aptos" pitchFamily="34" charset="-120"/>
               </a:rPr>
-              <a:t>Use this for</a:t>
+              <a:t>What to produce</a:t>
             </a:r>
             <a:endParaRPr lang="en-US" sz="1300" dirty="0"/>
           </a:p>
@@ -11148,14 +12307,14 @@
       </p:sp>
       <p:sp>
         <p:nvSpPr>
-          <p:cNvPr id="17" name="Text 15"/>
-          <p:cNvSpPr/>
-          <p:nvPr/>
-        </p:nvSpPr>
-        <p:spPr>
-          <a:xfrm>
-            <a:off x="8074152" y="4023360"/>
-            <a:ext cx="2825496" cy="1097280"/>
+          <p:cNvPr id="20" name="Text 18"/>
+          <p:cNvSpPr/>
+          <p:nvPr/>
+        </p:nvSpPr>
+        <p:spPr>
+          <a:xfrm>
+            <a:off x="7799832" y="5001768"/>
+            <a:ext cx="3145536" cy="502920"/>
           </a:xfrm>
           <a:prstGeom prst="rect">
             <a:avLst/>
@@ -11181,7 +12340,7 @@
                 <a:ea typeface="Aptos" pitchFamily="34" charset="-122"/>
                 <a:cs typeface="Aptos" pitchFamily="34" charset="-120"/>
               </a:rPr>
-              <a:t>Connect the concept to public health decisions, safeguards, documentation, or implementation work.</a:t>
+              <a:t>Use the assignment to test whether you can explain the concept, apply it to a realistic public health situation, and identify what would need review before the work moves forward.</a:t>
             </a:r>
             <a:endParaRPr lang="en-US" sz="1550" dirty="0"/>
           </a:p>
@@ -11355,8 +12514,8 @@
         </p:nvSpPr>
         <p:spPr>
           <a:xfrm>
-            <a:off x="9966960" y="6537960"/>
-            <a:ext cx="1645920" cy="201168"/>
+            <a:off x="9646920" y="6537960"/>
+            <a:ext cx="1965960" cy="201168"/>
           </a:xfrm>
           <a:prstGeom prst="rect">
             <a:avLst/>
@@ -11380,7 +12539,7 @@
                 <a:ea typeface="Aptos" pitchFamily="34" charset="-122"/>
                 <a:cs typeface="Aptos" pitchFamily="34" charset="-120"/>
               </a:rPr>
-              <a:t>Â© Paula Soper</a:t>
+              <a:t>Copyright Paula Soper</a:t>
             </a:r>
             <a:endParaRPr lang="en-US" sz="800" dirty="0"/>
           </a:p>
@@ -11427,77 +12586,13 @@
       </p:sp>
       <p:sp>
         <p:nvSpPr>
-          <p:cNvPr id="8" name="Shape 6"/>
+          <p:cNvPr id="8" name="Text 6"/>
           <p:cNvSpPr/>
           <p:nvPr/>
         </p:nvSpPr>
         <p:spPr>
           <a:xfrm>
             <a:off x="640080" y="658368"/>
-            <a:ext cx="420624" cy="420624"/>
-          </a:xfrm>
-          <a:prstGeom prst="ellipse">
-            <a:avLst/>
-          </a:prstGeom>
-          <a:solidFill>
-            <a:srgbClr val="0068B7"/>
-          </a:solidFill>
-          <a:ln w="12700">
-            <a:solidFill>
-              <a:srgbClr val="0068B7"/>
-            </a:solidFill>
-            <a:prstDash val="solid"/>
-          </a:ln>
-        </p:spPr>
-      </p:sp>
-      <p:sp>
-        <p:nvSpPr>
-          <p:cNvPr id="9" name="Text 7"/>
-          <p:cNvSpPr/>
-          <p:nvPr/>
-        </p:nvSpPr>
-        <p:spPr>
-          <a:xfrm>
-            <a:off x="640080" y="731520"/>
-            <a:ext cx="420624" cy="164592"/>
-          </a:xfrm>
-          <a:prstGeom prst="rect">
-            <a:avLst/>
-          </a:prstGeom>
-          <a:noFill/>
-          <a:ln/>
-        </p:spPr>
-        <p:txBody>
-          <a:bodyPr wrap="square" lIns="0" tIns="0" rIns="0" bIns="0" rtlCol="0" anchor="ctr"/>
-          <a:lstStyle/>
-          <a:p>
-            <a:pPr algn="ctr" indent="0" marL="0">
-              <a:buNone/>
-            </a:pPr>
-            <a:r>
-              <a:rPr lang="en-US" sz="1100" b="1" dirty="0">
-                <a:solidFill>
-                  <a:srgbClr val="FFFFFF"/>
-                </a:solidFill>
-                <a:latin typeface="Aptos" pitchFamily="34" charset="0"/>
-                <a:ea typeface="Aptos" pitchFamily="34" charset="-122"/>
-                <a:cs typeface="Aptos" pitchFamily="34" charset="-120"/>
-              </a:rPr>
-              <a:t>15</a:t>
-            </a:r>
-            <a:endParaRPr lang="en-US" sz="1100" dirty="0"/>
-          </a:p>
-        </p:txBody>
-      </p:sp>
-      <p:sp>
-        <p:nvSpPr>
-          <p:cNvPr id="10" name="Text 8"/>
-          <p:cNvSpPr/>
-          <p:nvPr/>
-        </p:nvSpPr>
-        <p:spPr>
-          <a:xfrm>
-            <a:off x="640080" y="621792"/>
             <a:ext cx="10881360" cy="713232"/>
           </a:xfrm>
           <a:prstGeom prst="rect">
@@ -11532,14 +12627,14 @@
       </p:sp>
       <p:sp>
         <p:nvSpPr>
-          <p:cNvPr id="11" name="Text 9"/>
+          <p:cNvPr id="9" name="Text 7"/>
           <p:cNvSpPr/>
           <p:nvPr/>
         </p:nvSpPr>
         <p:spPr>
           <a:xfrm>
             <a:off x="868680" y="1508760"/>
-            <a:ext cx="6537960" cy="4160520"/>
+            <a:ext cx="6309360" cy="4160520"/>
           </a:xfrm>
           <a:prstGeom prst="rect">
             <a:avLst/>
@@ -11598,18 +12693,18 @@
       </p:sp>
       <p:sp>
         <p:nvSpPr>
-          <p:cNvPr id="12" name="Shape 10"/>
-          <p:cNvSpPr/>
-          <p:nvPr/>
-        </p:nvSpPr>
-        <p:spPr>
-          <a:xfrm>
-            <a:off x="7909560" y="1417320"/>
-            <a:ext cx="3154680" cy="1828800"/>
+          <p:cNvPr id="10" name="Shape 8"/>
+          <p:cNvSpPr/>
+          <p:nvPr/>
+        </p:nvSpPr>
+        <p:spPr>
+          <a:xfrm>
+            <a:off x="7635240" y="1325880"/>
+            <a:ext cx="3474720" cy="1325880"/>
           </a:xfrm>
           <a:prstGeom prst="roundRect">
             <a:avLst>
-              <a:gd name="adj" fmla="val 6000"/>
+              <a:gd name="adj" fmla="val 8276"/>
             </a:avLst>
           </a:prstGeom>
           <a:solidFill>
@@ -11625,14 +12720,14 @@
       </p:sp>
       <p:sp>
         <p:nvSpPr>
-          <p:cNvPr id="13" name="Text 11"/>
-          <p:cNvSpPr/>
-          <p:nvPr/>
-        </p:nvSpPr>
-        <p:spPr>
-          <a:xfrm>
-            <a:off x="8074152" y="1563624"/>
-            <a:ext cx="2825496" cy="256032"/>
+          <p:cNvPr id="11" name="Text 9"/>
+          <p:cNvSpPr/>
+          <p:nvPr/>
+        </p:nvSpPr>
+        <p:spPr>
+          <a:xfrm>
+            <a:off x="7799832" y="1472184"/>
+            <a:ext cx="3145536" cy="256032"/>
           </a:xfrm>
           <a:prstGeom prst="rect">
             <a:avLst/>
@@ -11656,7 +12751,7 @@
                 <a:ea typeface="Aptos" pitchFamily="34" charset="-122"/>
                 <a:cs typeface="Aptos" pitchFamily="34" charset="-120"/>
               </a:rPr>
-              <a:t>Key idea</a:t>
+              <a:t>Core concept</a:t>
             </a:r>
             <a:endParaRPr lang="en-US" sz="1300" dirty="0"/>
           </a:p>
@@ -11664,14 +12759,14 @@
       </p:sp>
       <p:sp>
         <p:nvSpPr>
-          <p:cNvPr id="14" name="Text 12"/>
-          <p:cNvSpPr/>
-          <p:nvPr/>
-        </p:nvSpPr>
-        <p:spPr>
-          <a:xfrm>
-            <a:off x="8074152" y="1920240"/>
-            <a:ext cx="2825496" cy="1188720"/>
+          <p:cNvPr id="12" name="Text 10"/>
+          <p:cNvSpPr/>
+          <p:nvPr/>
+        </p:nvSpPr>
+        <p:spPr>
+          <a:xfrm>
+            <a:off x="7799832" y="1828800"/>
+            <a:ext cx="3145536" cy="685800"/>
           </a:xfrm>
           <a:prstGeom prst="rect">
             <a:avLst/>
@@ -11705,18 +12800,159 @@
       </p:sp>
       <p:sp>
         <p:nvSpPr>
-          <p:cNvPr id="15" name="Shape 13"/>
-          <p:cNvSpPr/>
-          <p:nvPr/>
-        </p:nvSpPr>
-        <p:spPr>
-          <a:xfrm>
-            <a:off x="7909560" y="3520440"/>
-            <a:ext cx="3154680" cy="1737360"/>
+          <p:cNvPr id="13" name="Shape 11"/>
+          <p:cNvSpPr/>
+          <p:nvPr/>
+        </p:nvSpPr>
+        <p:spPr>
+          <a:xfrm>
+            <a:off x="7635240" y="2788920"/>
+            <a:ext cx="3474720" cy="1536192"/>
           </a:xfrm>
           <a:prstGeom prst="roundRect">
             <a:avLst>
-              <a:gd name="adj" fmla="val 6316"/>
+              <a:gd name="adj" fmla="val 7143"/>
+            </a:avLst>
+          </a:prstGeom>
+          <a:solidFill>
+            <a:srgbClr val="FFFFFF">
+              <a:alpha val="88000"/>
+            </a:srgbClr>
+          </a:solidFill>
+          <a:ln w="12700">
+            <a:solidFill>
+              <a:srgbClr val="D6E8F2"/>
+            </a:solidFill>
+            <a:prstDash val="solid"/>
+          </a:ln>
+        </p:spPr>
+      </p:sp>
+      <p:sp>
+        <p:nvSpPr>
+          <p:cNvPr id="14" name="Shape 12"/>
+          <p:cNvSpPr/>
+          <p:nvPr/>
+        </p:nvSpPr>
+        <p:spPr>
+          <a:xfrm>
+            <a:off x="8074152" y="3291840"/>
+            <a:ext cx="2596896" cy="749808"/>
+          </a:xfrm>
+          <a:prstGeom prst="rect">
+            <a:avLst/>
+          </a:prstGeom>
+          <a:solidFill>
+            <a:srgbClr val="EAF6F8"/>
+          </a:solidFill>
+          <a:ln w="12700">
+            <a:solidFill>
+              <a:srgbClr val="8ABBD8"/>
+            </a:solidFill>
+            <a:prstDash val="solid"/>
+          </a:ln>
+        </p:spPr>
+      </p:sp>
+      <p:sp>
+        <p:nvSpPr>
+          <p:cNvPr id="15" name="Shape 13"/>
+          <p:cNvSpPr/>
+          <p:nvPr/>
+        </p:nvSpPr>
+        <p:spPr>
+          <a:xfrm>
+            <a:off x="8202168" y="3721608"/>
+            <a:ext cx="2340864" cy="0"/>
+          </a:xfrm>
+          <a:prstGeom prst="line">
+            <a:avLst/>
+          </a:prstGeom>
+          <a:noFill/>
+          <a:ln w="19050">
+            <a:solidFill>
+              <a:srgbClr val="0068B7"/>
+            </a:solidFill>
+            <a:prstDash val="solid"/>
+          </a:ln>
+        </p:spPr>
+      </p:sp>
+      <p:sp>
+        <p:nvSpPr>
+          <p:cNvPr id="16" name="Shape 14"/>
+          <p:cNvSpPr/>
+          <p:nvPr/>
+        </p:nvSpPr>
+        <p:spPr>
+          <a:xfrm>
+            <a:off x="9198864" y="4206240"/>
+            <a:ext cx="347472" cy="347472"/>
+          </a:xfrm>
+          <a:prstGeom prst="ellipse">
+            <a:avLst/>
+          </a:prstGeom>
+          <a:solidFill>
+            <a:srgbClr val="2F8A28"/>
+          </a:solidFill>
+          <a:ln w="12700">
+            <a:solidFill>
+              <a:srgbClr val="2F8A28"/>
+            </a:solidFill>
+            <a:prstDash val="solid"/>
+          </a:ln>
+        </p:spPr>
+      </p:sp>
+      <p:sp>
+        <p:nvSpPr>
+          <p:cNvPr id="17" name="Text 15"/>
+          <p:cNvSpPr/>
+          <p:nvPr/>
+        </p:nvSpPr>
+        <p:spPr>
+          <a:xfrm>
+            <a:off x="7909560" y="3977640"/>
+            <a:ext cx="2926080" cy="182880"/>
+          </a:xfrm>
+          <a:prstGeom prst="rect">
+            <a:avLst/>
+          </a:prstGeom>
+          <a:noFill/>
+          <a:ln/>
+        </p:spPr>
+        <p:txBody>
+          <a:bodyPr wrap="square" lIns="0" tIns="0" rIns="0" bIns="0" rtlCol="0" anchor="ctr"/>
+          <a:lstStyle/>
+          <a:p>
+            <a:pPr algn="ctr" indent="0" marL="0">
+              <a:buNone/>
+            </a:pPr>
+            <a:r>
+              <a:rPr lang="en-US" sz="1000" dirty="0">
+                <a:solidFill>
+                  <a:srgbClr val="003A63"/>
+                </a:solidFill>
+                <a:latin typeface="Aptos" pitchFamily="34" charset="0"/>
+                <a:ea typeface="Aptos" pitchFamily="34" charset="-122"/>
+                <a:cs typeface="Aptos" pitchFamily="34" charset="-120"/>
+              </a:rPr>
+              <a:t>Concept to action</a:t>
+            </a:r>
+            <a:endParaRPr lang="en-US" sz="1000" dirty="0"/>
+          </a:p>
+        </p:txBody>
+      </p:sp>
+      <p:sp>
+        <p:nvSpPr>
+          <p:cNvPr id="18" name="Shape 16"/>
+          <p:cNvSpPr/>
+          <p:nvPr/>
+        </p:nvSpPr>
+        <p:spPr>
+          <a:xfrm>
+            <a:off x="7635240" y="4498848"/>
+            <a:ext cx="3474720" cy="1143000"/>
+          </a:xfrm>
+          <a:prstGeom prst="roundRect">
+            <a:avLst>
+              <a:gd name="adj" fmla="val 9600"/>
             </a:avLst>
           </a:prstGeom>
           <a:solidFill>
@@ -11732,14 +12968,14 @@
       </p:sp>
       <p:sp>
         <p:nvSpPr>
-          <p:cNvPr id="16" name="Text 14"/>
-          <p:cNvSpPr/>
-          <p:nvPr/>
-        </p:nvSpPr>
-        <p:spPr>
-          <a:xfrm>
-            <a:off x="8074152" y="3666744"/>
-            <a:ext cx="2825496" cy="256032"/>
+          <p:cNvPr id="19" name="Text 17"/>
+          <p:cNvSpPr/>
+          <p:nvPr/>
+        </p:nvSpPr>
+        <p:spPr>
+          <a:xfrm>
+            <a:off x="7799832" y="4645152"/>
+            <a:ext cx="3145536" cy="256032"/>
           </a:xfrm>
           <a:prstGeom prst="rect">
             <a:avLst/>
@@ -11763,7 +12999,7 @@
                 <a:ea typeface="Aptos" pitchFamily="34" charset="-122"/>
                 <a:cs typeface="Aptos" pitchFamily="34" charset="-120"/>
               </a:rPr>
-              <a:t>Use this for</a:t>
+              <a:t>Apply it</a:t>
             </a:r>
             <a:endParaRPr lang="en-US" sz="1300" dirty="0"/>
           </a:p>
@@ -11771,14 +13007,14 @@
       </p:sp>
       <p:sp>
         <p:nvSpPr>
-          <p:cNvPr id="17" name="Text 15"/>
-          <p:cNvSpPr/>
-          <p:nvPr/>
-        </p:nvSpPr>
-        <p:spPr>
-          <a:xfrm>
-            <a:off x="8074152" y="4023360"/>
-            <a:ext cx="2825496" cy="1097280"/>
+          <p:cNvPr id="20" name="Text 18"/>
+          <p:cNvSpPr/>
+          <p:nvPr/>
+        </p:nvSpPr>
+        <p:spPr>
+          <a:xfrm>
+            <a:off x="7799832" y="5001768"/>
+            <a:ext cx="3145536" cy="502920"/>
           </a:xfrm>
           <a:prstGeom prst="rect">
             <a:avLst/>
@@ -11804,7 +13040,7 @@
                 <a:ea typeface="Aptos" pitchFamily="34" charset="-122"/>
                 <a:cs typeface="Aptos" pitchFamily="34" charset="-120"/>
               </a:rPr>
-              <a:t>Connect the concept to public health decisions, safeguards, documentation, or implementation work.</a:t>
+              <a:t>Connect the concept to public health purpose, responsible use, required safeguards, documentation, and the next action a department should take.</a:t>
             </a:r>
             <a:endParaRPr lang="en-US" sz="1550" dirty="0"/>
           </a:p>
@@ -11978,8 +13214,8 @@
         </p:nvSpPr>
         <p:spPr>
           <a:xfrm>
-            <a:off x="9966960" y="6537960"/>
-            <a:ext cx="1645920" cy="201168"/>
+            <a:off x="9646920" y="6537960"/>
+            <a:ext cx="1965960" cy="201168"/>
           </a:xfrm>
           <a:prstGeom prst="rect">
             <a:avLst/>
@@ -12003,7 +13239,7 @@
                 <a:ea typeface="Aptos" pitchFamily="34" charset="-122"/>
                 <a:cs typeface="Aptos" pitchFamily="34" charset="-120"/>
               </a:rPr>
-              <a:t>Â© Paula Soper</a:t>
+              <a:t>Copyright Paula Soper</a:t>
             </a:r>
             <a:endParaRPr lang="en-US" sz="800" dirty="0"/>
           </a:p>
@@ -12098,7 +13334,7 @@
         <p:spPr>
           <a:xfrm>
             <a:off x="868680" y="1508760"/>
-            <a:ext cx="6537960" cy="4160520"/>
+            <a:ext cx="6309360" cy="4160520"/>
           </a:xfrm>
           <a:prstGeom prst="rect">
             <a:avLst/>
@@ -12135,12 +13371,12 @@
         </p:nvSpPr>
         <p:spPr>
           <a:xfrm>
-            <a:off x="7909560" y="1417320"/>
-            <a:ext cx="3154680" cy="1828800"/>
+            <a:off x="7635240" y="1325880"/>
+            <a:ext cx="3474720" cy="1325880"/>
           </a:xfrm>
           <a:prstGeom prst="roundRect">
             <a:avLst>
-              <a:gd name="adj" fmla="val 6000"/>
+              <a:gd name="adj" fmla="val 8276"/>
             </a:avLst>
           </a:prstGeom>
           <a:solidFill>
@@ -12162,8 +13398,8 @@
         </p:nvSpPr>
         <p:spPr>
           <a:xfrm>
-            <a:off x="8074152" y="1563624"/>
-            <a:ext cx="2825496" cy="256032"/>
+            <a:off x="7799832" y="1472184"/>
+            <a:ext cx="3145536" cy="256032"/>
           </a:xfrm>
           <a:prstGeom prst="rect">
             <a:avLst/>
@@ -12187,7 +13423,7 @@
                 <a:ea typeface="Aptos" pitchFamily="34" charset="-122"/>
                 <a:cs typeface="Aptos" pitchFamily="34" charset="-120"/>
               </a:rPr>
-              <a:t>Key idea</a:t>
+              <a:t>Core concept</a:t>
             </a:r>
             <a:endParaRPr lang="en-US" sz="1300" dirty="0"/>
           </a:p>
@@ -12201,8 +13437,8 @@
         </p:nvSpPr>
         <p:spPr>
           <a:xfrm>
-            <a:off x="8074152" y="1920240"/>
-            <a:ext cx="2825496" cy="1188720"/>
+            <a:off x="7799832" y="1828800"/>
+            <a:ext cx="3145536" cy="685800"/>
           </a:xfrm>
           <a:prstGeom prst="rect">
             <a:avLst/>
@@ -12242,12 +13478,153 @@
         </p:nvSpPr>
         <p:spPr>
           <a:xfrm>
-            <a:off x="7909560" y="3520440"/>
-            <a:ext cx="3154680" cy="1737360"/>
+            <a:off x="7635240" y="2788920"/>
+            <a:ext cx="3474720" cy="1536192"/>
           </a:xfrm>
           <a:prstGeom prst="roundRect">
             <a:avLst>
-              <a:gd name="adj" fmla="val 6316"/>
+              <a:gd name="adj" fmla="val 7143"/>
+            </a:avLst>
+          </a:prstGeom>
+          <a:solidFill>
+            <a:srgbClr val="FFFFFF">
+              <a:alpha val="88000"/>
+            </a:srgbClr>
+          </a:solidFill>
+          <a:ln w="12700">
+            <a:solidFill>
+              <a:srgbClr val="D6E8F2"/>
+            </a:solidFill>
+            <a:prstDash val="solid"/>
+          </a:ln>
+        </p:spPr>
+      </p:sp>
+      <p:sp>
+        <p:nvSpPr>
+          <p:cNvPr id="14" name="Shape 12"/>
+          <p:cNvSpPr/>
+          <p:nvPr/>
+        </p:nvSpPr>
+        <p:spPr>
+          <a:xfrm>
+            <a:off x="8074152" y="3291840"/>
+            <a:ext cx="2596896" cy="749808"/>
+          </a:xfrm>
+          <a:prstGeom prst="rect">
+            <a:avLst/>
+          </a:prstGeom>
+          <a:solidFill>
+            <a:srgbClr val="EAF6F8"/>
+          </a:solidFill>
+          <a:ln w="12700">
+            <a:solidFill>
+              <a:srgbClr val="8ABBD8"/>
+            </a:solidFill>
+            <a:prstDash val="solid"/>
+          </a:ln>
+        </p:spPr>
+      </p:sp>
+      <p:sp>
+        <p:nvSpPr>
+          <p:cNvPr id="15" name="Shape 13"/>
+          <p:cNvSpPr/>
+          <p:nvPr/>
+        </p:nvSpPr>
+        <p:spPr>
+          <a:xfrm>
+            <a:off x="8202168" y="3721608"/>
+            <a:ext cx="2340864" cy="0"/>
+          </a:xfrm>
+          <a:prstGeom prst="line">
+            <a:avLst/>
+          </a:prstGeom>
+          <a:noFill/>
+          <a:ln w="19050">
+            <a:solidFill>
+              <a:srgbClr val="0068B7"/>
+            </a:solidFill>
+            <a:prstDash val="solid"/>
+          </a:ln>
+        </p:spPr>
+      </p:sp>
+      <p:sp>
+        <p:nvSpPr>
+          <p:cNvPr id="16" name="Shape 14"/>
+          <p:cNvSpPr/>
+          <p:nvPr/>
+        </p:nvSpPr>
+        <p:spPr>
+          <a:xfrm>
+            <a:off x="9198864" y="4206240"/>
+            <a:ext cx="347472" cy="347472"/>
+          </a:xfrm>
+          <a:prstGeom prst="ellipse">
+            <a:avLst/>
+          </a:prstGeom>
+          <a:solidFill>
+            <a:srgbClr val="2F8A28"/>
+          </a:solidFill>
+          <a:ln w="12700">
+            <a:solidFill>
+              <a:srgbClr val="2F8A28"/>
+            </a:solidFill>
+            <a:prstDash val="solid"/>
+          </a:ln>
+        </p:spPr>
+      </p:sp>
+      <p:sp>
+        <p:nvSpPr>
+          <p:cNvPr id="17" name="Text 15"/>
+          <p:cNvSpPr/>
+          <p:nvPr/>
+        </p:nvSpPr>
+        <p:spPr>
+          <a:xfrm>
+            <a:off x="7909560" y="3977640"/>
+            <a:ext cx="2926080" cy="182880"/>
+          </a:xfrm>
+          <a:prstGeom prst="rect">
+            <a:avLst/>
+          </a:prstGeom>
+          <a:noFill/>
+          <a:ln/>
+        </p:spPr>
+        <p:txBody>
+          <a:bodyPr wrap="square" lIns="0" tIns="0" rIns="0" bIns="0" rtlCol="0" anchor="ctr"/>
+          <a:lstStyle/>
+          <a:p>
+            <a:pPr algn="ctr" indent="0" marL="0">
+              <a:buNone/>
+            </a:pPr>
+            <a:r>
+              <a:rPr lang="en-US" sz="1000" dirty="0">
+                <a:solidFill>
+                  <a:srgbClr val="003A63"/>
+                </a:solidFill>
+                <a:latin typeface="Aptos" pitchFamily="34" charset="0"/>
+                <a:ea typeface="Aptos" pitchFamily="34" charset="-122"/>
+                <a:cs typeface="Aptos" pitchFamily="34" charset="-120"/>
+              </a:rPr>
+              <a:t>Concept to action</a:t>
+            </a:r>
+            <a:endParaRPr lang="en-US" sz="1000" dirty="0"/>
+          </a:p>
+        </p:txBody>
+      </p:sp>
+      <p:sp>
+        <p:nvSpPr>
+          <p:cNvPr id="18" name="Shape 16"/>
+          <p:cNvSpPr/>
+          <p:nvPr/>
+        </p:nvSpPr>
+        <p:spPr>
+          <a:xfrm>
+            <a:off x="7635240" y="4498848"/>
+            <a:ext cx="3474720" cy="1143000"/>
+          </a:xfrm>
+          <a:prstGeom prst="roundRect">
+            <a:avLst>
+              <a:gd name="adj" fmla="val 9600"/>
             </a:avLst>
           </a:prstGeom>
           <a:solidFill>
@@ -12263,14 +13640,14 @@
       </p:sp>
       <p:sp>
         <p:nvSpPr>
-          <p:cNvPr id="14" name="Text 12"/>
-          <p:cNvSpPr/>
-          <p:nvPr/>
-        </p:nvSpPr>
-        <p:spPr>
-          <a:xfrm>
-            <a:off x="8074152" y="3666744"/>
-            <a:ext cx="2825496" cy="256032"/>
+          <p:cNvPr id="19" name="Text 17"/>
+          <p:cNvSpPr/>
+          <p:nvPr/>
+        </p:nvSpPr>
+        <p:spPr>
+          <a:xfrm>
+            <a:off x="7799832" y="4645152"/>
+            <a:ext cx="3145536" cy="256032"/>
           </a:xfrm>
           <a:prstGeom prst="rect">
             <a:avLst/>
@@ -12294,7 +13671,7 @@
                 <a:ea typeface="Aptos" pitchFamily="34" charset="-122"/>
                 <a:cs typeface="Aptos" pitchFamily="34" charset="-120"/>
               </a:rPr>
-              <a:t>Use this for</a:t>
+              <a:t>Apply it</a:t>
             </a:r>
             <a:endParaRPr lang="en-US" sz="1300" dirty="0"/>
           </a:p>
@@ -12302,14 +13679,14 @@
       </p:sp>
       <p:sp>
         <p:nvSpPr>
-          <p:cNvPr id="15" name="Text 13"/>
-          <p:cNvSpPr/>
-          <p:nvPr/>
-        </p:nvSpPr>
-        <p:spPr>
-          <a:xfrm>
-            <a:off x="8074152" y="4023360"/>
-            <a:ext cx="2825496" cy="1097280"/>
+          <p:cNvPr id="20" name="Text 18"/>
+          <p:cNvSpPr/>
+          <p:nvPr/>
+        </p:nvSpPr>
+        <p:spPr>
+          <a:xfrm>
+            <a:off x="7799832" y="5001768"/>
+            <a:ext cx="3145536" cy="502920"/>
           </a:xfrm>
           <a:prstGeom prst="rect">
             <a:avLst/>
@@ -12335,7 +13712,7 @@
                 <a:ea typeface="Aptos" pitchFamily="34" charset="-122"/>
                 <a:cs typeface="Aptos" pitchFamily="34" charset="-120"/>
               </a:rPr>
-              <a:t>Connect the concept to public health decisions, safeguards, documentation, or implementation work.</a:t>
+              <a:t>Connect the concept to public health purpose, responsible use, required safeguards, documentation, and the next action a department should take.</a:t>
             </a:r>
             <a:endParaRPr lang="en-US" sz="1550" dirty="0"/>
           </a:p>
@@ -12509,8 +13886,8 @@
         </p:nvSpPr>
         <p:spPr>
           <a:xfrm>
-            <a:off x="9966960" y="6537960"/>
-            <a:ext cx="1645920" cy="201168"/>
+            <a:off x="9646920" y="6537960"/>
+            <a:ext cx="1965960" cy="201168"/>
           </a:xfrm>
           <a:prstGeom prst="rect">
             <a:avLst/>
@@ -12534,7 +13911,7 @@
                 <a:ea typeface="Aptos" pitchFamily="34" charset="-122"/>
                 <a:cs typeface="Aptos" pitchFamily="34" charset="-120"/>
               </a:rPr>
-              <a:t>Â© Paula Soper</a:t>
+              <a:t>Copyright Paula Soper</a:t>
             </a:r>
             <a:endParaRPr lang="en-US" sz="800" dirty="0"/>
           </a:p>
@@ -12877,46 +14254,7 @@
       </p:sp>
       <p:sp>
         <p:nvSpPr>
-          <p:cNvPr id="15" name="Text 13"/>
-          <p:cNvSpPr/>
-          <p:nvPr/>
-        </p:nvSpPr>
-        <p:spPr>
-          <a:xfrm>
-            <a:off x="8817864" y="4187952"/>
-            <a:ext cx="201168" cy="256032"/>
-          </a:xfrm>
-          <a:prstGeom prst="rect">
-            <a:avLst/>
-          </a:prstGeom>
-          <a:noFill/>
-          <a:ln/>
-        </p:spPr>
-        <p:txBody>
-          <a:bodyPr wrap="square" lIns="0" tIns="0" rIns="0" bIns="0" rtlCol="0" anchor="ctr"/>
-          <a:lstStyle/>
-          <a:p>
-            <a:pPr algn="ctr" indent="0" marL="0">
-              <a:buNone/>
-            </a:pPr>
-            <a:r>
-              <a:rPr lang="en-US" sz="1800" b="1" dirty="0">
-                <a:solidFill>
-                  <a:srgbClr val="0068B7"/>
-                </a:solidFill>
-                <a:latin typeface="Aptos" pitchFamily="34" charset="0"/>
-                <a:ea typeface="Aptos" pitchFamily="34" charset="-122"/>
-                <a:cs typeface="Aptos" pitchFamily="34" charset="-120"/>
-              </a:rPr>
-              <a:t>â†’</a:t>
-            </a:r>
-            <a:endParaRPr lang="en-US" sz="1800" dirty="0"/>
-          </a:p>
-        </p:txBody>
-      </p:sp>
-      <p:sp>
-        <p:nvSpPr>
-          <p:cNvPr id="16" name="Shape 14"/>
+          <p:cNvPr id="15" name="Shape 13"/>
           <p:cNvSpPr/>
           <p:nvPr/>
         </p:nvSpPr>
@@ -12943,7 +14281,7 @@
       </p:sp>
       <p:sp>
         <p:nvSpPr>
-          <p:cNvPr id="17" name="Text 15"/>
+          <p:cNvPr id="16" name="Text 14"/>
           <p:cNvSpPr/>
           <p:nvPr/>
         </p:nvSpPr>
@@ -12984,46 +14322,7 @@
       </p:sp>
       <p:sp>
         <p:nvSpPr>
-          <p:cNvPr id="18" name="Text 16"/>
-          <p:cNvSpPr/>
-          <p:nvPr/>
-        </p:nvSpPr>
-        <p:spPr>
-          <a:xfrm>
-            <a:off x="10046208" y="4187952"/>
-            <a:ext cx="201168" cy="256032"/>
-          </a:xfrm>
-          <a:prstGeom prst="rect">
-            <a:avLst/>
-          </a:prstGeom>
-          <a:noFill/>
-          <a:ln/>
-        </p:spPr>
-        <p:txBody>
-          <a:bodyPr wrap="square" lIns="0" tIns="0" rIns="0" bIns="0" rtlCol="0" anchor="ctr"/>
-          <a:lstStyle/>
-          <a:p>
-            <a:pPr algn="ctr" indent="0" marL="0">
-              <a:buNone/>
-            </a:pPr>
-            <a:r>
-              <a:rPr lang="en-US" sz="1800" b="1" dirty="0">
-                <a:solidFill>
-                  <a:srgbClr val="0068B7"/>
-                </a:solidFill>
-                <a:latin typeface="Aptos" pitchFamily="34" charset="0"/>
-                <a:ea typeface="Aptos" pitchFamily="34" charset="-122"/>
-                <a:cs typeface="Aptos" pitchFamily="34" charset="-120"/>
-              </a:rPr>
-              <a:t>â†’</a:t>
-            </a:r>
-            <a:endParaRPr lang="en-US" sz="1800" dirty="0"/>
-          </a:p>
-        </p:txBody>
-      </p:sp>
-      <p:sp>
-        <p:nvSpPr>
-          <p:cNvPr id="19" name="Shape 17"/>
+          <p:cNvPr id="17" name="Shape 15"/>
           <p:cNvSpPr/>
           <p:nvPr/>
         </p:nvSpPr>
@@ -13050,7 +14349,7 @@
       </p:sp>
       <p:sp>
         <p:nvSpPr>
-          <p:cNvPr id="20" name="Text 18"/>
+          <p:cNvPr id="18" name="Text 16"/>
           <p:cNvSpPr/>
           <p:nvPr/>
         </p:nvSpPr>
@@ -13257,8 +14556,8 @@
         </p:nvSpPr>
         <p:spPr>
           <a:xfrm>
-            <a:off x="9966960" y="6537960"/>
-            <a:ext cx="1645920" cy="201168"/>
+            <a:off x="9646920" y="6537960"/>
+            <a:ext cx="1965960" cy="201168"/>
           </a:xfrm>
           <a:prstGeom prst="rect">
             <a:avLst/>
@@ -13282,7 +14581,7 @@
                 <a:ea typeface="Aptos" pitchFamily="34" charset="-122"/>
                 <a:cs typeface="Aptos" pitchFamily="34" charset="-120"/>
               </a:rPr>
-              <a:t>Â© Paula Soper</a:t>
+              <a:t>Copyright Paula Soper</a:t>
             </a:r>
             <a:endParaRPr lang="en-US" sz="800" dirty="0"/>
           </a:p>
@@ -13625,46 +14924,7 @@
       </p:sp>
       <p:sp>
         <p:nvSpPr>
-          <p:cNvPr id="15" name="Text 13"/>
-          <p:cNvSpPr/>
-          <p:nvPr/>
-        </p:nvSpPr>
-        <p:spPr>
-          <a:xfrm>
-            <a:off x="8817864" y="4187952"/>
-            <a:ext cx="201168" cy="256032"/>
-          </a:xfrm>
-          <a:prstGeom prst="rect">
-            <a:avLst/>
-          </a:prstGeom>
-          <a:noFill/>
-          <a:ln/>
-        </p:spPr>
-        <p:txBody>
-          <a:bodyPr wrap="square" lIns="0" tIns="0" rIns="0" bIns="0" rtlCol="0" anchor="ctr"/>
-          <a:lstStyle/>
-          <a:p>
-            <a:pPr algn="ctr" indent="0" marL="0">
-              <a:buNone/>
-            </a:pPr>
-            <a:r>
-              <a:rPr lang="en-US" sz="1800" b="1" dirty="0">
-                <a:solidFill>
-                  <a:srgbClr val="0068B7"/>
-                </a:solidFill>
-                <a:latin typeface="Aptos" pitchFamily="34" charset="0"/>
-                <a:ea typeface="Aptos" pitchFamily="34" charset="-122"/>
-                <a:cs typeface="Aptos" pitchFamily="34" charset="-120"/>
-              </a:rPr>
-              <a:t>â†’</a:t>
-            </a:r>
-            <a:endParaRPr lang="en-US" sz="1800" dirty="0"/>
-          </a:p>
-        </p:txBody>
-      </p:sp>
-      <p:sp>
-        <p:nvSpPr>
-          <p:cNvPr id="16" name="Shape 14"/>
+          <p:cNvPr id="15" name="Shape 13"/>
           <p:cNvSpPr/>
           <p:nvPr/>
         </p:nvSpPr>
@@ -13691,7 +14951,7 @@
       </p:sp>
       <p:sp>
         <p:nvSpPr>
-          <p:cNvPr id="17" name="Text 15"/>
+          <p:cNvPr id="16" name="Text 14"/>
           <p:cNvSpPr/>
           <p:nvPr/>
         </p:nvSpPr>
@@ -13732,46 +14992,7 @@
       </p:sp>
       <p:sp>
         <p:nvSpPr>
-          <p:cNvPr id="18" name="Text 16"/>
-          <p:cNvSpPr/>
-          <p:nvPr/>
-        </p:nvSpPr>
-        <p:spPr>
-          <a:xfrm>
-            <a:off x="10046208" y="4187952"/>
-            <a:ext cx="201168" cy="256032"/>
-          </a:xfrm>
-          <a:prstGeom prst="rect">
-            <a:avLst/>
-          </a:prstGeom>
-          <a:noFill/>
-          <a:ln/>
-        </p:spPr>
-        <p:txBody>
-          <a:bodyPr wrap="square" lIns="0" tIns="0" rIns="0" bIns="0" rtlCol="0" anchor="ctr"/>
-          <a:lstStyle/>
-          <a:p>
-            <a:pPr algn="ctr" indent="0" marL="0">
-              <a:buNone/>
-            </a:pPr>
-            <a:r>
-              <a:rPr lang="en-US" sz="1800" b="1" dirty="0">
-                <a:solidFill>
-                  <a:srgbClr val="0068B7"/>
-                </a:solidFill>
-                <a:latin typeface="Aptos" pitchFamily="34" charset="0"/>
-                <a:ea typeface="Aptos" pitchFamily="34" charset="-122"/>
-                <a:cs typeface="Aptos" pitchFamily="34" charset="-120"/>
-              </a:rPr>
-              <a:t>â†’</a:t>
-            </a:r>
-            <a:endParaRPr lang="en-US" sz="1800" dirty="0"/>
-          </a:p>
-        </p:txBody>
-      </p:sp>
-      <p:sp>
-        <p:nvSpPr>
-          <p:cNvPr id="19" name="Shape 17"/>
+          <p:cNvPr id="17" name="Shape 15"/>
           <p:cNvSpPr/>
           <p:nvPr/>
         </p:nvSpPr>
@@ -13798,7 +15019,7 @@
       </p:sp>
       <p:sp>
         <p:nvSpPr>
-          <p:cNvPr id="20" name="Text 18"/>
+          <p:cNvPr id="18" name="Text 16"/>
           <p:cNvSpPr/>
           <p:nvPr/>
         </p:nvSpPr>
@@ -14005,8 +15226,8 @@
         </p:nvSpPr>
         <p:spPr>
           <a:xfrm>
-            <a:off x="9966960" y="6537960"/>
-            <a:ext cx="1645920" cy="201168"/>
+            <a:off x="9646920" y="6537960"/>
+            <a:ext cx="1965960" cy="201168"/>
           </a:xfrm>
           <a:prstGeom prst="rect">
             <a:avLst/>
@@ -14030,7 +15251,7 @@
                 <a:ea typeface="Aptos" pitchFamily="34" charset="-122"/>
                 <a:cs typeface="Aptos" pitchFamily="34" charset="-120"/>
               </a:rPr>
-              <a:t>Â© Paula Soper</a:t>
+              <a:t>Copyright Paula Soper</a:t>
             </a:r>
             <a:endParaRPr lang="en-US" sz="800" dirty="0"/>
           </a:p>
@@ -14077,77 +15298,13 @@
       </p:sp>
       <p:sp>
         <p:nvSpPr>
-          <p:cNvPr id="8" name="Shape 6"/>
+          <p:cNvPr id="8" name="Text 6"/>
           <p:cNvSpPr/>
           <p:nvPr/>
         </p:nvSpPr>
         <p:spPr>
           <a:xfrm>
             <a:off x="640080" y="658368"/>
-            <a:ext cx="420624" cy="420624"/>
-          </a:xfrm>
-          <a:prstGeom prst="ellipse">
-            <a:avLst/>
-          </a:prstGeom>
-          <a:solidFill>
-            <a:srgbClr val="0068B7"/>
-          </a:solidFill>
-          <a:ln w="12700">
-            <a:solidFill>
-              <a:srgbClr val="0068B7"/>
-            </a:solidFill>
-            <a:prstDash val="solid"/>
-          </a:ln>
-        </p:spPr>
-      </p:sp>
-      <p:sp>
-        <p:nvSpPr>
-          <p:cNvPr id="9" name="Text 7"/>
-          <p:cNvSpPr/>
-          <p:nvPr/>
-        </p:nvSpPr>
-        <p:spPr>
-          <a:xfrm>
-            <a:off x="640080" y="731520"/>
-            <a:ext cx="420624" cy="164592"/>
-          </a:xfrm>
-          <a:prstGeom prst="rect">
-            <a:avLst/>
-          </a:prstGeom>
-          <a:noFill/>
-          <a:ln/>
-        </p:spPr>
-        <p:txBody>
-          <a:bodyPr wrap="square" lIns="0" tIns="0" rIns="0" bIns="0" rtlCol="0" anchor="ctr"/>
-          <a:lstStyle/>
-          <a:p>
-            <a:pPr algn="ctr" indent="0" marL="0">
-              <a:buNone/>
-            </a:pPr>
-            <a:r>
-              <a:rPr lang="en-US" sz="1100" b="1" dirty="0">
-                <a:solidFill>
-                  <a:srgbClr val="FFFFFF"/>
-                </a:solidFill>
-                <a:latin typeface="Aptos" pitchFamily="34" charset="0"/>
-                <a:ea typeface="Aptos" pitchFamily="34" charset="-122"/>
-                <a:cs typeface="Aptos" pitchFamily="34" charset="-120"/>
-              </a:rPr>
-              <a:t>1</a:t>
-            </a:r>
-            <a:endParaRPr lang="en-US" sz="1100" dirty="0"/>
-          </a:p>
-        </p:txBody>
-      </p:sp>
-      <p:sp>
-        <p:nvSpPr>
-          <p:cNvPr id="10" name="Text 8"/>
-          <p:cNvSpPr/>
-          <p:nvPr/>
-        </p:nvSpPr>
-        <p:spPr>
-          <a:xfrm>
-            <a:off x="640080" y="621792"/>
             <a:ext cx="10881360" cy="713232"/>
           </a:xfrm>
           <a:prstGeom prst="rect">
@@ -14182,14 +15339,14 @@
       </p:sp>
       <p:sp>
         <p:nvSpPr>
-          <p:cNvPr id="11" name="Text 9"/>
+          <p:cNvPr id="9" name="Text 7"/>
           <p:cNvSpPr/>
           <p:nvPr/>
         </p:nvSpPr>
         <p:spPr>
           <a:xfrm>
             <a:off x="868680" y="1508760"/>
-            <a:ext cx="6537960" cy="4160520"/>
+            <a:ext cx="6309360" cy="4160520"/>
           </a:xfrm>
           <a:prstGeom prst="rect">
             <a:avLst/>
@@ -14248,18 +15405,18 @@
       </p:sp>
       <p:sp>
         <p:nvSpPr>
-          <p:cNvPr id="12" name="Shape 10"/>
-          <p:cNvSpPr/>
-          <p:nvPr/>
-        </p:nvSpPr>
-        <p:spPr>
-          <a:xfrm>
-            <a:off x="7909560" y="1417320"/>
-            <a:ext cx="3154680" cy="1828800"/>
+          <p:cNvPr id="10" name="Shape 8"/>
+          <p:cNvSpPr/>
+          <p:nvPr/>
+        </p:nvSpPr>
+        <p:spPr>
+          <a:xfrm>
+            <a:off x="7635240" y="1325880"/>
+            <a:ext cx="3474720" cy="1325880"/>
           </a:xfrm>
           <a:prstGeom prst="roundRect">
             <a:avLst>
-              <a:gd name="adj" fmla="val 6000"/>
+              <a:gd name="adj" fmla="val 8276"/>
             </a:avLst>
           </a:prstGeom>
           <a:solidFill>
@@ -14275,14 +15432,14 @@
       </p:sp>
       <p:sp>
         <p:nvSpPr>
-          <p:cNvPr id="13" name="Text 11"/>
-          <p:cNvSpPr/>
-          <p:nvPr/>
-        </p:nvSpPr>
-        <p:spPr>
-          <a:xfrm>
-            <a:off x="8074152" y="1563624"/>
-            <a:ext cx="2825496" cy="256032"/>
+          <p:cNvPr id="11" name="Text 9"/>
+          <p:cNvSpPr/>
+          <p:nvPr/>
+        </p:nvSpPr>
+        <p:spPr>
+          <a:xfrm>
+            <a:off x="7799832" y="1472184"/>
+            <a:ext cx="3145536" cy="256032"/>
           </a:xfrm>
           <a:prstGeom prst="rect">
             <a:avLst/>
@@ -14306,7 +15463,7 @@
                 <a:ea typeface="Aptos" pitchFamily="34" charset="-122"/>
                 <a:cs typeface="Aptos" pitchFamily="34" charset="-120"/>
               </a:rPr>
-              <a:t>Key idea</a:t>
+              <a:t>Practice focus</a:t>
             </a:r>
             <a:endParaRPr lang="en-US" sz="1300" dirty="0"/>
           </a:p>
@@ -14314,14 +15471,14 @@
       </p:sp>
       <p:sp>
         <p:nvSpPr>
-          <p:cNvPr id="14" name="Text 12"/>
-          <p:cNvSpPr/>
-          <p:nvPr/>
-        </p:nvSpPr>
-        <p:spPr>
-          <a:xfrm>
-            <a:off x="8074152" y="1920240"/>
-            <a:ext cx="2825496" cy="1188720"/>
+          <p:cNvPr id="12" name="Text 10"/>
+          <p:cNvSpPr/>
+          <p:nvPr/>
+        </p:nvSpPr>
+        <p:spPr>
+          <a:xfrm>
+            <a:off x="7799832" y="1828800"/>
+            <a:ext cx="3145536" cy="685800"/>
           </a:xfrm>
           <a:prstGeom prst="rect">
             <a:avLst/>
@@ -14355,18 +15512,159 @@
       </p:sp>
       <p:sp>
         <p:nvSpPr>
-          <p:cNvPr id="15" name="Shape 13"/>
-          <p:cNvSpPr/>
-          <p:nvPr/>
-        </p:nvSpPr>
-        <p:spPr>
-          <a:xfrm>
-            <a:off x="7909560" y="3520440"/>
-            <a:ext cx="3154680" cy="1737360"/>
+          <p:cNvPr id="13" name="Shape 11"/>
+          <p:cNvSpPr/>
+          <p:nvPr/>
+        </p:nvSpPr>
+        <p:spPr>
+          <a:xfrm>
+            <a:off x="7635240" y="2788920"/>
+            <a:ext cx="3474720" cy="1536192"/>
           </a:xfrm>
           <a:prstGeom prst="roundRect">
             <a:avLst>
-              <a:gd name="adj" fmla="val 6316"/>
+              <a:gd name="adj" fmla="val 7143"/>
+            </a:avLst>
+          </a:prstGeom>
+          <a:solidFill>
+            <a:srgbClr val="FFFFFF">
+              <a:alpha val="88000"/>
+            </a:srgbClr>
+          </a:solidFill>
+          <a:ln w="12700">
+            <a:solidFill>
+              <a:srgbClr val="D6E8F2"/>
+            </a:solidFill>
+            <a:prstDash val="solid"/>
+          </a:ln>
+        </p:spPr>
+      </p:sp>
+      <p:sp>
+        <p:nvSpPr>
+          <p:cNvPr id="14" name="Shape 12"/>
+          <p:cNvSpPr/>
+          <p:nvPr/>
+        </p:nvSpPr>
+        <p:spPr>
+          <a:xfrm>
+            <a:off x="8074152" y="3291840"/>
+            <a:ext cx="2596896" cy="749808"/>
+          </a:xfrm>
+          <a:prstGeom prst="rect">
+            <a:avLst/>
+          </a:prstGeom>
+          <a:solidFill>
+            <a:srgbClr val="EAF6F8"/>
+          </a:solidFill>
+          <a:ln w="12700">
+            <a:solidFill>
+              <a:srgbClr val="8ABBD8"/>
+            </a:solidFill>
+            <a:prstDash val="solid"/>
+          </a:ln>
+        </p:spPr>
+      </p:sp>
+      <p:sp>
+        <p:nvSpPr>
+          <p:cNvPr id="15" name="Shape 13"/>
+          <p:cNvSpPr/>
+          <p:nvPr/>
+        </p:nvSpPr>
+        <p:spPr>
+          <a:xfrm>
+            <a:off x="8202168" y="3721608"/>
+            <a:ext cx="2340864" cy="0"/>
+          </a:xfrm>
+          <a:prstGeom prst="line">
+            <a:avLst/>
+          </a:prstGeom>
+          <a:noFill/>
+          <a:ln w="19050">
+            <a:solidFill>
+              <a:srgbClr val="0068B7"/>
+            </a:solidFill>
+            <a:prstDash val="solid"/>
+          </a:ln>
+        </p:spPr>
+      </p:sp>
+      <p:sp>
+        <p:nvSpPr>
+          <p:cNvPr id="16" name="Shape 14"/>
+          <p:cNvSpPr/>
+          <p:nvPr/>
+        </p:nvSpPr>
+        <p:spPr>
+          <a:xfrm>
+            <a:off x="9198864" y="4206240"/>
+            <a:ext cx="347472" cy="347472"/>
+          </a:xfrm>
+          <a:prstGeom prst="ellipse">
+            <a:avLst/>
+          </a:prstGeom>
+          <a:solidFill>
+            <a:srgbClr val="2F8A28"/>
+          </a:solidFill>
+          <a:ln w="12700">
+            <a:solidFill>
+              <a:srgbClr val="2F8A28"/>
+            </a:solidFill>
+            <a:prstDash val="solid"/>
+          </a:ln>
+        </p:spPr>
+      </p:sp>
+      <p:sp>
+        <p:nvSpPr>
+          <p:cNvPr id="17" name="Text 15"/>
+          <p:cNvSpPr/>
+          <p:nvPr/>
+        </p:nvSpPr>
+        <p:spPr>
+          <a:xfrm>
+            <a:off x="7909560" y="3977640"/>
+            <a:ext cx="2926080" cy="182880"/>
+          </a:xfrm>
+          <a:prstGeom prst="rect">
+            <a:avLst/>
+          </a:prstGeom>
+          <a:noFill/>
+          <a:ln/>
+        </p:spPr>
+        <p:txBody>
+          <a:bodyPr wrap="square" lIns="0" tIns="0" rIns="0" bIns="0" rtlCol="0" anchor="ctr"/>
+          <a:lstStyle/>
+          <a:p>
+            <a:pPr algn="ctr" indent="0" marL="0">
+              <a:buNone/>
+            </a:pPr>
+            <a:r>
+              <a:rPr lang="en-US" sz="1000" dirty="0">
+                <a:solidFill>
+                  <a:srgbClr val="003A63"/>
+                </a:solidFill>
+                <a:latin typeface="Aptos" pitchFamily="34" charset="0"/>
+                <a:ea typeface="Aptos" pitchFamily="34" charset="-122"/>
+                <a:cs typeface="Aptos" pitchFamily="34" charset="-120"/>
+              </a:rPr>
+              <a:t>Concept to action</a:t>
+            </a:r>
+            <a:endParaRPr lang="en-US" sz="1000" dirty="0"/>
+          </a:p>
+        </p:txBody>
+      </p:sp>
+      <p:sp>
+        <p:nvSpPr>
+          <p:cNvPr id="18" name="Shape 16"/>
+          <p:cNvSpPr/>
+          <p:nvPr/>
+        </p:nvSpPr>
+        <p:spPr>
+          <a:xfrm>
+            <a:off x="7635240" y="4498848"/>
+            <a:ext cx="3474720" cy="1143000"/>
+          </a:xfrm>
+          <a:prstGeom prst="roundRect">
+            <a:avLst>
+              <a:gd name="adj" fmla="val 9600"/>
             </a:avLst>
           </a:prstGeom>
           <a:solidFill>
@@ -14382,14 +15680,14 @@
       </p:sp>
       <p:sp>
         <p:nvSpPr>
-          <p:cNvPr id="16" name="Text 14"/>
-          <p:cNvSpPr/>
-          <p:nvPr/>
-        </p:nvSpPr>
-        <p:spPr>
-          <a:xfrm>
-            <a:off x="8074152" y="3666744"/>
-            <a:ext cx="2825496" cy="256032"/>
+          <p:cNvPr id="19" name="Text 17"/>
+          <p:cNvSpPr/>
+          <p:nvPr/>
+        </p:nvSpPr>
+        <p:spPr>
+          <a:xfrm>
+            <a:off x="7799832" y="4645152"/>
+            <a:ext cx="3145536" cy="256032"/>
           </a:xfrm>
           <a:prstGeom prst="rect">
             <a:avLst/>
@@ -14413,7 +15711,7 @@
                 <a:ea typeface="Aptos" pitchFamily="34" charset="-122"/>
                 <a:cs typeface="Aptos" pitchFamily="34" charset="-120"/>
               </a:rPr>
-              <a:t>Use this for</a:t>
+              <a:t>What to produce</a:t>
             </a:r>
             <a:endParaRPr lang="en-US" sz="1300" dirty="0"/>
           </a:p>
@@ -14421,14 +15719,14 @@
       </p:sp>
       <p:sp>
         <p:nvSpPr>
-          <p:cNvPr id="17" name="Text 15"/>
-          <p:cNvSpPr/>
-          <p:nvPr/>
-        </p:nvSpPr>
-        <p:spPr>
-          <a:xfrm>
-            <a:off x="8074152" y="4023360"/>
-            <a:ext cx="2825496" cy="1097280"/>
+          <p:cNvPr id="20" name="Text 18"/>
+          <p:cNvSpPr/>
+          <p:nvPr/>
+        </p:nvSpPr>
+        <p:spPr>
+          <a:xfrm>
+            <a:off x="7799832" y="5001768"/>
+            <a:ext cx="3145536" cy="502920"/>
           </a:xfrm>
           <a:prstGeom prst="rect">
             <a:avLst/>
@@ -14454,7 +15752,7 @@
                 <a:ea typeface="Aptos" pitchFamily="34" charset="-122"/>
                 <a:cs typeface="Aptos" pitchFamily="34" charset="-120"/>
               </a:rPr>
-              <a:t>Connect the concept to public health decisions, safeguards, documentation, or implementation work.</a:t>
+              <a:t>Use the assignment to test whether you can explain the concept, apply it to a realistic public health situation, and identify what would need review before the work moves forward.</a:t>
             </a:r>
             <a:endParaRPr lang="en-US" sz="1550" dirty="0"/>
           </a:p>
@@ -14628,8 +15926,8 @@
         </p:nvSpPr>
         <p:spPr>
           <a:xfrm>
-            <a:off x="9966960" y="6537960"/>
-            <a:ext cx="1645920" cy="201168"/>
+            <a:off x="9646920" y="6537960"/>
+            <a:ext cx="1965960" cy="201168"/>
           </a:xfrm>
           <a:prstGeom prst="rect">
             <a:avLst/>
@@ -14653,7 +15951,7 @@
                 <a:ea typeface="Aptos" pitchFamily="34" charset="-122"/>
                 <a:cs typeface="Aptos" pitchFamily="34" charset="-120"/>
               </a:rPr>
-              <a:t>Â© Paula Soper</a:t>
+              <a:t>Copyright Paula Soper</a:t>
             </a:r>
             <a:endParaRPr lang="en-US" sz="800" dirty="0"/>
           </a:p>
@@ -14748,7 +16046,7 @@
         <p:spPr>
           <a:xfrm>
             <a:off x="868680" y="1508760"/>
-            <a:ext cx="6537960" cy="4160520"/>
+            <a:ext cx="6309360" cy="4160520"/>
           </a:xfrm>
           <a:prstGeom prst="rect">
             <a:avLst/>
@@ -14785,12 +16083,12 @@
         </p:nvSpPr>
         <p:spPr>
           <a:xfrm>
-            <a:off x="7909560" y="1417320"/>
-            <a:ext cx="3154680" cy="1828800"/>
+            <a:off x="7635240" y="1325880"/>
+            <a:ext cx="3474720" cy="1325880"/>
           </a:xfrm>
           <a:prstGeom prst="roundRect">
             <a:avLst>
-              <a:gd name="adj" fmla="val 6000"/>
+              <a:gd name="adj" fmla="val 8276"/>
             </a:avLst>
           </a:prstGeom>
           <a:solidFill>
@@ -14812,8 +16110,8 @@
         </p:nvSpPr>
         <p:spPr>
           <a:xfrm>
-            <a:off x="8074152" y="1563624"/>
-            <a:ext cx="2825496" cy="256032"/>
+            <a:off x="7799832" y="1472184"/>
+            <a:ext cx="3145536" cy="256032"/>
           </a:xfrm>
           <a:prstGeom prst="rect">
             <a:avLst/>
@@ -14837,7 +16135,7 @@
                 <a:ea typeface="Aptos" pitchFamily="34" charset="-122"/>
                 <a:cs typeface="Aptos" pitchFamily="34" charset="-120"/>
               </a:rPr>
-              <a:t>Key idea</a:t>
+              <a:t>Practice focus</a:t>
             </a:r>
             <a:endParaRPr lang="en-US" sz="1300" dirty="0"/>
           </a:p>
@@ -14851,8 +16149,8 @@
         </p:nvSpPr>
         <p:spPr>
           <a:xfrm>
-            <a:off x="8074152" y="1920240"/>
-            <a:ext cx="2825496" cy="1188720"/>
+            <a:off x="7799832" y="1828800"/>
+            <a:ext cx="3145536" cy="685800"/>
           </a:xfrm>
           <a:prstGeom prst="rect">
             <a:avLst/>
@@ -14892,12 +16190,153 @@
         </p:nvSpPr>
         <p:spPr>
           <a:xfrm>
-            <a:off x="7909560" y="3520440"/>
-            <a:ext cx="3154680" cy="1737360"/>
+            <a:off x="7635240" y="2788920"/>
+            <a:ext cx="3474720" cy="1536192"/>
           </a:xfrm>
           <a:prstGeom prst="roundRect">
             <a:avLst>
-              <a:gd name="adj" fmla="val 6316"/>
+              <a:gd name="adj" fmla="val 7143"/>
+            </a:avLst>
+          </a:prstGeom>
+          <a:solidFill>
+            <a:srgbClr val="FFFFFF">
+              <a:alpha val="88000"/>
+            </a:srgbClr>
+          </a:solidFill>
+          <a:ln w="12700">
+            <a:solidFill>
+              <a:srgbClr val="D6E8F2"/>
+            </a:solidFill>
+            <a:prstDash val="solid"/>
+          </a:ln>
+        </p:spPr>
+      </p:sp>
+      <p:sp>
+        <p:nvSpPr>
+          <p:cNvPr id="14" name="Shape 12"/>
+          <p:cNvSpPr/>
+          <p:nvPr/>
+        </p:nvSpPr>
+        <p:spPr>
+          <a:xfrm>
+            <a:off x="8074152" y="3291840"/>
+            <a:ext cx="2596896" cy="749808"/>
+          </a:xfrm>
+          <a:prstGeom prst="rect">
+            <a:avLst/>
+          </a:prstGeom>
+          <a:solidFill>
+            <a:srgbClr val="EAF6F8"/>
+          </a:solidFill>
+          <a:ln w="12700">
+            <a:solidFill>
+              <a:srgbClr val="8ABBD8"/>
+            </a:solidFill>
+            <a:prstDash val="solid"/>
+          </a:ln>
+        </p:spPr>
+      </p:sp>
+      <p:sp>
+        <p:nvSpPr>
+          <p:cNvPr id="15" name="Shape 13"/>
+          <p:cNvSpPr/>
+          <p:nvPr/>
+        </p:nvSpPr>
+        <p:spPr>
+          <a:xfrm>
+            <a:off x="8202168" y="3721608"/>
+            <a:ext cx="2340864" cy="0"/>
+          </a:xfrm>
+          <a:prstGeom prst="line">
+            <a:avLst/>
+          </a:prstGeom>
+          <a:noFill/>
+          <a:ln w="19050">
+            <a:solidFill>
+              <a:srgbClr val="0068B7"/>
+            </a:solidFill>
+            <a:prstDash val="solid"/>
+          </a:ln>
+        </p:spPr>
+      </p:sp>
+      <p:sp>
+        <p:nvSpPr>
+          <p:cNvPr id="16" name="Shape 14"/>
+          <p:cNvSpPr/>
+          <p:nvPr/>
+        </p:nvSpPr>
+        <p:spPr>
+          <a:xfrm>
+            <a:off x="9198864" y="4206240"/>
+            <a:ext cx="347472" cy="347472"/>
+          </a:xfrm>
+          <a:prstGeom prst="ellipse">
+            <a:avLst/>
+          </a:prstGeom>
+          <a:solidFill>
+            <a:srgbClr val="2F8A28"/>
+          </a:solidFill>
+          <a:ln w="12700">
+            <a:solidFill>
+              <a:srgbClr val="2F8A28"/>
+            </a:solidFill>
+            <a:prstDash val="solid"/>
+          </a:ln>
+        </p:spPr>
+      </p:sp>
+      <p:sp>
+        <p:nvSpPr>
+          <p:cNvPr id="17" name="Text 15"/>
+          <p:cNvSpPr/>
+          <p:nvPr/>
+        </p:nvSpPr>
+        <p:spPr>
+          <a:xfrm>
+            <a:off x="7909560" y="3977640"/>
+            <a:ext cx="2926080" cy="182880"/>
+          </a:xfrm>
+          <a:prstGeom prst="rect">
+            <a:avLst/>
+          </a:prstGeom>
+          <a:noFill/>
+          <a:ln/>
+        </p:spPr>
+        <p:txBody>
+          <a:bodyPr wrap="square" lIns="0" tIns="0" rIns="0" bIns="0" rtlCol="0" anchor="ctr"/>
+          <a:lstStyle/>
+          <a:p>
+            <a:pPr algn="ctr" indent="0" marL="0">
+              <a:buNone/>
+            </a:pPr>
+            <a:r>
+              <a:rPr lang="en-US" sz="1000" dirty="0">
+                <a:solidFill>
+                  <a:srgbClr val="003A63"/>
+                </a:solidFill>
+                <a:latin typeface="Aptos" pitchFamily="34" charset="0"/>
+                <a:ea typeface="Aptos" pitchFamily="34" charset="-122"/>
+                <a:cs typeface="Aptos" pitchFamily="34" charset="-120"/>
+              </a:rPr>
+              <a:t>Concept to action</a:t>
+            </a:r>
+            <a:endParaRPr lang="en-US" sz="1000" dirty="0"/>
+          </a:p>
+        </p:txBody>
+      </p:sp>
+      <p:sp>
+        <p:nvSpPr>
+          <p:cNvPr id="18" name="Shape 16"/>
+          <p:cNvSpPr/>
+          <p:nvPr/>
+        </p:nvSpPr>
+        <p:spPr>
+          <a:xfrm>
+            <a:off x="7635240" y="4498848"/>
+            <a:ext cx="3474720" cy="1143000"/>
+          </a:xfrm>
+          <a:prstGeom prst="roundRect">
+            <a:avLst>
+              <a:gd name="adj" fmla="val 9600"/>
             </a:avLst>
           </a:prstGeom>
           <a:solidFill>
@@ -14913,14 +16352,14 @@
       </p:sp>
       <p:sp>
         <p:nvSpPr>
-          <p:cNvPr id="14" name="Text 12"/>
-          <p:cNvSpPr/>
-          <p:nvPr/>
-        </p:nvSpPr>
-        <p:spPr>
-          <a:xfrm>
-            <a:off x="8074152" y="3666744"/>
-            <a:ext cx="2825496" cy="256032"/>
+          <p:cNvPr id="19" name="Text 17"/>
+          <p:cNvSpPr/>
+          <p:nvPr/>
+        </p:nvSpPr>
+        <p:spPr>
+          <a:xfrm>
+            <a:off x="7799832" y="4645152"/>
+            <a:ext cx="3145536" cy="256032"/>
           </a:xfrm>
           <a:prstGeom prst="rect">
             <a:avLst/>
@@ -14944,7 +16383,7 @@
                 <a:ea typeface="Aptos" pitchFamily="34" charset="-122"/>
                 <a:cs typeface="Aptos" pitchFamily="34" charset="-120"/>
               </a:rPr>
-              <a:t>Use this for</a:t>
+              <a:t>What to produce</a:t>
             </a:r>
             <a:endParaRPr lang="en-US" sz="1300" dirty="0"/>
           </a:p>
@@ -14952,14 +16391,14 @@
       </p:sp>
       <p:sp>
         <p:nvSpPr>
-          <p:cNvPr id="15" name="Text 13"/>
-          <p:cNvSpPr/>
-          <p:nvPr/>
-        </p:nvSpPr>
-        <p:spPr>
-          <a:xfrm>
-            <a:off x="8074152" y="4023360"/>
-            <a:ext cx="2825496" cy="1097280"/>
+          <p:cNvPr id="20" name="Text 18"/>
+          <p:cNvSpPr/>
+          <p:nvPr/>
+        </p:nvSpPr>
+        <p:spPr>
+          <a:xfrm>
+            <a:off x="7799832" y="5001768"/>
+            <a:ext cx="3145536" cy="502920"/>
           </a:xfrm>
           <a:prstGeom prst="rect">
             <a:avLst/>
@@ -14985,7 +16424,7 @@
                 <a:ea typeface="Aptos" pitchFamily="34" charset="-122"/>
                 <a:cs typeface="Aptos" pitchFamily="34" charset="-120"/>
               </a:rPr>
-              <a:t>Connect the concept to public health decisions, safeguards, documentation, or implementation work.</a:t>
+              <a:t>Use the assignment to test whether you can explain the concept, apply it to a realistic public health situation, and identify what would need review before the work moves forward.</a:t>
             </a:r>
             <a:endParaRPr lang="en-US" sz="1550" dirty="0"/>
           </a:p>
@@ -15159,8 +16598,8 @@
         </p:nvSpPr>
         <p:spPr>
           <a:xfrm>
-            <a:off x="9966960" y="6537960"/>
-            <a:ext cx="1645920" cy="201168"/>
+            <a:off x="9646920" y="6537960"/>
+            <a:ext cx="1965960" cy="201168"/>
           </a:xfrm>
           <a:prstGeom prst="rect">
             <a:avLst/>
@@ -15184,7 +16623,7 @@
                 <a:ea typeface="Aptos" pitchFamily="34" charset="-122"/>
                 <a:cs typeface="Aptos" pitchFamily="34" charset="-120"/>
               </a:rPr>
-              <a:t>Â© Paula Soper</a:t>
+              <a:t>Copyright Paula Soper</a:t>
             </a:r>
             <a:endParaRPr lang="en-US" sz="800" dirty="0"/>
           </a:p>
@@ -15231,77 +16670,13 @@
       </p:sp>
       <p:sp>
         <p:nvSpPr>
-          <p:cNvPr id="8" name="Shape 6"/>
+          <p:cNvPr id="8" name="Text 6"/>
           <p:cNvSpPr/>
           <p:nvPr/>
         </p:nvSpPr>
         <p:spPr>
           <a:xfrm>
             <a:off x="640080" y="658368"/>
-            <a:ext cx="420624" cy="420624"/>
-          </a:xfrm>
-          <a:prstGeom prst="ellipse">
-            <a:avLst/>
-          </a:prstGeom>
-          <a:solidFill>
-            <a:srgbClr val="0068B7"/>
-          </a:solidFill>
-          <a:ln w="12700">
-            <a:solidFill>
-              <a:srgbClr val="0068B7"/>
-            </a:solidFill>
-            <a:prstDash val="solid"/>
-          </a:ln>
-        </p:spPr>
-      </p:sp>
-      <p:sp>
-        <p:nvSpPr>
-          <p:cNvPr id="9" name="Text 7"/>
-          <p:cNvSpPr/>
-          <p:nvPr/>
-        </p:nvSpPr>
-        <p:spPr>
-          <a:xfrm>
-            <a:off x="640080" y="731520"/>
-            <a:ext cx="420624" cy="164592"/>
-          </a:xfrm>
-          <a:prstGeom prst="rect">
-            <a:avLst/>
-          </a:prstGeom>
-          <a:noFill/>
-          <a:ln/>
-        </p:spPr>
-        <p:txBody>
-          <a:bodyPr wrap="square" lIns="0" tIns="0" rIns="0" bIns="0" rtlCol="0" anchor="ctr"/>
-          <a:lstStyle/>
-          <a:p>
-            <a:pPr algn="ctr" indent="0" marL="0">
-              <a:buNone/>
-            </a:pPr>
-            <a:r>
-              <a:rPr lang="en-US" sz="1100" b="1" dirty="0">
-                <a:solidFill>
-                  <a:srgbClr val="FFFFFF"/>
-                </a:solidFill>
-                <a:latin typeface="Aptos" pitchFamily="34" charset="0"/>
-                <a:ea typeface="Aptos" pitchFamily="34" charset="-122"/>
-                <a:cs typeface="Aptos" pitchFamily="34" charset="-120"/>
-              </a:rPr>
-              <a:t>2</a:t>
-            </a:r>
-            <a:endParaRPr lang="en-US" sz="1100" dirty="0"/>
-          </a:p>
-        </p:txBody>
-      </p:sp>
-      <p:sp>
-        <p:nvSpPr>
-          <p:cNvPr id="10" name="Text 8"/>
-          <p:cNvSpPr/>
-          <p:nvPr/>
-        </p:nvSpPr>
-        <p:spPr>
-          <a:xfrm>
-            <a:off x="640080" y="621792"/>
             <a:ext cx="10881360" cy="713232"/>
           </a:xfrm>
           <a:prstGeom prst="rect">
@@ -15336,14 +16711,14 @@
       </p:sp>
       <p:sp>
         <p:nvSpPr>
-          <p:cNvPr id="11" name="Text 9"/>
+          <p:cNvPr id="9" name="Text 7"/>
           <p:cNvSpPr/>
           <p:nvPr/>
         </p:nvSpPr>
         <p:spPr>
           <a:xfrm>
             <a:off x="868680" y="1508760"/>
-            <a:ext cx="6537960" cy="4160520"/>
+            <a:ext cx="6309360" cy="4160520"/>
           </a:xfrm>
           <a:prstGeom prst="rect">
             <a:avLst/>
@@ -15402,18 +16777,18 @@
       </p:sp>
       <p:sp>
         <p:nvSpPr>
-          <p:cNvPr id="12" name="Shape 10"/>
-          <p:cNvSpPr/>
-          <p:nvPr/>
-        </p:nvSpPr>
-        <p:spPr>
-          <a:xfrm>
-            <a:off x="7909560" y="1417320"/>
-            <a:ext cx="3154680" cy="1828800"/>
+          <p:cNvPr id="10" name="Shape 8"/>
+          <p:cNvSpPr/>
+          <p:nvPr/>
+        </p:nvSpPr>
+        <p:spPr>
+          <a:xfrm>
+            <a:off x="7635240" y="1325880"/>
+            <a:ext cx="3474720" cy="1325880"/>
           </a:xfrm>
           <a:prstGeom prst="roundRect">
             <a:avLst>
-              <a:gd name="adj" fmla="val 6000"/>
+              <a:gd name="adj" fmla="val 8276"/>
             </a:avLst>
           </a:prstGeom>
           <a:solidFill>
@@ -15429,14 +16804,14 @@
       </p:sp>
       <p:sp>
         <p:nvSpPr>
-          <p:cNvPr id="13" name="Text 11"/>
-          <p:cNvSpPr/>
-          <p:nvPr/>
-        </p:nvSpPr>
-        <p:spPr>
-          <a:xfrm>
-            <a:off x="8074152" y="1563624"/>
-            <a:ext cx="2825496" cy="256032"/>
+          <p:cNvPr id="11" name="Text 9"/>
+          <p:cNvSpPr/>
+          <p:nvPr/>
+        </p:nvSpPr>
+        <p:spPr>
+          <a:xfrm>
+            <a:off x="7799832" y="1472184"/>
+            <a:ext cx="3145536" cy="256032"/>
           </a:xfrm>
           <a:prstGeom prst="rect">
             <a:avLst/>
@@ -15460,7 +16835,7 @@
                 <a:ea typeface="Aptos" pitchFamily="34" charset="-122"/>
                 <a:cs typeface="Aptos" pitchFamily="34" charset="-120"/>
               </a:rPr>
-              <a:t>Key idea</a:t>
+              <a:t>Core concept</a:t>
             </a:r>
             <a:endParaRPr lang="en-US" sz="1300" dirty="0"/>
           </a:p>
@@ -15468,14 +16843,14 @@
       </p:sp>
       <p:sp>
         <p:nvSpPr>
-          <p:cNvPr id="14" name="Text 12"/>
-          <p:cNvSpPr/>
-          <p:nvPr/>
-        </p:nvSpPr>
-        <p:spPr>
-          <a:xfrm>
-            <a:off x="8074152" y="1920240"/>
-            <a:ext cx="2825496" cy="1188720"/>
+          <p:cNvPr id="12" name="Text 10"/>
+          <p:cNvSpPr/>
+          <p:nvPr/>
+        </p:nvSpPr>
+        <p:spPr>
+          <a:xfrm>
+            <a:off x="7799832" y="1828800"/>
+            <a:ext cx="3145536" cy="685800"/>
           </a:xfrm>
           <a:prstGeom prst="rect">
             <a:avLst/>
@@ -15509,18 +16884,159 @@
       </p:sp>
       <p:sp>
         <p:nvSpPr>
-          <p:cNvPr id="15" name="Shape 13"/>
-          <p:cNvSpPr/>
-          <p:nvPr/>
-        </p:nvSpPr>
-        <p:spPr>
-          <a:xfrm>
-            <a:off x="7909560" y="3520440"/>
-            <a:ext cx="3154680" cy="1737360"/>
+          <p:cNvPr id="13" name="Shape 11"/>
+          <p:cNvSpPr/>
+          <p:nvPr/>
+        </p:nvSpPr>
+        <p:spPr>
+          <a:xfrm>
+            <a:off x="7635240" y="2788920"/>
+            <a:ext cx="3474720" cy="1536192"/>
           </a:xfrm>
           <a:prstGeom prst="roundRect">
             <a:avLst>
-              <a:gd name="adj" fmla="val 6316"/>
+              <a:gd name="adj" fmla="val 7143"/>
+            </a:avLst>
+          </a:prstGeom>
+          <a:solidFill>
+            <a:srgbClr val="FFFFFF">
+              <a:alpha val="88000"/>
+            </a:srgbClr>
+          </a:solidFill>
+          <a:ln w="12700">
+            <a:solidFill>
+              <a:srgbClr val="D6E8F2"/>
+            </a:solidFill>
+            <a:prstDash val="solid"/>
+          </a:ln>
+        </p:spPr>
+      </p:sp>
+      <p:sp>
+        <p:nvSpPr>
+          <p:cNvPr id="14" name="Shape 12"/>
+          <p:cNvSpPr/>
+          <p:nvPr/>
+        </p:nvSpPr>
+        <p:spPr>
+          <a:xfrm>
+            <a:off x="8074152" y="3291840"/>
+            <a:ext cx="2596896" cy="749808"/>
+          </a:xfrm>
+          <a:prstGeom prst="rect">
+            <a:avLst/>
+          </a:prstGeom>
+          <a:solidFill>
+            <a:srgbClr val="EAF6F8"/>
+          </a:solidFill>
+          <a:ln w="12700">
+            <a:solidFill>
+              <a:srgbClr val="8ABBD8"/>
+            </a:solidFill>
+            <a:prstDash val="solid"/>
+          </a:ln>
+        </p:spPr>
+      </p:sp>
+      <p:sp>
+        <p:nvSpPr>
+          <p:cNvPr id="15" name="Shape 13"/>
+          <p:cNvSpPr/>
+          <p:nvPr/>
+        </p:nvSpPr>
+        <p:spPr>
+          <a:xfrm>
+            <a:off x="8202168" y="3721608"/>
+            <a:ext cx="2340864" cy="0"/>
+          </a:xfrm>
+          <a:prstGeom prst="line">
+            <a:avLst/>
+          </a:prstGeom>
+          <a:noFill/>
+          <a:ln w="19050">
+            <a:solidFill>
+              <a:srgbClr val="0068B7"/>
+            </a:solidFill>
+            <a:prstDash val="solid"/>
+          </a:ln>
+        </p:spPr>
+      </p:sp>
+      <p:sp>
+        <p:nvSpPr>
+          <p:cNvPr id="16" name="Shape 14"/>
+          <p:cNvSpPr/>
+          <p:nvPr/>
+        </p:nvSpPr>
+        <p:spPr>
+          <a:xfrm>
+            <a:off x="9198864" y="4206240"/>
+            <a:ext cx="347472" cy="347472"/>
+          </a:xfrm>
+          <a:prstGeom prst="ellipse">
+            <a:avLst/>
+          </a:prstGeom>
+          <a:solidFill>
+            <a:srgbClr val="2F8A28"/>
+          </a:solidFill>
+          <a:ln w="12700">
+            <a:solidFill>
+              <a:srgbClr val="2F8A28"/>
+            </a:solidFill>
+            <a:prstDash val="solid"/>
+          </a:ln>
+        </p:spPr>
+      </p:sp>
+      <p:sp>
+        <p:nvSpPr>
+          <p:cNvPr id="17" name="Text 15"/>
+          <p:cNvSpPr/>
+          <p:nvPr/>
+        </p:nvSpPr>
+        <p:spPr>
+          <a:xfrm>
+            <a:off x="7909560" y="3977640"/>
+            <a:ext cx="2926080" cy="182880"/>
+          </a:xfrm>
+          <a:prstGeom prst="rect">
+            <a:avLst/>
+          </a:prstGeom>
+          <a:noFill/>
+          <a:ln/>
+        </p:spPr>
+        <p:txBody>
+          <a:bodyPr wrap="square" lIns="0" tIns="0" rIns="0" bIns="0" rtlCol="0" anchor="ctr"/>
+          <a:lstStyle/>
+          <a:p>
+            <a:pPr algn="ctr" indent="0" marL="0">
+              <a:buNone/>
+            </a:pPr>
+            <a:r>
+              <a:rPr lang="en-US" sz="1000" dirty="0">
+                <a:solidFill>
+                  <a:srgbClr val="003A63"/>
+                </a:solidFill>
+                <a:latin typeface="Aptos" pitchFamily="34" charset="0"/>
+                <a:ea typeface="Aptos" pitchFamily="34" charset="-122"/>
+                <a:cs typeface="Aptos" pitchFamily="34" charset="-120"/>
+              </a:rPr>
+              <a:t>Concept to action</a:t>
+            </a:r>
+            <a:endParaRPr lang="en-US" sz="1000" dirty="0"/>
+          </a:p>
+        </p:txBody>
+      </p:sp>
+      <p:sp>
+        <p:nvSpPr>
+          <p:cNvPr id="18" name="Shape 16"/>
+          <p:cNvSpPr/>
+          <p:nvPr/>
+        </p:nvSpPr>
+        <p:spPr>
+          <a:xfrm>
+            <a:off x="7635240" y="4498848"/>
+            <a:ext cx="3474720" cy="1143000"/>
+          </a:xfrm>
+          <a:prstGeom prst="roundRect">
+            <a:avLst>
+              <a:gd name="adj" fmla="val 9600"/>
             </a:avLst>
           </a:prstGeom>
           <a:solidFill>
@@ -15536,14 +17052,14 @@
       </p:sp>
       <p:sp>
         <p:nvSpPr>
-          <p:cNvPr id="16" name="Text 14"/>
-          <p:cNvSpPr/>
-          <p:nvPr/>
-        </p:nvSpPr>
-        <p:spPr>
-          <a:xfrm>
-            <a:off x="8074152" y="3666744"/>
-            <a:ext cx="2825496" cy="256032"/>
+          <p:cNvPr id="19" name="Text 17"/>
+          <p:cNvSpPr/>
+          <p:nvPr/>
+        </p:nvSpPr>
+        <p:spPr>
+          <a:xfrm>
+            <a:off x="7799832" y="4645152"/>
+            <a:ext cx="3145536" cy="256032"/>
           </a:xfrm>
           <a:prstGeom prst="rect">
             <a:avLst/>
@@ -15567,7 +17083,7 @@
                 <a:ea typeface="Aptos" pitchFamily="34" charset="-122"/>
                 <a:cs typeface="Aptos" pitchFamily="34" charset="-120"/>
               </a:rPr>
-              <a:t>Use this for</a:t>
+              <a:t>Apply it</a:t>
             </a:r>
             <a:endParaRPr lang="en-US" sz="1300" dirty="0"/>
           </a:p>
@@ -15575,14 +17091,14 @@
       </p:sp>
       <p:sp>
         <p:nvSpPr>
-          <p:cNvPr id="17" name="Text 15"/>
-          <p:cNvSpPr/>
-          <p:nvPr/>
-        </p:nvSpPr>
-        <p:spPr>
-          <a:xfrm>
-            <a:off x="8074152" y="4023360"/>
-            <a:ext cx="2825496" cy="1097280"/>
+          <p:cNvPr id="20" name="Text 18"/>
+          <p:cNvSpPr/>
+          <p:nvPr/>
+        </p:nvSpPr>
+        <p:spPr>
+          <a:xfrm>
+            <a:off x="7799832" y="5001768"/>
+            <a:ext cx="3145536" cy="502920"/>
           </a:xfrm>
           <a:prstGeom prst="rect">
             <a:avLst/>
@@ -15608,7 +17124,7 @@
                 <a:ea typeface="Aptos" pitchFamily="34" charset="-122"/>
                 <a:cs typeface="Aptos" pitchFamily="34" charset="-120"/>
               </a:rPr>
-              <a:t>Connect the concept to public health decisions, safeguards, documentation, or implementation work.</a:t>
+              <a:t>Connect the concept to public health purpose, responsible use, required safeguards, documentation, and the next action a department should take.</a:t>
             </a:r>
             <a:endParaRPr lang="en-US" sz="1550" dirty="0"/>
           </a:p>
@@ -15782,8 +17298,8 @@
         </p:nvSpPr>
         <p:spPr>
           <a:xfrm>
-            <a:off x="9966960" y="6537960"/>
-            <a:ext cx="1645920" cy="201168"/>
+            <a:off x="9646920" y="6537960"/>
+            <a:ext cx="1965960" cy="201168"/>
           </a:xfrm>
           <a:prstGeom prst="rect">
             <a:avLst/>
@@ -15807,7 +17323,7 @@
                 <a:ea typeface="Aptos" pitchFamily="34" charset="-122"/>
                 <a:cs typeface="Aptos" pitchFamily="34" charset="-120"/>
               </a:rPr>
-              <a:t>Â© Paula Soper</a:t>
+              <a:t>Copyright Paula Soper</a:t>
             </a:r>
             <a:endParaRPr lang="en-US" sz="800" dirty="0"/>
           </a:p>
@@ -15854,77 +17370,13 @@
       </p:sp>
       <p:sp>
         <p:nvSpPr>
-          <p:cNvPr id="8" name="Shape 6"/>
+          <p:cNvPr id="8" name="Text 6"/>
           <p:cNvSpPr/>
           <p:nvPr/>
         </p:nvSpPr>
         <p:spPr>
           <a:xfrm>
             <a:off x="640080" y="658368"/>
-            <a:ext cx="420624" cy="420624"/>
-          </a:xfrm>
-          <a:prstGeom prst="ellipse">
-            <a:avLst/>
-          </a:prstGeom>
-          <a:solidFill>
-            <a:srgbClr val="0068B7"/>
-          </a:solidFill>
-          <a:ln w="12700">
-            <a:solidFill>
-              <a:srgbClr val="0068B7"/>
-            </a:solidFill>
-            <a:prstDash val="solid"/>
-          </a:ln>
-        </p:spPr>
-      </p:sp>
-      <p:sp>
-        <p:nvSpPr>
-          <p:cNvPr id="9" name="Text 7"/>
-          <p:cNvSpPr/>
-          <p:nvPr/>
-        </p:nvSpPr>
-        <p:spPr>
-          <a:xfrm>
-            <a:off x="640080" y="731520"/>
-            <a:ext cx="420624" cy="164592"/>
-          </a:xfrm>
-          <a:prstGeom prst="rect">
-            <a:avLst/>
-          </a:prstGeom>
-          <a:noFill/>
-          <a:ln/>
-        </p:spPr>
-        <p:txBody>
-          <a:bodyPr wrap="square" lIns="0" tIns="0" rIns="0" bIns="0" rtlCol="0" anchor="ctr"/>
-          <a:lstStyle/>
-          <a:p>
-            <a:pPr algn="ctr" indent="0" marL="0">
-              <a:buNone/>
-            </a:pPr>
-            <a:r>
-              <a:rPr lang="en-US" sz="1100" b="1" dirty="0">
-                <a:solidFill>
-                  <a:srgbClr val="FFFFFF"/>
-                </a:solidFill>
-                <a:latin typeface="Aptos" pitchFamily="34" charset="0"/>
-                <a:ea typeface="Aptos" pitchFamily="34" charset="-122"/>
-                <a:cs typeface="Aptos" pitchFamily="34" charset="-120"/>
-              </a:rPr>
-              <a:t>3</a:t>
-            </a:r>
-            <a:endParaRPr lang="en-US" sz="1100" dirty="0"/>
-          </a:p>
-        </p:txBody>
-      </p:sp>
-      <p:sp>
-        <p:nvSpPr>
-          <p:cNvPr id="10" name="Text 8"/>
-          <p:cNvSpPr/>
-          <p:nvPr/>
-        </p:nvSpPr>
-        <p:spPr>
-          <a:xfrm>
-            <a:off x="640080" y="621792"/>
             <a:ext cx="10881360" cy="713232"/>
           </a:xfrm>
           <a:prstGeom prst="rect">
@@ -15959,14 +17411,14 @@
       </p:sp>
       <p:sp>
         <p:nvSpPr>
-          <p:cNvPr id="11" name="Text 9"/>
+          <p:cNvPr id="9" name="Text 7"/>
           <p:cNvSpPr/>
           <p:nvPr/>
         </p:nvSpPr>
         <p:spPr>
           <a:xfrm>
             <a:off x="868680" y="1508760"/>
-            <a:ext cx="6537960" cy="4160520"/>
+            <a:ext cx="6309360" cy="4160520"/>
           </a:xfrm>
           <a:prstGeom prst="rect">
             <a:avLst/>
@@ -16025,18 +17477,18 @@
       </p:sp>
       <p:sp>
         <p:nvSpPr>
-          <p:cNvPr id="12" name="Shape 10"/>
-          <p:cNvSpPr/>
-          <p:nvPr/>
-        </p:nvSpPr>
-        <p:spPr>
-          <a:xfrm>
-            <a:off x="7909560" y="1417320"/>
-            <a:ext cx="3154680" cy="1828800"/>
+          <p:cNvPr id="10" name="Shape 8"/>
+          <p:cNvSpPr/>
+          <p:nvPr/>
+        </p:nvSpPr>
+        <p:spPr>
+          <a:xfrm>
+            <a:off x="7635240" y="1325880"/>
+            <a:ext cx="3474720" cy="1325880"/>
           </a:xfrm>
           <a:prstGeom prst="roundRect">
             <a:avLst>
-              <a:gd name="adj" fmla="val 6000"/>
+              <a:gd name="adj" fmla="val 8276"/>
             </a:avLst>
           </a:prstGeom>
           <a:solidFill>
@@ -16052,14 +17504,14 @@
       </p:sp>
       <p:sp>
         <p:nvSpPr>
-          <p:cNvPr id="13" name="Text 11"/>
-          <p:cNvSpPr/>
-          <p:nvPr/>
-        </p:nvSpPr>
-        <p:spPr>
-          <a:xfrm>
-            <a:off x="8074152" y="1563624"/>
-            <a:ext cx="2825496" cy="256032"/>
+          <p:cNvPr id="11" name="Text 9"/>
+          <p:cNvSpPr/>
+          <p:nvPr/>
+        </p:nvSpPr>
+        <p:spPr>
+          <a:xfrm>
+            <a:off x="7799832" y="1472184"/>
+            <a:ext cx="3145536" cy="256032"/>
           </a:xfrm>
           <a:prstGeom prst="rect">
             <a:avLst/>
@@ -16083,7 +17535,7 @@
                 <a:ea typeface="Aptos" pitchFamily="34" charset="-122"/>
                 <a:cs typeface="Aptos" pitchFamily="34" charset="-120"/>
               </a:rPr>
-              <a:t>Key idea</a:t>
+              <a:t>Core concept</a:t>
             </a:r>
             <a:endParaRPr lang="en-US" sz="1300" dirty="0"/>
           </a:p>
@@ -16091,14 +17543,14 @@
       </p:sp>
       <p:sp>
         <p:nvSpPr>
-          <p:cNvPr id="14" name="Text 12"/>
-          <p:cNvSpPr/>
-          <p:nvPr/>
-        </p:nvSpPr>
-        <p:spPr>
-          <a:xfrm>
-            <a:off x="8074152" y="1920240"/>
-            <a:ext cx="2825496" cy="1188720"/>
+          <p:cNvPr id="12" name="Text 10"/>
+          <p:cNvSpPr/>
+          <p:nvPr/>
+        </p:nvSpPr>
+        <p:spPr>
+          <a:xfrm>
+            <a:off x="7799832" y="1828800"/>
+            <a:ext cx="3145536" cy="685800"/>
           </a:xfrm>
           <a:prstGeom prst="rect">
             <a:avLst/>
@@ -16132,18 +17584,159 @@
       </p:sp>
       <p:sp>
         <p:nvSpPr>
-          <p:cNvPr id="15" name="Shape 13"/>
-          <p:cNvSpPr/>
-          <p:nvPr/>
-        </p:nvSpPr>
-        <p:spPr>
-          <a:xfrm>
-            <a:off x="7909560" y="3520440"/>
-            <a:ext cx="3154680" cy="1737360"/>
+          <p:cNvPr id="13" name="Shape 11"/>
+          <p:cNvSpPr/>
+          <p:nvPr/>
+        </p:nvSpPr>
+        <p:spPr>
+          <a:xfrm>
+            <a:off x="7635240" y="2788920"/>
+            <a:ext cx="3474720" cy="1536192"/>
           </a:xfrm>
           <a:prstGeom prst="roundRect">
             <a:avLst>
-              <a:gd name="adj" fmla="val 6316"/>
+              <a:gd name="adj" fmla="val 7143"/>
+            </a:avLst>
+          </a:prstGeom>
+          <a:solidFill>
+            <a:srgbClr val="FFFFFF">
+              <a:alpha val="88000"/>
+            </a:srgbClr>
+          </a:solidFill>
+          <a:ln w="12700">
+            <a:solidFill>
+              <a:srgbClr val="D6E8F2"/>
+            </a:solidFill>
+            <a:prstDash val="solid"/>
+          </a:ln>
+        </p:spPr>
+      </p:sp>
+      <p:sp>
+        <p:nvSpPr>
+          <p:cNvPr id="14" name="Shape 12"/>
+          <p:cNvSpPr/>
+          <p:nvPr/>
+        </p:nvSpPr>
+        <p:spPr>
+          <a:xfrm>
+            <a:off x="8074152" y="3291840"/>
+            <a:ext cx="2596896" cy="749808"/>
+          </a:xfrm>
+          <a:prstGeom prst="rect">
+            <a:avLst/>
+          </a:prstGeom>
+          <a:solidFill>
+            <a:srgbClr val="EAF6F8"/>
+          </a:solidFill>
+          <a:ln w="12700">
+            <a:solidFill>
+              <a:srgbClr val="8ABBD8"/>
+            </a:solidFill>
+            <a:prstDash val="solid"/>
+          </a:ln>
+        </p:spPr>
+      </p:sp>
+      <p:sp>
+        <p:nvSpPr>
+          <p:cNvPr id="15" name="Shape 13"/>
+          <p:cNvSpPr/>
+          <p:nvPr/>
+        </p:nvSpPr>
+        <p:spPr>
+          <a:xfrm>
+            <a:off x="8202168" y="3721608"/>
+            <a:ext cx="2340864" cy="0"/>
+          </a:xfrm>
+          <a:prstGeom prst="line">
+            <a:avLst/>
+          </a:prstGeom>
+          <a:noFill/>
+          <a:ln w="19050">
+            <a:solidFill>
+              <a:srgbClr val="0068B7"/>
+            </a:solidFill>
+            <a:prstDash val="solid"/>
+          </a:ln>
+        </p:spPr>
+      </p:sp>
+      <p:sp>
+        <p:nvSpPr>
+          <p:cNvPr id="16" name="Shape 14"/>
+          <p:cNvSpPr/>
+          <p:nvPr/>
+        </p:nvSpPr>
+        <p:spPr>
+          <a:xfrm>
+            <a:off x="9198864" y="4206240"/>
+            <a:ext cx="347472" cy="347472"/>
+          </a:xfrm>
+          <a:prstGeom prst="ellipse">
+            <a:avLst/>
+          </a:prstGeom>
+          <a:solidFill>
+            <a:srgbClr val="2F8A28"/>
+          </a:solidFill>
+          <a:ln w="12700">
+            <a:solidFill>
+              <a:srgbClr val="2F8A28"/>
+            </a:solidFill>
+            <a:prstDash val="solid"/>
+          </a:ln>
+        </p:spPr>
+      </p:sp>
+      <p:sp>
+        <p:nvSpPr>
+          <p:cNvPr id="17" name="Text 15"/>
+          <p:cNvSpPr/>
+          <p:nvPr/>
+        </p:nvSpPr>
+        <p:spPr>
+          <a:xfrm>
+            <a:off x="7909560" y="3977640"/>
+            <a:ext cx="2926080" cy="182880"/>
+          </a:xfrm>
+          <a:prstGeom prst="rect">
+            <a:avLst/>
+          </a:prstGeom>
+          <a:noFill/>
+          <a:ln/>
+        </p:spPr>
+        <p:txBody>
+          <a:bodyPr wrap="square" lIns="0" tIns="0" rIns="0" bIns="0" rtlCol="0" anchor="ctr"/>
+          <a:lstStyle/>
+          <a:p>
+            <a:pPr algn="ctr" indent="0" marL="0">
+              <a:buNone/>
+            </a:pPr>
+            <a:r>
+              <a:rPr lang="en-US" sz="1000" dirty="0">
+                <a:solidFill>
+                  <a:srgbClr val="003A63"/>
+                </a:solidFill>
+                <a:latin typeface="Aptos" pitchFamily="34" charset="0"/>
+                <a:ea typeface="Aptos" pitchFamily="34" charset="-122"/>
+                <a:cs typeface="Aptos" pitchFamily="34" charset="-120"/>
+              </a:rPr>
+              <a:t>Concept to action</a:t>
+            </a:r>
+            <a:endParaRPr lang="en-US" sz="1000" dirty="0"/>
+          </a:p>
+        </p:txBody>
+      </p:sp>
+      <p:sp>
+        <p:nvSpPr>
+          <p:cNvPr id="18" name="Shape 16"/>
+          <p:cNvSpPr/>
+          <p:nvPr/>
+        </p:nvSpPr>
+        <p:spPr>
+          <a:xfrm>
+            <a:off x="7635240" y="4498848"/>
+            <a:ext cx="3474720" cy="1143000"/>
+          </a:xfrm>
+          <a:prstGeom prst="roundRect">
+            <a:avLst>
+              <a:gd name="adj" fmla="val 9600"/>
             </a:avLst>
           </a:prstGeom>
           <a:solidFill>
@@ -16159,14 +17752,14 @@
       </p:sp>
       <p:sp>
         <p:nvSpPr>
-          <p:cNvPr id="16" name="Text 14"/>
-          <p:cNvSpPr/>
-          <p:nvPr/>
-        </p:nvSpPr>
-        <p:spPr>
-          <a:xfrm>
-            <a:off x="8074152" y="3666744"/>
-            <a:ext cx="2825496" cy="256032"/>
+          <p:cNvPr id="19" name="Text 17"/>
+          <p:cNvSpPr/>
+          <p:nvPr/>
+        </p:nvSpPr>
+        <p:spPr>
+          <a:xfrm>
+            <a:off x="7799832" y="4645152"/>
+            <a:ext cx="3145536" cy="256032"/>
           </a:xfrm>
           <a:prstGeom prst="rect">
             <a:avLst/>
@@ -16190,7 +17783,7 @@
                 <a:ea typeface="Aptos" pitchFamily="34" charset="-122"/>
                 <a:cs typeface="Aptos" pitchFamily="34" charset="-120"/>
               </a:rPr>
-              <a:t>Use this for</a:t>
+              <a:t>Apply it</a:t>
             </a:r>
             <a:endParaRPr lang="en-US" sz="1300" dirty="0"/>
           </a:p>
@@ -16198,14 +17791,14 @@
       </p:sp>
       <p:sp>
         <p:nvSpPr>
-          <p:cNvPr id="17" name="Text 15"/>
-          <p:cNvSpPr/>
-          <p:nvPr/>
-        </p:nvSpPr>
-        <p:spPr>
-          <a:xfrm>
-            <a:off x="8074152" y="4023360"/>
-            <a:ext cx="2825496" cy="1097280"/>
+          <p:cNvPr id="20" name="Text 18"/>
+          <p:cNvSpPr/>
+          <p:nvPr/>
+        </p:nvSpPr>
+        <p:spPr>
+          <a:xfrm>
+            <a:off x="7799832" y="5001768"/>
+            <a:ext cx="3145536" cy="502920"/>
           </a:xfrm>
           <a:prstGeom prst="rect">
             <a:avLst/>
@@ -16231,7 +17824,7 @@
                 <a:ea typeface="Aptos" pitchFamily="34" charset="-122"/>
                 <a:cs typeface="Aptos" pitchFamily="34" charset="-120"/>
               </a:rPr>
-              <a:t>Connect the concept to public health decisions, safeguards, documentation, or implementation work.</a:t>
+              <a:t>Connect the concept to public health purpose, responsible use, required safeguards, documentation, and the next action a department should take.</a:t>
             </a:r>
             <a:endParaRPr lang="en-US" sz="1550" dirty="0"/>
           </a:p>
@@ -16405,8 +17998,8 @@
         </p:nvSpPr>
         <p:spPr>
           <a:xfrm>
-            <a:off x="9966960" y="6537960"/>
-            <a:ext cx="1645920" cy="201168"/>
+            <a:off x="9646920" y="6537960"/>
+            <a:ext cx="1965960" cy="201168"/>
           </a:xfrm>
           <a:prstGeom prst="rect">
             <a:avLst/>
@@ -16430,7 +18023,7 @@
                 <a:ea typeface="Aptos" pitchFamily="34" charset="-122"/>
                 <a:cs typeface="Aptos" pitchFamily="34" charset="-120"/>
               </a:rPr>
-              <a:t>Â© Paula Soper</a:t>
+              <a:t>Copyright Paula Soper</a:t>
             </a:r>
             <a:endParaRPr lang="en-US" sz="800" dirty="0"/>
           </a:p>
@@ -16477,14 +18070,257 @@
       </p:sp>
       <p:sp>
         <p:nvSpPr>
-          <p:cNvPr id="8" name="Shape 6"/>
+          <p:cNvPr id="8" name="Text 6"/>
           <p:cNvSpPr/>
           <p:nvPr/>
         </p:nvSpPr>
         <p:spPr>
           <a:xfrm>
             <a:off x="640080" y="658368"/>
-            <a:ext cx="420624" cy="420624"/>
+            <a:ext cx="10881360" cy="713232"/>
+          </a:xfrm>
+          <a:prstGeom prst="rect">
+            <a:avLst/>
+          </a:prstGeom>
+          <a:noFill/>
+          <a:ln/>
+        </p:spPr>
+        <p:txBody>
+          <a:bodyPr wrap="square" lIns="0" tIns="0" rIns="0" bIns="0" rtlCol="0" anchor="ctr">
+            <a:normAutofit/>
+          </a:bodyPr>
+          <a:lstStyle/>
+          <a:p>
+            <a:pPr indent="0" marL="0">
+              <a:buNone/>
+            </a:pPr>
+            <a:r>
+              <a:rPr lang="en-US" sz="3400" b="1" dirty="0">
+                <a:solidFill>
+                  <a:srgbClr val="003A63"/>
+                </a:solidFill>
+                <a:latin typeface="Aptos Display" pitchFamily="34" charset="0"/>
+                <a:ea typeface="Aptos Display" pitchFamily="34" charset="-122"/>
+                <a:cs typeface="Aptos Display" pitchFamily="34" charset="-120"/>
+              </a:rPr>
+              <a:t>Jurisdiction and Agency Policy Note</a:t>
+            </a:r>
+            <a:endParaRPr lang="en-US" sz="3400" dirty="0"/>
+          </a:p>
+        </p:txBody>
+      </p:sp>
+      <p:sp>
+        <p:nvSpPr>
+          <p:cNvPr id="9" name="Text 7"/>
+          <p:cNvSpPr/>
+          <p:nvPr/>
+        </p:nvSpPr>
+        <p:spPr>
+          <a:xfrm>
+            <a:off x="868680" y="1508760"/>
+            <a:ext cx="6309360" cy="4160520"/>
+          </a:xfrm>
+          <a:prstGeom prst="rect">
+            <a:avLst/>
+          </a:prstGeom>
+          <a:noFill/>
+          <a:ln/>
+        </p:spPr>
+        <p:txBody>
+          <a:bodyPr wrap="square" lIns="635" tIns="635" rIns="635" bIns="635" rtlCol="0" anchor="t">
+            <a:normAutofit/>
+          </a:bodyPr>
+          <a:lstStyle/>
+          <a:p>
+            <a:r>
+              <a:rPr lang="en-US" sz="2100" dirty="0">
+                <a:solidFill>
+                  <a:srgbClr val="17364A"/>
+                </a:solidFill>
+                <a:latin typeface="Aptos" pitchFamily="34" charset="0"/>
+                <a:ea typeface="Aptos" pitchFamily="34" charset="-122"/>
+                <a:cs typeface="Aptos" pitchFamily="34" charset="-120"/>
+              </a:rPr>
+              <a:t>This national-level module is intended for training and planning purposes.</a:t>
+            </a:r>
+            <a:endParaRPr lang="en-US" sz="2100" dirty="0"/>
+          </a:p>
+          <a:p>
+            <a:r>
+              <a:rPr lang="en-US" sz="2100" dirty="0">
+                <a:solidFill>
+                  <a:srgbClr val="17364A"/>
+                </a:solidFill>
+                <a:latin typeface="Aptos" pitchFamily="34" charset="0"/>
+                <a:ea typeface="Aptos" pitchFamily="34" charset="-122"/>
+                <a:cs typeface="Aptos" pitchFamily="34" charset="-120"/>
+              </a:rPr>
+              <a:t>It does not replace legal, privacy, procurement, civil rights, records, or agency policy review.</a:t>
+            </a:r>
+            <a:endParaRPr lang="en-US" sz="2100" dirty="0"/>
+          </a:p>
+          <a:p>
+            <a:r>
+              <a:rPr lang="en-US" sz="2100" dirty="0">
+                <a:solidFill>
+                  <a:srgbClr val="17364A"/>
+                </a:solidFill>
+                <a:latin typeface="Aptos" pitchFamily="34" charset="0"/>
+                <a:ea typeface="Aptos" pitchFamily="34" charset="-122"/>
+                <a:cs typeface="Aptos" pitchFamily="34" charset="-120"/>
+              </a:rPr>
+              <a:t>Learners should confirm applicable requirements in their own jurisdiction and organization before.</a:t>
+            </a:r>
+            <a:endParaRPr lang="en-US" sz="2100" dirty="0"/>
+          </a:p>
+        </p:txBody>
+      </p:sp>
+      <p:sp>
+        <p:nvSpPr>
+          <p:cNvPr id="10" name="Shape 8"/>
+          <p:cNvSpPr/>
+          <p:nvPr/>
+        </p:nvSpPr>
+        <p:spPr>
+          <a:xfrm>
+            <a:off x="7635240" y="1325880"/>
+            <a:ext cx="3474720" cy="1325880"/>
+          </a:xfrm>
+          <a:prstGeom prst="roundRect">
+            <a:avLst>
+              <a:gd name="adj" fmla="val 8276"/>
+            </a:avLst>
+          </a:prstGeom>
+          <a:solidFill>
+            <a:srgbClr val="EEF8ED"/>
+          </a:solidFill>
+          <a:ln w="12700">
+            <a:solidFill>
+              <a:srgbClr val="B9D7E6"/>
+            </a:solidFill>
+            <a:prstDash val="solid"/>
+          </a:ln>
+        </p:spPr>
+      </p:sp>
+      <p:sp>
+        <p:nvSpPr>
+          <p:cNvPr id="11" name="Text 9"/>
+          <p:cNvSpPr/>
+          <p:nvPr/>
+        </p:nvSpPr>
+        <p:spPr>
+          <a:xfrm>
+            <a:off x="7799832" y="1472184"/>
+            <a:ext cx="3145536" cy="256032"/>
+          </a:xfrm>
+          <a:prstGeom prst="rect">
+            <a:avLst/>
+          </a:prstGeom>
+          <a:noFill/>
+          <a:ln/>
+        </p:spPr>
+        <p:txBody>
+          <a:bodyPr wrap="square" lIns="0" tIns="0" rIns="0" bIns="0" rtlCol="0" anchor="ctr"/>
+          <a:lstStyle/>
+          <a:p>
+            <a:pPr indent="0" marL="0">
+              <a:buNone/>
+            </a:pPr>
+            <a:r>
+              <a:rPr lang="en-US" sz="1300" b="1" dirty="0">
+                <a:solidFill>
+                  <a:srgbClr val="0068B7"/>
+                </a:solidFill>
+                <a:latin typeface="Aptos" pitchFamily="34" charset="0"/>
+                <a:ea typeface="Aptos" pitchFamily="34" charset="-122"/>
+                <a:cs typeface="Aptos" pitchFamily="34" charset="-120"/>
+              </a:rPr>
+              <a:t>Governance lens</a:t>
+            </a:r>
+            <a:endParaRPr lang="en-US" sz="1300" dirty="0"/>
+          </a:p>
+        </p:txBody>
+      </p:sp>
+      <p:sp>
+        <p:nvSpPr>
+          <p:cNvPr id="12" name="Text 10"/>
+          <p:cNvSpPr/>
+          <p:nvPr/>
+        </p:nvSpPr>
+        <p:spPr>
+          <a:xfrm>
+            <a:off x="7799832" y="1828800"/>
+            <a:ext cx="3145536" cy="685800"/>
+          </a:xfrm>
+          <a:prstGeom prst="rect">
+            <a:avLst/>
+          </a:prstGeom>
+          <a:noFill/>
+          <a:ln/>
+        </p:spPr>
+        <p:txBody>
+          <a:bodyPr wrap="square" lIns="0" tIns="0" rIns="0" bIns="0" rtlCol="0" anchor="t">
+            <a:normAutofit/>
+          </a:bodyPr>
+          <a:lstStyle/>
+          <a:p>
+            <a:pPr indent="0" marL="0">
+              <a:buNone/>
+            </a:pPr>
+            <a:r>
+              <a:rPr lang="en-US" sz="1550" dirty="0">
+                <a:solidFill>
+                  <a:srgbClr val="17364A"/>
+                </a:solidFill>
+                <a:latin typeface="Aptos" pitchFamily="34" charset="0"/>
+                <a:ea typeface="Aptos" pitchFamily="34" charset="-122"/>
+                <a:cs typeface="Aptos" pitchFamily="34" charset="-120"/>
+              </a:rPr>
+              <a:t>This national-level module is intended for training and planning purposes.</a:t>
+            </a:r>
+            <a:endParaRPr lang="en-US" sz="1550" dirty="0"/>
+          </a:p>
+        </p:txBody>
+      </p:sp>
+      <p:sp>
+        <p:nvSpPr>
+          <p:cNvPr id="13" name="Shape 11"/>
+          <p:cNvSpPr/>
+          <p:nvPr/>
+        </p:nvSpPr>
+        <p:spPr>
+          <a:xfrm>
+            <a:off x="7635240" y="2788920"/>
+            <a:ext cx="3474720" cy="1536192"/>
+          </a:xfrm>
+          <a:prstGeom prst="roundRect">
+            <a:avLst>
+              <a:gd name="adj" fmla="val 7143"/>
+            </a:avLst>
+          </a:prstGeom>
+          <a:solidFill>
+            <a:srgbClr val="FFFFFF">
+              <a:alpha val="88000"/>
+            </a:srgbClr>
+          </a:solidFill>
+          <a:ln w="12700">
+            <a:solidFill>
+              <a:srgbClr val="D6E8F2"/>
+            </a:solidFill>
+            <a:prstDash val="solid"/>
+          </a:ln>
+        </p:spPr>
+      </p:sp>
+      <p:sp>
+        <p:nvSpPr>
+          <p:cNvPr id="14" name="Shape 12"/>
+          <p:cNvSpPr/>
+          <p:nvPr/>
+        </p:nvSpPr>
+        <p:spPr>
+          <a:xfrm>
+            <a:off x="7891272" y="3108960"/>
+            <a:ext cx="566928" cy="566928"/>
           </a:xfrm>
           <a:prstGeom prst="ellipse">
             <a:avLst/>
@@ -16502,172 +18338,24 @@
       </p:sp>
       <p:sp>
         <p:nvSpPr>
-          <p:cNvPr id="9" name="Text 7"/>
-          <p:cNvSpPr/>
-          <p:nvPr/>
-        </p:nvSpPr>
-        <p:spPr>
-          <a:xfrm>
-            <a:off x="640080" y="731520"/>
-            <a:ext cx="420624" cy="164592"/>
-          </a:xfrm>
-          <a:prstGeom prst="rect">
-            <a:avLst/>
-          </a:prstGeom>
-          <a:noFill/>
-          <a:ln/>
-        </p:spPr>
-        <p:txBody>
-          <a:bodyPr wrap="square" lIns="0" tIns="0" rIns="0" bIns="0" rtlCol="0" anchor="ctr"/>
-          <a:lstStyle/>
-          <a:p>
-            <a:pPr algn="ctr" indent="0" marL="0">
-              <a:buNone/>
-            </a:pPr>
-            <a:r>
-              <a:rPr lang="en-US" sz="1100" b="1" dirty="0">
-                <a:solidFill>
-                  <a:srgbClr val="FFFFFF"/>
-                </a:solidFill>
-                <a:latin typeface="Aptos" pitchFamily="34" charset="0"/>
-                <a:ea typeface="Aptos" pitchFamily="34" charset="-122"/>
-                <a:cs typeface="Aptos" pitchFamily="34" charset="-120"/>
-              </a:rPr>
-              <a:t>4</a:t>
-            </a:r>
-            <a:endParaRPr lang="en-US" sz="1100" dirty="0"/>
-          </a:p>
-        </p:txBody>
-      </p:sp>
-      <p:sp>
-        <p:nvSpPr>
-          <p:cNvPr id="10" name="Text 8"/>
-          <p:cNvSpPr/>
-          <p:nvPr/>
-        </p:nvSpPr>
-        <p:spPr>
-          <a:xfrm>
-            <a:off x="640080" y="621792"/>
-            <a:ext cx="10881360" cy="713232"/>
-          </a:xfrm>
-          <a:prstGeom prst="rect">
-            <a:avLst/>
-          </a:prstGeom>
-          <a:noFill/>
-          <a:ln/>
-        </p:spPr>
-        <p:txBody>
-          <a:bodyPr wrap="square" lIns="0" tIns="0" rIns="0" bIns="0" rtlCol="0" anchor="ctr">
-            <a:normAutofit/>
-          </a:bodyPr>
-          <a:lstStyle/>
-          <a:p>
-            <a:pPr indent="0" marL="0">
-              <a:buNone/>
-            </a:pPr>
-            <a:r>
-              <a:rPr lang="en-US" sz="3400" b="1" dirty="0">
-                <a:solidFill>
-                  <a:srgbClr val="003A63"/>
-                </a:solidFill>
-                <a:latin typeface="Aptos Display" pitchFamily="34" charset="0"/>
-                <a:ea typeface="Aptos Display" pitchFamily="34" charset="-122"/>
-                <a:cs typeface="Aptos Display" pitchFamily="34" charset="-120"/>
-              </a:rPr>
-              <a:t>Jurisdiction and Agency Policy Note</a:t>
-            </a:r>
-            <a:endParaRPr lang="en-US" sz="3400" dirty="0"/>
-          </a:p>
-        </p:txBody>
-      </p:sp>
-      <p:sp>
-        <p:nvSpPr>
-          <p:cNvPr id="11" name="Text 9"/>
-          <p:cNvSpPr/>
-          <p:nvPr/>
-        </p:nvSpPr>
-        <p:spPr>
-          <a:xfrm>
-            <a:off x="868680" y="1508760"/>
-            <a:ext cx="6537960" cy="4160520"/>
-          </a:xfrm>
-          <a:prstGeom prst="rect">
-            <a:avLst/>
-          </a:prstGeom>
-          <a:noFill/>
-          <a:ln/>
-        </p:spPr>
-        <p:txBody>
-          <a:bodyPr wrap="square" lIns="635" tIns="635" rIns="635" bIns="635" rtlCol="0" anchor="t">
-            <a:normAutofit/>
-          </a:bodyPr>
-          <a:lstStyle/>
-          <a:p>
-            <a:r>
-              <a:rPr lang="en-US" sz="2100" dirty="0">
-                <a:solidFill>
-                  <a:srgbClr val="17364A"/>
-                </a:solidFill>
-                <a:latin typeface="Aptos" pitchFamily="34" charset="0"/>
-                <a:ea typeface="Aptos" pitchFamily="34" charset="-122"/>
-                <a:cs typeface="Aptos" pitchFamily="34" charset="-120"/>
-              </a:rPr>
-              <a:t>This national-level module is intended for training and planning purposes.</a:t>
-            </a:r>
-            <a:endParaRPr lang="en-US" sz="2100" dirty="0"/>
-          </a:p>
-          <a:p>
-            <a:r>
-              <a:rPr lang="en-US" sz="2100" dirty="0">
-                <a:solidFill>
-                  <a:srgbClr val="17364A"/>
-                </a:solidFill>
-                <a:latin typeface="Aptos" pitchFamily="34" charset="0"/>
-                <a:ea typeface="Aptos" pitchFamily="34" charset="-122"/>
-                <a:cs typeface="Aptos" pitchFamily="34" charset="-120"/>
-              </a:rPr>
-              <a:t>It does not replace legal, privacy, procurement, civil rights, records, or agency policy review.</a:t>
-            </a:r>
-            <a:endParaRPr lang="en-US" sz="2100" dirty="0"/>
-          </a:p>
-          <a:p>
-            <a:r>
-              <a:rPr lang="en-US" sz="2100" dirty="0">
-                <a:solidFill>
-                  <a:srgbClr val="17364A"/>
-                </a:solidFill>
-                <a:latin typeface="Aptos" pitchFamily="34" charset="0"/>
-                <a:ea typeface="Aptos" pitchFamily="34" charset="-122"/>
-                <a:cs typeface="Aptos" pitchFamily="34" charset="-120"/>
-              </a:rPr>
-              <a:t>Learners should confirm applicable requirements in their own jurisdiction and organization before.</a:t>
-            </a:r>
-            <a:endParaRPr lang="en-US" sz="2100" dirty="0"/>
-          </a:p>
-        </p:txBody>
-      </p:sp>
-      <p:sp>
-        <p:nvSpPr>
-          <p:cNvPr id="12" name="Shape 10"/>
-          <p:cNvSpPr/>
-          <p:nvPr/>
-        </p:nvSpPr>
-        <p:spPr>
-          <a:xfrm>
-            <a:off x="7909560" y="1417320"/>
-            <a:ext cx="3154680" cy="1828800"/>
-          </a:xfrm>
-          <a:prstGeom prst="roundRect">
-            <a:avLst>
-              <a:gd name="adj" fmla="val 6000"/>
-            </a:avLst>
+          <p:cNvPr id="15" name="Shape 13"/>
+          <p:cNvSpPr/>
+          <p:nvPr/>
+        </p:nvSpPr>
+        <p:spPr>
+          <a:xfrm>
+            <a:off x="10287000" y="3108960"/>
+            <a:ext cx="566928" cy="566928"/>
+          </a:xfrm>
+          <a:prstGeom prst="ellipse">
+            <a:avLst/>
           </a:prstGeom>
           <a:solidFill>
-            <a:srgbClr val="EEF8ED"/>
+            <a:srgbClr val="2F8A28"/>
           </a:solidFill>
           <a:ln w="12700">
             <a:solidFill>
-              <a:srgbClr val="B9D7E6"/>
+              <a:srgbClr val="2F8A28"/>
             </a:solidFill>
             <a:prstDash val="solid"/>
           </a:ln>
@@ -16675,14 +18363,108 @@
       </p:sp>
       <p:sp>
         <p:nvSpPr>
-          <p:cNvPr id="13" name="Text 11"/>
-          <p:cNvSpPr/>
-          <p:nvPr/>
-        </p:nvSpPr>
-        <p:spPr>
-          <a:xfrm>
-            <a:off x="8074152" y="1563624"/>
-            <a:ext cx="2825496" cy="256032"/>
+          <p:cNvPr id="16" name="Shape 14"/>
+          <p:cNvSpPr/>
+          <p:nvPr/>
+        </p:nvSpPr>
+        <p:spPr>
+          <a:xfrm>
+            <a:off x="9089136" y="3456432"/>
+            <a:ext cx="566928" cy="566928"/>
+          </a:xfrm>
+          <a:prstGeom prst="ellipse">
+            <a:avLst/>
+          </a:prstGeom>
+          <a:solidFill>
+            <a:srgbClr val="6A4CA3"/>
+          </a:solidFill>
+          <a:ln w="12700">
+            <a:solidFill>
+              <a:srgbClr val="6A4CA3"/>
+            </a:solidFill>
+            <a:prstDash val="solid"/>
+          </a:ln>
+        </p:spPr>
+      </p:sp>
+      <p:sp>
+        <p:nvSpPr>
+          <p:cNvPr id="17" name="Shape 15"/>
+          <p:cNvSpPr/>
+          <p:nvPr/>
+        </p:nvSpPr>
+        <p:spPr>
+          <a:xfrm>
+            <a:off x="8385048" y="3419856"/>
+            <a:ext cx="1975104" cy="0"/>
+          </a:xfrm>
+          <a:prstGeom prst="line">
+            <a:avLst/>
+          </a:prstGeom>
+          <a:noFill/>
+          <a:ln w="25400">
+            <a:solidFill>
+              <a:srgbClr val="8ABBD8"/>
+            </a:solidFill>
+            <a:prstDash val="solid"/>
+          </a:ln>
+        </p:spPr>
+      </p:sp>
+      <p:sp>
+        <p:nvSpPr>
+          <p:cNvPr id="18" name="Shape 16"/>
+          <p:cNvSpPr/>
+          <p:nvPr/>
+        </p:nvSpPr>
+        <p:spPr>
+          <a:xfrm>
+            <a:off x="8202168" y="3630168"/>
+            <a:ext cx="1170432" cy="118872"/>
+          </a:xfrm>
+          <a:prstGeom prst="line">
+            <a:avLst/>
+          </a:prstGeom>
+          <a:noFill/>
+          <a:ln w="25400">
+            <a:solidFill>
+              <a:srgbClr val="8ABBD8"/>
+            </a:solidFill>
+            <a:prstDash val="solid"/>
+          </a:ln>
+        </p:spPr>
+      </p:sp>
+      <p:sp>
+        <p:nvSpPr>
+          <p:cNvPr id="19" name="Shape 17"/>
+          <p:cNvSpPr/>
+          <p:nvPr/>
+        </p:nvSpPr>
+        <p:spPr>
+          <a:xfrm>
+            <a:off x="10543032" y="3630168"/>
+            <a:ext cx="-1170432" cy="118872"/>
+          </a:xfrm>
+          <a:prstGeom prst="line">
+            <a:avLst/>
+          </a:prstGeom>
+          <a:noFill/>
+          <a:ln w="25400">
+            <a:solidFill>
+              <a:srgbClr val="8ABBD8"/>
+            </a:solidFill>
+            <a:prstDash val="solid"/>
+          </a:ln>
+        </p:spPr>
+      </p:sp>
+      <p:sp>
+        <p:nvSpPr>
+          <p:cNvPr id="20" name="Text 18"/>
+          <p:cNvSpPr/>
+          <p:nvPr/>
+        </p:nvSpPr>
+        <p:spPr>
+          <a:xfrm>
+            <a:off x="7863840" y="4069080"/>
+            <a:ext cx="3017520" cy="164592"/>
           </a:xfrm>
           <a:prstGeom prst="rect">
             <a:avLst/>
@@ -16694,79 +18476,38 @@
           <a:bodyPr wrap="square" lIns="0" tIns="0" rIns="0" bIns="0" rtlCol="0" anchor="ctr"/>
           <a:lstStyle/>
           <a:p>
-            <a:pPr indent="0" marL="0">
-              <a:buNone/>
-            </a:pPr>
-            <a:r>
-              <a:rPr lang="en-US" sz="1300" b="1" dirty="0">
-                <a:solidFill>
-                  <a:srgbClr val="0068B7"/>
-                </a:solidFill>
-                <a:latin typeface="Aptos" pitchFamily="34" charset="0"/>
-                <a:ea typeface="Aptos" pitchFamily="34" charset="-122"/>
-                <a:cs typeface="Aptos" pitchFamily="34" charset="-120"/>
-              </a:rPr>
-              <a:t>Key idea</a:t>
-            </a:r>
-            <a:endParaRPr lang="en-US" sz="1300" dirty="0"/>
-          </a:p>
-        </p:txBody>
-      </p:sp>
-      <p:sp>
-        <p:nvSpPr>
-          <p:cNvPr id="14" name="Text 12"/>
-          <p:cNvSpPr/>
-          <p:nvPr/>
-        </p:nvSpPr>
-        <p:spPr>
-          <a:xfrm>
-            <a:off x="8074152" y="1920240"/>
-            <a:ext cx="2825496" cy="1188720"/>
-          </a:xfrm>
-          <a:prstGeom prst="rect">
-            <a:avLst/>
-          </a:prstGeom>
-          <a:noFill/>
-          <a:ln/>
-        </p:spPr>
-        <p:txBody>
-          <a:bodyPr wrap="square" lIns="0" tIns="0" rIns="0" bIns="0" rtlCol="0" anchor="t">
-            <a:normAutofit/>
-          </a:bodyPr>
-          <a:lstStyle/>
-          <a:p>
-            <a:pPr indent="0" marL="0">
-              <a:buNone/>
-            </a:pPr>
-            <a:r>
-              <a:rPr lang="en-US" sz="1550" dirty="0">
-                <a:solidFill>
-                  <a:srgbClr val="17364A"/>
-                </a:solidFill>
-                <a:latin typeface="Aptos" pitchFamily="34" charset="0"/>
-                <a:ea typeface="Aptos" pitchFamily="34" charset="-122"/>
-                <a:cs typeface="Aptos" pitchFamily="34" charset="-120"/>
-              </a:rPr>
-              <a:t>This national-level module is intended for training and planning purposes.</a:t>
-            </a:r>
-            <a:endParaRPr lang="en-US" sz="1550" dirty="0"/>
-          </a:p>
-        </p:txBody>
-      </p:sp>
-      <p:sp>
-        <p:nvSpPr>
-          <p:cNvPr id="15" name="Shape 13"/>
-          <p:cNvSpPr/>
-          <p:nvPr/>
-        </p:nvSpPr>
-        <p:spPr>
-          <a:xfrm>
-            <a:off x="7909560" y="3520440"/>
-            <a:ext cx="3154680" cy="1737360"/>
+            <a:pPr algn="ctr" indent="0" marL="0">
+              <a:buNone/>
+            </a:pPr>
+            <a:r>
+              <a:rPr lang="en-US" sz="900" b="1" dirty="0">
+                <a:solidFill>
+                  <a:srgbClr val="003A63"/>
+                </a:solidFill>
+                <a:latin typeface="Aptos" pitchFamily="34" charset="0"/>
+                <a:ea typeface="Aptos" pitchFamily="34" charset="-122"/>
+                <a:cs typeface="Aptos" pitchFamily="34" charset="-120"/>
+              </a:rPr>
+              <a:t>Decision rights</a:t>
+            </a:r>
+            <a:endParaRPr lang="en-US" sz="900" dirty="0"/>
+          </a:p>
+        </p:txBody>
+      </p:sp>
+      <p:sp>
+        <p:nvSpPr>
+          <p:cNvPr id="21" name="Shape 19"/>
+          <p:cNvSpPr/>
+          <p:nvPr/>
+        </p:nvSpPr>
+        <p:spPr>
+          <a:xfrm>
+            <a:off x="7635240" y="4498848"/>
+            <a:ext cx="3474720" cy="1143000"/>
           </a:xfrm>
           <a:prstGeom prst="roundRect">
             <a:avLst>
-              <a:gd name="adj" fmla="val 6316"/>
+              <a:gd name="adj" fmla="val 9600"/>
             </a:avLst>
           </a:prstGeom>
           <a:solidFill>
@@ -16782,14 +18523,14 @@
       </p:sp>
       <p:sp>
         <p:nvSpPr>
-          <p:cNvPr id="16" name="Text 14"/>
-          <p:cNvSpPr/>
-          <p:nvPr/>
-        </p:nvSpPr>
-        <p:spPr>
-          <a:xfrm>
-            <a:off x="8074152" y="3666744"/>
-            <a:ext cx="2825496" cy="256032"/>
+          <p:cNvPr id="22" name="Text 20"/>
+          <p:cNvSpPr/>
+          <p:nvPr/>
+        </p:nvSpPr>
+        <p:spPr>
+          <a:xfrm>
+            <a:off x="7799832" y="4645152"/>
+            <a:ext cx="3145536" cy="256032"/>
           </a:xfrm>
           <a:prstGeom prst="rect">
             <a:avLst/>
@@ -16813,7 +18554,7 @@
                 <a:ea typeface="Aptos" pitchFamily="34" charset="-122"/>
                 <a:cs typeface="Aptos" pitchFamily="34" charset="-120"/>
               </a:rPr>
-              <a:t>Use this for</a:t>
+              <a:t>What to document</a:t>
             </a:r>
             <a:endParaRPr lang="en-US" sz="1300" dirty="0"/>
           </a:p>
@@ -16821,14 +18562,14 @@
       </p:sp>
       <p:sp>
         <p:nvSpPr>
-          <p:cNvPr id="17" name="Text 15"/>
-          <p:cNvSpPr/>
-          <p:nvPr/>
-        </p:nvSpPr>
-        <p:spPr>
-          <a:xfrm>
-            <a:off x="8074152" y="4023360"/>
-            <a:ext cx="2825496" cy="1097280"/>
+          <p:cNvPr id="23" name="Text 21"/>
+          <p:cNvSpPr/>
+          <p:nvPr/>
+        </p:nvSpPr>
+        <p:spPr>
+          <a:xfrm>
+            <a:off x="7799832" y="5001768"/>
+            <a:ext cx="3145536" cy="502920"/>
           </a:xfrm>
           <a:prstGeom prst="rect">
             <a:avLst/>
@@ -16854,7 +18595,7 @@
                 <a:ea typeface="Aptos" pitchFamily="34" charset="-122"/>
                 <a:cs typeface="Aptos" pitchFamily="34" charset="-120"/>
               </a:rPr>
-              <a:t>Connect the concept to public health decisions, safeguards, documentation, or implementation work.</a:t>
+              <a:t>Translate this concept into clear decision rights, review steps, documentation expectations, and escalation paths before an AI-supported workflow is approved.</a:t>
             </a:r>
             <a:endParaRPr lang="en-US" sz="1550" dirty="0"/>
           </a:p>

--- a/downloads/presentations/modules/arc-340.pptx
+++ b/downloads/presentations/modules/arc-340.pptx
@@ -3615,13 +3615,11 @@
             </a:avLst>
           </a:prstGeom>
           <a:solidFill>
-            <a:srgbClr val="FFFFFF">
-              <a:alpha val="88000"/>
-            </a:srgbClr>
+            <a:srgbClr val="FFFFFF"/>
           </a:solidFill>
           <a:ln w="12700">
             <a:solidFill>
-              <a:srgbClr val="D6E8F2"/>
+              <a:srgbClr val="B9D7E6"/>
             </a:solidFill>
             <a:prstDash val="solid"/>
           </a:ln>
@@ -3629,119 +3627,112 @@
       </p:sp>
       <p:sp>
         <p:nvSpPr>
-          <p:cNvPr id="14" name="Shape 12"/>
-          <p:cNvSpPr/>
-          <p:nvPr/>
-        </p:nvSpPr>
-        <p:spPr>
-          <a:xfrm>
-            <a:off x="8074152" y="3291840"/>
-            <a:ext cx="2596896" cy="749808"/>
-          </a:xfrm>
-          <a:prstGeom prst="rect">
-            <a:avLst/>
-          </a:prstGeom>
-          <a:solidFill>
-            <a:srgbClr val="EAF6F8"/>
-          </a:solidFill>
-          <a:ln w="12700">
-            <a:solidFill>
-              <a:srgbClr val="8ABBD8"/>
-            </a:solidFill>
-            <a:prstDash val="solid"/>
-          </a:ln>
-        </p:spPr>
-      </p:sp>
-      <p:sp>
-        <p:nvSpPr>
-          <p:cNvPr id="15" name="Shape 13"/>
-          <p:cNvSpPr/>
-          <p:nvPr/>
-        </p:nvSpPr>
-        <p:spPr>
-          <a:xfrm>
-            <a:off x="8202168" y="3721608"/>
-            <a:ext cx="2340864" cy="0"/>
-          </a:xfrm>
-          <a:prstGeom prst="line">
-            <a:avLst/>
-          </a:prstGeom>
-          <a:noFill/>
-          <a:ln w="19050">
-            <a:solidFill>
-              <a:srgbClr val="0068B7"/>
-            </a:solidFill>
-            <a:prstDash val="solid"/>
-          </a:ln>
-        </p:spPr>
+          <p:cNvPr id="14" name="Text 12"/>
+          <p:cNvSpPr/>
+          <p:nvPr/>
+        </p:nvSpPr>
+        <p:spPr>
+          <a:xfrm>
+            <a:off x="7799832" y="2935224"/>
+            <a:ext cx="3145536" cy="256032"/>
+          </a:xfrm>
+          <a:prstGeom prst="rect">
+            <a:avLst/>
+          </a:prstGeom>
+          <a:noFill/>
+          <a:ln/>
+        </p:spPr>
+        <p:txBody>
+          <a:bodyPr wrap="square" lIns="0" tIns="0" rIns="0" bIns="0" rtlCol="0" anchor="ctr"/>
+          <a:lstStyle/>
+          <a:p>
+            <a:pPr indent="0" marL="0">
+              <a:buNone/>
+            </a:pPr>
+            <a:r>
+              <a:rPr lang="en-US" sz="1300" b="1" dirty="0">
+                <a:solidFill>
+                  <a:srgbClr val="0068B7"/>
+                </a:solidFill>
+                <a:latin typeface="Aptos" pitchFamily="34" charset="0"/>
+                <a:ea typeface="Aptos" pitchFamily="34" charset="-122"/>
+                <a:cs typeface="Aptos" pitchFamily="34" charset="-120"/>
+              </a:rPr>
+              <a:t>Concept checkpoints</a:t>
+            </a:r>
+            <a:endParaRPr lang="en-US" sz="1300" dirty="0"/>
+          </a:p>
+        </p:txBody>
+      </p:sp>
+      <p:sp>
+        <p:nvSpPr>
+          <p:cNvPr id="15" name="Text 13"/>
+          <p:cNvSpPr/>
+          <p:nvPr/>
+        </p:nvSpPr>
+        <p:spPr>
+          <a:xfrm>
+            <a:off x="7818120" y="3300984"/>
+            <a:ext cx="3090672" cy="877824"/>
+          </a:xfrm>
+          <a:prstGeom prst="rect">
+            <a:avLst/>
+          </a:prstGeom>
+          <a:noFill/>
+          <a:ln/>
+        </p:spPr>
+        <p:txBody>
+          <a:bodyPr wrap="square" lIns="254" tIns="254" rIns="254" bIns="254" rtlCol="0" anchor="t">
+            <a:normAutofit/>
+          </a:bodyPr>
+          <a:lstStyle/>
+          <a:p>
+            <a:r>
+              <a:rPr lang="en-US" sz="1380" dirty="0">
+                <a:solidFill>
+                  <a:srgbClr val="17364A"/>
+                </a:solidFill>
+                <a:latin typeface="Aptos" pitchFamily="34" charset="0"/>
+                <a:ea typeface="Aptos" pitchFamily="34" charset="-122"/>
+                <a:cs typeface="Aptos" pitchFamily="34" charset="-120"/>
+              </a:rPr>
+              <a:t>Integration decisions determine whether AI becomes part of a reliable public health.</a:t>
+            </a:r>
+            <a:endParaRPr lang="en-US" sz="1380" dirty="0"/>
+          </a:p>
+          <a:p>
+            <a:r>
+              <a:rPr lang="en-US" sz="1380" dirty="0">
+                <a:solidFill>
+                  <a:srgbClr val="17364A"/>
+                </a:solidFill>
+                <a:latin typeface="Aptos" pitchFamily="34" charset="0"/>
+                <a:ea typeface="Aptos" pitchFamily="34" charset="-122"/>
+                <a:cs typeface="Aptos" pitchFamily="34" charset="-120"/>
+              </a:rPr>
+              <a:t>If staff must copy and paste sensitive information between systems, the AI tool may appear.</a:t>
+            </a:r>
+            <a:endParaRPr lang="en-US" sz="1380" dirty="0"/>
+          </a:p>
+          <a:p>
+            <a:r>
+              <a:rPr lang="en-US" sz="1380" dirty="0">
+                <a:solidFill>
+                  <a:srgbClr val="17364A"/>
+                </a:solidFill>
+                <a:latin typeface="Aptos" pitchFamily="34" charset="0"/>
+                <a:ea typeface="Aptos" pitchFamily="34" charset="-122"/>
+                <a:cs typeface="Aptos" pitchFamily="34" charset="-120"/>
+              </a:rPr>
+              <a:t>If an AI service writes back to a system of record without appropriate controls, a.</a:t>
+            </a:r>
+            <a:endParaRPr lang="en-US" sz="1380" dirty="0"/>
+          </a:p>
+        </p:txBody>
       </p:sp>
       <p:sp>
         <p:nvSpPr>
           <p:cNvPr id="16" name="Shape 14"/>
-          <p:cNvSpPr/>
-          <p:nvPr/>
-        </p:nvSpPr>
-        <p:spPr>
-          <a:xfrm>
-            <a:off x="9198864" y="4206240"/>
-            <a:ext cx="347472" cy="347472"/>
-          </a:xfrm>
-          <a:prstGeom prst="ellipse">
-            <a:avLst/>
-          </a:prstGeom>
-          <a:solidFill>
-            <a:srgbClr val="2F8A28"/>
-          </a:solidFill>
-          <a:ln w="12700">
-            <a:solidFill>
-              <a:srgbClr val="2F8A28"/>
-            </a:solidFill>
-            <a:prstDash val="solid"/>
-          </a:ln>
-        </p:spPr>
-      </p:sp>
-      <p:sp>
-        <p:nvSpPr>
-          <p:cNvPr id="17" name="Text 15"/>
-          <p:cNvSpPr/>
-          <p:nvPr/>
-        </p:nvSpPr>
-        <p:spPr>
-          <a:xfrm>
-            <a:off x="7909560" y="3977640"/>
-            <a:ext cx="2926080" cy="182880"/>
-          </a:xfrm>
-          <a:prstGeom prst="rect">
-            <a:avLst/>
-          </a:prstGeom>
-          <a:noFill/>
-          <a:ln/>
-        </p:spPr>
-        <p:txBody>
-          <a:bodyPr wrap="square" lIns="0" tIns="0" rIns="0" bIns="0" rtlCol="0" anchor="ctr"/>
-          <a:lstStyle/>
-          <a:p>
-            <a:pPr algn="ctr" indent="0" marL="0">
-              <a:buNone/>
-            </a:pPr>
-            <a:r>
-              <a:rPr lang="en-US" sz="1000" dirty="0">
-                <a:solidFill>
-                  <a:srgbClr val="003A63"/>
-                </a:solidFill>
-                <a:latin typeface="Aptos" pitchFamily="34" charset="0"/>
-                <a:ea typeface="Aptos" pitchFamily="34" charset="-122"/>
-                <a:cs typeface="Aptos" pitchFamily="34" charset="-120"/>
-              </a:rPr>
-              <a:t>Concept to action</a:t>
-            </a:r>
-            <a:endParaRPr lang="en-US" sz="1000" dirty="0"/>
-          </a:p>
-        </p:txBody>
-      </p:sp>
-      <p:sp>
-        <p:nvSpPr>
-          <p:cNvPr id="18" name="Shape 16"/>
           <p:cNvSpPr/>
           <p:nvPr/>
         </p:nvSpPr>
@@ -3768,7 +3759,7 @@
       </p:sp>
       <p:sp>
         <p:nvSpPr>
-          <p:cNvPr id="19" name="Text 17"/>
+          <p:cNvPr id="17" name="Text 15"/>
           <p:cNvSpPr/>
           <p:nvPr/>
         </p:nvSpPr>
@@ -3807,7 +3798,7 @@
       </p:sp>
       <p:sp>
         <p:nvSpPr>
-          <p:cNvPr id="20" name="Text 18"/>
+          <p:cNvPr id="18" name="Text 16"/>
           <p:cNvSpPr/>
           <p:nvPr/>
         </p:nvSpPr>
@@ -4315,13 +4306,11 @@
             </a:avLst>
           </a:prstGeom>
           <a:solidFill>
-            <a:srgbClr val="FFFFFF">
-              <a:alpha val="88000"/>
-            </a:srgbClr>
+            <a:srgbClr val="FFFFFF"/>
           </a:solidFill>
           <a:ln w="12700">
             <a:solidFill>
-              <a:srgbClr val="D6E8F2"/>
+              <a:srgbClr val="B9D7E6"/>
             </a:solidFill>
             <a:prstDash val="solid"/>
           </a:ln>
@@ -4329,119 +4318,112 @@
       </p:sp>
       <p:sp>
         <p:nvSpPr>
-          <p:cNvPr id="14" name="Shape 12"/>
-          <p:cNvSpPr/>
-          <p:nvPr/>
-        </p:nvSpPr>
-        <p:spPr>
-          <a:xfrm>
-            <a:off x="8074152" y="3291840"/>
-            <a:ext cx="2596896" cy="749808"/>
-          </a:xfrm>
-          <a:prstGeom prst="rect">
-            <a:avLst/>
-          </a:prstGeom>
-          <a:solidFill>
-            <a:srgbClr val="EAF6F8"/>
-          </a:solidFill>
-          <a:ln w="12700">
-            <a:solidFill>
-              <a:srgbClr val="8ABBD8"/>
-            </a:solidFill>
-            <a:prstDash val="solid"/>
-          </a:ln>
-        </p:spPr>
-      </p:sp>
-      <p:sp>
-        <p:nvSpPr>
-          <p:cNvPr id="15" name="Shape 13"/>
-          <p:cNvSpPr/>
-          <p:nvPr/>
-        </p:nvSpPr>
-        <p:spPr>
-          <a:xfrm>
-            <a:off x="8202168" y="3721608"/>
-            <a:ext cx="2340864" cy="0"/>
-          </a:xfrm>
-          <a:prstGeom prst="line">
-            <a:avLst/>
-          </a:prstGeom>
-          <a:noFill/>
-          <a:ln w="19050">
-            <a:solidFill>
-              <a:srgbClr val="0068B7"/>
-            </a:solidFill>
-            <a:prstDash val="solid"/>
-          </a:ln>
-        </p:spPr>
+          <p:cNvPr id="14" name="Text 12"/>
+          <p:cNvSpPr/>
+          <p:nvPr/>
+        </p:nvSpPr>
+        <p:spPr>
+          <a:xfrm>
+            <a:off x="7799832" y="2935224"/>
+            <a:ext cx="3145536" cy="256032"/>
+          </a:xfrm>
+          <a:prstGeom prst="rect">
+            <a:avLst/>
+          </a:prstGeom>
+          <a:noFill/>
+          <a:ln/>
+        </p:spPr>
+        <p:txBody>
+          <a:bodyPr wrap="square" lIns="0" tIns="0" rIns="0" bIns="0" rtlCol="0" anchor="ctr"/>
+          <a:lstStyle/>
+          <a:p>
+            <a:pPr indent="0" marL="0">
+              <a:buNone/>
+            </a:pPr>
+            <a:r>
+              <a:rPr lang="en-US" sz="1300" b="1" dirty="0">
+                <a:solidFill>
+                  <a:srgbClr val="0068B7"/>
+                </a:solidFill>
+                <a:latin typeface="Aptos" pitchFamily="34" charset="0"/>
+                <a:ea typeface="Aptos" pitchFamily="34" charset="-122"/>
+                <a:cs typeface="Aptos" pitchFamily="34" charset="-120"/>
+              </a:rPr>
+              <a:t>Concept checkpoints</a:t>
+            </a:r>
+            <a:endParaRPr lang="en-US" sz="1300" dirty="0"/>
+          </a:p>
+        </p:txBody>
+      </p:sp>
+      <p:sp>
+        <p:nvSpPr>
+          <p:cNvPr id="15" name="Text 13"/>
+          <p:cNvSpPr/>
+          <p:nvPr/>
+        </p:nvSpPr>
+        <p:spPr>
+          <a:xfrm>
+            <a:off x="7818120" y="3300984"/>
+            <a:ext cx="3090672" cy="877824"/>
+          </a:xfrm>
+          <a:prstGeom prst="rect">
+            <a:avLst/>
+          </a:prstGeom>
+          <a:noFill/>
+          <a:ln/>
+        </p:spPr>
+        <p:txBody>
+          <a:bodyPr wrap="square" lIns="254" tIns="254" rIns="254" bIns="254" rtlCol="0" anchor="t">
+            <a:normAutofit/>
+          </a:bodyPr>
+          <a:lstStyle/>
+          <a:p>
+            <a:r>
+              <a:rPr lang="en-US" sz="1380" dirty="0">
+                <a:solidFill>
+                  <a:srgbClr val="17364A"/>
+                </a:solidFill>
+                <a:latin typeface="Aptos" pitchFamily="34" charset="0"/>
+                <a:ea typeface="Aptos" pitchFamily="34" charset="-122"/>
+                <a:cs typeface="Aptos" pitchFamily="34" charset="-120"/>
+              </a:rPr>
+              <a:t>A health department may want an AI assistant to summarize incoming case reports and create.</a:t>
+            </a:r>
+            <a:endParaRPr lang="en-US" sz="1380" dirty="0"/>
+          </a:p>
+          <a:p>
+            <a:r>
+              <a:rPr lang="en-US" sz="1380" dirty="0">
+                <a:solidFill>
+                  <a:srgbClr val="17364A"/>
+                </a:solidFill>
+                <a:latin typeface="Aptos" pitchFamily="34" charset="0"/>
+                <a:ea typeface="Aptos" pitchFamily="34" charset="-122"/>
+                <a:cs typeface="Aptos" pitchFamily="34" charset="-120"/>
+              </a:rPr>
+              <a:t>A weak integration pattern would require staff to export case data, paste it into an.</a:t>
+            </a:r>
+            <a:endParaRPr lang="en-US" sz="1380" dirty="0"/>
+          </a:p>
+          <a:p>
+            <a:r>
+              <a:rPr lang="en-US" sz="1380" dirty="0">
+                <a:solidFill>
+                  <a:srgbClr val="17364A"/>
+                </a:solidFill>
+                <a:latin typeface="Aptos" pitchFamily="34" charset="0"/>
+                <a:ea typeface="Aptos" pitchFamily="34" charset="-122"/>
+                <a:cs typeface="Aptos" pitchFamily="34" charset="-120"/>
+              </a:rPr>
+              <a:t>A stronger pattern would retrieve approved fields from the surveillance system, generate a.</a:t>
+            </a:r>
+            <a:endParaRPr lang="en-US" sz="1380" dirty="0"/>
+          </a:p>
+        </p:txBody>
       </p:sp>
       <p:sp>
         <p:nvSpPr>
           <p:cNvPr id="16" name="Shape 14"/>
-          <p:cNvSpPr/>
-          <p:nvPr/>
-        </p:nvSpPr>
-        <p:spPr>
-          <a:xfrm>
-            <a:off x="9198864" y="4206240"/>
-            <a:ext cx="347472" cy="347472"/>
-          </a:xfrm>
-          <a:prstGeom prst="ellipse">
-            <a:avLst/>
-          </a:prstGeom>
-          <a:solidFill>
-            <a:srgbClr val="2F8A28"/>
-          </a:solidFill>
-          <a:ln w="12700">
-            <a:solidFill>
-              <a:srgbClr val="2F8A28"/>
-            </a:solidFill>
-            <a:prstDash val="solid"/>
-          </a:ln>
-        </p:spPr>
-      </p:sp>
-      <p:sp>
-        <p:nvSpPr>
-          <p:cNvPr id="17" name="Text 15"/>
-          <p:cNvSpPr/>
-          <p:nvPr/>
-        </p:nvSpPr>
-        <p:spPr>
-          <a:xfrm>
-            <a:off x="7909560" y="3977640"/>
-            <a:ext cx="2926080" cy="182880"/>
-          </a:xfrm>
-          <a:prstGeom prst="rect">
-            <a:avLst/>
-          </a:prstGeom>
-          <a:noFill/>
-          <a:ln/>
-        </p:spPr>
-        <p:txBody>
-          <a:bodyPr wrap="square" lIns="0" tIns="0" rIns="0" bIns="0" rtlCol="0" anchor="ctr"/>
-          <a:lstStyle/>
-          <a:p>
-            <a:pPr algn="ctr" indent="0" marL="0">
-              <a:buNone/>
-            </a:pPr>
-            <a:r>
-              <a:rPr lang="en-US" sz="1000" dirty="0">
-                <a:solidFill>
-                  <a:srgbClr val="003A63"/>
-                </a:solidFill>
-                <a:latin typeface="Aptos" pitchFamily="34" charset="0"/>
-                <a:ea typeface="Aptos" pitchFamily="34" charset="-122"/>
-                <a:cs typeface="Aptos" pitchFamily="34" charset="-120"/>
-              </a:rPr>
-              <a:t>Concept to action</a:t>
-            </a:r>
-            <a:endParaRPr lang="en-US" sz="1000" dirty="0"/>
-          </a:p>
-        </p:txBody>
-      </p:sp>
-      <p:sp>
-        <p:nvSpPr>
-          <p:cNvPr id="18" name="Shape 16"/>
           <p:cNvSpPr/>
           <p:nvPr/>
         </p:nvSpPr>
@@ -4468,7 +4450,7 @@
       </p:sp>
       <p:sp>
         <p:nvSpPr>
-          <p:cNvPr id="19" name="Text 17"/>
+          <p:cNvPr id="17" name="Text 15"/>
           <p:cNvSpPr/>
           <p:nvPr/>
         </p:nvSpPr>
@@ -4507,7 +4489,7 @@
       </p:sp>
       <p:sp>
         <p:nvSpPr>
-          <p:cNvPr id="20" name="Text 18"/>
+          <p:cNvPr id="18" name="Text 16"/>
           <p:cNvSpPr/>
           <p:nvPr/>
         </p:nvSpPr>
@@ -5015,13 +4997,11 @@
             </a:avLst>
           </a:prstGeom>
           <a:solidFill>
-            <a:srgbClr val="FFFFFF">
-              <a:alpha val="88000"/>
-            </a:srgbClr>
+            <a:srgbClr val="FFFFFF"/>
           </a:solidFill>
           <a:ln w="12700">
             <a:solidFill>
-              <a:srgbClr val="D6E8F2"/>
+              <a:srgbClr val="B9D7E6"/>
             </a:solidFill>
             <a:prstDash val="solid"/>
           </a:ln>
@@ -5029,119 +5009,112 @@
       </p:sp>
       <p:sp>
         <p:nvSpPr>
-          <p:cNvPr id="14" name="Shape 12"/>
-          <p:cNvSpPr/>
-          <p:nvPr/>
-        </p:nvSpPr>
-        <p:spPr>
-          <a:xfrm>
-            <a:off x="8074152" y="3291840"/>
-            <a:ext cx="2596896" cy="749808"/>
-          </a:xfrm>
-          <a:prstGeom prst="rect">
-            <a:avLst/>
-          </a:prstGeom>
-          <a:solidFill>
-            <a:srgbClr val="EAF6F8"/>
-          </a:solidFill>
-          <a:ln w="12700">
-            <a:solidFill>
-              <a:srgbClr val="8ABBD8"/>
-            </a:solidFill>
-            <a:prstDash val="solid"/>
-          </a:ln>
-        </p:spPr>
-      </p:sp>
-      <p:sp>
-        <p:nvSpPr>
-          <p:cNvPr id="15" name="Shape 13"/>
-          <p:cNvSpPr/>
-          <p:nvPr/>
-        </p:nvSpPr>
-        <p:spPr>
-          <a:xfrm>
-            <a:off x="8202168" y="3721608"/>
-            <a:ext cx="2340864" cy="0"/>
-          </a:xfrm>
-          <a:prstGeom prst="line">
-            <a:avLst/>
-          </a:prstGeom>
-          <a:noFill/>
-          <a:ln w="19050">
-            <a:solidFill>
-              <a:srgbClr val="0068B7"/>
-            </a:solidFill>
-            <a:prstDash val="solid"/>
-          </a:ln>
-        </p:spPr>
+          <p:cNvPr id="14" name="Text 12"/>
+          <p:cNvSpPr/>
+          <p:nvPr/>
+        </p:nvSpPr>
+        <p:spPr>
+          <a:xfrm>
+            <a:off x="7799832" y="2935224"/>
+            <a:ext cx="3145536" cy="256032"/>
+          </a:xfrm>
+          <a:prstGeom prst="rect">
+            <a:avLst/>
+          </a:prstGeom>
+          <a:noFill/>
+          <a:ln/>
+        </p:spPr>
+        <p:txBody>
+          <a:bodyPr wrap="square" lIns="0" tIns="0" rIns="0" bIns="0" rtlCol="0" anchor="ctr"/>
+          <a:lstStyle/>
+          <a:p>
+            <a:pPr indent="0" marL="0">
+              <a:buNone/>
+            </a:pPr>
+            <a:r>
+              <a:rPr lang="en-US" sz="1300" b="1" dirty="0">
+                <a:solidFill>
+                  <a:srgbClr val="0068B7"/>
+                </a:solidFill>
+                <a:latin typeface="Aptos" pitchFamily="34" charset="0"/>
+                <a:ea typeface="Aptos" pitchFamily="34" charset="-122"/>
+                <a:cs typeface="Aptos" pitchFamily="34" charset="-120"/>
+              </a:rPr>
+              <a:t>Concept checkpoints</a:t>
+            </a:r>
+            <a:endParaRPr lang="en-US" sz="1300" dirty="0"/>
+          </a:p>
+        </p:txBody>
+      </p:sp>
+      <p:sp>
+        <p:nvSpPr>
+          <p:cNvPr id="15" name="Text 13"/>
+          <p:cNvSpPr/>
+          <p:nvPr/>
+        </p:nvSpPr>
+        <p:spPr>
+          <a:xfrm>
+            <a:off x="7818120" y="3300984"/>
+            <a:ext cx="3090672" cy="877824"/>
+          </a:xfrm>
+          <a:prstGeom prst="rect">
+            <a:avLst/>
+          </a:prstGeom>
+          <a:noFill/>
+          <a:ln/>
+        </p:spPr>
+        <p:txBody>
+          <a:bodyPr wrap="square" lIns="254" tIns="254" rIns="254" bIns="254" rtlCol="0" anchor="t">
+            <a:normAutofit/>
+          </a:bodyPr>
+          <a:lstStyle/>
+          <a:p>
+            <a:r>
+              <a:rPr lang="en-US" sz="1380" dirty="0">
+                <a:solidFill>
+                  <a:srgbClr val="17364A"/>
+                </a:solidFill>
+                <a:latin typeface="Aptos" pitchFamily="34" charset="0"/>
+                <a:ea typeface="Aptos" pitchFamily="34" charset="-122"/>
+                <a:cs typeface="Aptos" pitchFamily="34" charset="-120"/>
+              </a:rPr>
+              <a:t>They can be useful when the exchange is stable and narrow, but they become difficult to.</a:t>
+            </a:r>
+            <a:endParaRPr lang="en-US" sz="1380" dirty="0"/>
+          </a:p>
+          <a:p>
+            <a:r>
+              <a:rPr lang="en-US" sz="1380" dirty="0">
+                <a:solidFill>
+                  <a:srgbClr val="17364A"/>
+                </a:solidFill>
+                <a:latin typeface="Aptos" pitchFamily="34" charset="0"/>
+                <a:ea typeface="Aptos" pitchFamily="34" charset="-122"/>
+                <a:cs typeface="Aptos" pitchFamily="34" charset="-120"/>
+              </a:rPr>
+              <a:t>In public health, too many point-to-point connections can create brittle architecture,.</a:t>
+            </a:r>
+            <a:endParaRPr lang="en-US" sz="1380" dirty="0"/>
+          </a:p>
+          <a:p>
+            <a:r>
+              <a:rPr lang="en-US" sz="1380" dirty="0">
+                <a:solidFill>
+                  <a:srgbClr val="17364A"/>
+                </a:solidFill>
+                <a:latin typeface="Aptos" pitchFamily="34" charset="0"/>
+                <a:ea typeface="Aptos" pitchFamily="34" charset="-122"/>
+                <a:cs typeface="Aptos" pitchFamily="34" charset="-120"/>
+              </a:rPr>
+              <a:t>Interface engines and message brokers support more scalable exchange.</a:t>
+            </a:r>
+            <a:endParaRPr lang="en-US" sz="1380" dirty="0"/>
+          </a:p>
+        </p:txBody>
       </p:sp>
       <p:sp>
         <p:nvSpPr>
           <p:cNvPr id="16" name="Shape 14"/>
-          <p:cNvSpPr/>
-          <p:nvPr/>
-        </p:nvSpPr>
-        <p:spPr>
-          <a:xfrm>
-            <a:off x="9198864" y="4206240"/>
-            <a:ext cx="347472" cy="347472"/>
-          </a:xfrm>
-          <a:prstGeom prst="ellipse">
-            <a:avLst/>
-          </a:prstGeom>
-          <a:solidFill>
-            <a:srgbClr val="2F8A28"/>
-          </a:solidFill>
-          <a:ln w="12700">
-            <a:solidFill>
-              <a:srgbClr val="2F8A28"/>
-            </a:solidFill>
-            <a:prstDash val="solid"/>
-          </a:ln>
-        </p:spPr>
-      </p:sp>
-      <p:sp>
-        <p:nvSpPr>
-          <p:cNvPr id="17" name="Text 15"/>
-          <p:cNvSpPr/>
-          <p:nvPr/>
-        </p:nvSpPr>
-        <p:spPr>
-          <a:xfrm>
-            <a:off x="7909560" y="3977640"/>
-            <a:ext cx="2926080" cy="182880"/>
-          </a:xfrm>
-          <a:prstGeom prst="rect">
-            <a:avLst/>
-          </a:prstGeom>
-          <a:noFill/>
-          <a:ln/>
-        </p:spPr>
-        <p:txBody>
-          <a:bodyPr wrap="square" lIns="0" tIns="0" rIns="0" bIns="0" rtlCol="0" anchor="ctr"/>
-          <a:lstStyle/>
-          <a:p>
-            <a:pPr algn="ctr" indent="0" marL="0">
-              <a:buNone/>
-            </a:pPr>
-            <a:r>
-              <a:rPr lang="en-US" sz="1000" dirty="0">
-                <a:solidFill>
-                  <a:srgbClr val="003A63"/>
-                </a:solidFill>
-                <a:latin typeface="Aptos" pitchFamily="34" charset="0"/>
-                <a:ea typeface="Aptos" pitchFamily="34" charset="-122"/>
-                <a:cs typeface="Aptos" pitchFamily="34" charset="-120"/>
-              </a:rPr>
-              <a:t>Concept to action</a:t>
-            </a:r>
-            <a:endParaRPr lang="en-US" sz="1000" dirty="0"/>
-          </a:p>
-        </p:txBody>
-      </p:sp>
-      <p:sp>
-        <p:nvSpPr>
-          <p:cNvPr id="18" name="Shape 16"/>
           <p:cNvSpPr/>
           <p:nvPr/>
         </p:nvSpPr>
@@ -5168,7 +5141,7 @@
       </p:sp>
       <p:sp>
         <p:nvSpPr>
-          <p:cNvPr id="19" name="Text 17"/>
+          <p:cNvPr id="17" name="Text 15"/>
           <p:cNvSpPr/>
           <p:nvPr/>
         </p:nvSpPr>
@@ -5207,7 +5180,7 @@
       </p:sp>
       <p:sp>
         <p:nvSpPr>
-          <p:cNvPr id="20" name="Text 18"/>
+          <p:cNvPr id="18" name="Text 16"/>
           <p:cNvSpPr/>
           <p:nvPr/>
         </p:nvSpPr>
@@ -5715,13 +5688,11 @@
             </a:avLst>
           </a:prstGeom>
           <a:solidFill>
-            <a:srgbClr val="FFFFFF">
-              <a:alpha val="88000"/>
-            </a:srgbClr>
+            <a:srgbClr val="FFFFFF"/>
           </a:solidFill>
           <a:ln w="12700">
             <a:solidFill>
-              <a:srgbClr val="D6E8F2"/>
+              <a:srgbClr val="B9D7E6"/>
             </a:solidFill>
             <a:prstDash val="solid"/>
           </a:ln>
@@ -5729,26 +5700,42 @@
       </p:sp>
       <p:sp>
         <p:nvSpPr>
-          <p:cNvPr id="14" name="Shape 12"/>
-          <p:cNvSpPr/>
-          <p:nvPr/>
-        </p:nvSpPr>
-        <p:spPr>
-          <a:xfrm>
-            <a:off x="8046720" y="3108960"/>
-            <a:ext cx="2651760" cy="896112"/>
-          </a:xfrm>
-          <a:prstGeom prst="arc">
-            <a:avLst/>
-          </a:prstGeom>
-          <a:noFill/>
-          <a:ln w="25400">
-            <a:solidFill>
-              <a:srgbClr val="0068B7"/>
-            </a:solidFill>
-            <a:prstDash val="solid"/>
-          </a:ln>
-        </p:spPr>
+          <p:cNvPr id="14" name="Text 12"/>
+          <p:cNvSpPr/>
+          <p:nvPr/>
+        </p:nvSpPr>
+        <p:spPr>
+          <a:xfrm>
+            <a:off x="7799832" y="2935224"/>
+            <a:ext cx="3145536" cy="256032"/>
+          </a:xfrm>
+          <a:prstGeom prst="rect">
+            <a:avLst/>
+          </a:prstGeom>
+          <a:noFill/>
+          <a:ln/>
+        </p:spPr>
+        <p:txBody>
+          <a:bodyPr wrap="square" lIns="0" tIns="0" rIns="0" bIns="0" rtlCol="0" anchor="ctr"/>
+          <a:lstStyle/>
+          <a:p>
+            <a:pPr indent="0" marL="0">
+              <a:buNone/>
+            </a:pPr>
+            <a:r>
+              <a:rPr lang="en-US" sz="1300" b="1" dirty="0">
+                <a:solidFill>
+                  <a:srgbClr val="0068B7"/>
+                </a:solidFill>
+                <a:latin typeface="Aptos" pitchFamily="34" charset="0"/>
+                <a:ea typeface="Aptos" pitchFamily="34" charset="-122"/>
+                <a:cs typeface="Aptos" pitchFamily="34" charset="-120"/>
+              </a:rPr>
+              <a:t>Concept checkpoints</a:t>
+            </a:r>
+            <a:endParaRPr lang="en-US" sz="1300" dirty="0"/>
+          </a:p>
+        </p:txBody>
       </p:sp>
       <p:sp>
         <p:nvSpPr>
@@ -5758,102 +5745,67 @@
         </p:nvSpPr>
         <p:spPr>
           <a:xfrm>
-            <a:off x="7909560" y="3099816"/>
-            <a:ext cx="2926080" cy="256032"/>
-          </a:xfrm>
-          <a:prstGeom prst="rect">
-            <a:avLst/>
-          </a:prstGeom>
-          <a:noFill/>
-          <a:ln/>
-        </p:spPr>
-        <p:txBody>
-          <a:bodyPr wrap="square" lIns="0" tIns="0" rIns="0" bIns="0" rtlCol="0" anchor="ctr"/>
-          <a:lstStyle/>
-          <a:p>
-            <a:pPr algn="ctr" indent="0" marL="0">
-              <a:buNone/>
-            </a:pPr>
-            <a:r>
-              <a:rPr lang="en-US" sz="1500" b="1" dirty="0">
-                <a:solidFill>
-                  <a:srgbClr val="003A63"/>
-                </a:solidFill>
-                <a:latin typeface="Aptos" pitchFamily="34" charset="0"/>
-                <a:ea typeface="Aptos" pitchFamily="34" charset="-122"/>
-                <a:cs typeface="Aptos" pitchFamily="34" charset="-120"/>
-              </a:rPr>
-              <a:t>Risk</a:t>
-            </a:r>
-            <a:endParaRPr lang="en-US" sz="1500" dirty="0"/>
+            <a:off x="7818120" y="3300984"/>
+            <a:ext cx="3090672" cy="877824"/>
+          </a:xfrm>
+          <a:prstGeom prst="rect">
+            <a:avLst/>
+          </a:prstGeom>
+          <a:noFill/>
+          <a:ln/>
+        </p:spPr>
+        <p:txBody>
+          <a:bodyPr wrap="square" lIns="254" tIns="254" rIns="254" bIns="254" rtlCol="0" anchor="t">
+            <a:normAutofit/>
+          </a:bodyPr>
+          <a:lstStyle/>
+          <a:p>
+            <a:r>
+              <a:rPr lang="en-US" sz="1380" dirty="0">
+                <a:solidFill>
+                  <a:srgbClr val="17364A"/>
+                </a:solidFill>
+                <a:latin typeface="Aptos" pitchFamily="34" charset="0"/>
+                <a:ea typeface="Aptos" pitchFamily="34" charset="-122"/>
+                <a:cs typeface="Aptos" pitchFamily="34" charset="-120"/>
+              </a:rPr>
+              <a:t>Staff may use manual exports, screenshots, shared drives, or copy-and-paste workflows when.</a:t>
+            </a:r>
+            <a:endParaRPr lang="en-US" sz="1380" dirty="0"/>
+          </a:p>
+          <a:p>
+            <a:r>
+              <a:rPr lang="en-US" sz="1380" dirty="0">
+                <a:solidFill>
+                  <a:srgbClr val="17364A"/>
+                </a:solidFill>
+                <a:latin typeface="Aptos" pitchFamily="34" charset="0"/>
+                <a:ea typeface="Aptos" pitchFamily="34" charset="-122"/>
+                <a:cs typeface="Aptos" pitchFamily="34" charset="-120"/>
+              </a:rPr>
+              <a:t>A guardrail is to require integration review before operational use and to document.</a:t>
+            </a:r>
+            <a:endParaRPr lang="en-US" sz="1380" dirty="0"/>
+          </a:p>
+          <a:p>
+            <a:r>
+              <a:rPr lang="en-US" sz="1380" dirty="0">
+                <a:solidFill>
+                  <a:srgbClr val="17364A"/>
+                </a:solidFill>
+                <a:latin typeface="Aptos" pitchFamily="34" charset="0"/>
+                <a:ea typeface="Aptos" pitchFamily="34" charset="-122"/>
+                <a:cs typeface="Aptos" pitchFamily="34" charset="-120"/>
+              </a:rPr>
+              <a:t>Another failure mode is uncontrolled write-back.</a:t>
+            </a:r>
+            <a:endParaRPr lang="en-US" sz="1380" dirty="0"/>
           </a:p>
         </p:txBody>
       </p:sp>
       <p:sp>
         <p:nvSpPr>
           <p:cNvPr id="16" name="Shape 14"/>
-          <p:cNvSpPr/>
-          <p:nvPr/>
-        </p:nvSpPr>
-        <p:spPr>
-          <a:xfrm>
-            <a:off x="8366760" y="3639312"/>
-            <a:ext cx="2011680" cy="0"/>
-          </a:xfrm>
-          <a:prstGeom prst="line">
-            <a:avLst/>
-          </a:prstGeom>
-          <a:noFill/>
-          <a:ln w="63500">
-            <a:solidFill>
-              <a:srgbClr val="2F8A28"/>
-            </a:solidFill>
-            <a:prstDash val="solid"/>
-          </a:ln>
-        </p:spPr>
-      </p:sp>
-      <p:sp>
-        <p:nvSpPr>
-          <p:cNvPr id="17" name="Text 15"/>
-          <p:cNvSpPr/>
-          <p:nvPr/>
-        </p:nvSpPr>
-        <p:spPr>
-          <a:xfrm>
-            <a:off x="7909560" y="3849624"/>
-            <a:ext cx="2926080" cy="164592"/>
-          </a:xfrm>
-          <a:prstGeom prst="rect">
-            <a:avLst/>
-          </a:prstGeom>
-          <a:noFill/>
-          <a:ln/>
-        </p:spPr>
-        <p:txBody>
-          <a:bodyPr wrap="square" lIns="0" tIns="0" rIns="0" bIns="0" rtlCol="0" anchor="ctr"/>
-          <a:lstStyle/>
-          <a:p>
-            <a:pPr algn="ctr" indent="0" marL="0">
-              <a:buNone/>
-            </a:pPr>
-            <a:r>
-              <a:rPr lang="en-US" sz="900" dirty="0">
-                <a:solidFill>
-                  <a:srgbClr val="003A63"/>
-                </a:solidFill>
-                <a:latin typeface="Aptos" pitchFamily="34" charset="0"/>
-                <a:ea typeface="Aptos" pitchFamily="34" charset="-122"/>
-                <a:cs typeface="Aptos" pitchFamily="34" charset="-120"/>
-              </a:rPr>
-              <a:t>Human review</a:t>
-            </a:r>
-            <a:endParaRPr lang="en-US" sz="900" dirty="0"/>
-          </a:p>
-        </p:txBody>
-      </p:sp>
-      <p:sp>
-        <p:nvSpPr>
-          <p:cNvPr id="18" name="Shape 16"/>
           <p:cNvSpPr/>
           <p:nvPr/>
         </p:nvSpPr>
@@ -5880,7 +5832,7 @@
       </p:sp>
       <p:sp>
         <p:nvSpPr>
-          <p:cNvPr id="19" name="Text 17"/>
+          <p:cNvPr id="17" name="Text 15"/>
           <p:cNvSpPr/>
           <p:nvPr/>
         </p:nvSpPr>
@@ -5919,7 +5871,7 @@
       </p:sp>
       <p:sp>
         <p:nvSpPr>
-          <p:cNvPr id="20" name="Text 18"/>
+          <p:cNvPr id="18" name="Text 16"/>
           <p:cNvSpPr/>
           <p:nvPr/>
         </p:nvSpPr>
@@ -6427,13 +6379,11 @@
             </a:avLst>
           </a:prstGeom>
           <a:solidFill>
-            <a:srgbClr val="FFFFFF">
-              <a:alpha val="88000"/>
-            </a:srgbClr>
+            <a:srgbClr val="FFFFFF"/>
           </a:solidFill>
           <a:ln w="12700">
             <a:solidFill>
-              <a:srgbClr val="D6E8F2"/>
+              <a:srgbClr val="B9D7E6"/>
             </a:solidFill>
             <a:prstDash val="solid"/>
           </a:ln>
@@ -6441,30 +6391,42 @@
       </p:sp>
       <p:sp>
         <p:nvSpPr>
-          <p:cNvPr id="14" name="Shape 12"/>
-          <p:cNvSpPr/>
-          <p:nvPr/>
-        </p:nvSpPr>
-        <p:spPr>
-          <a:xfrm>
-            <a:off x="7927848" y="3319272"/>
-            <a:ext cx="792480" cy="749808"/>
-          </a:xfrm>
-          <a:prstGeom prst="roundRect">
-            <a:avLst>
-              <a:gd name="adj" fmla="val 14634"/>
-            </a:avLst>
-          </a:prstGeom>
-          <a:solidFill>
-            <a:srgbClr val="0068B7"/>
-          </a:solidFill>
-          <a:ln w="12700">
-            <a:solidFill>
-              <a:srgbClr val="0068B7"/>
-            </a:solidFill>
-            <a:prstDash val="solid"/>
-          </a:ln>
-        </p:spPr>
+          <p:cNvPr id="14" name="Text 12"/>
+          <p:cNvSpPr/>
+          <p:nvPr/>
+        </p:nvSpPr>
+        <p:spPr>
+          <a:xfrm>
+            <a:off x="7799832" y="2935224"/>
+            <a:ext cx="3145536" cy="256032"/>
+          </a:xfrm>
+          <a:prstGeom prst="rect">
+            <a:avLst/>
+          </a:prstGeom>
+          <a:noFill/>
+          <a:ln/>
+        </p:spPr>
+        <p:txBody>
+          <a:bodyPr wrap="square" lIns="0" tIns="0" rIns="0" bIns="0" rtlCol="0" anchor="ctr"/>
+          <a:lstStyle/>
+          <a:p>
+            <a:pPr indent="0" marL="0">
+              <a:buNone/>
+            </a:pPr>
+            <a:r>
+              <a:rPr lang="en-US" sz="1300" b="1" dirty="0">
+                <a:solidFill>
+                  <a:srgbClr val="0068B7"/>
+                </a:solidFill>
+                <a:latin typeface="Aptos" pitchFamily="34" charset="0"/>
+                <a:ea typeface="Aptos" pitchFamily="34" charset="-122"/>
+                <a:cs typeface="Aptos" pitchFamily="34" charset="-120"/>
+              </a:rPr>
+              <a:t>Concept checkpoints</a:t>
+            </a:r>
+            <a:endParaRPr lang="en-US" sz="1300" dirty="0"/>
+          </a:p>
+        </p:txBody>
       </p:sp>
       <p:sp>
         <p:nvSpPr>
@@ -6474,240 +6436,67 @@
         </p:nvSpPr>
         <p:spPr>
           <a:xfrm>
-            <a:off x="8001000" y="3511296"/>
-            <a:ext cx="646176" cy="310896"/>
-          </a:xfrm>
-          <a:prstGeom prst="rect">
-            <a:avLst/>
-          </a:prstGeom>
-          <a:noFill/>
-          <a:ln/>
-        </p:spPr>
-        <p:txBody>
-          <a:bodyPr wrap="square" lIns="0" tIns="0" rIns="0" bIns="0" rtlCol="0" anchor="ctr">
+            <a:off x="7818120" y="3300984"/>
+            <a:ext cx="3090672" cy="877824"/>
+          </a:xfrm>
+          <a:prstGeom prst="rect">
+            <a:avLst/>
+          </a:prstGeom>
+          <a:noFill/>
+          <a:ln/>
+        </p:spPr>
+        <p:txBody>
+          <a:bodyPr wrap="square" lIns="254" tIns="254" rIns="254" bIns="254" rtlCol="0" anchor="t">
             <a:normAutofit/>
           </a:bodyPr>
           <a:lstStyle/>
           <a:p>
-            <a:pPr algn="ctr" indent="0" marL="0">
-              <a:buNone/>
-            </a:pPr>
-            <a:r>
-              <a:rPr lang="en-US" sz="1500" b="1" dirty="0">
-                <a:solidFill>
-                  <a:srgbClr val="FFFFFF"/>
-                </a:solidFill>
-                <a:latin typeface="Aptos" pitchFamily="34" charset="0"/>
-                <a:ea typeface="Aptos" pitchFamily="34" charset="-122"/>
-                <a:cs typeface="Aptos" pitchFamily="34" charset="-120"/>
-              </a:rPr>
-              <a:t>Plan</a:t>
-            </a:r>
-            <a:endParaRPr lang="en-US" sz="1500" dirty="0"/>
+            <a:r>
+              <a:rPr lang="en-US" sz="1380" dirty="0">
+                <a:solidFill>
+                  <a:srgbClr val="17364A"/>
+                </a:solidFill>
+                <a:latin typeface="Aptos" pitchFamily="34" charset="0"/>
+                <a:ea typeface="Aptos" pitchFamily="34" charset="-122"/>
+                <a:cs typeface="Aptos" pitchFamily="34" charset="-120"/>
+              </a:rPr>
+              <a:t>Generative AI may require integration with document repositories or systems of record so.</a:t>
+            </a:r>
+            <a:endParaRPr lang="en-US" sz="1380" dirty="0"/>
+          </a:p>
+          <a:p>
+            <a:r>
+              <a:rPr lang="en-US" sz="1380" dirty="0">
+                <a:solidFill>
+                  <a:srgbClr val="17364A"/>
+                </a:solidFill>
+                <a:latin typeface="Aptos" pitchFamily="34" charset="0"/>
+                <a:ea typeface="Aptos" pitchFamily="34" charset="-122"/>
+                <a:cs typeface="Aptos" pitchFamily="34" charset="-120"/>
+              </a:rPr>
+              <a:t>Agentic workflows require the strongest integration controls because they may call tools,.</a:t>
+            </a:r>
+            <a:endParaRPr lang="en-US" sz="1380" dirty="0"/>
+          </a:p>
+          <a:p>
+            <a:r>
+              <a:rPr lang="en-US" sz="1380" dirty="0">
+                <a:solidFill>
+                  <a:srgbClr val="17364A"/>
+                </a:solidFill>
+                <a:latin typeface="Aptos" pitchFamily="34" charset="0"/>
+                <a:ea typeface="Aptos" pitchFamily="34" charset="-122"/>
+                <a:cs typeface="Aptos" pitchFamily="34" charset="-120"/>
+              </a:rPr>
+              <a:t>For each AI use case, the integration pattern should match the sensitivity and operational.</a:t>
+            </a:r>
+            <a:endParaRPr lang="en-US" sz="1380" dirty="0"/>
           </a:p>
         </p:txBody>
       </p:sp>
       <p:sp>
         <p:nvSpPr>
           <p:cNvPr id="16" name="Shape 14"/>
-          <p:cNvSpPr/>
-          <p:nvPr/>
-        </p:nvSpPr>
-        <p:spPr>
-          <a:xfrm>
-            <a:off x="8976360" y="3319272"/>
-            <a:ext cx="792480" cy="749808"/>
-          </a:xfrm>
-          <a:prstGeom prst="roundRect">
-            <a:avLst>
-              <a:gd name="adj" fmla="val 14634"/>
-            </a:avLst>
-          </a:prstGeom>
-          <a:solidFill>
-            <a:srgbClr val="2F8A28"/>
-          </a:solidFill>
-          <a:ln w="12700">
-            <a:solidFill>
-              <a:srgbClr val="2F8A28"/>
-            </a:solidFill>
-            <a:prstDash val="solid"/>
-          </a:ln>
-        </p:spPr>
-      </p:sp>
-      <p:sp>
-        <p:nvSpPr>
-          <p:cNvPr id="17" name="Text 15"/>
-          <p:cNvSpPr/>
-          <p:nvPr/>
-        </p:nvSpPr>
-        <p:spPr>
-          <a:xfrm>
-            <a:off x="9049512" y="3511296"/>
-            <a:ext cx="646176" cy="310896"/>
-          </a:xfrm>
-          <a:prstGeom prst="rect">
-            <a:avLst/>
-          </a:prstGeom>
-          <a:noFill/>
-          <a:ln/>
-        </p:spPr>
-        <p:txBody>
-          <a:bodyPr wrap="square" lIns="0" tIns="0" rIns="0" bIns="0" rtlCol="0" anchor="ctr">
-            <a:normAutofit/>
-          </a:bodyPr>
-          <a:lstStyle/>
-          <a:p>
-            <a:pPr algn="ctr" indent="0" marL="0">
-              <a:buNone/>
-            </a:pPr>
-            <a:r>
-              <a:rPr lang="en-US" sz="1500" b="1" dirty="0">
-                <a:solidFill>
-                  <a:srgbClr val="FFFFFF"/>
-                </a:solidFill>
-                <a:latin typeface="Aptos" pitchFamily="34" charset="0"/>
-                <a:ea typeface="Aptos" pitchFamily="34" charset="-122"/>
-                <a:cs typeface="Aptos" pitchFamily="34" charset="-120"/>
-              </a:rPr>
-              <a:t>Do</a:t>
-            </a:r>
-            <a:endParaRPr lang="en-US" sz="1500" dirty="0"/>
-          </a:p>
-        </p:txBody>
-      </p:sp>
-      <p:sp>
-        <p:nvSpPr>
-          <p:cNvPr id="18" name="Shape 16"/>
-          <p:cNvSpPr/>
-          <p:nvPr/>
-        </p:nvSpPr>
-        <p:spPr>
-          <a:xfrm>
-            <a:off x="10024872" y="3319272"/>
-            <a:ext cx="792480" cy="749808"/>
-          </a:xfrm>
-          <a:prstGeom prst="roundRect">
-            <a:avLst>
-              <a:gd name="adj" fmla="val 14634"/>
-            </a:avLst>
-          </a:prstGeom>
-          <a:solidFill>
-            <a:srgbClr val="D69A2D"/>
-          </a:solidFill>
-          <a:ln w="12700">
-            <a:solidFill>
-              <a:srgbClr val="D69A2D"/>
-            </a:solidFill>
-            <a:prstDash val="solid"/>
-          </a:ln>
-        </p:spPr>
-      </p:sp>
-      <p:sp>
-        <p:nvSpPr>
-          <p:cNvPr id="19" name="Text 17"/>
-          <p:cNvSpPr/>
-          <p:nvPr/>
-        </p:nvSpPr>
-        <p:spPr>
-          <a:xfrm>
-            <a:off x="10098024" y="3511296"/>
-            <a:ext cx="646176" cy="310896"/>
-          </a:xfrm>
-          <a:prstGeom prst="rect">
-            <a:avLst/>
-          </a:prstGeom>
-          <a:noFill/>
-          <a:ln/>
-        </p:spPr>
-        <p:txBody>
-          <a:bodyPr wrap="square" lIns="0" tIns="0" rIns="0" bIns="0" rtlCol="0" anchor="ctr">
-            <a:normAutofit/>
-          </a:bodyPr>
-          <a:lstStyle/>
-          <a:p>
-            <a:pPr algn="ctr" indent="0" marL="0">
-              <a:buNone/>
-            </a:pPr>
-            <a:r>
-              <a:rPr lang="en-US" sz="1500" b="1" dirty="0">
-                <a:solidFill>
-                  <a:srgbClr val="FFFFFF"/>
-                </a:solidFill>
-                <a:latin typeface="Aptos" pitchFamily="34" charset="0"/>
-                <a:ea typeface="Aptos" pitchFamily="34" charset="-122"/>
-                <a:cs typeface="Aptos" pitchFamily="34" charset="-120"/>
-              </a:rPr>
-              <a:t>Review</a:t>
-            </a:r>
-            <a:endParaRPr lang="en-US" sz="1500" dirty="0"/>
-          </a:p>
-        </p:txBody>
-      </p:sp>
-      <p:sp>
-        <p:nvSpPr>
-          <p:cNvPr id="20" name="Shape 18"/>
-          <p:cNvSpPr/>
-          <p:nvPr/>
-        </p:nvSpPr>
-        <p:spPr>
-          <a:xfrm>
-            <a:off x="8293608" y="4389120"/>
-            <a:ext cx="2157984" cy="0"/>
-          </a:xfrm>
-          <a:prstGeom prst="line">
-            <a:avLst/>
-          </a:prstGeom>
-          <a:noFill/>
-          <a:ln w="25400">
-            <a:solidFill>
-              <a:srgbClr val="8ABBD8"/>
-            </a:solidFill>
-            <a:prstDash val="solid"/>
-          </a:ln>
-        </p:spPr>
-      </p:sp>
-      <p:sp>
-        <p:nvSpPr>
-          <p:cNvPr id="21" name="Text 19"/>
-          <p:cNvSpPr/>
-          <p:nvPr/>
-        </p:nvSpPr>
-        <p:spPr>
-          <a:xfrm>
-            <a:off x="7909560" y="3977640"/>
-            <a:ext cx="2926080" cy="182880"/>
-          </a:xfrm>
-          <a:prstGeom prst="rect">
-            <a:avLst/>
-          </a:prstGeom>
-          <a:noFill/>
-          <a:ln/>
-        </p:spPr>
-        <p:txBody>
-          <a:bodyPr wrap="square" lIns="0" tIns="0" rIns="0" bIns="0" rtlCol="0" anchor="ctr"/>
-          <a:lstStyle/>
-          <a:p>
-            <a:pPr algn="ctr" indent="0" marL="0">
-              <a:buNone/>
-            </a:pPr>
-            <a:r>
-              <a:rPr lang="en-US" sz="1000" dirty="0">
-                <a:solidFill>
-                  <a:srgbClr val="003A63"/>
-                </a:solidFill>
-                <a:latin typeface="Aptos" pitchFamily="34" charset="0"/>
-                <a:ea typeface="Aptos" pitchFamily="34" charset="-122"/>
-                <a:cs typeface="Aptos" pitchFamily="34" charset="-120"/>
-              </a:rPr>
-              <a:t>Dependencies visible</a:t>
-            </a:r>
-            <a:endParaRPr lang="en-US" sz="1000" dirty="0"/>
-          </a:p>
-        </p:txBody>
-      </p:sp>
-      <p:sp>
-        <p:nvSpPr>
-          <p:cNvPr id="22" name="Shape 20"/>
           <p:cNvSpPr/>
           <p:nvPr/>
         </p:nvSpPr>
@@ -6734,7 +6523,7 @@
       </p:sp>
       <p:sp>
         <p:nvSpPr>
-          <p:cNvPr id="23" name="Text 21"/>
+          <p:cNvPr id="17" name="Text 15"/>
           <p:cNvSpPr/>
           <p:nvPr/>
         </p:nvSpPr>
@@ -6773,7 +6562,7 @@
       </p:sp>
       <p:sp>
         <p:nvSpPr>
-          <p:cNvPr id="24" name="Text 22"/>
+          <p:cNvPr id="18" name="Text 16"/>
           <p:cNvSpPr/>
           <p:nvPr/>
         </p:nvSpPr>
@@ -7281,13 +7070,11 @@
             </a:avLst>
           </a:prstGeom>
           <a:solidFill>
-            <a:srgbClr val="FFFFFF">
-              <a:alpha val="88000"/>
-            </a:srgbClr>
+            <a:srgbClr val="FFFFFF"/>
           </a:solidFill>
           <a:ln w="12700">
             <a:solidFill>
-              <a:srgbClr val="D6E8F2"/>
+              <a:srgbClr val="B9D7E6"/>
             </a:solidFill>
             <a:prstDash val="solid"/>
           </a:ln>
@@ -7295,119 +7082,112 @@
       </p:sp>
       <p:sp>
         <p:nvSpPr>
-          <p:cNvPr id="14" name="Shape 12"/>
-          <p:cNvSpPr/>
-          <p:nvPr/>
-        </p:nvSpPr>
-        <p:spPr>
-          <a:xfrm>
-            <a:off x="8074152" y="3291840"/>
-            <a:ext cx="2596896" cy="749808"/>
-          </a:xfrm>
-          <a:prstGeom prst="rect">
-            <a:avLst/>
-          </a:prstGeom>
-          <a:solidFill>
-            <a:srgbClr val="EAF6F8"/>
-          </a:solidFill>
-          <a:ln w="12700">
-            <a:solidFill>
-              <a:srgbClr val="8ABBD8"/>
-            </a:solidFill>
-            <a:prstDash val="solid"/>
-          </a:ln>
-        </p:spPr>
-      </p:sp>
-      <p:sp>
-        <p:nvSpPr>
-          <p:cNvPr id="15" name="Shape 13"/>
-          <p:cNvSpPr/>
-          <p:nvPr/>
-        </p:nvSpPr>
-        <p:spPr>
-          <a:xfrm>
-            <a:off x="8202168" y="3721608"/>
-            <a:ext cx="2340864" cy="0"/>
-          </a:xfrm>
-          <a:prstGeom prst="line">
-            <a:avLst/>
-          </a:prstGeom>
-          <a:noFill/>
-          <a:ln w="19050">
-            <a:solidFill>
-              <a:srgbClr val="0068B7"/>
-            </a:solidFill>
-            <a:prstDash val="solid"/>
-          </a:ln>
-        </p:spPr>
+          <p:cNvPr id="14" name="Text 12"/>
+          <p:cNvSpPr/>
+          <p:nvPr/>
+        </p:nvSpPr>
+        <p:spPr>
+          <a:xfrm>
+            <a:off x="7799832" y="2935224"/>
+            <a:ext cx="3145536" cy="256032"/>
+          </a:xfrm>
+          <a:prstGeom prst="rect">
+            <a:avLst/>
+          </a:prstGeom>
+          <a:noFill/>
+          <a:ln/>
+        </p:spPr>
+        <p:txBody>
+          <a:bodyPr wrap="square" lIns="0" tIns="0" rIns="0" bIns="0" rtlCol="0" anchor="ctr"/>
+          <a:lstStyle/>
+          <a:p>
+            <a:pPr indent="0" marL="0">
+              <a:buNone/>
+            </a:pPr>
+            <a:r>
+              <a:rPr lang="en-US" sz="1300" b="1" dirty="0">
+                <a:solidFill>
+                  <a:srgbClr val="0068B7"/>
+                </a:solidFill>
+                <a:latin typeface="Aptos" pitchFamily="34" charset="0"/>
+                <a:ea typeface="Aptos" pitchFamily="34" charset="-122"/>
+                <a:cs typeface="Aptos" pitchFamily="34" charset="-120"/>
+              </a:rPr>
+              <a:t>Concept checkpoints</a:t>
+            </a:r>
+            <a:endParaRPr lang="en-US" sz="1300" dirty="0"/>
+          </a:p>
+        </p:txBody>
+      </p:sp>
+      <p:sp>
+        <p:nvSpPr>
+          <p:cNvPr id="15" name="Text 13"/>
+          <p:cNvSpPr/>
+          <p:nvPr/>
+        </p:nvSpPr>
+        <p:spPr>
+          <a:xfrm>
+            <a:off x="7818120" y="3300984"/>
+            <a:ext cx="3090672" cy="877824"/>
+          </a:xfrm>
+          <a:prstGeom prst="rect">
+            <a:avLst/>
+          </a:prstGeom>
+          <a:noFill/>
+          <a:ln/>
+        </p:spPr>
+        <p:txBody>
+          <a:bodyPr wrap="square" lIns="254" tIns="254" rIns="254" bIns="254" rtlCol="0" anchor="t">
+            <a:normAutofit/>
+          </a:bodyPr>
+          <a:lstStyle/>
+          <a:p>
+            <a:r>
+              <a:rPr lang="en-US" sz="1380" dirty="0">
+                <a:solidFill>
+                  <a:srgbClr val="17364A"/>
+                </a:solidFill>
+                <a:latin typeface="Aptos" pitchFamily="34" charset="0"/>
+                <a:ea typeface="Aptos" pitchFamily="34" charset="-122"/>
+                <a:cs typeface="Aptos" pitchFamily="34" charset="-120"/>
+              </a:rPr>
+              <a:t>Which workflows currently depend on manual transfer between systems?</a:t>
+            </a:r>
+            <a:endParaRPr lang="en-US" sz="1380" dirty="0"/>
+          </a:p>
+          <a:p>
+            <a:r>
+              <a:rPr lang="en-US" sz="1380" dirty="0">
+                <a:solidFill>
+                  <a:srgbClr val="17364A"/>
+                </a:solidFill>
+                <a:latin typeface="Aptos" pitchFamily="34" charset="0"/>
+                <a:ea typeface="Aptos" pitchFamily="34" charset="-122"/>
+                <a:cs typeface="Aptos" pitchFamily="34" charset="-120"/>
+              </a:rPr>
+              <a:t>Which systems are the official systems of record?</a:t>
+            </a:r>
+            <a:endParaRPr lang="en-US" sz="1380" dirty="0"/>
+          </a:p>
+          <a:p>
+            <a:r>
+              <a:rPr lang="en-US" sz="1380" dirty="0">
+                <a:solidFill>
+                  <a:srgbClr val="17364A"/>
+                </a:solidFill>
+                <a:latin typeface="Aptos" pitchFamily="34" charset="0"/>
+                <a:ea typeface="Aptos" pitchFamily="34" charset="-122"/>
+                <a:cs typeface="Aptos" pitchFamily="34" charset="-120"/>
+              </a:rPr>
+              <a:t>Where would API access reduce burden without increasing risk?</a:t>
+            </a:r>
+            <a:endParaRPr lang="en-US" sz="1380" dirty="0"/>
+          </a:p>
+        </p:txBody>
       </p:sp>
       <p:sp>
         <p:nvSpPr>
           <p:cNvPr id="16" name="Shape 14"/>
-          <p:cNvSpPr/>
-          <p:nvPr/>
-        </p:nvSpPr>
-        <p:spPr>
-          <a:xfrm>
-            <a:off x="9198864" y="4206240"/>
-            <a:ext cx="347472" cy="347472"/>
-          </a:xfrm>
-          <a:prstGeom prst="ellipse">
-            <a:avLst/>
-          </a:prstGeom>
-          <a:solidFill>
-            <a:srgbClr val="2F8A28"/>
-          </a:solidFill>
-          <a:ln w="12700">
-            <a:solidFill>
-              <a:srgbClr val="2F8A28"/>
-            </a:solidFill>
-            <a:prstDash val="solid"/>
-          </a:ln>
-        </p:spPr>
-      </p:sp>
-      <p:sp>
-        <p:nvSpPr>
-          <p:cNvPr id="17" name="Text 15"/>
-          <p:cNvSpPr/>
-          <p:nvPr/>
-        </p:nvSpPr>
-        <p:spPr>
-          <a:xfrm>
-            <a:off x="7909560" y="3977640"/>
-            <a:ext cx="2926080" cy="182880"/>
-          </a:xfrm>
-          <a:prstGeom prst="rect">
-            <a:avLst/>
-          </a:prstGeom>
-          <a:noFill/>
-          <a:ln/>
-        </p:spPr>
-        <p:txBody>
-          <a:bodyPr wrap="square" lIns="0" tIns="0" rIns="0" bIns="0" rtlCol="0" anchor="ctr"/>
-          <a:lstStyle/>
-          <a:p>
-            <a:pPr algn="ctr" indent="0" marL="0">
-              <a:buNone/>
-            </a:pPr>
-            <a:r>
-              <a:rPr lang="en-US" sz="1000" dirty="0">
-                <a:solidFill>
-                  <a:srgbClr val="003A63"/>
-                </a:solidFill>
-                <a:latin typeface="Aptos" pitchFamily="34" charset="0"/>
-                <a:ea typeface="Aptos" pitchFamily="34" charset="-122"/>
-                <a:cs typeface="Aptos" pitchFamily="34" charset="-120"/>
-              </a:rPr>
-              <a:t>Concept to action</a:t>
-            </a:r>
-            <a:endParaRPr lang="en-US" sz="1000" dirty="0"/>
-          </a:p>
-        </p:txBody>
-      </p:sp>
-      <p:sp>
-        <p:nvSpPr>
-          <p:cNvPr id="18" name="Shape 16"/>
           <p:cNvSpPr/>
           <p:nvPr/>
         </p:nvSpPr>
@@ -7434,7 +7214,7 @@
       </p:sp>
       <p:sp>
         <p:nvSpPr>
-          <p:cNvPr id="19" name="Text 17"/>
+          <p:cNvPr id="17" name="Text 15"/>
           <p:cNvSpPr/>
           <p:nvPr/>
         </p:nvSpPr>
@@ -7473,7 +7253,7 @@
       </p:sp>
       <p:sp>
         <p:nvSpPr>
-          <p:cNvPr id="20" name="Text 18"/>
+          <p:cNvPr id="18" name="Text 16"/>
           <p:cNvSpPr/>
           <p:nvPr/>
         </p:nvSpPr>
@@ -7967,13 +7747,11 @@
             </a:avLst>
           </a:prstGeom>
           <a:solidFill>
-            <a:srgbClr val="FFFFFF">
-              <a:alpha val="88000"/>
-            </a:srgbClr>
+            <a:srgbClr val="FFFFFF"/>
           </a:solidFill>
           <a:ln w="12700">
             <a:solidFill>
-              <a:srgbClr val="D6E8F2"/>
+              <a:srgbClr val="B9D7E6"/>
             </a:solidFill>
             <a:prstDash val="solid"/>
           </a:ln>
@@ -7981,119 +7759,98 @@
       </p:sp>
       <p:sp>
         <p:nvSpPr>
-          <p:cNvPr id="14" name="Shape 12"/>
-          <p:cNvSpPr/>
-          <p:nvPr/>
-        </p:nvSpPr>
-        <p:spPr>
-          <a:xfrm>
-            <a:off x="8074152" y="3291840"/>
-            <a:ext cx="2596896" cy="749808"/>
-          </a:xfrm>
-          <a:prstGeom prst="rect">
-            <a:avLst/>
-          </a:prstGeom>
-          <a:solidFill>
-            <a:srgbClr val="EAF6F8"/>
-          </a:solidFill>
-          <a:ln w="12700">
-            <a:solidFill>
-              <a:srgbClr val="8ABBD8"/>
-            </a:solidFill>
-            <a:prstDash val="solid"/>
-          </a:ln>
-        </p:spPr>
-      </p:sp>
-      <p:sp>
-        <p:nvSpPr>
-          <p:cNvPr id="15" name="Shape 13"/>
-          <p:cNvSpPr/>
-          <p:nvPr/>
-        </p:nvSpPr>
-        <p:spPr>
-          <a:xfrm>
-            <a:off x="8202168" y="3721608"/>
-            <a:ext cx="2340864" cy="0"/>
-          </a:xfrm>
-          <a:prstGeom prst="line">
-            <a:avLst/>
-          </a:prstGeom>
-          <a:noFill/>
-          <a:ln w="19050">
-            <a:solidFill>
-              <a:srgbClr val="0068B7"/>
-            </a:solidFill>
-            <a:prstDash val="solid"/>
-          </a:ln>
-        </p:spPr>
+          <p:cNvPr id="14" name="Text 12"/>
+          <p:cNvSpPr/>
+          <p:nvPr/>
+        </p:nvSpPr>
+        <p:spPr>
+          <a:xfrm>
+            <a:off x="7799832" y="2935224"/>
+            <a:ext cx="3145536" cy="256032"/>
+          </a:xfrm>
+          <a:prstGeom prst="rect">
+            <a:avLst/>
+          </a:prstGeom>
+          <a:noFill/>
+          <a:ln/>
+        </p:spPr>
+        <p:txBody>
+          <a:bodyPr wrap="square" lIns="0" tIns="0" rIns="0" bIns="0" rtlCol="0" anchor="ctr"/>
+          <a:lstStyle/>
+          <a:p>
+            <a:pPr indent="0" marL="0">
+              <a:buNone/>
+            </a:pPr>
+            <a:r>
+              <a:rPr lang="en-US" sz="1300" b="1" dirty="0">
+                <a:solidFill>
+                  <a:srgbClr val="0068B7"/>
+                </a:solidFill>
+                <a:latin typeface="Aptos" pitchFamily="34" charset="0"/>
+                <a:ea typeface="Aptos" pitchFamily="34" charset="-122"/>
+                <a:cs typeface="Aptos" pitchFamily="34" charset="-120"/>
+              </a:rPr>
+              <a:t>Concept checkpoints</a:t>
+            </a:r>
+            <a:endParaRPr lang="en-US" sz="1300" dirty="0"/>
+          </a:p>
+        </p:txBody>
+      </p:sp>
+      <p:sp>
+        <p:nvSpPr>
+          <p:cNvPr id="15" name="Text 13"/>
+          <p:cNvSpPr/>
+          <p:nvPr/>
+        </p:nvSpPr>
+        <p:spPr>
+          <a:xfrm>
+            <a:off x="7818120" y="3300984"/>
+            <a:ext cx="3090672" cy="877824"/>
+          </a:xfrm>
+          <a:prstGeom prst="rect">
+            <a:avLst/>
+          </a:prstGeom>
+          <a:noFill/>
+          <a:ln/>
+        </p:spPr>
+        <p:txBody>
+          <a:bodyPr wrap="square" lIns="254" tIns="254" rIns="254" bIns="254" rtlCol="0" anchor="t">
+            <a:normAutofit/>
+          </a:bodyPr>
+          <a:lstStyle/>
+          <a:p>
+            <a:r>
+              <a:rPr lang="en-US" sz="1380" dirty="0">
+                <a:solidFill>
+                  <a:srgbClr val="17364A"/>
+                </a:solidFill>
+                <a:latin typeface="Aptos" pitchFamily="34" charset="0"/>
+                <a:ea typeface="Aptos" pitchFamily="34" charset="-122"/>
+                <a:cs typeface="Aptos" pitchFamily="34" charset="-120"/>
+              </a:rPr>
+              <a:t>Which actions should remain read-only?</a:t>
+            </a:r>
+            <a:endParaRPr lang="en-US" sz="1380" dirty="0"/>
+          </a:p>
+          <a:p>
+            <a:r>
+              <a:rPr lang="en-US" sz="1380" dirty="0">
+                <a:solidFill>
+                  <a:srgbClr val="17364A"/>
+                </a:solidFill>
+                <a:latin typeface="Aptos" pitchFamily="34" charset="0"/>
+                <a:ea typeface="Aptos" pitchFamily="34" charset="-122"/>
+                <a:cs typeface="Aptos" pitchFamily="34" charset="-120"/>
+              </a:rPr>
+              <a:t>What logs would be needed to reconstruct an AI-supported action?</a:t>
+            </a:r>
+            <a:endParaRPr lang="en-US" sz="1380" dirty="0"/>
+          </a:p>
+        </p:txBody>
       </p:sp>
       <p:sp>
         <p:nvSpPr>
           <p:cNvPr id="16" name="Shape 14"/>
-          <p:cNvSpPr/>
-          <p:nvPr/>
-        </p:nvSpPr>
-        <p:spPr>
-          <a:xfrm>
-            <a:off x="9198864" y="4206240"/>
-            <a:ext cx="347472" cy="347472"/>
-          </a:xfrm>
-          <a:prstGeom prst="ellipse">
-            <a:avLst/>
-          </a:prstGeom>
-          <a:solidFill>
-            <a:srgbClr val="2F8A28"/>
-          </a:solidFill>
-          <a:ln w="12700">
-            <a:solidFill>
-              <a:srgbClr val="2F8A28"/>
-            </a:solidFill>
-            <a:prstDash val="solid"/>
-          </a:ln>
-        </p:spPr>
-      </p:sp>
-      <p:sp>
-        <p:nvSpPr>
-          <p:cNvPr id="17" name="Text 15"/>
-          <p:cNvSpPr/>
-          <p:nvPr/>
-        </p:nvSpPr>
-        <p:spPr>
-          <a:xfrm>
-            <a:off x="7909560" y="3977640"/>
-            <a:ext cx="2926080" cy="182880"/>
-          </a:xfrm>
-          <a:prstGeom prst="rect">
-            <a:avLst/>
-          </a:prstGeom>
-          <a:noFill/>
-          <a:ln/>
-        </p:spPr>
-        <p:txBody>
-          <a:bodyPr wrap="square" lIns="0" tIns="0" rIns="0" bIns="0" rtlCol="0" anchor="ctr"/>
-          <a:lstStyle/>
-          <a:p>
-            <a:pPr algn="ctr" indent="0" marL="0">
-              <a:buNone/>
-            </a:pPr>
-            <a:r>
-              <a:rPr lang="en-US" sz="1000" dirty="0">
-                <a:solidFill>
-                  <a:srgbClr val="003A63"/>
-                </a:solidFill>
-                <a:latin typeface="Aptos" pitchFamily="34" charset="0"/>
-                <a:ea typeface="Aptos" pitchFamily="34" charset="-122"/>
-                <a:cs typeface="Aptos" pitchFamily="34" charset="-120"/>
-              </a:rPr>
-              <a:t>Concept to action</a:t>
-            </a:r>
-            <a:endParaRPr lang="en-US" sz="1000" dirty="0"/>
-          </a:p>
-        </p:txBody>
-      </p:sp>
-      <p:sp>
-        <p:nvSpPr>
-          <p:cNvPr id="18" name="Shape 16"/>
           <p:cNvSpPr/>
           <p:nvPr/>
         </p:nvSpPr>
@@ -8120,7 +7877,7 @@
       </p:sp>
       <p:sp>
         <p:nvSpPr>
-          <p:cNvPr id="19" name="Text 17"/>
+          <p:cNvPr id="17" name="Text 15"/>
           <p:cNvSpPr/>
           <p:nvPr/>
         </p:nvSpPr>
@@ -8159,7 +7916,7 @@
       </p:sp>
       <p:sp>
         <p:nvSpPr>
-          <p:cNvPr id="20" name="Text 18"/>
+          <p:cNvPr id="18" name="Text 16"/>
           <p:cNvSpPr/>
           <p:nvPr/>
         </p:nvSpPr>
@@ -8653,13 +8410,11 @@
             </a:avLst>
           </a:prstGeom>
           <a:solidFill>
-            <a:srgbClr val="FFFFFF">
-              <a:alpha val="88000"/>
-            </a:srgbClr>
+            <a:srgbClr val="FFFFFF"/>
           </a:solidFill>
           <a:ln w="12700">
             <a:solidFill>
-              <a:srgbClr val="D6E8F2"/>
+              <a:srgbClr val="B9D7E6"/>
             </a:solidFill>
             <a:prstDash val="solid"/>
           </a:ln>
@@ -8667,119 +8422,98 @@
       </p:sp>
       <p:sp>
         <p:nvSpPr>
-          <p:cNvPr id="14" name="Shape 12"/>
-          <p:cNvSpPr/>
-          <p:nvPr/>
-        </p:nvSpPr>
-        <p:spPr>
-          <a:xfrm>
-            <a:off x="8074152" y="3291840"/>
-            <a:ext cx="2596896" cy="749808"/>
-          </a:xfrm>
-          <a:prstGeom prst="rect">
-            <a:avLst/>
-          </a:prstGeom>
-          <a:solidFill>
-            <a:srgbClr val="EAF6F8"/>
-          </a:solidFill>
-          <a:ln w="12700">
-            <a:solidFill>
-              <a:srgbClr val="8ABBD8"/>
-            </a:solidFill>
-            <a:prstDash val="solid"/>
-          </a:ln>
-        </p:spPr>
-      </p:sp>
-      <p:sp>
-        <p:nvSpPr>
-          <p:cNvPr id="15" name="Shape 13"/>
-          <p:cNvSpPr/>
-          <p:nvPr/>
-        </p:nvSpPr>
-        <p:spPr>
-          <a:xfrm>
-            <a:off x="8202168" y="3721608"/>
-            <a:ext cx="2340864" cy="0"/>
-          </a:xfrm>
-          <a:prstGeom prst="line">
-            <a:avLst/>
-          </a:prstGeom>
-          <a:noFill/>
-          <a:ln w="19050">
-            <a:solidFill>
-              <a:srgbClr val="0068B7"/>
-            </a:solidFill>
-            <a:prstDash val="solid"/>
-          </a:ln>
-        </p:spPr>
+          <p:cNvPr id="14" name="Text 12"/>
+          <p:cNvSpPr/>
+          <p:nvPr/>
+        </p:nvSpPr>
+        <p:spPr>
+          <a:xfrm>
+            <a:off x="7799832" y="2935224"/>
+            <a:ext cx="3145536" cy="256032"/>
+          </a:xfrm>
+          <a:prstGeom prst="rect">
+            <a:avLst/>
+          </a:prstGeom>
+          <a:noFill/>
+          <a:ln/>
+        </p:spPr>
+        <p:txBody>
+          <a:bodyPr wrap="square" lIns="0" tIns="0" rIns="0" bIns="0" rtlCol="0" anchor="ctr"/>
+          <a:lstStyle/>
+          <a:p>
+            <a:pPr indent="0" marL="0">
+              <a:buNone/>
+            </a:pPr>
+            <a:r>
+              <a:rPr lang="en-US" sz="1300" b="1" dirty="0">
+                <a:solidFill>
+                  <a:srgbClr val="0068B7"/>
+                </a:solidFill>
+                <a:latin typeface="Aptos" pitchFamily="34" charset="0"/>
+                <a:ea typeface="Aptos" pitchFamily="34" charset="-122"/>
+                <a:cs typeface="Aptos" pitchFamily="34" charset="-120"/>
+              </a:rPr>
+              <a:t>Concept checkpoints</a:t>
+            </a:r>
+            <a:endParaRPr lang="en-US" sz="1300" dirty="0"/>
+          </a:p>
+        </p:txBody>
+      </p:sp>
+      <p:sp>
+        <p:nvSpPr>
+          <p:cNvPr id="15" name="Text 13"/>
+          <p:cNvSpPr/>
+          <p:nvPr/>
+        </p:nvSpPr>
+        <p:spPr>
+          <a:xfrm>
+            <a:off x="7818120" y="3300984"/>
+            <a:ext cx="3090672" cy="877824"/>
+          </a:xfrm>
+          <a:prstGeom prst="rect">
+            <a:avLst/>
+          </a:prstGeom>
+          <a:noFill/>
+          <a:ln/>
+        </p:spPr>
+        <p:txBody>
+          <a:bodyPr wrap="square" lIns="254" tIns="254" rIns="254" bIns="254" rtlCol="0" anchor="t">
+            <a:normAutofit/>
+          </a:bodyPr>
+          <a:lstStyle/>
+          <a:p>
+            <a:r>
+              <a:rPr lang="en-US" sz="1380" dirty="0">
+                <a:solidFill>
+                  <a:srgbClr val="17364A"/>
+                </a:solidFill>
+                <a:latin typeface="Aptos" pitchFamily="34" charset="0"/>
+                <a:ea typeface="Aptos" pitchFamily="34" charset="-122"/>
+                <a:cs typeface="Aptos" pitchFamily="34" charset="-120"/>
+              </a:rPr>
+              <a:t>Create an integration pattern worksheet for one AI-supported workflow.</a:t>
+            </a:r>
+            <a:endParaRPr lang="en-US" sz="1380" dirty="0"/>
+          </a:p>
+          <a:p>
+            <a:r>
+              <a:rPr lang="en-US" sz="1380" dirty="0">
+                <a:solidFill>
+                  <a:srgbClr val="17364A"/>
+                </a:solidFill>
+                <a:latin typeface="Aptos" pitchFamily="34" charset="0"/>
+                <a:ea typeface="Aptos" pitchFamily="34" charset="-122"/>
+                <a:cs typeface="Aptos" pitchFamily="34" charset="-120"/>
+              </a:rPr>
+              <a:t>Identify the systems involved, the data exchanged, the integration method, whether the AI.</a:t>
+            </a:r>
+            <a:endParaRPr lang="en-US" sz="1380" dirty="0"/>
+          </a:p>
+        </p:txBody>
       </p:sp>
       <p:sp>
         <p:nvSpPr>
           <p:cNvPr id="16" name="Shape 14"/>
-          <p:cNvSpPr/>
-          <p:nvPr/>
-        </p:nvSpPr>
-        <p:spPr>
-          <a:xfrm>
-            <a:off x="9198864" y="4206240"/>
-            <a:ext cx="347472" cy="347472"/>
-          </a:xfrm>
-          <a:prstGeom prst="ellipse">
-            <a:avLst/>
-          </a:prstGeom>
-          <a:solidFill>
-            <a:srgbClr val="2F8A28"/>
-          </a:solidFill>
-          <a:ln w="12700">
-            <a:solidFill>
-              <a:srgbClr val="2F8A28"/>
-            </a:solidFill>
-            <a:prstDash val="solid"/>
-          </a:ln>
-        </p:spPr>
-      </p:sp>
-      <p:sp>
-        <p:nvSpPr>
-          <p:cNvPr id="17" name="Text 15"/>
-          <p:cNvSpPr/>
-          <p:nvPr/>
-        </p:nvSpPr>
-        <p:spPr>
-          <a:xfrm>
-            <a:off x="7909560" y="3977640"/>
-            <a:ext cx="2926080" cy="182880"/>
-          </a:xfrm>
-          <a:prstGeom prst="rect">
-            <a:avLst/>
-          </a:prstGeom>
-          <a:noFill/>
-          <a:ln/>
-        </p:spPr>
-        <p:txBody>
-          <a:bodyPr wrap="square" lIns="0" tIns="0" rIns="0" bIns="0" rtlCol="0" anchor="ctr"/>
-          <a:lstStyle/>
-          <a:p>
-            <a:pPr algn="ctr" indent="0" marL="0">
-              <a:buNone/>
-            </a:pPr>
-            <a:r>
-              <a:rPr lang="en-US" sz="1000" dirty="0">
-                <a:solidFill>
-                  <a:srgbClr val="003A63"/>
-                </a:solidFill>
-                <a:latin typeface="Aptos" pitchFamily="34" charset="0"/>
-                <a:ea typeface="Aptos" pitchFamily="34" charset="-122"/>
-                <a:cs typeface="Aptos" pitchFamily="34" charset="-120"/>
-              </a:rPr>
-              <a:t>Concept to action</a:t>
-            </a:r>
-            <a:endParaRPr lang="en-US" sz="1000" dirty="0"/>
-          </a:p>
-        </p:txBody>
-      </p:sp>
-      <p:sp>
-        <p:nvSpPr>
-          <p:cNvPr id="18" name="Shape 16"/>
           <p:cNvSpPr/>
           <p:nvPr/>
         </p:nvSpPr>
@@ -8806,7 +8540,7 @@
       </p:sp>
       <p:sp>
         <p:nvSpPr>
-          <p:cNvPr id="19" name="Text 17"/>
+          <p:cNvPr id="17" name="Text 15"/>
           <p:cNvSpPr/>
           <p:nvPr/>
         </p:nvSpPr>
@@ -8845,7 +8579,7 @@
       </p:sp>
       <p:sp>
         <p:nvSpPr>
-          <p:cNvPr id="20" name="Text 18"/>
+          <p:cNvPr id="18" name="Text 16"/>
           <p:cNvSpPr/>
           <p:nvPr/>
         </p:nvSpPr>
@@ -9353,13 +9087,11 @@
             </a:avLst>
           </a:prstGeom>
           <a:solidFill>
-            <a:srgbClr val="FFFFFF">
-              <a:alpha val="88000"/>
-            </a:srgbClr>
+            <a:srgbClr val="FFFFFF"/>
           </a:solidFill>
           <a:ln w="12700">
             <a:solidFill>
-              <a:srgbClr val="D6E8F2"/>
+              <a:srgbClr val="B9D7E6"/>
             </a:solidFill>
             <a:prstDash val="solid"/>
           </a:ln>
@@ -9367,119 +9099,112 @@
       </p:sp>
       <p:sp>
         <p:nvSpPr>
-          <p:cNvPr id="14" name="Shape 12"/>
-          <p:cNvSpPr/>
-          <p:nvPr/>
-        </p:nvSpPr>
-        <p:spPr>
-          <a:xfrm>
-            <a:off x="8074152" y="3291840"/>
-            <a:ext cx="2596896" cy="749808"/>
-          </a:xfrm>
-          <a:prstGeom prst="rect">
-            <a:avLst/>
-          </a:prstGeom>
-          <a:solidFill>
-            <a:srgbClr val="EAF6F8"/>
-          </a:solidFill>
-          <a:ln w="12700">
-            <a:solidFill>
-              <a:srgbClr val="8ABBD8"/>
-            </a:solidFill>
-            <a:prstDash val="solid"/>
-          </a:ln>
-        </p:spPr>
-      </p:sp>
-      <p:sp>
-        <p:nvSpPr>
-          <p:cNvPr id="15" name="Shape 13"/>
-          <p:cNvSpPr/>
-          <p:nvPr/>
-        </p:nvSpPr>
-        <p:spPr>
-          <a:xfrm>
-            <a:off x="8202168" y="3721608"/>
-            <a:ext cx="2340864" cy="0"/>
-          </a:xfrm>
-          <a:prstGeom prst="line">
-            <a:avLst/>
-          </a:prstGeom>
-          <a:noFill/>
-          <a:ln w="19050">
-            <a:solidFill>
-              <a:srgbClr val="0068B7"/>
-            </a:solidFill>
-            <a:prstDash val="solid"/>
-          </a:ln>
-        </p:spPr>
+          <p:cNvPr id="14" name="Text 12"/>
+          <p:cNvSpPr/>
+          <p:nvPr/>
+        </p:nvSpPr>
+        <p:spPr>
+          <a:xfrm>
+            <a:off x="7799832" y="2935224"/>
+            <a:ext cx="3145536" cy="256032"/>
+          </a:xfrm>
+          <a:prstGeom prst="rect">
+            <a:avLst/>
+          </a:prstGeom>
+          <a:noFill/>
+          <a:ln/>
+        </p:spPr>
+        <p:txBody>
+          <a:bodyPr wrap="square" lIns="0" tIns="0" rIns="0" bIns="0" rtlCol="0" anchor="ctr"/>
+          <a:lstStyle/>
+          <a:p>
+            <a:pPr indent="0" marL="0">
+              <a:buNone/>
+            </a:pPr>
+            <a:r>
+              <a:rPr lang="en-US" sz="1300" b="1" dirty="0">
+                <a:solidFill>
+                  <a:srgbClr val="0068B7"/>
+                </a:solidFill>
+                <a:latin typeface="Aptos" pitchFamily="34" charset="0"/>
+                <a:ea typeface="Aptos" pitchFamily="34" charset="-122"/>
+                <a:cs typeface="Aptos" pitchFamily="34" charset="-120"/>
+              </a:rPr>
+              <a:t>Concept checkpoints</a:t>
+            </a:r>
+            <a:endParaRPr lang="en-US" sz="1300" dirty="0"/>
+          </a:p>
+        </p:txBody>
+      </p:sp>
+      <p:sp>
+        <p:nvSpPr>
+          <p:cNvPr id="15" name="Text 13"/>
+          <p:cNvSpPr/>
+          <p:nvPr/>
+        </p:nvSpPr>
+        <p:spPr>
+          <a:xfrm>
+            <a:off x="7818120" y="3300984"/>
+            <a:ext cx="3090672" cy="877824"/>
+          </a:xfrm>
+          <a:prstGeom prst="rect">
+            <a:avLst/>
+          </a:prstGeom>
+          <a:noFill/>
+          <a:ln/>
+        </p:spPr>
+        <p:txBody>
+          <a:bodyPr wrap="square" lIns="254" tIns="254" rIns="254" bIns="254" rtlCol="0" anchor="t">
+            <a:normAutofit/>
+          </a:bodyPr>
+          <a:lstStyle/>
+          <a:p>
+            <a:r>
+              <a:rPr lang="en-US" sz="1380" dirty="0">
+                <a:solidFill>
+                  <a:srgbClr val="17364A"/>
+                </a:solidFill>
+                <a:latin typeface="Aptos" pitchFamily="34" charset="0"/>
+                <a:ea typeface="Aptos" pitchFamily="34" charset="-122"/>
+                <a:cs typeface="Aptos" pitchFamily="34" charset="-120"/>
+              </a:rPr>
+              <a:t>Integration pattern worksheet</a:t>
+            </a:r>
+            <a:endParaRPr lang="en-US" sz="1380" dirty="0"/>
+          </a:p>
+          <a:p>
+            <a:r>
+              <a:rPr lang="en-US" sz="1380" dirty="0">
+                <a:solidFill>
+                  <a:srgbClr val="17364A"/>
+                </a:solidFill>
+                <a:latin typeface="Aptos" pitchFamily="34" charset="0"/>
+                <a:ea typeface="Aptos" pitchFamily="34" charset="-122"/>
+                <a:cs typeface="Aptos" pitchFamily="34" charset="-120"/>
+              </a:rPr>
+              <a:t>System-of-record and source-system list</a:t>
+            </a:r>
+            <a:endParaRPr lang="en-US" sz="1380" dirty="0"/>
+          </a:p>
+          <a:p>
+            <a:r>
+              <a:rPr lang="en-US" sz="1380" dirty="0">
+                <a:solidFill>
+                  <a:srgbClr val="17364A"/>
+                </a:solidFill>
+                <a:latin typeface="Aptos" pitchFamily="34" charset="0"/>
+                <a:ea typeface="Aptos" pitchFamily="34" charset="-122"/>
+                <a:cs typeface="Aptos" pitchFamily="34" charset="-120"/>
+              </a:rPr>
+              <a:t>Read/write permission recommendation</a:t>
+            </a:r>
+            <a:endParaRPr lang="en-US" sz="1380" dirty="0"/>
+          </a:p>
+        </p:txBody>
       </p:sp>
       <p:sp>
         <p:nvSpPr>
           <p:cNvPr id="16" name="Shape 14"/>
-          <p:cNvSpPr/>
-          <p:nvPr/>
-        </p:nvSpPr>
-        <p:spPr>
-          <a:xfrm>
-            <a:off x="9198864" y="4206240"/>
-            <a:ext cx="347472" cy="347472"/>
-          </a:xfrm>
-          <a:prstGeom prst="ellipse">
-            <a:avLst/>
-          </a:prstGeom>
-          <a:solidFill>
-            <a:srgbClr val="2F8A28"/>
-          </a:solidFill>
-          <a:ln w="12700">
-            <a:solidFill>
-              <a:srgbClr val="2F8A28"/>
-            </a:solidFill>
-            <a:prstDash val="solid"/>
-          </a:ln>
-        </p:spPr>
-      </p:sp>
-      <p:sp>
-        <p:nvSpPr>
-          <p:cNvPr id="17" name="Text 15"/>
-          <p:cNvSpPr/>
-          <p:nvPr/>
-        </p:nvSpPr>
-        <p:spPr>
-          <a:xfrm>
-            <a:off x="7909560" y="3977640"/>
-            <a:ext cx="2926080" cy="182880"/>
-          </a:xfrm>
-          <a:prstGeom prst="rect">
-            <a:avLst/>
-          </a:prstGeom>
-          <a:noFill/>
-          <a:ln/>
-        </p:spPr>
-        <p:txBody>
-          <a:bodyPr wrap="square" lIns="0" tIns="0" rIns="0" bIns="0" rtlCol="0" anchor="ctr"/>
-          <a:lstStyle/>
-          <a:p>
-            <a:pPr algn="ctr" indent="0" marL="0">
-              <a:buNone/>
-            </a:pPr>
-            <a:r>
-              <a:rPr lang="en-US" sz="1000" dirty="0">
-                <a:solidFill>
-                  <a:srgbClr val="003A63"/>
-                </a:solidFill>
-                <a:latin typeface="Aptos" pitchFamily="34" charset="0"/>
-                <a:ea typeface="Aptos" pitchFamily="34" charset="-122"/>
-                <a:cs typeface="Aptos" pitchFamily="34" charset="-120"/>
-              </a:rPr>
-              <a:t>Concept to action</a:t>
-            </a:r>
-            <a:endParaRPr lang="en-US" sz="1000" dirty="0"/>
-          </a:p>
-        </p:txBody>
-      </p:sp>
-      <p:sp>
-        <p:nvSpPr>
-          <p:cNvPr id="18" name="Shape 16"/>
           <p:cNvSpPr/>
           <p:nvPr/>
         </p:nvSpPr>
@@ -9506,7 +9231,7 @@
       </p:sp>
       <p:sp>
         <p:nvSpPr>
-          <p:cNvPr id="19" name="Text 17"/>
+          <p:cNvPr id="17" name="Text 15"/>
           <p:cNvSpPr/>
           <p:nvPr/>
         </p:nvSpPr>
@@ -9545,7 +9270,7 @@
       </p:sp>
       <p:sp>
         <p:nvSpPr>
-          <p:cNvPr id="20" name="Text 18"/>
+          <p:cNvPr id="18" name="Text 16"/>
           <p:cNvSpPr/>
           <p:nvPr/>
         </p:nvSpPr>
@@ -10025,13 +9750,11 @@
             </a:avLst>
           </a:prstGeom>
           <a:solidFill>
-            <a:srgbClr val="FFFFFF">
-              <a:alpha val="88000"/>
-            </a:srgbClr>
+            <a:srgbClr val="FFFFFF"/>
           </a:solidFill>
           <a:ln w="12700">
             <a:solidFill>
-              <a:srgbClr val="D6E8F2"/>
+              <a:srgbClr val="B9D7E6"/>
             </a:solidFill>
             <a:prstDash val="solid"/>
           </a:ln>
@@ -10039,119 +9762,84 @@
       </p:sp>
       <p:sp>
         <p:nvSpPr>
-          <p:cNvPr id="14" name="Shape 12"/>
-          <p:cNvSpPr/>
-          <p:nvPr/>
-        </p:nvSpPr>
-        <p:spPr>
-          <a:xfrm>
-            <a:off x="8074152" y="3291840"/>
-            <a:ext cx="2596896" cy="749808"/>
-          </a:xfrm>
-          <a:prstGeom prst="rect">
-            <a:avLst/>
-          </a:prstGeom>
-          <a:solidFill>
-            <a:srgbClr val="EAF6F8"/>
-          </a:solidFill>
-          <a:ln w="12700">
-            <a:solidFill>
-              <a:srgbClr val="8ABBD8"/>
-            </a:solidFill>
-            <a:prstDash val="solid"/>
-          </a:ln>
-        </p:spPr>
-      </p:sp>
-      <p:sp>
-        <p:nvSpPr>
-          <p:cNvPr id="15" name="Shape 13"/>
-          <p:cNvSpPr/>
-          <p:nvPr/>
-        </p:nvSpPr>
-        <p:spPr>
-          <a:xfrm>
-            <a:off x="8202168" y="3721608"/>
-            <a:ext cx="2340864" cy="0"/>
-          </a:xfrm>
-          <a:prstGeom prst="line">
-            <a:avLst/>
-          </a:prstGeom>
-          <a:noFill/>
-          <a:ln w="19050">
-            <a:solidFill>
-              <a:srgbClr val="0068B7"/>
-            </a:solidFill>
-            <a:prstDash val="solid"/>
-          </a:ln>
-        </p:spPr>
+          <p:cNvPr id="14" name="Text 12"/>
+          <p:cNvSpPr/>
+          <p:nvPr/>
+        </p:nvSpPr>
+        <p:spPr>
+          <a:xfrm>
+            <a:off x="7799832" y="2935224"/>
+            <a:ext cx="3145536" cy="256032"/>
+          </a:xfrm>
+          <a:prstGeom prst="rect">
+            <a:avLst/>
+          </a:prstGeom>
+          <a:noFill/>
+          <a:ln/>
+        </p:spPr>
+        <p:txBody>
+          <a:bodyPr wrap="square" lIns="0" tIns="0" rIns="0" bIns="0" rtlCol="0" anchor="ctr"/>
+          <a:lstStyle/>
+          <a:p>
+            <a:pPr indent="0" marL="0">
+              <a:buNone/>
+            </a:pPr>
+            <a:r>
+              <a:rPr lang="en-US" sz="1300" b="1" dirty="0">
+                <a:solidFill>
+                  <a:srgbClr val="0068B7"/>
+                </a:solidFill>
+                <a:latin typeface="Aptos" pitchFamily="34" charset="0"/>
+                <a:ea typeface="Aptos" pitchFamily="34" charset="-122"/>
+                <a:cs typeface="Aptos" pitchFamily="34" charset="-120"/>
+              </a:rPr>
+              <a:t>Concept checkpoints</a:t>
+            </a:r>
+            <a:endParaRPr lang="en-US" sz="1300" dirty="0"/>
+          </a:p>
+        </p:txBody>
+      </p:sp>
+      <p:sp>
+        <p:nvSpPr>
+          <p:cNvPr id="15" name="Text 13"/>
+          <p:cNvSpPr/>
+          <p:nvPr/>
+        </p:nvSpPr>
+        <p:spPr>
+          <a:xfrm>
+            <a:off x="7818120" y="3300984"/>
+            <a:ext cx="3090672" cy="877824"/>
+          </a:xfrm>
+          <a:prstGeom prst="rect">
+            <a:avLst/>
+          </a:prstGeom>
+          <a:noFill/>
+          <a:ln/>
+        </p:spPr>
+        <p:txBody>
+          <a:bodyPr wrap="square" lIns="254" tIns="254" rIns="254" bIns="254" rtlCol="0" anchor="t">
+            <a:normAutofit/>
+          </a:bodyPr>
+          <a:lstStyle/>
+          <a:p>
+            <a:r>
+              <a:rPr lang="en-US" sz="1380" dirty="0">
+                <a:solidFill>
+                  <a:srgbClr val="17364A"/>
+                </a:solidFill>
+                <a:latin typeface="Aptos" pitchFamily="34" charset="0"/>
+                <a:ea typeface="Aptos" pitchFamily="34" charset="-122"/>
+                <a:cs typeface="Aptos" pitchFamily="34" charset="-120"/>
+              </a:rPr>
+              <a:t>Error handling and audit log requirements</a:t>
+            </a:r>
+            <a:endParaRPr lang="en-US" sz="1380" dirty="0"/>
+          </a:p>
+        </p:txBody>
       </p:sp>
       <p:sp>
         <p:nvSpPr>
           <p:cNvPr id="16" name="Shape 14"/>
-          <p:cNvSpPr/>
-          <p:nvPr/>
-        </p:nvSpPr>
-        <p:spPr>
-          <a:xfrm>
-            <a:off x="9198864" y="4206240"/>
-            <a:ext cx="347472" cy="347472"/>
-          </a:xfrm>
-          <a:prstGeom prst="ellipse">
-            <a:avLst/>
-          </a:prstGeom>
-          <a:solidFill>
-            <a:srgbClr val="2F8A28"/>
-          </a:solidFill>
-          <a:ln w="12700">
-            <a:solidFill>
-              <a:srgbClr val="2F8A28"/>
-            </a:solidFill>
-            <a:prstDash val="solid"/>
-          </a:ln>
-        </p:spPr>
-      </p:sp>
-      <p:sp>
-        <p:nvSpPr>
-          <p:cNvPr id="17" name="Text 15"/>
-          <p:cNvSpPr/>
-          <p:nvPr/>
-        </p:nvSpPr>
-        <p:spPr>
-          <a:xfrm>
-            <a:off x="7909560" y="3977640"/>
-            <a:ext cx="2926080" cy="182880"/>
-          </a:xfrm>
-          <a:prstGeom prst="rect">
-            <a:avLst/>
-          </a:prstGeom>
-          <a:noFill/>
-          <a:ln/>
-        </p:spPr>
-        <p:txBody>
-          <a:bodyPr wrap="square" lIns="0" tIns="0" rIns="0" bIns="0" rtlCol="0" anchor="ctr"/>
-          <a:lstStyle/>
-          <a:p>
-            <a:pPr algn="ctr" indent="0" marL="0">
-              <a:buNone/>
-            </a:pPr>
-            <a:r>
-              <a:rPr lang="en-US" sz="1000" dirty="0">
-                <a:solidFill>
-                  <a:srgbClr val="003A63"/>
-                </a:solidFill>
-                <a:latin typeface="Aptos" pitchFamily="34" charset="0"/>
-                <a:ea typeface="Aptos" pitchFamily="34" charset="-122"/>
-                <a:cs typeface="Aptos" pitchFamily="34" charset="-120"/>
-              </a:rPr>
-              <a:t>Concept to action</a:t>
-            </a:r>
-            <a:endParaRPr lang="en-US" sz="1000" dirty="0"/>
-          </a:p>
-        </p:txBody>
-      </p:sp>
-      <p:sp>
-        <p:nvSpPr>
-          <p:cNvPr id="18" name="Shape 16"/>
           <p:cNvSpPr/>
           <p:nvPr/>
         </p:nvSpPr>
@@ -10178,7 +9866,7 @@
       </p:sp>
       <p:sp>
         <p:nvSpPr>
-          <p:cNvPr id="19" name="Text 17"/>
+          <p:cNvPr id="17" name="Text 15"/>
           <p:cNvSpPr/>
           <p:nvPr/>
         </p:nvSpPr>
@@ -10217,7 +9905,7 @@
       </p:sp>
       <p:sp>
         <p:nvSpPr>
-          <p:cNvPr id="20" name="Text 18"/>
+          <p:cNvPr id="18" name="Text 16"/>
           <p:cNvSpPr/>
           <p:nvPr/>
         </p:nvSpPr>
@@ -10750,20 +10438,20 @@
         </p:nvSpPr>
         <p:spPr>
           <a:xfrm>
-            <a:off x="7635240" y="3730752"/>
-            <a:ext cx="1033272" cy="749808"/>
+            <a:off x="7909560" y="3675888"/>
+            <a:ext cx="3154680" cy="1691640"/>
           </a:xfrm>
           <a:prstGeom prst="roundRect">
             <a:avLst>
-              <a:gd name="adj" fmla="val 14634"/>
+              <a:gd name="adj" fmla="val 6486"/>
             </a:avLst>
           </a:prstGeom>
           <a:solidFill>
-            <a:srgbClr val="0068B7"/>
+            <a:srgbClr val="FFFFFF"/>
           </a:solidFill>
           <a:ln w="12700">
             <a:solidFill>
-              <a:srgbClr val="0068B7"/>
+              <a:srgbClr val="B9D7E6"/>
             </a:solidFill>
             <a:prstDash val="solid"/>
           </a:ln>
@@ -10777,172 +10465,100 @@
         </p:nvSpPr>
         <p:spPr>
           <a:xfrm>
-            <a:off x="7708392" y="3922776"/>
-            <a:ext cx="886968" cy="310896"/>
-          </a:xfrm>
-          <a:prstGeom prst="rect">
-            <a:avLst/>
-          </a:prstGeom>
-          <a:noFill/>
-          <a:ln/>
-        </p:spPr>
-        <p:txBody>
-          <a:bodyPr wrap="square" lIns="0" tIns="0" rIns="0" bIns="0" rtlCol="0" anchor="ctr">
+            <a:off x="8074152" y="3822192"/>
+            <a:ext cx="2825496" cy="256032"/>
+          </a:xfrm>
+          <a:prstGeom prst="rect">
+            <a:avLst/>
+          </a:prstGeom>
+          <a:noFill/>
+          <a:ln/>
+        </p:spPr>
+        <p:txBody>
+          <a:bodyPr wrap="square" lIns="0" tIns="0" rIns="0" bIns="0" rtlCol="0" anchor="ctr"/>
+          <a:lstStyle/>
+          <a:p>
+            <a:pPr indent="0" marL="0">
+              <a:buNone/>
+            </a:pPr>
+            <a:r>
+              <a:rPr lang="en-US" sz="1300" b="1" dirty="0">
+                <a:solidFill>
+                  <a:srgbClr val="0068B7"/>
+                </a:solidFill>
+                <a:latin typeface="Aptos" pitchFamily="34" charset="0"/>
+                <a:ea typeface="Aptos" pitchFamily="34" charset="-122"/>
+                <a:cs typeface="Aptos" pitchFamily="34" charset="-120"/>
+              </a:rPr>
+              <a:t>Learning sequence</a:t>
+            </a:r>
+            <a:endParaRPr lang="en-US" sz="1300" dirty="0"/>
+          </a:p>
+        </p:txBody>
+      </p:sp>
+      <p:sp>
+        <p:nvSpPr>
+          <p:cNvPr id="15" name="Text 13"/>
+          <p:cNvSpPr/>
+          <p:nvPr/>
+        </p:nvSpPr>
+        <p:spPr>
+          <a:xfrm>
+            <a:off x="8092440" y="4187952"/>
+            <a:ext cx="2770632" cy="1033272"/>
+          </a:xfrm>
+          <a:prstGeom prst="rect">
+            <a:avLst/>
+          </a:prstGeom>
+          <a:noFill/>
+          <a:ln/>
+        </p:spPr>
+        <p:txBody>
+          <a:bodyPr wrap="square" lIns="254" tIns="254" rIns="254" bIns="254" rtlCol="0" anchor="t">
             <a:normAutofit/>
           </a:bodyPr>
           <a:lstStyle/>
           <a:p>
-            <a:pPr algn="ctr" indent="0" marL="0">
-              <a:buNone/>
-            </a:pPr>
-            <a:r>
-              <a:rPr lang="en-US" sz="1500" b="1" dirty="0">
-                <a:solidFill>
-                  <a:srgbClr val="FFFFFF"/>
-                </a:solidFill>
-                <a:latin typeface="Aptos" pitchFamily="34" charset="0"/>
-                <a:ea typeface="Aptos" pitchFamily="34" charset="-122"/>
-                <a:cs typeface="Aptos" pitchFamily="34" charset="-120"/>
-              </a:rPr>
-              <a:t>Learn</a:t>
-            </a:r>
-            <a:endParaRPr lang="en-US" sz="1500" dirty="0"/>
-          </a:p>
-        </p:txBody>
-      </p:sp>
-      <p:sp>
-        <p:nvSpPr>
-          <p:cNvPr id="15" name="Shape 13"/>
-          <p:cNvSpPr/>
-          <p:nvPr/>
-        </p:nvSpPr>
-        <p:spPr>
-          <a:xfrm>
-            <a:off x="8924544" y="3730752"/>
-            <a:ext cx="1033272" cy="749808"/>
-          </a:xfrm>
-          <a:prstGeom prst="roundRect">
-            <a:avLst>
-              <a:gd name="adj" fmla="val 14634"/>
-            </a:avLst>
-          </a:prstGeom>
-          <a:solidFill>
-            <a:srgbClr val="2F8A28"/>
-          </a:solidFill>
-          <a:ln w="12700">
-            <a:solidFill>
-              <a:srgbClr val="2F8A28"/>
-            </a:solidFill>
-            <a:prstDash val="solid"/>
-          </a:ln>
-        </p:spPr>
-      </p:sp>
-      <p:sp>
-        <p:nvSpPr>
-          <p:cNvPr id="16" name="Text 14"/>
-          <p:cNvSpPr/>
-          <p:nvPr/>
-        </p:nvSpPr>
-        <p:spPr>
-          <a:xfrm>
-            <a:off x="8997696" y="3922776"/>
-            <a:ext cx="886968" cy="310896"/>
-          </a:xfrm>
-          <a:prstGeom prst="rect">
-            <a:avLst/>
-          </a:prstGeom>
-          <a:noFill/>
-          <a:ln/>
-        </p:spPr>
-        <p:txBody>
-          <a:bodyPr wrap="square" lIns="0" tIns="0" rIns="0" bIns="0" rtlCol="0" anchor="ctr">
-            <a:normAutofit/>
-          </a:bodyPr>
-          <a:lstStyle/>
-          <a:p>
-            <a:pPr algn="ctr" indent="0" marL="0">
-              <a:buNone/>
-            </a:pPr>
-            <a:r>
-              <a:rPr lang="en-US" sz="1500" b="1" dirty="0">
-                <a:solidFill>
-                  <a:srgbClr val="FFFFFF"/>
-                </a:solidFill>
-                <a:latin typeface="Aptos" pitchFamily="34" charset="0"/>
-                <a:ea typeface="Aptos" pitchFamily="34" charset="-122"/>
-                <a:cs typeface="Aptos" pitchFamily="34" charset="-120"/>
-              </a:rPr>
-              <a:t>Apply</a:t>
-            </a:r>
-            <a:endParaRPr lang="en-US" sz="1500" dirty="0"/>
-          </a:p>
-        </p:txBody>
-      </p:sp>
-      <p:sp>
-        <p:nvSpPr>
-          <p:cNvPr id="17" name="Shape 15"/>
-          <p:cNvSpPr/>
-          <p:nvPr/>
-        </p:nvSpPr>
-        <p:spPr>
-          <a:xfrm>
-            <a:off x="10213848" y="3730752"/>
-            <a:ext cx="1033272" cy="749808"/>
-          </a:xfrm>
-          <a:prstGeom prst="roundRect">
-            <a:avLst>
-              <a:gd name="adj" fmla="val 14634"/>
-            </a:avLst>
-          </a:prstGeom>
-          <a:solidFill>
-            <a:srgbClr val="6A4CA3"/>
-          </a:solidFill>
-          <a:ln w="12700">
-            <a:solidFill>
-              <a:srgbClr val="6A4CA3"/>
-            </a:solidFill>
-            <a:prstDash val="solid"/>
-          </a:ln>
-        </p:spPr>
-      </p:sp>
-      <p:sp>
-        <p:nvSpPr>
-          <p:cNvPr id="18" name="Text 16"/>
-          <p:cNvSpPr/>
-          <p:nvPr/>
-        </p:nvSpPr>
-        <p:spPr>
-          <a:xfrm>
-            <a:off x="10287000" y="3922776"/>
-            <a:ext cx="886968" cy="310896"/>
-          </a:xfrm>
-          <a:prstGeom prst="rect">
-            <a:avLst/>
-          </a:prstGeom>
-          <a:noFill/>
-          <a:ln/>
-        </p:spPr>
-        <p:txBody>
-          <a:bodyPr wrap="square" lIns="0" tIns="0" rIns="0" bIns="0" rtlCol="0" anchor="ctr">
-            <a:normAutofit/>
-          </a:bodyPr>
-          <a:lstStyle/>
-          <a:p>
-            <a:pPr algn="ctr" indent="0" marL="0">
-              <a:buNone/>
-            </a:pPr>
-            <a:r>
-              <a:rPr lang="en-US" sz="1500" b="1" dirty="0">
-                <a:solidFill>
-                  <a:srgbClr val="FFFFFF"/>
-                </a:solidFill>
-                <a:latin typeface="Aptos" pitchFamily="34" charset="0"/>
-                <a:ea typeface="Aptos" pitchFamily="34" charset="-122"/>
-                <a:cs typeface="Aptos" pitchFamily="34" charset="-120"/>
-              </a:rPr>
-              <a:t>Document</a:t>
-            </a:r>
-            <a:endParaRPr lang="en-US" sz="1500" dirty="0"/>
+            <a:r>
+              <a:rPr lang="en-US" sz="1380" dirty="0">
+                <a:solidFill>
+                  <a:srgbClr val="17364A"/>
+                </a:solidFill>
+                <a:latin typeface="Aptos" pitchFamily="34" charset="0"/>
+                <a:ea typeface="Aptos" pitchFamily="34" charset="-122"/>
+                <a:cs typeface="Aptos" pitchFamily="34" charset="-120"/>
+              </a:rPr>
+              <a:t>Read the module for shared vocabulary and context.</a:t>
+            </a:r>
+            <a:endParaRPr lang="en-US" sz="1380" dirty="0"/>
+          </a:p>
+          <a:p>
+            <a:r>
+              <a:rPr lang="en-US" sz="1380" dirty="0">
+                <a:solidFill>
+                  <a:srgbClr val="17364A"/>
+                </a:solidFill>
+                <a:latin typeface="Aptos" pitchFamily="34" charset="0"/>
+                <a:ea typeface="Aptos" pitchFamily="34" charset="-122"/>
+                <a:cs typeface="Aptos" pitchFamily="34" charset="-120"/>
+              </a:rPr>
+              <a:t>Complete the practical exercise to apply the concept.</a:t>
+            </a:r>
+            <a:endParaRPr lang="en-US" sz="1380" dirty="0"/>
+          </a:p>
+          <a:p>
+            <a:r>
+              <a:rPr lang="en-US" sz="1380" dirty="0">
+                <a:solidFill>
+                  <a:srgbClr val="17364A"/>
+                </a:solidFill>
+                <a:latin typeface="Aptos" pitchFamily="34" charset="0"/>
+                <a:ea typeface="Aptos" pitchFamily="34" charset="-122"/>
+                <a:cs typeface="Aptos" pitchFamily="34" charset="-120"/>
+              </a:rPr>
+              <a:t>Use the notes and references for deeper review.</a:t>
+            </a:r>
+            <a:endParaRPr lang="en-US" sz="1380" dirty="0"/>
           </a:p>
         </p:txBody>
       </p:sp>
@@ -11415,13 +11031,11 @@
             </a:avLst>
           </a:prstGeom>
           <a:solidFill>
-            <a:srgbClr val="FFFFFF">
-              <a:alpha val="88000"/>
-            </a:srgbClr>
+            <a:srgbClr val="FFFFFF"/>
           </a:solidFill>
           <a:ln w="12700">
             <a:solidFill>
-              <a:srgbClr val="D6E8F2"/>
+              <a:srgbClr val="B9D7E6"/>
             </a:solidFill>
             <a:prstDash val="solid"/>
           </a:ln>
@@ -11429,119 +11043,112 @@
       </p:sp>
       <p:sp>
         <p:nvSpPr>
-          <p:cNvPr id="14" name="Shape 12"/>
-          <p:cNvSpPr/>
-          <p:nvPr/>
-        </p:nvSpPr>
-        <p:spPr>
-          <a:xfrm>
-            <a:off x="8074152" y="3291840"/>
-            <a:ext cx="2596896" cy="749808"/>
-          </a:xfrm>
-          <a:prstGeom prst="rect">
-            <a:avLst/>
-          </a:prstGeom>
-          <a:solidFill>
-            <a:srgbClr val="EAF6F8"/>
-          </a:solidFill>
-          <a:ln w="12700">
-            <a:solidFill>
-              <a:srgbClr val="8ABBD8"/>
-            </a:solidFill>
-            <a:prstDash val="solid"/>
-          </a:ln>
-        </p:spPr>
-      </p:sp>
-      <p:sp>
-        <p:nvSpPr>
-          <p:cNvPr id="15" name="Shape 13"/>
-          <p:cNvSpPr/>
-          <p:nvPr/>
-        </p:nvSpPr>
-        <p:spPr>
-          <a:xfrm>
-            <a:off x="8202168" y="3721608"/>
-            <a:ext cx="2340864" cy="0"/>
-          </a:xfrm>
-          <a:prstGeom prst="line">
-            <a:avLst/>
-          </a:prstGeom>
-          <a:noFill/>
-          <a:ln w="19050">
-            <a:solidFill>
-              <a:srgbClr val="0068B7"/>
-            </a:solidFill>
-            <a:prstDash val="solid"/>
-          </a:ln>
-        </p:spPr>
+          <p:cNvPr id="14" name="Text 12"/>
+          <p:cNvSpPr/>
+          <p:nvPr/>
+        </p:nvSpPr>
+        <p:spPr>
+          <a:xfrm>
+            <a:off x="7799832" y="2935224"/>
+            <a:ext cx="3145536" cy="256032"/>
+          </a:xfrm>
+          <a:prstGeom prst="rect">
+            <a:avLst/>
+          </a:prstGeom>
+          <a:noFill/>
+          <a:ln/>
+        </p:spPr>
+        <p:txBody>
+          <a:bodyPr wrap="square" lIns="0" tIns="0" rIns="0" bIns="0" rtlCol="0" anchor="ctr"/>
+          <a:lstStyle/>
+          <a:p>
+            <a:pPr indent="0" marL="0">
+              <a:buNone/>
+            </a:pPr>
+            <a:r>
+              <a:rPr lang="en-US" sz="1300" b="1" dirty="0">
+                <a:solidFill>
+                  <a:srgbClr val="0068B7"/>
+                </a:solidFill>
+                <a:latin typeface="Aptos" pitchFamily="34" charset="0"/>
+                <a:ea typeface="Aptos" pitchFamily="34" charset="-122"/>
+                <a:cs typeface="Aptos" pitchFamily="34" charset="-120"/>
+              </a:rPr>
+              <a:t>Concept checkpoints</a:t>
+            </a:r>
+            <a:endParaRPr lang="en-US" sz="1300" dirty="0"/>
+          </a:p>
+        </p:txBody>
+      </p:sp>
+      <p:sp>
+        <p:nvSpPr>
+          <p:cNvPr id="15" name="Text 13"/>
+          <p:cNvSpPr/>
+          <p:nvPr/>
+        </p:nvSpPr>
+        <p:spPr>
+          <a:xfrm>
+            <a:off x="7818120" y="3300984"/>
+            <a:ext cx="3090672" cy="877824"/>
+          </a:xfrm>
+          <a:prstGeom prst="rect">
+            <a:avLst/>
+          </a:prstGeom>
+          <a:noFill/>
+          <a:ln/>
+        </p:spPr>
+        <p:txBody>
+          <a:bodyPr wrap="square" lIns="254" tIns="254" rIns="254" bIns="254" rtlCol="0" anchor="t">
+            <a:normAutofit/>
+          </a:bodyPr>
+          <a:lstStyle/>
+          <a:p>
+            <a:r>
+              <a:rPr lang="en-US" sz="1380" dirty="0">
+                <a:solidFill>
+                  <a:srgbClr val="17364A"/>
+                </a:solidFill>
+                <a:latin typeface="Aptos" pitchFamily="34" charset="0"/>
+                <a:ea typeface="Aptos" pitchFamily="34" charset="-122"/>
+                <a:cs typeface="Aptos" pitchFamily="34" charset="-120"/>
+              </a:rPr>
+              <a:t>Integration pattern worksheet</a:t>
+            </a:r>
+            <a:endParaRPr lang="en-US" sz="1380" dirty="0"/>
+          </a:p>
+          <a:p>
+            <a:r>
+              <a:rPr lang="en-US" sz="1380" dirty="0">
+                <a:solidFill>
+                  <a:srgbClr val="17364A"/>
+                </a:solidFill>
+                <a:latin typeface="Aptos" pitchFamily="34" charset="0"/>
+                <a:ea typeface="Aptos" pitchFamily="34" charset="-122"/>
+                <a:cs typeface="Aptos" pitchFamily="34" charset="-120"/>
+              </a:rPr>
+              <a:t>System-of-record and source-system list</a:t>
+            </a:r>
+            <a:endParaRPr lang="en-US" sz="1380" dirty="0"/>
+          </a:p>
+          <a:p>
+            <a:r>
+              <a:rPr lang="en-US" sz="1380" dirty="0">
+                <a:solidFill>
+                  <a:srgbClr val="17364A"/>
+                </a:solidFill>
+                <a:latin typeface="Aptos" pitchFamily="34" charset="0"/>
+                <a:ea typeface="Aptos" pitchFamily="34" charset="-122"/>
+                <a:cs typeface="Aptos" pitchFamily="34" charset="-120"/>
+              </a:rPr>
+              <a:t>Read/write permission recommendation</a:t>
+            </a:r>
+            <a:endParaRPr lang="en-US" sz="1380" dirty="0"/>
+          </a:p>
+        </p:txBody>
       </p:sp>
       <p:sp>
         <p:nvSpPr>
           <p:cNvPr id="16" name="Shape 14"/>
-          <p:cNvSpPr/>
-          <p:nvPr/>
-        </p:nvSpPr>
-        <p:spPr>
-          <a:xfrm>
-            <a:off x="9198864" y="4206240"/>
-            <a:ext cx="347472" cy="347472"/>
-          </a:xfrm>
-          <a:prstGeom prst="ellipse">
-            <a:avLst/>
-          </a:prstGeom>
-          <a:solidFill>
-            <a:srgbClr val="2F8A28"/>
-          </a:solidFill>
-          <a:ln w="12700">
-            <a:solidFill>
-              <a:srgbClr val="2F8A28"/>
-            </a:solidFill>
-            <a:prstDash val="solid"/>
-          </a:ln>
-        </p:spPr>
-      </p:sp>
-      <p:sp>
-        <p:nvSpPr>
-          <p:cNvPr id="17" name="Text 15"/>
-          <p:cNvSpPr/>
-          <p:nvPr/>
-        </p:nvSpPr>
-        <p:spPr>
-          <a:xfrm>
-            <a:off x="7909560" y="3977640"/>
-            <a:ext cx="2926080" cy="182880"/>
-          </a:xfrm>
-          <a:prstGeom prst="rect">
-            <a:avLst/>
-          </a:prstGeom>
-          <a:noFill/>
-          <a:ln/>
-        </p:spPr>
-        <p:txBody>
-          <a:bodyPr wrap="square" lIns="0" tIns="0" rIns="0" bIns="0" rtlCol="0" anchor="ctr"/>
-          <a:lstStyle/>
-          <a:p>
-            <a:pPr algn="ctr" indent="0" marL="0">
-              <a:buNone/>
-            </a:pPr>
-            <a:r>
-              <a:rPr lang="en-US" sz="1000" dirty="0">
-                <a:solidFill>
-                  <a:srgbClr val="003A63"/>
-                </a:solidFill>
-                <a:latin typeface="Aptos" pitchFamily="34" charset="0"/>
-                <a:ea typeface="Aptos" pitchFamily="34" charset="-122"/>
-                <a:cs typeface="Aptos" pitchFamily="34" charset="-120"/>
-              </a:rPr>
-              <a:t>Concept to action</a:t>
-            </a:r>
-            <a:endParaRPr lang="en-US" sz="1000" dirty="0"/>
-          </a:p>
-        </p:txBody>
-      </p:sp>
-      <p:sp>
-        <p:nvSpPr>
-          <p:cNvPr id="18" name="Shape 16"/>
           <p:cNvSpPr/>
           <p:nvPr/>
         </p:nvSpPr>
@@ -11568,7 +11175,7 @@
       </p:sp>
       <p:sp>
         <p:nvSpPr>
-          <p:cNvPr id="19" name="Text 17"/>
+          <p:cNvPr id="17" name="Text 15"/>
           <p:cNvSpPr/>
           <p:nvPr/>
         </p:nvSpPr>
@@ -11607,7 +11214,7 @@
       </p:sp>
       <p:sp>
         <p:nvSpPr>
-          <p:cNvPr id="20" name="Text 18"/>
+          <p:cNvPr id="18" name="Text 16"/>
           <p:cNvSpPr/>
           <p:nvPr/>
         </p:nvSpPr>
@@ -12115,13 +11722,11 @@
             </a:avLst>
           </a:prstGeom>
           <a:solidFill>
-            <a:srgbClr val="FFFFFF">
-              <a:alpha val="88000"/>
-            </a:srgbClr>
+            <a:srgbClr val="FFFFFF"/>
           </a:solidFill>
           <a:ln w="12700">
             <a:solidFill>
-              <a:srgbClr val="D6E8F2"/>
+              <a:srgbClr val="B9D7E6"/>
             </a:solidFill>
             <a:prstDash val="solid"/>
           </a:ln>
@@ -12129,119 +11734,112 @@
       </p:sp>
       <p:sp>
         <p:nvSpPr>
-          <p:cNvPr id="14" name="Shape 12"/>
-          <p:cNvSpPr/>
-          <p:nvPr/>
-        </p:nvSpPr>
-        <p:spPr>
-          <a:xfrm>
-            <a:off x="8074152" y="3291840"/>
-            <a:ext cx="2596896" cy="749808"/>
-          </a:xfrm>
-          <a:prstGeom prst="rect">
-            <a:avLst/>
-          </a:prstGeom>
-          <a:solidFill>
-            <a:srgbClr val="EAF6F8"/>
-          </a:solidFill>
-          <a:ln w="12700">
-            <a:solidFill>
-              <a:srgbClr val="8ABBD8"/>
-            </a:solidFill>
-            <a:prstDash val="solid"/>
-          </a:ln>
-        </p:spPr>
-      </p:sp>
-      <p:sp>
-        <p:nvSpPr>
-          <p:cNvPr id="15" name="Shape 13"/>
-          <p:cNvSpPr/>
-          <p:nvPr/>
-        </p:nvSpPr>
-        <p:spPr>
-          <a:xfrm>
-            <a:off x="8202168" y="3721608"/>
-            <a:ext cx="2340864" cy="0"/>
-          </a:xfrm>
-          <a:prstGeom prst="line">
-            <a:avLst/>
-          </a:prstGeom>
-          <a:noFill/>
-          <a:ln w="19050">
-            <a:solidFill>
-              <a:srgbClr val="0068B7"/>
-            </a:solidFill>
-            <a:prstDash val="solid"/>
-          </a:ln>
-        </p:spPr>
+          <p:cNvPr id="14" name="Text 12"/>
+          <p:cNvSpPr/>
+          <p:nvPr/>
+        </p:nvSpPr>
+        <p:spPr>
+          <a:xfrm>
+            <a:off x="7799832" y="2935224"/>
+            <a:ext cx="3145536" cy="256032"/>
+          </a:xfrm>
+          <a:prstGeom prst="rect">
+            <a:avLst/>
+          </a:prstGeom>
+          <a:noFill/>
+          <a:ln/>
+        </p:spPr>
+        <p:txBody>
+          <a:bodyPr wrap="square" lIns="0" tIns="0" rIns="0" bIns="0" rtlCol="0" anchor="ctr"/>
+          <a:lstStyle/>
+          <a:p>
+            <a:pPr indent="0" marL="0">
+              <a:buNone/>
+            </a:pPr>
+            <a:r>
+              <a:rPr lang="en-US" sz="1300" b="1" dirty="0">
+                <a:solidFill>
+                  <a:srgbClr val="0068B7"/>
+                </a:solidFill>
+                <a:latin typeface="Aptos" pitchFamily="34" charset="0"/>
+                <a:ea typeface="Aptos" pitchFamily="34" charset="-122"/>
+                <a:cs typeface="Aptos" pitchFamily="34" charset="-120"/>
+              </a:rPr>
+              <a:t>Concept checkpoints</a:t>
+            </a:r>
+            <a:endParaRPr lang="en-US" sz="1300" dirty="0"/>
+          </a:p>
+        </p:txBody>
+      </p:sp>
+      <p:sp>
+        <p:nvSpPr>
+          <p:cNvPr id="15" name="Text 13"/>
+          <p:cNvSpPr/>
+          <p:nvPr/>
+        </p:nvSpPr>
+        <p:spPr>
+          <a:xfrm>
+            <a:off x="7818120" y="3300984"/>
+            <a:ext cx="3090672" cy="877824"/>
+          </a:xfrm>
+          <a:prstGeom prst="rect">
+            <a:avLst/>
+          </a:prstGeom>
+          <a:noFill/>
+          <a:ln/>
+        </p:spPr>
+        <p:txBody>
+          <a:bodyPr wrap="square" lIns="254" tIns="254" rIns="254" bIns="254" rtlCol="0" anchor="t">
+            <a:normAutofit/>
+          </a:bodyPr>
+          <a:lstStyle/>
+          <a:p>
+            <a:r>
+              <a:rPr lang="en-US" sz="1380" dirty="0">
+                <a:solidFill>
+                  <a:srgbClr val="17364A"/>
+                </a:solidFill>
+                <a:latin typeface="Aptos" pitchFamily="34" charset="0"/>
+                <a:ea typeface="Aptos" pitchFamily="34" charset="-122"/>
+                <a:cs typeface="Aptos" pitchFamily="34" charset="-120"/>
+              </a:rPr>
+              <a:t>1.</a:t>
+            </a:r>
+            <a:endParaRPr lang="en-US" sz="1380" dirty="0"/>
+          </a:p>
+          <a:p>
+            <a:r>
+              <a:rPr lang="en-US" sz="1380" dirty="0">
+                <a:solidFill>
+                  <a:srgbClr val="17364A"/>
+                </a:solidFill>
+                <a:latin typeface="Aptos" pitchFamily="34" charset="0"/>
+                <a:ea typeface="Aptos" pitchFamily="34" charset="-122"/>
+                <a:cs typeface="Aptos" pitchFamily="34" charset="-120"/>
+              </a:rPr>
+              <a:t>Which integration risk is most concerning for an AI tool that can update a case record?</a:t>
+            </a:r>
+            <a:endParaRPr lang="en-US" sz="1380" dirty="0"/>
+          </a:p>
+          <a:p>
+            <a:r>
+              <a:rPr lang="en-US" sz="1380" dirty="0">
+                <a:solidFill>
+                  <a:srgbClr val="17364A"/>
+                </a:solidFill>
+                <a:latin typeface="Aptos" pitchFamily="34" charset="0"/>
+                <a:ea typeface="Aptos" pitchFamily="34" charset="-122"/>
+                <a:cs typeface="Aptos" pitchFamily="34" charset="-120"/>
+              </a:rPr>
+              <a:t>2.</a:t>
+            </a:r>
+            <a:endParaRPr lang="en-US" sz="1380" dirty="0"/>
+          </a:p>
+        </p:txBody>
       </p:sp>
       <p:sp>
         <p:nvSpPr>
           <p:cNvPr id="16" name="Shape 14"/>
-          <p:cNvSpPr/>
-          <p:nvPr/>
-        </p:nvSpPr>
-        <p:spPr>
-          <a:xfrm>
-            <a:off x="9198864" y="4206240"/>
-            <a:ext cx="347472" cy="347472"/>
-          </a:xfrm>
-          <a:prstGeom prst="ellipse">
-            <a:avLst/>
-          </a:prstGeom>
-          <a:solidFill>
-            <a:srgbClr val="2F8A28"/>
-          </a:solidFill>
-          <a:ln w="12700">
-            <a:solidFill>
-              <a:srgbClr val="2F8A28"/>
-            </a:solidFill>
-            <a:prstDash val="solid"/>
-          </a:ln>
-        </p:spPr>
-      </p:sp>
-      <p:sp>
-        <p:nvSpPr>
-          <p:cNvPr id="17" name="Text 15"/>
-          <p:cNvSpPr/>
-          <p:nvPr/>
-        </p:nvSpPr>
-        <p:spPr>
-          <a:xfrm>
-            <a:off x="7909560" y="3977640"/>
-            <a:ext cx="2926080" cy="182880"/>
-          </a:xfrm>
-          <a:prstGeom prst="rect">
-            <a:avLst/>
-          </a:prstGeom>
-          <a:noFill/>
-          <a:ln/>
-        </p:spPr>
-        <p:txBody>
-          <a:bodyPr wrap="square" lIns="0" tIns="0" rIns="0" bIns="0" rtlCol="0" anchor="ctr"/>
-          <a:lstStyle/>
-          <a:p>
-            <a:pPr algn="ctr" indent="0" marL="0">
-              <a:buNone/>
-            </a:pPr>
-            <a:r>
-              <a:rPr lang="en-US" sz="1000" dirty="0">
-                <a:solidFill>
-                  <a:srgbClr val="003A63"/>
-                </a:solidFill>
-                <a:latin typeface="Aptos" pitchFamily="34" charset="0"/>
-                <a:ea typeface="Aptos" pitchFamily="34" charset="-122"/>
-                <a:cs typeface="Aptos" pitchFamily="34" charset="-120"/>
-              </a:rPr>
-              <a:t>Concept to action</a:t>
-            </a:r>
-            <a:endParaRPr lang="en-US" sz="1000" dirty="0"/>
-          </a:p>
-        </p:txBody>
-      </p:sp>
-      <p:sp>
-        <p:nvSpPr>
-          <p:cNvPr id="18" name="Shape 16"/>
           <p:cNvSpPr/>
           <p:nvPr/>
         </p:nvSpPr>
@@ -12268,7 +11866,7 @@
       </p:sp>
       <p:sp>
         <p:nvSpPr>
-          <p:cNvPr id="19" name="Text 17"/>
+          <p:cNvPr id="17" name="Text 15"/>
           <p:cNvSpPr/>
           <p:nvPr/>
         </p:nvSpPr>
@@ -12307,7 +11905,7 @@
       </p:sp>
       <p:sp>
         <p:nvSpPr>
-          <p:cNvPr id="20" name="Text 18"/>
+          <p:cNvPr id="18" name="Text 16"/>
           <p:cNvSpPr/>
           <p:nvPr/>
         </p:nvSpPr>
@@ -12815,13 +12413,11 @@
             </a:avLst>
           </a:prstGeom>
           <a:solidFill>
-            <a:srgbClr val="FFFFFF">
-              <a:alpha val="88000"/>
-            </a:srgbClr>
+            <a:srgbClr val="FFFFFF"/>
           </a:solidFill>
           <a:ln w="12700">
             <a:solidFill>
-              <a:srgbClr val="D6E8F2"/>
+              <a:srgbClr val="B9D7E6"/>
             </a:solidFill>
             <a:prstDash val="solid"/>
           </a:ln>
@@ -12829,119 +12425,98 @@
       </p:sp>
       <p:sp>
         <p:nvSpPr>
-          <p:cNvPr id="14" name="Shape 12"/>
-          <p:cNvSpPr/>
-          <p:nvPr/>
-        </p:nvSpPr>
-        <p:spPr>
-          <a:xfrm>
-            <a:off x="8074152" y="3291840"/>
-            <a:ext cx="2596896" cy="749808"/>
-          </a:xfrm>
-          <a:prstGeom prst="rect">
-            <a:avLst/>
-          </a:prstGeom>
-          <a:solidFill>
-            <a:srgbClr val="EAF6F8"/>
-          </a:solidFill>
-          <a:ln w="12700">
-            <a:solidFill>
-              <a:srgbClr val="8ABBD8"/>
-            </a:solidFill>
-            <a:prstDash val="solid"/>
-          </a:ln>
-        </p:spPr>
-      </p:sp>
-      <p:sp>
-        <p:nvSpPr>
-          <p:cNvPr id="15" name="Shape 13"/>
-          <p:cNvSpPr/>
-          <p:nvPr/>
-        </p:nvSpPr>
-        <p:spPr>
-          <a:xfrm>
-            <a:off x="8202168" y="3721608"/>
-            <a:ext cx="2340864" cy="0"/>
-          </a:xfrm>
-          <a:prstGeom prst="line">
-            <a:avLst/>
-          </a:prstGeom>
-          <a:noFill/>
-          <a:ln w="19050">
-            <a:solidFill>
-              <a:srgbClr val="0068B7"/>
-            </a:solidFill>
-            <a:prstDash val="solid"/>
-          </a:ln>
-        </p:spPr>
+          <p:cNvPr id="14" name="Text 12"/>
+          <p:cNvSpPr/>
+          <p:nvPr/>
+        </p:nvSpPr>
+        <p:spPr>
+          <a:xfrm>
+            <a:off x="7799832" y="2935224"/>
+            <a:ext cx="3145536" cy="256032"/>
+          </a:xfrm>
+          <a:prstGeom prst="rect">
+            <a:avLst/>
+          </a:prstGeom>
+          <a:noFill/>
+          <a:ln/>
+        </p:spPr>
+        <p:txBody>
+          <a:bodyPr wrap="square" lIns="0" tIns="0" rIns="0" bIns="0" rtlCol="0" anchor="ctr"/>
+          <a:lstStyle/>
+          <a:p>
+            <a:pPr indent="0" marL="0">
+              <a:buNone/>
+            </a:pPr>
+            <a:r>
+              <a:rPr lang="en-US" sz="1300" b="1" dirty="0">
+                <a:solidFill>
+                  <a:srgbClr val="0068B7"/>
+                </a:solidFill>
+                <a:latin typeface="Aptos" pitchFamily="34" charset="0"/>
+                <a:ea typeface="Aptos" pitchFamily="34" charset="-122"/>
+                <a:cs typeface="Aptos" pitchFamily="34" charset="-120"/>
+              </a:rPr>
+              <a:t>Concept checkpoints</a:t>
+            </a:r>
+            <a:endParaRPr lang="en-US" sz="1300" dirty="0"/>
+          </a:p>
+        </p:txBody>
+      </p:sp>
+      <p:sp>
+        <p:nvSpPr>
+          <p:cNvPr id="15" name="Text 13"/>
+          <p:cNvSpPr/>
+          <p:nvPr/>
+        </p:nvSpPr>
+        <p:spPr>
+          <a:xfrm>
+            <a:off x="7818120" y="3300984"/>
+            <a:ext cx="3090672" cy="877824"/>
+          </a:xfrm>
+          <a:prstGeom prst="rect">
+            <a:avLst/>
+          </a:prstGeom>
+          <a:noFill/>
+          <a:ln/>
+        </p:spPr>
+        <p:txBody>
+          <a:bodyPr wrap="square" lIns="254" tIns="254" rIns="254" bIns="254" rtlCol="0" anchor="t">
+            <a:normAutofit/>
+          </a:bodyPr>
+          <a:lstStyle/>
+          <a:p>
+            <a:r>
+              <a:rPr lang="en-US" sz="1380" dirty="0">
+                <a:solidFill>
+                  <a:srgbClr val="17364A"/>
+                </a:solidFill>
+                <a:latin typeface="Aptos" pitchFamily="34" charset="0"/>
+                <a:ea typeface="Aptos" pitchFamily="34" charset="-122"/>
+                <a:cs typeface="Aptos" pitchFamily="34" charset="-120"/>
+              </a:rPr>
+              <a:t>OWASP Top 10 for Large Language Model Applications:.</a:t>
+            </a:r>
+            <a:endParaRPr lang="en-US" sz="1380" dirty="0"/>
+          </a:p>
+          <a:p>
+            <a:r>
+              <a:rPr lang="en-US" sz="1380" dirty="0">
+                <a:solidFill>
+                  <a:srgbClr val="17364A"/>
+                </a:solidFill>
+                <a:latin typeface="Aptos" pitchFamily="34" charset="0"/>
+                <a:ea typeface="Aptos" pitchFamily="34" charset="-122"/>
+                <a:cs typeface="Aptos" pitchFamily="34" charset="-120"/>
+              </a:rPr>
+              <a:t>ONC health IT, interoperability, and information blocking resources:.</a:t>
+            </a:r>
+            <a:endParaRPr lang="en-US" sz="1380" dirty="0"/>
+          </a:p>
+        </p:txBody>
       </p:sp>
       <p:sp>
         <p:nvSpPr>
           <p:cNvPr id="16" name="Shape 14"/>
-          <p:cNvSpPr/>
-          <p:nvPr/>
-        </p:nvSpPr>
-        <p:spPr>
-          <a:xfrm>
-            <a:off x="9198864" y="4206240"/>
-            <a:ext cx="347472" cy="347472"/>
-          </a:xfrm>
-          <a:prstGeom prst="ellipse">
-            <a:avLst/>
-          </a:prstGeom>
-          <a:solidFill>
-            <a:srgbClr val="2F8A28"/>
-          </a:solidFill>
-          <a:ln w="12700">
-            <a:solidFill>
-              <a:srgbClr val="2F8A28"/>
-            </a:solidFill>
-            <a:prstDash val="solid"/>
-          </a:ln>
-        </p:spPr>
-      </p:sp>
-      <p:sp>
-        <p:nvSpPr>
-          <p:cNvPr id="17" name="Text 15"/>
-          <p:cNvSpPr/>
-          <p:nvPr/>
-        </p:nvSpPr>
-        <p:spPr>
-          <a:xfrm>
-            <a:off x="7909560" y="3977640"/>
-            <a:ext cx="2926080" cy="182880"/>
-          </a:xfrm>
-          <a:prstGeom prst="rect">
-            <a:avLst/>
-          </a:prstGeom>
-          <a:noFill/>
-          <a:ln/>
-        </p:spPr>
-        <p:txBody>
-          <a:bodyPr wrap="square" lIns="0" tIns="0" rIns="0" bIns="0" rtlCol="0" anchor="ctr"/>
-          <a:lstStyle/>
-          <a:p>
-            <a:pPr algn="ctr" indent="0" marL="0">
-              <a:buNone/>
-            </a:pPr>
-            <a:r>
-              <a:rPr lang="en-US" sz="1000" dirty="0">
-                <a:solidFill>
-                  <a:srgbClr val="003A63"/>
-                </a:solidFill>
-                <a:latin typeface="Aptos" pitchFamily="34" charset="0"/>
-                <a:ea typeface="Aptos" pitchFamily="34" charset="-122"/>
-                <a:cs typeface="Aptos" pitchFamily="34" charset="-120"/>
-              </a:rPr>
-              <a:t>Concept to action</a:t>
-            </a:r>
-            <a:endParaRPr lang="en-US" sz="1000" dirty="0"/>
-          </a:p>
-        </p:txBody>
-      </p:sp>
-      <p:sp>
-        <p:nvSpPr>
-          <p:cNvPr id="18" name="Shape 16"/>
           <p:cNvSpPr/>
           <p:nvPr/>
         </p:nvSpPr>
@@ -12968,7 +12543,7 @@
       </p:sp>
       <p:sp>
         <p:nvSpPr>
-          <p:cNvPr id="19" name="Text 17"/>
+          <p:cNvPr id="17" name="Text 15"/>
           <p:cNvSpPr/>
           <p:nvPr/>
         </p:nvSpPr>
@@ -13007,7 +12582,7 @@
       </p:sp>
       <p:sp>
         <p:nvSpPr>
-          <p:cNvPr id="20" name="Text 18"/>
+          <p:cNvPr id="18" name="Text 16"/>
           <p:cNvSpPr/>
           <p:nvPr/>
         </p:nvSpPr>
@@ -13487,13 +13062,11 @@
             </a:avLst>
           </a:prstGeom>
           <a:solidFill>
-            <a:srgbClr val="FFFFFF">
-              <a:alpha val="88000"/>
-            </a:srgbClr>
+            <a:srgbClr val="FFFFFF"/>
           </a:solidFill>
           <a:ln w="12700">
             <a:solidFill>
-              <a:srgbClr val="D6E8F2"/>
+              <a:srgbClr val="B9D7E6"/>
             </a:solidFill>
             <a:prstDash val="solid"/>
           </a:ln>
@@ -13501,119 +13074,84 @@
       </p:sp>
       <p:sp>
         <p:nvSpPr>
-          <p:cNvPr id="14" name="Shape 12"/>
-          <p:cNvSpPr/>
-          <p:nvPr/>
-        </p:nvSpPr>
-        <p:spPr>
-          <a:xfrm>
-            <a:off x="8074152" y="3291840"/>
-            <a:ext cx="2596896" cy="749808"/>
-          </a:xfrm>
-          <a:prstGeom prst="rect">
-            <a:avLst/>
-          </a:prstGeom>
-          <a:solidFill>
-            <a:srgbClr val="EAF6F8"/>
-          </a:solidFill>
-          <a:ln w="12700">
-            <a:solidFill>
-              <a:srgbClr val="8ABBD8"/>
-            </a:solidFill>
-            <a:prstDash val="solid"/>
-          </a:ln>
-        </p:spPr>
-      </p:sp>
-      <p:sp>
-        <p:nvSpPr>
-          <p:cNvPr id="15" name="Shape 13"/>
-          <p:cNvSpPr/>
-          <p:nvPr/>
-        </p:nvSpPr>
-        <p:spPr>
-          <a:xfrm>
-            <a:off x="8202168" y="3721608"/>
-            <a:ext cx="2340864" cy="0"/>
-          </a:xfrm>
-          <a:prstGeom prst="line">
-            <a:avLst/>
-          </a:prstGeom>
-          <a:noFill/>
-          <a:ln w="19050">
-            <a:solidFill>
-              <a:srgbClr val="0068B7"/>
-            </a:solidFill>
-            <a:prstDash val="solid"/>
-          </a:ln>
-        </p:spPr>
+          <p:cNvPr id="14" name="Text 12"/>
+          <p:cNvSpPr/>
+          <p:nvPr/>
+        </p:nvSpPr>
+        <p:spPr>
+          <a:xfrm>
+            <a:off x="7799832" y="2935224"/>
+            <a:ext cx="3145536" cy="256032"/>
+          </a:xfrm>
+          <a:prstGeom prst="rect">
+            <a:avLst/>
+          </a:prstGeom>
+          <a:noFill/>
+          <a:ln/>
+        </p:spPr>
+        <p:txBody>
+          <a:bodyPr wrap="square" lIns="0" tIns="0" rIns="0" bIns="0" rtlCol="0" anchor="ctr"/>
+          <a:lstStyle/>
+          <a:p>
+            <a:pPr indent="0" marL="0">
+              <a:buNone/>
+            </a:pPr>
+            <a:r>
+              <a:rPr lang="en-US" sz="1300" b="1" dirty="0">
+                <a:solidFill>
+                  <a:srgbClr val="0068B7"/>
+                </a:solidFill>
+                <a:latin typeface="Aptos" pitchFamily="34" charset="0"/>
+                <a:ea typeface="Aptos" pitchFamily="34" charset="-122"/>
+                <a:cs typeface="Aptos" pitchFamily="34" charset="-120"/>
+              </a:rPr>
+              <a:t>Concept checkpoints</a:t>
+            </a:r>
+            <a:endParaRPr lang="en-US" sz="1300" dirty="0"/>
+          </a:p>
+        </p:txBody>
+      </p:sp>
+      <p:sp>
+        <p:nvSpPr>
+          <p:cNvPr id="15" name="Text 13"/>
+          <p:cNvSpPr/>
+          <p:nvPr/>
+        </p:nvSpPr>
+        <p:spPr>
+          <a:xfrm>
+            <a:off x="7818120" y="3300984"/>
+            <a:ext cx="3090672" cy="877824"/>
+          </a:xfrm>
+          <a:prstGeom prst="rect">
+            <a:avLst/>
+          </a:prstGeom>
+          <a:noFill/>
+          <a:ln/>
+        </p:spPr>
+        <p:txBody>
+          <a:bodyPr wrap="square" lIns="254" tIns="254" rIns="254" bIns="254" rtlCol="0" anchor="t">
+            <a:normAutofit/>
+          </a:bodyPr>
+          <a:lstStyle/>
+          <a:p>
+            <a:r>
+              <a:rPr lang="en-US" sz="1380" dirty="0">
+                <a:solidFill>
+                  <a:srgbClr val="17364A"/>
+                </a:solidFill>
+                <a:latin typeface="Aptos" pitchFamily="34" charset="0"/>
+                <a:ea typeface="Aptos" pitchFamily="34" charset="-122"/>
+                <a:cs typeface="Aptos" pitchFamily="34" charset="-120"/>
+              </a:rPr>
+              <a:t>Agency policies for privacy, public records, cybersecurity, procurement, civil rights,.</a:t>
+            </a:r>
+            <a:endParaRPr lang="en-US" sz="1380" dirty="0"/>
+          </a:p>
+        </p:txBody>
       </p:sp>
       <p:sp>
         <p:nvSpPr>
           <p:cNvPr id="16" name="Shape 14"/>
-          <p:cNvSpPr/>
-          <p:nvPr/>
-        </p:nvSpPr>
-        <p:spPr>
-          <a:xfrm>
-            <a:off x="9198864" y="4206240"/>
-            <a:ext cx="347472" cy="347472"/>
-          </a:xfrm>
-          <a:prstGeom prst="ellipse">
-            <a:avLst/>
-          </a:prstGeom>
-          <a:solidFill>
-            <a:srgbClr val="2F8A28"/>
-          </a:solidFill>
-          <a:ln w="12700">
-            <a:solidFill>
-              <a:srgbClr val="2F8A28"/>
-            </a:solidFill>
-            <a:prstDash val="solid"/>
-          </a:ln>
-        </p:spPr>
-      </p:sp>
-      <p:sp>
-        <p:nvSpPr>
-          <p:cNvPr id="17" name="Text 15"/>
-          <p:cNvSpPr/>
-          <p:nvPr/>
-        </p:nvSpPr>
-        <p:spPr>
-          <a:xfrm>
-            <a:off x="7909560" y="3977640"/>
-            <a:ext cx="2926080" cy="182880"/>
-          </a:xfrm>
-          <a:prstGeom prst="rect">
-            <a:avLst/>
-          </a:prstGeom>
-          <a:noFill/>
-          <a:ln/>
-        </p:spPr>
-        <p:txBody>
-          <a:bodyPr wrap="square" lIns="0" tIns="0" rIns="0" bIns="0" rtlCol="0" anchor="ctr"/>
-          <a:lstStyle/>
-          <a:p>
-            <a:pPr algn="ctr" indent="0" marL="0">
-              <a:buNone/>
-            </a:pPr>
-            <a:r>
-              <a:rPr lang="en-US" sz="1000" dirty="0">
-                <a:solidFill>
-                  <a:srgbClr val="003A63"/>
-                </a:solidFill>
-                <a:latin typeface="Aptos" pitchFamily="34" charset="0"/>
-                <a:ea typeface="Aptos" pitchFamily="34" charset="-122"/>
-                <a:cs typeface="Aptos" pitchFamily="34" charset="-120"/>
-              </a:rPr>
-              <a:t>Concept to action</a:t>
-            </a:r>
-            <a:endParaRPr lang="en-US" sz="1000" dirty="0"/>
-          </a:p>
-        </p:txBody>
-      </p:sp>
-      <p:sp>
-        <p:nvSpPr>
-          <p:cNvPr id="18" name="Shape 16"/>
           <p:cNvSpPr/>
           <p:nvPr/>
         </p:nvSpPr>
@@ -13640,7 +13178,7 @@
       </p:sp>
       <p:sp>
         <p:nvSpPr>
-          <p:cNvPr id="19" name="Text 17"/>
+          <p:cNvPr id="17" name="Text 15"/>
           <p:cNvSpPr/>
           <p:nvPr/>
         </p:nvSpPr>
@@ -13679,7 +13217,7 @@
       </p:sp>
       <p:sp>
         <p:nvSpPr>
-          <p:cNvPr id="20" name="Text 18"/>
+          <p:cNvPr id="18" name="Text 16"/>
           <p:cNvSpPr/>
           <p:nvPr/>
         </p:nvSpPr>
@@ -14192,20 +13730,20 @@
         </p:nvSpPr>
         <p:spPr>
           <a:xfrm>
-            <a:off x="7818120" y="3977640"/>
-            <a:ext cx="972312" cy="749808"/>
+            <a:off x="8046720" y="3794760"/>
+            <a:ext cx="3063240" cy="1600200"/>
           </a:xfrm>
           <a:prstGeom prst="roundRect">
             <a:avLst>
-              <a:gd name="adj" fmla="val 14634"/>
+              <a:gd name="adj" fmla="val 6857"/>
             </a:avLst>
           </a:prstGeom>
           <a:solidFill>
-            <a:srgbClr val="0068B7"/>
+            <a:srgbClr val="FFFFFF"/>
           </a:solidFill>
           <a:ln w="12700">
             <a:solidFill>
-              <a:srgbClr val="0068B7"/>
+              <a:srgbClr val="B9D7E6"/>
             </a:solidFill>
             <a:prstDash val="solid"/>
           </a:ln>
@@ -14219,172 +13757,100 @@
         </p:nvSpPr>
         <p:spPr>
           <a:xfrm>
-            <a:off x="7891272" y="4169664"/>
-            <a:ext cx="826008" cy="310896"/>
-          </a:xfrm>
-          <a:prstGeom prst="rect">
-            <a:avLst/>
-          </a:prstGeom>
-          <a:noFill/>
-          <a:ln/>
-        </p:spPr>
-        <p:txBody>
-          <a:bodyPr wrap="square" lIns="0" tIns="0" rIns="0" bIns="0" rtlCol="0" anchor="ctr">
+            <a:off x="8211312" y="3941064"/>
+            <a:ext cx="2734056" cy="256032"/>
+          </a:xfrm>
+          <a:prstGeom prst="rect">
+            <a:avLst/>
+          </a:prstGeom>
+          <a:noFill/>
+          <a:ln/>
+        </p:spPr>
+        <p:txBody>
+          <a:bodyPr wrap="square" lIns="0" tIns="0" rIns="0" bIns="0" rtlCol="0" anchor="ctr"/>
+          <a:lstStyle/>
+          <a:p>
+            <a:pPr indent="0" marL="0">
+              <a:buNone/>
+            </a:pPr>
+            <a:r>
+              <a:rPr lang="en-US" sz="1300" b="1" dirty="0">
+                <a:solidFill>
+                  <a:srgbClr val="0068B7"/>
+                </a:solidFill>
+                <a:latin typeface="Aptos" pitchFamily="34" charset="0"/>
+                <a:ea typeface="Aptos" pitchFamily="34" charset="-122"/>
+                <a:cs typeface="Aptos" pitchFamily="34" charset="-120"/>
+              </a:rPr>
+              <a:t>Use the play links to</a:t>
+            </a:r>
+            <a:endParaRPr lang="en-US" sz="1300" dirty="0"/>
+          </a:p>
+        </p:txBody>
+      </p:sp>
+      <p:sp>
+        <p:nvSpPr>
+          <p:cNvPr id="15" name="Text 13"/>
+          <p:cNvSpPr/>
+          <p:nvPr/>
+        </p:nvSpPr>
+        <p:spPr>
+          <a:xfrm>
+            <a:off x="8229600" y="4306824"/>
+            <a:ext cx="2679192" cy="941832"/>
+          </a:xfrm>
+          <a:prstGeom prst="rect">
+            <a:avLst/>
+          </a:prstGeom>
+          <a:noFill/>
+          <a:ln/>
+        </p:spPr>
+        <p:txBody>
+          <a:bodyPr wrap="square" lIns="254" tIns="254" rIns="254" bIns="254" rtlCol="0" anchor="t">
             <a:normAutofit/>
           </a:bodyPr>
           <a:lstStyle/>
           <a:p>
-            <a:pPr algn="ctr" indent="0" marL="0">
-              <a:buNone/>
-            </a:pPr>
-            <a:r>
-              <a:rPr lang="en-US" sz="1500" b="1" dirty="0">
-                <a:solidFill>
-                  <a:srgbClr val="FFFFFF"/>
-                </a:solidFill>
-                <a:latin typeface="Aptos" pitchFamily="34" charset="0"/>
-                <a:ea typeface="Aptos" pitchFamily="34" charset="-122"/>
-                <a:cs typeface="Aptos" pitchFamily="34" charset="-120"/>
-              </a:rPr>
-              <a:t>Lesson</a:t>
-            </a:r>
-            <a:endParaRPr lang="en-US" sz="1500" dirty="0"/>
-          </a:p>
-        </p:txBody>
-      </p:sp>
-      <p:sp>
-        <p:nvSpPr>
-          <p:cNvPr id="15" name="Shape 13"/>
-          <p:cNvSpPr/>
-          <p:nvPr/>
-        </p:nvSpPr>
-        <p:spPr>
-          <a:xfrm>
-            <a:off x="9046464" y="3977640"/>
-            <a:ext cx="972312" cy="749808"/>
-          </a:xfrm>
-          <a:prstGeom prst="roundRect">
-            <a:avLst>
-              <a:gd name="adj" fmla="val 14634"/>
-            </a:avLst>
-          </a:prstGeom>
-          <a:solidFill>
-            <a:srgbClr val="2F8A28"/>
-          </a:solidFill>
-          <a:ln w="12700">
-            <a:solidFill>
-              <a:srgbClr val="2F8A28"/>
-            </a:solidFill>
-            <a:prstDash val="solid"/>
-          </a:ln>
-        </p:spPr>
-      </p:sp>
-      <p:sp>
-        <p:nvSpPr>
-          <p:cNvPr id="16" name="Text 14"/>
-          <p:cNvSpPr/>
-          <p:nvPr/>
-        </p:nvSpPr>
-        <p:spPr>
-          <a:xfrm>
-            <a:off x="9119616" y="4169664"/>
-            <a:ext cx="826008" cy="310896"/>
-          </a:xfrm>
-          <a:prstGeom prst="rect">
-            <a:avLst/>
-          </a:prstGeom>
-          <a:noFill/>
-          <a:ln/>
-        </p:spPr>
-        <p:txBody>
-          <a:bodyPr wrap="square" lIns="0" tIns="0" rIns="0" bIns="0" rtlCol="0" anchor="ctr">
-            <a:normAutofit/>
-          </a:bodyPr>
-          <a:lstStyle/>
-          <a:p>
-            <a:pPr algn="ctr" indent="0" marL="0">
-              <a:buNone/>
-            </a:pPr>
-            <a:r>
-              <a:rPr lang="en-US" sz="1500" b="1" dirty="0">
-                <a:solidFill>
-                  <a:srgbClr val="FFFFFF"/>
-                </a:solidFill>
-                <a:latin typeface="Aptos" pitchFamily="34" charset="0"/>
-                <a:ea typeface="Aptos" pitchFamily="34" charset="-122"/>
-                <a:cs typeface="Aptos" pitchFamily="34" charset="-120"/>
-              </a:rPr>
-              <a:t>Plays</a:t>
-            </a:r>
-            <a:endParaRPr lang="en-US" sz="1500" dirty="0"/>
-          </a:p>
-        </p:txBody>
-      </p:sp>
-      <p:sp>
-        <p:nvSpPr>
-          <p:cNvPr id="17" name="Shape 15"/>
-          <p:cNvSpPr/>
-          <p:nvPr/>
-        </p:nvSpPr>
-        <p:spPr>
-          <a:xfrm>
-            <a:off x="10274808" y="3977640"/>
-            <a:ext cx="972312" cy="749808"/>
-          </a:xfrm>
-          <a:prstGeom prst="roundRect">
-            <a:avLst>
-              <a:gd name="adj" fmla="val 14634"/>
-            </a:avLst>
-          </a:prstGeom>
-          <a:solidFill>
-            <a:srgbClr val="6A4CA3"/>
-          </a:solidFill>
-          <a:ln w="12700">
-            <a:solidFill>
-              <a:srgbClr val="6A4CA3"/>
-            </a:solidFill>
-            <a:prstDash val="solid"/>
-          </a:ln>
-        </p:spPr>
-      </p:sp>
-      <p:sp>
-        <p:nvSpPr>
-          <p:cNvPr id="18" name="Text 16"/>
-          <p:cNvSpPr/>
-          <p:nvPr/>
-        </p:nvSpPr>
-        <p:spPr>
-          <a:xfrm>
-            <a:off x="10347960" y="4169664"/>
-            <a:ext cx="826008" cy="310896"/>
-          </a:xfrm>
-          <a:prstGeom prst="rect">
-            <a:avLst/>
-          </a:prstGeom>
-          <a:noFill/>
-          <a:ln/>
-        </p:spPr>
-        <p:txBody>
-          <a:bodyPr wrap="square" lIns="0" tIns="0" rIns="0" bIns="0" rtlCol="0" anchor="ctr">
-            <a:normAutofit/>
-          </a:bodyPr>
-          <a:lstStyle/>
-          <a:p>
-            <a:pPr algn="ctr" indent="0" marL="0">
-              <a:buNone/>
-            </a:pPr>
-            <a:r>
-              <a:rPr lang="en-US" sz="1500" b="1" dirty="0">
-                <a:solidFill>
-                  <a:srgbClr val="FFFFFF"/>
-                </a:solidFill>
-                <a:latin typeface="Aptos" pitchFamily="34" charset="0"/>
-                <a:ea typeface="Aptos" pitchFamily="34" charset="-122"/>
-                <a:cs typeface="Aptos" pitchFamily="34" charset="-120"/>
-              </a:rPr>
-              <a:t>Action</a:t>
-            </a:r>
-            <a:endParaRPr lang="en-US" sz="1500" dirty="0"/>
+            <a:r>
+              <a:rPr lang="en-US" sz="1380" dirty="0">
+                <a:solidFill>
+                  <a:srgbClr val="17364A"/>
+                </a:solidFill>
+                <a:latin typeface="Aptos" pitchFamily="34" charset="0"/>
+                <a:ea typeface="Aptos" pitchFamily="34" charset="-122"/>
+                <a:cs typeface="Aptos" pitchFamily="34" charset="-120"/>
+              </a:rPr>
+              <a:t>Locate the decision point in the playbook sequence.</a:t>
+            </a:r>
+            <a:endParaRPr lang="en-US" sz="1380" dirty="0"/>
+          </a:p>
+          <a:p>
+            <a:r>
+              <a:rPr lang="en-US" sz="1380" dirty="0">
+                <a:solidFill>
+                  <a:srgbClr val="17364A"/>
+                </a:solidFill>
+                <a:latin typeface="Aptos" pitchFamily="34" charset="0"/>
+                <a:ea typeface="Aptos" pitchFamily="34" charset="-122"/>
+                <a:cs typeface="Aptos" pitchFamily="34" charset="-120"/>
+              </a:rPr>
+              <a:t>Identify who should participate in the work.</a:t>
+            </a:r>
+            <a:endParaRPr lang="en-US" sz="1380" dirty="0"/>
+          </a:p>
+          <a:p>
+            <a:r>
+              <a:rPr lang="en-US" sz="1380" dirty="0">
+                <a:solidFill>
+                  <a:srgbClr val="17364A"/>
+                </a:solidFill>
+                <a:latin typeface="Aptos" pitchFamily="34" charset="0"/>
+                <a:ea typeface="Aptos" pitchFamily="34" charset="-122"/>
+                <a:cs typeface="Aptos" pitchFamily="34" charset="-120"/>
+              </a:rPr>
+              <a:t>Document the review, approval, or implementation step.</a:t>
+            </a:r>
+            <a:endParaRPr lang="en-US" sz="1380" dirty="0"/>
           </a:p>
         </p:txBody>
       </p:sp>
@@ -14862,20 +14328,20 @@
         </p:nvSpPr>
         <p:spPr>
           <a:xfrm>
-            <a:off x="7818120" y="3977640"/>
-            <a:ext cx="972312" cy="749808"/>
+            <a:off x="8046720" y="3794760"/>
+            <a:ext cx="3063240" cy="1600200"/>
           </a:xfrm>
           <a:prstGeom prst="roundRect">
             <a:avLst>
-              <a:gd name="adj" fmla="val 14634"/>
+              <a:gd name="adj" fmla="val 6857"/>
             </a:avLst>
           </a:prstGeom>
           <a:solidFill>
-            <a:srgbClr val="0068B7"/>
+            <a:srgbClr val="FFFFFF"/>
           </a:solidFill>
           <a:ln w="12700">
             <a:solidFill>
-              <a:srgbClr val="0068B7"/>
+              <a:srgbClr val="B9D7E6"/>
             </a:solidFill>
             <a:prstDash val="solid"/>
           </a:ln>
@@ -14889,172 +14355,100 @@
         </p:nvSpPr>
         <p:spPr>
           <a:xfrm>
-            <a:off x="7891272" y="4169664"/>
-            <a:ext cx="826008" cy="310896"/>
-          </a:xfrm>
-          <a:prstGeom prst="rect">
-            <a:avLst/>
-          </a:prstGeom>
-          <a:noFill/>
-          <a:ln/>
-        </p:spPr>
-        <p:txBody>
-          <a:bodyPr wrap="square" lIns="0" tIns="0" rIns="0" bIns="0" rtlCol="0" anchor="ctr">
+            <a:off x="8211312" y="3941064"/>
+            <a:ext cx="2734056" cy="256032"/>
+          </a:xfrm>
+          <a:prstGeom prst="rect">
+            <a:avLst/>
+          </a:prstGeom>
+          <a:noFill/>
+          <a:ln/>
+        </p:spPr>
+        <p:txBody>
+          <a:bodyPr wrap="square" lIns="0" tIns="0" rIns="0" bIns="0" rtlCol="0" anchor="ctr"/>
+          <a:lstStyle/>
+          <a:p>
+            <a:pPr indent="0" marL="0">
+              <a:buNone/>
+            </a:pPr>
+            <a:r>
+              <a:rPr lang="en-US" sz="1300" b="1" dirty="0">
+                <a:solidFill>
+                  <a:srgbClr val="0068B7"/>
+                </a:solidFill>
+                <a:latin typeface="Aptos" pitchFamily="34" charset="0"/>
+                <a:ea typeface="Aptos" pitchFamily="34" charset="-122"/>
+                <a:cs typeface="Aptos" pitchFamily="34" charset="-120"/>
+              </a:rPr>
+              <a:t>Tool selection cues</a:t>
+            </a:r>
+            <a:endParaRPr lang="en-US" sz="1300" dirty="0"/>
+          </a:p>
+        </p:txBody>
+      </p:sp>
+      <p:sp>
+        <p:nvSpPr>
+          <p:cNvPr id="15" name="Text 13"/>
+          <p:cNvSpPr/>
+          <p:nvPr/>
+        </p:nvSpPr>
+        <p:spPr>
+          <a:xfrm>
+            <a:off x="8229600" y="4306824"/>
+            <a:ext cx="2679192" cy="941832"/>
+          </a:xfrm>
+          <a:prstGeom prst="rect">
+            <a:avLst/>
+          </a:prstGeom>
+          <a:noFill/>
+          <a:ln/>
+        </p:spPr>
+        <p:txBody>
+          <a:bodyPr wrap="square" lIns="254" tIns="254" rIns="254" bIns="254" rtlCol="0" anchor="t">
             <a:normAutofit/>
           </a:bodyPr>
           <a:lstStyle/>
           <a:p>
-            <a:pPr algn="ctr" indent="0" marL="0">
-              <a:buNone/>
-            </a:pPr>
-            <a:r>
-              <a:rPr lang="en-US" sz="1500" b="1" dirty="0">
-                <a:solidFill>
-                  <a:srgbClr val="FFFFFF"/>
-                </a:solidFill>
-                <a:latin typeface="Aptos" pitchFamily="34" charset="0"/>
-                <a:ea typeface="Aptos" pitchFamily="34" charset="-122"/>
-                <a:cs typeface="Aptos" pitchFamily="34" charset="-120"/>
-              </a:rPr>
-              <a:t>Concept</a:t>
-            </a:r>
-            <a:endParaRPr lang="en-US" sz="1500" dirty="0"/>
-          </a:p>
-        </p:txBody>
-      </p:sp>
-      <p:sp>
-        <p:nvSpPr>
-          <p:cNvPr id="15" name="Shape 13"/>
-          <p:cNvSpPr/>
-          <p:nvPr/>
-        </p:nvSpPr>
-        <p:spPr>
-          <a:xfrm>
-            <a:off x="9046464" y="3977640"/>
-            <a:ext cx="972312" cy="749808"/>
-          </a:xfrm>
-          <a:prstGeom prst="roundRect">
-            <a:avLst>
-              <a:gd name="adj" fmla="val 14634"/>
-            </a:avLst>
-          </a:prstGeom>
-          <a:solidFill>
-            <a:srgbClr val="2F8A28"/>
-          </a:solidFill>
-          <a:ln w="12700">
-            <a:solidFill>
-              <a:srgbClr val="2F8A28"/>
-            </a:solidFill>
-            <a:prstDash val="solid"/>
-          </a:ln>
-        </p:spPr>
-      </p:sp>
-      <p:sp>
-        <p:nvSpPr>
-          <p:cNvPr id="16" name="Text 14"/>
-          <p:cNvSpPr/>
-          <p:nvPr/>
-        </p:nvSpPr>
-        <p:spPr>
-          <a:xfrm>
-            <a:off x="9119616" y="4169664"/>
-            <a:ext cx="826008" cy="310896"/>
-          </a:xfrm>
-          <a:prstGeom prst="rect">
-            <a:avLst/>
-          </a:prstGeom>
-          <a:noFill/>
-          <a:ln/>
-        </p:spPr>
-        <p:txBody>
-          <a:bodyPr wrap="square" lIns="0" tIns="0" rIns="0" bIns="0" rtlCol="0" anchor="ctr">
-            <a:normAutofit/>
-          </a:bodyPr>
-          <a:lstStyle/>
-          <a:p>
-            <a:pPr algn="ctr" indent="0" marL="0">
-              <a:buNone/>
-            </a:pPr>
-            <a:r>
-              <a:rPr lang="en-US" sz="1500" b="1" dirty="0">
-                <a:solidFill>
-                  <a:srgbClr val="FFFFFF"/>
-                </a:solidFill>
-                <a:latin typeface="Aptos" pitchFamily="34" charset="0"/>
-                <a:ea typeface="Aptos" pitchFamily="34" charset="-122"/>
-                <a:cs typeface="Aptos" pitchFamily="34" charset="-120"/>
-              </a:rPr>
-              <a:t>Tool</a:t>
-            </a:r>
-            <a:endParaRPr lang="en-US" sz="1500" dirty="0"/>
-          </a:p>
-        </p:txBody>
-      </p:sp>
-      <p:sp>
-        <p:nvSpPr>
-          <p:cNvPr id="17" name="Shape 15"/>
-          <p:cNvSpPr/>
-          <p:nvPr/>
-        </p:nvSpPr>
-        <p:spPr>
-          <a:xfrm>
-            <a:off x="10274808" y="3977640"/>
-            <a:ext cx="972312" cy="749808"/>
-          </a:xfrm>
-          <a:prstGeom prst="roundRect">
-            <a:avLst>
-              <a:gd name="adj" fmla="val 14634"/>
-            </a:avLst>
-          </a:prstGeom>
-          <a:solidFill>
-            <a:srgbClr val="D69A2D"/>
-          </a:solidFill>
-          <a:ln w="12700">
-            <a:solidFill>
-              <a:srgbClr val="D69A2D"/>
-            </a:solidFill>
-            <a:prstDash val="solid"/>
-          </a:ln>
-        </p:spPr>
-      </p:sp>
-      <p:sp>
-        <p:nvSpPr>
-          <p:cNvPr id="18" name="Text 16"/>
-          <p:cNvSpPr/>
-          <p:nvPr/>
-        </p:nvSpPr>
-        <p:spPr>
-          <a:xfrm>
-            <a:off x="10347960" y="4169664"/>
-            <a:ext cx="826008" cy="310896"/>
-          </a:xfrm>
-          <a:prstGeom prst="rect">
-            <a:avLst/>
-          </a:prstGeom>
-          <a:noFill/>
-          <a:ln/>
-        </p:spPr>
-        <p:txBody>
-          <a:bodyPr wrap="square" lIns="0" tIns="0" rIns="0" bIns="0" rtlCol="0" anchor="ctr">
-            <a:normAutofit/>
-          </a:bodyPr>
-          <a:lstStyle/>
-          <a:p>
-            <a:pPr algn="ctr" indent="0" marL="0">
-              <a:buNone/>
-            </a:pPr>
-            <a:r>
-              <a:rPr lang="en-US" sz="1500" b="1" dirty="0">
-                <a:solidFill>
-                  <a:srgbClr val="FFFFFF"/>
-                </a:solidFill>
-                <a:latin typeface="Aptos" pitchFamily="34" charset="0"/>
-                <a:ea typeface="Aptos" pitchFamily="34" charset="-122"/>
-                <a:cs typeface="Aptos" pitchFamily="34" charset="-120"/>
-              </a:rPr>
-              <a:t>Artifact</a:t>
-            </a:r>
-            <a:endParaRPr lang="en-US" sz="1500" dirty="0"/>
+            <a:r>
+              <a:rPr lang="en-US" sz="1380" dirty="0">
+                <a:solidFill>
+                  <a:srgbClr val="17364A"/>
+                </a:solidFill>
+                <a:latin typeface="Aptos" pitchFamily="34" charset="0"/>
+                <a:ea typeface="Aptos" pitchFamily="34" charset="-122"/>
+                <a:cs typeface="Aptos" pitchFamily="34" charset="-120"/>
+              </a:rPr>
+              <a:t>Use a tool when no comparable local process exists.</a:t>
+            </a:r>
+            <a:endParaRPr lang="en-US" sz="1380" dirty="0"/>
+          </a:p>
+          <a:p>
+            <a:r>
+              <a:rPr lang="en-US" sz="1380" dirty="0">
+                <a:solidFill>
+                  <a:srgbClr val="17364A"/>
+                </a:solidFill>
+                <a:latin typeface="Aptos" pitchFamily="34" charset="0"/>
+                <a:ea typeface="Aptos" pitchFamily="34" charset="-122"/>
+                <a:cs typeface="Aptos" pitchFamily="34" charset="-120"/>
+              </a:rPr>
+              <a:t>Adapt existing department templates when they already fit the purpose.</a:t>
+            </a:r>
+            <a:endParaRPr lang="en-US" sz="1380" dirty="0"/>
+          </a:p>
+          <a:p>
+            <a:r>
+              <a:rPr lang="en-US" sz="1380" dirty="0">
+                <a:solidFill>
+                  <a:srgbClr val="17364A"/>
+                </a:solidFill>
+                <a:latin typeface="Aptos" pitchFamily="34" charset="0"/>
+                <a:ea typeface="Aptos" pitchFamily="34" charset="-122"/>
+                <a:cs typeface="Aptos" pitchFamily="34" charset="-120"/>
+              </a:rPr>
+              <a:t>Save the completed artifact as evidence of the decision.</a:t>
+            </a:r>
+            <a:endParaRPr lang="en-US" sz="1380" dirty="0"/>
           </a:p>
         </p:txBody>
       </p:sp>
@@ -15527,13 +14921,11 @@
             </a:avLst>
           </a:prstGeom>
           <a:solidFill>
-            <a:srgbClr val="FFFFFF">
-              <a:alpha val="88000"/>
-            </a:srgbClr>
+            <a:srgbClr val="FFFFFF"/>
           </a:solidFill>
           <a:ln w="12700">
             <a:solidFill>
-              <a:srgbClr val="D6E8F2"/>
+              <a:srgbClr val="B9D7E6"/>
             </a:solidFill>
             <a:prstDash val="solid"/>
           </a:ln>
@@ -15541,119 +14933,112 @@
       </p:sp>
       <p:sp>
         <p:nvSpPr>
-          <p:cNvPr id="14" name="Shape 12"/>
-          <p:cNvSpPr/>
-          <p:nvPr/>
-        </p:nvSpPr>
-        <p:spPr>
-          <a:xfrm>
-            <a:off x="8074152" y="3291840"/>
-            <a:ext cx="2596896" cy="749808"/>
-          </a:xfrm>
-          <a:prstGeom prst="rect">
-            <a:avLst/>
-          </a:prstGeom>
-          <a:solidFill>
-            <a:srgbClr val="EAF6F8"/>
-          </a:solidFill>
-          <a:ln w="12700">
-            <a:solidFill>
-              <a:srgbClr val="8ABBD8"/>
-            </a:solidFill>
-            <a:prstDash val="solid"/>
-          </a:ln>
-        </p:spPr>
-      </p:sp>
-      <p:sp>
-        <p:nvSpPr>
-          <p:cNvPr id="15" name="Shape 13"/>
-          <p:cNvSpPr/>
-          <p:nvPr/>
-        </p:nvSpPr>
-        <p:spPr>
-          <a:xfrm>
-            <a:off x="8202168" y="3721608"/>
-            <a:ext cx="2340864" cy="0"/>
-          </a:xfrm>
-          <a:prstGeom prst="line">
-            <a:avLst/>
-          </a:prstGeom>
-          <a:noFill/>
-          <a:ln w="19050">
-            <a:solidFill>
-              <a:srgbClr val="0068B7"/>
-            </a:solidFill>
-            <a:prstDash val="solid"/>
-          </a:ln>
-        </p:spPr>
+          <p:cNvPr id="14" name="Text 12"/>
+          <p:cNvSpPr/>
+          <p:nvPr/>
+        </p:nvSpPr>
+        <p:spPr>
+          <a:xfrm>
+            <a:off x="7799832" y="2935224"/>
+            <a:ext cx="3145536" cy="256032"/>
+          </a:xfrm>
+          <a:prstGeom prst="rect">
+            <a:avLst/>
+          </a:prstGeom>
+          <a:noFill/>
+          <a:ln/>
+        </p:spPr>
+        <p:txBody>
+          <a:bodyPr wrap="square" lIns="0" tIns="0" rIns="0" bIns="0" rtlCol="0" anchor="ctr"/>
+          <a:lstStyle/>
+          <a:p>
+            <a:pPr indent="0" marL="0">
+              <a:buNone/>
+            </a:pPr>
+            <a:r>
+              <a:rPr lang="en-US" sz="1300" b="1" dirty="0">
+                <a:solidFill>
+                  <a:srgbClr val="0068B7"/>
+                </a:solidFill>
+                <a:latin typeface="Aptos" pitchFamily="34" charset="0"/>
+                <a:ea typeface="Aptos" pitchFamily="34" charset="-122"/>
+                <a:cs typeface="Aptos" pitchFamily="34" charset="-120"/>
+              </a:rPr>
+              <a:t>Concept checkpoints</a:t>
+            </a:r>
+            <a:endParaRPr lang="en-US" sz="1300" dirty="0"/>
+          </a:p>
+        </p:txBody>
+      </p:sp>
+      <p:sp>
+        <p:nvSpPr>
+          <p:cNvPr id="15" name="Text 13"/>
+          <p:cNvSpPr/>
+          <p:nvPr/>
+        </p:nvSpPr>
+        <p:spPr>
+          <a:xfrm>
+            <a:off x="7818120" y="3300984"/>
+            <a:ext cx="3090672" cy="877824"/>
+          </a:xfrm>
+          <a:prstGeom prst="rect">
+            <a:avLst/>
+          </a:prstGeom>
+          <a:noFill/>
+          <a:ln/>
+        </p:spPr>
+        <p:txBody>
+          <a:bodyPr wrap="square" lIns="254" tIns="254" rIns="254" bIns="254" rtlCol="0" anchor="t">
+            <a:normAutofit/>
+          </a:bodyPr>
+          <a:lstStyle/>
+          <a:p>
+            <a:r>
+              <a:rPr lang="en-US" sz="1380" dirty="0">
+                <a:solidFill>
+                  <a:srgbClr val="17364A"/>
+                </a:solidFill>
+                <a:latin typeface="Aptos" pitchFamily="34" charset="0"/>
+                <a:ea typeface="Aptos" pitchFamily="34" charset="-122"/>
+                <a:cs typeface="Aptos" pitchFamily="34" charset="-120"/>
+              </a:rPr>
+              <a:t>Distinguish among common integration patterns such as point-to-point interfaces, APIs,.</a:t>
+            </a:r>
+            <a:endParaRPr lang="en-US" sz="1380" dirty="0"/>
+          </a:p>
+          <a:p>
+            <a:r>
+              <a:rPr lang="en-US" sz="1380" dirty="0">
+                <a:solidFill>
+                  <a:srgbClr val="17364A"/>
+                </a:solidFill>
+                <a:latin typeface="Aptos" pitchFamily="34" charset="0"/>
+                <a:ea typeface="Aptos" pitchFamily="34" charset="-122"/>
+                <a:cs typeface="Aptos" pitchFamily="34" charset="-120"/>
+              </a:rPr>
+              <a:t>Identify the systems of record, upstream sources, downstream systems, and shared services.</a:t>
+            </a:r>
+            <a:endParaRPr lang="en-US" sz="1380" dirty="0"/>
+          </a:p>
+          <a:p>
+            <a:r>
+              <a:rPr lang="en-US" sz="1380" dirty="0">
+                <a:solidFill>
+                  <a:srgbClr val="17364A"/>
+                </a:solidFill>
+                <a:latin typeface="Aptos" pitchFamily="34" charset="0"/>
+                <a:ea typeface="Aptos" pitchFamily="34" charset="-122"/>
+                <a:cs typeface="Aptos" pitchFamily="34" charset="-120"/>
+              </a:rPr>
+              <a:t>Assess whether a proposed AI tool requires read-only access, write-back access, embedded.</a:t>
+            </a:r>
+            <a:endParaRPr lang="en-US" sz="1380" dirty="0"/>
+          </a:p>
+        </p:txBody>
       </p:sp>
       <p:sp>
         <p:nvSpPr>
           <p:cNvPr id="16" name="Shape 14"/>
-          <p:cNvSpPr/>
-          <p:nvPr/>
-        </p:nvSpPr>
-        <p:spPr>
-          <a:xfrm>
-            <a:off x="9198864" y="4206240"/>
-            <a:ext cx="347472" cy="347472"/>
-          </a:xfrm>
-          <a:prstGeom prst="ellipse">
-            <a:avLst/>
-          </a:prstGeom>
-          <a:solidFill>
-            <a:srgbClr val="2F8A28"/>
-          </a:solidFill>
-          <a:ln w="12700">
-            <a:solidFill>
-              <a:srgbClr val="2F8A28"/>
-            </a:solidFill>
-            <a:prstDash val="solid"/>
-          </a:ln>
-        </p:spPr>
-      </p:sp>
-      <p:sp>
-        <p:nvSpPr>
-          <p:cNvPr id="17" name="Text 15"/>
-          <p:cNvSpPr/>
-          <p:nvPr/>
-        </p:nvSpPr>
-        <p:spPr>
-          <a:xfrm>
-            <a:off x="7909560" y="3977640"/>
-            <a:ext cx="2926080" cy="182880"/>
-          </a:xfrm>
-          <a:prstGeom prst="rect">
-            <a:avLst/>
-          </a:prstGeom>
-          <a:noFill/>
-          <a:ln/>
-        </p:spPr>
-        <p:txBody>
-          <a:bodyPr wrap="square" lIns="0" tIns="0" rIns="0" bIns="0" rtlCol="0" anchor="ctr"/>
-          <a:lstStyle/>
-          <a:p>
-            <a:pPr algn="ctr" indent="0" marL="0">
-              <a:buNone/>
-            </a:pPr>
-            <a:r>
-              <a:rPr lang="en-US" sz="1000" dirty="0">
-                <a:solidFill>
-                  <a:srgbClr val="003A63"/>
-                </a:solidFill>
-                <a:latin typeface="Aptos" pitchFamily="34" charset="0"/>
-                <a:ea typeface="Aptos" pitchFamily="34" charset="-122"/>
-                <a:cs typeface="Aptos" pitchFamily="34" charset="-120"/>
-              </a:rPr>
-              <a:t>Concept to action</a:t>
-            </a:r>
-            <a:endParaRPr lang="en-US" sz="1000" dirty="0"/>
-          </a:p>
-        </p:txBody>
-      </p:sp>
-      <p:sp>
-        <p:nvSpPr>
-          <p:cNvPr id="18" name="Shape 16"/>
           <p:cNvSpPr/>
           <p:nvPr/>
         </p:nvSpPr>
@@ -15680,7 +15065,7 @@
       </p:sp>
       <p:sp>
         <p:nvSpPr>
-          <p:cNvPr id="19" name="Text 17"/>
+          <p:cNvPr id="17" name="Text 15"/>
           <p:cNvSpPr/>
           <p:nvPr/>
         </p:nvSpPr>
@@ -15719,7 +15104,7 @@
       </p:sp>
       <p:sp>
         <p:nvSpPr>
-          <p:cNvPr id="20" name="Text 18"/>
+          <p:cNvPr id="18" name="Text 16"/>
           <p:cNvSpPr/>
           <p:nvPr/>
         </p:nvSpPr>
@@ -16199,13 +15584,11 @@
             </a:avLst>
           </a:prstGeom>
           <a:solidFill>
-            <a:srgbClr val="FFFFFF">
-              <a:alpha val="88000"/>
-            </a:srgbClr>
+            <a:srgbClr val="FFFFFF"/>
           </a:solidFill>
           <a:ln w="12700">
             <a:solidFill>
-              <a:srgbClr val="D6E8F2"/>
+              <a:srgbClr val="B9D7E6"/>
             </a:solidFill>
             <a:prstDash val="solid"/>
           </a:ln>
@@ -16213,119 +15596,84 @@
       </p:sp>
       <p:sp>
         <p:nvSpPr>
-          <p:cNvPr id="14" name="Shape 12"/>
-          <p:cNvSpPr/>
-          <p:nvPr/>
-        </p:nvSpPr>
-        <p:spPr>
-          <a:xfrm>
-            <a:off x="8074152" y="3291840"/>
-            <a:ext cx="2596896" cy="749808"/>
-          </a:xfrm>
-          <a:prstGeom prst="rect">
-            <a:avLst/>
-          </a:prstGeom>
-          <a:solidFill>
-            <a:srgbClr val="EAF6F8"/>
-          </a:solidFill>
-          <a:ln w="12700">
-            <a:solidFill>
-              <a:srgbClr val="8ABBD8"/>
-            </a:solidFill>
-            <a:prstDash val="solid"/>
-          </a:ln>
-        </p:spPr>
-      </p:sp>
-      <p:sp>
-        <p:nvSpPr>
-          <p:cNvPr id="15" name="Shape 13"/>
-          <p:cNvSpPr/>
-          <p:nvPr/>
-        </p:nvSpPr>
-        <p:spPr>
-          <a:xfrm>
-            <a:off x="8202168" y="3721608"/>
-            <a:ext cx="2340864" cy="0"/>
-          </a:xfrm>
-          <a:prstGeom prst="line">
-            <a:avLst/>
-          </a:prstGeom>
-          <a:noFill/>
-          <a:ln w="19050">
-            <a:solidFill>
-              <a:srgbClr val="0068B7"/>
-            </a:solidFill>
-            <a:prstDash val="solid"/>
-          </a:ln>
-        </p:spPr>
+          <p:cNvPr id="14" name="Text 12"/>
+          <p:cNvSpPr/>
+          <p:nvPr/>
+        </p:nvSpPr>
+        <p:spPr>
+          <a:xfrm>
+            <a:off x="7799832" y="2935224"/>
+            <a:ext cx="3145536" cy="256032"/>
+          </a:xfrm>
+          <a:prstGeom prst="rect">
+            <a:avLst/>
+          </a:prstGeom>
+          <a:noFill/>
+          <a:ln/>
+        </p:spPr>
+        <p:txBody>
+          <a:bodyPr wrap="square" lIns="0" tIns="0" rIns="0" bIns="0" rtlCol="0" anchor="ctr"/>
+          <a:lstStyle/>
+          <a:p>
+            <a:pPr indent="0" marL="0">
+              <a:buNone/>
+            </a:pPr>
+            <a:r>
+              <a:rPr lang="en-US" sz="1300" b="1" dirty="0">
+                <a:solidFill>
+                  <a:srgbClr val="0068B7"/>
+                </a:solidFill>
+                <a:latin typeface="Aptos" pitchFamily="34" charset="0"/>
+                <a:ea typeface="Aptos" pitchFamily="34" charset="-122"/>
+                <a:cs typeface="Aptos" pitchFamily="34" charset="-120"/>
+              </a:rPr>
+              <a:t>Concept checkpoints</a:t>
+            </a:r>
+            <a:endParaRPr lang="en-US" sz="1300" dirty="0"/>
+          </a:p>
+        </p:txBody>
+      </p:sp>
+      <p:sp>
+        <p:nvSpPr>
+          <p:cNvPr id="15" name="Text 13"/>
+          <p:cNvSpPr/>
+          <p:nvPr/>
+        </p:nvSpPr>
+        <p:spPr>
+          <a:xfrm>
+            <a:off x="7818120" y="3300984"/>
+            <a:ext cx="3090672" cy="877824"/>
+          </a:xfrm>
+          <a:prstGeom prst="rect">
+            <a:avLst/>
+          </a:prstGeom>
+          <a:noFill/>
+          <a:ln/>
+        </p:spPr>
+        <p:txBody>
+          <a:bodyPr wrap="square" lIns="254" tIns="254" rIns="254" bIns="254" rtlCol="0" anchor="t">
+            <a:normAutofit/>
+          </a:bodyPr>
+          <a:lstStyle/>
+          <a:p>
+            <a:r>
+              <a:rPr lang="en-US" sz="1380" dirty="0">
+                <a:solidFill>
+                  <a:srgbClr val="17364A"/>
+                </a:solidFill>
+                <a:latin typeface="Aptos" pitchFamily="34" charset="0"/>
+                <a:ea typeface="Aptos" pitchFamily="34" charset="-122"/>
+                <a:cs typeface="Aptos" pitchFamily="34" charset="-120"/>
+              </a:rPr>
+              <a:t>Produce an integration pattern worksheet for a public health AI use case.</a:t>
+            </a:r>
+            <a:endParaRPr lang="en-US" sz="1380" dirty="0"/>
+          </a:p>
+        </p:txBody>
       </p:sp>
       <p:sp>
         <p:nvSpPr>
           <p:cNvPr id="16" name="Shape 14"/>
-          <p:cNvSpPr/>
-          <p:nvPr/>
-        </p:nvSpPr>
-        <p:spPr>
-          <a:xfrm>
-            <a:off x="9198864" y="4206240"/>
-            <a:ext cx="347472" cy="347472"/>
-          </a:xfrm>
-          <a:prstGeom prst="ellipse">
-            <a:avLst/>
-          </a:prstGeom>
-          <a:solidFill>
-            <a:srgbClr val="2F8A28"/>
-          </a:solidFill>
-          <a:ln w="12700">
-            <a:solidFill>
-              <a:srgbClr val="2F8A28"/>
-            </a:solidFill>
-            <a:prstDash val="solid"/>
-          </a:ln>
-        </p:spPr>
-      </p:sp>
-      <p:sp>
-        <p:nvSpPr>
-          <p:cNvPr id="17" name="Text 15"/>
-          <p:cNvSpPr/>
-          <p:nvPr/>
-        </p:nvSpPr>
-        <p:spPr>
-          <a:xfrm>
-            <a:off x="7909560" y="3977640"/>
-            <a:ext cx="2926080" cy="182880"/>
-          </a:xfrm>
-          <a:prstGeom prst="rect">
-            <a:avLst/>
-          </a:prstGeom>
-          <a:noFill/>
-          <a:ln/>
-        </p:spPr>
-        <p:txBody>
-          <a:bodyPr wrap="square" lIns="0" tIns="0" rIns="0" bIns="0" rtlCol="0" anchor="ctr"/>
-          <a:lstStyle/>
-          <a:p>
-            <a:pPr algn="ctr" indent="0" marL="0">
-              <a:buNone/>
-            </a:pPr>
-            <a:r>
-              <a:rPr lang="en-US" sz="1000" dirty="0">
-                <a:solidFill>
-                  <a:srgbClr val="003A63"/>
-                </a:solidFill>
-                <a:latin typeface="Aptos" pitchFamily="34" charset="0"/>
-                <a:ea typeface="Aptos" pitchFamily="34" charset="-122"/>
-                <a:cs typeface="Aptos" pitchFamily="34" charset="-120"/>
-              </a:rPr>
-              <a:t>Concept to action</a:t>
-            </a:r>
-            <a:endParaRPr lang="en-US" sz="1000" dirty="0"/>
-          </a:p>
-        </p:txBody>
-      </p:sp>
-      <p:sp>
-        <p:nvSpPr>
-          <p:cNvPr id="18" name="Shape 16"/>
           <p:cNvSpPr/>
           <p:nvPr/>
         </p:nvSpPr>
@@ -16352,7 +15700,7 @@
       </p:sp>
       <p:sp>
         <p:nvSpPr>
-          <p:cNvPr id="19" name="Text 17"/>
+          <p:cNvPr id="17" name="Text 15"/>
           <p:cNvSpPr/>
           <p:nvPr/>
         </p:nvSpPr>
@@ -16391,7 +15739,7 @@
       </p:sp>
       <p:sp>
         <p:nvSpPr>
-          <p:cNvPr id="20" name="Text 18"/>
+          <p:cNvPr id="18" name="Text 16"/>
           <p:cNvSpPr/>
           <p:nvPr/>
         </p:nvSpPr>
@@ -16899,13 +16247,11 @@
             </a:avLst>
           </a:prstGeom>
           <a:solidFill>
-            <a:srgbClr val="FFFFFF">
-              <a:alpha val="88000"/>
-            </a:srgbClr>
+            <a:srgbClr val="FFFFFF"/>
           </a:solidFill>
           <a:ln w="12700">
             <a:solidFill>
-              <a:srgbClr val="D6E8F2"/>
+              <a:srgbClr val="B9D7E6"/>
             </a:solidFill>
             <a:prstDash val="solid"/>
           </a:ln>
@@ -16913,119 +16259,112 @@
       </p:sp>
       <p:sp>
         <p:nvSpPr>
-          <p:cNvPr id="14" name="Shape 12"/>
-          <p:cNvSpPr/>
-          <p:nvPr/>
-        </p:nvSpPr>
-        <p:spPr>
-          <a:xfrm>
-            <a:off x="8074152" y="3291840"/>
-            <a:ext cx="2596896" cy="749808"/>
-          </a:xfrm>
-          <a:prstGeom prst="rect">
-            <a:avLst/>
-          </a:prstGeom>
-          <a:solidFill>
-            <a:srgbClr val="EAF6F8"/>
-          </a:solidFill>
-          <a:ln w="12700">
-            <a:solidFill>
-              <a:srgbClr val="8ABBD8"/>
-            </a:solidFill>
-            <a:prstDash val="solid"/>
-          </a:ln>
-        </p:spPr>
-      </p:sp>
-      <p:sp>
-        <p:nvSpPr>
-          <p:cNvPr id="15" name="Shape 13"/>
-          <p:cNvSpPr/>
-          <p:nvPr/>
-        </p:nvSpPr>
-        <p:spPr>
-          <a:xfrm>
-            <a:off x="8202168" y="3721608"/>
-            <a:ext cx="2340864" cy="0"/>
-          </a:xfrm>
-          <a:prstGeom prst="line">
-            <a:avLst/>
-          </a:prstGeom>
-          <a:noFill/>
-          <a:ln w="19050">
-            <a:solidFill>
-              <a:srgbClr val="0068B7"/>
-            </a:solidFill>
-            <a:prstDash val="solid"/>
-          </a:ln>
-        </p:spPr>
+          <p:cNvPr id="14" name="Text 12"/>
+          <p:cNvSpPr/>
+          <p:nvPr/>
+        </p:nvSpPr>
+        <p:spPr>
+          <a:xfrm>
+            <a:off x="7799832" y="2935224"/>
+            <a:ext cx="3145536" cy="256032"/>
+          </a:xfrm>
+          <a:prstGeom prst="rect">
+            <a:avLst/>
+          </a:prstGeom>
+          <a:noFill/>
+          <a:ln/>
+        </p:spPr>
+        <p:txBody>
+          <a:bodyPr wrap="square" lIns="0" tIns="0" rIns="0" bIns="0" rtlCol="0" anchor="ctr"/>
+          <a:lstStyle/>
+          <a:p>
+            <a:pPr indent="0" marL="0">
+              <a:buNone/>
+            </a:pPr>
+            <a:r>
+              <a:rPr lang="en-US" sz="1300" b="1" dirty="0">
+                <a:solidFill>
+                  <a:srgbClr val="0068B7"/>
+                </a:solidFill>
+                <a:latin typeface="Aptos" pitchFamily="34" charset="0"/>
+                <a:ea typeface="Aptos" pitchFamily="34" charset="-122"/>
+                <a:cs typeface="Aptos" pitchFamily="34" charset="-120"/>
+              </a:rPr>
+              <a:t>Concept checkpoints</a:t>
+            </a:r>
+            <a:endParaRPr lang="en-US" sz="1300" dirty="0"/>
+          </a:p>
+        </p:txBody>
+      </p:sp>
+      <p:sp>
+        <p:nvSpPr>
+          <p:cNvPr id="15" name="Text 13"/>
+          <p:cNvSpPr/>
+          <p:nvPr/>
+        </p:nvSpPr>
+        <p:spPr>
+          <a:xfrm>
+            <a:off x="7818120" y="3300984"/>
+            <a:ext cx="3090672" cy="877824"/>
+          </a:xfrm>
+          <a:prstGeom prst="rect">
+            <a:avLst/>
+          </a:prstGeom>
+          <a:noFill/>
+          <a:ln/>
+        </p:spPr>
+        <p:txBody>
+          <a:bodyPr wrap="square" lIns="254" tIns="254" rIns="254" bIns="254" rtlCol="0" anchor="t">
+            <a:normAutofit/>
+          </a:bodyPr>
+          <a:lstStyle/>
+          <a:p>
+            <a:r>
+              <a:rPr lang="en-US" sz="1380" dirty="0">
+                <a:solidFill>
+                  <a:srgbClr val="17364A"/>
+                </a:solidFill>
+                <a:latin typeface="Aptos" pitchFamily="34" charset="0"/>
+                <a:ea typeface="Aptos" pitchFamily="34" charset="-122"/>
+                <a:cs typeface="Aptos" pitchFamily="34" charset="-120"/>
+              </a:rPr>
+              <a:t>The value of an AI-supported workflow depends on how well it is integrated with systems of.</a:t>
+            </a:r>
+            <a:endParaRPr lang="en-US" sz="1380" dirty="0"/>
+          </a:p>
+          <a:p>
+            <a:r>
+              <a:rPr lang="en-US" sz="1380" dirty="0">
+                <a:solidFill>
+                  <a:srgbClr val="17364A"/>
+                </a:solidFill>
+                <a:latin typeface="Aptos" pitchFamily="34" charset="0"/>
+                <a:ea typeface="Aptos" pitchFamily="34" charset="-122"/>
+                <a:cs typeface="Aptos" pitchFamily="34" charset="-120"/>
+              </a:rPr>
+              <a:t>This module helps learners understand the integration patterns that allow AI to support.</a:t>
+            </a:r>
+            <a:endParaRPr lang="en-US" sz="1380" dirty="0"/>
+          </a:p>
+          <a:p>
+            <a:r>
+              <a:rPr lang="en-US" sz="1380" dirty="0">
+                <a:solidFill>
+                  <a:srgbClr val="17364A"/>
+                </a:solidFill>
+                <a:latin typeface="Aptos" pitchFamily="34" charset="0"/>
+                <a:ea typeface="Aptos" pitchFamily="34" charset="-122"/>
+                <a:cs typeface="Aptos" pitchFamily="34" charset="-120"/>
+              </a:rPr>
+              <a:t>The module focuses on practical integration choices rather than software engineering theory.</a:t>
+            </a:r>
+            <a:endParaRPr lang="en-US" sz="1380" dirty="0"/>
+          </a:p>
+        </p:txBody>
       </p:sp>
       <p:sp>
         <p:nvSpPr>
           <p:cNvPr id="16" name="Shape 14"/>
-          <p:cNvSpPr/>
-          <p:nvPr/>
-        </p:nvSpPr>
-        <p:spPr>
-          <a:xfrm>
-            <a:off x="9198864" y="4206240"/>
-            <a:ext cx="347472" cy="347472"/>
-          </a:xfrm>
-          <a:prstGeom prst="ellipse">
-            <a:avLst/>
-          </a:prstGeom>
-          <a:solidFill>
-            <a:srgbClr val="2F8A28"/>
-          </a:solidFill>
-          <a:ln w="12700">
-            <a:solidFill>
-              <a:srgbClr val="2F8A28"/>
-            </a:solidFill>
-            <a:prstDash val="solid"/>
-          </a:ln>
-        </p:spPr>
-      </p:sp>
-      <p:sp>
-        <p:nvSpPr>
-          <p:cNvPr id="17" name="Text 15"/>
-          <p:cNvSpPr/>
-          <p:nvPr/>
-        </p:nvSpPr>
-        <p:spPr>
-          <a:xfrm>
-            <a:off x="7909560" y="3977640"/>
-            <a:ext cx="2926080" cy="182880"/>
-          </a:xfrm>
-          <a:prstGeom prst="rect">
-            <a:avLst/>
-          </a:prstGeom>
-          <a:noFill/>
-          <a:ln/>
-        </p:spPr>
-        <p:txBody>
-          <a:bodyPr wrap="square" lIns="0" tIns="0" rIns="0" bIns="0" rtlCol="0" anchor="ctr"/>
-          <a:lstStyle/>
-          <a:p>
-            <a:pPr algn="ctr" indent="0" marL="0">
-              <a:buNone/>
-            </a:pPr>
-            <a:r>
-              <a:rPr lang="en-US" sz="1000" dirty="0">
-                <a:solidFill>
-                  <a:srgbClr val="003A63"/>
-                </a:solidFill>
-                <a:latin typeface="Aptos" pitchFamily="34" charset="0"/>
-                <a:ea typeface="Aptos" pitchFamily="34" charset="-122"/>
-                <a:cs typeface="Aptos" pitchFamily="34" charset="-120"/>
-              </a:rPr>
-              <a:t>Concept to action</a:t>
-            </a:r>
-            <a:endParaRPr lang="en-US" sz="1000" dirty="0"/>
-          </a:p>
-        </p:txBody>
-      </p:sp>
-      <p:sp>
-        <p:nvSpPr>
-          <p:cNvPr id="18" name="Shape 16"/>
           <p:cNvSpPr/>
           <p:nvPr/>
         </p:nvSpPr>
@@ -17052,7 +16391,7 @@
       </p:sp>
       <p:sp>
         <p:nvSpPr>
-          <p:cNvPr id="19" name="Text 17"/>
+          <p:cNvPr id="17" name="Text 15"/>
           <p:cNvSpPr/>
           <p:nvPr/>
         </p:nvSpPr>
@@ -17091,7 +16430,7 @@
       </p:sp>
       <p:sp>
         <p:nvSpPr>
-          <p:cNvPr id="20" name="Text 18"/>
+          <p:cNvPr id="18" name="Text 16"/>
           <p:cNvSpPr/>
           <p:nvPr/>
         </p:nvSpPr>
@@ -17599,13 +16938,11 @@
             </a:avLst>
           </a:prstGeom>
           <a:solidFill>
-            <a:srgbClr val="FFFFFF">
-              <a:alpha val="88000"/>
-            </a:srgbClr>
+            <a:srgbClr val="FFFFFF"/>
           </a:solidFill>
           <a:ln w="12700">
             <a:solidFill>
-              <a:srgbClr val="D6E8F2"/>
+              <a:srgbClr val="B9D7E6"/>
             </a:solidFill>
             <a:prstDash val="solid"/>
           </a:ln>
@@ -17613,119 +16950,112 @@
       </p:sp>
       <p:sp>
         <p:nvSpPr>
-          <p:cNvPr id="14" name="Shape 12"/>
-          <p:cNvSpPr/>
-          <p:nvPr/>
-        </p:nvSpPr>
-        <p:spPr>
-          <a:xfrm>
-            <a:off x="8074152" y="3291840"/>
-            <a:ext cx="2596896" cy="749808"/>
-          </a:xfrm>
-          <a:prstGeom prst="rect">
-            <a:avLst/>
-          </a:prstGeom>
-          <a:solidFill>
-            <a:srgbClr val="EAF6F8"/>
-          </a:solidFill>
-          <a:ln w="12700">
-            <a:solidFill>
-              <a:srgbClr val="8ABBD8"/>
-            </a:solidFill>
-            <a:prstDash val="solid"/>
-          </a:ln>
-        </p:spPr>
-      </p:sp>
-      <p:sp>
-        <p:nvSpPr>
-          <p:cNvPr id="15" name="Shape 13"/>
-          <p:cNvSpPr/>
-          <p:nvPr/>
-        </p:nvSpPr>
-        <p:spPr>
-          <a:xfrm>
-            <a:off x="8202168" y="3721608"/>
-            <a:ext cx="2340864" cy="0"/>
-          </a:xfrm>
-          <a:prstGeom prst="line">
-            <a:avLst/>
-          </a:prstGeom>
-          <a:noFill/>
-          <a:ln w="19050">
-            <a:solidFill>
-              <a:srgbClr val="0068B7"/>
-            </a:solidFill>
-            <a:prstDash val="solid"/>
-          </a:ln>
-        </p:spPr>
+          <p:cNvPr id="14" name="Text 12"/>
+          <p:cNvSpPr/>
+          <p:nvPr/>
+        </p:nvSpPr>
+        <p:spPr>
+          <a:xfrm>
+            <a:off x="7799832" y="2935224"/>
+            <a:ext cx="3145536" cy="256032"/>
+          </a:xfrm>
+          <a:prstGeom prst="rect">
+            <a:avLst/>
+          </a:prstGeom>
+          <a:noFill/>
+          <a:ln/>
+        </p:spPr>
+        <p:txBody>
+          <a:bodyPr wrap="square" lIns="0" tIns="0" rIns="0" bIns="0" rtlCol="0" anchor="ctr"/>
+          <a:lstStyle/>
+          <a:p>
+            <a:pPr indent="0" marL="0">
+              <a:buNone/>
+            </a:pPr>
+            <a:r>
+              <a:rPr lang="en-US" sz="1300" b="1" dirty="0">
+                <a:solidFill>
+                  <a:srgbClr val="0068B7"/>
+                </a:solidFill>
+                <a:latin typeface="Aptos" pitchFamily="34" charset="0"/>
+                <a:ea typeface="Aptos" pitchFamily="34" charset="-122"/>
+                <a:cs typeface="Aptos" pitchFamily="34" charset="-120"/>
+              </a:rPr>
+              <a:t>Concept checkpoints</a:t>
+            </a:r>
+            <a:endParaRPr lang="en-US" sz="1300" dirty="0"/>
+          </a:p>
+        </p:txBody>
+      </p:sp>
+      <p:sp>
+        <p:nvSpPr>
+          <p:cNvPr id="15" name="Text 13"/>
+          <p:cNvSpPr/>
+          <p:nvPr/>
+        </p:nvSpPr>
+        <p:spPr>
+          <a:xfrm>
+            <a:off x="7818120" y="3300984"/>
+            <a:ext cx="3090672" cy="877824"/>
+          </a:xfrm>
+          <a:prstGeom prst="rect">
+            <a:avLst/>
+          </a:prstGeom>
+          <a:noFill/>
+          <a:ln/>
+        </p:spPr>
+        <p:txBody>
+          <a:bodyPr wrap="square" lIns="254" tIns="254" rIns="254" bIns="254" rtlCol="0" anchor="t">
+            <a:normAutofit/>
+          </a:bodyPr>
+          <a:lstStyle/>
+          <a:p>
+            <a:r>
+              <a:rPr lang="en-US" sz="1380" dirty="0">
+                <a:solidFill>
+                  <a:srgbClr val="17364A"/>
+                </a:solidFill>
+                <a:latin typeface="Aptos" pitchFamily="34" charset="0"/>
+                <a:ea typeface="Aptos" pitchFamily="34" charset="-122"/>
+                <a:cs typeface="Aptos" pitchFamily="34" charset="-120"/>
+              </a:rPr>
+              <a:t>Message broker: A service that allows systems to send and receive messages through a.</a:t>
+            </a:r>
+            <a:endParaRPr lang="en-US" sz="1380" dirty="0"/>
+          </a:p>
+          <a:p>
+            <a:r>
+              <a:rPr lang="en-US" sz="1380" dirty="0">
+                <a:solidFill>
+                  <a:srgbClr val="17364A"/>
+                </a:solidFill>
+                <a:latin typeface="Aptos" pitchFamily="34" charset="0"/>
+                <a:ea typeface="Aptos" pitchFamily="34" charset="-122"/>
+                <a:cs typeface="Aptos" pitchFamily="34" charset="-120"/>
+              </a:rPr>
+              <a:t>Bulk data exchange: The transfer of large datasets at scheduled intervals or on demand.</a:t>
+            </a:r>
+            <a:endParaRPr lang="en-US" sz="1380" dirty="0"/>
+          </a:p>
+          <a:p>
+            <a:r>
+              <a:rPr lang="en-US" sz="1380" dirty="0">
+                <a:solidFill>
+                  <a:srgbClr val="17364A"/>
+                </a:solidFill>
+                <a:latin typeface="Aptos" pitchFamily="34" charset="0"/>
+                <a:ea typeface="Aptos" pitchFamily="34" charset="-122"/>
+                <a:cs typeface="Aptos" pitchFamily="34" charset="-120"/>
+              </a:rPr>
+              <a:t>Write-back: A system action that updates, creates, or changes information in another system.</a:t>
+            </a:r>
+            <a:endParaRPr lang="en-US" sz="1380" dirty="0"/>
+          </a:p>
+        </p:txBody>
       </p:sp>
       <p:sp>
         <p:nvSpPr>
           <p:cNvPr id="16" name="Shape 14"/>
-          <p:cNvSpPr/>
-          <p:nvPr/>
-        </p:nvSpPr>
-        <p:spPr>
-          <a:xfrm>
-            <a:off x="9198864" y="4206240"/>
-            <a:ext cx="347472" cy="347472"/>
-          </a:xfrm>
-          <a:prstGeom prst="ellipse">
-            <a:avLst/>
-          </a:prstGeom>
-          <a:solidFill>
-            <a:srgbClr val="2F8A28"/>
-          </a:solidFill>
-          <a:ln w="12700">
-            <a:solidFill>
-              <a:srgbClr val="2F8A28"/>
-            </a:solidFill>
-            <a:prstDash val="solid"/>
-          </a:ln>
-        </p:spPr>
-      </p:sp>
-      <p:sp>
-        <p:nvSpPr>
-          <p:cNvPr id="17" name="Text 15"/>
-          <p:cNvSpPr/>
-          <p:nvPr/>
-        </p:nvSpPr>
-        <p:spPr>
-          <a:xfrm>
-            <a:off x="7909560" y="3977640"/>
-            <a:ext cx="2926080" cy="182880"/>
-          </a:xfrm>
-          <a:prstGeom prst="rect">
-            <a:avLst/>
-          </a:prstGeom>
-          <a:noFill/>
-          <a:ln/>
-        </p:spPr>
-        <p:txBody>
-          <a:bodyPr wrap="square" lIns="0" tIns="0" rIns="0" bIns="0" rtlCol="0" anchor="ctr"/>
-          <a:lstStyle/>
-          <a:p>
-            <a:pPr algn="ctr" indent="0" marL="0">
-              <a:buNone/>
-            </a:pPr>
-            <a:r>
-              <a:rPr lang="en-US" sz="1000" dirty="0">
-                <a:solidFill>
-                  <a:srgbClr val="003A63"/>
-                </a:solidFill>
-                <a:latin typeface="Aptos" pitchFamily="34" charset="0"/>
-                <a:ea typeface="Aptos" pitchFamily="34" charset="-122"/>
-                <a:cs typeface="Aptos" pitchFamily="34" charset="-120"/>
-              </a:rPr>
-              <a:t>Concept to action</a:t>
-            </a:r>
-            <a:endParaRPr lang="en-US" sz="1000" dirty="0"/>
-          </a:p>
-        </p:txBody>
-      </p:sp>
-      <p:sp>
-        <p:nvSpPr>
-          <p:cNvPr id="18" name="Shape 16"/>
           <p:cNvSpPr/>
           <p:nvPr/>
         </p:nvSpPr>
@@ -17752,7 +17082,7 @@
       </p:sp>
       <p:sp>
         <p:nvSpPr>
-          <p:cNvPr id="19" name="Text 17"/>
+          <p:cNvPr id="17" name="Text 15"/>
           <p:cNvSpPr/>
           <p:nvPr/>
         </p:nvSpPr>
@@ -17791,7 +17121,7 @@
       </p:sp>
       <p:sp>
         <p:nvSpPr>
-          <p:cNvPr id="20" name="Text 18"/>
+          <p:cNvPr id="18" name="Text 16"/>
           <p:cNvSpPr/>
           <p:nvPr/>
         </p:nvSpPr>
@@ -18299,13 +17629,11 @@
             </a:avLst>
           </a:prstGeom>
           <a:solidFill>
-            <a:srgbClr val="FFFFFF">
-              <a:alpha val="88000"/>
-            </a:srgbClr>
+            <a:srgbClr val="FFFFFF"/>
           </a:solidFill>
           <a:ln w="12700">
             <a:solidFill>
-              <a:srgbClr val="D6E8F2"/>
+              <a:srgbClr val="B9D7E6"/>
             </a:solidFill>
             <a:prstDash val="solid"/>
           </a:ln>
@@ -18313,190 +17641,112 @@
       </p:sp>
       <p:sp>
         <p:nvSpPr>
-          <p:cNvPr id="14" name="Shape 12"/>
-          <p:cNvSpPr/>
-          <p:nvPr/>
-        </p:nvSpPr>
-        <p:spPr>
-          <a:xfrm>
-            <a:off x="7891272" y="3108960"/>
-            <a:ext cx="566928" cy="566928"/>
-          </a:xfrm>
-          <a:prstGeom prst="ellipse">
-            <a:avLst/>
-          </a:prstGeom>
-          <a:solidFill>
-            <a:srgbClr val="0068B7"/>
-          </a:solidFill>
-          <a:ln w="12700">
-            <a:solidFill>
-              <a:srgbClr val="0068B7"/>
-            </a:solidFill>
-            <a:prstDash val="solid"/>
-          </a:ln>
-        </p:spPr>
-      </p:sp>
-      <p:sp>
-        <p:nvSpPr>
-          <p:cNvPr id="15" name="Shape 13"/>
-          <p:cNvSpPr/>
-          <p:nvPr/>
-        </p:nvSpPr>
-        <p:spPr>
-          <a:xfrm>
-            <a:off x="10287000" y="3108960"/>
-            <a:ext cx="566928" cy="566928"/>
-          </a:xfrm>
-          <a:prstGeom prst="ellipse">
-            <a:avLst/>
-          </a:prstGeom>
-          <a:solidFill>
-            <a:srgbClr val="2F8A28"/>
-          </a:solidFill>
-          <a:ln w="12700">
-            <a:solidFill>
-              <a:srgbClr val="2F8A28"/>
-            </a:solidFill>
-            <a:prstDash val="solid"/>
-          </a:ln>
-        </p:spPr>
+          <p:cNvPr id="14" name="Text 12"/>
+          <p:cNvSpPr/>
+          <p:nvPr/>
+        </p:nvSpPr>
+        <p:spPr>
+          <a:xfrm>
+            <a:off x="7799832" y="2935224"/>
+            <a:ext cx="3145536" cy="256032"/>
+          </a:xfrm>
+          <a:prstGeom prst="rect">
+            <a:avLst/>
+          </a:prstGeom>
+          <a:noFill/>
+          <a:ln/>
+        </p:spPr>
+        <p:txBody>
+          <a:bodyPr wrap="square" lIns="0" tIns="0" rIns="0" bIns="0" rtlCol="0" anchor="ctr"/>
+          <a:lstStyle/>
+          <a:p>
+            <a:pPr indent="0" marL="0">
+              <a:buNone/>
+            </a:pPr>
+            <a:r>
+              <a:rPr lang="en-US" sz="1300" b="1" dirty="0">
+                <a:solidFill>
+                  <a:srgbClr val="0068B7"/>
+                </a:solidFill>
+                <a:latin typeface="Aptos" pitchFamily="34" charset="0"/>
+                <a:ea typeface="Aptos" pitchFamily="34" charset="-122"/>
+                <a:cs typeface="Aptos" pitchFamily="34" charset="-120"/>
+              </a:rPr>
+              <a:t>Concept checkpoints</a:t>
+            </a:r>
+            <a:endParaRPr lang="en-US" sz="1300" dirty="0"/>
+          </a:p>
+        </p:txBody>
+      </p:sp>
+      <p:sp>
+        <p:nvSpPr>
+          <p:cNvPr id="15" name="Text 13"/>
+          <p:cNvSpPr/>
+          <p:nvPr/>
+        </p:nvSpPr>
+        <p:spPr>
+          <a:xfrm>
+            <a:off x="7818120" y="3300984"/>
+            <a:ext cx="3090672" cy="877824"/>
+          </a:xfrm>
+          <a:prstGeom prst="rect">
+            <a:avLst/>
+          </a:prstGeom>
+          <a:noFill/>
+          <a:ln/>
+        </p:spPr>
+        <p:txBody>
+          <a:bodyPr wrap="square" lIns="254" tIns="254" rIns="254" bIns="254" rtlCol="0" anchor="t">
+            <a:normAutofit/>
+          </a:bodyPr>
+          <a:lstStyle/>
+          <a:p>
+            <a:r>
+              <a:rPr lang="en-US" sz="1380" dirty="0">
+                <a:solidFill>
+                  <a:srgbClr val="17364A"/>
+                </a:solidFill>
+                <a:latin typeface="Aptos" pitchFamily="34" charset="0"/>
+                <a:ea typeface="Aptos" pitchFamily="34" charset="-122"/>
+                <a:cs typeface="Aptos" pitchFamily="34" charset="-120"/>
+              </a:rPr>
+              <a:t>This national-level module is intended for training and planning purposes.</a:t>
+            </a:r>
+            <a:endParaRPr lang="en-US" sz="1380" dirty="0"/>
+          </a:p>
+          <a:p>
+            <a:r>
+              <a:rPr lang="en-US" sz="1380" dirty="0">
+                <a:solidFill>
+                  <a:srgbClr val="17364A"/>
+                </a:solidFill>
+                <a:latin typeface="Aptos" pitchFamily="34" charset="0"/>
+                <a:ea typeface="Aptos" pitchFamily="34" charset="-122"/>
+                <a:cs typeface="Aptos" pitchFamily="34" charset="-120"/>
+              </a:rPr>
+              <a:t>It does not replace legal, privacy, procurement, civil rights, records, or agency policy.</a:t>
+            </a:r>
+            <a:endParaRPr lang="en-US" sz="1380" dirty="0"/>
+          </a:p>
+          <a:p>
+            <a:r>
+              <a:rPr lang="en-US" sz="1380" dirty="0">
+                <a:solidFill>
+                  <a:srgbClr val="17364A"/>
+                </a:solidFill>
+                <a:latin typeface="Aptos" pitchFamily="34" charset="0"/>
+                <a:ea typeface="Aptos" pitchFamily="34" charset="-122"/>
+                <a:cs typeface="Aptos" pitchFamily="34" charset="-120"/>
+              </a:rPr>
+              <a:t>Learners should confirm applicable requirements in their own jurisdiction and organization.</a:t>
+            </a:r>
+            <a:endParaRPr lang="en-US" sz="1380" dirty="0"/>
+          </a:p>
+        </p:txBody>
       </p:sp>
       <p:sp>
         <p:nvSpPr>
           <p:cNvPr id="16" name="Shape 14"/>
-          <p:cNvSpPr/>
-          <p:nvPr/>
-        </p:nvSpPr>
-        <p:spPr>
-          <a:xfrm>
-            <a:off x="9089136" y="3456432"/>
-            <a:ext cx="566928" cy="566928"/>
-          </a:xfrm>
-          <a:prstGeom prst="ellipse">
-            <a:avLst/>
-          </a:prstGeom>
-          <a:solidFill>
-            <a:srgbClr val="6A4CA3"/>
-          </a:solidFill>
-          <a:ln w="12700">
-            <a:solidFill>
-              <a:srgbClr val="6A4CA3"/>
-            </a:solidFill>
-            <a:prstDash val="solid"/>
-          </a:ln>
-        </p:spPr>
-      </p:sp>
-      <p:sp>
-        <p:nvSpPr>
-          <p:cNvPr id="17" name="Shape 15"/>
-          <p:cNvSpPr/>
-          <p:nvPr/>
-        </p:nvSpPr>
-        <p:spPr>
-          <a:xfrm>
-            <a:off x="8385048" y="3419856"/>
-            <a:ext cx="1975104" cy="0"/>
-          </a:xfrm>
-          <a:prstGeom prst="line">
-            <a:avLst/>
-          </a:prstGeom>
-          <a:noFill/>
-          <a:ln w="25400">
-            <a:solidFill>
-              <a:srgbClr val="8ABBD8"/>
-            </a:solidFill>
-            <a:prstDash val="solid"/>
-          </a:ln>
-        </p:spPr>
-      </p:sp>
-      <p:sp>
-        <p:nvSpPr>
-          <p:cNvPr id="18" name="Shape 16"/>
-          <p:cNvSpPr/>
-          <p:nvPr/>
-        </p:nvSpPr>
-        <p:spPr>
-          <a:xfrm>
-            <a:off x="8202168" y="3630168"/>
-            <a:ext cx="1170432" cy="118872"/>
-          </a:xfrm>
-          <a:prstGeom prst="line">
-            <a:avLst/>
-          </a:prstGeom>
-          <a:noFill/>
-          <a:ln w="25400">
-            <a:solidFill>
-              <a:srgbClr val="8ABBD8"/>
-            </a:solidFill>
-            <a:prstDash val="solid"/>
-          </a:ln>
-        </p:spPr>
-      </p:sp>
-      <p:sp>
-        <p:nvSpPr>
-          <p:cNvPr id="19" name="Shape 17"/>
-          <p:cNvSpPr/>
-          <p:nvPr/>
-        </p:nvSpPr>
-        <p:spPr>
-          <a:xfrm>
-            <a:off x="10543032" y="3630168"/>
-            <a:ext cx="-1170432" cy="118872"/>
-          </a:xfrm>
-          <a:prstGeom prst="line">
-            <a:avLst/>
-          </a:prstGeom>
-          <a:noFill/>
-          <a:ln w="25400">
-            <a:solidFill>
-              <a:srgbClr val="8ABBD8"/>
-            </a:solidFill>
-            <a:prstDash val="solid"/>
-          </a:ln>
-        </p:spPr>
-      </p:sp>
-      <p:sp>
-        <p:nvSpPr>
-          <p:cNvPr id="20" name="Text 18"/>
-          <p:cNvSpPr/>
-          <p:nvPr/>
-        </p:nvSpPr>
-        <p:spPr>
-          <a:xfrm>
-            <a:off x="7863840" y="4069080"/>
-            <a:ext cx="3017520" cy="164592"/>
-          </a:xfrm>
-          <a:prstGeom prst="rect">
-            <a:avLst/>
-          </a:prstGeom>
-          <a:noFill/>
-          <a:ln/>
-        </p:spPr>
-        <p:txBody>
-          <a:bodyPr wrap="square" lIns="0" tIns="0" rIns="0" bIns="0" rtlCol="0" anchor="ctr"/>
-          <a:lstStyle/>
-          <a:p>
-            <a:pPr algn="ctr" indent="0" marL="0">
-              <a:buNone/>
-            </a:pPr>
-            <a:r>
-              <a:rPr lang="en-US" sz="900" b="1" dirty="0">
-                <a:solidFill>
-                  <a:srgbClr val="003A63"/>
-                </a:solidFill>
-                <a:latin typeface="Aptos" pitchFamily="34" charset="0"/>
-                <a:ea typeface="Aptos" pitchFamily="34" charset="-122"/>
-                <a:cs typeface="Aptos" pitchFamily="34" charset="-120"/>
-              </a:rPr>
-              <a:t>Decision rights</a:t>
-            </a:r>
-            <a:endParaRPr lang="en-US" sz="900" dirty="0"/>
-          </a:p>
-        </p:txBody>
-      </p:sp>
-      <p:sp>
-        <p:nvSpPr>
-          <p:cNvPr id="21" name="Shape 19"/>
           <p:cNvSpPr/>
           <p:nvPr/>
         </p:nvSpPr>
@@ -18523,7 +17773,7 @@
       </p:sp>
       <p:sp>
         <p:nvSpPr>
-          <p:cNvPr id="22" name="Text 20"/>
+          <p:cNvPr id="17" name="Text 15"/>
           <p:cNvSpPr/>
           <p:nvPr/>
         </p:nvSpPr>
@@ -18562,7 +17812,7 @@
       </p:sp>
       <p:sp>
         <p:nvSpPr>
-          <p:cNvPr id="23" name="Text 21"/>
+          <p:cNvPr id="18" name="Text 16"/>
           <p:cNvSpPr/>
           <p:nvPr/>
         </p:nvSpPr>

--- a/downloads/presentations/modules/arc-340.pptx
+++ b/downloads/presentations/modules/arc-340.pptx
@@ -3443,49 +3443,58 @@
           <a:ln/>
         </p:spPr>
         <p:txBody>
-          <a:bodyPr wrap="square" lIns="635" tIns="635" rIns="635" bIns="635" rtlCol="0" anchor="t">
+          <a:bodyPr wrap="square" lIns="1016" tIns="1016" rIns="1016" bIns="1016" rtlCol="0" anchor="t">
             <a:normAutofit/>
           </a:bodyPr>
           <a:lstStyle/>
           <a:p>
+            <a:pPr indent="0" marL="0">
+              <a:buNone/>
+            </a:pPr>
             <a:r>
               <a:rPr lang="en-US" sz="2100" dirty="0">
                 <a:solidFill>
-                  <a:srgbClr val="17364A"/>
-                </a:solidFill>
-                <a:latin typeface="Aptos" pitchFamily="34" charset="0"/>
-                <a:ea typeface="Aptos" pitchFamily="34" charset="-122"/>
-                <a:cs typeface="Aptos" pitchFamily="34" charset="-120"/>
-              </a:rPr>
-              <a:t>Integration decisions determine whether AI becomes part of a reliable public health workflow or an.</a:t>
+                  <a:srgbClr val="003A63"/>
+                </a:solidFill>
+                <a:latin typeface="Aptos" pitchFamily="34" charset="0"/>
+                <a:ea typeface="Aptos" pitchFamily="34" charset="-122"/>
+                <a:cs typeface="Aptos" pitchFamily="34" charset="-120"/>
+              </a:rPr>
+              <a:t>• Integration decisions determine whether AI becomes part of a reliable public health workflow.</a:t>
             </a:r>
             <a:endParaRPr lang="en-US" sz="2100" dirty="0"/>
           </a:p>
           <a:p>
+            <a:pPr indent="0" marL="0">
+              <a:buNone/>
+            </a:pPr>
             <a:r>
               <a:rPr lang="en-US" sz="2100" dirty="0">
                 <a:solidFill>
-                  <a:srgbClr val="17364A"/>
-                </a:solidFill>
-                <a:latin typeface="Aptos" pitchFamily="34" charset="0"/>
-                <a:ea typeface="Aptos" pitchFamily="34" charset="-122"/>
-                <a:cs typeface="Aptos" pitchFamily="34" charset="-120"/>
-              </a:rPr>
-              <a:t>If staff must copy and paste sensitive information between systems, the AI tool may appear helpful.</a:t>
+                  <a:srgbClr val="003A63"/>
+                </a:solidFill>
+                <a:latin typeface="Aptos" pitchFamily="34" charset="0"/>
+                <a:ea typeface="Aptos" pitchFamily="34" charset="-122"/>
+                <a:cs typeface="Aptos" pitchFamily="34" charset="-120"/>
+              </a:rPr>
+              <a:t>• If staff must copy and paste sensitive information between systems, the AI tool may appear.</a:t>
             </a:r>
             <a:endParaRPr lang="en-US" sz="2100" dirty="0"/>
           </a:p>
           <a:p>
+            <a:pPr indent="0" marL="0">
+              <a:buNone/>
+            </a:pPr>
             <a:r>
               <a:rPr lang="en-US" sz="2100" dirty="0">
                 <a:solidFill>
-                  <a:srgbClr val="17364A"/>
-                </a:solidFill>
-                <a:latin typeface="Aptos" pitchFamily="34" charset="0"/>
-                <a:ea typeface="Aptos" pitchFamily="34" charset="-122"/>
-                <a:cs typeface="Aptos" pitchFamily="34" charset="-120"/>
-              </a:rPr>
-              <a:t>If an AI service writes back to a system of record without appropriate controls, a technical.</a:t>
+                  <a:srgbClr val="003A63"/>
+                </a:solidFill>
+                <a:latin typeface="Aptos" pitchFamily="34" charset="0"/>
+                <a:ea typeface="Aptos" pitchFamily="34" charset="-122"/>
+                <a:cs typeface="Aptos" pitchFamily="34" charset="-120"/>
+              </a:rPr>
+              <a:t>• If an AI service writes back to a system of record without appropriate controls, a technical.</a:t>
             </a:r>
             <a:endParaRPr lang="en-US" sz="2100" dirty="0"/>
           </a:p>
@@ -3565,17 +3574,17 @@
         </p:nvSpPr>
         <p:spPr>
           <a:xfrm>
-            <a:off x="7799832" y="1828800"/>
-            <a:ext cx="3145536" cy="685800"/>
-          </a:xfrm>
-          <a:prstGeom prst="rect">
-            <a:avLst/>
-          </a:prstGeom>
-          <a:noFill/>
-          <a:ln/>
-        </p:spPr>
-        <p:txBody>
-          <a:bodyPr wrap="square" lIns="0" tIns="0" rIns="0" bIns="0" rtlCol="0" anchor="t">
+            <a:off x="7799832" y="1801368"/>
+            <a:ext cx="3145536" cy="758952"/>
+          </a:xfrm>
+          <a:prstGeom prst="rect">
+            <a:avLst/>
+          </a:prstGeom>
+          <a:noFill/>
+          <a:ln/>
+        </p:spPr>
+        <p:txBody>
+          <a:bodyPr wrap="square" lIns="254" tIns="254" rIns="254" bIns="254" rtlCol="0" anchor="t">
             <a:normAutofit/>
           </a:bodyPr>
           <a:lstStyle/>
@@ -3584,7 +3593,7 @@
               <a:buNone/>
             </a:pPr>
             <a:r>
-              <a:rPr lang="en-US" sz="1550" dirty="0">
+              <a:rPr lang="en-US" sz="1320" dirty="0">
                 <a:solidFill>
                   <a:srgbClr val="17364A"/>
                 </a:solidFill>
@@ -3594,7 +3603,7 @@
               </a:rPr>
               <a:t>Integration decisions determine whether AI becomes part of a reliable public health workflow or an.</a:t>
             </a:r>
-            <a:endParaRPr lang="en-US" sz="1550" dirty="0"/>
+            <a:endParaRPr lang="en-US" sz="1320" dirty="0"/>
           </a:p>
         </p:txBody>
       </p:sp>
@@ -3682,13 +3691,16 @@
           <a:ln/>
         </p:spPr>
         <p:txBody>
-          <a:bodyPr wrap="square" lIns="254" tIns="254" rIns="254" bIns="254" rtlCol="0" anchor="t">
+          <a:bodyPr wrap="square" lIns="508" tIns="508" rIns="508" bIns="508" rtlCol="0" anchor="t">
             <a:normAutofit/>
           </a:bodyPr>
           <a:lstStyle/>
           <a:p>
-            <a:r>
-              <a:rPr lang="en-US" sz="1380" dirty="0">
+            <a:pPr indent="0" marL="0">
+              <a:buNone/>
+            </a:pPr>
+            <a:r>
+              <a:rPr lang="en-US" sz="1220" dirty="0">
                 <a:solidFill>
                   <a:srgbClr val="17364A"/>
                 </a:solidFill>
@@ -3696,13 +3708,16 @@
                 <a:ea typeface="Aptos" pitchFamily="34" charset="-122"/>
                 <a:cs typeface="Aptos" pitchFamily="34" charset="-120"/>
               </a:rPr>
-              <a:t>Integration decisions determine whether AI becomes part of a reliable public health.</a:t>
-            </a:r>
-            <a:endParaRPr lang="en-US" sz="1380" dirty="0"/>
-          </a:p>
-          <a:p>
-            <a:r>
-              <a:rPr lang="en-US" sz="1380" dirty="0">
+              <a:t>Integration decisions determine whether AI becomes part of a.</a:t>
+            </a:r>
+            <a:endParaRPr lang="en-US" sz="1220" dirty="0"/>
+          </a:p>
+          <a:p>
+            <a:pPr indent="0" marL="0">
+              <a:buNone/>
+            </a:pPr>
+            <a:r>
+              <a:rPr lang="en-US" sz="1220" dirty="0">
                 <a:solidFill>
                   <a:srgbClr val="17364A"/>
                 </a:solidFill>
@@ -3710,13 +3725,16 @@
                 <a:ea typeface="Aptos" pitchFamily="34" charset="-122"/>
                 <a:cs typeface="Aptos" pitchFamily="34" charset="-120"/>
               </a:rPr>
-              <a:t>If staff must copy and paste sensitive information between systems, the AI tool may appear.</a:t>
-            </a:r>
-            <a:endParaRPr lang="en-US" sz="1380" dirty="0"/>
-          </a:p>
-          <a:p>
-            <a:r>
-              <a:rPr lang="en-US" sz="1380" dirty="0">
+              <a:t>If staff must copy and paste sensitive information between.</a:t>
+            </a:r>
+            <a:endParaRPr lang="en-US" sz="1220" dirty="0"/>
+          </a:p>
+          <a:p>
+            <a:pPr indent="0" marL="0">
+              <a:buNone/>
+            </a:pPr>
+            <a:r>
+              <a:rPr lang="en-US" sz="1220" dirty="0">
                 <a:solidFill>
                   <a:srgbClr val="17364A"/>
                 </a:solidFill>
@@ -3724,9 +3742,9 @@
                 <a:ea typeface="Aptos" pitchFamily="34" charset="-122"/>
                 <a:cs typeface="Aptos" pitchFamily="34" charset="-120"/>
               </a:rPr>
-              <a:t>If an AI service writes back to a system of record without appropriate controls, a.</a:t>
-            </a:r>
-            <a:endParaRPr lang="en-US" sz="1380" dirty="0"/>
+              <a:t>If an AI service writes back to a system of record without.</a:t>
+            </a:r>
+            <a:endParaRPr lang="en-US" sz="1220" dirty="0"/>
           </a:p>
         </p:txBody>
       </p:sp>
@@ -3804,17 +3822,17 @@
         </p:nvSpPr>
         <p:spPr>
           <a:xfrm>
-            <a:off x="7799832" y="5001768"/>
-            <a:ext cx="3145536" cy="502920"/>
-          </a:xfrm>
-          <a:prstGeom prst="rect">
-            <a:avLst/>
-          </a:prstGeom>
-          <a:noFill/>
-          <a:ln/>
-        </p:spPr>
-        <p:txBody>
-          <a:bodyPr wrap="square" lIns="0" tIns="0" rIns="0" bIns="0" rtlCol="0" anchor="t">
+            <a:off x="7799832" y="4974336"/>
+            <a:ext cx="3145536" cy="576072"/>
+          </a:xfrm>
+          <a:prstGeom prst="rect">
+            <a:avLst/>
+          </a:prstGeom>
+          <a:noFill/>
+          <a:ln/>
+        </p:spPr>
+        <p:txBody>
+          <a:bodyPr wrap="square" lIns="254" tIns="254" rIns="254" bIns="254" rtlCol="0" anchor="t">
             <a:normAutofit/>
           </a:bodyPr>
           <a:lstStyle/>
@@ -3823,7 +3841,7 @@
               <a:buNone/>
             </a:pPr>
             <a:r>
-              <a:rPr lang="en-US" sz="1550" dirty="0">
+              <a:rPr lang="en-US" sz="1320" dirty="0">
                 <a:solidFill>
                   <a:srgbClr val="17364A"/>
                 </a:solidFill>
@@ -3831,9 +3849,9 @@
                 <a:ea typeface="Aptos" pitchFamily="34" charset="-122"/>
                 <a:cs typeface="Aptos" pitchFamily="34" charset="-120"/>
               </a:rPr>
-              <a:t>Connect the concept to public health purpose, responsible use, required safeguards, documentation, and the next action a department should take.</a:t>
-            </a:r>
-            <a:endParaRPr lang="en-US" sz="1550" dirty="0"/>
+              <a:t>Connect the concept to public health purpose, responsible use, required safeguards, documentation, and the next action a.</a:t>
+            </a:r>
+            <a:endParaRPr lang="en-US" sz="1320" dirty="0"/>
           </a:p>
         </p:txBody>
       </p:sp>
@@ -4134,49 +4152,58 @@
           <a:ln/>
         </p:spPr>
         <p:txBody>
-          <a:bodyPr wrap="square" lIns="635" tIns="635" rIns="635" bIns="635" rtlCol="0" anchor="t">
+          <a:bodyPr wrap="square" lIns="1016" tIns="1016" rIns="1016" bIns="1016" rtlCol="0" anchor="t">
             <a:normAutofit/>
           </a:bodyPr>
           <a:lstStyle/>
           <a:p>
+            <a:pPr indent="0" marL="0">
+              <a:buNone/>
+            </a:pPr>
             <a:r>
               <a:rPr lang="en-US" sz="2100" dirty="0">
                 <a:solidFill>
-                  <a:srgbClr val="17364A"/>
-                </a:solidFill>
-                <a:latin typeface="Aptos" pitchFamily="34" charset="0"/>
-                <a:ea typeface="Aptos" pitchFamily="34" charset="-122"/>
-                <a:cs typeface="Aptos" pitchFamily="34" charset="-120"/>
-              </a:rPr>
-              <a:t>A health department may want an AI assistant to summarize incoming case reports and create follow-up.</a:t>
+                  <a:srgbClr val="003A63"/>
+                </a:solidFill>
+                <a:latin typeface="Aptos" pitchFamily="34" charset="0"/>
+                <a:ea typeface="Aptos" pitchFamily="34" charset="-122"/>
+                <a:cs typeface="Aptos" pitchFamily="34" charset="-120"/>
+              </a:rPr>
+              <a:t>• A health department may want an AI assistant to summarize incoming case reports and create.</a:t>
             </a:r>
             <a:endParaRPr lang="en-US" sz="2100" dirty="0"/>
           </a:p>
           <a:p>
+            <a:pPr indent="0" marL="0">
+              <a:buNone/>
+            </a:pPr>
             <a:r>
               <a:rPr lang="en-US" sz="2100" dirty="0">
                 <a:solidFill>
-                  <a:srgbClr val="17364A"/>
-                </a:solidFill>
-                <a:latin typeface="Aptos" pitchFamily="34" charset="0"/>
-                <a:ea typeface="Aptos" pitchFamily="34" charset="-122"/>
-                <a:cs typeface="Aptos" pitchFamily="34" charset="-120"/>
-              </a:rPr>
-              <a:t>A weak integration pattern would require staff to export case data, paste it into an external tool,.</a:t>
+                  <a:srgbClr val="003A63"/>
+                </a:solidFill>
+                <a:latin typeface="Aptos" pitchFamily="34" charset="0"/>
+                <a:ea typeface="Aptos" pitchFamily="34" charset="-122"/>
+                <a:cs typeface="Aptos" pitchFamily="34" charset="-120"/>
+              </a:rPr>
+              <a:t>• A weak integration pattern would require staff to export case data, paste it into an external.</a:t>
             </a:r>
             <a:endParaRPr lang="en-US" sz="2100" dirty="0"/>
           </a:p>
           <a:p>
+            <a:pPr indent="0" marL="0">
+              <a:buNone/>
+            </a:pPr>
             <a:r>
               <a:rPr lang="en-US" sz="2100" dirty="0">
                 <a:solidFill>
-                  <a:srgbClr val="17364A"/>
-                </a:solidFill>
-                <a:latin typeface="Aptos" pitchFamily="34" charset="0"/>
-                <a:ea typeface="Aptos" pitchFamily="34" charset="-122"/>
-                <a:cs typeface="Aptos" pitchFamily="34" charset="-120"/>
-              </a:rPr>
-              <a:t>A stronger pattern would retrieve approved fields from the surveillance system, generate a draft.</a:t>
+                  <a:srgbClr val="003A63"/>
+                </a:solidFill>
+                <a:latin typeface="Aptos" pitchFamily="34" charset="0"/>
+                <a:ea typeface="Aptos" pitchFamily="34" charset="-122"/>
+                <a:cs typeface="Aptos" pitchFamily="34" charset="-120"/>
+              </a:rPr>
+              <a:t>• A stronger pattern would retrieve approved fields from the surveillance system, generate a.</a:t>
             </a:r>
             <a:endParaRPr lang="en-US" sz="2100" dirty="0"/>
           </a:p>
@@ -4256,17 +4283,17 @@
         </p:nvSpPr>
         <p:spPr>
           <a:xfrm>
-            <a:off x="7799832" y="1828800"/>
-            <a:ext cx="3145536" cy="685800"/>
-          </a:xfrm>
-          <a:prstGeom prst="rect">
-            <a:avLst/>
-          </a:prstGeom>
-          <a:noFill/>
-          <a:ln/>
-        </p:spPr>
-        <p:txBody>
-          <a:bodyPr wrap="square" lIns="0" tIns="0" rIns="0" bIns="0" rtlCol="0" anchor="t">
+            <a:off x="7799832" y="1801368"/>
+            <a:ext cx="3145536" cy="758952"/>
+          </a:xfrm>
+          <a:prstGeom prst="rect">
+            <a:avLst/>
+          </a:prstGeom>
+          <a:noFill/>
+          <a:ln/>
+        </p:spPr>
+        <p:txBody>
+          <a:bodyPr wrap="square" lIns="254" tIns="254" rIns="254" bIns="254" rtlCol="0" anchor="t">
             <a:normAutofit/>
           </a:bodyPr>
           <a:lstStyle/>
@@ -4275,7 +4302,7 @@
               <a:buNone/>
             </a:pPr>
             <a:r>
-              <a:rPr lang="en-US" sz="1550" dirty="0">
+              <a:rPr lang="en-US" sz="1320" dirty="0">
                 <a:solidFill>
                   <a:srgbClr val="17364A"/>
                 </a:solidFill>
@@ -4285,7 +4312,7 @@
               </a:rPr>
               <a:t>A health department may want an AI assistant to summarize incoming case reports and create follow-up.</a:t>
             </a:r>
-            <a:endParaRPr lang="en-US" sz="1550" dirty="0"/>
+            <a:endParaRPr lang="en-US" sz="1320" dirty="0"/>
           </a:p>
         </p:txBody>
       </p:sp>
@@ -4373,13 +4400,16 @@
           <a:ln/>
         </p:spPr>
         <p:txBody>
-          <a:bodyPr wrap="square" lIns="254" tIns="254" rIns="254" bIns="254" rtlCol="0" anchor="t">
+          <a:bodyPr wrap="square" lIns="508" tIns="508" rIns="508" bIns="508" rtlCol="0" anchor="t">
             <a:normAutofit/>
           </a:bodyPr>
           <a:lstStyle/>
           <a:p>
-            <a:r>
-              <a:rPr lang="en-US" sz="1380" dirty="0">
+            <a:pPr indent="0" marL="0">
+              <a:buNone/>
+            </a:pPr>
+            <a:r>
+              <a:rPr lang="en-US" sz="1220" dirty="0">
                 <a:solidFill>
                   <a:srgbClr val="17364A"/>
                 </a:solidFill>
@@ -4387,13 +4417,16 @@
                 <a:ea typeface="Aptos" pitchFamily="34" charset="-122"/>
                 <a:cs typeface="Aptos" pitchFamily="34" charset="-120"/>
               </a:rPr>
-              <a:t>A health department may want an AI assistant to summarize incoming case reports and create.</a:t>
-            </a:r>
-            <a:endParaRPr lang="en-US" sz="1380" dirty="0"/>
-          </a:p>
-          <a:p>
-            <a:r>
-              <a:rPr lang="en-US" sz="1380" dirty="0">
+              <a:t>A health department may want an AI assistant to summarize incoming.</a:t>
+            </a:r>
+            <a:endParaRPr lang="en-US" sz="1220" dirty="0"/>
+          </a:p>
+          <a:p>
+            <a:pPr indent="0" marL="0">
+              <a:buNone/>
+            </a:pPr>
+            <a:r>
+              <a:rPr lang="en-US" sz="1220" dirty="0">
                 <a:solidFill>
                   <a:srgbClr val="17364A"/>
                 </a:solidFill>
@@ -4401,13 +4434,16 @@
                 <a:ea typeface="Aptos" pitchFamily="34" charset="-122"/>
                 <a:cs typeface="Aptos" pitchFamily="34" charset="-120"/>
               </a:rPr>
-              <a:t>A weak integration pattern would require staff to export case data, paste it into an.</a:t>
-            </a:r>
-            <a:endParaRPr lang="en-US" sz="1380" dirty="0"/>
-          </a:p>
-          <a:p>
-            <a:r>
-              <a:rPr lang="en-US" sz="1380" dirty="0">
+              <a:t>A weak integration pattern would require staff to export case.</a:t>
+            </a:r>
+            <a:endParaRPr lang="en-US" sz="1220" dirty="0"/>
+          </a:p>
+          <a:p>
+            <a:pPr indent="0" marL="0">
+              <a:buNone/>
+            </a:pPr>
+            <a:r>
+              <a:rPr lang="en-US" sz="1220" dirty="0">
                 <a:solidFill>
                   <a:srgbClr val="17364A"/>
                 </a:solidFill>
@@ -4415,9 +4451,9 @@
                 <a:ea typeface="Aptos" pitchFamily="34" charset="-122"/>
                 <a:cs typeface="Aptos" pitchFamily="34" charset="-120"/>
               </a:rPr>
-              <a:t>A stronger pattern would retrieve approved fields from the surveillance system, generate a.</a:t>
-            </a:r>
-            <a:endParaRPr lang="en-US" sz="1380" dirty="0"/>
+              <a:t>A stronger pattern would retrieve approved fields from the.</a:t>
+            </a:r>
+            <a:endParaRPr lang="en-US" sz="1220" dirty="0"/>
           </a:p>
         </p:txBody>
       </p:sp>
@@ -4495,17 +4531,17 @@
         </p:nvSpPr>
         <p:spPr>
           <a:xfrm>
-            <a:off x="7799832" y="5001768"/>
-            <a:ext cx="3145536" cy="502920"/>
-          </a:xfrm>
-          <a:prstGeom prst="rect">
-            <a:avLst/>
-          </a:prstGeom>
-          <a:noFill/>
-          <a:ln/>
-        </p:spPr>
-        <p:txBody>
-          <a:bodyPr wrap="square" lIns="0" tIns="0" rIns="0" bIns="0" rtlCol="0" anchor="t">
+            <a:off x="7799832" y="4974336"/>
+            <a:ext cx="3145536" cy="576072"/>
+          </a:xfrm>
+          <a:prstGeom prst="rect">
+            <a:avLst/>
+          </a:prstGeom>
+          <a:noFill/>
+          <a:ln/>
+        </p:spPr>
+        <p:txBody>
+          <a:bodyPr wrap="square" lIns="254" tIns="254" rIns="254" bIns="254" rtlCol="0" anchor="t">
             <a:normAutofit/>
           </a:bodyPr>
           <a:lstStyle/>
@@ -4514,7 +4550,7 @@
               <a:buNone/>
             </a:pPr>
             <a:r>
-              <a:rPr lang="en-US" sz="1550" dirty="0">
+              <a:rPr lang="en-US" sz="1320" dirty="0">
                 <a:solidFill>
                   <a:srgbClr val="17364A"/>
                 </a:solidFill>
@@ -4522,9 +4558,9 @@
                 <a:ea typeface="Aptos" pitchFamily="34" charset="-122"/>
                 <a:cs typeface="Aptos" pitchFamily="34" charset="-120"/>
               </a:rPr>
-              <a:t>Connect the concept to public health purpose, responsible use, required safeguards, documentation, and the next action a department should take.</a:t>
-            </a:r>
-            <a:endParaRPr lang="en-US" sz="1550" dirty="0"/>
+              <a:t>Connect the concept to public health purpose, responsible use, required safeguards, documentation, and the next action a.</a:t>
+            </a:r>
+            <a:endParaRPr lang="en-US" sz="1320" dirty="0"/>
           </a:p>
         </p:txBody>
       </p:sp>
@@ -4825,49 +4861,58 @@
           <a:ln/>
         </p:spPr>
         <p:txBody>
-          <a:bodyPr wrap="square" lIns="635" tIns="635" rIns="635" bIns="635" rtlCol="0" anchor="t">
+          <a:bodyPr wrap="square" lIns="1016" tIns="1016" rIns="1016" bIns="1016" rtlCol="0" anchor="t">
             <a:normAutofit/>
           </a:bodyPr>
           <a:lstStyle/>
           <a:p>
+            <a:pPr indent="0" marL="0">
+              <a:buNone/>
+            </a:pPr>
             <a:r>
               <a:rPr lang="en-US" sz="2100" dirty="0">
                 <a:solidFill>
-                  <a:srgbClr val="17364A"/>
-                </a:solidFill>
-                <a:latin typeface="Aptos" pitchFamily="34" charset="0"/>
-                <a:ea typeface="Aptos" pitchFamily="34" charset="-122"/>
-                <a:cs typeface="Aptos" pitchFamily="34" charset="-120"/>
-              </a:rPr>
-              <a:t>Point-to-point interfaces connect two systems directly.</a:t>
+                  <a:srgbClr val="003A63"/>
+                </a:solidFill>
+                <a:latin typeface="Aptos" pitchFamily="34" charset="0"/>
+                <a:ea typeface="Aptos" pitchFamily="34" charset="-122"/>
+                <a:cs typeface="Aptos" pitchFamily="34" charset="-120"/>
+              </a:rPr>
+              <a:t>• Point-to-point interfaces connect two systems directly.</a:t>
             </a:r>
             <a:endParaRPr lang="en-US" sz="2100" dirty="0"/>
           </a:p>
           <a:p>
+            <a:pPr indent="0" marL="0">
+              <a:buNone/>
+            </a:pPr>
             <a:r>
               <a:rPr lang="en-US" sz="2100" dirty="0">
                 <a:solidFill>
-                  <a:srgbClr val="17364A"/>
-                </a:solidFill>
-                <a:latin typeface="Aptos" pitchFamily="34" charset="0"/>
-                <a:ea typeface="Aptos" pitchFamily="34" charset="-122"/>
-                <a:cs typeface="Aptos" pitchFamily="34" charset="-120"/>
-              </a:rPr>
-              <a:t>They can be useful when the exchange is stable and narrow, but they become difficult to maintain as the.</a:t>
+                  <a:srgbClr val="003A63"/>
+                </a:solidFill>
+                <a:latin typeface="Aptos" pitchFamily="34" charset="0"/>
+                <a:ea typeface="Aptos" pitchFamily="34" charset="-122"/>
+                <a:cs typeface="Aptos" pitchFamily="34" charset="-120"/>
+              </a:rPr>
+              <a:t>• They can be useful when the exchange is stable and narrow, but they become difficult to.</a:t>
             </a:r>
             <a:endParaRPr lang="en-US" sz="2100" dirty="0"/>
           </a:p>
           <a:p>
+            <a:pPr indent="0" marL="0">
+              <a:buNone/>
+            </a:pPr>
             <a:r>
               <a:rPr lang="en-US" sz="2100" dirty="0">
                 <a:solidFill>
-                  <a:srgbClr val="17364A"/>
-                </a:solidFill>
-                <a:latin typeface="Aptos" pitchFamily="34" charset="0"/>
-                <a:ea typeface="Aptos" pitchFamily="34" charset="-122"/>
-                <a:cs typeface="Aptos" pitchFamily="34" charset="-120"/>
-              </a:rPr>
-              <a:t>In public health, too many point-to-point connections can create brittle architecture, inconsistent.</a:t>
+                  <a:srgbClr val="003A63"/>
+                </a:solidFill>
+                <a:latin typeface="Aptos" pitchFamily="34" charset="0"/>
+                <a:ea typeface="Aptos" pitchFamily="34" charset="-122"/>
+                <a:cs typeface="Aptos" pitchFamily="34" charset="-120"/>
+              </a:rPr>
+              <a:t>• In public health, too many point-to-point connections can create brittle architecture,.</a:t>
             </a:r>
             <a:endParaRPr lang="en-US" sz="2100" dirty="0"/>
           </a:p>
@@ -4947,17 +4992,17 @@
         </p:nvSpPr>
         <p:spPr>
           <a:xfrm>
-            <a:off x="7799832" y="1828800"/>
-            <a:ext cx="3145536" cy="685800"/>
-          </a:xfrm>
-          <a:prstGeom prst="rect">
-            <a:avLst/>
-          </a:prstGeom>
-          <a:noFill/>
-          <a:ln/>
-        </p:spPr>
-        <p:txBody>
-          <a:bodyPr wrap="square" lIns="0" tIns="0" rIns="0" bIns="0" rtlCol="0" anchor="t">
+            <a:off x="7799832" y="1801368"/>
+            <a:ext cx="3145536" cy="758952"/>
+          </a:xfrm>
+          <a:prstGeom prst="rect">
+            <a:avLst/>
+          </a:prstGeom>
+          <a:noFill/>
+          <a:ln/>
+        </p:spPr>
+        <p:txBody>
+          <a:bodyPr wrap="square" lIns="254" tIns="254" rIns="254" bIns="254" rtlCol="0" anchor="t">
             <a:normAutofit/>
           </a:bodyPr>
           <a:lstStyle/>
@@ -4966,7 +5011,7 @@
               <a:buNone/>
             </a:pPr>
             <a:r>
-              <a:rPr lang="en-US" sz="1550" dirty="0">
+              <a:rPr lang="en-US" sz="1320" dirty="0">
                 <a:solidFill>
                   <a:srgbClr val="17364A"/>
                 </a:solidFill>
@@ -4976,7 +5021,7 @@
               </a:rPr>
               <a:t>Point-to-point interfaces connect two systems directly.</a:t>
             </a:r>
-            <a:endParaRPr lang="en-US" sz="1550" dirty="0"/>
+            <a:endParaRPr lang="en-US" sz="1320" dirty="0"/>
           </a:p>
         </p:txBody>
       </p:sp>
@@ -5064,13 +5109,16 @@
           <a:ln/>
         </p:spPr>
         <p:txBody>
-          <a:bodyPr wrap="square" lIns="254" tIns="254" rIns="254" bIns="254" rtlCol="0" anchor="t">
+          <a:bodyPr wrap="square" lIns="508" tIns="508" rIns="508" bIns="508" rtlCol="0" anchor="t">
             <a:normAutofit/>
           </a:bodyPr>
           <a:lstStyle/>
           <a:p>
-            <a:r>
-              <a:rPr lang="en-US" sz="1380" dirty="0">
+            <a:pPr indent="0" marL="0">
+              <a:buNone/>
+            </a:pPr>
+            <a:r>
+              <a:rPr lang="en-US" sz="1220" dirty="0">
                 <a:solidFill>
                   <a:srgbClr val="17364A"/>
                 </a:solidFill>
@@ -5078,13 +5126,16 @@
                 <a:ea typeface="Aptos" pitchFamily="34" charset="-122"/>
                 <a:cs typeface="Aptos" pitchFamily="34" charset="-120"/>
               </a:rPr>
-              <a:t>They can be useful when the exchange is stable and narrow, but they become difficult to.</a:t>
-            </a:r>
-            <a:endParaRPr lang="en-US" sz="1380" dirty="0"/>
-          </a:p>
-          <a:p>
-            <a:r>
-              <a:rPr lang="en-US" sz="1380" dirty="0">
+              <a:t>They can be useful when the exchange is stable and narrow, but.</a:t>
+            </a:r>
+            <a:endParaRPr lang="en-US" sz="1220" dirty="0"/>
+          </a:p>
+          <a:p>
+            <a:pPr indent="0" marL="0">
+              <a:buNone/>
+            </a:pPr>
+            <a:r>
+              <a:rPr lang="en-US" sz="1220" dirty="0">
                 <a:solidFill>
                   <a:srgbClr val="17364A"/>
                 </a:solidFill>
@@ -5092,13 +5143,16 @@
                 <a:ea typeface="Aptos" pitchFamily="34" charset="-122"/>
                 <a:cs typeface="Aptos" pitchFamily="34" charset="-120"/>
               </a:rPr>
-              <a:t>In public health, too many point-to-point connections can create brittle architecture,.</a:t>
-            </a:r>
-            <a:endParaRPr lang="en-US" sz="1380" dirty="0"/>
-          </a:p>
-          <a:p>
-            <a:r>
-              <a:rPr lang="en-US" sz="1380" dirty="0">
+              <a:t>In public health, too many point-to-point connections can create.</a:t>
+            </a:r>
+            <a:endParaRPr lang="en-US" sz="1220" dirty="0"/>
+          </a:p>
+          <a:p>
+            <a:pPr indent="0" marL="0">
+              <a:buNone/>
+            </a:pPr>
+            <a:r>
+              <a:rPr lang="en-US" sz="1220" dirty="0">
                 <a:solidFill>
                   <a:srgbClr val="17364A"/>
                 </a:solidFill>
@@ -5106,9 +5160,9 @@
                 <a:ea typeface="Aptos" pitchFamily="34" charset="-122"/>
                 <a:cs typeface="Aptos" pitchFamily="34" charset="-120"/>
               </a:rPr>
-              <a:t>Interface engines and message brokers support more scalable exchange.</a:t>
-            </a:r>
-            <a:endParaRPr lang="en-US" sz="1380" dirty="0"/>
+              <a:t>Interface engines and message brokers support more scalable.</a:t>
+            </a:r>
+            <a:endParaRPr lang="en-US" sz="1220" dirty="0"/>
           </a:p>
         </p:txBody>
       </p:sp>
@@ -5186,17 +5240,17 @@
         </p:nvSpPr>
         <p:spPr>
           <a:xfrm>
-            <a:off x="7799832" y="5001768"/>
-            <a:ext cx="3145536" cy="502920"/>
-          </a:xfrm>
-          <a:prstGeom prst="rect">
-            <a:avLst/>
-          </a:prstGeom>
-          <a:noFill/>
-          <a:ln/>
-        </p:spPr>
-        <p:txBody>
-          <a:bodyPr wrap="square" lIns="0" tIns="0" rIns="0" bIns="0" rtlCol="0" anchor="t">
+            <a:off x="7799832" y="4974336"/>
+            <a:ext cx="3145536" cy="576072"/>
+          </a:xfrm>
+          <a:prstGeom prst="rect">
+            <a:avLst/>
+          </a:prstGeom>
+          <a:noFill/>
+          <a:ln/>
+        </p:spPr>
+        <p:txBody>
+          <a:bodyPr wrap="square" lIns="254" tIns="254" rIns="254" bIns="254" rtlCol="0" anchor="t">
             <a:normAutofit/>
           </a:bodyPr>
           <a:lstStyle/>
@@ -5205,7 +5259,7 @@
               <a:buNone/>
             </a:pPr>
             <a:r>
-              <a:rPr lang="en-US" sz="1550" dirty="0">
+              <a:rPr lang="en-US" sz="1320" dirty="0">
                 <a:solidFill>
                   <a:srgbClr val="17364A"/>
                 </a:solidFill>
@@ -5213,9 +5267,9 @@
                 <a:ea typeface="Aptos" pitchFamily="34" charset="-122"/>
                 <a:cs typeface="Aptos" pitchFamily="34" charset="-120"/>
               </a:rPr>
-              <a:t>Connect the concept to public health purpose, responsible use, required safeguards, documentation, and the next action a department should take.</a:t>
-            </a:r>
-            <a:endParaRPr lang="en-US" sz="1550" dirty="0"/>
+              <a:t>Connect the concept to public health purpose, responsible use, required safeguards, documentation, and the next action a.</a:t>
+            </a:r>
+            <a:endParaRPr lang="en-US" sz="1320" dirty="0"/>
           </a:p>
         </p:txBody>
       </p:sp>
@@ -5516,49 +5570,58 @@
           <a:ln/>
         </p:spPr>
         <p:txBody>
-          <a:bodyPr wrap="square" lIns="635" tIns="635" rIns="635" bIns="635" rtlCol="0" anchor="t">
+          <a:bodyPr wrap="square" lIns="1016" tIns="1016" rIns="1016" bIns="1016" rtlCol="0" anchor="t">
             <a:normAutofit/>
           </a:bodyPr>
           <a:lstStyle/>
           <a:p>
+            <a:pPr indent="0" marL="0">
+              <a:buNone/>
+            </a:pPr>
             <a:r>
               <a:rPr lang="en-US" sz="2100" dirty="0">
                 <a:solidFill>
-                  <a:srgbClr val="17364A"/>
-                </a:solidFill>
-                <a:latin typeface="Aptos" pitchFamily="34" charset="0"/>
-                <a:ea typeface="Aptos" pitchFamily="34" charset="-122"/>
-                <a:cs typeface="Aptos" pitchFamily="34" charset="-120"/>
-              </a:rPr>
-              <a:t>A common failure mode is integration by workaround.</a:t>
+                  <a:srgbClr val="003A63"/>
+                </a:solidFill>
+                <a:latin typeface="Aptos" pitchFamily="34" charset="0"/>
+                <a:ea typeface="Aptos" pitchFamily="34" charset="-122"/>
+                <a:cs typeface="Aptos" pitchFamily="34" charset="-120"/>
+              </a:rPr>
+              <a:t>• A common failure mode is integration by workaround.</a:t>
             </a:r>
             <a:endParaRPr lang="en-US" sz="2100" dirty="0"/>
           </a:p>
           <a:p>
+            <a:pPr indent="0" marL="0">
+              <a:buNone/>
+            </a:pPr>
             <a:r>
               <a:rPr lang="en-US" sz="2100" dirty="0">
                 <a:solidFill>
-                  <a:srgbClr val="17364A"/>
-                </a:solidFill>
-                <a:latin typeface="Aptos" pitchFamily="34" charset="0"/>
-                <a:ea typeface="Aptos" pitchFamily="34" charset="-122"/>
-                <a:cs typeface="Aptos" pitchFamily="34" charset="-120"/>
-              </a:rPr>
-              <a:t>Staff may use manual exports, screenshots, shared drives, or copy-and-paste workflows when a tool is.</a:t>
+                  <a:srgbClr val="003A63"/>
+                </a:solidFill>
+                <a:latin typeface="Aptos" pitchFamily="34" charset="0"/>
+                <a:ea typeface="Aptos" pitchFamily="34" charset="-122"/>
+                <a:cs typeface="Aptos" pitchFamily="34" charset="-120"/>
+              </a:rPr>
+              <a:t>• Staff may use manual exports, screenshots, shared drives, or copy-and-paste workflows when a.</a:t>
             </a:r>
             <a:endParaRPr lang="en-US" sz="2100" dirty="0"/>
           </a:p>
           <a:p>
+            <a:pPr indent="0" marL="0">
+              <a:buNone/>
+            </a:pPr>
             <a:r>
               <a:rPr lang="en-US" sz="2100" dirty="0">
                 <a:solidFill>
-                  <a:srgbClr val="17364A"/>
-                </a:solidFill>
-                <a:latin typeface="Aptos" pitchFamily="34" charset="0"/>
-                <a:ea typeface="Aptos" pitchFamily="34" charset="-122"/>
-                <a:cs typeface="Aptos" pitchFamily="34" charset="-120"/>
-              </a:rPr>
-              <a:t>These practices can create privacy risk, version confusion, and gaps in the official record.</a:t>
+                  <a:srgbClr val="003A63"/>
+                </a:solidFill>
+                <a:latin typeface="Aptos" pitchFamily="34" charset="0"/>
+                <a:ea typeface="Aptos" pitchFamily="34" charset="-122"/>
+                <a:cs typeface="Aptos" pitchFamily="34" charset="-120"/>
+              </a:rPr>
+              <a:t>• These practices can create privacy risk, version confusion, and gaps in the official record.</a:t>
             </a:r>
             <a:endParaRPr lang="en-US" sz="2100" dirty="0"/>
           </a:p>
@@ -5638,17 +5701,17 @@
         </p:nvSpPr>
         <p:spPr>
           <a:xfrm>
-            <a:off x="7799832" y="1828800"/>
-            <a:ext cx="3145536" cy="685800"/>
-          </a:xfrm>
-          <a:prstGeom prst="rect">
-            <a:avLst/>
-          </a:prstGeom>
-          <a:noFill/>
-          <a:ln/>
-        </p:spPr>
-        <p:txBody>
-          <a:bodyPr wrap="square" lIns="0" tIns="0" rIns="0" bIns="0" rtlCol="0" anchor="t">
+            <a:off x="7799832" y="1801368"/>
+            <a:ext cx="3145536" cy="758952"/>
+          </a:xfrm>
+          <a:prstGeom prst="rect">
+            <a:avLst/>
+          </a:prstGeom>
+          <a:noFill/>
+          <a:ln/>
+        </p:spPr>
+        <p:txBody>
+          <a:bodyPr wrap="square" lIns="254" tIns="254" rIns="254" bIns="254" rtlCol="0" anchor="t">
             <a:normAutofit/>
           </a:bodyPr>
           <a:lstStyle/>
@@ -5657,7 +5720,7 @@
               <a:buNone/>
             </a:pPr>
             <a:r>
-              <a:rPr lang="en-US" sz="1550" dirty="0">
+              <a:rPr lang="en-US" sz="1320" dirty="0">
                 <a:solidFill>
                   <a:srgbClr val="17364A"/>
                 </a:solidFill>
@@ -5667,7 +5730,7 @@
               </a:rPr>
               <a:t>A common failure mode is integration by workaround.</a:t>
             </a:r>
-            <a:endParaRPr lang="en-US" sz="1550" dirty="0"/>
+            <a:endParaRPr lang="en-US" sz="1320" dirty="0"/>
           </a:p>
         </p:txBody>
       </p:sp>
@@ -5755,13 +5818,16 @@
           <a:ln/>
         </p:spPr>
         <p:txBody>
-          <a:bodyPr wrap="square" lIns="254" tIns="254" rIns="254" bIns="254" rtlCol="0" anchor="t">
+          <a:bodyPr wrap="square" lIns="508" tIns="508" rIns="508" bIns="508" rtlCol="0" anchor="t">
             <a:normAutofit/>
           </a:bodyPr>
           <a:lstStyle/>
           <a:p>
-            <a:r>
-              <a:rPr lang="en-US" sz="1380" dirty="0">
+            <a:pPr indent="0" marL="0">
+              <a:buNone/>
+            </a:pPr>
+            <a:r>
+              <a:rPr lang="en-US" sz="1220" dirty="0">
                 <a:solidFill>
                   <a:srgbClr val="17364A"/>
                 </a:solidFill>
@@ -5769,13 +5835,16 @@
                 <a:ea typeface="Aptos" pitchFamily="34" charset="-122"/>
                 <a:cs typeface="Aptos" pitchFamily="34" charset="-120"/>
               </a:rPr>
-              <a:t>Staff may use manual exports, screenshots, shared drives, or copy-and-paste workflows when.</a:t>
-            </a:r>
-            <a:endParaRPr lang="en-US" sz="1380" dirty="0"/>
-          </a:p>
-          <a:p>
-            <a:r>
-              <a:rPr lang="en-US" sz="1380" dirty="0">
+              <a:t>Staff may use manual exports, screenshots, shared drives, or.</a:t>
+            </a:r>
+            <a:endParaRPr lang="en-US" sz="1220" dirty="0"/>
+          </a:p>
+          <a:p>
+            <a:pPr indent="0" marL="0">
+              <a:buNone/>
+            </a:pPr>
+            <a:r>
+              <a:rPr lang="en-US" sz="1220" dirty="0">
                 <a:solidFill>
                   <a:srgbClr val="17364A"/>
                 </a:solidFill>
@@ -5783,13 +5852,16 @@
                 <a:ea typeface="Aptos" pitchFamily="34" charset="-122"/>
                 <a:cs typeface="Aptos" pitchFamily="34" charset="-120"/>
               </a:rPr>
-              <a:t>A guardrail is to require integration review before operational use and to document.</a:t>
-            </a:r>
-            <a:endParaRPr lang="en-US" sz="1380" dirty="0"/>
-          </a:p>
-          <a:p>
-            <a:r>
-              <a:rPr lang="en-US" sz="1380" dirty="0">
+              <a:t>A guardrail is to require integration review before operational.</a:t>
+            </a:r>
+            <a:endParaRPr lang="en-US" sz="1220" dirty="0"/>
+          </a:p>
+          <a:p>
+            <a:pPr indent="0" marL="0">
+              <a:buNone/>
+            </a:pPr>
+            <a:r>
+              <a:rPr lang="en-US" sz="1220" dirty="0">
                 <a:solidFill>
                   <a:srgbClr val="17364A"/>
                 </a:solidFill>
@@ -5799,7 +5871,7 @@
               </a:rPr>
               <a:t>Another failure mode is uncontrolled write-back.</a:t>
             </a:r>
-            <a:endParaRPr lang="en-US" sz="1380" dirty="0"/>
+            <a:endParaRPr lang="en-US" sz="1220" dirty="0"/>
           </a:p>
         </p:txBody>
       </p:sp>
@@ -5877,17 +5949,17 @@
         </p:nvSpPr>
         <p:spPr>
           <a:xfrm>
-            <a:off x="7799832" y="5001768"/>
-            <a:ext cx="3145536" cy="502920"/>
-          </a:xfrm>
-          <a:prstGeom prst="rect">
-            <a:avLst/>
-          </a:prstGeom>
-          <a:noFill/>
-          <a:ln/>
-        </p:spPr>
-        <p:txBody>
-          <a:bodyPr wrap="square" lIns="0" tIns="0" rIns="0" bIns="0" rtlCol="0" anchor="t">
+            <a:off x="7799832" y="4974336"/>
+            <a:ext cx="3145536" cy="576072"/>
+          </a:xfrm>
+          <a:prstGeom prst="rect">
+            <a:avLst/>
+          </a:prstGeom>
+          <a:noFill/>
+          <a:ln/>
+        </p:spPr>
+        <p:txBody>
+          <a:bodyPr wrap="square" lIns="254" tIns="254" rIns="254" bIns="254" rtlCol="0" anchor="t">
             <a:normAutofit/>
           </a:bodyPr>
           <a:lstStyle/>
@@ -5896,7 +5968,7 @@
               <a:buNone/>
             </a:pPr>
             <a:r>
-              <a:rPr lang="en-US" sz="1550" dirty="0">
+              <a:rPr lang="en-US" sz="1320" dirty="0">
                 <a:solidFill>
                   <a:srgbClr val="17364A"/>
                 </a:solidFill>
@@ -5904,9 +5976,9 @@
                 <a:ea typeface="Aptos" pitchFamily="34" charset="-122"/>
                 <a:cs typeface="Aptos" pitchFamily="34" charset="-120"/>
               </a:rPr>
-              <a:t>Identify what could go wrong, who could be affected, what safeguards are needed, and what evidence should be reviewed before use expands.</a:t>
-            </a:r>
-            <a:endParaRPr lang="en-US" sz="1550" dirty="0"/>
+              <a:t>Identify what could go wrong, who could be affected, what safeguards are needed, and what evidence should be reviewed.</a:t>
+            </a:r>
+            <a:endParaRPr lang="en-US" sz="1320" dirty="0"/>
           </a:p>
         </p:txBody>
       </p:sp>
@@ -6207,49 +6279,58 @@
           <a:ln/>
         </p:spPr>
         <p:txBody>
-          <a:bodyPr wrap="square" lIns="635" tIns="635" rIns="635" bIns="635" rtlCol="0" anchor="t">
+          <a:bodyPr wrap="square" lIns="1016" tIns="1016" rIns="1016" bIns="1016" rtlCol="0" anchor="t">
             <a:normAutofit/>
           </a:bodyPr>
           <a:lstStyle/>
           <a:p>
+            <a:pPr indent="0" marL="0">
+              <a:buNone/>
+            </a:pPr>
             <a:r>
               <a:rPr lang="en-US" sz="2100" dirty="0">
                 <a:solidFill>
-                  <a:srgbClr val="17364A"/>
-                </a:solidFill>
-                <a:latin typeface="Aptos" pitchFamily="34" charset="0"/>
-                <a:ea typeface="Aptos" pitchFamily="34" charset="-122"/>
-                <a:cs typeface="Aptos" pitchFamily="34" charset="-120"/>
-              </a:rPr>
-              <a:t>Generative AI may require integration with document repositories or systems of record so outputs can be.</a:t>
+                  <a:srgbClr val="003A63"/>
+                </a:solidFill>
+                <a:latin typeface="Aptos" pitchFamily="34" charset="0"/>
+                <a:ea typeface="Aptos" pitchFamily="34" charset="-122"/>
+                <a:cs typeface="Aptos" pitchFamily="34" charset="-120"/>
+              </a:rPr>
+              <a:t>• Generative AI may require integration with document repositories or systems of record so.</a:t>
             </a:r>
             <a:endParaRPr lang="en-US" sz="2100" dirty="0"/>
           </a:p>
           <a:p>
+            <a:pPr indent="0" marL="0">
+              <a:buNone/>
+            </a:pPr>
             <a:r>
               <a:rPr lang="en-US" sz="2100" dirty="0">
                 <a:solidFill>
-                  <a:srgbClr val="17364A"/>
-                </a:solidFill>
-                <a:latin typeface="Aptos" pitchFamily="34" charset="0"/>
-                <a:ea typeface="Aptos" pitchFamily="34" charset="-122"/>
-                <a:cs typeface="Aptos" pitchFamily="34" charset="-120"/>
-              </a:rPr>
-              <a:t>Predictive models may require scheduled data feeds and monitoring dashboards.</a:t>
+                  <a:srgbClr val="003A63"/>
+                </a:solidFill>
+                <a:latin typeface="Aptos" pitchFamily="34" charset="0"/>
+                <a:ea typeface="Aptos" pitchFamily="34" charset="-122"/>
+                <a:cs typeface="Aptos" pitchFamily="34" charset="-120"/>
+              </a:rPr>
+              <a:t>• Predictive models may require scheduled data feeds and monitoring dashboards.</a:t>
             </a:r>
             <a:endParaRPr lang="en-US" sz="2100" dirty="0"/>
           </a:p>
           <a:p>
+            <a:pPr indent="0" marL="0">
+              <a:buNone/>
+            </a:pPr>
             <a:r>
               <a:rPr lang="en-US" sz="2100" dirty="0">
                 <a:solidFill>
-                  <a:srgbClr val="17364A"/>
-                </a:solidFill>
-                <a:latin typeface="Aptos" pitchFamily="34" charset="0"/>
-                <a:ea typeface="Aptos" pitchFamily="34" charset="-122"/>
-                <a:cs typeface="Aptos" pitchFamily="34" charset="-120"/>
-              </a:rPr>
-              <a:t>Agentic workflows require the strongest integration controls because they may call tools, access data,.</a:t>
+                  <a:srgbClr val="003A63"/>
+                </a:solidFill>
+                <a:latin typeface="Aptos" pitchFamily="34" charset="0"/>
+                <a:ea typeface="Aptos" pitchFamily="34" charset="-122"/>
+                <a:cs typeface="Aptos" pitchFamily="34" charset="-120"/>
+              </a:rPr>
+              <a:t>• Agentic workflows require the strongest integration controls because they may call tools,.</a:t>
             </a:r>
             <a:endParaRPr lang="en-US" sz="2100" dirty="0"/>
           </a:p>
@@ -6329,17 +6410,17 @@
         </p:nvSpPr>
         <p:spPr>
           <a:xfrm>
-            <a:off x="7799832" y="1828800"/>
-            <a:ext cx="3145536" cy="685800"/>
-          </a:xfrm>
-          <a:prstGeom prst="rect">
-            <a:avLst/>
-          </a:prstGeom>
-          <a:noFill/>
-          <a:ln/>
-        </p:spPr>
-        <p:txBody>
-          <a:bodyPr wrap="square" lIns="0" tIns="0" rIns="0" bIns="0" rtlCol="0" anchor="t">
+            <a:off x="7799832" y="1801368"/>
+            <a:ext cx="3145536" cy="758952"/>
+          </a:xfrm>
+          <a:prstGeom prst="rect">
+            <a:avLst/>
+          </a:prstGeom>
+          <a:noFill/>
+          <a:ln/>
+        </p:spPr>
+        <p:txBody>
+          <a:bodyPr wrap="square" lIns="254" tIns="254" rIns="254" bIns="254" rtlCol="0" anchor="t">
             <a:normAutofit/>
           </a:bodyPr>
           <a:lstStyle/>
@@ -6348,7 +6429,7 @@
               <a:buNone/>
             </a:pPr>
             <a:r>
-              <a:rPr lang="en-US" sz="1550" dirty="0">
+              <a:rPr lang="en-US" sz="1320" dirty="0">
                 <a:solidFill>
                   <a:srgbClr val="17364A"/>
                 </a:solidFill>
@@ -6358,7 +6439,7 @@
               </a:rPr>
               <a:t>Generative AI may require integration with document repositories or systems of record so outputs can be.</a:t>
             </a:r>
-            <a:endParaRPr lang="en-US" sz="1550" dirty="0"/>
+            <a:endParaRPr lang="en-US" sz="1320" dirty="0"/>
           </a:p>
         </p:txBody>
       </p:sp>
@@ -6446,13 +6527,16 @@
           <a:ln/>
         </p:spPr>
         <p:txBody>
-          <a:bodyPr wrap="square" lIns="254" tIns="254" rIns="254" bIns="254" rtlCol="0" anchor="t">
+          <a:bodyPr wrap="square" lIns="508" tIns="508" rIns="508" bIns="508" rtlCol="0" anchor="t">
             <a:normAutofit/>
           </a:bodyPr>
           <a:lstStyle/>
           <a:p>
-            <a:r>
-              <a:rPr lang="en-US" sz="1380" dirty="0">
+            <a:pPr indent="0" marL="0">
+              <a:buNone/>
+            </a:pPr>
+            <a:r>
+              <a:rPr lang="en-US" sz="1220" dirty="0">
                 <a:solidFill>
                   <a:srgbClr val="17364A"/>
                 </a:solidFill>
@@ -6460,13 +6544,16 @@
                 <a:ea typeface="Aptos" pitchFamily="34" charset="-122"/>
                 <a:cs typeface="Aptos" pitchFamily="34" charset="-120"/>
               </a:rPr>
-              <a:t>Generative AI may require integration with document repositories or systems of record so.</a:t>
-            </a:r>
-            <a:endParaRPr lang="en-US" sz="1380" dirty="0"/>
-          </a:p>
-          <a:p>
-            <a:r>
-              <a:rPr lang="en-US" sz="1380" dirty="0">
+              <a:t>Generative AI may require integration with document repositories.</a:t>
+            </a:r>
+            <a:endParaRPr lang="en-US" sz="1220" dirty="0"/>
+          </a:p>
+          <a:p>
+            <a:pPr indent="0" marL="0">
+              <a:buNone/>
+            </a:pPr>
+            <a:r>
+              <a:rPr lang="en-US" sz="1220" dirty="0">
                 <a:solidFill>
                   <a:srgbClr val="17364A"/>
                 </a:solidFill>
@@ -6474,13 +6561,16 @@
                 <a:ea typeface="Aptos" pitchFamily="34" charset="-122"/>
                 <a:cs typeface="Aptos" pitchFamily="34" charset="-120"/>
               </a:rPr>
-              <a:t>Agentic workflows require the strongest integration controls because they may call tools,.</a:t>
-            </a:r>
-            <a:endParaRPr lang="en-US" sz="1380" dirty="0"/>
-          </a:p>
-          <a:p>
-            <a:r>
-              <a:rPr lang="en-US" sz="1380" dirty="0">
+              <a:t>Agentic workflows require the strongest integration controls.</a:t>
+            </a:r>
+            <a:endParaRPr lang="en-US" sz="1220" dirty="0"/>
+          </a:p>
+          <a:p>
+            <a:pPr indent="0" marL="0">
+              <a:buNone/>
+            </a:pPr>
+            <a:r>
+              <a:rPr lang="en-US" sz="1220" dirty="0">
                 <a:solidFill>
                   <a:srgbClr val="17364A"/>
                 </a:solidFill>
@@ -6488,9 +6578,9 @@
                 <a:ea typeface="Aptos" pitchFamily="34" charset="-122"/>
                 <a:cs typeface="Aptos" pitchFamily="34" charset="-120"/>
               </a:rPr>
-              <a:t>For each AI use case, the integration pattern should match the sensitivity and operational.</a:t>
-            </a:r>
-            <a:endParaRPr lang="en-US" sz="1380" dirty="0"/>
+              <a:t>For each AI use case, the integration pattern should match the.</a:t>
+            </a:r>
+            <a:endParaRPr lang="en-US" sz="1220" dirty="0"/>
           </a:p>
         </p:txBody>
       </p:sp>
@@ -6568,17 +6658,17 @@
         </p:nvSpPr>
         <p:spPr>
           <a:xfrm>
-            <a:off x="7799832" y="5001768"/>
-            <a:ext cx="3145536" cy="502920"/>
-          </a:xfrm>
-          <a:prstGeom prst="rect">
-            <a:avLst/>
-          </a:prstGeom>
-          <a:noFill/>
-          <a:ln/>
-        </p:spPr>
-        <p:txBody>
-          <a:bodyPr wrap="square" lIns="0" tIns="0" rIns="0" bIns="0" rtlCol="0" anchor="t">
+            <a:off x="7799832" y="4974336"/>
+            <a:ext cx="3145536" cy="576072"/>
+          </a:xfrm>
+          <a:prstGeom prst="rect">
+            <a:avLst/>
+          </a:prstGeom>
+          <a:noFill/>
+          <a:ln/>
+        </p:spPr>
+        <p:txBody>
+          <a:bodyPr wrap="square" lIns="254" tIns="254" rIns="254" bIns="254" rtlCol="0" anchor="t">
             <a:normAutofit/>
           </a:bodyPr>
           <a:lstStyle/>
@@ -6587,7 +6677,7 @@
               <a:buNone/>
             </a:pPr>
             <a:r>
-              <a:rPr lang="en-US" sz="1550" dirty="0">
+              <a:rPr lang="en-US" sz="1320" dirty="0">
                 <a:solidFill>
                   <a:srgbClr val="17364A"/>
                 </a:solidFill>
@@ -6595,9 +6685,9 @@
                 <a:ea typeface="Aptos" pitchFamily="34" charset="-122"/>
                 <a:cs typeface="Aptos" pitchFamily="34" charset="-120"/>
               </a:rPr>
-              <a:t>Use the concept to clarify workflow changes, dependencies, staffing, procurement requirements, training needs, and implementation checkpoints.</a:t>
-            </a:r>
-            <a:endParaRPr lang="en-US" sz="1550" dirty="0"/>
+              <a:t>Use the concept to clarify workflow changes, dependencies, staffing, procurement requirements, training needs, and.</a:t>
+            </a:r>
+            <a:endParaRPr lang="en-US" sz="1320" dirty="0"/>
           </a:p>
         </p:txBody>
       </p:sp>
@@ -6898,49 +6988,58 @@
           <a:ln/>
         </p:spPr>
         <p:txBody>
-          <a:bodyPr wrap="square" lIns="635" tIns="635" rIns="635" bIns="635" rtlCol="0" anchor="t">
+          <a:bodyPr wrap="square" lIns="1016" tIns="1016" rIns="1016" bIns="1016" rtlCol="0" anchor="t">
             <a:normAutofit/>
           </a:bodyPr>
           <a:lstStyle/>
           <a:p>
+            <a:pPr indent="0" marL="0">
+              <a:buNone/>
+            </a:pPr>
             <a:r>
               <a:rPr lang="en-US" sz="2100" dirty="0">
                 <a:solidFill>
-                  <a:srgbClr val="17364A"/>
-                </a:solidFill>
-                <a:latin typeface="Aptos" pitchFamily="34" charset="0"/>
-                <a:ea typeface="Aptos" pitchFamily="34" charset="-122"/>
-                <a:cs typeface="Aptos" pitchFamily="34" charset="-120"/>
-              </a:rPr>
-              <a:t>Which workflows currently depend on manual transfer between systems?</a:t>
+                  <a:srgbClr val="003A63"/>
+                </a:solidFill>
+                <a:latin typeface="Aptos" pitchFamily="34" charset="0"/>
+                <a:ea typeface="Aptos" pitchFamily="34" charset="-122"/>
+                <a:cs typeface="Aptos" pitchFamily="34" charset="-120"/>
+              </a:rPr>
+              <a:t>• Which workflows currently depend on manual transfer between systems?</a:t>
             </a:r>
             <a:endParaRPr lang="en-US" sz="2100" dirty="0"/>
           </a:p>
           <a:p>
+            <a:pPr indent="0" marL="0">
+              <a:buNone/>
+            </a:pPr>
             <a:r>
               <a:rPr lang="en-US" sz="2100" dirty="0">
                 <a:solidFill>
-                  <a:srgbClr val="17364A"/>
-                </a:solidFill>
-                <a:latin typeface="Aptos" pitchFamily="34" charset="0"/>
-                <a:ea typeface="Aptos" pitchFamily="34" charset="-122"/>
-                <a:cs typeface="Aptos" pitchFamily="34" charset="-120"/>
-              </a:rPr>
-              <a:t>Which systems are the official systems of record?</a:t>
+                  <a:srgbClr val="003A63"/>
+                </a:solidFill>
+                <a:latin typeface="Aptos" pitchFamily="34" charset="0"/>
+                <a:ea typeface="Aptos" pitchFamily="34" charset="-122"/>
+                <a:cs typeface="Aptos" pitchFamily="34" charset="-120"/>
+              </a:rPr>
+              <a:t>• Which systems are the official systems of record?</a:t>
             </a:r>
             <a:endParaRPr lang="en-US" sz="2100" dirty="0"/>
           </a:p>
           <a:p>
+            <a:pPr indent="0" marL="0">
+              <a:buNone/>
+            </a:pPr>
             <a:r>
               <a:rPr lang="en-US" sz="2100" dirty="0">
                 <a:solidFill>
-                  <a:srgbClr val="17364A"/>
-                </a:solidFill>
-                <a:latin typeface="Aptos" pitchFamily="34" charset="0"/>
-                <a:ea typeface="Aptos" pitchFamily="34" charset="-122"/>
-                <a:cs typeface="Aptos" pitchFamily="34" charset="-120"/>
-              </a:rPr>
-              <a:t>Where would API access reduce burden without increasing risk?</a:t>
+                  <a:srgbClr val="003A63"/>
+                </a:solidFill>
+                <a:latin typeface="Aptos" pitchFamily="34" charset="0"/>
+                <a:ea typeface="Aptos" pitchFamily="34" charset="-122"/>
+                <a:cs typeface="Aptos" pitchFamily="34" charset="-120"/>
+              </a:rPr>
+              <a:t>• Where would API access reduce burden without increasing risk?</a:t>
             </a:r>
             <a:endParaRPr lang="en-US" sz="2100" dirty="0"/>
           </a:p>
@@ -7020,17 +7119,17 @@
         </p:nvSpPr>
         <p:spPr>
           <a:xfrm>
-            <a:off x="7799832" y="1828800"/>
-            <a:ext cx="3145536" cy="685800"/>
-          </a:xfrm>
-          <a:prstGeom prst="rect">
-            <a:avLst/>
-          </a:prstGeom>
-          <a:noFill/>
-          <a:ln/>
-        </p:spPr>
-        <p:txBody>
-          <a:bodyPr wrap="square" lIns="0" tIns="0" rIns="0" bIns="0" rtlCol="0" anchor="t">
+            <a:off x="7799832" y="1801368"/>
+            <a:ext cx="3145536" cy="758952"/>
+          </a:xfrm>
+          <a:prstGeom prst="rect">
+            <a:avLst/>
+          </a:prstGeom>
+          <a:noFill/>
+          <a:ln/>
+        </p:spPr>
+        <p:txBody>
+          <a:bodyPr wrap="square" lIns="254" tIns="254" rIns="254" bIns="254" rtlCol="0" anchor="t">
             <a:normAutofit/>
           </a:bodyPr>
           <a:lstStyle/>
@@ -7039,7 +7138,7 @@
               <a:buNone/>
             </a:pPr>
             <a:r>
-              <a:rPr lang="en-US" sz="1550" dirty="0">
+              <a:rPr lang="en-US" sz="1320" dirty="0">
                 <a:solidFill>
                   <a:srgbClr val="17364A"/>
                 </a:solidFill>
@@ -7049,7 +7148,7 @@
               </a:rPr>
               <a:t>Which workflows currently depend on manual transfer between systems?</a:t>
             </a:r>
-            <a:endParaRPr lang="en-US" sz="1550" dirty="0"/>
+            <a:endParaRPr lang="en-US" sz="1320" dirty="0"/>
           </a:p>
         </p:txBody>
       </p:sp>
@@ -7137,13 +7236,16 @@
           <a:ln/>
         </p:spPr>
         <p:txBody>
-          <a:bodyPr wrap="square" lIns="254" tIns="254" rIns="254" bIns="254" rtlCol="0" anchor="t">
+          <a:bodyPr wrap="square" lIns="508" tIns="508" rIns="508" bIns="508" rtlCol="0" anchor="t">
             <a:normAutofit/>
           </a:bodyPr>
           <a:lstStyle/>
           <a:p>
-            <a:r>
-              <a:rPr lang="en-US" sz="1380" dirty="0">
+            <a:pPr indent="0" marL="0">
+              <a:buNone/>
+            </a:pPr>
+            <a:r>
+              <a:rPr lang="en-US" sz="1220" dirty="0">
                 <a:solidFill>
                   <a:srgbClr val="17364A"/>
                 </a:solidFill>
@@ -7153,11 +7255,14 @@
               </a:rPr>
               <a:t>Which workflows currently depend on manual transfer between systems?</a:t>
             </a:r>
-            <a:endParaRPr lang="en-US" sz="1380" dirty="0"/>
-          </a:p>
-          <a:p>
-            <a:r>
-              <a:rPr lang="en-US" sz="1380" dirty="0">
+            <a:endParaRPr lang="en-US" sz="1220" dirty="0"/>
+          </a:p>
+          <a:p>
+            <a:pPr indent="0" marL="0">
+              <a:buNone/>
+            </a:pPr>
+            <a:r>
+              <a:rPr lang="en-US" sz="1220" dirty="0">
                 <a:solidFill>
                   <a:srgbClr val="17364A"/>
                 </a:solidFill>
@@ -7167,11 +7272,14 @@
               </a:rPr>
               <a:t>Which systems are the official systems of record?</a:t>
             </a:r>
-            <a:endParaRPr lang="en-US" sz="1380" dirty="0"/>
-          </a:p>
-          <a:p>
-            <a:r>
-              <a:rPr lang="en-US" sz="1380" dirty="0">
+            <a:endParaRPr lang="en-US" sz="1220" dirty="0"/>
+          </a:p>
+          <a:p>
+            <a:pPr indent="0" marL="0">
+              <a:buNone/>
+            </a:pPr>
+            <a:r>
+              <a:rPr lang="en-US" sz="1220" dirty="0">
                 <a:solidFill>
                   <a:srgbClr val="17364A"/>
                 </a:solidFill>
@@ -7181,7 +7289,7 @@
               </a:rPr>
               <a:t>Where would API access reduce burden without increasing risk?</a:t>
             </a:r>
-            <a:endParaRPr lang="en-US" sz="1380" dirty="0"/>
+            <a:endParaRPr lang="en-US" sz="1220" dirty="0"/>
           </a:p>
         </p:txBody>
       </p:sp>
@@ -7259,17 +7367,17 @@
         </p:nvSpPr>
         <p:spPr>
           <a:xfrm>
-            <a:off x="7799832" y="5001768"/>
-            <a:ext cx="3145536" cy="502920"/>
-          </a:xfrm>
-          <a:prstGeom prst="rect">
-            <a:avLst/>
-          </a:prstGeom>
-          <a:noFill/>
-          <a:ln/>
-        </p:spPr>
-        <p:txBody>
-          <a:bodyPr wrap="square" lIns="0" tIns="0" rIns="0" bIns="0" rtlCol="0" anchor="t">
+            <a:off x="7799832" y="4974336"/>
+            <a:ext cx="3145536" cy="576072"/>
+          </a:xfrm>
+          <a:prstGeom prst="rect">
+            <a:avLst/>
+          </a:prstGeom>
+          <a:noFill/>
+          <a:ln/>
+        </p:spPr>
+        <p:txBody>
+          <a:bodyPr wrap="square" lIns="254" tIns="254" rIns="254" bIns="254" rtlCol="0" anchor="t">
             <a:normAutofit/>
           </a:bodyPr>
           <a:lstStyle/>
@@ -7278,7 +7386,7 @@
               <a:buNone/>
             </a:pPr>
             <a:r>
-              <a:rPr lang="en-US" sz="1550" dirty="0">
+              <a:rPr lang="en-US" sz="1320" dirty="0">
                 <a:solidFill>
                   <a:srgbClr val="17364A"/>
                 </a:solidFill>
@@ -7286,9 +7394,9 @@
                 <a:ea typeface="Aptos" pitchFamily="34" charset="-122"/>
                 <a:cs typeface="Aptos" pitchFamily="34" charset="-120"/>
               </a:rPr>
-              <a:t>Connect the concept to public health purpose, responsible use, required safeguards, documentation, and the next action a department should take.</a:t>
-            </a:r>
-            <a:endParaRPr lang="en-US" sz="1550" dirty="0"/>
+              <a:t>Connect the concept to public health purpose, responsible use, required safeguards, documentation, and the next action a.</a:t>
+            </a:r>
+            <a:endParaRPr lang="en-US" sz="1320" dirty="0"/>
           </a:p>
         </p:txBody>
       </p:sp>
@@ -7589,35 +7697,41 @@
           <a:ln/>
         </p:spPr>
         <p:txBody>
-          <a:bodyPr wrap="square" lIns="635" tIns="635" rIns="635" bIns="635" rtlCol="0" anchor="t">
+          <a:bodyPr wrap="square" lIns="1016" tIns="1016" rIns="1016" bIns="1016" rtlCol="0" anchor="t">
             <a:normAutofit/>
           </a:bodyPr>
           <a:lstStyle/>
           <a:p>
+            <a:pPr indent="0" marL="0">
+              <a:buNone/>
+            </a:pPr>
             <a:r>
               <a:rPr lang="en-US" sz="2100" dirty="0">
                 <a:solidFill>
-                  <a:srgbClr val="17364A"/>
-                </a:solidFill>
-                <a:latin typeface="Aptos" pitchFamily="34" charset="0"/>
-                <a:ea typeface="Aptos" pitchFamily="34" charset="-122"/>
-                <a:cs typeface="Aptos" pitchFamily="34" charset="-120"/>
-              </a:rPr>
-              <a:t>Which actions should remain read-only?</a:t>
+                  <a:srgbClr val="003A63"/>
+                </a:solidFill>
+                <a:latin typeface="Aptos" pitchFamily="34" charset="0"/>
+                <a:ea typeface="Aptos" pitchFamily="34" charset="-122"/>
+                <a:cs typeface="Aptos" pitchFamily="34" charset="-120"/>
+              </a:rPr>
+              <a:t>• Which actions should remain read-only?</a:t>
             </a:r>
             <a:endParaRPr lang="en-US" sz="2100" dirty="0"/>
           </a:p>
           <a:p>
+            <a:pPr indent="0" marL="0">
+              <a:buNone/>
+            </a:pPr>
             <a:r>
               <a:rPr lang="en-US" sz="2100" dirty="0">
                 <a:solidFill>
-                  <a:srgbClr val="17364A"/>
-                </a:solidFill>
-                <a:latin typeface="Aptos" pitchFamily="34" charset="0"/>
-                <a:ea typeface="Aptos" pitchFamily="34" charset="-122"/>
-                <a:cs typeface="Aptos" pitchFamily="34" charset="-120"/>
-              </a:rPr>
-              <a:t>What logs would be needed to reconstruct an AI-supported action?</a:t>
+                  <a:srgbClr val="003A63"/>
+                </a:solidFill>
+                <a:latin typeface="Aptos" pitchFamily="34" charset="0"/>
+                <a:ea typeface="Aptos" pitchFamily="34" charset="-122"/>
+                <a:cs typeface="Aptos" pitchFamily="34" charset="-120"/>
+              </a:rPr>
+              <a:t>• What logs would be needed to reconstruct an AI-supported action?</a:t>
             </a:r>
             <a:endParaRPr lang="en-US" sz="2100" dirty="0"/>
           </a:p>
@@ -7697,17 +7811,17 @@
         </p:nvSpPr>
         <p:spPr>
           <a:xfrm>
-            <a:off x="7799832" y="1828800"/>
-            <a:ext cx="3145536" cy="685800"/>
-          </a:xfrm>
-          <a:prstGeom prst="rect">
-            <a:avLst/>
-          </a:prstGeom>
-          <a:noFill/>
-          <a:ln/>
-        </p:spPr>
-        <p:txBody>
-          <a:bodyPr wrap="square" lIns="0" tIns="0" rIns="0" bIns="0" rtlCol="0" anchor="t">
+            <a:off x="7799832" y="1801368"/>
+            <a:ext cx="3145536" cy="758952"/>
+          </a:xfrm>
+          <a:prstGeom prst="rect">
+            <a:avLst/>
+          </a:prstGeom>
+          <a:noFill/>
+          <a:ln/>
+        </p:spPr>
+        <p:txBody>
+          <a:bodyPr wrap="square" lIns="254" tIns="254" rIns="254" bIns="254" rtlCol="0" anchor="t">
             <a:normAutofit/>
           </a:bodyPr>
           <a:lstStyle/>
@@ -7716,7 +7830,7 @@
               <a:buNone/>
             </a:pPr>
             <a:r>
-              <a:rPr lang="en-US" sz="1550" dirty="0">
+              <a:rPr lang="en-US" sz="1320" dirty="0">
                 <a:solidFill>
                   <a:srgbClr val="17364A"/>
                 </a:solidFill>
@@ -7726,7 +7840,7 @@
               </a:rPr>
               <a:t>Which actions should remain read-only?</a:t>
             </a:r>
-            <a:endParaRPr lang="en-US" sz="1550" dirty="0"/>
+            <a:endParaRPr lang="en-US" sz="1320" dirty="0"/>
           </a:p>
         </p:txBody>
       </p:sp>
@@ -7814,13 +7928,16 @@
           <a:ln/>
         </p:spPr>
         <p:txBody>
-          <a:bodyPr wrap="square" lIns="254" tIns="254" rIns="254" bIns="254" rtlCol="0" anchor="t">
+          <a:bodyPr wrap="square" lIns="508" tIns="508" rIns="508" bIns="508" rtlCol="0" anchor="t">
             <a:normAutofit/>
           </a:bodyPr>
           <a:lstStyle/>
           <a:p>
-            <a:r>
-              <a:rPr lang="en-US" sz="1380" dirty="0">
+            <a:pPr indent="0" marL="0">
+              <a:buNone/>
+            </a:pPr>
+            <a:r>
+              <a:rPr lang="en-US" sz="1220" dirty="0">
                 <a:solidFill>
                   <a:srgbClr val="17364A"/>
                 </a:solidFill>
@@ -7830,11 +7947,14 @@
               </a:rPr>
               <a:t>Which actions should remain read-only?</a:t>
             </a:r>
-            <a:endParaRPr lang="en-US" sz="1380" dirty="0"/>
-          </a:p>
-          <a:p>
-            <a:r>
-              <a:rPr lang="en-US" sz="1380" dirty="0">
+            <a:endParaRPr lang="en-US" sz="1220" dirty="0"/>
+          </a:p>
+          <a:p>
+            <a:pPr indent="0" marL="0">
+              <a:buNone/>
+            </a:pPr>
+            <a:r>
+              <a:rPr lang="en-US" sz="1220" dirty="0">
                 <a:solidFill>
                   <a:srgbClr val="17364A"/>
                 </a:solidFill>
@@ -7844,7 +7964,7 @@
               </a:rPr>
               <a:t>What logs would be needed to reconstruct an AI-supported action?</a:t>
             </a:r>
-            <a:endParaRPr lang="en-US" sz="1380" dirty="0"/>
+            <a:endParaRPr lang="en-US" sz="1220" dirty="0"/>
           </a:p>
         </p:txBody>
       </p:sp>
@@ -7922,17 +8042,17 @@
         </p:nvSpPr>
         <p:spPr>
           <a:xfrm>
-            <a:off x="7799832" y="5001768"/>
-            <a:ext cx="3145536" cy="502920"/>
-          </a:xfrm>
-          <a:prstGeom prst="rect">
-            <a:avLst/>
-          </a:prstGeom>
-          <a:noFill/>
-          <a:ln/>
-        </p:spPr>
-        <p:txBody>
-          <a:bodyPr wrap="square" lIns="0" tIns="0" rIns="0" bIns="0" rtlCol="0" anchor="t">
+            <a:off x="7799832" y="4974336"/>
+            <a:ext cx="3145536" cy="576072"/>
+          </a:xfrm>
+          <a:prstGeom prst="rect">
+            <a:avLst/>
+          </a:prstGeom>
+          <a:noFill/>
+          <a:ln/>
+        </p:spPr>
+        <p:txBody>
+          <a:bodyPr wrap="square" lIns="254" tIns="254" rIns="254" bIns="254" rtlCol="0" anchor="t">
             <a:normAutofit/>
           </a:bodyPr>
           <a:lstStyle/>
@@ -7941,7 +8061,7 @@
               <a:buNone/>
             </a:pPr>
             <a:r>
-              <a:rPr lang="en-US" sz="1550" dirty="0">
+              <a:rPr lang="en-US" sz="1320" dirty="0">
                 <a:solidFill>
                   <a:srgbClr val="17364A"/>
                 </a:solidFill>
@@ -7949,9 +8069,9 @@
                 <a:ea typeface="Aptos" pitchFamily="34" charset="-122"/>
                 <a:cs typeface="Aptos" pitchFamily="34" charset="-120"/>
               </a:rPr>
-              <a:t>Connect the concept to public health purpose, responsible use, required safeguards, documentation, and the next action a department should take.</a:t>
-            </a:r>
-            <a:endParaRPr lang="en-US" sz="1550" dirty="0"/>
+              <a:t>Connect the concept to public health purpose, responsible use, required safeguards, documentation, and the next action a.</a:t>
+            </a:r>
+            <a:endParaRPr lang="en-US" sz="1320" dirty="0"/>
           </a:p>
         </p:txBody>
       </p:sp>
@@ -8252,35 +8372,41 @@
           <a:ln/>
         </p:spPr>
         <p:txBody>
-          <a:bodyPr wrap="square" lIns="635" tIns="635" rIns="635" bIns="635" rtlCol="0" anchor="t">
+          <a:bodyPr wrap="square" lIns="1016" tIns="1016" rIns="1016" bIns="1016" rtlCol="0" anchor="t">
             <a:normAutofit/>
           </a:bodyPr>
           <a:lstStyle/>
           <a:p>
+            <a:pPr indent="0" marL="0">
+              <a:buNone/>
+            </a:pPr>
             <a:r>
               <a:rPr lang="en-US" sz="2100" dirty="0">
                 <a:solidFill>
-                  <a:srgbClr val="17364A"/>
-                </a:solidFill>
-                <a:latin typeface="Aptos" pitchFamily="34" charset="0"/>
-                <a:ea typeface="Aptos" pitchFamily="34" charset="-122"/>
-                <a:cs typeface="Aptos" pitchFamily="34" charset="-120"/>
-              </a:rPr>
-              <a:t>Create an integration pattern worksheet for one AI-supported workflow.</a:t>
+                  <a:srgbClr val="003A63"/>
+                </a:solidFill>
+                <a:latin typeface="Aptos" pitchFamily="34" charset="0"/>
+                <a:ea typeface="Aptos" pitchFamily="34" charset="-122"/>
+                <a:cs typeface="Aptos" pitchFamily="34" charset="-120"/>
+              </a:rPr>
+              <a:t>• Create an integration pattern worksheet for one AI-supported workflow.</a:t>
             </a:r>
             <a:endParaRPr lang="en-US" sz="2100" dirty="0"/>
           </a:p>
           <a:p>
+            <a:pPr indent="0" marL="0">
+              <a:buNone/>
+            </a:pPr>
             <a:r>
               <a:rPr lang="en-US" sz="2100" dirty="0">
                 <a:solidFill>
-                  <a:srgbClr val="17364A"/>
-                </a:solidFill>
-                <a:latin typeface="Aptos" pitchFamily="34" charset="0"/>
-                <a:ea typeface="Aptos" pitchFamily="34" charset="-122"/>
-                <a:cs typeface="Aptos" pitchFamily="34" charset="-120"/>
-              </a:rPr>
-              <a:t>Identify the systems involved, the data exchanged, the integration method, whether the AI tool is.</a:t>
+                  <a:srgbClr val="003A63"/>
+                </a:solidFill>
+                <a:latin typeface="Aptos" pitchFamily="34" charset="0"/>
+                <a:ea typeface="Aptos" pitchFamily="34" charset="-122"/>
+                <a:cs typeface="Aptos" pitchFamily="34" charset="-120"/>
+              </a:rPr>
+              <a:t>• Identify the systems involved, the data exchanged, the integration method, whether the AI tool.</a:t>
             </a:r>
             <a:endParaRPr lang="en-US" sz="2100" dirty="0"/>
           </a:p>
@@ -8360,17 +8486,17 @@
         </p:nvSpPr>
         <p:spPr>
           <a:xfrm>
-            <a:off x="7799832" y="1828800"/>
-            <a:ext cx="3145536" cy="685800"/>
-          </a:xfrm>
-          <a:prstGeom prst="rect">
-            <a:avLst/>
-          </a:prstGeom>
-          <a:noFill/>
-          <a:ln/>
-        </p:spPr>
-        <p:txBody>
-          <a:bodyPr wrap="square" lIns="0" tIns="0" rIns="0" bIns="0" rtlCol="0" anchor="t">
+            <a:off x="7799832" y="1801368"/>
+            <a:ext cx="3145536" cy="758952"/>
+          </a:xfrm>
+          <a:prstGeom prst="rect">
+            <a:avLst/>
+          </a:prstGeom>
+          <a:noFill/>
+          <a:ln/>
+        </p:spPr>
+        <p:txBody>
+          <a:bodyPr wrap="square" lIns="254" tIns="254" rIns="254" bIns="254" rtlCol="0" anchor="t">
             <a:normAutofit/>
           </a:bodyPr>
           <a:lstStyle/>
@@ -8379,7 +8505,7 @@
               <a:buNone/>
             </a:pPr>
             <a:r>
-              <a:rPr lang="en-US" sz="1550" dirty="0">
+              <a:rPr lang="en-US" sz="1320" dirty="0">
                 <a:solidFill>
                   <a:srgbClr val="17364A"/>
                 </a:solidFill>
@@ -8389,7 +8515,7 @@
               </a:rPr>
               <a:t>Create an integration pattern worksheet for one AI-supported workflow.</a:t>
             </a:r>
-            <a:endParaRPr lang="en-US" sz="1550" dirty="0"/>
+            <a:endParaRPr lang="en-US" sz="1320" dirty="0"/>
           </a:p>
         </p:txBody>
       </p:sp>
@@ -8477,13 +8603,16 @@
           <a:ln/>
         </p:spPr>
         <p:txBody>
-          <a:bodyPr wrap="square" lIns="254" tIns="254" rIns="254" bIns="254" rtlCol="0" anchor="t">
+          <a:bodyPr wrap="square" lIns="508" tIns="508" rIns="508" bIns="508" rtlCol="0" anchor="t">
             <a:normAutofit/>
           </a:bodyPr>
           <a:lstStyle/>
           <a:p>
-            <a:r>
-              <a:rPr lang="en-US" sz="1380" dirty="0">
+            <a:pPr indent="0" marL="0">
+              <a:buNone/>
+            </a:pPr>
+            <a:r>
+              <a:rPr lang="en-US" sz="1220" dirty="0">
                 <a:solidFill>
                   <a:srgbClr val="17364A"/>
                 </a:solidFill>
@@ -8491,13 +8620,16 @@
                 <a:ea typeface="Aptos" pitchFamily="34" charset="-122"/>
                 <a:cs typeface="Aptos" pitchFamily="34" charset="-120"/>
               </a:rPr>
-              <a:t>Create an integration pattern worksheet for one AI-supported workflow.</a:t>
-            </a:r>
-            <a:endParaRPr lang="en-US" sz="1380" dirty="0"/>
-          </a:p>
-          <a:p>
-            <a:r>
-              <a:rPr lang="en-US" sz="1380" dirty="0">
+              <a:t>Create an integration pattern worksheet for one AI-supported.</a:t>
+            </a:r>
+            <a:endParaRPr lang="en-US" sz="1220" dirty="0"/>
+          </a:p>
+          <a:p>
+            <a:pPr indent="0" marL="0">
+              <a:buNone/>
+            </a:pPr>
+            <a:r>
+              <a:rPr lang="en-US" sz="1220" dirty="0">
                 <a:solidFill>
                   <a:srgbClr val="17364A"/>
                 </a:solidFill>
@@ -8505,9 +8637,9 @@
                 <a:ea typeface="Aptos" pitchFamily="34" charset="-122"/>
                 <a:cs typeface="Aptos" pitchFamily="34" charset="-120"/>
               </a:rPr>
-              <a:t>Identify the systems involved, the data exchanged, the integration method, whether the AI.</a:t>
-            </a:r>
-            <a:endParaRPr lang="en-US" sz="1380" dirty="0"/>
+              <a:t>Identify the systems involved, the data exchanged, the integration.</a:t>
+            </a:r>
+            <a:endParaRPr lang="en-US" sz="1220" dirty="0"/>
           </a:p>
         </p:txBody>
       </p:sp>
@@ -8585,17 +8717,17 @@
         </p:nvSpPr>
         <p:spPr>
           <a:xfrm>
-            <a:off x="7799832" y="5001768"/>
-            <a:ext cx="3145536" cy="502920"/>
-          </a:xfrm>
-          <a:prstGeom prst="rect">
-            <a:avLst/>
-          </a:prstGeom>
-          <a:noFill/>
-          <a:ln/>
-        </p:spPr>
-        <p:txBody>
-          <a:bodyPr wrap="square" lIns="0" tIns="0" rIns="0" bIns="0" rtlCol="0" anchor="t">
+            <a:off x="7799832" y="4974336"/>
+            <a:ext cx="3145536" cy="576072"/>
+          </a:xfrm>
+          <a:prstGeom prst="rect">
+            <a:avLst/>
+          </a:prstGeom>
+          <a:noFill/>
+          <a:ln/>
+        </p:spPr>
+        <p:txBody>
+          <a:bodyPr wrap="square" lIns="254" tIns="254" rIns="254" bIns="254" rtlCol="0" anchor="t">
             <a:normAutofit/>
           </a:bodyPr>
           <a:lstStyle/>
@@ -8604,7 +8736,7 @@
               <a:buNone/>
             </a:pPr>
             <a:r>
-              <a:rPr lang="en-US" sz="1550" dirty="0">
+              <a:rPr lang="en-US" sz="1320" dirty="0">
                 <a:solidFill>
                   <a:srgbClr val="17364A"/>
                 </a:solidFill>
@@ -8612,9 +8744,9 @@
                 <a:ea typeface="Aptos" pitchFamily="34" charset="-122"/>
                 <a:cs typeface="Aptos" pitchFamily="34" charset="-120"/>
               </a:rPr>
-              <a:t>Use the assignment to test whether you can explain the concept, apply it to a realistic public health situation, and identify what would need review before the work moves forward.</a:t>
-            </a:r>
-            <a:endParaRPr lang="en-US" sz="1550" dirty="0"/>
+              <a:t>Use the assignment to test whether you can explain the concept, apply it to a realistic public health situation, and.</a:t>
+            </a:r>
+            <a:endParaRPr lang="en-US" sz="1320" dirty="0"/>
           </a:p>
         </p:txBody>
       </p:sp>
@@ -8915,49 +9047,58 @@
           <a:ln/>
         </p:spPr>
         <p:txBody>
-          <a:bodyPr wrap="square" lIns="635" tIns="635" rIns="635" bIns="635" rtlCol="0" anchor="t">
+          <a:bodyPr wrap="square" lIns="1016" tIns="1016" rIns="1016" bIns="1016" rtlCol="0" anchor="t">
             <a:normAutofit/>
           </a:bodyPr>
           <a:lstStyle/>
           <a:p>
+            <a:pPr indent="0" marL="0">
+              <a:buNone/>
+            </a:pPr>
             <a:r>
               <a:rPr lang="en-US" sz="2100" dirty="0">
                 <a:solidFill>
-                  <a:srgbClr val="17364A"/>
-                </a:solidFill>
-                <a:latin typeface="Aptos" pitchFamily="34" charset="0"/>
-                <a:ea typeface="Aptos" pitchFamily="34" charset="-122"/>
-                <a:cs typeface="Aptos" pitchFamily="34" charset="-120"/>
-              </a:rPr>
-              <a:t>Integration pattern worksheet</a:t>
+                  <a:srgbClr val="003A63"/>
+                </a:solidFill>
+                <a:latin typeface="Aptos" pitchFamily="34" charset="0"/>
+                <a:ea typeface="Aptos" pitchFamily="34" charset="-122"/>
+                <a:cs typeface="Aptos" pitchFamily="34" charset="-120"/>
+              </a:rPr>
+              <a:t>• Integration pattern worksheet</a:t>
             </a:r>
             <a:endParaRPr lang="en-US" sz="2100" dirty="0"/>
           </a:p>
           <a:p>
+            <a:pPr indent="0" marL="0">
+              <a:buNone/>
+            </a:pPr>
             <a:r>
               <a:rPr lang="en-US" sz="2100" dirty="0">
                 <a:solidFill>
-                  <a:srgbClr val="17364A"/>
-                </a:solidFill>
-                <a:latin typeface="Aptos" pitchFamily="34" charset="0"/>
-                <a:ea typeface="Aptos" pitchFamily="34" charset="-122"/>
-                <a:cs typeface="Aptos" pitchFamily="34" charset="-120"/>
-              </a:rPr>
-              <a:t>System-of-record and source-system list</a:t>
+                  <a:srgbClr val="003A63"/>
+                </a:solidFill>
+                <a:latin typeface="Aptos" pitchFamily="34" charset="0"/>
+                <a:ea typeface="Aptos" pitchFamily="34" charset="-122"/>
+                <a:cs typeface="Aptos" pitchFamily="34" charset="-120"/>
+              </a:rPr>
+              <a:t>• System-of-record and source-system list</a:t>
             </a:r>
             <a:endParaRPr lang="en-US" sz="2100" dirty="0"/>
           </a:p>
           <a:p>
+            <a:pPr indent="0" marL="0">
+              <a:buNone/>
+            </a:pPr>
             <a:r>
               <a:rPr lang="en-US" sz="2100" dirty="0">
                 <a:solidFill>
-                  <a:srgbClr val="17364A"/>
-                </a:solidFill>
-                <a:latin typeface="Aptos" pitchFamily="34" charset="0"/>
-                <a:ea typeface="Aptos" pitchFamily="34" charset="-122"/>
-                <a:cs typeface="Aptos" pitchFamily="34" charset="-120"/>
-              </a:rPr>
-              <a:t>Read/write permission recommendation</a:t>
+                  <a:srgbClr val="003A63"/>
+                </a:solidFill>
+                <a:latin typeface="Aptos" pitchFamily="34" charset="0"/>
+                <a:ea typeface="Aptos" pitchFamily="34" charset="-122"/>
+                <a:cs typeface="Aptos" pitchFamily="34" charset="-120"/>
+              </a:rPr>
+              <a:t>• Read/write permission recommendation</a:t>
             </a:r>
             <a:endParaRPr lang="en-US" sz="2100" dirty="0"/>
           </a:p>
@@ -9037,17 +9178,17 @@
         </p:nvSpPr>
         <p:spPr>
           <a:xfrm>
-            <a:off x="7799832" y="1828800"/>
-            <a:ext cx="3145536" cy="685800"/>
-          </a:xfrm>
-          <a:prstGeom prst="rect">
-            <a:avLst/>
-          </a:prstGeom>
-          <a:noFill/>
-          <a:ln/>
-        </p:spPr>
-        <p:txBody>
-          <a:bodyPr wrap="square" lIns="0" tIns="0" rIns="0" bIns="0" rtlCol="0" anchor="t">
+            <a:off x="7799832" y="1801368"/>
+            <a:ext cx="3145536" cy="758952"/>
+          </a:xfrm>
+          <a:prstGeom prst="rect">
+            <a:avLst/>
+          </a:prstGeom>
+          <a:noFill/>
+          <a:ln/>
+        </p:spPr>
+        <p:txBody>
+          <a:bodyPr wrap="square" lIns="254" tIns="254" rIns="254" bIns="254" rtlCol="0" anchor="t">
             <a:normAutofit/>
           </a:bodyPr>
           <a:lstStyle/>
@@ -9056,7 +9197,7 @@
               <a:buNone/>
             </a:pPr>
             <a:r>
-              <a:rPr lang="en-US" sz="1550" dirty="0">
+              <a:rPr lang="en-US" sz="1320" dirty="0">
                 <a:solidFill>
                   <a:srgbClr val="17364A"/>
                 </a:solidFill>
@@ -9066,7 +9207,7 @@
               </a:rPr>
               <a:t>Integration pattern worksheet</a:t>
             </a:r>
-            <a:endParaRPr lang="en-US" sz="1550" dirty="0"/>
+            <a:endParaRPr lang="en-US" sz="1320" dirty="0"/>
           </a:p>
         </p:txBody>
       </p:sp>
@@ -9154,13 +9295,16 @@
           <a:ln/>
         </p:spPr>
         <p:txBody>
-          <a:bodyPr wrap="square" lIns="254" tIns="254" rIns="254" bIns="254" rtlCol="0" anchor="t">
+          <a:bodyPr wrap="square" lIns="508" tIns="508" rIns="508" bIns="508" rtlCol="0" anchor="t">
             <a:normAutofit/>
           </a:bodyPr>
           <a:lstStyle/>
           <a:p>
-            <a:r>
-              <a:rPr lang="en-US" sz="1380" dirty="0">
+            <a:pPr indent="0" marL="0">
+              <a:buNone/>
+            </a:pPr>
+            <a:r>
+              <a:rPr lang="en-US" sz="1220" dirty="0">
                 <a:solidFill>
                   <a:srgbClr val="17364A"/>
                 </a:solidFill>
@@ -9170,11 +9314,14 @@
               </a:rPr>
               <a:t>Integration pattern worksheet</a:t>
             </a:r>
-            <a:endParaRPr lang="en-US" sz="1380" dirty="0"/>
-          </a:p>
-          <a:p>
-            <a:r>
-              <a:rPr lang="en-US" sz="1380" dirty="0">
+            <a:endParaRPr lang="en-US" sz="1220" dirty="0"/>
+          </a:p>
+          <a:p>
+            <a:pPr indent="0" marL="0">
+              <a:buNone/>
+            </a:pPr>
+            <a:r>
+              <a:rPr lang="en-US" sz="1220" dirty="0">
                 <a:solidFill>
                   <a:srgbClr val="17364A"/>
                 </a:solidFill>
@@ -9184,11 +9331,14 @@
               </a:rPr>
               <a:t>System-of-record and source-system list</a:t>
             </a:r>
-            <a:endParaRPr lang="en-US" sz="1380" dirty="0"/>
-          </a:p>
-          <a:p>
-            <a:r>
-              <a:rPr lang="en-US" sz="1380" dirty="0">
+            <a:endParaRPr lang="en-US" sz="1220" dirty="0"/>
+          </a:p>
+          <a:p>
+            <a:pPr indent="0" marL="0">
+              <a:buNone/>
+            </a:pPr>
+            <a:r>
+              <a:rPr lang="en-US" sz="1220" dirty="0">
                 <a:solidFill>
                   <a:srgbClr val="17364A"/>
                 </a:solidFill>
@@ -9198,7 +9348,7 @@
               </a:rPr>
               <a:t>Read/write permission recommendation</a:t>
             </a:r>
-            <a:endParaRPr lang="en-US" sz="1380" dirty="0"/>
+            <a:endParaRPr lang="en-US" sz="1220" dirty="0"/>
           </a:p>
         </p:txBody>
       </p:sp>
@@ -9276,17 +9426,17 @@
         </p:nvSpPr>
         <p:spPr>
           <a:xfrm>
-            <a:off x="7799832" y="5001768"/>
-            <a:ext cx="3145536" cy="502920"/>
-          </a:xfrm>
-          <a:prstGeom prst="rect">
-            <a:avLst/>
-          </a:prstGeom>
-          <a:noFill/>
-          <a:ln/>
-        </p:spPr>
-        <p:txBody>
-          <a:bodyPr wrap="square" lIns="0" tIns="0" rIns="0" bIns="0" rtlCol="0" anchor="t">
+            <a:off x="7799832" y="4974336"/>
+            <a:ext cx="3145536" cy="576072"/>
+          </a:xfrm>
+          <a:prstGeom prst="rect">
+            <a:avLst/>
+          </a:prstGeom>
+          <a:noFill/>
+          <a:ln/>
+        </p:spPr>
+        <p:txBody>
+          <a:bodyPr wrap="square" lIns="254" tIns="254" rIns="254" bIns="254" rtlCol="0" anchor="t">
             <a:normAutofit/>
           </a:bodyPr>
           <a:lstStyle/>
@@ -9295,7 +9445,7 @@
               <a:buNone/>
             </a:pPr>
             <a:r>
-              <a:rPr lang="en-US" sz="1550" dirty="0">
+              <a:rPr lang="en-US" sz="1320" dirty="0">
                 <a:solidFill>
                   <a:srgbClr val="17364A"/>
                 </a:solidFill>
@@ -9303,9 +9453,9 @@
                 <a:ea typeface="Aptos" pitchFamily="34" charset="-122"/>
                 <a:cs typeface="Aptos" pitchFamily="34" charset="-120"/>
               </a:rPr>
-              <a:t>Connect the concept to public health purpose, responsible use, required safeguards, documentation, and the next action a department should take.</a:t>
-            </a:r>
-            <a:endParaRPr lang="en-US" sz="1550" dirty="0"/>
+              <a:t>Connect the concept to public health purpose, responsible use, required safeguards, documentation, and the next action a.</a:t>
+            </a:r>
+            <a:endParaRPr lang="en-US" sz="1320" dirty="0"/>
           </a:p>
         </p:txBody>
       </p:sp>
@@ -9606,21 +9756,24 @@
           <a:ln/>
         </p:spPr>
         <p:txBody>
-          <a:bodyPr wrap="square" lIns="635" tIns="635" rIns="635" bIns="635" rtlCol="0" anchor="t">
+          <a:bodyPr wrap="square" lIns="1016" tIns="1016" rIns="1016" bIns="1016" rtlCol="0" anchor="t">
             <a:normAutofit/>
           </a:bodyPr>
           <a:lstStyle/>
           <a:p>
+            <a:pPr indent="0" marL="0">
+              <a:buNone/>
+            </a:pPr>
             <a:r>
               <a:rPr lang="en-US" sz="2100" dirty="0">
                 <a:solidFill>
-                  <a:srgbClr val="17364A"/>
-                </a:solidFill>
-                <a:latin typeface="Aptos" pitchFamily="34" charset="0"/>
-                <a:ea typeface="Aptos" pitchFamily="34" charset="-122"/>
-                <a:cs typeface="Aptos" pitchFamily="34" charset="-120"/>
-              </a:rPr>
-              <a:t>Error handling and audit log requirements</a:t>
+                  <a:srgbClr val="003A63"/>
+                </a:solidFill>
+                <a:latin typeface="Aptos" pitchFamily="34" charset="0"/>
+                <a:ea typeface="Aptos" pitchFamily="34" charset="-122"/>
+                <a:cs typeface="Aptos" pitchFamily="34" charset="-120"/>
+              </a:rPr>
+              <a:t>• Error handling and audit log requirements</a:t>
             </a:r>
             <a:endParaRPr lang="en-US" sz="2100" dirty="0"/>
           </a:p>
@@ -9700,17 +9853,17 @@
         </p:nvSpPr>
         <p:spPr>
           <a:xfrm>
-            <a:off x="7799832" y="1828800"/>
-            <a:ext cx="3145536" cy="685800"/>
-          </a:xfrm>
-          <a:prstGeom prst="rect">
-            <a:avLst/>
-          </a:prstGeom>
-          <a:noFill/>
-          <a:ln/>
-        </p:spPr>
-        <p:txBody>
-          <a:bodyPr wrap="square" lIns="0" tIns="0" rIns="0" bIns="0" rtlCol="0" anchor="t">
+            <a:off x="7799832" y="1801368"/>
+            <a:ext cx="3145536" cy="758952"/>
+          </a:xfrm>
+          <a:prstGeom prst="rect">
+            <a:avLst/>
+          </a:prstGeom>
+          <a:noFill/>
+          <a:ln/>
+        </p:spPr>
+        <p:txBody>
+          <a:bodyPr wrap="square" lIns="254" tIns="254" rIns="254" bIns="254" rtlCol="0" anchor="t">
             <a:normAutofit/>
           </a:bodyPr>
           <a:lstStyle/>
@@ -9719,7 +9872,7 @@
               <a:buNone/>
             </a:pPr>
             <a:r>
-              <a:rPr lang="en-US" sz="1550" dirty="0">
+              <a:rPr lang="en-US" sz="1320" dirty="0">
                 <a:solidFill>
                   <a:srgbClr val="17364A"/>
                 </a:solidFill>
@@ -9729,7 +9882,7 @@
               </a:rPr>
               <a:t>Error handling and audit log requirements</a:t>
             </a:r>
-            <a:endParaRPr lang="en-US" sz="1550" dirty="0"/>
+            <a:endParaRPr lang="en-US" sz="1320" dirty="0"/>
           </a:p>
         </p:txBody>
       </p:sp>
@@ -9817,13 +9970,16 @@
           <a:ln/>
         </p:spPr>
         <p:txBody>
-          <a:bodyPr wrap="square" lIns="254" tIns="254" rIns="254" bIns="254" rtlCol="0" anchor="t">
+          <a:bodyPr wrap="square" lIns="508" tIns="508" rIns="508" bIns="508" rtlCol="0" anchor="t">
             <a:normAutofit/>
           </a:bodyPr>
           <a:lstStyle/>
           <a:p>
-            <a:r>
-              <a:rPr lang="en-US" sz="1380" dirty="0">
+            <a:pPr indent="0" marL="0">
+              <a:buNone/>
+            </a:pPr>
+            <a:r>
+              <a:rPr lang="en-US" sz="1220" dirty="0">
                 <a:solidFill>
                   <a:srgbClr val="17364A"/>
                 </a:solidFill>
@@ -9833,7 +9989,7 @@
               </a:rPr>
               <a:t>Error handling and audit log requirements</a:t>
             </a:r>
-            <a:endParaRPr lang="en-US" sz="1380" dirty="0"/>
+            <a:endParaRPr lang="en-US" sz="1220" dirty="0"/>
           </a:p>
         </p:txBody>
       </p:sp>
@@ -9911,17 +10067,17 @@
         </p:nvSpPr>
         <p:spPr>
           <a:xfrm>
-            <a:off x="7799832" y="5001768"/>
-            <a:ext cx="3145536" cy="502920"/>
-          </a:xfrm>
-          <a:prstGeom prst="rect">
-            <a:avLst/>
-          </a:prstGeom>
-          <a:noFill/>
-          <a:ln/>
-        </p:spPr>
-        <p:txBody>
-          <a:bodyPr wrap="square" lIns="0" tIns="0" rIns="0" bIns="0" rtlCol="0" anchor="t">
+            <a:off x="7799832" y="4974336"/>
+            <a:ext cx="3145536" cy="576072"/>
+          </a:xfrm>
+          <a:prstGeom prst="rect">
+            <a:avLst/>
+          </a:prstGeom>
+          <a:noFill/>
+          <a:ln/>
+        </p:spPr>
+        <p:txBody>
+          <a:bodyPr wrap="square" lIns="254" tIns="254" rIns="254" bIns="254" rtlCol="0" anchor="t">
             <a:normAutofit/>
           </a:bodyPr>
           <a:lstStyle/>
@@ -9930,7 +10086,7 @@
               <a:buNone/>
             </a:pPr>
             <a:r>
-              <a:rPr lang="en-US" sz="1550" dirty="0">
+              <a:rPr lang="en-US" sz="1320" dirty="0">
                 <a:solidFill>
                   <a:srgbClr val="17364A"/>
                 </a:solidFill>
@@ -9938,9 +10094,9 @@
                 <a:ea typeface="Aptos" pitchFamily="34" charset="-122"/>
                 <a:cs typeface="Aptos" pitchFamily="34" charset="-120"/>
               </a:rPr>
-              <a:t>Connect the concept to public health purpose, responsible use, required safeguards, documentation, and the next action a department should take.</a:t>
-            </a:r>
-            <a:endParaRPr lang="en-US" sz="1550" dirty="0"/>
+              <a:t>Connect the concept to public health purpose, responsible use, required safeguards, documentation, and the next action a.</a:t>
+            </a:r>
+            <a:endParaRPr lang="en-US" sz="1320" dirty="0"/>
           </a:p>
         </p:txBody>
       </p:sp>
@@ -10241,49 +10397,58 @@
           <a:ln/>
         </p:spPr>
         <p:txBody>
-          <a:bodyPr wrap="square" lIns="635" tIns="635" rIns="635" bIns="635" rtlCol="0" anchor="t">
+          <a:bodyPr wrap="square" lIns="1016" tIns="1016" rIns="1016" bIns="1016" rtlCol="0" anchor="t">
             <a:normAutofit/>
           </a:bodyPr>
           <a:lstStyle/>
           <a:p>
+            <a:pPr indent="0" marL="0">
+              <a:buNone/>
+            </a:pPr>
             <a:r>
               <a:rPr lang="en-US" sz="2100" dirty="0">
                 <a:solidFill>
-                  <a:srgbClr val="17364A"/>
-                </a:solidFill>
-                <a:latin typeface="Aptos" pitchFamily="34" charset="0"/>
-                <a:ea typeface="Aptos" pitchFamily="34" charset="-122"/>
-                <a:cs typeface="Aptos" pitchFamily="34" charset="-120"/>
-              </a:rPr>
-              <a:t>Public health AI rarely succeeds as a stand-alone application.</a:t>
+                  <a:srgbClr val="003A63"/>
+                </a:solidFill>
+                <a:latin typeface="Aptos" pitchFamily="34" charset="0"/>
+                <a:ea typeface="Aptos" pitchFamily="34" charset="-122"/>
+                <a:cs typeface="Aptos" pitchFamily="34" charset="-120"/>
+              </a:rPr>
+              <a:t>• Public health AI rarely succeeds as a stand-alone application.</a:t>
             </a:r>
             <a:endParaRPr lang="en-US" sz="2100" dirty="0"/>
           </a:p>
           <a:p>
+            <a:pPr indent="0" marL="0">
+              <a:buNone/>
+            </a:pPr>
             <a:r>
               <a:rPr lang="en-US" sz="2100" dirty="0">
                 <a:solidFill>
-                  <a:srgbClr val="17364A"/>
-                </a:solidFill>
-                <a:latin typeface="Aptos" pitchFamily="34" charset="0"/>
-                <a:ea typeface="Aptos" pitchFamily="34" charset="-122"/>
-                <a:cs typeface="Aptos" pitchFamily="34" charset="-120"/>
-              </a:rPr>
-              <a:t>The value of an AI-supported workflow depends on how well it is integrated with systems of record, data exchange.</a:t>
+                  <a:srgbClr val="003A63"/>
+                </a:solidFill>
+                <a:latin typeface="Aptos" pitchFamily="34" charset="0"/>
+                <a:ea typeface="Aptos" pitchFamily="34" charset="-122"/>
+                <a:cs typeface="Aptos" pitchFamily="34" charset="-120"/>
+              </a:rPr>
+              <a:t>• The value of an AI-supported workflow depends on how well it is integrated with systems of.</a:t>
             </a:r>
             <a:endParaRPr lang="en-US" sz="2100" dirty="0"/>
           </a:p>
           <a:p>
+            <a:pPr indent="0" marL="0">
+              <a:buNone/>
+            </a:pPr>
             <a:r>
               <a:rPr lang="en-US" sz="2100" dirty="0">
                 <a:solidFill>
-                  <a:srgbClr val="17364A"/>
-                </a:solidFill>
-                <a:latin typeface="Aptos" pitchFamily="34" charset="0"/>
-                <a:ea typeface="Aptos" pitchFamily="34" charset="-122"/>
-                <a:cs typeface="Aptos" pitchFamily="34" charset="-120"/>
-              </a:rPr>
-              <a:t>This module helps learners understand the integration patterns that allow AI to support public health work.</a:t>
+                  <a:srgbClr val="003A63"/>
+                </a:solidFill>
+                <a:latin typeface="Aptos" pitchFamily="34" charset="0"/>
+                <a:ea typeface="Aptos" pitchFamily="34" charset="-122"/>
+                <a:cs typeface="Aptos" pitchFamily="34" charset="-120"/>
+              </a:rPr>
+              <a:t>• This module helps learners understand the integration patterns that allow AI to support public.</a:t>
             </a:r>
             <a:endParaRPr lang="en-US" sz="2100" dirty="0"/>
           </a:p>
@@ -10363,17 +10528,17 @@
         </p:nvSpPr>
         <p:spPr>
           <a:xfrm>
-            <a:off x="8074152" y="1920240"/>
-            <a:ext cx="2825496" cy="1280160"/>
-          </a:xfrm>
-          <a:prstGeom prst="rect">
-            <a:avLst/>
-          </a:prstGeom>
-          <a:noFill/>
-          <a:ln/>
-        </p:spPr>
-        <p:txBody>
-          <a:bodyPr wrap="square" lIns="0" tIns="0" rIns="0" bIns="0" rtlCol="0" anchor="t">
+            <a:off x="8074152" y="1892808"/>
+            <a:ext cx="2825496" cy="1353312"/>
+          </a:xfrm>
+          <a:prstGeom prst="rect">
+            <a:avLst/>
+          </a:prstGeom>
+          <a:noFill/>
+          <a:ln/>
+        </p:spPr>
+        <p:txBody>
+          <a:bodyPr wrap="square" lIns="254" tIns="254" rIns="254" bIns="254" rtlCol="0" anchor="t">
             <a:normAutofit/>
           </a:bodyPr>
           <a:lstStyle/>
@@ -10382,7 +10547,7 @@
               <a:buNone/>
             </a:pPr>
             <a:r>
-              <a:rPr lang="en-US" sz="1550" dirty="0">
+              <a:rPr lang="en-US" sz="1320" dirty="0">
                 <a:solidFill>
                   <a:srgbClr val="17364A"/>
                 </a:solidFill>
@@ -10390,43 +10555,9 @@
                 <a:ea typeface="Aptos" pitchFamily="34" charset="-122"/>
                 <a:cs typeface="Aptos" pitchFamily="34" charset="-120"/>
               </a:rPr>
-              <a:t>Level: intermediate/practitioner</a:t>
-            </a:r>
-            <a:endParaRPr lang="en-US" sz="1550" dirty="0"/>
-          </a:p>
-          <a:p>
-            <a:pPr indent="0" marL="0">
-              <a:buNone/>
-            </a:pPr>
-            <a:r>
-              <a:rPr lang="en-US" sz="1550" dirty="0">
-                <a:solidFill>
-                  <a:srgbClr val="17364A"/>
-                </a:solidFill>
-                <a:latin typeface="Aptos" pitchFamily="34" charset="0"/>
-                <a:ea typeface="Aptos" pitchFamily="34" charset="-122"/>
-                <a:cs typeface="Aptos" pitchFamily="34" charset="-120"/>
-              </a:rPr>
-              <a:t>Primary track: Technical Architecture Track</a:t>
-            </a:r>
-            <a:endParaRPr lang="en-US" sz="1550" dirty="0"/>
-          </a:p>
-          <a:p>
-            <a:pPr indent="0" marL="0">
-              <a:buNone/>
-            </a:pPr>
-            <a:r>
-              <a:rPr lang="en-US" sz="1550" dirty="0">
-                <a:solidFill>
-                  <a:srgbClr val="17364A"/>
-                </a:solidFill>
-                <a:latin typeface="Aptos" pitchFamily="34" charset="0"/>
-                <a:ea typeface="Aptos" pitchFamily="34" charset="-122"/>
-                <a:cs typeface="Aptos" pitchFamily="34" charset="-120"/>
-              </a:rPr>
-              <a:t>Appears in tracks: technical-architecture, operations-data-quality, program-management, governance-security</a:t>
-            </a:r>
-            <a:endParaRPr lang="en-US" sz="1550" dirty="0"/>
+              <a:t>Level: intermediate/practitioner Primary track: Technical Architecture Track Appears in tracks: technical-architecture,.</a:t>
+            </a:r>
+            <a:endParaRPr lang="en-US" sz="1320" dirty="0"/>
           </a:p>
         </p:txBody>
       </p:sp>
@@ -10514,13 +10645,16 @@
           <a:ln/>
         </p:spPr>
         <p:txBody>
-          <a:bodyPr wrap="square" lIns="254" tIns="254" rIns="254" bIns="254" rtlCol="0" anchor="t">
+          <a:bodyPr wrap="square" lIns="508" tIns="508" rIns="508" bIns="508" rtlCol="0" anchor="t">
             <a:normAutofit/>
           </a:bodyPr>
           <a:lstStyle/>
           <a:p>
-            <a:r>
-              <a:rPr lang="en-US" sz="1380" dirty="0">
+            <a:pPr indent="0" marL="0">
+              <a:buNone/>
+            </a:pPr>
+            <a:r>
+              <a:rPr lang="en-US" sz="1220" dirty="0">
                 <a:solidFill>
                   <a:srgbClr val="17364A"/>
                 </a:solidFill>
@@ -10530,11 +10664,14 @@
               </a:rPr>
               <a:t>Read the module for shared vocabulary and context.</a:t>
             </a:r>
-            <a:endParaRPr lang="en-US" sz="1380" dirty="0"/>
-          </a:p>
-          <a:p>
-            <a:r>
-              <a:rPr lang="en-US" sz="1380" dirty="0">
+            <a:endParaRPr lang="en-US" sz="1220" dirty="0"/>
+          </a:p>
+          <a:p>
+            <a:pPr indent="0" marL="0">
+              <a:buNone/>
+            </a:pPr>
+            <a:r>
+              <a:rPr lang="en-US" sz="1220" dirty="0">
                 <a:solidFill>
                   <a:srgbClr val="17364A"/>
                 </a:solidFill>
@@ -10544,11 +10681,14 @@
               </a:rPr>
               <a:t>Complete the practical exercise to apply the concept.</a:t>
             </a:r>
-            <a:endParaRPr lang="en-US" sz="1380" dirty="0"/>
-          </a:p>
-          <a:p>
-            <a:r>
-              <a:rPr lang="en-US" sz="1380" dirty="0">
+            <a:endParaRPr lang="en-US" sz="1220" dirty="0"/>
+          </a:p>
+          <a:p>
+            <a:pPr indent="0" marL="0">
+              <a:buNone/>
+            </a:pPr>
+            <a:r>
+              <a:rPr lang="en-US" sz="1220" dirty="0">
                 <a:solidFill>
                   <a:srgbClr val="17364A"/>
                 </a:solidFill>
@@ -10558,7 +10698,7 @@
               </a:rPr>
               <a:t>Use the notes and references for deeper review.</a:t>
             </a:r>
-            <a:endParaRPr lang="en-US" sz="1380" dirty="0"/>
+            <a:endParaRPr lang="en-US" sz="1220" dirty="0"/>
           </a:p>
         </p:txBody>
       </p:sp>
@@ -10859,49 +10999,58 @@
           <a:ln/>
         </p:spPr>
         <p:txBody>
-          <a:bodyPr wrap="square" lIns="635" tIns="635" rIns="635" bIns="635" rtlCol="0" anchor="t">
+          <a:bodyPr wrap="square" lIns="1016" tIns="1016" rIns="1016" bIns="1016" rtlCol="0" anchor="t">
             <a:normAutofit/>
           </a:bodyPr>
           <a:lstStyle/>
           <a:p>
+            <a:pPr indent="0" marL="0">
+              <a:buNone/>
+            </a:pPr>
             <a:r>
               <a:rPr lang="en-US" sz="2100" dirty="0">
                 <a:solidFill>
-                  <a:srgbClr val="17364A"/>
-                </a:solidFill>
-                <a:latin typeface="Aptos" pitchFamily="34" charset="0"/>
-                <a:ea typeface="Aptos" pitchFamily="34" charset="-122"/>
-                <a:cs typeface="Aptos" pitchFamily="34" charset="-120"/>
-              </a:rPr>
-              <a:t>Integration pattern worksheet</a:t>
+                  <a:srgbClr val="003A63"/>
+                </a:solidFill>
+                <a:latin typeface="Aptos" pitchFamily="34" charset="0"/>
+                <a:ea typeface="Aptos" pitchFamily="34" charset="-122"/>
+                <a:cs typeface="Aptos" pitchFamily="34" charset="-120"/>
+              </a:rPr>
+              <a:t>• Integration pattern worksheet</a:t>
             </a:r>
             <a:endParaRPr lang="en-US" sz="2100" dirty="0"/>
           </a:p>
           <a:p>
+            <a:pPr indent="0" marL="0">
+              <a:buNone/>
+            </a:pPr>
             <a:r>
               <a:rPr lang="en-US" sz="2100" dirty="0">
                 <a:solidFill>
-                  <a:srgbClr val="17364A"/>
-                </a:solidFill>
-                <a:latin typeface="Aptos" pitchFamily="34" charset="0"/>
-                <a:ea typeface="Aptos" pitchFamily="34" charset="-122"/>
-                <a:cs typeface="Aptos" pitchFamily="34" charset="-120"/>
-              </a:rPr>
-              <a:t>System-of-record and source-system list</a:t>
+                  <a:srgbClr val="003A63"/>
+                </a:solidFill>
+                <a:latin typeface="Aptos" pitchFamily="34" charset="0"/>
+                <a:ea typeface="Aptos" pitchFamily="34" charset="-122"/>
+                <a:cs typeface="Aptos" pitchFamily="34" charset="-120"/>
+              </a:rPr>
+              <a:t>• System-of-record and source-system list</a:t>
             </a:r>
             <a:endParaRPr lang="en-US" sz="2100" dirty="0"/>
           </a:p>
           <a:p>
+            <a:pPr indent="0" marL="0">
+              <a:buNone/>
+            </a:pPr>
             <a:r>
               <a:rPr lang="en-US" sz="2100" dirty="0">
                 <a:solidFill>
-                  <a:srgbClr val="17364A"/>
-                </a:solidFill>
-                <a:latin typeface="Aptos" pitchFamily="34" charset="0"/>
-                <a:ea typeface="Aptos" pitchFamily="34" charset="-122"/>
-                <a:cs typeface="Aptos" pitchFamily="34" charset="-120"/>
-              </a:rPr>
-              <a:t>Read/write permission recommendation</a:t>
+                  <a:srgbClr val="003A63"/>
+                </a:solidFill>
+                <a:latin typeface="Aptos" pitchFamily="34" charset="0"/>
+                <a:ea typeface="Aptos" pitchFamily="34" charset="-122"/>
+                <a:cs typeface="Aptos" pitchFamily="34" charset="-120"/>
+              </a:rPr>
+              <a:t>• Read/write permission recommendation</a:t>
             </a:r>
             <a:endParaRPr lang="en-US" sz="2100" dirty="0"/>
           </a:p>
@@ -10981,17 +11130,17 @@
         </p:nvSpPr>
         <p:spPr>
           <a:xfrm>
-            <a:off x="7799832" y="1828800"/>
-            <a:ext cx="3145536" cy="685800"/>
-          </a:xfrm>
-          <a:prstGeom prst="rect">
-            <a:avLst/>
-          </a:prstGeom>
-          <a:noFill/>
-          <a:ln/>
-        </p:spPr>
-        <p:txBody>
-          <a:bodyPr wrap="square" lIns="0" tIns="0" rIns="0" bIns="0" rtlCol="0" anchor="t">
+            <a:off x="7799832" y="1801368"/>
+            <a:ext cx="3145536" cy="758952"/>
+          </a:xfrm>
+          <a:prstGeom prst="rect">
+            <a:avLst/>
+          </a:prstGeom>
+          <a:noFill/>
+          <a:ln/>
+        </p:spPr>
+        <p:txBody>
+          <a:bodyPr wrap="square" lIns="254" tIns="254" rIns="254" bIns="254" rtlCol="0" anchor="t">
             <a:normAutofit/>
           </a:bodyPr>
           <a:lstStyle/>
@@ -11000,7 +11149,7 @@
               <a:buNone/>
             </a:pPr>
             <a:r>
-              <a:rPr lang="en-US" sz="1550" dirty="0">
+              <a:rPr lang="en-US" sz="1320" dirty="0">
                 <a:solidFill>
                   <a:srgbClr val="17364A"/>
                 </a:solidFill>
@@ -11010,7 +11159,7 @@
               </a:rPr>
               <a:t>Integration pattern worksheet</a:t>
             </a:r>
-            <a:endParaRPr lang="en-US" sz="1550" dirty="0"/>
+            <a:endParaRPr lang="en-US" sz="1320" dirty="0"/>
           </a:p>
         </p:txBody>
       </p:sp>
@@ -11098,13 +11247,16 @@
           <a:ln/>
         </p:spPr>
         <p:txBody>
-          <a:bodyPr wrap="square" lIns="254" tIns="254" rIns="254" bIns="254" rtlCol="0" anchor="t">
+          <a:bodyPr wrap="square" lIns="508" tIns="508" rIns="508" bIns="508" rtlCol="0" anchor="t">
             <a:normAutofit/>
           </a:bodyPr>
           <a:lstStyle/>
           <a:p>
-            <a:r>
-              <a:rPr lang="en-US" sz="1380" dirty="0">
+            <a:pPr indent="0" marL="0">
+              <a:buNone/>
+            </a:pPr>
+            <a:r>
+              <a:rPr lang="en-US" sz="1220" dirty="0">
                 <a:solidFill>
                   <a:srgbClr val="17364A"/>
                 </a:solidFill>
@@ -11114,11 +11266,14 @@
               </a:rPr>
               <a:t>Integration pattern worksheet</a:t>
             </a:r>
-            <a:endParaRPr lang="en-US" sz="1380" dirty="0"/>
-          </a:p>
-          <a:p>
-            <a:r>
-              <a:rPr lang="en-US" sz="1380" dirty="0">
+            <a:endParaRPr lang="en-US" sz="1220" dirty="0"/>
+          </a:p>
+          <a:p>
+            <a:pPr indent="0" marL="0">
+              <a:buNone/>
+            </a:pPr>
+            <a:r>
+              <a:rPr lang="en-US" sz="1220" dirty="0">
                 <a:solidFill>
                   <a:srgbClr val="17364A"/>
                 </a:solidFill>
@@ -11128,11 +11283,14 @@
               </a:rPr>
               <a:t>System-of-record and source-system list</a:t>
             </a:r>
-            <a:endParaRPr lang="en-US" sz="1380" dirty="0"/>
-          </a:p>
-          <a:p>
-            <a:r>
-              <a:rPr lang="en-US" sz="1380" dirty="0">
+            <a:endParaRPr lang="en-US" sz="1220" dirty="0"/>
+          </a:p>
+          <a:p>
+            <a:pPr indent="0" marL="0">
+              <a:buNone/>
+            </a:pPr>
+            <a:r>
+              <a:rPr lang="en-US" sz="1220" dirty="0">
                 <a:solidFill>
                   <a:srgbClr val="17364A"/>
                 </a:solidFill>
@@ -11142,7 +11300,7 @@
               </a:rPr>
               <a:t>Read/write permission recommendation</a:t>
             </a:r>
-            <a:endParaRPr lang="en-US" sz="1380" dirty="0"/>
+            <a:endParaRPr lang="en-US" sz="1220" dirty="0"/>
           </a:p>
         </p:txBody>
       </p:sp>
@@ -11220,17 +11378,17 @@
         </p:nvSpPr>
         <p:spPr>
           <a:xfrm>
-            <a:off x="7799832" y="5001768"/>
-            <a:ext cx="3145536" cy="502920"/>
-          </a:xfrm>
-          <a:prstGeom prst="rect">
-            <a:avLst/>
-          </a:prstGeom>
-          <a:noFill/>
-          <a:ln/>
-        </p:spPr>
-        <p:txBody>
-          <a:bodyPr wrap="square" lIns="0" tIns="0" rIns="0" bIns="0" rtlCol="0" anchor="t">
+            <a:off x="7799832" y="4974336"/>
+            <a:ext cx="3145536" cy="576072"/>
+          </a:xfrm>
+          <a:prstGeom prst="rect">
+            <a:avLst/>
+          </a:prstGeom>
+          <a:noFill/>
+          <a:ln/>
+        </p:spPr>
+        <p:txBody>
+          <a:bodyPr wrap="square" lIns="254" tIns="254" rIns="254" bIns="254" rtlCol="0" anchor="t">
             <a:normAutofit/>
           </a:bodyPr>
           <a:lstStyle/>
@@ -11239,7 +11397,7 @@
               <a:buNone/>
             </a:pPr>
             <a:r>
-              <a:rPr lang="en-US" sz="1550" dirty="0">
+              <a:rPr lang="en-US" sz="1320" dirty="0">
                 <a:solidFill>
                   <a:srgbClr val="17364A"/>
                 </a:solidFill>
@@ -11247,9 +11405,9 @@
                 <a:ea typeface="Aptos" pitchFamily="34" charset="-122"/>
                 <a:cs typeface="Aptos" pitchFamily="34" charset="-120"/>
               </a:rPr>
-              <a:t>Use the assignment to test whether you can explain the concept, apply it to a realistic public health situation, and identify what would need review before the work moves forward.</a:t>
-            </a:r>
-            <a:endParaRPr lang="en-US" sz="1550" dirty="0"/>
+              <a:t>Use the assignment to test whether you can explain the concept, apply it to a realistic public health situation, and.</a:t>
+            </a:r>
+            <a:endParaRPr lang="en-US" sz="1320" dirty="0"/>
           </a:p>
         </p:txBody>
       </p:sp>
@@ -11550,49 +11708,58 @@
           <a:ln/>
         </p:spPr>
         <p:txBody>
-          <a:bodyPr wrap="square" lIns="635" tIns="635" rIns="635" bIns="635" rtlCol="0" anchor="t">
+          <a:bodyPr wrap="square" lIns="1016" tIns="1016" rIns="1016" bIns="1016" rtlCol="0" anchor="t">
             <a:normAutofit/>
           </a:bodyPr>
           <a:lstStyle/>
           <a:p>
+            <a:pPr indent="0" marL="0">
+              <a:buNone/>
+            </a:pPr>
             <a:r>
               <a:rPr lang="en-US" sz="2100" dirty="0">
                 <a:solidFill>
-                  <a:srgbClr val="17364A"/>
-                </a:solidFill>
-                <a:latin typeface="Aptos" pitchFamily="34" charset="0"/>
-                <a:ea typeface="Aptos" pitchFamily="34" charset="-122"/>
-                <a:cs typeface="Aptos" pitchFamily="34" charset="-120"/>
-              </a:rPr>
-              <a:t>1. Which integration risk is most concerning for an AI tool that can update a case record?</a:t>
+                  <a:srgbClr val="003A63"/>
+                </a:solidFill>
+                <a:latin typeface="Aptos" pitchFamily="34" charset="0"/>
+                <a:ea typeface="Aptos" pitchFamily="34" charset="-122"/>
+                <a:cs typeface="Aptos" pitchFamily="34" charset="-120"/>
+              </a:rPr>
+              <a:t>• 1. Which integration risk is most concerning for an AI tool that can update a case record?</a:t>
             </a:r>
             <a:endParaRPr lang="en-US" sz="2100" dirty="0"/>
           </a:p>
           <a:p>
+            <a:pPr indent="0" marL="0">
+              <a:buNone/>
+            </a:pPr>
             <a:r>
               <a:rPr lang="en-US" sz="2100" dirty="0">
                 <a:solidFill>
-                  <a:srgbClr val="17364A"/>
-                </a:solidFill>
-                <a:latin typeface="Aptos" pitchFamily="34" charset="0"/>
-                <a:ea typeface="Aptos" pitchFamily="34" charset="-122"/>
-                <a:cs typeface="Aptos" pitchFamily="34" charset="-120"/>
-              </a:rPr>
-              <a:t>2. What is the best reason to assign an accountability owner?</a:t>
+                  <a:srgbClr val="003A63"/>
+                </a:solidFill>
+                <a:latin typeface="Aptos" pitchFamily="34" charset="0"/>
+                <a:ea typeface="Aptos" pitchFamily="34" charset="-122"/>
+                <a:cs typeface="Aptos" pitchFamily="34" charset="-120"/>
+              </a:rPr>
+              <a:t>• 2. What is the best reason to assign an accountability owner?</a:t>
             </a:r>
             <a:endParaRPr lang="en-US" sz="2100" dirty="0"/>
           </a:p>
           <a:p>
+            <a:pPr indent="0" marL="0">
+              <a:buNone/>
+            </a:pPr>
             <a:r>
               <a:rPr lang="en-US" sz="2100" dirty="0">
                 <a:solidFill>
-                  <a:srgbClr val="17364A"/>
-                </a:solidFill>
-                <a:latin typeface="Aptos" pitchFamily="34" charset="0"/>
-                <a:ea typeface="Aptos" pitchFamily="34" charset="-122"/>
-                <a:cs typeface="Aptos" pitchFamily="34" charset="-120"/>
-              </a:rPr>
-              <a:t>3. When should an AI-supported workflow be escalated for review?</a:t>
+                  <a:srgbClr val="003A63"/>
+                </a:solidFill>
+                <a:latin typeface="Aptos" pitchFamily="34" charset="0"/>
+                <a:ea typeface="Aptos" pitchFamily="34" charset="-122"/>
+                <a:cs typeface="Aptos" pitchFamily="34" charset="-120"/>
+              </a:rPr>
+              <a:t>• 3. When should an AI-supported workflow be escalated for review?</a:t>
             </a:r>
             <a:endParaRPr lang="en-US" sz="2100" dirty="0"/>
           </a:p>
@@ -11672,17 +11839,17 @@
         </p:nvSpPr>
         <p:spPr>
           <a:xfrm>
-            <a:off x="7799832" y="1828800"/>
-            <a:ext cx="3145536" cy="685800"/>
-          </a:xfrm>
-          <a:prstGeom prst="rect">
-            <a:avLst/>
-          </a:prstGeom>
-          <a:noFill/>
-          <a:ln/>
-        </p:spPr>
-        <p:txBody>
-          <a:bodyPr wrap="square" lIns="0" tIns="0" rIns="0" bIns="0" rtlCol="0" anchor="t">
+            <a:off x="7799832" y="1801368"/>
+            <a:ext cx="3145536" cy="758952"/>
+          </a:xfrm>
+          <a:prstGeom prst="rect">
+            <a:avLst/>
+          </a:prstGeom>
+          <a:noFill/>
+          <a:ln/>
+        </p:spPr>
+        <p:txBody>
+          <a:bodyPr wrap="square" lIns="254" tIns="254" rIns="254" bIns="254" rtlCol="0" anchor="t">
             <a:normAutofit/>
           </a:bodyPr>
           <a:lstStyle/>
@@ -11691,7 +11858,7 @@
               <a:buNone/>
             </a:pPr>
             <a:r>
-              <a:rPr lang="en-US" sz="1550" dirty="0">
+              <a:rPr lang="en-US" sz="1320" dirty="0">
                 <a:solidFill>
                   <a:srgbClr val="17364A"/>
                 </a:solidFill>
@@ -11701,7 +11868,7 @@
               </a:rPr>
               <a:t>1. Which integration risk is most concerning for an AI tool that can update a case record?</a:t>
             </a:r>
-            <a:endParaRPr lang="en-US" sz="1550" dirty="0"/>
+            <a:endParaRPr lang="en-US" sz="1320" dirty="0"/>
           </a:p>
         </p:txBody>
       </p:sp>
@@ -11789,13 +11956,16 @@
           <a:ln/>
         </p:spPr>
         <p:txBody>
-          <a:bodyPr wrap="square" lIns="254" tIns="254" rIns="254" bIns="254" rtlCol="0" anchor="t">
+          <a:bodyPr wrap="square" lIns="508" tIns="508" rIns="508" bIns="508" rtlCol="0" anchor="t">
             <a:normAutofit/>
           </a:bodyPr>
           <a:lstStyle/>
           <a:p>
-            <a:r>
-              <a:rPr lang="en-US" sz="1380" dirty="0">
+            <a:pPr indent="0" marL="0">
+              <a:buNone/>
+            </a:pPr>
+            <a:r>
+              <a:rPr lang="en-US" sz="1220" dirty="0">
                 <a:solidFill>
                   <a:srgbClr val="17364A"/>
                 </a:solidFill>
@@ -11805,11 +11975,14 @@
               </a:rPr>
               <a:t>1.</a:t>
             </a:r>
-            <a:endParaRPr lang="en-US" sz="1380" dirty="0"/>
-          </a:p>
-          <a:p>
-            <a:r>
-              <a:rPr lang="en-US" sz="1380" dirty="0">
+            <a:endParaRPr lang="en-US" sz="1220" dirty="0"/>
+          </a:p>
+          <a:p>
+            <a:pPr indent="0" marL="0">
+              <a:buNone/>
+            </a:pPr>
+            <a:r>
+              <a:rPr lang="en-US" sz="1220" dirty="0">
                 <a:solidFill>
                   <a:srgbClr val="17364A"/>
                 </a:solidFill>
@@ -11817,13 +11990,16 @@
                 <a:ea typeface="Aptos" pitchFamily="34" charset="-122"/>
                 <a:cs typeface="Aptos" pitchFamily="34" charset="-120"/>
               </a:rPr>
-              <a:t>Which integration risk is most concerning for an AI tool that can update a case record?</a:t>
-            </a:r>
-            <a:endParaRPr lang="en-US" sz="1380" dirty="0"/>
-          </a:p>
-          <a:p>
-            <a:r>
-              <a:rPr lang="en-US" sz="1380" dirty="0">
+              <a:t>Which integration risk is most concerning for an AI tool that can.</a:t>
+            </a:r>
+            <a:endParaRPr lang="en-US" sz="1220" dirty="0"/>
+          </a:p>
+          <a:p>
+            <a:pPr indent="0" marL="0">
+              <a:buNone/>
+            </a:pPr>
+            <a:r>
+              <a:rPr lang="en-US" sz="1220" dirty="0">
                 <a:solidFill>
                   <a:srgbClr val="17364A"/>
                 </a:solidFill>
@@ -11833,7 +12009,7 @@
               </a:rPr>
               <a:t>2.</a:t>
             </a:r>
-            <a:endParaRPr lang="en-US" sz="1380" dirty="0"/>
+            <a:endParaRPr lang="en-US" sz="1220" dirty="0"/>
           </a:p>
         </p:txBody>
       </p:sp>
@@ -11911,17 +12087,17 @@
         </p:nvSpPr>
         <p:spPr>
           <a:xfrm>
-            <a:off x="7799832" y="5001768"/>
-            <a:ext cx="3145536" cy="502920"/>
-          </a:xfrm>
-          <a:prstGeom prst="rect">
-            <a:avLst/>
-          </a:prstGeom>
-          <a:noFill/>
-          <a:ln/>
-        </p:spPr>
-        <p:txBody>
-          <a:bodyPr wrap="square" lIns="0" tIns="0" rIns="0" bIns="0" rtlCol="0" anchor="t">
+            <a:off x="7799832" y="4974336"/>
+            <a:ext cx="3145536" cy="576072"/>
+          </a:xfrm>
+          <a:prstGeom prst="rect">
+            <a:avLst/>
+          </a:prstGeom>
+          <a:noFill/>
+          <a:ln/>
+        </p:spPr>
+        <p:txBody>
+          <a:bodyPr wrap="square" lIns="254" tIns="254" rIns="254" bIns="254" rtlCol="0" anchor="t">
             <a:normAutofit/>
           </a:bodyPr>
           <a:lstStyle/>
@@ -11930,7 +12106,7 @@
               <a:buNone/>
             </a:pPr>
             <a:r>
-              <a:rPr lang="en-US" sz="1550" dirty="0">
+              <a:rPr lang="en-US" sz="1320" dirty="0">
                 <a:solidFill>
                   <a:srgbClr val="17364A"/>
                 </a:solidFill>
@@ -11938,9 +12114,9 @@
                 <a:ea typeface="Aptos" pitchFamily="34" charset="-122"/>
                 <a:cs typeface="Aptos" pitchFamily="34" charset="-120"/>
               </a:rPr>
-              <a:t>Use the assignment to test whether you can explain the concept, apply it to a realistic public health situation, and identify what would need review before the work moves forward.</a:t>
-            </a:r>
-            <a:endParaRPr lang="en-US" sz="1550" dirty="0"/>
+              <a:t>Use the assignment to test whether you can explain the concept, apply it to a realistic public health situation, and.</a:t>
+            </a:r>
+            <a:endParaRPr lang="en-US" sz="1320" dirty="0"/>
           </a:p>
         </p:txBody>
       </p:sp>
@@ -12241,49 +12417,58 @@
           <a:ln/>
         </p:spPr>
         <p:txBody>
-          <a:bodyPr wrap="square" lIns="635" tIns="635" rIns="635" bIns="635" rtlCol="0" anchor="t">
+          <a:bodyPr wrap="square" lIns="1016" tIns="1016" rIns="1016" bIns="1016" rtlCol="0" anchor="t">
             <a:normAutofit/>
           </a:bodyPr>
           <a:lstStyle/>
           <a:p>
+            <a:pPr indent="0" marL="0">
+              <a:buNone/>
+            </a:pPr>
             <a:r>
               <a:rPr lang="en-US" sz="2100" dirty="0">
                 <a:solidFill>
-                  <a:srgbClr val="17364A"/>
-                </a:solidFill>
-                <a:latin typeface="Aptos" pitchFamily="34" charset="0"/>
-                <a:ea typeface="Aptos" pitchFamily="34" charset="-122"/>
-                <a:cs typeface="Aptos" pitchFamily="34" charset="-120"/>
-              </a:rPr>
-              <a:t>CDC Public Health Data Strategy and Data Modernization resources:.</a:t>
+                  <a:srgbClr val="003A63"/>
+                </a:solidFill>
+                <a:latin typeface="Aptos" pitchFamily="34" charset="0"/>
+                <a:ea typeface="Aptos" pitchFamily="34" charset="-122"/>
+                <a:cs typeface="Aptos" pitchFamily="34" charset="-120"/>
+              </a:rPr>
+              <a:t>• CDC Public Health Data Strategy and Data Modernization resources:.</a:t>
             </a:r>
             <a:endParaRPr lang="en-US" sz="2100" dirty="0"/>
           </a:p>
           <a:p>
+            <a:pPr indent="0" marL="0">
+              <a:buNone/>
+            </a:pPr>
             <a:r>
               <a:rPr lang="en-US" sz="2100" dirty="0">
                 <a:solidFill>
-                  <a:srgbClr val="17364A"/>
-                </a:solidFill>
-                <a:latin typeface="Aptos" pitchFamily="34" charset="0"/>
-                <a:ea typeface="Aptos" pitchFamily="34" charset="-122"/>
-                <a:cs typeface="Aptos" pitchFamily="34" charset="-120"/>
-              </a:rPr>
-              <a:t>NIST Artificial Intelligence Risk Management Framework and NIST Generative AI Profile:.</a:t>
+                  <a:srgbClr val="003A63"/>
+                </a:solidFill>
+                <a:latin typeface="Aptos" pitchFamily="34" charset="0"/>
+                <a:ea typeface="Aptos" pitchFamily="34" charset="-122"/>
+                <a:cs typeface="Aptos" pitchFamily="34" charset="-120"/>
+              </a:rPr>
+              <a:t>• NIST Artificial Intelligence Risk Management Framework and NIST Generative AI Profile:.</a:t>
             </a:r>
             <a:endParaRPr lang="en-US" sz="2100" dirty="0"/>
           </a:p>
           <a:p>
+            <a:pPr indent="0" marL="0">
+              <a:buNone/>
+            </a:pPr>
             <a:r>
               <a:rPr lang="en-US" sz="2100" dirty="0">
                 <a:solidFill>
-                  <a:srgbClr val="17364A"/>
-                </a:solidFill>
-                <a:latin typeface="Aptos" pitchFamily="34" charset="0"/>
-                <a:ea typeface="Aptos" pitchFamily="34" charset="-122"/>
-                <a:cs typeface="Aptos" pitchFamily="34" charset="-120"/>
-              </a:rPr>
-              <a:t>WHO Ethics and Governance of Artificial Intelligence for Health guidance:.</a:t>
+                  <a:srgbClr val="003A63"/>
+                </a:solidFill>
+                <a:latin typeface="Aptos" pitchFamily="34" charset="0"/>
+                <a:ea typeface="Aptos" pitchFamily="34" charset="-122"/>
+                <a:cs typeface="Aptos" pitchFamily="34" charset="-120"/>
+              </a:rPr>
+              <a:t>• WHO Ethics and Governance of Artificial Intelligence for Health guidance:.</a:t>
             </a:r>
             <a:endParaRPr lang="en-US" sz="2100" dirty="0"/>
           </a:p>
@@ -12363,17 +12548,17 @@
         </p:nvSpPr>
         <p:spPr>
           <a:xfrm>
-            <a:off x="7799832" y="1828800"/>
-            <a:ext cx="3145536" cy="685800"/>
-          </a:xfrm>
-          <a:prstGeom prst="rect">
-            <a:avLst/>
-          </a:prstGeom>
-          <a:noFill/>
-          <a:ln/>
-        </p:spPr>
-        <p:txBody>
-          <a:bodyPr wrap="square" lIns="0" tIns="0" rIns="0" bIns="0" rtlCol="0" anchor="t">
+            <a:off x="7799832" y="1801368"/>
+            <a:ext cx="3145536" cy="758952"/>
+          </a:xfrm>
+          <a:prstGeom prst="rect">
+            <a:avLst/>
+          </a:prstGeom>
+          <a:noFill/>
+          <a:ln/>
+        </p:spPr>
+        <p:txBody>
+          <a:bodyPr wrap="square" lIns="254" tIns="254" rIns="254" bIns="254" rtlCol="0" anchor="t">
             <a:normAutofit/>
           </a:bodyPr>
           <a:lstStyle/>
@@ -12382,7 +12567,7 @@
               <a:buNone/>
             </a:pPr>
             <a:r>
-              <a:rPr lang="en-US" sz="1550" dirty="0">
+              <a:rPr lang="en-US" sz="1320" dirty="0">
                 <a:solidFill>
                   <a:srgbClr val="17364A"/>
                 </a:solidFill>
@@ -12392,7 +12577,7 @@
               </a:rPr>
               <a:t>CDC Public Health Data Strategy and Data Modernization resources:.</a:t>
             </a:r>
-            <a:endParaRPr lang="en-US" sz="1550" dirty="0"/>
+            <a:endParaRPr lang="en-US" sz="1320" dirty="0"/>
           </a:p>
         </p:txBody>
       </p:sp>
@@ -12480,13 +12665,16 @@
           <a:ln/>
         </p:spPr>
         <p:txBody>
-          <a:bodyPr wrap="square" lIns="254" tIns="254" rIns="254" bIns="254" rtlCol="0" anchor="t">
+          <a:bodyPr wrap="square" lIns="508" tIns="508" rIns="508" bIns="508" rtlCol="0" anchor="t">
             <a:normAutofit/>
           </a:bodyPr>
           <a:lstStyle/>
           <a:p>
-            <a:r>
-              <a:rPr lang="en-US" sz="1380" dirty="0">
+            <a:pPr indent="0" marL="0">
+              <a:buNone/>
+            </a:pPr>
+            <a:r>
+              <a:rPr lang="en-US" sz="1220" dirty="0">
                 <a:solidFill>
                   <a:srgbClr val="17364A"/>
                 </a:solidFill>
@@ -12496,11 +12684,14 @@
               </a:rPr>
               <a:t>OWASP Top 10 for Large Language Model Applications:.</a:t>
             </a:r>
-            <a:endParaRPr lang="en-US" sz="1380" dirty="0"/>
-          </a:p>
-          <a:p>
-            <a:r>
-              <a:rPr lang="en-US" sz="1380" dirty="0">
+            <a:endParaRPr lang="en-US" sz="1220" dirty="0"/>
+          </a:p>
+          <a:p>
+            <a:pPr indent="0" marL="0">
+              <a:buNone/>
+            </a:pPr>
+            <a:r>
+              <a:rPr lang="en-US" sz="1220" dirty="0">
                 <a:solidFill>
                   <a:srgbClr val="17364A"/>
                 </a:solidFill>
@@ -12508,9 +12699,9 @@
                 <a:ea typeface="Aptos" pitchFamily="34" charset="-122"/>
                 <a:cs typeface="Aptos" pitchFamily="34" charset="-120"/>
               </a:rPr>
-              <a:t>ONC health IT, interoperability, and information blocking resources:.</a:t>
-            </a:r>
-            <a:endParaRPr lang="en-US" sz="1380" dirty="0"/>
+              <a:t>ONC health IT, interoperability, and information blocking.</a:t>
+            </a:r>
+            <a:endParaRPr lang="en-US" sz="1220" dirty="0"/>
           </a:p>
         </p:txBody>
       </p:sp>
@@ -12588,17 +12779,17 @@
         </p:nvSpPr>
         <p:spPr>
           <a:xfrm>
-            <a:off x="7799832" y="5001768"/>
-            <a:ext cx="3145536" cy="502920"/>
-          </a:xfrm>
-          <a:prstGeom prst="rect">
-            <a:avLst/>
-          </a:prstGeom>
-          <a:noFill/>
-          <a:ln/>
-        </p:spPr>
-        <p:txBody>
-          <a:bodyPr wrap="square" lIns="0" tIns="0" rIns="0" bIns="0" rtlCol="0" anchor="t">
+            <a:off x="7799832" y="4974336"/>
+            <a:ext cx="3145536" cy="576072"/>
+          </a:xfrm>
+          <a:prstGeom prst="rect">
+            <a:avLst/>
+          </a:prstGeom>
+          <a:noFill/>
+          <a:ln/>
+        </p:spPr>
+        <p:txBody>
+          <a:bodyPr wrap="square" lIns="254" tIns="254" rIns="254" bIns="254" rtlCol="0" anchor="t">
             <a:normAutofit/>
           </a:bodyPr>
           <a:lstStyle/>
@@ -12607,7 +12798,7 @@
               <a:buNone/>
             </a:pPr>
             <a:r>
-              <a:rPr lang="en-US" sz="1550" dirty="0">
+              <a:rPr lang="en-US" sz="1320" dirty="0">
                 <a:solidFill>
                   <a:srgbClr val="17364A"/>
                 </a:solidFill>
@@ -12615,9 +12806,9 @@
                 <a:ea typeface="Aptos" pitchFamily="34" charset="-122"/>
                 <a:cs typeface="Aptos" pitchFamily="34" charset="-120"/>
               </a:rPr>
-              <a:t>Connect the concept to public health purpose, responsible use, required safeguards, documentation, and the next action a department should take.</a:t>
-            </a:r>
-            <a:endParaRPr lang="en-US" sz="1550" dirty="0"/>
+              <a:t>Connect the concept to public health purpose, responsible use, required safeguards, documentation, and the next action a.</a:t>
+            </a:r>
+            <a:endParaRPr lang="en-US" sz="1320" dirty="0"/>
           </a:p>
         </p:txBody>
       </p:sp>
@@ -12918,21 +13109,24 @@
           <a:ln/>
         </p:spPr>
         <p:txBody>
-          <a:bodyPr wrap="square" lIns="635" tIns="635" rIns="635" bIns="635" rtlCol="0" anchor="t">
+          <a:bodyPr wrap="square" lIns="1016" tIns="1016" rIns="1016" bIns="1016" rtlCol="0" anchor="t">
             <a:normAutofit/>
           </a:bodyPr>
           <a:lstStyle/>
           <a:p>
+            <a:pPr indent="0" marL="0">
+              <a:buNone/>
+            </a:pPr>
             <a:r>
               <a:rPr lang="en-US" sz="2100" dirty="0">
                 <a:solidFill>
-                  <a:srgbClr val="17364A"/>
-                </a:solidFill>
-                <a:latin typeface="Aptos" pitchFamily="34" charset="0"/>
-                <a:ea typeface="Aptos" pitchFamily="34" charset="-122"/>
-                <a:cs typeface="Aptos" pitchFamily="34" charset="-120"/>
-              </a:rPr>
-              <a:t>Agency policies for privacy, public records, cybersecurity, procurement, civil rights, accessibility,.</a:t>
+                  <a:srgbClr val="003A63"/>
+                </a:solidFill>
+                <a:latin typeface="Aptos" pitchFamily="34" charset="0"/>
+                <a:ea typeface="Aptos" pitchFamily="34" charset="-122"/>
+                <a:cs typeface="Aptos" pitchFamily="34" charset="-120"/>
+              </a:rPr>
+              <a:t>• Agency policies for privacy, public records, cybersecurity, procurement, civil rights,.</a:t>
             </a:r>
             <a:endParaRPr lang="en-US" sz="2100" dirty="0"/>
           </a:p>
@@ -13012,17 +13206,17 @@
         </p:nvSpPr>
         <p:spPr>
           <a:xfrm>
-            <a:off x="7799832" y="1828800"/>
-            <a:ext cx="3145536" cy="685800"/>
-          </a:xfrm>
-          <a:prstGeom prst="rect">
-            <a:avLst/>
-          </a:prstGeom>
-          <a:noFill/>
-          <a:ln/>
-        </p:spPr>
-        <p:txBody>
-          <a:bodyPr wrap="square" lIns="0" tIns="0" rIns="0" bIns="0" rtlCol="0" anchor="t">
+            <a:off x="7799832" y="1801368"/>
+            <a:ext cx="3145536" cy="758952"/>
+          </a:xfrm>
+          <a:prstGeom prst="rect">
+            <a:avLst/>
+          </a:prstGeom>
+          <a:noFill/>
+          <a:ln/>
+        </p:spPr>
+        <p:txBody>
+          <a:bodyPr wrap="square" lIns="254" tIns="254" rIns="254" bIns="254" rtlCol="0" anchor="t">
             <a:normAutofit/>
           </a:bodyPr>
           <a:lstStyle/>
@@ -13031,7 +13225,7 @@
               <a:buNone/>
             </a:pPr>
             <a:r>
-              <a:rPr lang="en-US" sz="1550" dirty="0">
+              <a:rPr lang="en-US" sz="1320" dirty="0">
                 <a:solidFill>
                   <a:srgbClr val="17364A"/>
                 </a:solidFill>
@@ -13041,7 +13235,7 @@
               </a:rPr>
               <a:t>Agency policies for privacy, public records, cybersecurity, procurement, civil rights, accessibility,.</a:t>
             </a:r>
-            <a:endParaRPr lang="en-US" sz="1550" dirty="0"/>
+            <a:endParaRPr lang="en-US" sz="1320" dirty="0"/>
           </a:p>
         </p:txBody>
       </p:sp>
@@ -13129,13 +13323,16 @@
           <a:ln/>
         </p:spPr>
         <p:txBody>
-          <a:bodyPr wrap="square" lIns="254" tIns="254" rIns="254" bIns="254" rtlCol="0" anchor="t">
+          <a:bodyPr wrap="square" lIns="508" tIns="508" rIns="508" bIns="508" rtlCol="0" anchor="t">
             <a:normAutofit/>
           </a:bodyPr>
           <a:lstStyle/>
           <a:p>
-            <a:r>
-              <a:rPr lang="en-US" sz="1380" dirty="0">
+            <a:pPr indent="0" marL="0">
+              <a:buNone/>
+            </a:pPr>
+            <a:r>
+              <a:rPr lang="en-US" sz="1220" dirty="0">
                 <a:solidFill>
                   <a:srgbClr val="17364A"/>
                 </a:solidFill>
@@ -13143,9 +13340,9 @@
                 <a:ea typeface="Aptos" pitchFamily="34" charset="-122"/>
                 <a:cs typeface="Aptos" pitchFamily="34" charset="-120"/>
               </a:rPr>
-              <a:t>Agency policies for privacy, public records, cybersecurity, procurement, civil rights,.</a:t>
-            </a:r>
-            <a:endParaRPr lang="en-US" sz="1380" dirty="0"/>
+              <a:t>Agency policies for privacy, public records, cybersecurity,.</a:t>
+            </a:r>
+            <a:endParaRPr lang="en-US" sz="1220" dirty="0"/>
           </a:p>
         </p:txBody>
       </p:sp>
@@ -13223,17 +13420,17 @@
         </p:nvSpPr>
         <p:spPr>
           <a:xfrm>
-            <a:off x="7799832" y="5001768"/>
-            <a:ext cx="3145536" cy="502920"/>
-          </a:xfrm>
-          <a:prstGeom prst="rect">
-            <a:avLst/>
-          </a:prstGeom>
-          <a:noFill/>
-          <a:ln/>
-        </p:spPr>
-        <p:txBody>
-          <a:bodyPr wrap="square" lIns="0" tIns="0" rIns="0" bIns="0" rtlCol="0" anchor="t">
+            <a:off x="7799832" y="4974336"/>
+            <a:ext cx="3145536" cy="576072"/>
+          </a:xfrm>
+          <a:prstGeom prst="rect">
+            <a:avLst/>
+          </a:prstGeom>
+          <a:noFill/>
+          <a:ln/>
+        </p:spPr>
+        <p:txBody>
+          <a:bodyPr wrap="square" lIns="254" tIns="254" rIns="254" bIns="254" rtlCol="0" anchor="t">
             <a:normAutofit/>
           </a:bodyPr>
           <a:lstStyle/>
@@ -13242,7 +13439,7 @@
               <a:buNone/>
             </a:pPr>
             <a:r>
-              <a:rPr lang="en-US" sz="1550" dirty="0">
+              <a:rPr lang="en-US" sz="1320" dirty="0">
                 <a:solidFill>
                   <a:srgbClr val="17364A"/>
                 </a:solidFill>
@@ -13250,9 +13447,9 @@
                 <a:ea typeface="Aptos" pitchFamily="34" charset="-122"/>
                 <a:cs typeface="Aptos" pitchFamily="34" charset="-120"/>
               </a:rPr>
-              <a:t>Connect the concept to public health purpose, responsible use, required safeguards, documentation, and the next action a department should take.</a:t>
-            </a:r>
-            <a:endParaRPr lang="en-US" sz="1550" dirty="0"/>
+              <a:t>Connect the concept to public health purpose, responsible use, required safeguards, documentation, and the next action a.</a:t>
+            </a:r>
+            <a:endParaRPr lang="en-US" sz="1320" dirty="0"/>
           </a:p>
         </p:txBody>
       </p:sp>
@@ -13553,63 +13750,75 @@
           <a:ln/>
         </p:spPr>
         <p:txBody>
-          <a:bodyPr wrap="square" lIns="635" tIns="635" rIns="635" bIns="635" rtlCol="0" anchor="t">
+          <a:bodyPr wrap="square" lIns="1016" tIns="1016" rIns="1016" bIns="1016" rtlCol="0" anchor="t">
             <a:normAutofit/>
           </a:bodyPr>
           <a:lstStyle/>
           <a:p>
+            <a:pPr indent="0" marL="0">
+              <a:buNone/>
+            </a:pPr>
             <a:r>
               <a:rPr lang="en-US" sz="1900" dirty="0">
                 <a:solidFill>
-                  <a:srgbClr val="17364A"/>
-                </a:solidFill>
-                <a:latin typeface="Aptos" pitchFamily="34" charset="0"/>
-                <a:ea typeface="Aptos" pitchFamily="34" charset="-122"/>
-                <a:cs typeface="Aptos" pitchFamily="34" charset="-120"/>
-              </a:rPr>
-              <a:t>Play 11: Build and Deploy AI Solutions - This lesson informs Play 11 by helping learners connect the lesson.</a:t>
+                  <a:srgbClr val="003A63"/>
+                </a:solidFill>
+                <a:latin typeface="Aptos" pitchFamily="34" charset="0"/>
+                <a:ea typeface="Aptos" pitchFamily="34" charset="-122"/>
+                <a:cs typeface="Aptos" pitchFamily="34" charset="-120"/>
+              </a:rPr>
+              <a:t>• Play 11: Build and Deploy AI Solutions - This lesson informs Play 11 by helping learners.</a:t>
             </a:r>
             <a:endParaRPr lang="en-US" sz="1900" dirty="0"/>
           </a:p>
           <a:p>
+            <a:pPr indent="0" marL="0">
+              <a:buNone/>
+            </a:pPr>
             <a:r>
               <a:rPr lang="en-US" sz="1900" dirty="0">
                 <a:solidFill>
-                  <a:srgbClr val="17364A"/>
-                </a:solidFill>
-                <a:latin typeface="Aptos" pitchFamily="34" charset="0"/>
-                <a:ea typeface="Aptos" pitchFamily="34" charset="-122"/>
-                <a:cs typeface="Aptos" pitchFamily="34" charset="-120"/>
-              </a:rPr>
-              <a:t>Play 2: Readiness Assessment - This lesson informs Play 2 by helping learners connect the lesson topic to.</a:t>
+                  <a:srgbClr val="003A63"/>
+                </a:solidFill>
+                <a:latin typeface="Aptos" pitchFamily="34" charset="0"/>
+                <a:ea typeface="Aptos" pitchFamily="34" charset="-122"/>
+                <a:cs typeface="Aptos" pitchFamily="34" charset="-120"/>
+              </a:rPr>
+              <a:t>• Play 2: Readiness Assessment - This lesson informs Play 2 by helping learners connect the.</a:t>
             </a:r>
             <a:endParaRPr lang="en-US" sz="1900" dirty="0"/>
           </a:p>
           <a:p>
+            <a:pPr indent="0" marL="0">
+              <a:buNone/>
+            </a:pPr>
             <a:r>
               <a:rPr lang="en-US" sz="1900" dirty="0">
                 <a:solidFill>
-                  <a:srgbClr val="17364A"/>
-                </a:solidFill>
-                <a:latin typeface="Aptos" pitchFamily="34" charset="0"/>
-                <a:ea typeface="Aptos" pitchFamily="34" charset="-122"/>
-                <a:cs typeface="Aptos" pitchFamily="34" charset="-120"/>
-              </a:rPr>
-              <a:t>Play 3: Establish AI Governance - This lesson informs Play 3 by helping learners connect the lesson topic to.</a:t>
+                  <a:srgbClr val="003A63"/>
+                </a:solidFill>
+                <a:latin typeface="Aptos" pitchFamily="34" charset="0"/>
+                <a:ea typeface="Aptos" pitchFamily="34" charset="-122"/>
+                <a:cs typeface="Aptos" pitchFamily="34" charset="-120"/>
+              </a:rPr>
+              <a:t>• Play 3: Establish AI Governance - This lesson informs Play 3 by helping learners connect the.</a:t>
             </a:r>
             <a:endParaRPr lang="en-US" sz="1900" dirty="0"/>
           </a:p>
           <a:p>
+            <a:pPr indent="0" marL="0">
+              <a:buNone/>
+            </a:pPr>
             <a:r>
               <a:rPr lang="en-US" sz="1900" dirty="0">
                 <a:solidFill>
-                  <a:srgbClr val="17364A"/>
-                </a:solidFill>
-                <a:latin typeface="Aptos" pitchFamily="34" charset="0"/>
-                <a:ea typeface="Aptos" pitchFamily="34" charset="-122"/>
-                <a:cs typeface="Aptos" pitchFamily="34" charset="-120"/>
-              </a:rPr>
-              <a:t>Play 1: Vision &amp; Guardrails - This lesson informs Play 1 by helping learners connect the lesson topic to.</a:t>
+                  <a:srgbClr val="003A63"/>
+                </a:solidFill>
+                <a:latin typeface="Aptos" pitchFamily="34" charset="0"/>
+                <a:ea typeface="Aptos" pitchFamily="34" charset="-122"/>
+                <a:cs typeface="Aptos" pitchFamily="34" charset="-120"/>
+              </a:rPr>
+              <a:t>• Play 1: Vision &amp; Guardrails - This lesson informs Play 1 by helping learners connect the.</a:t>
             </a:r>
             <a:endParaRPr lang="en-US" sz="1900" dirty="0"/>
           </a:p>
@@ -13689,17 +13898,17 @@
         </p:nvSpPr>
         <p:spPr>
           <a:xfrm>
-            <a:off x="8211312" y="1920240"/>
-            <a:ext cx="2734056" cy="1463040"/>
-          </a:xfrm>
-          <a:prstGeom prst="rect">
-            <a:avLst/>
-          </a:prstGeom>
-          <a:noFill/>
-          <a:ln/>
-        </p:spPr>
-        <p:txBody>
-          <a:bodyPr wrap="square" lIns="0" tIns="0" rIns="0" bIns="0" rtlCol="0" anchor="t">
+            <a:off x="8211312" y="1892808"/>
+            <a:ext cx="2734056" cy="1536192"/>
+          </a:xfrm>
+          <a:prstGeom prst="rect">
+            <a:avLst/>
+          </a:prstGeom>
+          <a:noFill/>
+          <a:ln/>
+        </p:spPr>
+        <p:txBody>
+          <a:bodyPr wrap="square" lIns="254" tIns="254" rIns="254" bIns="254" rtlCol="0" anchor="t">
             <a:normAutofit/>
           </a:bodyPr>
           <a:lstStyle/>
@@ -13708,7 +13917,7 @@
               <a:buNone/>
             </a:pPr>
             <a:r>
-              <a:rPr lang="en-US" sz="1550" dirty="0">
+              <a:rPr lang="en-US" sz="1320" dirty="0">
                 <a:solidFill>
                   <a:srgbClr val="17364A"/>
                 </a:solidFill>
@@ -13716,9 +13925,9 @@
                 <a:ea typeface="Aptos" pitchFamily="34" charset="-122"/>
                 <a:cs typeface="Aptos" pitchFamily="34" charset="-120"/>
               </a:rPr>
-              <a:t>Use the related plays to identify decisions, participants, timing, approvals, and documentation needed for responsible implementation.</a:t>
-            </a:r>
-            <a:endParaRPr lang="en-US" sz="1550" dirty="0"/>
+              <a:t>Use the related plays to identify decisions, participants, timing, approvals, and documentation needed for responsible.</a:t>
+            </a:r>
+            <a:endParaRPr lang="en-US" sz="1320" dirty="0"/>
           </a:p>
         </p:txBody>
       </p:sp>
@@ -13806,13 +14015,16 @@
           <a:ln/>
         </p:spPr>
         <p:txBody>
-          <a:bodyPr wrap="square" lIns="254" tIns="254" rIns="254" bIns="254" rtlCol="0" anchor="t">
+          <a:bodyPr wrap="square" lIns="508" tIns="508" rIns="508" bIns="508" rtlCol="0" anchor="t">
             <a:normAutofit/>
           </a:bodyPr>
           <a:lstStyle/>
           <a:p>
-            <a:r>
-              <a:rPr lang="en-US" sz="1380" dirty="0">
+            <a:pPr indent="0" marL="0">
+              <a:buNone/>
+            </a:pPr>
+            <a:r>
+              <a:rPr lang="en-US" sz="1220" dirty="0">
                 <a:solidFill>
                   <a:srgbClr val="17364A"/>
                 </a:solidFill>
@@ -13822,11 +14034,14 @@
               </a:rPr>
               <a:t>Locate the decision point in the playbook sequence.</a:t>
             </a:r>
-            <a:endParaRPr lang="en-US" sz="1380" dirty="0"/>
-          </a:p>
-          <a:p>
-            <a:r>
-              <a:rPr lang="en-US" sz="1380" dirty="0">
+            <a:endParaRPr lang="en-US" sz="1220" dirty="0"/>
+          </a:p>
+          <a:p>
+            <a:pPr indent="0" marL="0">
+              <a:buNone/>
+            </a:pPr>
+            <a:r>
+              <a:rPr lang="en-US" sz="1220" dirty="0">
                 <a:solidFill>
                   <a:srgbClr val="17364A"/>
                 </a:solidFill>
@@ -13836,11 +14051,14 @@
               </a:rPr>
               <a:t>Identify who should participate in the work.</a:t>
             </a:r>
-            <a:endParaRPr lang="en-US" sz="1380" dirty="0"/>
-          </a:p>
-          <a:p>
-            <a:r>
-              <a:rPr lang="en-US" sz="1380" dirty="0">
+            <a:endParaRPr lang="en-US" sz="1220" dirty="0"/>
+          </a:p>
+          <a:p>
+            <a:pPr indent="0" marL="0">
+              <a:buNone/>
+            </a:pPr>
+            <a:r>
+              <a:rPr lang="en-US" sz="1220" dirty="0">
                 <a:solidFill>
                   <a:srgbClr val="17364A"/>
                 </a:solidFill>
@@ -13850,7 +14068,7 @@
               </a:rPr>
               <a:t>Document the review, approval, or implementation step.</a:t>
             </a:r>
-            <a:endParaRPr lang="en-US" sz="1380" dirty="0"/>
+            <a:endParaRPr lang="en-US" sz="1220" dirty="0"/>
           </a:p>
         </p:txBody>
       </p:sp>
@@ -14151,63 +14369,75 @@
           <a:ln/>
         </p:spPr>
         <p:txBody>
-          <a:bodyPr wrap="square" lIns="635" tIns="635" rIns="635" bIns="635" rtlCol="0" anchor="t">
+          <a:bodyPr wrap="square" lIns="1016" tIns="1016" rIns="1016" bIns="1016" rtlCol="0" anchor="t">
             <a:normAutofit/>
           </a:bodyPr>
           <a:lstStyle/>
           <a:p>
+            <a:pPr indent="0" marL="0">
+              <a:buNone/>
+            </a:pPr>
             <a:r>
               <a:rPr lang="en-US" sz="1850" dirty="0">
                 <a:solidFill>
-                  <a:srgbClr val="17364A"/>
-                </a:solidFill>
-                <a:latin typeface="Aptos" pitchFamily="34" charset="0"/>
-                <a:ea typeface="Aptos" pitchFamily="34" charset="-122"/>
-                <a:cs typeface="Aptos" pitchFamily="34" charset="-120"/>
-              </a:rPr>
-              <a:t>Tool 4: AI Policy Landscape Scan (Worksheet) - Use AI Policy Landscape Scan to translate this lesson into a.</a:t>
+                  <a:srgbClr val="003A63"/>
+                </a:solidFill>
+                <a:latin typeface="Aptos" pitchFamily="34" charset="0"/>
+                <a:ea typeface="Aptos" pitchFamily="34" charset="-122"/>
+                <a:cs typeface="Aptos" pitchFamily="34" charset="-120"/>
+              </a:rPr>
+              <a:t>• Tool 4: AI Policy Landscape Scan (Worksheet) - Use AI Policy Landscape Scan to translate this.</a:t>
             </a:r>
             <a:endParaRPr lang="en-US" sz="1850" dirty="0"/>
           </a:p>
           <a:p>
+            <a:pPr indent="0" marL="0">
+              <a:buNone/>
+            </a:pPr>
             <a:r>
               <a:rPr lang="en-US" sz="1850" dirty="0">
                 <a:solidFill>
-                  <a:srgbClr val="17364A"/>
-                </a:solidFill>
-                <a:latin typeface="Aptos" pitchFamily="34" charset="0"/>
-                <a:ea typeface="Aptos" pitchFamily="34" charset="-122"/>
-                <a:cs typeface="Aptos" pitchFamily="34" charset="-120"/>
-              </a:rPr>
-              <a:t>Tool 5: AI Environmental and Resource Impact Review (Checklist) - Use AI Environmental and Resource Impact.</a:t>
+                  <a:srgbClr val="003A63"/>
+                </a:solidFill>
+                <a:latin typeface="Aptos" pitchFamily="34" charset="0"/>
+                <a:ea typeface="Aptos" pitchFamily="34" charset="-122"/>
+                <a:cs typeface="Aptos" pitchFamily="34" charset="-120"/>
+              </a:rPr>
+              <a:t>• Tool 5: AI Environmental and Resource Impact Review (Checklist) - Use AI Environmental and.</a:t>
             </a:r>
             <a:endParaRPr lang="en-US" sz="1850" dirty="0"/>
           </a:p>
           <a:p>
+            <a:pPr indent="0" marL="0">
+              <a:buNone/>
+            </a:pPr>
             <a:r>
               <a:rPr lang="en-US" sz="1850" dirty="0">
                 <a:solidFill>
-                  <a:srgbClr val="17364A"/>
-                </a:solidFill>
-                <a:latin typeface="Aptos" pitchFamily="34" charset="0"/>
-                <a:ea typeface="Aptos" pitchFamily="34" charset="-122"/>
-                <a:cs typeface="Aptos" pitchFamily="34" charset="-120"/>
-              </a:rPr>
-              <a:t>Tool 6: Human-Centered AI Decision Rule Checklist (Checklist) - Use Human-Centered AI Decision Rule.</a:t>
+                  <a:srgbClr val="003A63"/>
+                </a:solidFill>
+                <a:latin typeface="Aptos" pitchFamily="34" charset="0"/>
+                <a:ea typeface="Aptos" pitchFamily="34" charset="-122"/>
+                <a:cs typeface="Aptos" pitchFamily="34" charset="-120"/>
+              </a:rPr>
+              <a:t>• Tool 6: Human-Centered AI Decision Rule Checklist (Checklist) - Use Human-Centered AI Decision.</a:t>
             </a:r>
             <a:endParaRPr lang="en-US" sz="1850" dirty="0"/>
           </a:p>
           <a:p>
+            <a:pPr indent="0" marL="0">
+              <a:buNone/>
+            </a:pPr>
             <a:r>
               <a:rPr lang="en-US" sz="1850" dirty="0">
                 <a:solidFill>
-                  <a:srgbClr val="17364A"/>
-                </a:solidFill>
-                <a:latin typeface="Aptos" pitchFamily="34" charset="0"/>
-                <a:ea typeface="Aptos" pitchFamily="34" charset="-122"/>
-                <a:cs typeface="Aptos" pitchFamily="34" charset="-120"/>
-              </a:rPr>
-              <a:t>Tool 8: AI Project Charter (Planning) - Use AI Project Charter to translate this lesson into a documented.</a:t>
+                  <a:srgbClr val="003A63"/>
+                </a:solidFill>
+                <a:latin typeface="Aptos" pitchFamily="34" charset="0"/>
+                <a:ea typeface="Aptos" pitchFamily="34" charset="-122"/>
+                <a:cs typeface="Aptos" pitchFamily="34" charset="-120"/>
+              </a:rPr>
+              <a:t>• Tool 8: AI Project Charter (Planning) - Use AI Project Charter to translate this lesson into a.</a:t>
             </a:r>
             <a:endParaRPr lang="en-US" sz="1850" dirty="0"/>
           </a:p>
@@ -14287,17 +14517,17 @@
         </p:nvSpPr>
         <p:spPr>
           <a:xfrm>
-            <a:off x="8211312" y="1920240"/>
-            <a:ext cx="2734056" cy="1463040"/>
-          </a:xfrm>
-          <a:prstGeom prst="rect">
-            <a:avLst/>
-          </a:prstGeom>
-          <a:noFill/>
-          <a:ln/>
-        </p:spPr>
-        <p:txBody>
-          <a:bodyPr wrap="square" lIns="0" tIns="0" rIns="0" bIns="0" rtlCol="0" anchor="t">
+            <a:off x="8211312" y="1892808"/>
+            <a:ext cx="2734056" cy="1536192"/>
+          </a:xfrm>
+          <a:prstGeom prst="rect">
+            <a:avLst/>
+          </a:prstGeom>
+          <a:noFill/>
+          <a:ln/>
+        </p:spPr>
+        <p:txBody>
+          <a:bodyPr wrap="square" lIns="254" tIns="254" rIns="254" bIns="254" rtlCol="0" anchor="t">
             <a:normAutofit/>
           </a:bodyPr>
           <a:lstStyle/>
@@ -14306,7 +14536,7 @@
               <a:buNone/>
             </a:pPr>
             <a:r>
-              <a:rPr lang="en-US" sz="1550" dirty="0">
+              <a:rPr lang="en-US" sz="1320" dirty="0">
                 <a:solidFill>
                   <a:srgbClr val="17364A"/>
                 </a:solidFill>
@@ -14314,9 +14544,9 @@
                 <a:ea typeface="Aptos" pitchFamily="34" charset="-122"/>
                 <a:cs typeface="Aptos" pitchFamily="34" charset="-120"/>
               </a:rPr>
-              <a:t>Use linked tools when your department needs a structured worksheet, template, checklist, review process, or documentation artifact.</a:t>
-            </a:r>
-            <a:endParaRPr lang="en-US" sz="1550" dirty="0"/>
+              <a:t>Use linked tools when your department needs a structured worksheet, template, checklist, review process, or.</a:t>
+            </a:r>
+            <a:endParaRPr lang="en-US" sz="1320" dirty="0"/>
           </a:p>
         </p:txBody>
       </p:sp>
@@ -14404,13 +14634,16 @@
           <a:ln/>
         </p:spPr>
         <p:txBody>
-          <a:bodyPr wrap="square" lIns="254" tIns="254" rIns="254" bIns="254" rtlCol="0" anchor="t">
+          <a:bodyPr wrap="square" lIns="508" tIns="508" rIns="508" bIns="508" rtlCol="0" anchor="t">
             <a:normAutofit/>
           </a:bodyPr>
           <a:lstStyle/>
           <a:p>
-            <a:r>
-              <a:rPr lang="en-US" sz="1380" dirty="0">
+            <a:pPr indent="0" marL="0">
+              <a:buNone/>
+            </a:pPr>
+            <a:r>
+              <a:rPr lang="en-US" sz="1220" dirty="0">
                 <a:solidFill>
                   <a:srgbClr val="17364A"/>
                 </a:solidFill>
@@ -14420,11 +14653,14 @@
               </a:rPr>
               <a:t>Use a tool when no comparable local process exists.</a:t>
             </a:r>
-            <a:endParaRPr lang="en-US" sz="1380" dirty="0"/>
-          </a:p>
-          <a:p>
-            <a:r>
-              <a:rPr lang="en-US" sz="1380" dirty="0">
+            <a:endParaRPr lang="en-US" sz="1220" dirty="0"/>
+          </a:p>
+          <a:p>
+            <a:pPr indent="0" marL="0">
+              <a:buNone/>
+            </a:pPr>
+            <a:r>
+              <a:rPr lang="en-US" sz="1220" dirty="0">
                 <a:solidFill>
                   <a:srgbClr val="17364A"/>
                 </a:solidFill>
@@ -14432,13 +14668,16 @@
                 <a:ea typeface="Aptos" pitchFamily="34" charset="-122"/>
                 <a:cs typeface="Aptos" pitchFamily="34" charset="-120"/>
               </a:rPr>
-              <a:t>Adapt existing department templates when they already fit the purpose.</a:t>
-            </a:r>
-            <a:endParaRPr lang="en-US" sz="1380" dirty="0"/>
-          </a:p>
-          <a:p>
-            <a:r>
-              <a:rPr lang="en-US" sz="1380" dirty="0">
+              <a:t>Adapt existing department templates when they already fit the.</a:t>
+            </a:r>
+            <a:endParaRPr lang="en-US" sz="1220" dirty="0"/>
+          </a:p>
+          <a:p>
+            <a:pPr indent="0" marL="0">
+              <a:buNone/>
+            </a:pPr>
+            <a:r>
+              <a:rPr lang="en-US" sz="1220" dirty="0">
                 <a:solidFill>
                   <a:srgbClr val="17364A"/>
                 </a:solidFill>
@@ -14448,7 +14687,7 @@
               </a:rPr>
               <a:t>Save the completed artifact as evidence of the decision.</a:t>
             </a:r>
-            <a:endParaRPr lang="en-US" sz="1380" dirty="0"/>
+            <a:endParaRPr lang="en-US" sz="1220" dirty="0"/>
           </a:p>
         </p:txBody>
       </p:sp>
@@ -14749,49 +14988,58 @@
           <a:ln/>
         </p:spPr>
         <p:txBody>
-          <a:bodyPr wrap="square" lIns="635" tIns="635" rIns="635" bIns="635" rtlCol="0" anchor="t">
+          <a:bodyPr wrap="square" lIns="1016" tIns="1016" rIns="1016" bIns="1016" rtlCol="0" anchor="t">
             <a:normAutofit/>
           </a:bodyPr>
           <a:lstStyle/>
           <a:p>
+            <a:pPr indent="0" marL="0">
+              <a:buNone/>
+            </a:pPr>
             <a:r>
               <a:rPr lang="en-US" sz="2100" dirty="0">
                 <a:solidFill>
-                  <a:srgbClr val="17364A"/>
-                </a:solidFill>
-                <a:latin typeface="Aptos" pitchFamily="34" charset="0"/>
-                <a:ea typeface="Aptos" pitchFamily="34" charset="-122"/>
-                <a:cs typeface="Aptos" pitchFamily="34" charset="-120"/>
-              </a:rPr>
-              <a:t>Explain why system integration is central to AI readiness in public health.</a:t>
+                  <a:srgbClr val="003A63"/>
+                </a:solidFill>
+                <a:latin typeface="Aptos" pitchFamily="34" charset="0"/>
+                <a:ea typeface="Aptos" pitchFamily="34" charset="-122"/>
+                <a:cs typeface="Aptos" pitchFamily="34" charset="-120"/>
+              </a:rPr>
+              <a:t>• Explain why system integration is central to AI readiness in public health.</a:t>
             </a:r>
             <a:endParaRPr lang="en-US" sz="2100" dirty="0"/>
           </a:p>
           <a:p>
+            <a:pPr indent="0" marL="0">
+              <a:buNone/>
+            </a:pPr>
             <a:r>
               <a:rPr lang="en-US" sz="2100" dirty="0">
                 <a:solidFill>
-                  <a:srgbClr val="17364A"/>
-                </a:solidFill>
-                <a:latin typeface="Aptos" pitchFamily="34" charset="0"/>
-                <a:ea typeface="Aptos" pitchFamily="34" charset="-122"/>
-                <a:cs typeface="Aptos" pitchFamily="34" charset="-120"/>
-              </a:rPr>
-              <a:t>Distinguish among common integration patterns such as point-to-point interfaces, APIs, message brokers,.</a:t>
+                  <a:srgbClr val="003A63"/>
+                </a:solidFill>
+                <a:latin typeface="Aptos" pitchFamily="34" charset="0"/>
+                <a:ea typeface="Aptos" pitchFamily="34" charset="-122"/>
+                <a:cs typeface="Aptos" pitchFamily="34" charset="-120"/>
+              </a:rPr>
+              <a:t>• Distinguish among common integration patterns such as point-to-point interfaces, APIs, message.</a:t>
             </a:r>
             <a:endParaRPr lang="en-US" sz="2100" dirty="0"/>
           </a:p>
           <a:p>
+            <a:pPr indent="0" marL="0">
+              <a:buNone/>
+            </a:pPr>
             <a:r>
               <a:rPr lang="en-US" sz="2100" dirty="0">
                 <a:solidFill>
-                  <a:srgbClr val="17364A"/>
-                </a:solidFill>
-                <a:latin typeface="Aptos" pitchFamily="34" charset="0"/>
-                <a:ea typeface="Aptos" pitchFamily="34" charset="-122"/>
-                <a:cs typeface="Aptos" pitchFamily="34" charset="-120"/>
-              </a:rPr>
-              <a:t>Identify the systems of record, upstream sources, downstream systems, and shared services involved in.</a:t>
+                  <a:srgbClr val="003A63"/>
+                </a:solidFill>
+                <a:latin typeface="Aptos" pitchFamily="34" charset="0"/>
+                <a:ea typeface="Aptos" pitchFamily="34" charset="-122"/>
+                <a:cs typeface="Aptos" pitchFamily="34" charset="-120"/>
+              </a:rPr>
+              <a:t>• Identify the systems of record, upstream sources, downstream systems, and shared services.</a:t>
             </a:r>
             <a:endParaRPr lang="en-US" sz="2100" dirty="0"/>
           </a:p>
@@ -14871,17 +15119,17 @@
         </p:nvSpPr>
         <p:spPr>
           <a:xfrm>
-            <a:off x="7799832" y="1828800"/>
-            <a:ext cx="3145536" cy="685800"/>
-          </a:xfrm>
-          <a:prstGeom prst="rect">
-            <a:avLst/>
-          </a:prstGeom>
-          <a:noFill/>
-          <a:ln/>
-        </p:spPr>
-        <p:txBody>
-          <a:bodyPr wrap="square" lIns="0" tIns="0" rIns="0" bIns="0" rtlCol="0" anchor="t">
+            <a:off x="7799832" y="1801368"/>
+            <a:ext cx="3145536" cy="758952"/>
+          </a:xfrm>
+          <a:prstGeom prst="rect">
+            <a:avLst/>
+          </a:prstGeom>
+          <a:noFill/>
+          <a:ln/>
+        </p:spPr>
+        <p:txBody>
+          <a:bodyPr wrap="square" lIns="254" tIns="254" rIns="254" bIns="254" rtlCol="0" anchor="t">
             <a:normAutofit/>
           </a:bodyPr>
           <a:lstStyle/>
@@ -14890,7 +15138,7 @@
               <a:buNone/>
             </a:pPr>
             <a:r>
-              <a:rPr lang="en-US" sz="1550" dirty="0">
+              <a:rPr lang="en-US" sz="1320" dirty="0">
                 <a:solidFill>
                   <a:srgbClr val="17364A"/>
                 </a:solidFill>
@@ -14900,7 +15148,7 @@
               </a:rPr>
               <a:t>Explain why system integration is central to AI readiness in public health.</a:t>
             </a:r>
-            <a:endParaRPr lang="en-US" sz="1550" dirty="0"/>
+            <a:endParaRPr lang="en-US" sz="1320" dirty="0"/>
           </a:p>
         </p:txBody>
       </p:sp>
@@ -14988,13 +15236,16 @@
           <a:ln/>
         </p:spPr>
         <p:txBody>
-          <a:bodyPr wrap="square" lIns="254" tIns="254" rIns="254" bIns="254" rtlCol="0" anchor="t">
+          <a:bodyPr wrap="square" lIns="508" tIns="508" rIns="508" bIns="508" rtlCol="0" anchor="t">
             <a:normAutofit/>
           </a:bodyPr>
           <a:lstStyle/>
           <a:p>
-            <a:r>
-              <a:rPr lang="en-US" sz="1380" dirty="0">
+            <a:pPr indent="0" marL="0">
+              <a:buNone/>
+            </a:pPr>
+            <a:r>
+              <a:rPr lang="en-US" sz="1220" dirty="0">
                 <a:solidFill>
                   <a:srgbClr val="17364A"/>
                 </a:solidFill>
@@ -15002,13 +15253,16 @@
                 <a:ea typeface="Aptos" pitchFamily="34" charset="-122"/>
                 <a:cs typeface="Aptos" pitchFamily="34" charset="-120"/>
               </a:rPr>
-              <a:t>Distinguish among common integration patterns such as point-to-point interfaces, APIs,.</a:t>
-            </a:r>
-            <a:endParaRPr lang="en-US" sz="1380" dirty="0"/>
-          </a:p>
-          <a:p>
-            <a:r>
-              <a:rPr lang="en-US" sz="1380" dirty="0">
+              <a:t>Distinguish among common integration patterns such as.</a:t>
+            </a:r>
+            <a:endParaRPr lang="en-US" sz="1220" dirty="0"/>
+          </a:p>
+          <a:p>
+            <a:pPr indent="0" marL="0">
+              <a:buNone/>
+            </a:pPr>
+            <a:r>
+              <a:rPr lang="en-US" sz="1220" dirty="0">
                 <a:solidFill>
                   <a:srgbClr val="17364A"/>
                 </a:solidFill>
@@ -15016,13 +15270,16 @@
                 <a:ea typeface="Aptos" pitchFamily="34" charset="-122"/>
                 <a:cs typeface="Aptos" pitchFamily="34" charset="-120"/>
               </a:rPr>
-              <a:t>Identify the systems of record, upstream sources, downstream systems, and shared services.</a:t>
-            </a:r>
-            <a:endParaRPr lang="en-US" sz="1380" dirty="0"/>
-          </a:p>
-          <a:p>
-            <a:r>
-              <a:rPr lang="en-US" sz="1380" dirty="0">
+              <a:t>Identify the systems of record, upstream sources, downstream.</a:t>
+            </a:r>
+            <a:endParaRPr lang="en-US" sz="1220" dirty="0"/>
+          </a:p>
+          <a:p>
+            <a:pPr indent="0" marL="0">
+              <a:buNone/>
+            </a:pPr>
+            <a:r>
+              <a:rPr lang="en-US" sz="1220" dirty="0">
                 <a:solidFill>
                   <a:srgbClr val="17364A"/>
                 </a:solidFill>
@@ -15030,9 +15287,9 @@
                 <a:ea typeface="Aptos" pitchFamily="34" charset="-122"/>
                 <a:cs typeface="Aptos" pitchFamily="34" charset="-120"/>
               </a:rPr>
-              <a:t>Assess whether a proposed AI tool requires read-only access, write-back access, embedded.</a:t>
-            </a:r>
-            <a:endParaRPr lang="en-US" sz="1380" dirty="0"/>
+              <a:t>Assess whether a proposed AI tool requires read-only access,.</a:t>
+            </a:r>
+            <a:endParaRPr lang="en-US" sz="1220" dirty="0"/>
           </a:p>
         </p:txBody>
       </p:sp>
@@ -15110,17 +15367,17 @@
         </p:nvSpPr>
         <p:spPr>
           <a:xfrm>
-            <a:off x="7799832" y="5001768"/>
-            <a:ext cx="3145536" cy="502920"/>
-          </a:xfrm>
-          <a:prstGeom prst="rect">
-            <a:avLst/>
-          </a:prstGeom>
-          <a:noFill/>
-          <a:ln/>
-        </p:spPr>
-        <p:txBody>
-          <a:bodyPr wrap="square" lIns="0" tIns="0" rIns="0" bIns="0" rtlCol="0" anchor="t">
+            <a:off x="7799832" y="4974336"/>
+            <a:ext cx="3145536" cy="576072"/>
+          </a:xfrm>
+          <a:prstGeom prst="rect">
+            <a:avLst/>
+          </a:prstGeom>
+          <a:noFill/>
+          <a:ln/>
+        </p:spPr>
+        <p:txBody>
+          <a:bodyPr wrap="square" lIns="254" tIns="254" rIns="254" bIns="254" rtlCol="0" anchor="t">
             <a:normAutofit/>
           </a:bodyPr>
           <a:lstStyle/>
@@ -15129,7 +15386,7 @@
               <a:buNone/>
             </a:pPr>
             <a:r>
-              <a:rPr lang="en-US" sz="1550" dirty="0">
+              <a:rPr lang="en-US" sz="1320" dirty="0">
                 <a:solidFill>
                   <a:srgbClr val="17364A"/>
                 </a:solidFill>
@@ -15137,9 +15394,9 @@
                 <a:ea typeface="Aptos" pitchFamily="34" charset="-122"/>
                 <a:cs typeface="Aptos" pitchFamily="34" charset="-120"/>
               </a:rPr>
-              <a:t>Use the assignment to test whether you can explain the concept, apply it to a realistic public health situation, and identify what would need review before the work moves forward.</a:t>
-            </a:r>
-            <a:endParaRPr lang="en-US" sz="1550" dirty="0"/>
+              <a:t>Use the assignment to test whether you can explain the concept, apply it to a realistic public health situation, and.</a:t>
+            </a:r>
+            <a:endParaRPr lang="en-US" sz="1320" dirty="0"/>
           </a:p>
         </p:txBody>
       </p:sp>
@@ -15440,21 +15697,24 @@
           <a:ln/>
         </p:spPr>
         <p:txBody>
-          <a:bodyPr wrap="square" lIns="635" tIns="635" rIns="635" bIns="635" rtlCol="0" anchor="t">
+          <a:bodyPr wrap="square" lIns="1016" tIns="1016" rIns="1016" bIns="1016" rtlCol="0" anchor="t">
             <a:normAutofit/>
           </a:bodyPr>
           <a:lstStyle/>
           <a:p>
+            <a:pPr indent="0" marL="0">
+              <a:buNone/>
+            </a:pPr>
             <a:r>
               <a:rPr lang="en-US" sz="2100" dirty="0">
                 <a:solidFill>
-                  <a:srgbClr val="17364A"/>
-                </a:solidFill>
-                <a:latin typeface="Aptos" pitchFamily="34" charset="0"/>
-                <a:ea typeface="Aptos" pitchFamily="34" charset="-122"/>
-                <a:cs typeface="Aptos" pitchFamily="34" charset="-120"/>
-              </a:rPr>
-              <a:t>Produce an integration pattern worksheet for a public health AI use case.</a:t>
+                  <a:srgbClr val="003A63"/>
+                </a:solidFill>
+                <a:latin typeface="Aptos" pitchFamily="34" charset="0"/>
+                <a:ea typeface="Aptos" pitchFamily="34" charset="-122"/>
+                <a:cs typeface="Aptos" pitchFamily="34" charset="-120"/>
+              </a:rPr>
+              <a:t>• Produce an integration pattern worksheet for a public health AI use case.</a:t>
             </a:r>
             <a:endParaRPr lang="en-US" sz="2100" dirty="0"/>
           </a:p>
@@ -15534,17 +15794,17 @@
         </p:nvSpPr>
         <p:spPr>
           <a:xfrm>
-            <a:off x="7799832" y="1828800"/>
-            <a:ext cx="3145536" cy="685800"/>
-          </a:xfrm>
-          <a:prstGeom prst="rect">
-            <a:avLst/>
-          </a:prstGeom>
-          <a:noFill/>
-          <a:ln/>
-        </p:spPr>
-        <p:txBody>
-          <a:bodyPr wrap="square" lIns="0" tIns="0" rIns="0" bIns="0" rtlCol="0" anchor="t">
+            <a:off x="7799832" y="1801368"/>
+            <a:ext cx="3145536" cy="758952"/>
+          </a:xfrm>
+          <a:prstGeom prst="rect">
+            <a:avLst/>
+          </a:prstGeom>
+          <a:noFill/>
+          <a:ln/>
+        </p:spPr>
+        <p:txBody>
+          <a:bodyPr wrap="square" lIns="254" tIns="254" rIns="254" bIns="254" rtlCol="0" anchor="t">
             <a:normAutofit/>
           </a:bodyPr>
           <a:lstStyle/>
@@ -15553,7 +15813,7 @@
               <a:buNone/>
             </a:pPr>
             <a:r>
-              <a:rPr lang="en-US" sz="1550" dirty="0">
+              <a:rPr lang="en-US" sz="1320" dirty="0">
                 <a:solidFill>
                   <a:srgbClr val="17364A"/>
                 </a:solidFill>
@@ -15563,7 +15823,7 @@
               </a:rPr>
               <a:t>Produce an integration pattern worksheet for a public health AI use case.</a:t>
             </a:r>
-            <a:endParaRPr lang="en-US" sz="1550" dirty="0"/>
+            <a:endParaRPr lang="en-US" sz="1320" dirty="0"/>
           </a:p>
         </p:txBody>
       </p:sp>
@@ -15651,13 +15911,16 @@
           <a:ln/>
         </p:spPr>
         <p:txBody>
-          <a:bodyPr wrap="square" lIns="254" tIns="254" rIns="254" bIns="254" rtlCol="0" anchor="t">
+          <a:bodyPr wrap="square" lIns="508" tIns="508" rIns="508" bIns="508" rtlCol="0" anchor="t">
             <a:normAutofit/>
           </a:bodyPr>
           <a:lstStyle/>
           <a:p>
-            <a:r>
-              <a:rPr lang="en-US" sz="1380" dirty="0">
+            <a:pPr indent="0" marL="0">
+              <a:buNone/>
+            </a:pPr>
+            <a:r>
+              <a:rPr lang="en-US" sz="1220" dirty="0">
                 <a:solidFill>
                   <a:srgbClr val="17364A"/>
                 </a:solidFill>
@@ -15665,9 +15928,9 @@
                 <a:ea typeface="Aptos" pitchFamily="34" charset="-122"/>
                 <a:cs typeface="Aptos" pitchFamily="34" charset="-120"/>
               </a:rPr>
-              <a:t>Produce an integration pattern worksheet for a public health AI use case.</a:t>
-            </a:r>
-            <a:endParaRPr lang="en-US" sz="1380" dirty="0"/>
+              <a:t>Produce an integration pattern worksheet for a public health AI.</a:t>
+            </a:r>
+            <a:endParaRPr lang="en-US" sz="1220" dirty="0"/>
           </a:p>
         </p:txBody>
       </p:sp>
@@ -15745,17 +16008,17 @@
         </p:nvSpPr>
         <p:spPr>
           <a:xfrm>
-            <a:off x="7799832" y="5001768"/>
-            <a:ext cx="3145536" cy="502920"/>
-          </a:xfrm>
-          <a:prstGeom prst="rect">
-            <a:avLst/>
-          </a:prstGeom>
-          <a:noFill/>
-          <a:ln/>
-        </p:spPr>
-        <p:txBody>
-          <a:bodyPr wrap="square" lIns="0" tIns="0" rIns="0" bIns="0" rtlCol="0" anchor="t">
+            <a:off x="7799832" y="4974336"/>
+            <a:ext cx="3145536" cy="576072"/>
+          </a:xfrm>
+          <a:prstGeom prst="rect">
+            <a:avLst/>
+          </a:prstGeom>
+          <a:noFill/>
+          <a:ln/>
+        </p:spPr>
+        <p:txBody>
+          <a:bodyPr wrap="square" lIns="254" tIns="254" rIns="254" bIns="254" rtlCol="0" anchor="t">
             <a:normAutofit/>
           </a:bodyPr>
           <a:lstStyle/>
@@ -15764,7 +16027,7 @@
               <a:buNone/>
             </a:pPr>
             <a:r>
-              <a:rPr lang="en-US" sz="1550" dirty="0">
+              <a:rPr lang="en-US" sz="1320" dirty="0">
                 <a:solidFill>
                   <a:srgbClr val="17364A"/>
                 </a:solidFill>
@@ -15772,9 +16035,9 @@
                 <a:ea typeface="Aptos" pitchFamily="34" charset="-122"/>
                 <a:cs typeface="Aptos" pitchFamily="34" charset="-120"/>
               </a:rPr>
-              <a:t>Use the assignment to test whether you can explain the concept, apply it to a realistic public health situation, and identify what would need review before the work moves forward.</a:t>
-            </a:r>
-            <a:endParaRPr lang="en-US" sz="1550" dirty="0"/>
+              <a:t>Use the assignment to test whether you can explain the concept, apply it to a realistic public health situation, and.</a:t>
+            </a:r>
+            <a:endParaRPr lang="en-US" sz="1320" dirty="0"/>
           </a:p>
         </p:txBody>
       </p:sp>
@@ -16075,49 +16338,58 @@
           <a:ln/>
         </p:spPr>
         <p:txBody>
-          <a:bodyPr wrap="square" lIns="635" tIns="635" rIns="635" bIns="635" rtlCol="0" anchor="t">
+          <a:bodyPr wrap="square" lIns="1016" tIns="1016" rIns="1016" bIns="1016" rtlCol="0" anchor="t">
             <a:normAutofit/>
           </a:bodyPr>
           <a:lstStyle/>
           <a:p>
+            <a:pPr indent="0" marL="0">
+              <a:buNone/>
+            </a:pPr>
             <a:r>
               <a:rPr lang="en-US" sz="2100" dirty="0">
                 <a:solidFill>
-                  <a:srgbClr val="17364A"/>
-                </a:solidFill>
-                <a:latin typeface="Aptos" pitchFamily="34" charset="0"/>
-                <a:ea typeface="Aptos" pitchFamily="34" charset="-122"/>
-                <a:cs typeface="Aptos" pitchFamily="34" charset="-120"/>
-              </a:rPr>
-              <a:t>Public health AI rarely succeeds as a stand-alone application.</a:t>
+                  <a:srgbClr val="003A63"/>
+                </a:solidFill>
+                <a:latin typeface="Aptos" pitchFamily="34" charset="0"/>
+                <a:ea typeface="Aptos" pitchFamily="34" charset="-122"/>
+                <a:cs typeface="Aptos" pitchFamily="34" charset="-120"/>
+              </a:rPr>
+              <a:t>• Public health AI rarely succeeds as a stand-alone application.</a:t>
             </a:r>
             <a:endParaRPr lang="en-US" sz="2100" dirty="0"/>
           </a:p>
           <a:p>
+            <a:pPr indent="0" marL="0">
+              <a:buNone/>
+            </a:pPr>
             <a:r>
               <a:rPr lang="en-US" sz="2100" dirty="0">
                 <a:solidFill>
-                  <a:srgbClr val="17364A"/>
-                </a:solidFill>
-                <a:latin typeface="Aptos" pitchFamily="34" charset="0"/>
-                <a:ea typeface="Aptos" pitchFamily="34" charset="-122"/>
-                <a:cs typeface="Aptos" pitchFamily="34" charset="-120"/>
-              </a:rPr>
-              <a:t>The value of an AI-supported workflow depends on how well it is integrated with systems of record, data.</a:t>
+                  <a:srgbClr val="003A63"/>
+                </a:solidFill>
+                <a:latin typeface="Aptos" pitchFamily="34" charset="0"/>
+                <a:ea typeface="Aptos" pitchFamily="34" charset="-122"/>
+                <a:cs typeface="Aptos" pitchFamily="34" charset="-120"/>
+              </a:rPr>
+              <a:t>• The value of an AI-supported workflow depends on how well it is integrated with systems of.</a:t>
             </a:r>
             <a:endParaRPr lang="en-US" sz="2100" dirty="0"/>
           </a:p>
           <a:p>
+            <a:pPr indent="0" marL="0">
+              <a:buNone/>
+            </a:pPr>
             <a:r>
               <a:rPr lang="en-US" sz="2100" dirty="0">
                 <a:solidFill>
-                  <a:srgbClr val="17364A"/>
-                </a:solidFill>
-                <a:latin typeface="Aptos" pitchFamily="34" charset="0"/>
-                <a:ea typeface="Aptos" pitchFamily="34" charset="-122"/>
-                <a:cs typeface="Aptos" pitchFamily="34" charset="-120"/>
-              </a:rPr>
-              <a:t>This module helps learners understand the integration patterns that allow AI to support public health.</a:t>
+                  <a:srgbClr val="003A63"/>
+                </a:solidFill>
+                <a:latin typeface="Aptos" pitchFamily="34" charset="0"/>
+                <a:ea typeface="Aptos" pitchFamily="34" charset="-122"/>
+                <a:cs typeface="Aptos" pitchFamily="34" charset="-120"/>
+              </a:rPr>
+              <a:t>• This module helps learners understand the integration patterns that allow AI to support public.</a:t>
             </a:r>
             <a:endParaRPr lang="en-US" sz="2100" dirty="0"/>
           </a:p>
@@ -16197,17 +16469,17 @@
         </p:nvSpPr>
         <p:spPr>
           <a:xfrm>
-            <a:off x="7799832" y="1828800"/>
-            <a:ext cx="3145536" cy="685800"/>
-          </a:xfrm>
-          <a:prstGeom prst="rect">
-            <a:avLst/>
-          </a:prstGeom>
-          <a:noFill/>
-          <a:ln/>
-        </p:spPr>
-        <p:txBody>
-          <a:bodyPr wrap="square" lIns="0" tIns="0" rIns="0" bIns="0" rtlCol="0" anchor="t">
+            <a:off x="7799832" y="1801368"/>
+            <a:ext cx="3145536" cy="758952"/>
+          </a:xfrm>
+          <a:prstGeom prst="rect">
+            <a:avLst/>
+          </a:prstGeom>
+          <a:noFill/>
+          <a:ln/>
+        </p:spPr>
+        <p:txBody>
+          <a:bodyPr wrap="square" lIns="254" tIns="254" rIns="254" bIns="254" rtlCol="0" anchor="t">
             <a:normAutofit/>
           </a:bodyPr>
           <a:lstStyle/>
@@ -16216,7 +16488,7 @@
               <a:buNone/>
             </a:pPr>
             <a:r>
-              <a:rPr lang="en-US" sz="1550" dirty="0">
+              <a:rPr lang="en-US" sz="1320" dirty="0">
                 <a:solidFill>
                   <a:srgbClr val="17364A"/>
                 </a:solidFill>
@@ -16226,7 +16498,7 @@
               </a:rPr>
               <a:t>Public health AI rarely succeeds as a stand-alone application.</a:t>
             </a:r>
-            <a:endParaRPr lang="en-US" sz="1550" dirty="0"/>
+            <a:endParaRPr lang="en-US" sz="1320" dirty="0"/>
           </a:p>
         </p:txBody>
       </p:sp>
@@ -16314,13 +16586,16 @@
           <a:ln/>
         </p:spPr>
         <p:txBody>
-          <a:bodyPr wrap="square" lIns="254" tIns="254" rIns="254" bIns="254" rtlCol="0" anchor="t">
+          <a:bodyPr wrap="square" lIns="508" tIns="508" rIns="508" bIns="508" rtlCol="0" anchor="t">
             <a:normAutofit/>
           </a:bodyPr>
           <a:lstStyle/>
           <a:p>
-            <a:r>
-              <a:rPr lang="en-US" sz="1380" dirty="0">
+            <a:pPr indent="0" marL="0">
+              <a:buNone/>
+            </a:pPr>
+            <a:r>
+              <a:rPr lang="en-US" sz="1220" dirty="0">
                 <a:solidFill>
                   <a:srgbClr val="17364A"/>
                 </a:solidFill>
@@ -16328,13 +16603,16 @@
                 <a:ea typeface="Aptos" pitchFamily="34" charset="-122"/>
                 <a:cs typeface="Aptos" pitchFamily="34" charset="-120"/>
               </a:rPr>
-              <a:t>The value of an AI-supported workflow depends on how well it is integrated with systems of.</a:t>
-            </a:r>
-            <a:endParaRPr lang="en-US" sz="1380" dirty="0"/>
-          </a:p>
-          <a:p>
-            <a:r>
-              <a:rPr lang="en-US" sz="1380" dirty="0">
+              <a:t>The value of an AI-supported workflow depends on how well it is.</a:t>
+            </a:r>
+            <a:endParaRPr lang="en-US" sz="1220" dirty="0"/>
+          </a:p>
+          <a:p>
+            <a:pPr indent="0" marL="0">
+              <a:buNone/>
+            </a:pPr>
+            <a:r>
+              <a:rPr lang="en-US" sz="1220" dirty="0">
                 <a:solidFill>
                   <a:srgbClr val="17364A"/>
                 </a:solidFill>
@@ -16342,13 +16620,16 @@
                 <a:ea typeface="Aptos" pitchFamily="34" charset="-122"/>
                 <a:cs typeface="Aptos" pitchFamily="34" charset="-120"/>
               </a:rPr>
-              <a:t>This module helps learners understand the integration patterns that allow AI to support.</a:t>
-            </a:r>
-            <a:endParaRPr lang="en-US" sz="1380" dirty="0"/>
-          </a:p>
-          <a:p>
-            <a:r>
-              <a:rPr lang="en-US" sz="1380" dirty="0">
+              <a:t>This module helps learners understand the integration patterns.</a:t>
+            </a:r>
+            <a:endParaRPr lang="en-US" sz="1220" dirty="0"/>
+          </a:p>
+          <a:p>
+            <a:pPr indent="0" marL="0">
+              <a:buNone/>
+            </a:pPr>
+            <a:r>
+              <a:rPr lang="en-US" sz="1220" dirty="0">
                 <a:solidFill>
                   <a:srgbClr val="17364A"/>
                 </a:solidFill>
@@ -16356,9 +16637,9 @@
                 <a:ea typeface="Aptos" pitchFamily="34" charset="-122"/>
                 <a:cs typeface="Aptos" pitchFamily="34" charset="-120"/>
               </a:rPr>
-              <a:t>The module focuses on practical integration choices rather than software engineering theory.</a:t>
-            </a:r>
-            <a:endParaRPr lang="en-US" sz="1380" dirty="0"/>
+              <a:t>The module focuses on practical integration choices rather than.</a:t>
+            </a:r>
+            <a:endParaRPr lang="en-US" sz="1220" dirty="0"/>
           </a:p>
         </p:txBody>
       </p:sp>
@@ -16436,17 +16717,17 @@
         </p:nvSpPr>
         <p:spPr>
           <a:xfrm>
-            <a:off x="7799832" y="5001768"/>
-            <a:ext cx="3145536" cy="502920"/>
-          </a:xfrm>
-          <a:prstGeom prst="rect">
-            <a:avLst/>
-          </a:prstGeom>
-          <a:noFill/>
-          <a:ln/>
-        </p:spPr>
-        <p:txBody>
-          <a:bodyPr wrap="square" lIns="0" tIns="0" rIns="0" bIns="0" rtlCol="0" anchor="t">
+            <a:off x="7799832" y="4974336"/>
+            <a:ext cx="3145536" cy="576072"/>
+          </a:xfrm>
+          <a:prstGeom prst="rect">
+            <a:avLst/>
+          </a:prstGeom>
+          <a:noFill/>
+          <a:ln/>
+        </p:spPr>
+        <p:txBody>
+          <a:bodyPr wrap="square" lIns="254" tIns="254" rIns="254" bIns="254" rtlCol="0" anchor="t">
             <a:normAutofit/>
           </a:bodyPr>
           <a:lstStyle/>
@@ -16455,7 +16736,7 @@
               <a:buNone/>
             </a:pPr>
             <a:r>
-              <a:rPr lang="en-US" sz="1550" dirty="0">
+              <a:rPr lang="en-US" sz="1320" dirty="0">
                 <a:solidFill>
                   <a:srgbClr val="17364A"/>
                 </a:solidFill>
@@ -16463,9 +16744,9 @@
                 <a:ea typeface="Aptos" pitchFamily="34" charset="-122"/>
                 <a:cs typeface="Aptos" pitchFamily="34" charset="-120"/>
               </a:rPr>
-              <a:t>Connect the concept to public health purpose, responsible use, required safeguards, documentation, and the next action a department should take.</a:t>
-            </a:r>
-            <a:endParaRPr lang="en-US" sz="1550" dirty="0"/>
+              <a:t>Connect the concept to public health purpose, responsible use, required safeguards, documentation, and the next action a.</a:t>
+            </a:r>
+            <a:endParaRPr lang="en-US" sz="1320" dirty="0"/>
           </a:p>
         </p:txBody>
       </p:sp>
@@ -16766,49 +17047,58 @@
           <a:ln/>
         </p:spPr>
         <p:txBody>
-          <a:bodyPr wrap="square" lIns="635" tIns="635" rIns="635" bIns="635" rtlCol="0" anchor="t">
+          <a:bodyPr wrap="square" lIns="1016" tIns="1016" rIns="1016" bIns="1016" rtlCol="0" anchor="t">
             <a:normAutofit/>
           </a:bodyPr>
           <a:lstStyle/>
           <a:p>
+            <a:pPr indent="0" marL="0">
+              <a:buNone/>
+            </a:pPr>
             <a:r>
               <a:rPr lang="en-US" sz="2100" dirty="0">
                 <a:solidFill>
-                  <a:srgbClr val="17364A"/>
-                </a:solidFill>
-                <a:latin typeface="Aptos" pitchFamily="34" charset="0"/>
-                <a:ea typeface="Aptos" pitchFamily="34" charset="-122"/>
-                <a:cs typeface="Aptos" pitchFamily="34" charset="-120"/>
-              </a:rPr>
-              <a:t>Integration pattern: A reusable approach for connecting systems, services, data flows, and workflows.</a:t>
+                  <a:srgbClr val="003A63"/>
+                </a:solidFill>
+                <a:latin typeface="Aptos" pitchFamily="34" charset="0"/>
+                <a:ea typeface="Aptos" pitchFamily="34" charset="-122"/>
+                <a:cs typeface="Aptos" pitchFamily="34" charset="-120"/>
+              </a:rPr>
+              <a:t>• Integration pattern: A reusable approach for connecting systems, services, data flows, and.</a:t>
             </a:r>
             <a:endParaRPr lang="en-US" sz="2100" dirty="0"/>
           </a:p>
           <a:p>
+            <a:pPr indent="0" marL="0">
+              <a:buNone/>
+            </a:pPr>
             <a:r>
               <a:rPr lang="en-US" sz="2100" dirty="0">
                 <a:solidFill>
-                  <a:srgbClr val="17364A"/>
-                </a:solidFill>
-                <a:latin typeface="Aptos" pitchFamily="34" charset="0"/>
-                <a:ea typeface="Aptos" pitchFamily="34" charset="-122"/>
-                <a:cs typeface="Aptos" pitchFamily="34" charset="-120"/>
-              </a:rPr>
-              <a:t>Interface engine: Software that routes, transforms, validates, and monitors messages between systems.</a:t>
+                  <a:srgbClr val="003A63"/>
+                </a:solidFill>
+                <a:latin typeface="Aptos" pitchFamily="34" charset="0"/>
+                <a:ea typeface="Aptos" pitchFamily="34" charset="-122"/>
+                <a:cs typeface="Aptos" pitchFamily="34" charset="-120"/>
+              </a:rPr>
+              <a:t>• Interface engine: Software that routes, transforms, validates, and monitors messages between.</a:t>
             </a:r>
             <a:endParaRPr lang="en-US" sz="2100" dirty="0"/>
           </a:p>
           <a:p>
+            <a:pPr indent="0" marL="0">
+              <a:buNone/>
+            </a:pPr>
             <a:r>
               <a:rPr lang="en-US" sz="2100" dirty="0">
                 <a:solidFill>
-                  <a:srgbClr val="17364A"/>
-                </a:solidFill>
-                <a:latin typeface="Aptos" pitchFamily="34" charset="0"/>
-                <a:ea typeface="Aptos" pitchFamily="34" charset="-122"/>
-                <a:cs typeface="Aptos" pitchFamily="34" charset="-120"/>
-              </a:rPr>
-              <a:t>Message broker: A service that allows systems to send and receive messages through a managed queue or.</a:t>
+                  <a:srgbClr val="003A63"/>
+                </a:solidFill>
+                <a:latin typeface="Aptos" pitchFamily="34" charset="0"/>
+                <a:ea typeface="Aptos" pitchFamily="34" charset="-122"/>
+                <a:cs typeface="Aptos" pitchFamily="34" charset="-120"/>
+              </a:rPr>
+              <a:t>• Message broker: A service that allows systems to send and receive messages through a managed.</a:t>
             </a:r>
             <a:endParaRPr lang="en-US" sz="2100" dirty="0"/>
           </a:p>
@@ -16888,17 +17178,17 @@
         </p:nvSpPr>
         <p:spPr>
           <a:xfrm>
-            <a:off x="7799832" y="1828800"/>
-            <a:ext cx="3145536" cy="685800"/>
-          </a:xfrm>
-          <a:prstGeom prst="rect">
-            <a:avLst/>
-          </a:prstGeom>
-          <a:noFill/>
-          <a:ln/>
-        </p:spPr>
-        <p:txBody>
-          <a:bodyPr wrap="square" lIns="0" tIns="0" rIns="0" bIns="0" rtlCol="0" anchor="t">
+            <a:off x="7799832" y="1801368"/>
+            <a:ext cx="3145536" cy="758952"/>
+          </a:xfrm>
+          <a:prstGeom prst="rect">
+            <a:avLst/>
+          </a:prstGeom>
+          <a:noFill/>
+          <a:ln/>
+        </p:spPr>
+        <p:txBody>
+          <a:bodyPr wrap="square" lIns="254" tIns="254" rIns="254" bIns="254" rtlCol="0" anchor="t">
             <a:normAutofit/>
           </a:bodyPr>
           <a:lstStyle/>
@@ -16907,7 +17197,7 @@
               <a:buNone/>
             </a:pPr>
             <a:r>
-              <a:rPr lang="en-US" sz="1550" dirty="0">
+              <a:rPr lang="en-US" sz="1320" dirty="0">
                 <a:solidFill>
                   <a:srgbClr val="17364A"/>
                 </a:solidFill>
@@ -16917,7 +17207,7 @@
               </a:rPr>
               <a:t>Integration pattern: A reusable approach for connecting systems, services, data flows, and workflows.</a:t>
             </a:r>
-            <a:endParaRPr lang="en-US" sz="1550" dirty="0"/>
+            <a:endParaRPr lang="en-US" sz="1320" dirty="0"/>
           </a:p>
         </p:txBody>
       </p:sp>
@@ -17005,13 +17295,16 @@
           <a:ln/>
         </p:spPr>
         <p:txBody>
-          <a:bodyPr wrap="square" lIns="254" tIns="254" rIns="254" bIns="254" rtlCol="0" anchor="t">
+          <a:bodyPr wrap="square" lIns="508" tIns="508" rIns="508" bIns="508" rtlCol="0" anchor="t">
             <a:normAutofit/>
           </a:bodyPr>
           <a:lstStyle/>
           <a:p>
-            <a:r>
-              <a:rPr lang="en-US" sz="1380" dirty="0">
+            <a:pPr indent="0" marL="0">
+              <a:buNone/>
+            </a:pPr>
+            <a:r>
+              <a:rPr lang="en-US" sz="1220" dirty="0">
                 <a:solidFill>
                   <a:srgbClr val="17364A"/>
                 </a:solidFill>
@@ -17019,13 +17312,16 @@
                 <a:ea typeface="Aptos" pitchFamily="34" charset="-122"/>
                 <a:cs typeface="Aptos" pitchFamily="34" charset="-120"/>
               </a:rPr>
-              <a:t>Message broker: A service that allows systems to send and receive messages through a.</a:t>
-            </a:r>
-            <a:endParaRPr lang="en-US" sz="1380" dirty="0"/>
-          </a:p>
-          <a:p>
-            <a:r>
-              <a:rPr lang="en-US" sz="1380" dirty="0">
+              <a:t>Message broker: A service that allows systems to send and receive.</a:t>
+            </a:r>
+            <a:endParaRPr lang="en-US" sz="1220" dirty="0"/>
+          </a:p>
+          <a:p>
+            <a:pPr indent="0" marL="0">
+              <a:buNone/>
+            </a:pPr>
+            <a:r>
+              <a:rPr lang="en-US" sz="1220" dirty="0">
                 <a:solidFill>
                   <a:srgbClr val="17364A"/>
                 </a:solidFill>
@@ -17033,13 +17329,16 @@
                 <a:ea typeface="Aptos" pitchFamily="34" charset="-122"/>
                 <a:cs typeface="Aptos" pitchFamily="34" charset="-120"/>
               </a:rPr>
-              <a:t>Bulk data exchange: The transfer of large datasets at scheduled intervals or on demand.</a:t>
-            </a:r>
-            <a:endParaRPr lang="en-US" sz="1380" dirty="0"/>
-          </a:p>
-          <a:p>
-            <a:r>
-              <a:rPr lang="en-US" sz="1380" dirty="0">
+              <a:t>Bulk data exchange: The transfer of large datasets at scheduled.</a:t>
+            </a:r>
+            <a:endParaRPr lang="en-US" sz="1220" dirty="0"/>
+          </a:p>
+          <a:p>
+            <a:pPr indent="0" marL="0">
+              <a:buNone/>
+            </a:pPr>
+            <a:r>
+              <a:rPr lang="en-US" sz="1220" dirty="0">
                 <a:solidFill>
                   <a:srgbClr val="17364A"/>
                 </a:solidFill>
@@ -17047,9 +17346,9 @@
                 <a:ea typeface="Aptos" pitchFamily="34" charset="-122"/>
                 <a:cs typeface="Aptos" pitchFamily="34" charset="-120"/>
               </a:rPr>
-              <a:t>Write-back: A system action that updates, creates, or changes information in another system.</a:t>
-            </a:r>
-            <a:endParaRPr lang="en-US" sz="1380" dirty="0"/>
+              <a:t>Write-back: A system action that updates, creates, or changes.</a:t>
+            </a:r>
+            <a:endParaRPr lang="en-US" sz="1220" dirty="0"/>
           </a:p>
         </p:txBody>
       </p:sp>
@@ -17127,17 +17426,17 @@
         </p:nvSpPr>
         <p:spPr>
           <a:xfrm>
-            <a:off x="7799832" y="5001768"/>
-            <a:ext cx="3145536" cy="502920"/>
-          </a:xfrm>
-          <a:prstGeom prst="rect">
-            <a:avLst/>
-          </a:prstGeom>
-          <a:noFill/>
-          <a:ln/>
-        </p:spPr>
-        <p:txBody>
-          <a:bodyPr wrap="square" lIns="0" tIns="0" rIns="0" bIns="0" rtlCol="0" anchor="t">
+            <a:off x="7799832" y="4974336"/>
+            <a:ext cx="3145536" cy="576072"/>
+          </a:xfrm>
+          <a:prstGeom prst="rect">
+            <a:avLst/>
+          </a:prstGeom>
+          <a:noFill/>
+          <a:ln/>
+        </p:spPr>
+        <p:txBody>
+          <a:bodyPr wrap="square" lIns="254" tIns="254" rIns="254" bIns="254" rtlCol="0" anchor="t">
             <a:normAutofit/>
           </a:bodyPr>
           <a:lstStyle/>
@@ -17146,7 +17445,7 @@
               <a:buNone/>
             </a:pPr>
             <a:r>
-              <a:rPr lang="en-US" sz="1550" dirty="0">
+              <a:rPr lang="en-US" sz="1320" dirty="0">
                 <a:solidFill>
                   <a:srgbClr val="17364A"/>
                 </a:solidFill>
@@ -17154,9 +17453,9 @@
                 <a:ea typeface="Aptos" pitchFamily="34" charset="-122"/>
                 <a:cs typeface="Aptos" pitchFamily="34" charset="-120"/>
               </a:rPr>
-              <a:t>Connect the concept to public health purpose, responsible use, required safeguards, documentation, and the next action a department should take.</a:t>
-            </a:r>
-            <a:endParaRPr lang="en-US" sz="1550" dirty="0"/>
+              <a:t>Connect the concept to public health purpose, responsible use, required safeguards, documentation, and the next action a.</a:t>
+            </a:r>
+            <a:endParaRPr lang="en-US" sz="1320" dirty="0"/>
           </a:p>
         </p:txBody>
       </p:sp>
@@ -17457,49 +17756,58 @@
           <a:ln/>
         </p:spPr>
         <p:txBody>
-          <a:bodyPr wrap="square" lIns="635" tIns="635" rIns="635" bIns="635" rtlCol="0" anchor="t">
+          <a:bodyPr wrap="square" lIns="1016" tIns="1016" rIns="1016" bIns="1016" rtlCol="0" anchor="t">
             <a:normAutofit/>
           </a:bodyPr>
           <a:lstStyle/>
           <a:p>
+            <a:pPr indent="0" marL="0">
+              <a:buNone/>
+            </a:pPr>
             <a:r>
               <a:rPr lang="en-US" sz="2100" dirty="0">
                 <a:solidFill>
-                  <a:srgbClr val="17364A"/>
-                </a:solidFill>
-                <a:latin typeface="Aptos" pitchFamily="34" charset="0"/>
-                <a:ea typeface="Aptos" pitchFamily="34" charset="-122"/>
-                <a:cs typeface="Aptos" pitchFamily="34" charset="-120"/>
-              </a:rPr>
-              <a:t>This national-level module is intended for training and planning purposes.</a:t>
+                  <a:srgbClr val="003A63"/>
+                </a:solidFill>
+                <a:latin typeface="Aptos" pitchFamily="34" charset="0"/>
+                <a:ea typeface="Aptos" pitchFamily="34" charset="-122"/>
+                <a:cs typeface="Aptos" pitchFamily="34" charset="-120"/>
+              </a:rPr>
+              <a:t>• This national-level module is intended for training and planning purposes.</a:t>
             </a:r>
             <a:endParaRPr lang="en-US" sz="2100" dirty="0"/>
           </a:p>
           <a:p>
+            <a:pPr indent="0" marL="0">
+              <a:buNone/>
+            </a:pPr>
             <a:r>
               <a:rPr lang="en-US" sz="2100" dirty="0">
                 <a:solidFill>
-                  <a:srgbClr val="17364A"/>
-                </a:solidFill>
-                <a:latin typeface="Aptos" pitchFamily="34" charset="0"/>
-                <a:ea typeface="Aptos" pitchFamily="34" charset="-122"/>
-                <a:cs typeface="Aptos" pitchFamily="34" charset="-120"/>
-              </a:rPr>
-              <a:t>It does not replace legal, privacy, procurement, civil rights, records, or agency policy review.</a:t>
+                  <a:srgbClr val="003A63"/>
+                </a:solidFill>
+                <a:latin typeface="Aptos" pitchFamily="34" charset="0"/>
+                <a:ea typeface="Aptos" pitchFamily="34" charset="-122"/>
+                <a:cs typeface="Aptos" pitchFamily="34" charset="-120"/>
+              </a:rPr>
+              <a:t>• It does not replace legal, privacy, procurement, civil rights, records, or agency policy review.</a:t>
             </a:r>
             <a:endParaRPr lang="en-US" sz="2100" dirty="0"/>
           </a:p>
           <a:p>
+            <a:pPr indent="0" marL="0">
+              <a:buNone/>
+            </a:pPr>
             <a:r>
               <a:rPr lang="en-US" sz="2100" dirty="0">
                 <a:solidFill>
-                  <a:srgbClr val="17364A"/>
-                </a:solidFill>
-                <a:latin typeface="Aptos" pitchFamily="34" charset="0"/>
-                <a:ea typeface="Aptos" pitchFamily="34" charset="-122"/>
-                <a:cs typeface="Aptos" pitchFamily="34" charset="-120"/>
-              </a:rPr>
-              <a:t>Learners should confirm applicable requirements in their own jurisdiction and organization before.</a:t>
+                  <a:srgbClr val="003A63"/>
+                </a:solidFill>
+                <a:latin typeface="Aptos" pitchFamily="34" charset="0"/>
+                <a:ea typeface="Aptos" pitchFamily="34" charset="-122"/>
+                <a:cs typeface="Aptos" pitchFamily="34" charset="-120"/>
+              </a:rPr>
+              <a:t>• Learners should confirm applicable requirements in their own jurisdiction and organization.</a:t>
             </a:r>
             <a:endParaRPr lang="en-US" sz="2100" dirty="0"/>
           </a:p>
@@ -17579,17 +17887,17 @@
         </p:nvSpPr>
         <p:spPr>
           <a:xfrm>
-            <a:off x="7799832" y="1828800"/>
-            <a:ext cx="3145536" cy="685800"/>
-          </a:xfrm>
-          <a:prstGeom prst="rect">
-            <a:avLst/>
-          </a:prstGeom>
-          <a:noFill/>
-          <a:ln/>
-        </p:spPr>
-        <p:txBody>
-          <a:bodyPr wrap="square" lIns="0" tIns="0" rIns="0" bIns="0" rtlCol="0" anchor="t">
+            <a:off x="7799832" y="1801368"/>
+            <a:ext cx="3145536" cy="758952"/>
+          </a:xfrm>
+          <a:prstGeom prst="rect">
+            <a:avLst/>
+          </a:prstGeom>
+          <a:noFill/>
+          <a:ln/>
+        </p:spPr>
+        <p:txBody>
+          <a:bodyPr wrap="square" lIns="254" tIns="254" rIns="254" bIns="254" rtlCol="0" anchor="t">
             <a:normAutofit/>
           </a:bodyPr>
           <a:lstStyle/>
@@ -17598,7 +17906,7 @@
               <a:buNone/>
             </a:pPr>
             <a:r>
-              <a:rPr lang="en-US" sz="1550" dirty="0">
+              <a:rPr lang="en-US" sz="1320" dirty="0">
                 <a:solidFill>
                   <a:srgbClr val="17364A"/>
                 </a:solidFill>
@@ -17608,7 +17916,7 @@
               </a:rPr>
               <a:t>This national-level module is intended for training and planning purposes.</a:t>
             </a:r>
-            <a:endParaRPr lang="en-US" sz="1550" dirty="0"/>
+            <a:endParaRPr lang="en-US" sz="1320" dirty="0"/>
           </a:p>
         </p:txBody>
       </p:sp>
@@ -17696,13 +18004,16 @@
           <a:ln/>
         </p:spPr>
         <p:txBody>
-          <a:bodyPr wrap="square" lIns="254" tIns="254" rIns="254" bIns="254" rtlCol="0" anchor="t">
+          <a:bodyPr wrap="square" lIns="508" tIns="508" rIns="508" bIns="508" rtlCol="0" anchor="t">
             <a:normAutofit/>
           </a:bodyPr>
           <a:lstStyle/>
           <a:p>
-            <a:r>
-              <a:rPr lang="en-US" sz="1380" dirty="0">
+            <a:pPr indent="0" marL="0">
+              <a:buNone/>
+            </a:pPr>
+            <a:r>
+              <a:rPr lang="en-US" sz="1220" dirty="0">
                 <a:solidFill>
                   <a:srgbClr val="17364A"/>
                 </a:solidFill>
@@ -17710,13 +18021,16 @@
                 <a:ea typeface="Aptos" pitchFamily="34" charset="-122"/>
                 <a:cs typeface="Aptos" pitchFamily="34" charset="-120"/>
               </a:rPr>
-              <a:t>This national-level module is intended for training and planning purposes.</a:t>
-            </a:r>
-            <a:endParaRPr lang="en-US" sz="1380" dirty="0"/>
-          </a:p>
-          <a:p>
-            <a:r>
-              <a:rPr lang="en-US" sz="1380" dirty="0">
+              <a:t>This national-level module is intended for training and planning.</a:t>
+            </a:r>
+            <a:endParaRPr lang="en-US" sz="1220" dirty="0"/>
+          </a:p>
+          <a:p>
+            <a:pPr indent="0" marL="0">
+              <a:buNone/>
+            </a:pPr>
+            <a:r>
+              <a:rPr lang="en-US" sz="1220" dirty="0">
                 <a:solidFill>
                   <a:srgbClr val="17364A"/>
                 </a:solidFill>
@@ -17724,13 +18038,16 @@
                 <a:ea typeface="Aptos" pitchFamily="34" charset="-122"/>
                 <a:cs typeface="Aptos" pitchFamily="34" charset="-120"/>
               </a:rPr>
-              <a:t>It does not replace legal, privacy, procurement, civil rights, records, or agency policy.</a:t>
-            </a:r>
-            <a:endParaRPr lang="en-US" sz="1380" dirty="0"/>
-          </a:p>
-          <a:p>
-            <a:r>
-              <a:rPr lang="en-US" sz="1380" dirty="0">
+              <a:t>It does not replace legal, privacy, procurement, civil rights,.</a:t>
+            </a:r>
+            <a:endParaRPr lang="en-US" sz="1220" dirty="0"/>
+          </a:p>
+          <a:p>
+            <a:pPr indent="0" marL="0">
+              <a:buNone/>
+            </a:pPr>
+            <a:r>
+              <a:rPr lang="en-US" sz="1220" dirty="0">
                 <a:solidFill>
                   <a:srgbClr val="17364A"/>
                 </a:solidFill>
@@ -17738,9 +18055,9 @@
                 <a:ea typeface="Aptos" pitchFamily="34" charset="-122"/>
                 <a:cs typeface="Aptos" pitchFamily="34" charset="-120"/>
               </a:rPr>
-              <a:t>Learners should confirm applicable requirements in their own jurisdiction and organization.</a:t>
-            </a:r>
-            <a:endParaRPr lang="en-US" sz="1380" dirty="0"/>
+              <a:t>Learners should confirm applicable requirements in their own.</a:t>
+            </a:r>
+            <a:endParaRPr lang="en-US" sz="1220" dirty="0"/>
           </a:p>
         </p:txBody>
       </p:sp>
@@ -17818,17 +18135,17 @@
         </p:nvSpPr>
         <p:spPr>
           <a:xfrm>
-            <a:off x="7799832" y="5001768"/>
-            <a:ext cx="3145536" cy="502920"/>
-          </a:xfrm>
-          <a:prstGeom prst="rect">
-            <a:avLst/>
-          </a:prstGeom>
-          <a:noFill/>
-          <a:ln/>
-        </p:spPr>
-        <p:txBody>
-          <a:bodyPr wrap="square" lIns="0" tIns="0" rIns="0" bIns="0" rtlCol="0" anchor="t">
+            <a:off x="7799832" y="4974336"/>
+            <a:ext cx="3145536" cy="576072"/>
+          </a:xfrm>
+          <a:prstGeom prst="rect">
+            <a:avLst/>
+          </a:prstGeom>
+          <a:noFill/>
+          <a:ln/>
+        </p:spPr>
+        <p:txBody>
+          <a:bodyPr wrap="square" lIns="254" tIns="254" rIns="254" bIns="254" rtlCol="0" anchor="t">
             <a:normAutofit/>
           </a:bodyPr>
           <a:lstStyle/>
@@ -17837,7 +18154,7 @@
               <a:buNone/>
             </a:pPr>
             <a:r>
-              <a:rPr lang="en-US" sz="1550" dirty="0">
+              <a:rPr lang="en-US" sz="1320" dirty="0">
                 <a:solidFill>
                   <a:srgbClr val="17364A"/>
                 </a:solidFill>
@@ -17845,9 +18162,9 @@
                 <a:ea typeface="Aptos" pitchFamily="34" charset="-122"/>
                 <a:cs typeface="Aptos" pitchFamily="34" charset="-120"/>
               </a:rPr>
-              <a:t>Translate this concept into clear decision rights, review steps, documentation expectations, and escalation paths before an AI-supported workflow is approved.</a:t>
-            </a:r>
-            <a:endParaRPr lang="en-US" sz="1550" dirty="0"/>
+              <a:t>Translate this concept into clear decision rights, review steps, documentation expectations, and escalation paths before.</a:t>
+            </a:r>
+            <a:endParaRPr lang="en-US" sz="1320" dirty="0"/>
           </a:p>
         </p:txBody>
       </p:sp>

--- a/downloads/presentations/modules/arc-340.pptx
+++ b/downloads/presentations/modules/arc-340.pptx
@@ -3509,11 +3509,11 @@
         <p:spPr>
           <a:xfrm>
             <a:off x="7635240" y="1325880"/>
-            <a:ext cx="3474720" cy="1325880"/>
+            <a:ext cx="3474720" cy="1255471"/>
           </a:xfrm>
           <a:prstGeom prst="roundRect">
             <a:avLst>
-              <a:gd name="adj" fmla="val 8276"/>
+              <a:gd name="adj" fmla="val 8740"/>
             </a:avLst>
           </a:prstGeom>
           <a:solidFill>
@@ -3575,7 +3575,7 @@
         <p:spPr>
           <a:xfrm>
             <a:off x="7799832" y="1801368"/>
-            <a:ext cx="3145536" cy="758952"/>
+            <a:ext cx="3145536" cy="688543"/>
           </a:xfrm>
           <a:prstGeom prst="rect">
             <a:avLst/>
@@ -3615,12 +3615,12 @@
         </p:nvSpPr>
         <p:spPr>
           <a:xfrm>
-            <a:off x="7635240" y="2788920"/>
-            <a:ext cx="3474720" cy="1536192"/>
+            <a:off x="7635240" y="2718511"/>
+            <a:ext cx="3474720" cy="1328623"/>
           </a:xfrm>
           <a:prstGeom prst="roundRect">
             <a:avLst>
-              <a:gd name="adj" fmla="val 7143"/>
+              <a:gd name="adj" fmla="val 8259"/>
             </a:avLst>
           </a:prstGeom>
           <a:solidFill>
@@ -3642,7 +3642,7 @@
         </p:nvSpPr>
         <p:spPr>
           <a:xfrm>
-            <a:off x="7799832" y="2935224"/>
+            <a:off x="7799832" y="2864815"/>
             <a:ext cx="3145536" cy="256032"/>
           </a:xfrm>
           <a:prstGeom prst="rect">
@@ -3681,8 +3681,8 @@
         </p:nvSpPr>
         <p:spPr>
           <a:xfrm>
-            <a:off x="7818120" y="3300984"/>
-            <a:ext cx="3090672" cy="877824"/>
+            <a:off x="7818120" y="3230575"/>
+            <a:ext cx="3090672" cy="670255"/>
           </a:xfrm>
           <a:prstGeom prst="rect">
             <a:avLst/>
@@ -3756,12 +3756,12 @@
         </p:nvSpPr>
         <p:spPr>
           <a:xfrm>
-            <a:off x="7635240" y="4498848"/>
-            <a:ext cx="3474720" cy="1143000"/>
+            <a:off x="7635240" y="4184294"/>
+            <a:ext cx="3474720" cy="1466698"/>
           </a:xfrm>
           <a:prstGeom prst="roundRect">
             <a:avLst>
-              <a:gd name="adj" fmla="val 9600"/>
+              <a:gd name="adj" fmla="val 7481"/>
             </a:avLst>
           </a:prstGeom>
           <a:solidFill>
@@ -3783,7 +3783,7 @@
         </p:nvSpPr>
         <p:spPr>
           <a:xfrm>
-            <a:off x="7799832" y="4645152"/>
+            <a:off x="7799832" y="4330598"/>
             <a:ext cx="3145536" cy="256032"/>
           </a:xfrm>
           <a:prstGeom prst="rect">
@@ -3822,8 +3822,8 @@
         </p:nvSpPr>
         <p:spPr>
           <a:xfrm>
-            <a:off x="7799832" y="4974336"/>
-            <a:ext cx="3145536" cy="576072"/>
+            <a:off x="7799832" y="4659782"/>
+            <a:ext cx="3145536" cy="899770"/>
           </a:xfrm>
           <a:prstGeom prst="rect">
             <a:avLst/>
@@ -3849,7 +3849,7 @@
                 <a:ea typeface="Aptos" pitchFamily="34" charset="-122"/>
                 <a:cs typeface="Aptos" pitchFamily="34" charset="-120"/>
               </a:rPr>
-              <a:t>Connect the concept to public health purpose, responsible use, required safeguards, documentation, and the next action a.</a:t>
+              <a:t>Connect the concept to public health purpose, responsible use, required safeguards, documentation, and the next action a department should take.</a:t>
             </a:r>
             <a:endParaRPr lang="en-US" sz="1320" dirty="0"/>
           </a:p>
@@ -4218,11 +4218,11 @@
         <p:spPr>
           <a:xfrm>
             <a:off x="7635240" y="1325880"/>
-            <a:ext cx="3474720" cy="1325880"/>
+            <a:ext cx="3474720" cy="1255471"/>
           </a:xfrm>
           <a:prstGeom prst="roundRect">
             <a:avLst>
-              <a:gd name="adj" fmla="val 8276"/>
+              <a:gd name="adj" fmla="val 8740"/>
             </a:avLst>
           </a:prstGeom>
           <a:solidFill>
@@ -4284,7 +4284,7 @@
         <p:spPr>
           <a:xfrm>
             <a:off x="7799832" y="1801368"/>
-            <a:ext cx="3145536" cy="758952"/>
+            <a:ext cx="3145536" cy="688543"/>
           </a:xfrm>
           <a:prstGeom prst="rect">
             <a:avLst/>
@@ -4324,12 +4324,12 @@
         </p:nvSpPr>
         <p:spPr>
           <a:xfrm>
-            <a:off x="7635240" y="2788920"/>
-            <a:ext cx="3474720" cy="1536192"/>
+            <a:off x="7635240" y="2718511"/>
+            <a:ext cx="3474720" cy="1328623"/>
           </a:xfrm>
           <a:prstGeom prst="roundRect">
             <a:avLst>
-              <a:gd name="adj" fmla="val 7143"/>
+              <a:gd name="adj" fmla="val 8259"/>
             </a:avLst>
           </a:prstGeom>
           <a:solidFill>
@@ -4351,7 +4351,7 @@
         </p:nvSpPr>
         <p:spPr>
           <a:xfrm>
-            <a:off x="7799832" y="2935224"/>
+            <a:off x="7799832" y="2864815"/>
             <a:ext cx="3145536" cy="256032"/>
           </a:xfrm>
           <a:prstGeom prst="rect">
@@ -4390,8 +4390,8 @@
         </p:nvSpPr>
         <p:spPr>
           <a:xfrm>
-            <a:off x="7818120" y="3300984"/>
-            <a:ext cx="3090672" cy="877824"/>
+            <a:off x="7818120" y="3230575"/>
+            <a:ext cx="3090672" cy="670255"/>
           </a:xfrm>
           <a:prstGeom prst="rect">
             <a:avLst/>
@@ -4465,12 +4465,12 @@
         </p:nvSpPr>
         <p:spPr>
           <a:xfrm>
-            <a:off x="7635240" y="4498848"/>
-            <a:ext cx="3474720" cy="1143000"/>
+            <a:off x="7635240" y="4184294"/>
+            <a:ext cx="3474720" cy="1466698"/>
           </a:xfrm>
           <a:prstGeom prst="roundRect">
             <a:avLst>
-              <a:gd name="adj" fmla="val 9600"/>
+              <a:gd name="adj" fmla="val 7481"/>
             </a:avLst>
           </a:prstGeom>
           <a:solidFill>
@@ -4492,7 +4492,7 @@
         </p:nvSpPr>
         <p:spPr>
           <a:xfrm>
-            <a:off x="7799832" y="4645152"/>
+            <a:off x="7799832" y="4330598"/>
             <a:ext cx="3145536" cy="256032"/>
           </a:xfrm>
           <a:prstGeom prst="rect">
@@ -4531,8 +4531,8 @@
         </p:nvSpPr>
         <p:spPr>
           <a:xfrm>
-            <a:off x="7799832" y="4974336"/>
-            <a:ext cx="3145536" cy="576072"/>
+            <a:off x="7799832" y="4659782"/>
+            <a:ext cx="3145536" cy="899770"/>
           </a:xfrm>
           <a:prstGeom prst="rect">
             <a:avLst/>
@@ -4558,7 +4558,7 @@
                 <a:ea typeface="Aptos" pitchFamily="34" charset="-122"/>
                 <a:cs typeface="Aptos" pitchFamily="34" charset="-120"/>
               </a:rPr>
-              <a:t>Connect the concept to public health purpose, responsible use, required safeguards, documentation, and the next action a.</a:t>
+              <a:t>Connect the concept to public health purpose, responsible use, required safeguards, documentation, and the next action a department should take.</a:t>
             </a:r>
             <a:endParaRPr lang="en-US" sz="1320" dirty="0"/>
           </a:p>
@@ -4927,11 +4927,11 @@
         <p:spPr>
           <a:xfrm>
             <a:off x="7635240" y="1325880"/>
-            <a:ext cx="3474720" cy="1325880"/>
+            <a:ext cx="3474720" cy="1207008"/>
           </a:xfrm>
           <a:prstGeom prst="roundRect">
             <a:avLst>
-              <a:gd name="adj" fmla="val 8276"/>
+              <a:gd name="adj" fmla="val 9091"/>
             </a:avLst>
           </a:prstGeom>
           <a:solidFill>
@@ -4993,7 +4993,7 @@
         <p:spPr>
           <a:xfrm>
             <a:off x="7799832" y="1801368"/>
-            <a:ext cx="3145536" cy="758952"/>
+            <a:ext cx="3145536" cy="640080"/>
           </a:xfrm>
           <a:prstGeom prst="rect">
             <a:avLst/>
@@ -5033,12 +5033,12 @@
         </p:nvSpPr>
         <p:spPr>
           <a:xfrm>
-            <a:off x="7635240" y="2788920"/>
-            <a:ext cx="3474720" cy="1536192"/>
+            <a:off x="7635240" y="2670048"/>
+            <a:ext cx="3474720" cy="1377086"/>
           </a:xfrm>
           <a:prstGeom prst="roundRect">
             <a:avLst>
-              <a:gd name="adj" fmla="val 7143"/>
+              <a:gd name="adj" fmla="val 7968"/>
             </a:avLst>
           </a:prstGeom>
           <a:solidFill>
@@ -5060,7 +5060,7 @@
         </p:nvSpPr>
         <p:spPr>
           <a:xfrm>
-            <a:off x="7799832" y="2935224"/>
+            <a:off x="7799832" y="2816352"/>
             <a:ext cx="3145536" cy="256032"/>
           </a:xfrm>
           <a:prstGeom prst="rect">
@@ -5099,8 +5099,8 @@
         </p:nvSpPr>
         <p:spPr>
           <a:xfrm>
-            <a:off x="7818120" y="3300984"/>
-            <a:ext cx="3090672" cy="877824"/>
+            <a:off x="7818120" y="3182112"/>
+            <a:ext cx="3090672" cy="718718"/>
           </a:xfrm>
           <a:prstGeom prst="rect">
             <a:avLst/>
@@ -5174,12 +5174,12 @@
         </p:nvSpPr>
         <p:spPr>
           <a:xfrm>
-            <a:off x="7635240" y="4498848"/>
-            <a:ext cx="3474720" cy="1143000"/>
+            <a:off x="7635240" y="4184294"/>
+            <a:ext cx="3474720" cy="1466698"/>
           </a:xfrm>
           <a:prstGeom prst="roundRect">
             <a:avLst>
-              <a:gd name="adj" fmla="val 9600"/>
+              <a:gd name="adj" fmla="val 7481"/>
             </a:avLst>
           </a:prstGeom>
           <a:solidFill>
@@ -5201,7 +5201,7 @@
         </p:nvSpPr>
         <p:spPr>
           <a:xfrm>
-            <a:off x="7799832" y="4645152"/>
+            <a:off x="7799832" y="4330598"/>
             <a:ext cx="3145536" cy="256032"/>
           </a:xfrm>
           <a:prstGeom prst="rect">
@@ -5240,8 +5240,8 @@
         </p:nvSpPr>
         <p:spPr>
           <a:xfrm>
-            <a:off x="7799832" y="4974336"/>
-            <a:ext cx="3145536" cy="576072"/>
+            <a:off x="7799832" y="4659782"/>
+            <a:ext cx="3145536" cy="899770"/>
           </a:xfrm>
           <a:prstGeom prst="rect">
             <a:avLst/>
@@ -5267,7 +5267,7 @@
                 <a:ea typeface="Aptos" pitchFamily="34" charset="-122"/>
                 <a:cs typeface="Aptos" pitchFamily="34" charset="-120"/>
               </a:rPr>
-              <a:t>Connect the concept to public health purpose, responsible use, required safeguards, documentation, and the next action a.</a:t>
+              <a:t>Connect the concept to public health purpose, responsible use, required safeguards, documentation, and the next action a department should take.</a:t>
             </a:r>
             <a:endParaRPr lang="en-US" sz="1320" dirty="0"/>
           </a:p>
@@ -5636,11 +5636,11 @@
         <p:spPr>
           <a:xfrm>
             <a:off x="7635240" y="1325880"/>
-            <a:ext cx="3474720" cy="1325880"/>
+            <a:ext cx="3474720" cy="1207008"/>
           </a:xfrm>
           <a:prstGeom prst="roundRect">
             <a:avLst>
-              <a:gd name="adj" fmla="val 8276"/>
+              <a:gd name="adj" fmla="val 9091"/>
             </a:avLst>
           </a:prstGeom>
           <a:solidFill>
@@ -5702,7 +5702,7 @@
         <p:spPr>
           <a:xfrm>
             <a:off x="7799832" y="1801368"/>
-            <a:ext cx="3145536" cy="758952"/>
+            <a:ext cx="3145536" cy="640080"/>
           </a:xfrm>
           <a:prstGeom prst="rect">
             <a:avLst/>
@@ -5742,7 +5742,7 @@
         </p:nvSpPr>
         <p:spPr>
           <a:xfrm>
-            <a:off x="7635240" y="2788920"/>
+            <a:off x="7635240" y="2670048"/>
             <a:ext cx="3474720" cy="1536192"/>
           </a:xfrm>
           <a:prstGeom prst="roundRect">
@@ -5769,8 +5769,8 @@
         </p:nvSpPr>
         <p:spPr>
           <a:xfrm>
-            <a:off x="7799832" y="2935224"/>
-            <a:ext cx="3145536" cy="256032"/>
+            <a:off x="7799832" y="2798064"/>
+            <a:ext cx="3145536" cy="237744"/>
           </a:xfrm>
           <a:prstGeom prst="rect">
             <a:avLst/>
@@ -5786,7 +5786,7 @@
               <a:buNone/>
             </a:pPr>
             <a:r>
-              <a:rPr lang="en-US" sz="1300" b="1" dirty="0">
+              <a:rPr lang="en-US" sz="1250" b="1" dirty="0">
                 <a:solidFill>
                   <a:srgbClr val="0068B7"/>
                 </a:solidFill>
@@ -5794,101 +5794,317 @@
                 <a:ea typeface="Aptos" pitchFamily="34" charset="-122"/>
                 <a:cs typeface="Aptos" pitchFamily="34" charset="-120"/>
               </a:rPr>
-              <a:t>Concept checkpoints</a:t>
-            </a:r>
-            <a:endParaRPr lang="en-US" sz="1300" dirty="0"/>
-          </a:p>
-        </p:txBody>
-      </p:sp>
-      <p:sp>
-        <p:nvSpPr>
-          <p:cNvPr id="15" name="Text 13"/>
-          <p:cNvSpPr/>
-          <p:nvPr/>
-        </p:nvSpPr>
-        <p:spPr>
-          <a:xfrm>
-            <a:off x="7818120" y="3300984"/>
-            <a:ext cx="3090672" cy="877824"/>
-          </a:xfrm>
-          <a:prstGeom prst="rect">
-            <a:avLst/>
-          </a:prstGeom>
-          <a:noFill/>
-          <a:ln/>
-        </p:spPr>
-        <p:txBody>
-          <a:bodyPr wrap="square" lIns="508" tIns="508" rIns="508" bIns="508" rtlCol="0" anchor="t">
+              <a:t>Risk control loop</a:t>
+            </a:r>
+            <a:endParaRPr lang="en-US" sz="1250" dirty="0"/>
+          </a:p>
+        </p:txBody>
+      </p:sp>
+      <p:sp>
+        <p:nvSpPr>
+          <p:cNvPr id="15" name="Shape 13"/>
+          <p:cNvSpPr/>
+          <p:nvPr/>
+        </p:nvSpPr>
+        <p:spPr>
+          <a:xfrm>
+            <a:off x="8763000" y="3351276"/>
+            <a:ext cx="164592" cy="0"/>
+          </a:xfrm>
+          <a:prstGeom prst="line">
+            <a:avLst/>
+          </a:prstGeom>
+          <a:noFill/>
+          <a:ln w="15240">
+            <a:solidFill>
+              <a:srgbClr val="8ABBD8"/>
+            </a:solidFill>
+            <a:prstDash val="solid"/>
+          </a:ln>
+        </p:spPr>
+      </p:sp>
+      <p:sp>
+        <p:nvSpPr>
+          <p:cNvPr id="16" name="Shape 14"/>
+          <p:cNvSpPr/>
+          <p:nvPr/>
+        </p:nvSpPr>
+        <p:spPr>
+          <a:xfrm>
+            <a:off x="7872984" y="3200400"/>
+            <a:ext cx="890016" cy="301752"/>
+          </a:xfrm>
+          <a:prstGeom prst="roundRect">
+            <a:avLst>
+              <a:gd name="adj" fmla="val 24242"/>
+            </a:avLst>
+          </a:prstGeom>
+          <a:solidFill>
+            <a:srgbClr val="0068B7"/>
+          </a:solidFill>
+          <a:ln w="12700">
+            <a:solidFill>
+              <a:srgbClr val="0068B7"/>
+            </a:solidFill>
+            <a:prstDash val="solid"/>
+          </a:ln>
+        </p:spPr>
+      </p:sp>
+      <p:sp>
+        <p:nvSpPr>
+          <p:cNvPr id="17" name="Text 15"/>
+          <p:cNvSpPr/>
+          <p:nvPr/>
+        </p:nvSpPr>
+        <p:spPr>
+          <a:xfrm>
+            <a:off x="7909560" y="3273552"/>
+            <a:ext cx="816864" cy="146304"/>
+          </a:xfrm>
+          <a:prstGeom prst="rect">
+            <a:avLst/>
+          </a:prstGeom>
+          <a:noFill/>
+          <a:ln/>
+        </p:spPr>
+        <p:txBody>
+          <a:bodyPr wrap="square" lIns="0" tIns="0" rIns="0" bIns="0" rtlCol="0" anchor="ctr">
             <a:normAutofit/>
           </a:bodyPr>
           <a:lstStyle/>
           <a:p>
-            <a:pPr indent="0" marL="0">
-              <a:buNone/>
-            </a:pPr>
-            <a:r>
-              <a:rPr lang="en-US" sz="1220" dirty="0">
-                <a:solidFill>
-                  <a:srgbClr val="17364A"/>
-                </a:solidFill>
-                <a:latin typeface="Aptos" pitchFamily="34" charset="0"/>
-                <a:ea typeface="Aptos" pitchFamily="34" charset="-122"/>
-                <a:cs typeface="Aptos" pitchFamily="34" charset="-120"/>
-              </a:rPr>
-              <a:t>Staff may use manual exports, screenshots, shared drives, or.</a:t>
-            </a:r>
-            <a:endParaRPr lang="en-US" sz="1220" dirty="0"/>
-          </a:p>
-          <a:p>
-            <a:pPr indent="0" marL="0">
-              <a:buNone/>
-            </a:pPr>
-            <a:r>
-              <a:rPr lang="en-US" sz="1220" dirty="0">
-                <a:solidFill>
-                  <a:srgbClr val="17364A"/>
-                </a:solidFill>
-                <a:latin typeface="Aptos" pitchFamily="34" charset="0"/>
-                <a:ea typeface="Aptos" pitchFamily="34" charset="-122"/>
-                <a:cs typeface="Aptos" pitchFamily="34" charset="-120"/>
-              </a:rPr>
-              <a:t>A guardrail is to require integration review before operational.</a:t>
-            </a:r>
-            <a:endParaRPr lang="en-US" sz="1220" dirty="0"/>
-          </a:p>
-          <a:p>
-            <a:pPr indent="0" marL="0">
-              <a:buNone/>
-            </a:pPr>
-            <a:r>
-              <a:rPr lang="en-US" sz="1220" dirty="0">
-                <a:solidFill>
-                  <a:srgbClr val="17364A"/>
-                </a:solidFill>
-                <a:latin typeface="Aptos" pitchFamily="34" charset="0"/>
-                <a:ea typeface="Aptos" pitchFamily="34" charset="-122"/>
-                <a:cs typeface="Aptos" pitchFamily="34" charset="-120"/>
-              </a:rPr>
-              <a:t>Another failure mode is uncontrolled write-back.</a:t>
-            </a:r>
-            <a:endParaRPr lang="en-US" sz="1220" dirty="0"/>
-          </a:p>
-        </p:txBody>
-      </p:sp>
-      <p:sp>
-        <p:nvSpPr>
-          <p:cNvPr id="16" name="Shape 14"/>
-          <p:cNvSpPr/>
-          <p:nvPr/>
-        </p:nvSpPr>
-        <p:spPr>
-          <a:xfrm>
-            <a:off x="7635240" y="4498848"/>
-            <a:ext cx="3474720" cy="1143000"/>
+            <a:pPr algn="ctr" indent="0" marL="0">
+              <a:buNone/>
+            </a:pPr>
+            <a:r>
+              <a:rPr lang="en-US" sz="880" b="1" dirty="0">
+                <a:solidFill>
+                  <a:srgbClr val="FFFFFF"/>
+                </a:solidFill>
+                <a:latin typeface="Aptos" pitchFamily="34" charset="0"/>
+                <a:ea typeface="Aptos" pitchFamily="34" charset="-122"/>
+                <a:cs typeface="Aptos" pitchFamily="34" charset="-120"/>
+              </a:rPr>
+              <a:t>Identify</a:t>
+            </a:r>
+            <a:endParaRPr lang="en-US" sz="880" dirty="0"/>
+          </a:p>
+        </p:txBody>
+      </p:sp>
+      <p:sp>
+        <p:nvSpPr>
+          <p:cNvPr id="18" name="Shape 16"/>
+          <p:cNvSpPr/>
+          <p:nvPr/>
+        </p:nvSpPr>
+        <p:spPr>
+          <a:xfrm>
+            <a:off x="9817608" y="3351276"/>
+            <a:ext cx="164592" cy="0"/>
+          </a:xfrm>
+          <a:prstGeom prst="line">
+            <a:avLst/>
+          </a:prstGeom>
+          <a:noFill/>
+          <a:ln w="15240">
+            <a:solidFill>
+              <a:srgbClr val="8ABBD8"/>
+            </a:solidFill>
+            <a:prstDash val="solid"/>
+          </a:ln>
+        </p:spPr>
+      </p:sp>
+      <p:sp>
+        <p:nvSpPr>
+          <p:cNvPr id="19" name="Shape 17"/>
+          <p:cNvSpPr/>
+          <p:nvPr/>
+        </p:nvSpPr>
+        <p:spPr>
+          <a:xfrm>
+            <a:off x="8927592" y="3200400"/>
+            <a:ext cx="890016" cy="301752"/>
           </a:xfrm>
           <a:prstGeom prst="roundRect">
             <a:avLst>
-              <a:gd name="adj" fmla="val 9600"/>
+              <a:gd name="adj" fmla="val 24242"/>
+            </a:avLst>
+          </a:prstGeom>
+          <a:solidFill>
+            <a:srgbClr val="2F8A28"/>
+          </a:solidFill>
+          <a:ln w="12700">
+            <a:solidFill>
+              <a:srgbClr val="2F8A28"/>
+            </a:solidFill>
+            <a:prstDash val="solid"/>
+          </a:ln>
+        </p:spPr>
+      </p:sp>
+      <p:sp>
+        <p:nvSpPr>
+          <p:cNvPr id="20" name="Text 18"/>
+          <p:cNvSpPr/>
+          <p:nvPr/>
+        </p:nvSpPr>
+        <p:spPr>
+          <a:xfrm>
+            <a:off x="8964168" y="3273552"/>
+            <a:ext cx="816864" cy="146304"/>
+          </a:xfrm>
+          <a:prstGeom prst="rect">
+            <a:avLst/>
+          </a:prstGeom>
+          <a:noFill/>
+          <a:ln/>
+        </p:spPr>
+        <p:txBody>
+          <a:bodyPr wrap="square" lIns="0" tIns="0" rIns="0" bIns="0" rtlCol="0" anchor="ctr">
+            <a:normAutofit/>
+          </a:bodyPr>
+          <a:lstStyle/>
+          <a:p>
+            <a:pPr algn="ctr" indent="0" marL="0">
+              <a:buNone/>
+            </a:pPr>
+            <a:r>
+              <a:rPr lang="en-US" sz="880" b="1" dirty="0">
+                <a:solidFill>
+                  <a:srgbClr val="FFFFFF"/>
+                </a:solidFill>
+                <a:latin typeface="Aptos" pitchFamily="34" charset="0"/>
+                <a:ea typeface="Aptos" pitchFamily="34" charset="-122"/>
+                <a:cs typeface="Aptos" pitchFamily="34" charset="-120"/>
+              </a:rPr>
+              <a:t>Control</a:t>
+            </a:r>
+            <a:endParaRPr lang="en-US" sz="880" dirty="0"/>
+          </a:p>
+        </p:txBody>
+      </p:sp>
+      <p:sp>
+        <p:nvSpPr>
+          <p:cNvPr id="21" name="Shape 19"/>
+          <p:cNvSpPr/>
+          <p:nvPr/>
+        </p:nvSpPr>
+        <p:spPr>
+          <a:xfrm>
+            <a:off x="9982200" y="3200400"/>
+            <a:ext cx="890016" cy="301752"/>
+          </a:xfrm>
+          <a:prstGeom prst="roundRect">
+            <a:avLst>
+              <a:gd name="adj" fmla="val 24242"/>
+            </a:avLst>
+          </a:prstGeom>
+          <a:solidFill>
+            <a:srgbClr val="6A4CA3"/>
+          </a:solidFill>
+          <a:ln w="12700">
+            <a:solidFill>
+              <a:srgbClr val="6A4CA3"/>
+            </a:solidFill>
+            <a:prstDash val="solid"/>
+          </a:ln>
+        </p:spPr>
+      </p:sp>
+      <p:sp>
+        <p:nvSpPr>
+          <p:cNvPr id="22" name="Text 20"/>
+          <p:cNvSpPr/>
+          <p:nvPr/>
+        </p:nvSpPr>
+        <p:spPr>
+          <a:xfrm>
+            <a:off x="10018776" y="3273552"/>
+            <a:ext cx="816864" cy="146304"/>
+          </a:xfrm>
+          <a:prstGeom prst="rect">
+            <a:avLst/>
+          </a:prstGeom>
+          <a:noFill/>
+          <a:ln/>
+        </p:spPr>
+        <p:txBody>
+          <a:bodyPr wrap="square" lIns="0" tIns="0" rIns="0" bIns="0" rtlCol="0" anchor="ctr">
+            <a:normAutofit/>
+          </a:bodyPr>
+          <a:lstStyle/>
+          <a:p>
+            <a:pPr algn="ctr" indent="0" marL="0">
+              <a:buNone/>
+            </a:pPr>
+            <a:r>
+              <a:rPr lang="en-US" sz="880" b="1" dirty="0">
+                <a:solidFill>
+                  <a:srgbClr val="FFFFFF"/>
+                </a:solidFill>
+                <a:latin typeface="Aptos" pitchFamily="34" charset="0"/>
+                <a:ea typeface="Aptos" pitchFamily="34" charset="-122"/>
+                <a:cs typeface="Aptos" pitchFamily="34" charset="-120"/>
+              </a:rPr>
+              <a:t>Monitor</a:t>
+            </a:r>
+            <a:endParaRPr lang="en-US" sz="880" dirty="0"/>
+          </a:p>
+        </p:txBody>
+      </p:sp>
+      <p:sp>
+        <p:nvSpPr>
+          <p:cNvPr id="23" name="Text 21"/>
+          <p:cNvSpPr/>
+          <p:nvPr/>
+        </p:nvSpPr>
+        <p:spPr>
+          <a:xfrm>
+            <a:off x="7854696" y="3694176"/>
+            <a:ext cx="3035808" cy="365760"/>
+          </a:xfrm>
+          <a:prstGeom prst="rect">
+            <a:avLst/>
+          </a:prstGeom>
+          <a:noFill/>
+          <a:ln/>
+        </p:spPr>
+        <p:txBody>
+          <a:bodyPr wrap="square" lIns="254" tIns="254" rIns="254" bIns="254" rtlCol="0" anchor="t">
+            <a:normAutofit/>
+          </a:bodyPr>
+          <a:lstStyle/>
+          <a:p>
+            <a:pPr indent="0" marL="0">
+              <a:buNone/>
+            </a:pPr>
+            <a:r>
+              <a:rPr lang="en-US" sz="1120" dirty="0">
+                <a:solidFill>
+                  <a:srgbClr val="17364A"/>
+                </a:solidFill>
+                <a:latin typeface="Aptos" pitchFamily="34" charset="0"/>
+                <a:ea typeface="Aptos" pitchFamily="34" charset="-122"/>
+                <a:cs typeface="Aptos" pitchFamily="34" charset="-120"/>
+              </a:rPr>
+              <a:t>Responsible use depends on finding risks early, applying safeguards, and watching for drift or harm over time.</a:t>
+            </a:r>
+            <a:endParaRPr lang="en-US" sz="1120" dirty="0"/>
+          </a:p>
+        </p:txBody>
+      </p:sp>
+      <p:sp>
+        <p:nvSpPr>
+          <p:cNvPr id="24" name="Shape 22"/>
+          <p:cNvSpPr/>
+          <p:nvPr/>
+        </p:nvSpPr>
+        <p:spPr>
+          <a:xfrm>
+            <a:off x="7635240" y="4343400"/>
+            <a:ext cx="3474720" cy="1255471"/>
+          </a:xfrm>
+          <a:prstGeom prst="roundRect">
+            <a:avLst>
+              <a:gd name="adj" fmla="val 8740"/>
             </a:avLst>
           </a:prstGeom>
           <a:solidFill>
@@ -5904,13 +6120,13 @@
       </p:sp>
       <p:sp>
         <p:nvSpPr>
-          <p:cNvPr id="17" name="Text 15"/>
-          <p:cNvSpPr/>
-          <p:nvPr/>
-        </p:nvSpPr>
-        <p:spPr>
-          <a:xfrm>
-            <a:off x="7799832" y="4645152"/>
+          <p:cNvPr id="25" name="Text 23"/>
+          <p:cNvSpPr/>
+          <p:nvPr/>
+        </p:nvSpPr>
+        <p:spPr>
+          <a:xfrm>
+            <a:off x="7799832" y="4489704"/>
             <a:ext cx="3145536" cy="256032"/>
           </a:xfrm>
           <a:prstGeom prst="rect">
@@ -5943,14 +6159,14 @@
       </p:sp>
       <p:sp>
         <p:nvSpPr>
-          <p:cNvPr id="18" name="Text 16"/>
-          <p:cNvSpPr/>
-          <p:nvPr/>
-        </p:nvSpPr>
-        <p:spPr>
-          <a:xfrm>
-            <a:off x="7799832" y="4974336"/>
-            <a:ext cx="3145536" cy="576072"/>
+          <p:cNvPr id="26" name="Text 24"/>
+          <p:cNvSpPr/>
+          <p:nvPr/>
+        </p:nvSpPr>
+        <p:spPr>
+          <a:xfrm>
+            <a:off x="7799832" y="4818888"/>
+            <a:ext cx="3145536" cy="688543"/>
           </a:xfrm>
           <a:prstGeom prst="rect">
             <a:avLst/>
@@ -5976,7 +6192,7 @@
                 <a:ea typeface="Aptos" pitchFamily="34" charset="-122"/>
                 <a:cs typeface="Aptos" pitchFamily="34" charset="-120"/>
               </a:rPr>
-              <a:t>Identify what could go wrong, who could be affected, what safeguards are needed, and what evidence should be reviewed.</a:t>
+              <a:t>Identify what could go wrong, who could be affected, what safeguards are needed, and what evidence should be reviewed before use.</a:t>
             </a:r>
             <a:endParaRPr lang="en-US" sz="1320" dirty="0"/>
           </a:p>
@@ -6345,11 +6561,11 @@
         <p:spPr>
           <a:xfrm>
             <a:off x="7635240" y="1325880"/>
-            <a:ext cx="3474720" cy="1325880"/>
+            <a:ext cx="3474720" cy="1255471"/>
           </a:xfrm>
           <a:prstGeom prst="roundRect">
             <a:avLst>
-              <a:gd name="adj" fmla="val 8276"/>
+              <a:gd name="adj" fmla="val 8740"/>
             </a:avLst>
           </a:prstGeom>
           <a:solidFill>
@@ -6411,7 +6627,7 @@
         <p:spPr>
           <a:xfrm>
             <a:off x="7799832" y="1801368"/>
-            <a:ext cx="3145536" cy="758952"/>
+            <a:ext cx="3145536" cy="688543"/>
           </a:xfrm>
           <a:prstGeom prst="rect">
             <a:avLst/>
@@ -6451,12 +6667,12 @@
         </p:nvSpPr>
         <p:spPr>
           <a:xfrm>
-            <a:off x="7635240" y="2788920"/>
-            <a:ext cx="3474720" cy="1536192"/>
+            <a:off x="7635240" y="2718511"/>
+            <a:ext cx="3474720" cy="1328623"/>
           </a:xfrm>
           <a:prstGeom prst="roundRect">
             <a:avLst>
-              <a:gd name="adj" fmla="val 7143"/>
+              <a:gd name="adj" fmla="val 8259"/>
             </a:avLst>
           </a:prstGeom>
           <a:solidFill>
@@ -6478,8 +6694,8 @@
         </p:nvSpPr>
         <p:spPr>
           <a:xfrm>
-            <a:off x="7799832" y="2935224"/>
-            <a:ext cx="3145536" cy="256032"/>
+            <a:off x="7799832" y="2846527"/>
+            <a:ext cx="3145536" cy="237744"/>
           </a:xfrm>
           <a:prstGeom prst="rect">
             <a:avLst/>
@@ -6495,7 +6711,7 @@
               <a:buNone/>
             </a:pPr>
             <a:r>
-              <a:rPr lang="en-US" sz="1300" b="1" dirty="0">
+              <a:rPr lang="en-US" sz="1250" b="1" dirty="0">
                 <a:solidFill>
                   <a:srgbClr val="0068B7"/>
                 </a:solidFill>
@@ -6503,101 +6719,317 @@
                 <a:ea typeface="Aptos" pitchFamily="34" charset="-122"/>
                 <a:cs typeface="Aptos" pitchFamily="34" charset="-120"/>
               </a:rPr>
-              <a:t>Concept checkpoints</a:t>
-            </a:r>
-            <a:endParaRPr lang="en-US" sz="1300" dirty="0"/>
-          </a:p>
-        </p:txBody>
-      </p:sp>
-      <p:sp>
-        <p:nvSpPr>
-          <p:cNvPr id="15" name="Text 13"/>
-          <p:cNvSpPr/>
-          <p:nvPr/>
-        </p:nvSpPr>
-        <p:spPr>
-          <a:xfrm>
-            <a:off x="7818120" y="3300984"/>
-            <a:ext cx="3090672" cy="877824"/>
-          </a:xfrm>
-          <a:prstGeom prst="rect">
-            <a:avLst/>
-          </a:prstGeom>
-          <a:noFill/>
-          <a:ln/>
-        </p:spPr>
-        <p:txBody>
-          <a:bodyPr wrap="square" lIns="508" tIns="508" rIns="508" bIns="508" rtlCol="0" anchor="t">
+              <a:t>Implementation path</a:t>
+            </a:r>
+            <a:endParaRPr lang="en-US" sz="1250" dirty="0"/>
+          </a:p>
+        </p:txBody>
+      </p:sp>
+      <p:sp>
+        <p:nvSpPr>
+          <p:cNvPr id="15" name="Shape 13"/>
+          <p:cNvSpPr/>
+          <p:nvPr/>
+        </p:nvSpPr>
+        <p:spPr>
+          <a:xfrm>
+            <a:off x="8763000" y="3399739"/>
+            <a:ext cx="164592" cy="0"/>
+          </a:xfrm>
+          <a:prstGeom prst="line">
+            <a:avLst/>
+          </a:prstGeom>
+          <a:noFill/>
+          <a:ln w="15240">
+            <a:solidFill>
+              <a:srgbClr val="8ABBD8"/>
+            </a:solidFill>
+            <a:prstDash val="solid"/>
+          </a:ln>
+        </p:spPr>
+      </p:sp>
+      <p:sp>
+        <p:nvSpPr>
+          <p:cNvPr id="16" name="Shape 14"/>
+          <p:cNvSpPr/>
+          <p:nvPr/>
+        </p:nvSpPr>
+        <p:spPr>
+          <a:xfrm>
+            <a:off x="7872984" y="3248863"/>
+            <a:ext cx="890016" cy="301752"/>
+          </a:xfrm>
+          <a:prstGeom prst="roundRect">
+            <a:avLst>
+              <a:gd name="adj" fmla="val 24242"/>
+            </a:avLst>
+          </a:prstGeom>
+          <a:solidFill>
+            <a:srgbClr val="0068B7"/>
+          </a:solidFill>
+          <a:ln w="12700">
+            <a:solidFill>
+              <a:srgbClr val="0068B7"/>
+            </a:solidFill>
+            <a:prstDash val="solid"/>
+          </a:ln>
+        </p:spPr>
+      </p:sp>
+      <p:sp>
+        <p:nvSpPr>
+          <p:cNvPr id="17" name="Text 15"/>
+          <p:cNvSpPr/>
+          <p:nvPr/>
+        </p:nvSpPr>
+        <p:spPr>
+          <a:xfrm>
+            <a:off x="7909560" y="3322015"/>
+            <a:ext cx="816864" cy="146304"/>
+          </a:xfrm>
+          <a:prstGeom prst="rect">
+            <a:avLst/>
+          </a:prstGeom>
+          <a:noFill/>
+          <a:ln/>
+        </p:spPr>
+        <p:txBody>
+          <a:bodyPr wrap="square" lIns="0" tIns="0" rIns="0" bIns="0" rtlCol="0" anchor="ctr">
             <a:normAutofit/>
           </a:bodyPr>
           <a:lstStyle/>
           <a:p>
-            <a:pPr indent="0" marL="0">
-              <a:buNone/>
-            </a:pPr>
-            <a:r>
-              <a:rPr lang="en-US" sz="1220" dirty="0">
-                <a:solidFill>
-                  <a:srgbClr val="17364A"/>
-                </a:solidFill>
-                <a:latin typeface="Aptos" pitchFamily="34" charset="0"/>
-                <a:ea typeface="Aptos" pitchFamily="34" charset="-122"/>
-                <a:cs typeface="Aptos" pitchFamily="34" charset="-120"/>
-              </a:rPr>
-              <a:t>Generative AI may require integration with document repositories.</a:t>
-            </a:r>
-            <a:endParaRPr lang="en-US" sz="1220" dirty="0"/>
-          </a:p>
-          <a:p>
-            <a:pPr indent="0" marL="0">
-              <a:buNone/>
-            </a:pPr>
-            <a:r>
-              <a:rPr lang="en-US" sz="1220" dirty="0">
-                <a:solidFill>
-                  <a:srgbClr val="17364A"/>
-                </a:solidFill>
-                <a:latin typeface="Aptos" pitchFamily="34" charset="0"/>
-                <a:ea typeface="Aptos" pitchFamily="34" charset="-122"/>
-                <a:cs typeface="Aptos" pitchFamily="34" charset="-120"/>
-              </a:rPr>
-              <a:t>Agentic workflows require the strongest integration controls.</a:t>
-            </a:r>
-            <a:endParaRPr lang="en-US" sz="1220" dirty="0"/>
-          </a:p>
-          <a:p>
-            <a:pPr indent="0" marL="0">
-              <a:buNone/>
-            </a:pPr>
-            <a:r>
-              <a:rPr lang="en-US" sz="1220" dirty="0">
-                <a:solidFill>
-                  <a:srgbClr val="17364A"/>
-                </a:solidFill>
-                <a:latin typeface="Aptos" pitchFamily="34" charset="0"/>
-                <a:ea typeface="Aptos" pitchFamily="34" charset="-122"/>
-                <a:cs typeface="Aptos" pitchFamily="34" charset="-120"/>
-              </a:rPr>
-              <a:t>For each AI use case, the integration pattern should match the.</a:t>
-            </a:r>
-            <a:endParaRPr lang="en-US" sz="1220" dirty="0"/>
-          </a:p>
-        </p:txBody>
-      </p:sp>
-      <p:sp>
-        <p:nvSpPr>
-          <p:cNvPr id="16" name="Shape 14"/>
-          <p:cNvSpPr/>
-          <p:nvPr/>
-        </p:nvSpPr>
-        <p:spPr>
-          <a:xfrm>
-            <a:off x="7635240" y="4498848"/>
-            <a:ext cx="3474720" cy="1143000"/>
+            <a:pPr algn="ctr" indent="0" marL="0">
+              <a:buNone/>
+            </a:pPr>
+            <a:r>
+              <a:rPr lang="en-US" sz="880" b="1" dirty="0">
+                <a:solidFill>
+                  <a:srgbClr val="FFFFFF"/>
+                </a:solidFill>
+                <a:latin typeface="Aptos" pitchFamily="34" charset="0"/>
+                <a:ea typeface="Aptos" pitchFamily="34" charset="-122"/>
+                <a:cs typeface="Aptos" pitchFamily="34" charset="-120"/>
+              </a:rPr>
+              <a:t>Need</a:t>
+            </a:r>
+            <a:endParaRPr lang="en-US" sz="880" dirty="0"/>
+          </a:p>
+        </p:txBody>
+      </p:sp>
+      <p:sp>
+        <p:nvSpPr>
+          <p:cNvPr id="18" name="Shape 16"/>
+          <p:cNvSpPr/>
+          <p:nvPr/>
+        </p:nvSpPr>
+        <p:spPr>
+          <a:xfrm>
+            <a:off x="9817608" y="3399739"/>
+            <a:ext cx="164592" cy="0"/>
+          </a:xfrm>
+          <a:prstGeom prst="line">
+            <a:avLst/>
+          </a:prstGeom>
+          <a:noFill/>
+          <a:ln w="15240">
+            <a:solidFill>
+              <a:srgbClr val="8ABBD8"/>
+            </a:solidFill>
+            <a:prstDash val="solid"/>
+          </a:ln>
+        </p:spPr>
+      </p:sp>
+      <p:sp>
+        <p:nvSpPr>
+          <p:cNvPr id="19" name="Shape 17"/>
+          <p:cNvSpPr/>
+          <p:nvPr/>
+        </p:nvSpPr>
+        <p:spPr>
+          <a:xfrm>
+            <a:off x="8927592" y="3248863"/>
+            <a:ext cx="890016" cy="301752"/>
           </a:xfrm>
           <a:prstGeom prst="roundRect">
             <a:avLst>
-              <a:gd name="adj" fmla="val 9600"/>
+              <a:gd name="adj" fmla="val 24242"/>
+            </a:avLst>
+          </a:prstGeom>
+          <a:solidFill>
+            <a:srgbClr val="2F8A28"/>
+          </a:solidFill>
+          <a:ln w="12700">
+            <a:solidFill>
+              <a:srgbClr val="2F8A28"/>
+            </a:solidFill>
+            <a:prstDash val="solid"/>
+          </a:ln>
+        </p:spPr>
+      </p:sp>
+      <p:sp>
+        <p:nvSpPr>
+          <p:cNvPr id="20" name="Text 18"/>
+          <p:cNvSpPr/>
+          <p:nvPr/>
+        </p:nvSpPr>
+        <p:spPr>
+          <a:xfrm>
+            <a:off x="8964168" y="3322015"/>
+            <a:ext cx="816864" cy="146304"/>
+          </a:xfrm>
+          <a:prstGeom prst="rect">
+            <a:avLst/>
+          </a:prstGeom>
+          <a:noFill/>
+          <a:ln/>
+        </p:spPr>
+        <p:txBody>
+          <a:bodyPr wrap="square" lIns="0" tIns="0" rIns="0" bIns="0" rtlCol="0" anchor="ctr">
+            <a:normAutofit/>
+          </a:bodyPr>
+          <a:lstStyle/>
+          <a:p>
+            <a:pPr algn="ctr" indent="0" marL="0">
+              <a:buNone/>
+            </a:pPr>
+            <a:r>
+              <a:rPr lang="en-US" sz="880" b="1" dirty="0">
+                <a:solidFill>
+                  <a:srgbClr val="FFFFFF"/>
+                </a:solidFill>
+                <a:latin typeface="Aptos" pitchFamily="34" charset="0"/>
+                <a:ea typeface="Aptos" pitchFamily="34" charset="-122"/>
+                <a:cs typeface="Aptos" pitchFamily="34" charset="-120"/>
+              </a:rPr>
+              <a:t>Build</a:t>
+            </a:r>
+            <a:endParaRPr lang="en-US" sz="880" dirty="0"/>
+          </a:p>
+        </p:txBody>
+      </p:sp>
+      <p:sp>
+        <p:nvSpPr>
+          <p:cNvPr id="21" name="Shape 19"/>
+          <p:cNvSpPr/>
+          <p:nvPr/>
+        </p:nvSpPr>
+        <p:spPr>
+          <a:xfrm>
+            <a:off x="9982200" y="3248863"/>
+            <a:ext cx="890016" cy="301752"/>
+          </a:xfrm>
+          <a:prstGeom prst="roundRect">
+            <a:avLst>
+              <a:gd name="adj" fmla="val 24242"/>
+            </a:avLst>
+          </a:prstGeom>
+          <a:solidFill>
+            <a:srgbClr val="6A4CA3"/>
+          </a:solidFill>
+          <a:ln w="12700">
+            <a:solidFill>
+              <a:srgbClr val="6A4CA3"/>
+            </a:solidFill>
+            <a:prstDash val="solid"/>
+          </a:ln>
+        </p:spPr>
+      </p:sp>
+      <p:sp>
+        <p:nvSpPr>
+          <p:cNvPr id="22" name="Text 20"/>
+          <p:cNvSpPr/>
+          <p:nvPr/>
+        </p:nvSpPr>
+        <p:spPr>
+          <a:xfrm>
+            <a:off x="10018776" y="3322015"/>
+            <a:ext cx="816864" cy="146304"/>
+          </a:xfrm>
+          <a:prstGeom prst="rect">
+            <a:avLst/>
+          </a:prstGeom>
+          <a:noFill/>
+          <a:ln/>
+        </p:spPr>
+        <p:txBody>
+          <a:bodyPr wrap="square" lIns="0" tIns="0" rIns="0" bIns="0" rtlCol="0" anchor="ctr">
+            <a:normAutofit/>
+          </a:bodyPr>
+          <a:lstStyle/>
+          <a:p>
+            <a:pPr algn="ctr" indent="0" marL="0">
+              <a:buNone/>
+            </a:pPr>
+            <a:r>
+              <a:rPr lang="en-US" sz="880" b="1" dirty="0">
+                <a:solidFill>
+                  <a:srgbClr val="FFFFFF"/>
+                </a:solidFill>
+                <a:latin typeface="Aptos" pitchFamily="34" charset="0"/>
+                <a:ea typeface="Aptos" pitchFamily="34" charset="-122"/>
+                <a:cs typeface="Aptos" pitchFamily="34" charset="-120"/>
+              </a:rPr>
+              <a:t>Adopt</a:t>
+            </a:r>
+            <a:endParaRPr lang="en-US" sz="880" dirty="0"/>
+          </a:p>
+        </p:txBody>
+      </p:sp>
+      <p:sp>
+        <p:nvSpPr>
+          <p:cNvPr id="23" name="Text 21"/>
+          <p:cNvSpPr/>
+          <p:nvPr/>
+        </p:nvSpPr>
+        <p:spPr>
+          <a:xfrm>
+            <a:off x="7854696" y="3742639"/>
+            <a:ext cx="3035808" cy="158191"/>
+          </a:xfrm>
+          <a:prstGeom prst="rect">
+            <a:avLst/>
+          </a:prstGeom>
+          <a:noFill/>
+          <a:ln/>
+        </p:spPr>
+        <p:txBody>
+          <a:bodyPr wrap="square" lIns="254" tIns="254" rIns="254" bIns="254" rtlCol="0" anchor="t">
+            <a:normAutofit/>
+          </a:bodyPr>
+          <a:lstStyle/>
+          <a:p>
+            <a:pPr indent="0" marL="0">
+              <a:buNone/>
+            </a:pPr>
+            <a:r>
+              <a:rPr lang="en-US" sz="1120" dirty="0">
+                <a:solidFill>
+                  <a:srgbClr val="17364A"/>
+                </a:solidFill>
+                <a:latin typeface="Aptos" pitchFamily="34" charset="0"/>
+                <a:ea typeface="Aptos" pitchFamily="34" charset="-122"/>
+                <a:cs typeface="Aptos" pitchFamily="34" charset="-120"/>
+              </a:rPr>
+              <a:t>Implementation work should make dependencies, approvals, training, and sustainment visible before launch.</a:t>
+            </a:r>
+            <a:endParaRPr lang="en-US" sz="1120" dirty="0"/>
+          </a:p>
+        </p:txBody>
+      </p:sp>
+      <p:sp>
+        <p:nvSpPr>
+          <p:cNvPr id="24" name="Shape 22"/>
+          <p:cNvSpPr/>
+          <p:nvPr/>
+        </p:nvSpPr>
+        <p:spPr>
+          <a:xfrm>
+            <a:off x="7635240" y="4184294"/>
+            <a:ext cx="3474720" cy="1466698"/>
+          </a:xfrm>
+          <a:prstGeom prst="roundRect">
+            <a:avLst>
+              <a:gd name="adj" fmla="val 7481"/>
             </a:avLst>
           </a:prstGeom>
           <a:solidFill>
@@ -6613,13 +7045,13 @@
       </p:sp>
       <p:sp>
         <p:nvSpPr>
-          <p:cNvPr id="17" name="Text 15"/>
-          <p:cNvSpPr/>
-          <p:nvPr/>
-        </p:nvSpPr>
-        <p:spPr>
-          <a:xfrm>
-            <a:off x="7799832" y="4645152"/>
+          <p:cNvPr id="25" name="Text 23"/>
+          <p:cNvSpPr/>
+          <p:nvPr/>
+        </p:nvSpPr>
+        <p:spPr>
+          <a:xfrm>
+            <a:off x="7799832" y="4330598"/>
             <a:ext cx="3145536" cy="256032"/>
           </a:xfrm>
           <a:prstGeom prst="rect">
@@ -6652,14 +7084,14 @@
       </p:sp>
       <p:sp>
         <p:nvSpPr>
-          <p:cNvPr id="18" name="Text 16"/>
-          <p:cNvSpPr/>
-          <p:nvPr/>
-        </p:nvSpPr>
-        <p:spPr>
-          <a:xfrm>
-            <a:off x="7799832" y="4974336"/>
-            <a:ext cx="3145536" cy="576072"/>
+          <p:cNvPr id="26" name="Text 24"/>
+          <p:cNvSpPr/>
+          <p:nvPr/>
+        </p:nvSpPr>
+        <p:spPr>
+          <a:xfrm>
+            <a:off x="7799832" y="4659782"/>
+            <a:ext cx="3145536" cy="899770"/>
           </a:xfrm>
           <a:prstGeom prst="rect">
             <a:avLst/>
@@ -6685,7 +7117,7 @@
                 <a:ea typeface="Aptos" pitchFamily="34" charset="-122"/>
                 <a:cs typeface="Aptos" pitchFamily="34" charset="-120"/>
               </a:rPr>
-              <a:t>Use the concept to clarify workflow changes, dependencies, staffing, procurement requirements, training needs, and.</a:t>
+              <a:t>Use the concept to clarify workflow changes, dependencies, staffing, procurement requirements, training needs, and implementation checkpoints.</a:t>
             </a:r>
             <a:endParaRPr lang="en-US" sz="1320" dirty="0"/>
           </a:p>
@@ -7054,11 +7486,11 @@
         <p:spPr>
           <a:xfrm>
             <a:off x="7635240" y="1325880"/>
-            <a:ext cx="3474720" cy="1325880"/>
+            <a:ext cx="3474720" cy="1207008"/>
           </a:xfrm>
           <a:prstGeom prst="roundRect">
             <a:avLst>
-              <a:gd name="adj" fmla="val 8276"/>
+              <a:gd name="adj" fmla="val 9091"/>
             </a:avLst>
           </a:prstGeom>
           <a:solidFill>
@@ -7120,7 +7552,7 @@
         <p:spPr>
           <a:xfrm>
             <a:off x="7799832" y="1801368"/>
-            <a:ext cx="3145536" cy="758952"/>
+            <a:ext cx="3145536" cy="640080"/>
           </a:xfrm>
           <a:prstGeom prst="rect">
             <a:avLst/>
@@ -7160,12 +7592,12 @@
         </p:nvSpPr>
         <p:spPr>
           <a:xfrm>
-            <a:off x="7635240" y="2788920"/>
-            <a:ext cx="3474720" cy="1536192"/>
+            <a:off x="7635240" y="2670048"/>
+            <a:ext cx="3474720" cy="1377086"/>
           </a:xfrm>
           <a:prstGeom prst="roundRect">
             <a:avLst>
-              <a:gd name="adj" fmla="val 7143"/>
+              <a:gd name="adj" fmla="val 7968"/>
             </a:avLst>
           </a:prstGeom>
           <a:solidFill>
@@ -7187,7 +7619,7 @@
         </p:nvSpPr>
         <p:spPr>
           <a:xfrm>
-            <a:off x="7799832" y="2935224"/>
+            <a:off x="7799832" y="2816352"/>
             <a:ext cx="3145536" cy="256032"/>
           </a:xfrm>
           <a:prstGeom prst="rect">
@@ -7226,8 +7658,8 @@
         </p:nvSpPr>
         <p:spPr>
           <a:xfrm>
-            <a:off x="7818120" y="3300984"/>
-            <a:ext cx="3090672" cy="877824"/>
+            <a:off x="7818120" y="3182112"/>
+            <a:ext cx="3090672" cy="718718"/>
           </a:xfrm>
           <a:prstGeom prst="rect">
             <a:avLst/>
@@ -7301,12 +7733,12 @@
         </p:nvSpPr>
         <p:spPr>
           <a:xfrm>
-            <a:off x="7635240" y="4498848"/>
-            <a:ext cx="3474720" cy="1143000"/>
+            <a:off x="7635240" y="4184294"/>
+            <a:ext cx="3474720" cy="1466698"/>
           </a:xfrm>
           <a:prstGeom prst="roundRect">
             <a:avLst>
-              <a:gd name="adj" fmla="val 9600"/>
+              <a:gd name="adj" fmla="val 7481"/>
             </a:avLst>
           </a:prstGeom>
           <a:solidFill>
@@ -7328,7 +7760,7 @@
         </p:nvSpPr>
         <p:spPr>
           <a:xfrm>
-            <a:off x="7799832" y="4645152"/>
+            <a:off x="7799832" y="4330598"/>
             <a:ext cx="3145536" cy="256032"/>
           </a:xfrm>
           <a:prstGeom prst="rect">
@@ -7367,8 +7799,8 @@
         </p:nvSpPr>
         <p:spPr>
           <a:xfrm>
-            <a:off x="7799832" y="4974336"/>
-            <a:ext cx="3145536" cy="576072"/>
+            <a:off x="7799832" y="4659782"/>
+            <a:ext cx="3145536" cy="899770"/>
           </a:xfrm>
           <a:prstGeom prst="rect">
             <a:avLst/>
@@ -7394,7 +7826,7 @@
                 <a:ea typeface="Aptos" pitchFamily="34" charset="-122"/>
                 <a:cs typeface="Aptos" pitchFamily="34" charset="-120"/>
               </a:rPr>
-              <a:t>Connect the concept to public health purpose, responsible use, required safeguards, documentation, and the next action a.</a:t>
+              <a:t>Connect the concept to public health purpose, responsible use, required safeguards, documentation, and the next action a department should take.</a:t>
             </a:r>
             <a:endParaRPr lang="en-US" sz="1320" dirty="0"/>
           </a:p>
@@ -7746,11 +8178,11 @@
         <p:spPr>
           <a:xfrm>
             <a:off x="7635240" y="1325880"/>
-            <a:ext cx="3474720" cy="1325880"/>
+            <a:ext cx="3474720" cy="1207008"/>
           </a:xfrm>
           <a:prstGeom prst="roundRect">
             <a:avLst>
-              <a:gd name="adj" fmla="val 8276"/>
+              <a:gd name="adj" fmla="val 9091"/>
             </a:avLst>
           </a:prstGeom>
           <a:solidFill>
@@ -7812,7 +8244,7 @@
         <p:spPr>
           <a:xfrm>
             <a:off x="7799832" y="1801368"/>
-            <a:ext cx="3145536" cy="758952"/>
+            <a:ext cx="3145536" cy="640080"/>
           </a:xfrm>
           <a:prstGeom prst="rect">
             <a:avLst/>
@@ -7852,12 +8284,12 @@
         </p:nvSpPr>
         <p:spPr>
           <a:xfrm>
-            <a:off x="7635240" y="2788920"/>
-            <a:ext cx="3474720" cy="1536192"/>
+            <a:off x="7635240" y="2670048"/>
+            <a:ext cx="3474720" cy="1377086"/>
           </a:xfrm>
           <a:prstGeom prst="roundRect">
             <a:avLst>
-              <a:gd name="adj" fmla="val 7143"/>
+              <a:gd name="adj" fmla="val 7968"/>
             </a:avLst>
           </a:prstGeom>
           <a:solidFill>
@@ -7879,7 +8311,7 @@
         </p:nvSpPr>
         <p:spPr>
           <a:xfrm>
-            <a:off x="7799832" y="2935224"/>
+            <a:off x="7799832" y="2816352"/>
             <a:ext cx="3145536" cy="256032"/>
           </a:xfrm>
           <a:prstGeom prst="rect">
@@ -7918,8 +8350,8 @@
         </p:nvSpPr>
         <p:spPr>
           <a:xfrm>
-            <a:off x="7818120" y="3300984"/>
-            <a:ext cx="3090672" cy="877824"/>
+            <a:off x="7818120" y="3182112"/>
+            <a:ext cx="3090672" cy="718718"/>
           </a:xfrm>
           <a:prstGeom prst="rect">
             <a:avLst/>
@@ -7976,12 +8408,12 @@
         </p:nvSpPr>
         <p:spPr>
           <a:xfrm>
-            <a:off x="7635240" y="4498848"/>
-            <a:ext cx="3474720" cy="1143000"/>
+            <a:off x="7635240" y="4184294"/>
+            <a:ext cx="3474720" cy="1466698"/>
           </a:xfrm>
           <a:prstGeom prst="roundRect">
             <a:avLst>
-              <a:gd name="adj" fmla="val 9600"/>
+              <a:gd name="adj" fmla="val 7481"/>
             </a:avLst>
           </a:prstGeom>
           <a:solidFill>
@@ -8003,7 +8435,7 @@
         </p:nvSpPr>
         <p:spPr>
           <a:xfrm>
-            <a:off x="7799832" y="4645152"/>
+            <a:off x="7799832" y="4330598"/>
             <a:ext cx="3145536" cy="256032"/>
           </a:xfrm>
           <a:prstGeom prst="rect">
@@ -8042,8 +8474,8 @@
         </p:nvSpPr>
         <p:spPr>
           <a:xfrm>
-            <a:off x="7799832" y="4974336"/>
-            <a:ext cx="3145536" cy="576072"/>
+            <a:off x="7799832" y="4659782"/>
+            <a:ext cx="3145536" cy="899770"/>
           </a:xfrm>
           <a:prstGeom prst="rect">
             <a:avLst/>
@@ -8069,7 +8501,7 @@
                 <a:ea typeface="Aptos" pitchFamily="34" charset="-122"/>
                 <a:cs typeface="Aptos" pitchFamily="34" charset="-120"/>
               </a:rPr>
-              <a:t>Connect the concept to public health purpose, responsible use, required safeguards, documentation, and the next action a.</a:t>
+              <a:t>Connect the concept to public health purpose, responsible use, required safeguards, documentation, and the next action a department should take.</a:t>
             </a:r>
             <a:endParaRPr lang="en-US" sz="1320" dirty="0"/>
           </a:p>
@@ -8421,11 +8853,11 @@
         <p:spPr>
           <a:xfrm>
             <a:off x="7635240" y="1325880"/>
-            <a:ext cx="3474720" cy="1325880"/>
+            <a:ext cx="3474720" cy="1207008"/>
           </a:xfrm>
           <a:prstGeom prst="roundRect">
             <a:avLst>
-              <a:gd name="adj" fmla="val 8276"/>
+              <a:gd name="adj" fmla="val 9091"/>
             </a:avLst>
           </a:prstGeom>
           <a:solidFill>
@@ -8487,7 +8919,7 @@
         <p:spPr>
           <a:xfrm>
             <a:off x="7799832" y="1801368"/>
-            <a:ext cx="3145536" cy="758952"/>
+            <a:ext cx="3145536" cy="640080"/>
           </a:xfrm>
           <a:prstGeom prst="rect">
             <a:avLst/>
@@ -8527,12 +8959,12 @@
         </p:nvSpPr>
         <p:spPr>
           <a:xfrm>
-            <a:off x="7635240" y="2788920"/>
-            <a:ext cx="3474720" cy="1536192"/>
+            <a:off x="7635240" y="2670048"/>
+            <a:ext cx="3474720" cy="1377086"/>
           </a:xfrm>
           <a:prstGeom prst="roundRect">
             <a:avLst>
-              <a:gd name="adj" fmla="val 7143"/>
+              <a:gd name="adj" fmla="val 7968"/>
             </a:avLst>
           </a:prstGeom>
           <a:solidFill>
@@ -8554,7 +8986,7 @@
         </p:nvSpPr>
         <p:spPr>
           <a:xfrm>
-            <a:off x="7799832" y="2935224"/>
+            <a:off x="7799832" y="2816352"/>
             <a:ext cx="3145536" cy="256032"/>
           </a:xfrm>
           <a:prstGeom prst="rect">
@@ -8593,8 +9025,8 @@
         </p:nvSpPr>
         <p:spPr>
           <a:xfrm>
-            <a:off x="7818120" y="3300984"/>
-            <a:ext cx="3090672" cy="877824"/>
+            <a:off x="7818120" y="3182112"/>
+            <a:ext cx="3090672" cy="718718"/>
           </a:xfrm>
           <a:prstGeom prst="rect">
             <a:avLst/>
@@ -8651,12 +9083,12 @@
         </p:nvSpPr>
         <p:spPr>
           <a:xfrm>
-            <a:off x="7635240" y="4498848"/>
-            <a:ext cx="3474720" cy="1143000"/>
+            <a:off x="7635240" y="4184294"/>
+            <a:ext cx="3474720" cy="1466698"/>
           </a:xfrm>
           <a:prstGeom prst="roundRect">
             <a:avLst>
-              <a:gd name="adj" fmla="val 9600"/>
+              <a:gd name="adj" fmla="val 7481"/>
             </a:avLst>
           </a:prstGeom>
           <a:solidFill>
@@ -8678,7 +9110,7 @@
         </p:nvSpPr>
         <p:spPr>
           <a:xfrm>
-            <a:off x="7799832" y="4645152"/>
+            <a:off x="7799832" y="4330598"/>
             <a:ext cx="3145536" cy="256032"/>
           </a:xfrm>
           <a:prstGeom prst="rect">
@@ -8717,8 +9149,8 @@
         </p:nvSpPr>
         <p:spPr>
           <a:xfrm>
-            <a:off x="7799832" y="4974336"/>
-            <a:ext cx="3145536" cy="576072"/>
+            <a:off x="7799832" y="4659782"/>
+            <a:ext cx="3145536" cy="899770"/>
           </a:xfrm>
           <a:prstGeom prst="rect">
             <a:avLst/>
@@ -8744,7 +9176,7 @@
                 <a:ea typeface="Aptos" pitchFamily="34" charset="-122"/>
                 <a:cs typeface="Aptos" pitchFamily="34" charset="-120"/>
               </a:rPr>
-              <a:t>Use the assignment to test whether you can explain the concept, apply it to a realistic public health situation, and.</a:t>
+              <a:t>Use the assignment to test whether you can explain the concept, apply it to a realistic public health situation, and identify what would need review before the work moves forward.</a:t>
             </a:r>
             <a:endParaRPr lang="en-US" sz="1320" dirty="0"/>
           </a:p>
@@ -9113,11 +9545,11 @@
         <p:spPr>
           <a:xfrm>
             <a:off x="7635240" y="1325880"/>
-            <a:ext cx="3474720" cy="1325880"/>
+            <a:ext cx="3474720" cy="1207008"/>
           </a:xfrm>
           <a:prstGeom prst="roundRect">
             <a:avLst>
-              <a:gd name="adj" fmla="val 8276"/>
+              <a:gd name="adj" fmla="val 9091"/>
             </a:avLst>
           </a:prstGeom>
           <a:solidFill>
@@ -9179,7 +9611,7 @@
         <p:spPr>
           <a:xfrm>
             <a:off x="7799832" y="1801368"/>
-            <a:ext cx="3145536" cy="758952"/>
+            <a:ext cx="3145536" cy="640080"/>
           </a:xfrm>
           <a:prstGeom prst="rect">
             <a:avLst/>
@@ -9219,12 +9651,12 @@
         </p:nvSpPr>
         <p:spPr>
           <a:xfrm>
-            <a:off x="7635240" y="2788920"/>
-            <a:ext cx="3474720" cy="1536192"/>
+            <a:off x="7635240" y="2670048"/>
+            <a:ext cx="3474720" cy="1377086"/>
           </a:xfrm>
           <a:prstGeom prst="roundRect">
             <a:avLst>
-              <a:gd name="adj" fmla="val 7143"/>
+              <a:gd name="adj" fmla="val 7968"/>
             </a:avLst>
           </a:prstGeom>
           <a:solidFill>
@@ -9246,7 +9678,7 @@
         </p:nvSpPr>
         <p:spPr>
           <a:xfrm>
-            <a:off x="7799832" y="2935224"/>
+            <a:off x="7799832" y="2816352"/>
             <a:ext cx="3145536" cy="256032"/>
           </a:xfrm>
           <a:prstGeom prst="rect">
@@ -9285,8 +9717,8 @@
         </p:nvSpPr>
         <p:spPr>
           <a:xfrm>
-            <a:off x="7818120" y="3300984"/>
-            <a:ext cx="3090672" cy="877824"/>
+            <a:off x="7818120" y="3182112"/>
+            <a:ext cx="3090672" cy="718718"/>
           </a:xfrm>
           <a:prstGeom prst="rect">
             <a:avLst/>
@@ -9360,12 +9792,12 @@
         </p:nvSpPr>
         <p:spPr>
           <a:xfrm>
-            <a:off x="7635240" y="4498848"/>
-            <a:ext cx="3474720" cy="1143000"/>
+            <a:off x="7635240" y="4184294"/>
+            <a:ext cx="3474720" cy="1466698"/>
           </a:xfrm>
           <a:prstGeom prst="roundRect">
             <a:avLst>
-              <a:gd name="adj" fmla="val 9600"/>
+              <a:gd name="adj" fmla="val 7481"/>
             </a:avLst>
           </a:prstGeom>
           <a:solidFill>
@@ -9387,7 +9819,7 @@
         </p:nvSpPr>
         <p:spPr>
           <a:xfrm>
-            <a:off x="7799832" y="4645152"/>
+            <a:off x="7799832" y="4330598"/>
             <a:ext cx="3145536" cy="256032"/>
           </a:xfrm>
           <a:prstGeom prst="rect">
@@ -9426,8 +9858,8 @@
         </p:nvSpPr>
         <p:spPr>
           <a:xfrm>
-            <a:off x="7799832" y="4974336"/>
-            <a:ext cx="3145536" cy="576072"/>
+            <a:off x="7799832" y="4659782"/>
+            <a:ext cx="3145536" cy="899770"/>
           </a:xfrm>
           <a:prstGeom prst="rect">
             <a:avLst/>
@@ -9453,7 +9885,7 @@
                 <a:ea typeface="Aptos" pitchFamily="34" charset="-122"/>
                 <a:cs typeface="Aptos" pitchFamily="34" charset="-120"/>
               </a:rPr>
-              <a:t>Connect the concept to public health purpose, responsible use, required safeguards, documentation, and the next action a.</a:t>
+              <a:t>Connect the concept to public health purpose, responsible use, required safeguards, documentation, and the next action a department should take.</a:t>
             </a:r>
             <a:endParaRPr lang="en-US" sz="1320" dirty="0"/>
           </a:p>
@@ -9788,11 +10220,11 @@
         <p:spPr>
           <a:xfrm>
             <a:off x="7635240" y="1325880"/>
-            <a:ext cx="3474720" cy="1325880"/>
+            <a:ext cx="3474720" cy="1207008"/>
           </a:xfrm>
           <a:prstGeom prst="roundRect">
             <a:avLst>
-              <a:gd name="adj" fmla="val 8276"/>
+              <a:gd name="adj" fmla="val 9091"/>
             </a:avLst>
           </a:prstGeom>
           <a:solidFill>
@@ -9854,7 +10286,7 @@
         <p:spPr>
           <a:xfrm>
             <a:off x="7799832" y="1801368"/>
-            <a:ext cx="3145536" cy="758952"/>
+            <a:ext cx="3145536" cy="640080"/>
           </a:xfrm>
           <a:prstGeom prst="rect">
             <a:avLst/>
@@ -9894,12 +10326,12 @@
         </p:nvSpPr>
         <p:spPr>
           <a:xfrm>
-            <a:off x="7635240" y="2788920"/>
-            <a:ext cx="3474720" cy="1536192"/>
+            <a:off x="7635240" y="2670048"/>
+            <a:ext cx="3474720" cy="1377086"/>
           </a:xfrm>
           <a:prstGeom prst="roundRect">
             <a:avLst>
-              <a:gd name="adj" fmla="val 7143"/>
+              <a:gd name="adj" fmla="val 7968"/>
             </a:avLst>
           </a:prstGeom>
           <a:solidFill>
@@ -9921,7 +10353,7 @@
         </p:nvSpPr>
         <p:spPr>
           <a:xfrm>
-            <a:off x="7799832" y="2935224"/>
+            <a:off x="7799832" y="2816352"/>
             <a:ext cx="3145536" cy="256032"/>
           </a:xfrm>
           <a:prstGeom prst="rect">
@@ -9960,8 +10392,8 @@
         </p:nvSpPr>
         <p:spPr>
           <a:xfrm>
-            <a:off x="7818120" y="3300984"/>
-            <a:ext cx="3090672" cy="877824"/>
+            <a:off x="7818120" y="3182112"/>
+            <a:ext cx="3090672" cy="718718"/>
           </a:xfrm>
           <a:prstGeom prst="rect">
             <a:avLst/>
@@ -10001,12 +10433,12 @@
         </p:nvSpPr>
         <p:spPr>
           <a:xfrm>
-            <a:off x="7635240" y="4498848"/>
-            <a:ext cx="3474720" cy="1143000"/>
+            <a:off x="7635240" y="4184294"/>
+            <a:ext cx="3474720" cy="1466698"/>
           </a:xfrm>
           <a:prstGeom prst="roundRect">
             <a:avLst>
-              <a:gd name="adj" fmla="val 9600"/>
+              <a:gd name="adj" fmla="val 7481"/>
             </a:avLst>
           </a:prstGeom>
           <a:solidFill>
@@ -10028,7 +10460,7 @@
         </p:nvSpPr>
         <p:spPr>
           <a:xfrm>
-            <a:off x="7799832" y="4645152"/>
+            <a:off x="7799832" y="4330598"/>
             <a:ext cx="3145536" cy="256032"/>
           </a:xfrm>
           <a:prstGeom prst="rect">
@@ -10067,8 +10499,8 @@
         </p:nvSpPr>
         <p:spPr>
           <a:xfrm>
-            <a:off x="7799832" y="4974336"/>
-            <a:ext cx="3145536" cy="576072"/>
+            <a:off x="7799832" y="4659782"/>
+            <a:ext cx="3145536" cy="899770"/>
           </a:xfrm>
           <a:prstGeom prst="rect">
             <a:avLst/>
@@ -10094,7 +10526,7 @@
                 <a:ea typeface="Aptos" pitchFamily="34" charset="-122"/>
                 <a:cs typeface="Aptos" pitchFamily="34" charset="-120"/>
               </a:rPr>
-              <a:t>Connect the concept to public health purpose, responsible use, required safeguards, documentation, and the next action a.</a:t>
+              <a:t>Connect the concept to public health purpose, responsible use, required safeguards, documentation, and the next action a department should take.</a:t>
             </a:r>
             <a:endParaRPr lang="en-US" sz="1320" dirty="0"/>
           </a:p>
@@ -10555,7 +10987,7 @@
                 <a:ea typeface="Aptos" pitchFamily="34" charset="-122"/>
                 <a:cs typeface="Aptos" pitchFamily="34" charset="-120"/>
               </a:rPr>
-              <a:t>Level: intermediate/practitioner Primary track: Technical Architecture Track Appears in tracks: technical-architecture,.</a:t>
+              <a:t>Level: intermediate/practitioner Primary track: Technical Architecture Track Appears in tracks: technical-architecture, operations-data-quality, program-management, governance-security</a:t>
             </a:r>
             <a:endParaRPr lang="en-US" sz="1320" dirty="0"/>
           </a:p>
@@ -11065,11 +11497,11 @@
         <p:spPr>
           <a:xfrm>
             <a:off x="7635240" y="1325880"/>
-            <a:ext cx="3474720" cy="1325880"/>
+            <a:ext cx="3474720" cy="1207008"/>
           </a:xfrm>
           <a:prstGeom prst="roundRect">
             <a:avLst>
-              <a:gd name="adj" fmla="val 8276"/>
+              <a:gd name="adj" fmla="val 9091"/>
             </a:avLst>
           </a:prstGeom>
           <a:solidFill>
@@ -11131,7 +11563,7 @@
         <p:spPr>
           <a:xfrm>
             <a:off x="7799832" y="1801368"/>
-            <a:ext cx="3145536" cy="758952"/>
+            <a:ext cx="3145536" cy="640080"/>
           </a:xfrm>
           <a:prstGeom prst="rect">
             <a:avLst/>
@@ -11171,12 +11603,12 @@
         </p:nvSpPr>
         <p:spPr>
           <a:xfrm>
-            <a:off x="7635240" y="2788920"/>
-            <a:ext cx="3474720" cy="1536192"/>
+            <a:off x="7635240" y="2670048"/>
+            <a:ext cx="3474720" cy="1377086"/>
           </a:xfrm>
           <a:prstGeom prst="roundRect">
             <a:avLst>
-              <a:gd name="adj" fmla="val 7143"/>
+              <a:gd name="adj" fmla="val 7968"/>
             </a:avLst>
           </a:prstGeom>
           <a:solidFill>
@@ -11198,7 +11630,7 @@
         </p:nvSpPr>
         <p:spPr>
           <a:xfrm>
-            <a:off x="7799832" y="2935224"/>
+            <a:off x="7799832" y="2816352"/>
             <a:ext cx="3145536" cy="256032"/>
           </a:xfrm>
           <a:prstGeom prst="rect">
@@ -11237,8 +11669,8 @@
         </p:nvSpPr>
         <p:spPr>
           <a:xfrm>
-            <a:off x="7818120" y="3300984"/>
-            <a:ext cx="3090672" cy="877824"/>
+            <a:off x="7818120" y="3182112"/>
+            <a:ext cx="3090672" cy="718718"/>
           </a:xfrm>
           <a:prstGeom prst="rect">
             <a:avLst/>
@@ -11312,12 +11744,12 @@
         </p:nvSpPr>
         <p:spPr>
           <a:xfrm>
-            <a:off x="7635240" y="4498848"/>
-            <a:ext cx="3474720" cy="1143000"/>
+            <a:off x="7635240" y="4184294"/>
+            <a:ext cx="3474720" cy="1466698"/>
           </a:xfrm>
           <a:prstGeom prst="roundRect">
             <a:avLst>
-              <a:gd name="adj" fmla="val 9600"/>
+              <a:gd name="adj" fmla="val 7481"/>
             </a:avLst>
           </a:prstGeom>
           <a:solidFill>
@@ -11339,7 +11771,7 @@
         </p:nvSpPr>
         <p:spPr>
           <a:xfrm>
-            <a:off x="7799832" y="4645152"/>
+            <a:off x="7799832" y="4330598"/>
             <a:ext cx="3145536" cy="256032"/>
           </a:xfrm>
           <a:prstGeom prst="rect">
@@ -11378,8 +11810,8 @@
         </p:nvSpPr>
         <p:spPr>
           <a:xfrm>
-            <a:off x="7799832" y="4974336"/>
-            <a:ext cx="3145536" cy="576072"/>
+            <a:off x="7799832" y="4659782"/>
+            <a:ext cx="3145536" cy="899770"/>
           </a:xfrm>
           <a:prstGeom prst="rect">
             <a:avLst/>
@@ -11405,7 +11837,7 @@
                 <a:ea typeface="Aptos" pitchFamily="34" charset="-122"/>
                 <a:cs typeface="Aptos" pitchFamily="34" charset="-120"/>
               </a:rPr>
-              <a:t>Use the assignment to test whether you can explain the concept, apply it to a realistic public health situation, and.</a:t>
+              <a:t>Use the assignment to test whether you can explain the concept, apply it to a realistic public health situation, and identify what would need review before the work moves forward.</a:t>
             </a:r>
             <a:endParaRPr lang="en-US" sz="1320" dirty="0"/>
           </a:p>
@@ -11774,11 +12206,11 @@
         <p:spPr>
           <a:xfrm>
             <a:off x="7635240" y="1325880"/>
-            <a:ext cx="3474720" cy="1325880"/>
+            <a:ext cx="3474720" cy="1207008"/>
           </a:xfrm>
           <a:prstGeom prst="roundRect">
             <a:avLst>
-              <a:gd name="adj" fmla="val 8276"/>
+              <a:gd name="adj" fmla="val 9091"/>
             </a:avLst>
           </a:prstGeom>
           <a:solidFill>
@@ -11840,7 +12272,7 @@
         <p:spPr>
           <a:xfrm>
             <a:off x="7799832" y="1801368"/>
-            <a:ext cx="3145536" cy="758952"/>
+            <a:ext cx="3145536" cy="640080"/>
           </a:xfrm>
           <a:prstGeom prst="rect">
             <a:avLst/>
@@ -11866,7 +12298,7 @@
                 <a:ea typeface="Aptos" pitchFamily="34" charset="-122"/>
                 <a:cs typeface="Aptos" pitchFamily="34" charset="-120"/>
               </a:rPr>
-              <a:t>1. Which integration risk is most concerning for an AI tool that can update a case record?</a:t>
+              <a:t>1. Which integration risk is most concerning for an AI tool that can update a case.</a:t>
             </a:r>
             <a:endParaRPr lang="en-US" sz="1320" dirty="0"/>
           </a:p>
@@ -11880,12 +12312,12 @@
         </p:nvSpPr>
         <p:spPr>
           <a:xfrm>
-            <a:off x="7635240" y="2788920"/>
-            <a:ext cx="3474720" cy="1536192"/>
+            <a:off x="7635240" y="2670048"/>
+            <a:ext cx="3474720" cy="1377086"/>
           </a:xfrm>
           <a:prstGeom prst="roundRect">
             <a:avLst>
-              <a:gd name="adj" fmla="val 7143"/>
+              <a:gd name="adj" fmla="val 7968"/>
             </a:avLst>
           </a:prstGeom>
           <a:solidFill>
@@ -11907,7 +12339,7 @@
         </p:nvSpPr>
         <p:spPr>
           <a:xfrm>
-            <a:off x="7799832" y="2935224"/>
+            <a:off x="7799832" y="2816352"/>
             <a:ext cx="3145536" cy="256032"/>
           </a:xfrm>
           <a:prstGeom prst="rect">
@@ -11946,8 +12378,8 @@
         </p:nvSpPr>
         <p:spPr>
           <a:xfrm>
-            <a:off x="7818120" y="3300984"/>
-            <a:ext cx="3090672" cy="877824"/>
+            <a:off x="7818120" y="3182112"/>
+            <a:ext cx="3090672" cy="718718"/>
           </a:xfrm>
           <a:prstGeom prst="rect">
             <a:avLst/>
@@ -12021,12 +12453,12 @@
         </p:nvSpPr>
         <p:spPr>
           <a:xfrm>
-            <a:off x="7635240" y="4498848"/>
-            <a:ext cx="3474720" cy="1143000"/>
+            <a:off x="7635240" y="4184294"/>
+            <a:ext cx="3474720" cy="1466698"/>
           </a:xfrm>
           <a:prstGeom prst="roundRect">
             <a:avLst>
-              <a:gd name="adj" fmla="val 9600"/>
+              <a:gd name="adj" fmla="val 7481"/>
             </a:avLst>
           </a:prstGeom>
           <a:solidFill>
@@ -12048,7 +12480,7 @@
         </p:nvSpPr>
         <p:spPr>
           <a:xfrm>
-            <a:off x="7799832" y="4645152"/>
+            <a:off x="7799832" y="4330598"/>
             <a:ext cx="3145536" cy="256032"/>
           </a:xfrm>
           <a:prstGeom prst="rect">
@@ -12087,8 +12519,8 @@
         </p:nvSpPr>
         <p:spPr>
           <a:xfrm>
-            <a:off x="7799832" y="4974336"/>
-            <a:ext cx="3145536" cy="576072"/>
+            <a:off x="7799832" y="4659782"/>
+            <a:ext cx="3145536" cy="899770"/>
           </a:xfrm>
           <a:prstGeom prst="rect">
             <a:avLst/>
@@ -12114,7 +12546,7 @@
                 <a:ea typeface="Aptos" pitchFamily="34" charset="-122"/>
                 <a:cs typeface="Aptos" pitchFamily="34" charset="-120"/>
               </a:rPr>
-              <a:t>Use the assignment to test whether you can explain the concept, apply it to a realistic public health situation, and.</a:t>
+              <a:t>Use the assignment to test whether you can explain the concept, apply it to a realistic public health situation, and identify what would need review before the work moves forward.</a:t>
             </a:r>
             <a:endParaRPr lang="en-US" sz="1320" dirty="0"/>
           </a:p>
@@ -12483,11 +12915,11 @@
         <p:spPr>
           <a:xfrm>
             <a:off x="7635240" y="1325880"/>
-            <a:ext cx="3474720" cy="1325880"/>
+            <a:ext cx="3474720" cy="1207008"/>
           </a:xfrm>
           <a:prstGeom prst="roundRect">
             <a:avLst>
-              <a:gd name="adj" fmla="val 8276"/>
+              <a:gd name="adj" fmla="val 9091"/>
             </a:avLst>
           </a:prstGeom>
           <a:solidFill>
@@ -12549,7 +12981,7 @@
         <p:spPr>
           <a:xfrm>
             <a:off x="7799832" y="1801368"/>
-            <a:ext cx="3145536" cy="758952"/>
+            <a:ext cx="3145536" cy="640080"/>
           </a:xfrm>
           <a:prstGeom prst="rect">
             <a:avLst/>
@@ -12589,12 +13021,12 @@
         </p:nvSpPr>
         <p:spPr>
           <a:xfrm>
-            <a:off x="7635240" y="2788920"/>
-            <a:ext cx="3474720" cy="1536192"/>
+            <a:off x="7635240" y="2670048"/>
+            <a:ext cx="3474720" cy="1377086"/>
           </a:xfrm>
           <a:prstGeom prst="roundRect">
             <a:avLst>
-              <a:gd name="adj" fmla="val 7143"/>
+              <a:gd name="adj" fmla="val 7968"/>
             </a:avLst>
           </a:prstGeom>
           <a:solidFill>
@@ -12616,7 +13048,7 @@
         </p:nvSpPr>
         <p:spPr>
           <a:xfrm>
-            <a:off x="7799832" y="2935224"/>
+            <a:off x="7799832" y="2816352"/>
             <a:ext cx="3145536" cy="256032"/>
           </a:xfrm>
           <a:prstGeom prst="rect">
@@ -12655,8 +13087,8 @@
         </p:nvSpPr>
         <p:spPr>
           <a:xfrm>
-            <a:off x="7818120" y="3300984"/>
-            <a:ext cx="3090672" cy="877824"/>
+            <a:off x="7818120" y="3182112"/>
+            <a:ext cx="3090672" cy="718718"/>
           </a:xfrm>
           <a:prstGeom prst="rect">
             <a:avLst/>
@@ -12713,12 +13145,12 @@
         </p:nvSpPr>
         <p:spPr>
           <a:xfrm>
-            <a:off x="7635240" y="4498848"/>
-            <a:ext cx="3474720" cy="1143000"/>
+            <a:off x="7635240" y="4184294"/>
+            <a:ext cx="3474720" cy="1466698"/>
           </a:xfrm>
           <a:prstGeom prst="roundRect">
             <a:avLst>
-              <a:gd name="adj" fmla="val 9600"/>
+              <a:gd name="adj" fmla="val 7481"/>
             </a:avLst>
           </a:prstGeom>
           <a:solidFill>
@@ -12740,7 +13172,7 @@
         </p:nvSpPr>
         <p:spPr>
           <a:xfrm>
-            <a:off x="7799832" y="4645152"/>
+            <a:off x="7799832" y="4330598"/>
             <a:ext cx="3145536" cy="256032"/>
           </a:xfrm>
           <a:prstGeom prst="rect">
@@ -12779,8 +13211,8 @@
         </p:nvSpPr>
         <p:spPr>
           <a:xfrm>
-            <a:off x="7799832" y="4974336"/>
-            <a:ext cx="3145536" cy="576072"/>
+            <a:off x="7799832" y="4659782"/>
+            <a:ext cx="3145536" cy="899770"/>
           </a:xfrm>
           <a:prstGeom prst="rect">
             <a:avLst/>
@@ -12806,7 +13238,7 @@
                 <a:ea typeface="Aptos" pitchFamily="34" charset="-122"/>
                 <a:cs typeface="Aptos" pitchFamily="34" charset="-120"/>
               </a:rPr>
-              <a:t>Connect the concept to public health purpose, responsible use, required safeguards, documentation, and the next action a.</a:t>
+              <a:t>Connect the concept to public health purpose, responsible use, required safeguards, documentation, and the next action a department should take.</a:t>
             </a:r>
             <a:endParaRPr lang="en-US" sz="1320" dirty="0"/>
           </a:p>
@@ -13141,11 +13573,11 @@
         <p:spPr>
           <a:xfrm>
             <a:off x="7635240" y="1325880"/>
-            <a:ext cx="3474720" cy="1325880"/>
+            <a:ext cx="3474720" cy="1255471"/>
           </a:xfrm>
           <a:prstGeom prst="roundRect">
             <a:avLst>
-              <a:gd name="adj" fmla="val 8276"/>
+              <a:gd name="adj" fmla="val 8740"/>
             </a:avLst>
           </a:prstGeom>
           <a:solidFill>
@@ -13207,7 +13639,7 @@
         <p:spPr>
           <a:xfrm>
             <a:off x="7799832" y="1801368"/>
-            <a:ext cx="3145536" cy="758952"/>
+            <a:ext cx="3145536" cy="688543"/>
           </a:xfrm>
           <a:prstGeom prst="rect">
             <a:avLst/>
@@ -13247,12 +13679,12 @@
         </p:nvSpPr>
         <p:spPr>
           <a:xfrm>
-            <a:off x="7635240" y="2788920"/>
-            <a:ext cx="3474720" cy="1536192"/>
+            <a:off x="7635240" y="2718511"/>
+            <a:ext cx="3474720" cy="1328623"/>
           </a:xfrm>
           <a:prstGeom prst="roundRect">
             <a:avLst>
-              <a:gd name="adj" fmla="val 7143"/>
+              <a:gd name="adj" fmla="val 8259"/>
             </a:avLst>
           </a:prstGeom>
           <a:solidFill>
@@ -13274,7 +13706,7 @@
         </p:nvSpPr>
         <p:spPr>
           <a:xfrm>
-            <a:off x="7799832" y="2935224"/>
+            <a:off x="7799832" y="2864815"/>
             <a:ext cx="3145536" cy="256032"/>
           </a:xfrm>
           <a:prstGeom prst="rect">
@@ -13313,8 +13745,8 @@
         </p:nvSpPr>
         <p:spPr>
           <a:xfrm>
-            <a:off x="7818120" y="3300984"/>
-            <a:ext cx="3090672" cy="877824"/>
+            <a:off x="7818120" y="3230575"/>
+            <a:ext cx="3090672" cy="670255"/>
           </a:xfrm>
           <a:prstGeom prst="rect">
             <a:avLst/>
@@ -13354,12 +13786,12 @@
         </p:nvSpPr>
         <p:spPr>
           <a:xfrm>
-            <a:off x="7635240" y="4498848"/>
-            <a:ext cx="3474720" cy="1143000"/>
+            <a:off x="7635240" y="4184294"/>
+            <a:ext cx="3474720" cy="1466698"/>
           </a:xfrm>
           <a:prstGeom prst="roundRect">
             <a:avLst>
-              <a:gd name="adj" fmla="val 9600"/>
+              <a:gd name="adj" fmla="val 7481"/>
             </a:avLst>
           </a:prstGeom>
           <a:solidFill>
@@ -13381,7 +13813,7 @@
         </p:nvSpPr>
         <p:spPr>
           <a:xfrm>
-            <a:off x="7799832" y="4645152"/>
+            <a:off x="7799832" y="4330598"/>
             <a:ext cx="3145536" cy="256032"/>
           </a:xfrm>
           <a:prstGeom prst="rect">
@@ -13420,8 +13852,8 @@
         </p:nvSpPr>
         <p:spPr>
           <a:xfrm>
-            <a:off x="7799832" y="4974336"/>
-            <a:ext cx="3145536" cy="576072"/>
+            <a:off x="7799832" y="4659782"/>
+            <a:ext cx="3145536" cy="899770"/>
           </a:xfrm>
           <a:prstGeom prst="rect">
             <a:avLst/>
@@ -13447,7 +13879,7 @@
                 <a:ea typeface="Aptos" pitchFamily="34" charset="-122"/>
                 <a:cs typeface="Aptos" pitchFamily="34" charset="-120"/>
               </a:rPr>
-              <a:t>Connect the concept to public health purpose, responsible use, required safeguards, documentation, and the next action a.</a:t>
+              <a:t>Connect the concept to public health purpose, responsible use, required safeguards, documentation, and the next action a department should take.</a:t>
             </a:r>
             <a:endParaRPr lang="en-US" sz="1320" dirty="0"/>
           </a:p>
@@ -13925,7 +14357,7 @@
                 <a:ea typeface="Aptos" pitchFamily="34" charset="-122"/>
                 <a:cs typeface="Aptos" pitchFamily="34" charset="-120"/>
               </a:rPr>
-              <a:t>Use the related plays to identify decisions, participants, timing, approvals, and documentation needed for responsible.</a:t>
+              <a:t>Use the related plays to identify decisions, participants, timing, approvals, and documentation needed for responsible implementation.</a:t>
             </a:r>
             <a:endParaRPr lang="en-US" sz="1320" dirty="0"/>
           </a:p>
@@ -14544,7 +14976,7 @@
                 <a:ea typeface="Aptos" pitchFamily="34" charset="-122"/>
                 <a:cs typeface="Aptos" pitchFamily="34" charset="-120"/>
               </a:rPr>
-              <a:t>Use linked tools when your department needs a structured worksheet, template, checklist, review process, or.</a:t>
+              <a:t>Use linked tools when your department needs a structured worksheet, template, checklist, review process, or documentation artifact.</a:t>
             </a:r>
             <a:endParaRPr lang="en-US" sz="1320" dirty="0"/>
           </a:p>
@@ -15054,11 +15486,11 @@
         <p:spPr>
           <a:xfrm>
             <a:off x="7635240" y="1325880"/>
-            <a:ext cx="3474720" cy="1325880"/>
+            <a:ext cx="3474720" cy="1207008"/>
           </a:xfrm>
           <a:prstGeom prst="roundRect">
             <a:avLst>
-              <a:gd name="adj" fmla="val 8276"/>
+              <a:gd name="adj" fmla="val 9091"/>
             </a:avLst>
           </a:prstGeom>
           <a:solidFill>
@@ -15120,7 +15552,7 @@
         <p:spPr>
           <a:xfrm>
             <a:off x="7799832" y="1801368"/>
-            <a:ext cx="3145536" cy="758952"/>
+            <a:ext cx="3145536" cy="640080"/>
           </a:xfrm>
           <a:prstGeom prst="rect">
             <a:avLst/>
@@ -15160,12 +15592,12 @@
         </p:nvSpPr>
         <p:spPr>
           <a:xfrm>
-            <a:off x="7635240" y="2788920"/>
-            <a:ext cx="3474720" cy="1536192"/>
+            <a:off x="7635240" y="2670048"/>
+            <a:ext cx="3474720" cy="1377086"/>
           </a:xfrm>
           <a:prstGeom prst="roundRect">
             <a:avLst>
-              <a:gd name="adj" fmla="val 7143"/>
+              <a:gd name="adj" fmla="val 7968"/>
             </a:avLst>
           </a:prstGeom>
           <a:solidFill>
@@ -15187,7 +15619,7 @@
         </p:nvSpPr>
         <p:spPr>
           <a:xfrm>
-            <a:off x="7799832" y="2935224"/>
+            <a:off x="7799832" y="2816352"/>
             <a:ext cx="3145536" cy="256032"/>
           </a:xfrm>
           <a:prstGeom prst="rect">
@@ -15226,8 +15658,8 @@
         </p:nvSpPr>
         <p:spPr>
           <a:xfrm>
-            <a:off x="7818120" y="3300984"/>
-            <a:ext cx="3090672" cy="877824"/>
+            <a:off x="7818120" y="3182112"/>
+            <a:ext cx="3090672" cy="718718"/>
           </a:xfrm>
           <a:prstGeom prst="rect">
             <a:avLst/>
@@ -15301,12 +15733,12 @@
         </p:nvSpPr>
         <p:spPr>
           <a:xfrm>
-            <a:off x="7635240" y="4498848"/>
-            <a:ext cx="3474720" cy="1143000"/>
+            <a:off x="7635240" y="4184294"/>
+            <a:ext cx="3474720" cy="1466698"/>
           </a:xfrm>
           <a:prstGeom prst="roundRect">
             <a:avLst>
-              <a:gd name="adj" fmla="val 9600"/>
+              <a:gd name="adj" fmla="val 7481"/>
             </a:avLst>
           </a:prstGeom>
           <a:solidFill>
@@ -15328,7 +15760,7 @@
         </p:nvSpPr>
         <p:spPr>
           <a:xfrm>
-            <a:off x="7799832" y="4645152"/>
+            <a:off x="7799832" y="4330598"/>
             <a:ext cx="3145536" cy="256032"/>
           </a:xfrm>
           <a:prstGeom prst="rect">
@@ -15367,8 +15799,8 @@
         </p:nvSpPr>
         <p:spPr>
           <a:xfrm>
-            <a:off x="7799832" y="4974336"/>
-            <a:ext cx="3145536" cy="576072"/>
+            <a:off x="7799832" y="4659782"/>
+            <a:ext cx="3145536" cy="899770"/>
           </a:xfrm>
           <a:prstGeom prst="rect">
             <a:avLst/>
@@ -15394,7 +15826,7 @@
                 <a:ea typeface="Aptos" pitchFamily="34" charset="-122"/>
                 <a:cs typeface="Aptos" pitchFamily="34" charset="-120"/>
               </a:rPr>
-              <a:t>Use the assignment to test whether you can explain the concept, apply it to a realistic public health situation, and.</a:t>
+              <a:t>Use the assignment to test whether you can explain the concept, apply it to a realistic public health situation, and identify what would need review before the work moves forward.</a:t>
             </a:r>
             <a:endParaRPr lang="en-US" sz="1320" dirty="0"/>
           </a:p>
@@ -15729,11 +16161,11 @@
         <p:spPr>
           <a:xfrm>
             <a:off x="7635240" y="1325880"/>
-            <a:ext cx="3474720" cy="1325880"/>
+            <a:ext cx="3474720" cy="1207008"/>
           </a:xfrm>
           <a:prstGeom prst="roundRect">
             <a:avLst>
-              <a:gd name="adj" fmla="val 8276"/>
+              <a:gd name="adj" fmla="val 9091"/>
             </a:avLst>
           </a:prstGeom>
           <a:solidFill>
@@ -15795,7 +16227,7 @@
         <p:spPr>
           <a:xfrm>
             <a:off x="7799832" y="1801368"/>
-            <a:ext cx="3145536" cy="758952"/>
+            <a:ext cx="3145536" cy="640080"/>
           </a:xfrm>
           <a:prstGeom prst="rect">
             <a:avLst/>
@@ -15835,12 +16267,12 @@
         </p:nvSpPr>
         <p:spPr>
           <a:xfrm>
-            <a:off x="7635240" y="2788920"/>
-            <a:ext cx="3474720" cy="1536192"/>
+            <a:off x="7635240" y="2670048"/>
+            <a:ext cx="3474720" cy="1377086"/>
           </a:xfrm>
           <a:prstGeom prst="roundRect">
             <a:avLst>
-              <a:gd name="adj" fmla="val 7143"/>
+              <a:gd name="adj" fmla="val 7968"/>
             </a:avLst>
           </a:prstGeom>
           <a:solidFill>
@@ -15862,7 +16294,7 @@
         </p:nvSpPr>
         <p:spPr>
           <a:xfrm>
-            <a:off x="7799832" y="2935224"/>
+            <a:off x="7799832" y="2816352"/>
             <a:ext cx="3145536" cy="256032"/>
           </a:xfrm>
           <a:prstGeom prst="rect">
@@ -15901,8 +16333,8 @@
         </p:nvSpPr>
         <p:spPr>
           <a:xfrm>
-            <a:off x="7818120" y="3300984"/>
-            <a:ext cx="3090672" cy="877824"/>
+            <a:off x="7818120" y="3182112"/>
+            <a:ext cx="3090672" cy="718718"/>
           </a:xfrm>
           <a:prstGeom prst="rect">
             <a:avLst/>
@@ -15942,12 +16374,12 @@
         </p:nvSpPr>
         <p:spPr>
           <a:xfrm>
-            <a:off x="7635240" y="4498848"/>
-            <a:ext cx="3474720" cy="1143000"/>
+            <a:off x="7635240" y="4184294"/>
+            <a:ext cx="3474720" cy="1466698"/>
           </a:xfrm>
           <a:prstGeom prst="roundRect">
             <a:avLst>
-              <a:gd name="adj" fmla="val 9600"/>
+              <a:gd name="adj" fmla="val 7481"/>
             </a:avLst>
           </a:prstGeom>
           <a:solidFill>
@@ -15969,7 +16401,7 @@
         </p:nvSpPr>
         <p:spPr>
           <a:xfrm>
-            <a:off x="7799832" y="4645152"/>
+            <a:off x="7799832" y="4330598"/>
             <a:ext cx="3145536" cy="256032"/>
           </a:xfrm>
           <a:prstGeom prst="rect">
@@ -16008,8 +16440,8 @@
         </p:nvSpPr>
         <p:spPr>
           <a:xfrm>
-            <a:off x="7799832" y="4974336"/>
-            <a:ext cx="3145536" cy="576072"/>
+            <a:off x="7799832" y="4659782"/>
+            <a:ext cx="3145536" cy="899770"/>
           </a:xfrm>
           <a:prstGeom prst="rect">
             <a:avLst/>
@@ -16035,7 +16467,7 @@
                 <a:ea typeface="Aptos" pitchFamily="34" charset="-122"/>
                 <a:cs typeface="Aptos" pitchFamily="34" charset="-120"/>
               </a:rPr>
-              <a:t>Use the assignment to test whether you can explain the concept, apply it to a realistic public health situation, and.</a:t>
+              <a:t>Use the assignment to test whether you can explain the concept, apply it to a realistic public health situation, and identify what would need review before the work moves forward.</a:t>
             </a:r>
             <a:endParaRPr lang="en-US" sz="1320" dirty="0"/>
           </a:p>
@@ -16404,11 +16836,11 @@
         <p:spPr>
           <a:xfrm>
             <a:off x="7635240" y="1325880"/>
-            <a:ext cx="3474720" cy="1325880"/>
+            <a:ext cx="3474720" cy="1207008"/>
           </a:xfrm>
           <a:prstGeom prst="roundRect">
             <a:avLst>
-              <a:gd name="adj" fmla="val 8276"/>
+              <a:gd name="adj" fmla="val 9091"/>
             </a:avLst>
           </a:prstGeom>
           <a:solidFill>
@@ -16470,7 +16902,7 @@
         <p:spPr>
           <a:xfrm>
             <a:off x="7799832" y="1801368"/>
-            <a:ext cx="3145536" cy="758952"/>
+            <a:ext cx="3145536" cy="640080"/>
           </a:xfrm>
           <a:prstGeom prst="rect">
             <a:avLst/>
@@ -16510,12 +16942,12 @@
         </p:nvSpPr>
         <p:spPr>
           <a:xfrm>
-            <a:off x="7635240" y="2788920"/>
-            <a:ext cx="3474720" cy="1536192"/>
+            <a:off x="7635240" y="2670048"/>
+            <a:ext cx="3474720" cy="1377086"/>
           </a:xfrm>
           <a:prstGeom prst="roundRect">
             <a:avLst>
-              <a:gd name="adj" fmla="val 7143"/>
+              <a:gd name="adj" fmla="val 7968"/>
             </a:avLst>
           </a:prstGeom>
           <a:solidFill>
@@ -16537,7 +16969,7 @@
         </p:nvSpPr>
         <p:spPr>
           <a:xfrm>
-            <a:off x="7799832" y="2935224"/>
+            <a:off x="7799832" y="2816352"/>
             <a:ext cx="3145536" cy="256032"/>
           </a:xfrm>
           <a:prstGeom prst="rect">
@@ -16576,8 +17008,8 @@
         </p:nvSpPr>
         <p:spPr>
           <a:xfrm>
-            <a:off x="7818120" y="3300984"/>
-            <a:ext cx="3090672" cy="877824"/>
+            <a:off x="7818120" y="3182112"/>
+            <a:ext cx="3090672" cy="718718"/>
           </a:xfrm>
           <a:prstGeom prst="rect">
             <a:avLst/>
@@ -16651,12 +17083,12 @@
         </p:nvSpPr>
         <p:spPr>
           <a:xfrm>
-            <a:off x="7635240" y="4498848"/>
-            <a:ext cx="3474720" cy="1143000"/>
+            <a:off x="7635240" y="4184294"/>
+            <a:ext cx="3474720" cy="1466698"/>
           </a:xfrm>
           <a:prstGeom prst="roundRect">
             <a:avLst>
-              <a:gd name="adj" fmla="val 9600"/>
+              <a:gd name="adj" fmla="val 7481"/>
             </a:avLst>
           </a:prstGeom>
           <a:solidFill>
@@ -16678,7 +17110,7 @@
         </p:nvSpPr>
         <p:spPr>
           <a:xfrm>
-            <a:off x="7799832" y="4645152"/>
+            <a:off x="7799832" y="4330598"/>
             <a:ext cx="3145536" cy="256032"/>
           </a:xfrm>
           <a:prstGeom prst="rect">
@@ -16717,8 +17149,8 @@
         </p:nvSpPr>
         <p:spPr>
           <a:xfrm>
-            <a:off x="7799832" y="4974336"/>
-            <a:ext cx="3145536" cy="576072"/>
+            <a:off x="7799832" y="4659782"/>
+            <a:ext cx="3145536" cy="899770"/>
           </a:xfrm>
           <a:prstGeom prst="rect">
             <a:avLst/>
@@ -16744,7 +17176,7 @@
                 <a:ea typeface="Aptos" pitchFamily="34" charset="-122"/>
                 <a:cs typeface="Aptos" pitchFamily="34" charset="-120"/>
               </a:rPr>
-              <a:t>Connect the concept to public health purpose, responsible use, required safeguards, documentation, and the next action a.</a:t>
+              <a:t>Connect the concept to public health purpose, responsible use, required safeguards, documentation, and the next action a department should take.</a:t>
             </a:r>
             <a:endParaRPr lang="en-US" sz="1320" dirty="0"/>
           </a:p>
@@ -17113,11 +17545,11 @@
         <p:spPr>
           <a:xfrm>
             <a:off x="7635240" y="1325880"/>
-            <a:ext cx="3474720" cy="1325880"/>
+            <a:ext cx="3474720" cy="1255471"/>
           </a:xfrm>
           <a:prstGeom prst="roundRect">
             <a:avLst>
-              <a:gd name="adj" fmla="val 8276"/>
+              <a:gd name="adj" fmla="val 8740"/>
             </a:avLst>
           </a:prstGeom>
           <a:solidFill>
@@ -17179,7 +17611,7 @@
         <p:spPr>
           <a:xfrm>
             <a:off x="7799832" y="1801368"/>
-            <a:ext cx="3145536" cy="758952"/>
+            <a:ext cx="3145536" cy="688543"/>
           </a:xfrm>
           <a:prstGeom prst="rect">
             <a:avLst/>
@@ -17219,12 +17651,12 @@
         </p:nvSpPr>
         <p:spPr>
           <a:xfrm>
-            <a:off x="7635240" y="2788920"/>
-            <a:ext cx="3474720" cy="1536192"/>
+            <a:off x="7635240" y="2718511"/>
+            <a:ext cx="3474720" cy="1328623"/>
           </a:xfrm>
           <a:prstGeom prst="roundRect">
             <a:avLst>
-              <a:gd name="adj" fmla="val 7143"/>
+              <a:gd name="adj" fmla="val 8259"/>
             </a:avLst>
           </a:prstGeom>
           <a:solidFill>
@@ -17246,7 +17678,7 @@
         </p:nvSpPr>
         <p:spPr>
           <a:xfrm>
-            <a:off x="7799832" y="2935224"/>
+            <a:off x="7799832" y="2864815"/>
             <a:ext cx="3145536" cy="256032"/>
           </a:xfrm>
           <a:prstGeom prst="rect">
@@ -17285,8 +17717,8 @@
         </p:nvSpPr>
         <p:spPr>
           <a:xfrm>
-            <a:off x="7818120" y="3300984"/>
-            <a:ext cx="3090672" cy="877824"/>
+            <a:off x="7818120" y="3230575"/>
+            <a:ext cx="3090672" cy="670255"/>
           </a:xfrm>
           <a:prstGeom prst="rect">
             <a:avLst/>
@@ -17360,12 +17792,12 @@
         </p:nvSpPr>
         <p:spPr>
           <a:xfrm>
-            <a:off x="7635240" y="4498848"/>
-            <a:ext cx="3474720" cy="1143000"/>
+            <a:off x="7635240" y="4184294"/>
+            <a:ext cx="3474720" cy="1466698"/>
           </a:xfrm>
           <a:prstGeom prst="roundRect">
             <a:avLst>
-              <a:gd name="adj" fmla="val 9600"/>
+              <a:gd name="adj" fmla="val 7481"/>
             </a:avLst>
           </a:prstGeom>
           <a:solidFill>
@@ -17387,7 +17819,7 @@
         </p:nvSpPr>
         <p:spPr>
           <a:xfrm>
-            <a:off x="7799832" y="4645152"/>
+            <a:off x="7799832" y="4330598"/>
             <a:ext cx="3145536" cy="256032"/>
           </a:xfrm>
           <a:prstGeom prst="rect">
@@ -17426,8 +17858,8 @@
         </p:nvSpPr>
         <p:spPr>
           <a:xfrm>
-            <a:off x="7799832" y="4974336"/>
-            <a:ext cx="3145536" cy="576072"/>
+            <a:off x="7799832" y="4659782"/>
+            <a:ext cx="3145536" cy="899770"/>
           </a:xfrm>
           <a:prstGeom prst="rect">
             <a:avLst/>
@@ -17453,7 +17885,7 @@
                 <a:ea typeface="Aptos" pitchFamily="34" charset="-122"/>
                 <a:cs typeface="Aptos" pitchFamily="34" charset="-120"/>
               </a:rPr>
-              <a:t>Connect the concept to public health purpose, responsible use, required safeguards, documentation, and the next action a.</a:t>
+              <a:t>Connect the concept to public health purpose, responsible use, required safeguards, documentation, and the next action a department should take.</a:t>
             </a:r>
             <a:endParaRPr lang="en-US" sz="1320" dirty="0"/>
           </a:p>
@@ -17822,11 +18254,11 @@
         <p:spPr>
           <a:xfrm>
             <a:off x="7635240" y="1325880"/>
-            <a:ext cx="3474720" cy="1325880"/>
+            <a:ext cx="3474720" cy="1207008"/>
           </a:xfrm>
           <a:prstGeom prst="roundRect">
             <a:avLst>
-              <a:gd name="adj" fmla="val 8276"/>
+              <a:gd name="adj" fmla="val 9091"/>
             </a:avLst>
           </a:prstGeom>
           <a:solidFill>
@@ -17888,7 +18320,7 @@
         <p:spPr>
           <a:xfrm>
             <a:off x="7799832" y="1801368"/>
-            <a:ext cx="3145536" cy="758952"/>
+            <a:ext cx="3145536" cy="640080"/>
           </a:xfrm>
           <a:prstGeom prst="rect">
             <a:avLst/>
@@ -17928,12 +18360,12 @@
         </p:nvSpPr>
         <p:spPr>
           <a:xfrm>
-            <a:off x="7635240" y="2788920"/>
-            <a:ext cx="3474720" cy="1536192"/>
+            <a:off x="7635240" y="2670048"/>
+            <a:ext cx="3474720" cy="1377086"/>
           </a:xfrm>
           <a:prstGeom prst="roundRect">
             <a:avLst>
-              <a:gd name="adj" fmla="val 7143"/>
+              <a:gd name="adj" fmla="val 7968"/>
             </a:avLst>
           </a:prstGeom>
           <a:solidFill>
@@ -17955,8 +18387,8 @@
         </p:nvSpPr>
         <p:spPr>
           <a:xfrm>
-            <a:off x="7799832" y="2935224"/>
-            <a:ext cx="3145536" cy="256032"/>
+            <a:off x="7799832" y="2798064"/>
+            <a:ext cx="3145536" cy="237744"/>
           </a:xfrm>
           <a:prstGeom prst="rect">
             <a:avLst/>
@@ -17972,7 +18404,7 @@
               <a:buNone/>
             </a:pPr>
             <a:r>
-              <a:rPr lang="en-US" sz="1300" b="1" dirty="0">
+              <a:rPr lang="en-US" sz="1250" b="1" dirty="0">
                 <a:solidFill>
                   <a:srgbClr val="0068B7"/>
                 </a:solidFill>
@@ -17980,101 +18412,317 @@
                 <a:ea typeface="Aptos" pitchFamily="34" charset="-122"/>
                 <a:cs typeface="Aptos" pitchFamily="34" charset="-120"/>
               </a:rPr>
-              <a:t>Concept checkpoints</a:t>
-            </a:r>
-            <a:endParaRPr lang="en-US" sz="1300" dirty="0"/>
-          </a:p>
-        </p:txBody>
-      </p:sp>
-      <p:sp>
-        <p:nvSpPr>
-          <p:cNvPr id="15" name="Text 13"/>
-          <p:cNvSpPr/>
-          <p:nvPr/>
-        </p:nvSpPr>
-        <p:spPr>
-          <a:xfrm>
-            <a:off x="7818120" y="3300984"/>
-            <a:ext cx="3090672" cy="877824"/>
-          </a:xfrm>
-          <a:prstGeom prst="rect">
-            <a:avLst/>
-          </a:prstGeom>
-          <a:noFill/>
-          <a:ln/>
-        </p:spPr>
-        <p:txBody>
-          <a:bodyPr wrap="square" lIns="508" tIns="508" rIns="508" bIns="508" rtlCol="0" anchor="t">
+              <a:t>Governance pathway</a:t>
+            </a:r>
+            <a:endParaRPr lang="en-US" sz="1250" dirty="0"/>
+          </a:p>
+        </p:txBody>
+      </p:sp>
+      <p:sp>
+        <p:nvSpPr>
+          <p:cNvPr id="15" name="Shape 13"/>
+          <p:cNvSpPr/>
+          <p:nvPr/>
+        </p:nvSpPr>
+        <p:spPr>
+          <a:xfrm>
+            <a:off x="8763000" y="3351276"/>
+            <a:ext cx="164592" cy="0"/>
+          </a:xfrm>
+          <a:prstGeom prst="line">
+            <a:avLst/>
+          </a:prstGeom>
+          <a:noFill/>
+          <a:ln w="15240">
+            <a:solidFill>
+              <a:srgbClr val="8ABBD8"/>
+            </a:solidFill>
+            <a:prstDash val="solid"/>
+          </a:ln>
+        </p:spPr>
+      </p:sp>
+      <p:sp>
+        <p:nvSpPr>
+          <p:cNvPr id="16" name="Shape 14"/>
+          <p:cNvSpPr/>
+          <p:nvPr/>
+        </p:nvSpPr>
+        <p:spPr>
+          <a:xfrm>
+            <a:off x="7872984" y="3200400"/>
+            <a:ext cx="890016" cy="301752"/>
+          </a:xfrm>
+          <a:prstGeom prst="roundRect">
+            <a:avLst>
+              <a:gd name="adj" fmla="val 24242"/>
+            </a:avLst>
+          </a:prstGeom>
+          <a:solidFill>
+            <a:srgbClr val="0068B7"/>
+          </a:solidFill>
+          <a:ln w="12700">
+            <a:solidFill>
+              <a:srgbClr val="0068B7"/>
+            </a:solidFill>
+            <a:prstDash val="solid"/>
+          </a:ln>
+        </p:spPr>
+      </p:sp>
+      <p:sp>
+        <p:nvSpPr>
+          <p:cNvPr id="17" name="Text 15"/>
+          <p:cNvSpPr/>
+          <p:nvPr/>
+        </p:nvSpPr>
+        <p:spPr>
+          <a:xfrm>
+            <a:off x="7909560" y="3273552"/>
+            <a:ext cx="816864" cy="146304"/>
+          </a:xfrm>
+          <a:prstGeom prst="rect">
+            <a:avLst/>
+          </a:prstGeom>
+          <a:noFill/>
+          <a:ln/>
+        </p:spPr>
+        <p:txBody>
+          <a:bodyPr wrap="square" lIns="0" tIns="0" rIns="0" bIns="0" rtlCol="0" anchor="ctr">
             <a:normAutofit/>
           </a:bodyPr>
           <a:lstStyle/>
           <a:p>
-            <a:pPr indent="0" marL="0">
-              <a:buNone/>
-            </a:pPr>
-            <a:r>
-              <a:rPr lang="en-US" sz="1220" dirty="0">
-                <a:solidFill>
-                  <a:srgbClr val="17364A"/>
-                </a:solidFill>
-                <a:latin typeface="Aptos" pitchFamily="34" charset="0"/>
-                <a:ea typeface="Aptos" pitchFamily="34" charset="-122"/>
-                <a:cs typeface="Aptos" pitchFamily="34" charset="-120"/>
-              </a:rPr>
-              <a:t>This national-level module is intended for training and planning.</a:t>
-            </a:r>
-            <a:endParaRPr lang="en-US" sz="1220" dirty="0"/>
-          </a:p>
-          <a:p>
-            <a:pPr indent="0" marL="0">
-              <a:buNone/>
-            </a:pPr>
-            <a:r>
-              <a:rPr lang="en-US" sz="1220" dirty="0">
-                <a:solidFill>
-                  <a:srgbClr val="17364A"/>
-                </a:solidFill>
-                <a:latin typeface="Aptos" pitchFamily="34" charset="0"/>
-                <a:ea typeface="Aptos" pitchFamily="34" charset="-122"/>
-                <a:cs typeface="Aptos" pitchFamily="34" charset="-120"/>
-              </a:rPr>
-              <a:t>It does not replace legal, privacy, procurement, civil rights,.</a:t>
-            </a:r>
-            <a:endParaRPr lang="en-US" sz="1220" dirty="0"/>
-          </a:p>
-          <a:p>
-            <a:pPr indent="0" marL="0">
-              <a:buNone/>
-            </a:pPr>
-            <a:r>
-              <a:rPr lang="en-US" sz="1220" dirty="0">
-                <a:solidFill>
-                  <a:srgbClr val="17364A"/>
-                </a:solidFill>
-                <a:latin typeface="Aptos" pitchFamily="34" charset="0"/>
-                <a:ea typeface="Aptos" pitchFamily="34" charset="-122"/>
-                <a:cs typeface="Aptos" pitchFamily="34" charset="-120"/>
-              </a:rPr>
-              <a:t>Learners should confirm applicable requirements in their own.</a:t>
-            </a:r>
-            <a:endParaRPr lang="en-US" sz="1220" dirty="0"/>
-          </a:p>
-        </p:txBody>
-      </p:sp>
-      <p:sp>
-        <p:nvSpPr>
-          <p:cNvPr id="16" name="Shape 14"/>
-          <p:cNvSpPr/>
-          <p:nvPr/>
-        </p:nvSpPr>
-        <p:spPr>
-          <a:xfrm>
-            <a:off x="7635240" y="4498848"/>
-            <a:ext cx="3474720" cy="1143000"/>
+            <a:pPr algn="ctr" indent="0" marL="0">
+              <a:buNone/>
+            </a:pPr>
+            <a:r>
+              <a:rPr lang="en-US" sz="880" b="1" dirty="0">
+                <a:solidFill>
+                  <a:srgbClr val="FFFFFF"/>
+                </a:solidFill>
+                <a:latin typeface="Aptos" pitchFamily="34" charset="0"/>
+                <a:ea typeface="Aptos" pitchFamily="34" charset="-122"/>
+                <a:cs typeface="Aptos" pitchFamily="34" charset="-120"/>
+              </a:rPr>
+              <a:t>Submit</a:t>
+            </a:r>
+            <a:endParaRPr lang="en-US" sz="880" dirty="0"/>
+          </a:p>
+        </p:txBody>
+      </p:sp>
+      <p:sp>
+        <p:nvSpPr>
+          <p:cNvPr id="18" name="Shape 16"/>
+          <p:cNvSpPr/>
+          <p:nvPr/>
+        </p:nvSpPr>
+        <p:spPr>
+          <a:xfrm>
+            <a:off x="9817608" y="3351276"/>
+            <a:ext cx="164592" cy="0"/>
+          </a:xfrm>
+          <a:prstGeom prst="line">
+            <a:avLst/>
+          </a:prstGeom>
+          <a:noFill/>
+          <a:ln w="15240">
+            <a:solidFill>
+              <a:srgbClr val="8ABBD8"/>
+            </a:solidFill>
+            <a:prstDash val="solid"/>
+          </a:ln>
+        </p:spPr>
+      </p:sp>
+      <p:sp>
+        <p:nvSpPr>
+          <p:cNvPr id="19" name="Shape 17"/>
+          <p:cNvSpPr/>
+          <p:nvPr/>
+        </p:nvSpPr>
+        <p:spPr>
+          <a:xfrm>
+            <a:off x="8927592" y="3200400"/>
+            <a:ext cx="890016" cy="301752"/>
           </a:xfrm>
           <a:prstGeom prst="roundRect">
             <a:avLst>
-              <a:gd name="adj" fmla="val 9600"/>
+              <a:gd name="adj" fmla="val 24242"/>
+            </a:avLst>
+          </a:prstGeom>
+          <a:solidFill>
+            <a:srgbClr val="2F8A28"/>
+          </a:solidFill>
+          <a:ln w="12700">
+            <a:solidFill>
+              <a:srgbClr val="2F8A28"/>
+            </a:solidFill>
+            <a:prstDash val="solid"/>
+          </a:ln>
+        </p:spPr>
+      </p:sp>
+      <p:sp>
+        <p:nvSpPr>
+          <p:cNvPr id="20" name="Text 18"/>
+          <p:cNvSpPr/>
+          <p:nvPr/>
+        </p:nvSpPr>
+        <p:spPr>
+          <a:xfrm>
+            <a:off x="8964168" y="3273552"/>
+            <a:ext cx="816864" cy="146304"/>
+          </a:xfrm>
+          <a:prstGeom prst="rect">
+            <a:avLst/>
+          </a:prstGeom>
+          <a:noFill/>
+          <a:ln/>
+        </p:spPr>
+        <p:txBody>
+          <a:bodyPr wrap="square" lIns="0" tIns="0" rIns="0" bIns="0" rtlCol="0" anchor="ctr">
+            <a:normAutofit/>
+          </a:bodyPr>
+          <a:lstStyle/>
+          <a:p>
+            <a:pPr algn="ctr" indent="0" marL="0">
+              <a:buNone/>
+            </a:pPr>
+            <a:r>
+              <a:rPr lang="en-US" sz="880" b="1" dirty="0">
+                <a:solidFill>
+                  <a:srgbClr val="FFFFFF"/>
+                </a:solidFill>
+                <a:latin typeface="Aptos" pitchFamily="34" charset="0"/>
+                <a:ea typeface="Aptos" pitchFamily="34" charset="-122"/>
+                <a:cs typeface="Aptos" pitchFamily="34" charset="-120"/>
+              </a:rPr>
+              <a:t>Review</a:t>
+            </a:r>
+            <a:endParaRPr lang="en-US" sz="880" dirty="0"/>
+          </a:p>
+        </p:txBody>
+      </p:sp>
+      <p:sp>
+        <p:nvSpPr>
+          <p:cNvPr id="21" name="Shape 19"/>
+          <p:cNvSpPr/>
+          <p:nvPr/>
+        </p:nvSpPr>
+        <p:spPr>
+          <a:xfrm>
+            <a:off x="9982200" y="3200400"/>
+            <a:ext cx="890016" cy="301752"/>
+          </a:xfrm>
+          <a:prstGeom prst="roundRect">
+            <a:avLst>
+              <a:gd name="adj" fmla="val 24242"/>
+            </a:avLst>
+          </a:prstGeom>
+          <a:solidFill>
+            <a:srgbClr val="6A4CA3"/>
+          </a:solidFill>
+          <a:ln w="12700">
+            <a:solidFill>
+              <a:srgbClr val="6A4CA3"/>
+            </a:solidFill>
+            <a:prstDash val="solid"/>
+          </a:ln>
+        </p:spPr>
+      </p:sp>
+      <p:sp>
+        <p:nvSpPr>
+          <p:cNvPr id="22" name="Text 20"/>
+          <p:cNvSpPr/>
+          <p:nvPr/>
+        </p:nvSpPr>
+        <p:spPr>
+          <a:xfrm>
+            <a:off x="10018776" y="3273552"/>
+            <a:ext cx="816864" cy="146304"/>
+          </a:xfrm>
+          <a:prstGeom prst="rect">
+            <a:avLst/>
+          </a:prstGeom>
+          <a:noFill/>
+          <a:ln/>
+        </p:spPr>
+        <p:txBody>
+          <a:bodyPr wrap="square" lIns="0" tIns="0" rIns="0" bIns="0" rtlCol="0" anchor="ctr">
+            <a:normAutofit/>
+          </a:bodyPr>
+          <a:lstStyle/>
+          <a:p>
+            <a:pPr algn="ctr" indent="0" marL="0">
+              <a:buNone/>
+            </a:pPr>
+            <a:r>
+              <a:rPr lang="en-US" sz="880" b="1" dirty="0">
+                <a:solidFill>
+                  <a:srgbClr val="FFFFFF"/>
+                </a:solidFill>
+                <a:latin typeface="Aptos" pitchFamily="34" charset="0"/>
+                <a:ea typeface="Aptos" pitchFamily="34" charset="-122"/>
+                <a:cs typeface="Aptos" pitchFamily="34" charset="-120"/>
+              </a:rPr>
+              <a:t>Oversee</a:t>
+            </a:r>
+            <a:endParaRPr lang="en-US" sz="880" dirty="0"/>
+          </a:p>
+        </p:txBody>
+      </p:sp>
+      <p:sp>
+        <p:nvSpPr>
+          <p:cNvPr id="23" name="Text 21"/>
+          <p:cNvSpPr/>
+          <p:nvPr/>
+        </p:nvSpPr>
+        <p:spPr>
+          <a:xfrm>
+            <a:off x="7854696" y="3694176"/>
+            <a:ext cx="3035808" cy="206654"/>
+          </a:xfrm>
+          <a:prstGeom prst="rect">
+            <a:avLst/>
+          </a:prstGeom>
+          <a:noFill/>
+          <a:ln/>
+        </p:spPr>
+        <p:txBody>
+          <a:bodyPr wrap="square" lIns="254" tIns="254" rIns="254" bIns="254" rtlCol="0" anchor="t">
+            <a:normAutofit/>
+          </a:bodyPr>
+          <a:lstStyle/>
+          <a:p>
+            <a:pPr indent="0" marL="0">
+              <a:buNone/>
+            </a:pPr>
+            <a:r>
+              <a:rPr lang="en-US" sz="1120" dirty="0">
+                <a:solidFill>
+                  <a:srgbClr val="17364A"/>
+                </a:solidFill>
+                <a:latin typeface="Aptos" pitchFamily="34" charset="0"/>
+                <a:ea typeface="Aptos" pitchFamily="34" charset="-122"/>
+                <a:cs typeface="Aptos" pitchFamily="34" charset="-120"/>
+              </a:rPr>
+              <a:t>A proposed AI use should move through documented review before it becomes an operational workflow.</a:t>
+            </a:r>
+            <a:endParaRPr lang="en-US" sz="1120" dirty="0"/>
+          </a:p>
+        </p:txBody>
+      </p:sp>
+      <p:sp>
+        <p:nvSpPr>
+          <p:cNvPr id="24" name="Shape 22"/>
+          <p:cNvSpPr/>
+          <p:nvPr/>
+        </p:nvSpPr>
+        <p:spPr>
+          <a:xfrm>
+            <a:off x="7635240" y="4184294"/>
+            <a:ext cx="3474720" cy="1466698"/>
+          </a:xfrm>
+          <a:prstGeom prst="roundRect">
+            <a:avLst>
+              <a:gd name="adj" fmla="val 7481"/>
             </a:avLst>
           </a:prstGeom>
           <a:solidFill>
@@ -18090,13 +18738,13 @@
       </p:sp>
       <p:sp>
         <p:nvSpPr>
-          <p:cNvPr id="17" name="Text 15"/>
-          <p:cNvSpPr/>
-          <p:nvPr/>
-        </p:nvSpPr>
-        <p:spPr>
-          <a:xfrm>
-            <a:off x="7799832" y="4645152"/>
+          <p:cNvPr id="25" name="Text 23"/>
+          <p:cNvSpPr/>
+          <p:nvPr/>
+        </p:nvSpPr>
+        <p:spPr>
+          <a:xfrm>
+            <a:off x="7799832" y="4330598"/>
             <a:ext cx="3145536" cy="256032"/>
           </a:xfrm>
           <a:prstGeom prst="rect">
@@ -18129,14 +18777,14 @@
       </p:sp>
       <p:sp>
         <p:nvSpPr>
-          <p:cNvPr id="18" name="Text 16"/>
-          <p:cNvSpPr/>
-          <p:nvPr/>
-        </p:nvSpPr>
-        <p:spPr>
-          <a:xfrm>
-            <a:off x="7799832" y="4974336"/>
-            <a:ext cx="3145536" cy="576072"/>
+          <p:cNvPr id="26" name="Text 24"/>
+          <p:cNvSpPr/>
+          <p:nvPr/>
+        </p:nvSpPr>
+        <p:spPr>
+          <a:xfrm>
+            <a:off x="7799832" y="4659782"/>
+            <a:ext cx="3145536" cy="899770"/>
           </a:xfrm>
           <a:prstGeom prst="rect">
             <a:avLst/>
@@ -18162,7 +18810,7 @@
                 <a:ea typeface="Aptos" pitchFamily="34" charset="-122"/>
                 <a:cs typeface="Aptos" pitchFamily="34" charset="-120"/>
               </a:rPr>
-              <a:t>Translate this concept into clear decision rights, review steps, documentation expectations, and escalation paths before.</a:t>
+              <a:t>Translate this concept into clear decision rights, review steps, documentation expectations, and escalation paths before an AI-supported workflow is approved.</a:t>
             </a:r>
             <a:endParaRPr lang="en-US" sz="1320" dirty="0"/>
           </a:p>

--- a/downloads/presentations/modules/arc-340.pptx
+++ b/downloads/presentations/modules/arc-340.pptx
@@ -3433,8 +3433,8 @@
         </p:nvSpPr>
         <p:spPr>
           <a:xfrm>
-            <a:off x="868680" y="1508760"/>
-            <a:ext cx="6309360" cy="4160520"/>
+            <a:off x="822960" y="1463040"/>
+            <a:ext cx="6565392" cy="4343400"/>
           </a:xfrm>
           <a:prstGeom prst="rect">
             <a:avLst/>
@@ -3452,7 +3452,7 @@
               <a:buNone/>
             </a:pPr>
             <a:r>
-              <a:rPr lang="en-US" sz="2100" dirty="0">
+              <a:rPr lang="en-US" sz="1920" dirty="0">
                 <a:solidFill>
                   <a:srgbClr val="003A63"/>
                 </a:solidFill>
@@ -3460,16 +3460,16 @@
                 <a:ea typeface="Aptos" pitchFamily="34" charset="-122"/>
                 <a:cs typeface="Aptos" pitchFamily="34" charset="-120"/>
               </a:rPr>
-              <a:t>• Integration decisions determine whether AI becomes part of a reliable public health workflow.</a:t>
-            </a:r>
-            <a:endParaRPr lang="en-US" sz="2100" dirty="0"/>
-          </a:p>
-          <a:p>
-            <a:pPr indent="0" marL="0">
-              <a:buNone/>
-            </a:pPr>
-            <a:r>
-              <a:rPr lang="en-US" sz="2100" dirty="0">
+              <a:t>• Integration decisions determine whether AI becomes part of a reliable public.</a:t>
+            </a:r>
+            <a:endParaRPr lang="en-US" sz="1920" dirty="0"/>
+          </a:p>
+          <a:p>
+            <a:pPr indent="0" marL="0">
+              <a:buNone/>
+            </a:pPr>
+            <a:r>
+              <a:rPr lang="en-US" sz="1920" dirty="0">
                 <a:solidFill>
                   <a:srgbClr val="003A63"/>
                 </a:solidFill>
@@ -3477,16 +3477,16 @@
                 <a:ea typeface="Aptos" pitchFamily="34" charset="-122"/>
                 <a:cs typeface="Aptos" pitchFamily="34" charset="-120"/>
               </a:rPr>
-              <a:t>• If staff must copy and paste sensitive information between systems, the AI tool may appear.</a:t>
-            </a:r>
-            <a:endParaRPr lang="en-US" sz="2100" dirty="0"/>
-          </a:p>
-          <a:p>
-            <a:pPr indent="0" marL="0">
-              <a:buNone/>
-            </a:pPr>
-            <a:r>
-              <a:rPr lang="en-US" sz="2100" dirty="0">
+              <a:t>• If staff must copy and paste sensitive information between systems, the AI.</a:t>
+            </a:r>
+            <a:endParaRPr lang="en-US" sz="1920" dirty="0"/>
+          </a:p>
+          <a:p>
+            <a:pPr indent="0" marL="0">
+              <a:buNone/>
+            </a:pPr>
+            <a:r>
+              <a:rPr lang="en-US" sz="1920" dirty="0">
                 <a:solidFill>
                   <a:srgbClr val="003A63"/>
                 </a:solidFill>
@@ -3494,9 +3494,9 @@
                 <a:ea typeface="Aptos" pitchFamily="34" charset="-122"/>
                 <a:cs typeface="Aptos" pitchFamily="34" charset="-120"/>
               </a:rPr>
-              <a:t>• If an AI service writes back to a system of record without appropriate controls, a technical.</a:t>
-            </a:r>
-            <a:endParaRPr lang="en-US" sz="2100" dirty="0"/>
+              <a:t>• If an AI service writes back to a system of record without appropriate.</a:t>
+            </a:r>
+            <a:endParaRPr lang="en-US" sz="1920" dirty="0"/>
           </a:p>
         </p:txBody>
       </p:sp>
@@ -3508,12 +3508,12 @@
         </p:nvSpPr>
         <p:spPr>
           <a:xfrm>
-            <a:off x="7635240" y="1325880"/>
-            <a:ext cx="3474720" cy="1255471"/>
+            <a:off x="7543800" y="1325880"/>
+            <a:ext cx="3611880" cy="1261872"/>
           </a:xfrm>
           <a:prstGeom prst="roundRect">
             <a:avLst>
-              <a:gd name="adj" fmla="val 8740"/>
+              <a:gd name="adj" fmla="val 8696"/>
             </a:avLst>
           </a:prstGeom>
           <a:solidFill>
@@ -3535,8 +3535,8 @@
         </p:nvSpPr>
         <p:spPr>
           <a:xfrm>
-            <a:off x="7799832" y="1472184"/>
-            <a:ext cx="3145536" cy="256032"/>
+            <a:off x="7708392" y="1453896"/>
+            <a:ext cx="3282696" cy="228600"/>
           </a:xfrm>
           <a:prstGeom prst="rect">
             <a:avLst/>
@@ -3552,7 +3552,7 @@
               <a:buNone/>
             </a:pPr>
             <a:r>
-              <a:rPr lang="en-US" sz="1300" b="1" dirty="0">
+              <a:rPr lang="en-US" sz="1220" b="1" dirty="0">
                 <a:solidFill>
                   <a:srgbClr val="0068B7"/>
                 </a:solidFill>
@@ -3562,7 +3562,7 @@
               </a:rPr>
               <a:t>Core concept</a:t>
             </a:r>
-            <a:endParaRPr lang="en-US" sz="1300" dirty="0"/>
+            <a:endParaRPr lang="en-US" sz="1220" dirty="0"/>
           </a:p>
         </p:txBody>
       </p:sp>
@@ -3574,8 +3574,8 @@
         </p:nvSpPr>
         <p:spPr>
           <a:xfrm>
-            <a:off x="7799832" y="1801368"/>
-            <a:ext cx="3145536" cy="688543"/>
+            <a:off x="7708392" y="1764792"/>
+            <a:ext cx="3282696" cy="749808"/>
           </a:xfrm>
           <a:prstGeom prst="rect">
             <a:avLst/>
@@ -3593,7 +3593,7 @@
               <a:buNone/>
             </a:pPr>
             <a:r>
-              <a:rPr lang="en-US" sz="1320" dirty="0">
+              <a:rPr lang="en-US" sz="1220" dirty="0">
                 <a:solidFill>
                   <a:srgbClr val="17364A"/>
                 </a:solidFill>
@@ -3601,9 +3601,9 @@
                 <a:ea typeface="Aptos" pitchFamily="34" charset="-122"/>
                 <a:cs typeface="Aptos" pitchFamily="34" charset="-120"/>
               </a:rPr>
-              <a:t>Integration decisions determine whether AI becomes part of a reliable public health workflow or an.</a:t>
-            </a:r>
-            <a:endParaRPr lang="en-US" sz="1320" dirty="0"/>
+              <a:t>Integration decisions determine whether AI becomes part of a reliable public.</a:t>
+            </a:r>
+            <a:endParaRPr lang="en-US" sz="1220" dirty="0"/>
           </a:p>
         </p:txBody>
       </p:sp>
@@ -3615,12 +3615,12 @@
         </p:nvSpPr>
         <p:spPr>
           <a:xfrm>
-            <a:off x="7635240" y="2718511"/>
-            <a:ext cx="3474720" cy="1328623"/>
+            <a:off x="7543800" y="2724912"/>
+            <a:ext cx="3611880" cy="1527048"/>
           </a:xfrm>
           <a:prstGeom prst="roundRect">
             <a:avLst>
-              <a:gd name="adj" fmla="val 8259"/>
+              <a:gd name="adj" fmla="val 7186"/>
             </a:avLst>
           </a:prstGeom>
           <a:solidFill>
@@ -3642,8 +3642,8 @@
         </p:nvSpPr>
         <p:spPr>
           <a:xfrm>
-            <a:off x="7799832" y="2864815"/>
-            <a:ext cx="3145536" cy="256032"/>
+            <a:off x="7708392" y="2852928"/>
+            <a:ext cx="3282696" cy="228600"/>
           </a:xfrm>
           <a:prstGeom prst="rect">
             <a:avLst/>
@@ -3659,7 +3659,7 @@
               <a:buNone/>
             </a:pPr>
             <a:r>
-              <a:rPr lang="en-US" sz="1300" b="1" dirty="0">
+              <a:rPr lang="en-US" sz="1220" b="1" dirty="0">
                 <a:solidFill>
                   <a:srgbClr val="0068B7"/>
                 </a:solidFill>
@@ -3669,7 +3669,7 @@
               </a:rPr>
               <a:t>Concept checkpoints</a:t>
             </a:r>
-            <a:endParaRPr lang="en-US" sz="1300" dirty="0"/>
+            <a:endParaRPr lang="en-US" sz="1220" dirty="0"/>
           </a:p>
         </p:txBody>
       </p:sp>
@@ -3681,8 +3681,8 @@
         </p:nvSpPr>
         <p:spPr>
           <a:xfrm>
-            <a:off x="7818120" y="3230575"/>
-            <a:ext cx="3090672" cy="670255"/>
+            <a:off x="7726680" y="3182112"/>
+            <a:ext cx="3227832" cy="960120"/>
           </a:xfrm>
           <a:prstGeom prst="rect">
             <a:avLst/>
@@ -3700,7 +3700,7 @@
               <a:buNone/>
             </a:pPr>
             <a:r>
-              <a:rPr lang="en-US" sz="1220" dirty="0">
+              <a:rPr lang="en-US" sz="1140" dirty="0">
                 <a:solidFill>
                   <a:srgbClr val="17364A"/>
                 </a:solidFill>
@@ -3708,16 +3708,16 @@
                 <a:ea typeface="Aptos" pitchFamily="34" charset="-122"/>
                 <a:cs typeface="Aptos" pitchFamily="34" charset="-120"/>
               </a:rPr>
-              <a:t>Integration decisions determine whether AI becomes part of a.</a:t>
-            </a:r>
-            <a:endParaRPr lang="en-US" sz="1220" dirty="0"/>
-          </a:p>
-          <a:p>
-            <a:pPr indent="0" marL="0">
-              <a:buNone/>
-            </a:pPr>
-            <a:r>
-              <a:rPr lang="en-US" sz="1220" dirty="0">
+              <a:t>Integration decisions determine whether AI becomes.</a:t>
+            </a:r>
+            <a:endParaRPr lang="en-US" sz="1140" dirty="0"/>
+          </a:p>
+          <a:p>
+            <a:pPr indent="0" marL="0">
+              <a:buNone/>
+            </a:pPr>
+            <a:r>
+              <a:rPr lang="en-US" sz="1140" dirty="0">
                 <a:solidFill>
                   <a:srgbClr val="17364A"/>
                 </a:solidFill>
@@ -3725,16 +3725,16 @@
                 <a:ea typeface="Aptos" pitchFamily="34" charset="-122"/>
                 <a:cs typeface="Aptos" pitchFamily="34" charset="-120"/>
               </a:rPr>
-              <a:t>If staff must copy and paste sensitive information between.</a:t>
-            </a:r>
-            <a:endParaRPr lang="en-US" sz="1220" dirty="0"/>
-          </a:p>
-          <a:p>
-            <a:pPr indent="0" marL="0">
-              <a:buNone/>
-            </a:pPr>
-            <a:r>
-              <a:rPr lang="en-US" sz="1220" dirty="0">
+              <a:t>If staff must copy and paste sensitive information.</a:t>
+            </a:r>
+            <a:endParaRPr lang="en-US" sz="1140" dirty="0"/>
+          </a:p>
+          <a:p>
+            <a:pPr indent="0" marL="0">
+              <a:buNone/>
+            </a:pPr>
+            <a:r>
+              <a:rPr lang="en-US" sz="1140" dirty="0">
                 <a:solidFill>
                   <a:srgbClr val="17364A"/>
                 </a:solidFill>
@@ -3742,9 +3742,9 @@
                 <a:ea typeface="Aptos" pitchFamily="34" charset="-122"/>
                 <a:cs typeface="Aptos" pitchFamily="34" charset="-120"/>
               </a:rPr>
-              <a:t>If an AI service writes back to a system of record without.</a:t>
-            </a:r>
-            <a:endParaRPr lang="en-US" sz="1220" dirty="0"/>
+              <a:t>If an AI service writes back to a system of record.</a:t>
+            </a:r>
+            <a:endParaRPr lang="en-US" sz="1140" dirty="0"/>
           </a:p>
         </p:txBody>
       </p:sp>
@@ -3756,12 +3756,12 @@
         </p:nvSpPr>
         <p:spPr>
           <a:xfrm>
-            <a:off x="7635240" y="4184294"/>
-            <a:ext cx="3474720" cy="1466698"/>
+            <a:off x="7543800" y="4389120"/>
+            <a:ext cx="3611880" cy="1261872"/>
           </a:xfrm>
           <a:prstGeom prst="roundRect">
             <a:avLst>
-              <a:gd name="adj" fmla="val 7481"/>
+              <a:gd name="adj" fmla="val 8696"/>
             </a:avLst>
           </a:prstGeom>
           <a:solidFill>
@@ -3783,8 +3783,8 @@
         </p:nvSpPr>
         <p:spPr>
           <a:xfrm>
-            <a:off x="7799832" y="4330598"/>
-            <a:ext cx="3145536" cy="256032"/>
+            <a:off x="7708392" y="4517136"/>
+            <a:ext cx="3282696" cy="228600"/>
           </a:xfrm>
           <a:prstGeom prst="rect">
             <a:avLst/>
@@ -3800,7 +3800,7 @@
               <a:buNone/>
             </a:pPr>
             <a:r>
-              <a:rPr lang="en-US" sz="1300" b="1" dirty="0">
+              <a:rPr lang="en-US" sz="1220" b="1" dirty="0">
                 <a:solidFill>
                   <a:srgbClr val="0068B7"/>
                 </a:solidFill>
@@ -3810,7 +3810,7 @@
               </a:rPr>
               <a:t>Apply it</a:t>
             </a:r>
-            <a:endParaRPr lang="en-US" sz="1300" dirty="0"/>
+            <a:endParaRPr lang="en-US" sz="1220" dirty="0"/>
           </a:p>
         </p:txBody>
       </p:sp>
@@ -3822,8 +3822,8 @@
         </p:nvSpPr>
         <p:spPr>
           <a:xfrm>
-            <a:off x="7799832" y="4659782"/>
-            <a:ext cx="3145536" cy="899770"/>
+            <a:off x="7708392" y="4828032"/>
+            <a:ext cx="3282696" cy="749808"/>
           </a:xfrm>
           <a:prstGeom prst="rect">
             <a:avLst/>
@@ -3841,7 +3841,7 @@
               <a:buNone/>
             </a:pPr>
             <a:r>
-              <a:rPr lang="en-US" sz="1320" dirty="0">
+              <a:rPr lang="en-US" sz="1220" dirty="0">
                 <a:solidFill>
                   <a:srgbClr val="17364A"/>
                 </a:solidFill>
@@ -3849,9 +3849,9 @@
                 <a:ea typeface="Aptos" pitchFamily="34" charset="-122"/>
                 <a:cs typeface="Aptos" pitchFamily="34" charset="-120"/>
               </a:rPr>
-              <a:t>Connect the concept to public health purpose, responsible use, required safeguards, documentation, and the next action a department should take.</a:t>
-            </a:r>
-            <a:endParaRPr lang="en-US" sz="1320" dirty="0"/>
+              <a:t>Connect the concept to public health purpose, responsible use, required.</a:t>
+            </a:r>
+            <a:endParaRPr lang="en-US" sz="1220" dirty="0"/>
           </a:p>
         </p:txBody>
       </p:sp>
@@ -4142,8 +4142,8 @@
         </p:nvSpPr>
         <p:spPr>
           <a:xfrm>
-            <a:off x="868680" y="1508760"/>
-            <a:ext cx="6309360" cy="4160520"/>
+            <a:off x="822960" y="1463040"/>
+            <a:ext cx="6565392" cy="4343400"/>
           </a:xfrm>
           <a:prstGeom prst="rect">
             <a:avLst/>
@@ -4161,7 +4161,7 @@
               <a:buNone/>
             </a:pPr>
             <a:r>
-              <a:rPr lang="en-US" sz="2100" dirty="0">
+              <a:rPr lang="en-US" sz="1920" dirty="0">
                 <a:solidFill>
                   <a:srgbClr val="003A63"/>
                 </a:solidFill>
@@ -4169,16 +4169,16 @@
                 <a:ea typeface="Aptos" pitchFamily="34" charset="-122"/>
                 <a:cs typeface="Aptos" pitchFamily="34" charset="-120"/>
               </a:rPr>
-              <a:t>• A health department may want an AI assistant to summarize incoming case reports and create.</a:t>
-            </a:r>
-            <a:endParaRPr lang="en-US" sz="2100" dirty="0"/>
-          </a:p>
-          <a:p>
-            <a:pPr indent="0" marL="0">
-              <a:buNone/>
-            </a:pPr>
-            <a:r>
-              <a:rPr lang="en-US" sz="2100" dirty="0">
+              <a:t>• A health department may want an AI assistant to summarize incoming case.</a:t>
+            </a:r>
+            <a:endParaRPr lang="en-US" sz="1920" dirty="0"/>
+          </a:p>
+          <a:p>
+            <a:pPr indent="0" marL="0">
+              <a:buNone/>
+            </a:pPr>
+            <a:r>
+              <a:rPr lang="en-US" sz="1920" dirty="0">
                 <a:solidFill>
                   <a:srgbClr val="003A63"/>
                 </a:solidFill>
@@ -4186,16 +4186,16 @@
                 <a:ea typeface="Aptos" pitchFamily="34" charset="-122"/>
                 <a:cs typeface="Aptos" pitchFamily="34" charset="-120"/>
               </a:rPr>
-              <a:t>• A weak integration pattern would require staff to export case data, paste it into an external.</a:t>
-            </a:r>
-            <a:endParaRPr lang="en-US" sz="2100" dirty="0"/>
-          </a:p>
-          <a:p>
-            <a:pPr indent="0" marL="0">
-              <a:buNone/>
-            </a:pPr>
-            <a:r>
-              <a:rPr lang="en-US" sz="2100" dirty="0">
+              <a:t>• A weak integration pattern would require staff to export case data, paste it.</a:t>
+            </a:r>
+            <a:endParaRPr lang="en-US" sz="1920" dirty="0"/>
+          </a:p>
+          <a:p>
+            <a:pPr indent="0" marL="0">
+              <a:buNone/>
+            </a:pPr>
+            <a:r>
+              <a:rPr lang="en-US" sz="1920" dirty="0">
                 <a:solidFill>
                   <a:srgbClr val="003A63"/>
                 </a:solidFill>
@@ -4203,9 +4203,9 @@
                 <a:ea typeface="Aptos" pitchFamily="34" charset="-122"/>
                 <a:cs typeface="Aptos" pitchFamily="34" charset="-120"/>
               </a:rPr>
-              <a:t>• A stronger pattern would retrieve approved fields from the surveillance system, generate a.</a:t>
-            </a:r>
-            <a:endParaRPr lang="en-US" sz="2100" dirty="0"/>
+              <a:t>• A stronger pattern would retrieve approved fields from the surveillance.</a:t>
+            </a:r>
+            <a:endParaRPr lang="en-US" sz="1920" dirty="0"/>
           </a:p>
         </p:txBody>
       </p:sp>
@@ -4217,12 +4217,12 @@
         </p:nvSpPr>
         <p:spPr>
           <a:xfrm>
-            <a:off x="7635240" y="1325880"/>
-            <a:ext cx="3474720" cy="1255471"/>
+            <a:off x="7543800" y="1325880"/>
+            <a:ext cx="3611880" cy="1261872"/>
           </a:xfrm>
           <a:prstGeom prst="roundRect">
             <a:avLst>
-              <a:gd name="adj" fmla="val 8740"/>
+              <a:gd name="adj" fmla="val 8696"/>
             </a:avLst>
           </a:prstGeom>
           <a:solidFill>
@@ -4244,8 +4244,8 @@
         </p:nvSpPr>
         <p:spPr>
           <a:xfrm>
-            <a:off x="7799832" y="1472184"/>
-            <a:ext cx="3145536" cy="256032"/>
+            <a:off x="7708392" y="1453896"/>
+            <a:ext cx="3282696" cy="228600"/>
           </a:xfrm>
           <a:prstGeom prst="rect">
             <a:avLst/>
@@ -4261,7 +4261,7 @@
               <a:buNone/>
             </a:pPr>
             <a:r>
-              <a:rPr lang="en-US" sz="1300" b="1" dirty="0">
+              <a:rPr lang="en-US" sz="1220" b="1" dirty="0">
                 <a:solidFill>
                   <a:srgbClr val="0068B7"/>
                 </a:solidFill>
@@ -4271,7 +4271,7 @@
               </a:rPr>
               <a:t>Core concept</a:t>
             </a:r>
-            <a:endParaRPr lang="en-US" sz="1300" dirty="0"/>
+            <a:endParaRPr lang="en-US" sz="1220" dirty="0"/>
           </a:p>
         </p:txBody>
       </p:sp>
@@ -4283,8 +4283,8 @@
         </p:nvSpPr>
         <p:spPr>
           <a:xfrm>
-            <a:off x="7799832" y="1801368"/>
-            <a:ext cx="3145536" cy="688543"/>
+            <a:off x="7708392" y="1764792"/>
+            <a:ext cx="3282696" cy="749808"/>
           </a:xfrm>
           <a:prstGeom prst="rect">
             <a:avLst/>
@@ -4302,7 +4302,7 @@
               <a:buNone/>
             </a:pPr>
             <a:r>
-              <a:rPr lang="en-US" sz="1320" dirty="0">
+              <a:rPr lang="en-US" sz="1220" dirty="0">
                 <a:solidFill>
                   <a:srgbClr val="17364A"/>
                 </a:solidFill>
@@ -4310,9 +4310,9 @@
                 <a:ea typeface="Aptos" pitchFamily="34" charset="-122"/>
                 <a:cs typeface="Aptos" pitchFamily="34" charset="-120"/>
               </a:rPr>
-              <a:t>A health department may want an AI assistant to summarize incoming case reports and create follow-up.</a:t>
-            </a:r>
-            <a:endParaRPr lang="en-US" sz="1320" dirty="0"/>
+              <a:t>A health department may want an AI assistant to summarize incoming case reports.</a:t>
+            </a:r>
+            <a:endParaRPr lang="en-US" sz="1220" dirty="0"/>
           </a:p>
         </p:txBody>
       </p:sp>
@@ -4324,12 +4324,12 @@
         </p:nvSpPr>
         <p:spPr>
           <a:xfrm>
-            <a:off x="7635240" y="2718511"/>
-            <a:ext cx="3474720" cy="1328623"/>
+            <a:off x="7543800" y="2724912"/>
+            <a:ext cx="3611880" cy="1527048"/>
           </a:xfrm>
           <a:prstGeom prst="roundRect">
             <a:avLst>
-              <a:gd name="adj" fmla="val 8259"/>
+              <a:gd name="adj" fmla="val 7186"/>
             </a:avLst>
           </a:prstGeom>
           <a:solidFill>
@@ -4351,8 +4351,8 @@
         </p:nvSpPr>
         <p:spPr>
           <a:xfrm>
-            <a:off x="7799832" y="2864815"/>
-            <a:ext cx="3145536" cy="256032"/>
+            <a:off x="7708392" y="2852928"/>
+            <a:ext cx="3282696" cy="228600"/>
           </a:xfrm>
           <a:prstGeom prst="rect">
             <a:avLst/>
@@ -4368,7 +4368,7 @@
               <a:buNone/>
             </a:pPr>
             <a:r>
-              <a:rPr lang="en-US" sz="1300" b="1" dirty="0">
+              <a:rPr lang="en-US" sz="1220" b="1" dirty="0">
                 <a:solidFill>
                   <a:srgbClr val="0068B7"/>
                 </a:solidFill>
@@ -4378,7 +4378,7 @@
               </a:rPr>
               <a:t>Concept checkpoints</a:t>
             </a:r>
-            <a:endParaRPr lang="en-US" sz="1300" dirty="0"/>
+            <a:endParaRPr lang="en-US" sz="1220" dirty="0"/>
           </a:p>
         </p:txBody>
       </p:sp>
@@ -4390,8 +4390,8 @@
         </p:nvSpPr>
         <p:spPr>
           <a:xfrm>
-            <a:off x="7818120" y="3230575"/>
-            <a:ext cx="3090672" cy="670255"/>
+            <a:off x="7726680" y="3182112"/>
+            <a:ext cx="3227832" cy="960120"/>
           </a:xfrm>
           <a:prstGeom prst="rect">
             <a:avLst/>
@@ -4409,7 +4409,7 @@
               <a:buNone/>
             </a:pPr>
             <a:r>
-              <a:rPr lang="en-US" sz="1220" dirty="0">
+              <a:rPr lang="en-US" sz="1140" dirty="0">
                 <a:solidFill>
                   <a:srgbClr val="17364A"/>
                 </a:solidFill>
@@ -4417,16 +4417,16 @@
                 <a:ea typeface="Aptos" pitchFamily="34" charset="-122"/>
                 <a:cs typeface="Aptos" pitchFamily="34" charset="-120"/>
               </a:rPr>
-              <a:t>A health department may want an AI assistant to summarize incoming.</a:t>
-            </a:r>
-            <a:endParaRPr lang="en-US" sz="1220" dirty="0"/>
-          </a:p>
-          <a:p>
-            <a:pPr indent="0" marL="0">
-              <a:buNone/>
-            </a:pPr>
-            <a:r>
-              <a:rPr lang="en-US" sz="1220" dirty="0">
+              <a:t>A health department may want an AI assistant to.</a:t>
+            </a:r>
+            <a:endParaRPr lang="en-US" sz="1140" dirty="0"/>
+          </a:p>
+          <a:p>
+            <a:pPr indent="0" marL="0">
+              <a:buNone/>
+            </a:pPr>
+            <a:r>
+              <a:rPr lang="en-US" sz="1140" dirty="0">
                 <a:solidFill>
                   <a:srgbClr val="17364A"/>
                 </a:solidFill>
@@ -4434,16 +4434,16 @@
                 <a:ea typeface="Aptos" pitchFamily="34" charset="-122"/>
                 <a:cs typeface="Aptos" pitchFamily="34" charset="-120"/>
               </a:rPr>
-              <a:t>A weak integration pattern would require staff to export case.</a:t>
-            </a:r>
-            <a:endParaRPr lang="en-US" sz="1220" dirty="0"/>
-          </a:p>
-          <a:p>
-            <a:pPr indent="0" marL="0">
-              <a:buNone/>
-            </a:pPr>
-            <a:r>
-              <a:rPr lang="en-US" sz="1220" dirty="0">
+              <a:t>A weak integration pattern would require staff to.</a:t>
+            </a:r>
+            <a:endParaRPr lang="en-US" sz="1140" dirty="0"/>
+          </a:p>
+          <a:p>
+            <a:pPr indent="0" marL="0">
+              <a:buNone/>
+            </a:pPr>
+            <a:r>
+              <a:rPr lang="en-US" sz="1140" dirty="0">
                 <a:solidFill>
                   <a:srgbClr val="17364A"/>
                 </a:solidFill>
@@ -4451,9 +4451,9 @@
                 <a:ea typeface="Aptos" pitchFamily="34" charset="-122"/>
                 <a:cs typeface="Aptos" pitchFamily="34" charset="-120"/>
               </a:rPr>
-              <a:t>A stronger pattern would retrieve approved fields from the.</a:t>
-            </a:r>
-            <a:endParaRPr lang="en-US" sz="1220" dirty="0"/>
+              <a:t>A stronger pattern would retrieve approved fields.</a:t>
+            </a:r>
+            <a:endParaRPr lang="en-US" sz="1140" dirty="0"/>
           </a:p>
         </p:txBody>
       </p:sp>
@@ -4465,12 +4465,12 @@
         </p:nvSpPr>
         <p:spPr>
           <a:xfrm>
-            <a:off x="7635240" y="4184294"/>
-            <a:ext cx="3474720" cy="1466698"/>
+            <a:off x="7543800" y="4389120"/>
+            <a:ext cx="3611880" cy="1261872"/>
           </a:xfrm>
           <a:prstGeom prst="roundRect">
             <a:avLst>
-              <a:gd name="adj" fmla="val 7481"/>
+              <a:gd name="adj" fmla="val 8696"/>
             </a:avLst>
           </a:prstGeom>
           <a:solidFill>
@@ -4492,8 +4492,8 @@
         </p:nvSpPr>
         <p:spPr>
           <a:xfrm>
-            <a:off x="7799832" y="4330598"/>
-            <a:ext cx="3145536" cy="256032"/>
+            <a:off x="7708392" y="4517136"/>
+            <a:ext cx="3282696" cy="228600"/>
           </a:xfrm>
           <a:prstGeom prst="rect">
             <a:avLst/>
@@ -4509,7 +4509,7 @@
               <a:buNone/>
             </a:pPr>
             <a:r>
-              <a:rPr lang="en-US" sz="1300" b="1" dirty="0">
+              <a:rPr lang="en-US" sz="1220" b="1" dirty="0">
                 <a:solidFill>
                   <a:srgbClr val="0068B7"/>
                 </a:solidFill>
@@ -4519,7 +4519,7 @@
               </a:rPr>
               <a:t>Apply it</a:t>
             </a:r>
-            <a:endParaRPr lang="en-US" sz="1300" dirty="0"/>
+            <a:endParaRPr lang="en-US" sz="1220" dirty="0"/>
           </a:p>
         </p:txBody>
       </p:sp>
@@ -4531,8 +4531,8 @@
         </p:nvSpPr>
         <p:spPr>
           <a:xfrm>
-            <a:off x="7799832" y="4659782"/>
-            <a:ext cx="3145536" cy="899770"/>
+            <a:off x="7708392" y="4828032"/>
+            <a:ext cx="3282696" cy="749808"/>
           </a:xfrm>
           <a:prstGeom prst="rect">
             <a:avLst/>
@@ -4550,7 +4550,7 @@
               <a:buNone/>
             </a:pPr>
             <a:r>
-              <a:rPr lang="en-US" sz="1320" dirty="0">
+              <a:rPr lang="en-US" sz="1220" dirty="0">
                 <a:solidFill>
                   <a:srgbClr val="17364A"/>
                 </a:solidFill>
@@ -4558,9 +4558,9 @@
                 <a:ea typeface="Aptos" pitchFamily="34" charset="-122"/>
                 <a:cs typeface="Aptos" pitchFamily="34" charset="-120"/>
               </a:rPr>
-              <a:t>Connect the concept to public health purpose, responsible use, required safeguards, documentation, and the next action a department should take.</a:t>
-            </a:r>
-            <a:endParaRPr lang="en-US" sz="1320" dirty="0"/>
+              <a:t>Connect the concept to public health purpose, responsible use, required.</a:t>
+            </a:r>
+            <a:endParaRPr lang="en-US" sz="1220" dirty="0"/>
           </a:p>
         </p:txBody>
       </p:sp>
@@ -4851,8 +4851,8 @@
         </p:nvSpPr>
         <p:spPr>
           <a:xfrm>
-            <a:off x="868680" y="1508760"/>
-            <a:ext cx="6309360" cy="4160520"/>
+            <a:off x="822960" y="1463040"/>
+            <a:ext cx="6565392" cy="4343400"/>
           </a:xfrm>
           <a:prstGeom prst="rect">
             <a:avLst/>
@@ -4870,7 +4870,7 @@
               <a:buNone/>
             </a:pPr>
             <a:r>
-              <a:rPr lang="en-US" sz="2100" dirty="0">
+              <a:rPr lang="en-US" sz="1920" dirty="0">
                 <a:solidFill>
                   <a:srgbClr val="003A63"/>
                 </a:solidFill>
@@ -4880,14 +4880,14 @@
               </a:rPr>
               <a:t>• Point-to-point interfaces connect two systems directly.</a:t>
             </a:r>
-            <a:endParaRPr lang="en-US" sz="2100" dirty="0"/>
-          </a:p>
-          <a:p>
-            <a:pPr indent="0" marL="0">
-              <a:buNone/>
-            </a:pPr>
-            <a:r>
-              <a:rPr lang="en-US" sz="2100" dirty="0">
+            <a:endParaRPr lang="en-US" sz="1920" dirty="0"/>
+          </a:p>
+          <a:p>
+            <a:pPr indent="0" marL="0">
+              <a:buNone/>
+            </a:pPr>
+            <a:r>
+              <a:rPr lang="en-US" sz="1920" dirty="0">
                 <a:solidFill>
                   <a:srgbClr val="003A63"/>
                 </a:solidFill>
@@ -4895,16 +4895,16 @@
                 <a:ea typeface="Aptos" pitchFamily="34" charset="-122"/>
                 <a:cs typeface="Aptos" pitchFamily="34" charset="-120"/>
               </a:rPr>
-              <a:t>• They can be useful when the exchange is stable and narrow, but they become difficult to.</a:t>
-            </a:r>
-            <a:endParaRPr lang="en-US" sz="2100" dirty="0"/>
-          </a:p>
-          <a:p>
-            <a:pPr indent="0" marL="0">
-              <a:buNone/>
-            </a:pPr>
-            <a:r>
-              <a:rPr lang="en-US" sz="2100" dirty="0">
+              <a:t>• They can be useful when the exchange is stable and narrow, but they become.</a:t>
+            </a:r>
+            <a:endParaRPr lang="en-US" sz="1920" dirty="0"/>
+          </a:p>
+          <a:p>
+            <a:pPr indent="0" marL="0">
+              <a:buNone/>
+            </a:pPr>
+            <a:r>
+              <a:rPr lang="en-US" sz="1920" dirty="0">
                 <a:solidFill>
                   <a:srgbClr val="003A63"/>
                 </a:solidFill>
@@ -4912,9 +4912,9 @@
                 <a:ea typeface="Aptos" pitchFamily="34" charset="-122"/>
                 <a:cs typeface="Aptos" pitchFamily="34" charset="-120"/>
               </a:rPr>
-              <a:t>• In public health, too many point-to-point connections can create brittle architecture,.</a:t>
-            </a:r>
-            <a:endParaRPr lang="en-US" sz="2100" dirty="0"/>
+              <a:t>• In public health, too many point-to-point connections can create brittle.</a:t>
+            </a:r>
+            <a:endParaRPr lang="en-US" sz="1920" dirty="0"/>
           </a:p>
         </p:txBody>
       </p:sp>
@@ -4926,12 +4926,12 @@
         </p:nvSpPr>
         <p:spPr>
           <a:xfrm>
-            <a:off x="7635240" y="1325880"/>
-            <a:ext cx="3474720" cy="1207008"/>
+            <a:off x="7543800" y="1325880"/>
+            <a:ext cx="3611880" cy="1261872"/>
           </a:xfrm>
           <a:prstGeom prst="roundRect">
             <a:avLst>
-              <a:gd name="adj" fmla="val 9091"/>
+              <a:gd name="adj" fmla="val 8696"/>
             </a:avLst>
           </a:prstGeom>
           <a:solidFill>
@@ -4953,8 +4953,8 @@
         </p:nvSpPr>
         <p:spPr>
           <a:xfrm>
-            <a:off x="7799832" y="1472184"/>
-            <a:ext cx="3145536" cy="256032"/>
+            <a:off x="7708392" y="1453896"/>
+            <a:ext cx="3282696" cy="228600"/>
           </a:xfrm>
           <a:prstGeom prst="rect">
             <a:avLst/>
@@ -4970,7 +4970,7 @@
               <a:buNone/>
             </a:pPr>
             <a:r>
-              <a:rPr lang="en-US" sz="1300" b="1" dirty="0">
+              <a:rPr lang="en-US" sz="1220" b="1" dirty="0">
                 <a:solidFill>
                   <a:srgbClr val="0068B7"/>
                 </a:solidFill>
@@ -4980,7 +4980,7 @@
               </a:rPr>
               <a:t>Core concept</a:t>
             </a:r>
-            <a:endParaRPr lang="en-US" sz="1300" dirty="0"/>
+            <a:endParaRPr lang="en-US" sz="1220" dirty="0"/>
           </a:p>
         </p:txBody>
       </p:sp>
@@ -4992,8 +4992,8 @@
         </p:nvSpPr>
         <p:spPr>
           <a:xfrm>
-            <a:off x="7799832" y="1801368"/>
-            <a:ext cx="3145536" cy="640080"/>
+            <a:off x="7708392" y="1764792"/>
+            <a:ext cx="3282696" cy="749808"/>
           </a:xfrm>
           <a:prstGeom prst="rect">
             <a:avLst/>
@@ -5011,7 +5011,7 @@
               <a:buNone/>
             </a:pPr>
             <a:r>
-              <a:rPr lang="en-US" sz="1320" dirty="0">
+              <a:rPr lang="en-US" sz="1220" dirty="0">
                 <a:solidFill>
                   <a:srgbClr val="17364A"/>
                 </a:solidFill>
@@ -5021,7 +5021,7 @@
               </a:rPr>
               <a:t>Point-to-point interfaces connect two systems directly.</a:t>
             </a:r>
-            <a:endParaRPr lang="en-US" sz="1320" dirty="0"/>
+            <a:endParaRPr lang="en-US" sz="1220" dirty="0"/>
           </a:p>
         </p:txBody>
       </p:sp>
@@ -5033,12 +5033,12 @@
         </p:nvSpPr>
         <p:spPr>
           <a:xfrm>
-            <a:off x="7635240" y="2670048"/>
-            <a:ext cx="3474720" cy="1377086"/>
+            <a:off x="7543800" y="2724912"/>
+            <a:ext cx="3611880" cy="1527048"/>
           </a:xfrm>
           <a:prstGeom prst="roundRect">
             <a:avLst>
-              <a:gd name="adj" fmla="val 7968"/>
+              <a:gd name="adj" fmla="val 7186"/>
             </a:avLst>
           </a:prstGeom>
           <a:solidFill>
@@ -5060,8 +5060,8 @@
         </p:nvSpPr>
         <p:spPr>
           <a:xfrm>
-            <a:off x="7799832" y="2816352"/>
-            <a:ext cx="3145536" cy="256032"/>
+            <a:off x="7708392" y="2852928"/>
+            <a:ext cx="3282696" cy="228600"/>
           </a:xfrm>
           <a:prstGeom prst="rect">
             <a:avLst/>
@@ -5077,7 +5077,7 @@
               <a:buNone/>
             </a:pPr>
             <a:r>
-              <a:rPr lang="en-US" sz="1300" b="1" dirty="0">
+              <a:rPr lang="en-US" sz="1220" b="1" dirty="0">
                 <a:solidFill>
                   <a:srgbClr val="0068B7"/>
                 </a:solidFill>
@@ -5087,7 +5087,7 @@
               </a:rPr>
               <a:t>Concept checkpoints</a:t>
             </a:r>
-            <a:endParaRPr lang="en-US" sz="1300" dirty="0"/>
+            <a:endParaRPr lang="en-US" sz="1220" dirty="0"/>
           </a:p>
         </p:txBody>
       </p:sp>
@@ -5099,8 +5099,8 @@
         </p:nvSpPr>
         <p:spPr>
           <a:xfrm>
-            <a:off x="7818120" y="3182112"/>
-            <a:ext cx="3090672" cy="718718"/>
+            <a:off x="7726680" y="3182112"/>
+            <a:ext cx="3227832" cy="960120"/>
           </a:xfrm>
           <a:prstGeom prst="rect">
             <a:avLst/>
@@ -5118,7 +5118,7 @@
               <a:buNone/>
             </a:pPr>
             <a:r>
-              <a:rPr lang="en-US" sz="1220" dirty="0">
+              <a:rPr lang="en-US" sz="1140" dirty="0">
                 <a:solidFill>
                   <a:srgbClr val="17364A"/>
                 </a:solidFill>
@@ -5126,16 +5126,16 @@
                 <a:ea typeface="Aptos" pitchFamily="34" charset="-122"/>
                 <a:cs typeface="Aptos" pitchFamily="34" charset="-120"/>
               </a:rPr>
-              <a:t>They can be useful when the exchange is stable and narrow, but.</a:t>
-            </a:r>
-            <a:endParaRPr lang="en-US" sz="1220" dirty="0"/>
-          </a:p>
-          <a:p>
-            <a:pPr indent="0" marL="0">
-              <a:buNone/>
-            </a:pPr>
-            <a:r>
-              <a:rPr lang="en-US" sz="1220" dirty="0">
+              <a:t>They can be useful when the exchange is stable and.</a:t>
+            </a:r>
+            <a:endParaRPr lang="en-US" sz="1140" dirty="0"/>
+          </a:p>
+          <a:p>
+            <a:pPr indent="0" marL="0">
+              <a:buNone/>
+            </a:pPr>
+            <a:r>
+              <a:rPr lang="en-US" sz="1140" dirty="0">
                 <a:solidFill>
                   <a:srgbClr val="17364A"/>
                 </a:solidFill>
@@ -5143,16 +5143,16 @@
                 <a:ea typeface="Aptos" pitchFamily="34" charset="-122"/>
                 <a:cs typeface="Aptos" pitchFamily="34" charset="-120"/>
               </a:rPr>
-              <a:t>In public health, too many point-to-point connections can create.</a:t>
-            </a:r>
-            <a:endParaRPr lang="en-US" sz="1220" dirty="0"/>
-          </a:p>
-          <a:p>
-            <a:pPr indent="0" marL="0">
-              <a:buNone/>
-            </a:pPr>
-            <a:r>
-              <a:rPr lang="en-US" sz="1220" dirty="0">
+              <a:t>In public health, too many point-to-point.</a:t>
+            </a:r>
+            <a:endParaRPr lang="en-US" sz="1140" dirty="0"/>
+          </a:p>
+          <a:p>
+            <a:pPr indent="0" marL="0">
+              <a:buNone/>
+            </a:pPr>
+            <a:r>
+              <a:rPr lang="en-US" sz="1140" dirty="0">
                 <a:solidFill>
                   <a:srgbClr val="17364A"/>
                 </a:solidFill>
@@ -5160,9 +5160,9 @@
                 <a:ea typeface="Aptos" pitchFamily="34" charset="-122"/>
                 <a:cs typeface="Aptos" pitchFamily="34" charset="-120"/>
               </a:rPr>
-              <a:t>Interface engines and message brokers support more scalable.</a:t>
-            </a:r>
-            <a:endParaRPr lang="en-US" sz="1220" dirty="0"/>
+              <a:t>Interface engines and message brokers support more.</a:t>
+            </a:r>
+            <a:endParaRPr lang="en-US" sz="1140" dirty="0"/>
           </a:p>
         </p:txBody>
       </p:sp>
@@ -5174,12 +5174,12 @@
         </p:nvSpPr>
         <p:spPr>
           <a:xfrm>
-            <a:off x="7635240" y="4184294"/>
-            <a:ext cx="3474720" cy="1466698"/>
+            <a:off x="7543800" y="4389120"/>
+            <a:ext cx="3611880" cy="1261872"/>
           </a:xfrm>
           <a:prstGeom prst="roundRect">
             <a:avLst>
-              <a:gd name="adj" fmla="val 7481"/>
+              <a:gd name="adj" fmla="val 8696"/>
             </a:avLst>
           </a:prstGeom>
           <a:solidFill>
@@ -5201,8 +5201,8 @@
         </p:nvSpPr>
         <p:spPr>
           <a:xfrm>
-            <a:off x="7799832" y="4330598"/>
-            <a:ext cx="3145536" cy="256032"/>
+            <a:off x="7708392" y="4517136"/>
+            <a:ext cx="3282696" cy="228600"/>
           </a:xfrm>
           <a:prstGeom prst="rect">
             <a:avLst/>
@@ -5218,7 +5218,7 @@
               <a:buNone/>
             </a:pPr>
             <a:r>
-              <a:rPr lang="en-US" sz="1300" b="1" dirty="0">
+              <a:rPr lang="en-US" sz="1220" b="1" dirty="0">
                 <a:solidFill>
                   <a:srgbClr val="0068B7"/>
                 </a:solidFill>
@@ -5228,7 +5228,7 @@
               </a:rPr>
               <a:t>Apply it</a:t>
             </a:r>
-            <a:endParaRPr lang="en-US" sz="1300" dirty="0"/>
+            <a:endParaRPr lang="en-US" sz="1220" dirty="0"/>
           </a:p>
         </p:txBody>
       </p:sp>
@@ -5240,8 +5240,8 @@
         </p:nvSpPr>
         <p:spPr>
           <a:xfrm>
-            <a:off x="7799832" y="4659782"/>
-            <a:ext cx="3145536" cy="899770"/>
+            <a:off x="7708392" y="4828032"/>
+            <a:ext cx="3282696" cy="749808"/>
           </a:xfrm>
           <a:prstGeom prst="rect">
             <a:avLst/>
@@ -5259,7 +5259,7 @@
               <a:buNone/>
             </a:pPr>
             <a:r>
-              <a:rPr lang="en-US" sz="1320" dirty="0">
+              <a:rPr lang="en-US" sz="1220" dirty="0">
                 <a:solidFill>
                   <a:srgbClr val="17364A"/>
                 </a:solidFill>
@@ -5267,9 +5267,9 @@
                 <a:ea typeface="Aptos" pitchFamily="34" charset="-122"/>
                 <a:cs typeface="Aptos" pitchFamily="34" charset="-120"/>
               </a:rPr>
-              <a:t>Connect the concept to public health purpose, responsible use, required safeguards, documentation, and the next action a department should take.</a:t>
-            </a:r>
-            <a:endParaRPr lang="en-US" sz="1320" dirty="0"/>
+              <a:t>Connect the concept to public health purpose, responsible use, required.</a:t>
+            </a:r>
+            <a:endParaRPr lang="en-US" sz="1220" dirty="0"/>
           </a:p>
         </p:txBody>
       </p:sp>
@@ -5560,8 +5560,8 @@
         </p:nvSpPr>
         <p:spPr>
           <a:xfrm>
-            <a:off x="868680" y="1508760"/>
-            <a:ext cx="6309360" cy="4160520"/>
+            <a:off x="822960" y="1463040"/>
+            <a:ext cx="6565392" cy="4343400"/>
           </a:xfrm>
           <a:prstGeom prst="rect">
             <a:avLst/>
@@ -5579,7 +5579,7 @@
               <a:buNone/>
             </a:pPr>
             <a:r>
-              <a:rPr lang="en-US" sz="2100" dirty="0">
+              <a:rPr lang="en-US" sz="1920" dirty="0">
                 <a:solidFill>
                   <a:srgbClr val="003A63"/>
                 </a:solidFill>
@@ -5589,14 +5589,14 @@
               </a:rPr>
               <a:t>• A common failure mode is integration by workaround.</a:t>
             </a:r>
-            <a:endParaRPr lang="en-US" sz="2100" dirty="0"/>
-          </a:p>
-          <a:p>
-            <a:pPr indent="0" marL="0">
-              <a:buNone/>
-            </a:pPr>
-            <a:r>
-              <a:rPr lang="en-US" sz="2100" dirty="0">
+            <a:endParaRPr lang="en-US" sz="1920" dirty="0"/>
+          </a:p>
+          <a:p>
+            <a:pPr indent="0" marL="0">
+              <a:buNone/>
+            </a:pPr>
+            <a:r>
+              <a:rPr lang="en-US" sz="1920" dirty="0">
                 <a:solidFill>
                   <a:srgbClr val="003A63"/>
                 </a:solidFill>
@@ -5604,16 +5604,16 @@
                 <a:ea typeface="Aptos" pitchFamily="34" charset="-122"/>
                 <a:cs typeface="Aptos" pitchFamily="34" charset="-120"/>
               </a:rPr>
-              <a:t>• Staff may use manual exports, screenshots, shared drives, or copy-and-paste workflows when a.</a:t>
-            </a:r>
-            <a:endParaRPr lang="en-US" sz="2100" dirty="0"/>
-          </a:p>
-          <a:p>
-            <a:pPr indent="0" marL="0">
-              <a:buNone/>
-            </a:pPr>
-            <a:r>
-              <a:rPr lang="en-US" sz="2100" dirty="0">
+              <a:t>• Staff may use manual exports, screenshots, shared drives, or copy-and-paste.</a:t>
+            </a:r>
+            <a:endParaRPr lang="en-US" sz="1920" dirty="0"/>
+          </a:p>
+          <a:p>
+            <a:pPr indent="0" marL="0">
+              <a:buNone/>
+            </a:pPr>
+            <a:r>
+              <a:rPr lang="en-US" sz="1920" dirty="0">
                 <a:solidFill>
                   <a:srgbClr val="003A63"/>
                 </a:solidFill>
@@ -5621,9 +5621,9 @@
                 <a:ea typeface="Aptos" pitchFamily="34" charset="-122"/>
                 <a:cs typeface="Aptos" pitchFamily="34" charset="-120"/>
               </a:rPr>
-              <a:t>• These practices can create privacy risk, version confusion, and gaps in the official record.</a:t>
-            </a:r>
-            <a:endParaRPr lang="en-US" sz="2100" dirty="0"/>
+              <a:t>• These practices can create privacy risk, version confusion, and gaps in the.</a:t>
+            </a:r>
+            <a:endParaRPr lang="en-US" sz="1920" dirty="0"/>
           </a:p>
         </p:txBody>
       </p:sp>
@@ -5635,12 +5635,12 @@
         </p:nvSpPr>
         <p:spPr>
           <a:xfrm>
-            <a:off x="7635240" y="1325880"/>
-            <a:ext cx="3474720" cy="1207008"/>
+            <a:off x="7543800" y="1325880"/>
+            <a:ext cx="3611880" cy="1261872"/>
           </a:xfrm>
           <a:prstGeom prst="roundRect">
             <a:avLst>
-              <a:gd name="adj" fmla="val 9091"/>
+              <a:gd name="adj" fmla="val 8696"/>
             </a:avLst>
           </a:prstGeom>
           <a:solidFill>
@@ -5662,8 +5662,8 @@
         </p:nvSpPr>
         <p:spPr>
           <a:xfrm>
-            <a:off x="7799832" y="1472184"/>
-            <a:ext cx="3145536" cy="256032"/>
+            <a:off x="7708392" y="1453896"/>
+            <a:ext cx="3282696" cy="228600"/>
           </a:xfrm>
           <a:prstGeom prst="rect">
             <a:avLst/>
@@ -5679,7 +5679,7 @@
               <a:buNone/>
             </a:pPr>
             <a:r>
-              <a:rPr lang="en-US" sz="1300" b="1" dirty="0">
+              <a:rPr lang="en-US" sz="1220" b="1" dirty="0">
                 <a:solidFill>
                   <a:srgbClr val="0068B7"/>
                 </a:solidFill>
@@ -5689,7 +5689,7 @@
               </a:rPr>
               <a:t>Risk check</a:t>
             </a:r>
-            <a:endParaRPr lang="en-US" sz="1300" dirty="0"/>
+            <a:endParaRPr lang="en-US" sz="1220" dirty="0"/>
           </a:p>
         </p:txBody>
       </p:sp>
@@ -5701,8 +5701,8 @@
         </p:nvSpPr>
         <p:spPr>
           <a:xfrm>
-            <a:off x="7799832" y="1801368"/>
-            <a:ext cx="3145536" cy="640080"/>
+            <a:off x="7708392" y="1764792"/>
+            <a:ext cx="3282696" cy="749808"/>
           </a:xfrm>
           <a:prstGeom prst="rect">
             <a:avLst/>
@@ -5720,7 +5720,7 @@
               <a:buNone/>
             </a:pPr>
             <a:r>
-              <a:rPr lang="en-US" sz="1320" dirty="0">
+              <a:rPr lang="en-US" sz="1220" dirty="0">
                 <a:solidFill>
                   <a:srgbClr val="17364A"/>
                 </a:solidFill>
@@ -5730,7 +5730,7 @@
               </a:rPr>
               <a:t>A common failure mode is integration by workaround.</a:t>
             </a:r>
-            <a:endParaRPr lang="en-US" sz="1320" dirty="0"/>
+            <a:endParaRPr lang="en-US" sz="1220" dirty="0"/>
           </a:p>
         </p:txBody>
       </p:sp>
@@ -5742,12 +5742,12 @@
         </p:nvSpPr>
         <p:spPr>
           <a:xfrm>
-            <a:off x="7635240" y="2670048"/>
-            <a:ext cx="3474720" cy="1536192"/>
+            <a:off x="7543800" y="2724912"/>
+            <a:ext cx="3611880" cy="1527048"/>
           </a:xfrm>
           <a:prstGeom prst="roundRect">
             <a:avLst>
-              <a:gd name="adj" fmla="val 7143"/>
+              <a:gd name="adj" fmla="val 7186"/>
             </a:avLst>
           </a:prstGeom>
           <a:solidFill>
@@ -5769,24 +5769,26 @@
         </p:nvSpPr>
         <p:spPr>
           <a:xfrm>
-            <a:off x="7799832" y="2798064"/>
-            <a:ext cx="3145536" cy="237744"/>
-          </a:xfrm>
-          <a:prstGeom prst="rect">
-            <a:avLst/>
-          </a:prstGeom>
-          <a:noFill/>
-          <a:ln/>
-        </p:spPr>
-        <p:txBody>
-          <a:bodyPr wrap="square" lIns="0" tIns="0" rIns="0" bIns="0" rtlCol="0" anchor="ctr"/>
-          <a:lstStyle/>
-          <a:p>
-            <a:pPr indent="0" marL="0">
-              <a:buNone/>
-            </a:pPr>
-            <a:r>
-              <a:rPr lang="en-US" sz="1250" b="1" dirty="0">
+            <a:off x="7708392" y="2852928"/>
+            <a:ext cx="3282696" cy="219456"/>
+          </a:xfrm>
+          <a:prstGeom prst="rect">
+            <a:avLst/>
+          </a:prstGeom>
+          <a:noFill/>
+          <a:ln/>
+        </p:spPr>
+        <p:txBody>
+          <a:bodyPr wrap="square" lIns="0" tIns="0" rIns="0" bIns="0" rtlCol="0" anchor="ctr">
+            <a:normAutofit/>
+          </a:bodyPr>
+          <a:lstStyle/>
+          <a:p>
+            <a:pPr indent="0" marL="0">
+              <a:buNone/>
+            </a:pPr>
+            <a:r>
+              <a:rPr lang="en-US" sz="1160" b="1" dirty="0">
                 <a:solidFill>
                   <a:srgbClr val="0068B7"/>
                 </a:solidFill>
@@ -5796,7 +5798,7 @@
               </a:rPr>
               <a:t>Risk control loop</a:t>
             </a:r>
-            <a:endParaRPr lang="en-US" sz="1250" dirty="0"/>
+            <a:endParaRPr lang="en-US" sz="1160" dirty="0"/>
           </a:p>
         </p:txBody>
       </p:sp>
@@ -5808,7 +5810,7 @@
         </p:nvSpPr>
         <p:spPr>
           <a:xfrm>
-            <a:off x="8763000" y="3351276"/>
+            <a:off x="8717280" y="3406140"/>
             <a:ext cx="164592" cy="0"/>
           </a:xfrm>
           <a:prstGeom prst="line">
@@ -5831,8 +5833,8 @@
         </p:nvSpPr>
         <p:spPr>
           <a:xfrm>
-            <a:off x="7872984" y="3200400"/>
-            <a:ext cx="890016" cy="301752"/>
+            <a:off x="7781544" y="3255264"/>
+            <a:ext cx="935736" cy="301752"/>
           </a:xfrm>
           <a:prstGeom prst="roundRect">
             <a:avLst>
@@ -5858,8 +5860,8 @@
         </p:nvSpPr>
         <p:spPr>
           <a:xfrm>
-            <a:off x="7909560" y="3273552"/>
-            <a:ext cx="816864" cy="146304"/>
+            <a:off x="7818120" y="3328416"/>
+            <a:ext cx="862584" cy="146304"/>
           </a:xfrm>
           <a:prstGeom prst="rect">
             <a:avLst/>
@@ -5899,7 +5901,7 @@
         </p:nvSpPr>
         <p:spPr>
           <a:xfrm>
-            <a:off x="9817608" y="3351276"/>
+            <a:off x="9817608" y="3406140"/>
             <a:ext cx="164592" cy="0"/>
           </a:xfrm>
           <a:prstGeom prst="line">
@@ -5922,8 +5924,8 @@
         </p:nvSpPr>
         <p:spPr>
           <a:xfrm>
-            <a:off x="8927592" y="3200400"/>
-            <a:ext cx="890016" cy="301752"/>
+            <a:off x="8881872" y="3255264"/>
+            <a:ext cx="935736" cy="301752"/>
           </a:xfrm>
           <a:prstGeom prst="roundRect">
             <a:avLst>
@@ -5949,8 +5951,8 @@
         </p:nvSpPr>
         <p:spPr>
           <a:xfrm>
-            <a:off x="8964168" y="3273552"/>
-            <a:ext cx="816864" cy="146304"/>
+            <a:off x="8918448" y="3328416"/>
+            <a:ext cx="862584" cy="146304"/>
           </a:xfrm>
           <a:prstGeom prst="rect">
             <a:avLst/>
@@ -5990,8 +5992,8 @@
         </p:nvSpPr>
         <p:spPr>
           <a:xfrm>
-            <a:off x="9982200" y="3200400"/>
-            <a:ext cx="890016" cy="301752"/>
+            <a:off x="9982200" y="3255264"/>
+            <a:ext cx="935736" cy="301752"/>
           </a:xfrm>
           <a:prstGeom prst="roundRect">
             <a:avLst>
@@ -6017,8 +6019,8 @@
         </p:nvSpPr>
         <p:spPr>
           <a:xfrm>
-            <a:off x="10018776" y="3273552"/>
-            <a:ext cx="816864" cy="146304"/>
+            <a:off x="10018776" y="3328416"/>
+            <a:ext cx="862584" cy="146304"/>
           </a:xfrm>
           <a:prstGeom prst="rect">
             <a:avLst/>
@@ -6058,8 +6060,8 @@
         </p:nvSpPr>
         <p:spPr>
           <a:xfrm>
-            <a:off x="7854696" y="3694176"/>
-            <a:ext cx="3035808" cy="365760"/>
+            <a:off x="7763256" y="3749040"/>
+            <a:ext cx="3172968" cy="356616"/>
           </a:xfrm>
           <a:prstGeom prst="rect">
             <a:avLst/>
@@ -6077,7 +6079,7 @@
               <a:buNone/>
             </a:pPr>
             <a:r>
-              <a:rPr lang="en-US" sz="1120" dirty="0">
+              <a:rPr lang="en-US" sz="1040" dirty="0">
                 <a:solidFill>
                   <a:srgbClr val="17364A"/>
                 </a:solidFill>
@@ -6085,9 +6087,9 @@
                 <a:ea typeface="Aptos" pitchFamily="34" charset="-122"/>
                 <a:cs typeface="Aptos" pitchFamily="34" charset="-120"/>
               </a:rPr>
-              <a:t>Responsible use depends on finding risks early, applying safeguards, and watching for drift or harm over time.</a:t>
-            </a:r>
-            <a:endParaRPr lang="en-US" sz="1120" dirty="0"/>
+              <a:t>Responsible use depends on finding risks early, applying safeguards,.</a:t>
+            </a:r>
+            <a:endParaRPr lang="en-US" sz="1040" dirty="0"/>
           </a:p>
         </p:txBody>
       </p:sp>
@@ -6099,12 +6101,12 @@
         </p:nvSpPr>
         <p:spPr>
           <a:xfrm>
-            <a:off x="7635240" y="4343400"/>
-            <a:ext cx="3474720" cy="1255471"/>
+            <a:off x="7543800" y="4389120"/>
+            <a:ext cx="3611880" cy="1261872"/>
           </a:xfrm>
           <a:prstGeom prst="roundRect">
             <a:avLst>
-              <a:gd name="adj" fmla="val 8740"/>
+              <a:gd name="adj" fmla="val 8696"/>
             </a:avLst>
           </a:prstGeom>
           <a:solidFill>
@@ -6126,8 +6128,8 @@
         </p:nvSpPr>
         <p:spPr>
           <a:xfrm>
-            <a:off x="7799832" y="4489704"/>
-            <a:ext cx="3145536" cy="256032"/>
+            <a:off x="7708392" y="4517136"/>
+            <a:ext cx="3282696" cy="228600"/>
           </a:xfrm>
           <a:prstGeom prst="rect">
             <a:avLst/>
@@ -6143,7 +6145,7 @@
               <a:buNone/>
             </a:pPr>
             <a:r>
-              <a:rPr lang="en-US" sz="1300" b="1" dirty="0">
+              <a:rPr lang="en-US" sz="1220" b="1" dirty="0">
                 <a:solidFill>
                   <a:srgbClr val="0068B7"/>
                 </a:solidFill>
@@ -6153,7 +6155,7 @@
               </a:rPr>
               <a:t>Safeguard to plan</a:t>
             </a:r>
-            <a:endParaRPr lang="en-US" sz="1300" dirty="0"/>
+            <a:endParaRPr lang="en-US" sz="1220" dirty="0"/>
           </a:p>
         </p:txBody>
       </p:sp>
@@ -6165,8 +6167,8 @@
         </p:nvSpPr>
         <p:spPr>
           <a:xfrm>
-            <a:off x="7799832" y="4818888"/>
-            <a:ext cx="3145536" cy="688543"/>
+            <a:off x="7708392" y="4828032"/>
+            <a:ext cx="3282696" cy="749808"/>
           </a:xfrm>
           <a:prstGeom prst="rect">
             <a:avLst/>
@@ -6184,7 +6186,7 @@
               <a:buNone/>
             </a:pPr>
             <a:r>
-              <a:rPr lang="en-US" sz="1320" dirty="0">
+              <a:rPr lang="en-US" sz="1220" dirty="0">
                 <a:solidFill>
                   <a:srgbClr val="17364A"/>
                 </a:solidFill>
@@ -6192,9 +6194,9 @@
                 <a:ea typeface="Aptos" pitchFamily="34" charset="-122"/>
                 <a:cs typeface="Aptos" pitchFamily="34" charset="-120"/>
               </a:rPr>
-              <a:t>Identify what could go wrong, who could be affected, what safeguards are needed, and what evidence should be reviewed before use.</a:t>
-            </a:r>
-            <a:endParaRPr lang="en-US" sz="1320" dirty="0"/>
+              <a:t>Identify what could go wrong, who could be affected, what safeguards are needed,.</a:t>
+            </a:r>
+            <a:endParaRPr lang="en-US" sz="1220" dirty="0"/>
           </a:p>
         </p:txBody>
       </p:sp>
@@ -6485,8 +6487,8 @@
         </p:nvSpPr>
         <p:spPr>
           <a:xfrm>
-            <a:off x="868680" y="1508760"/>
-            <a:ext cx="6309360" cy="4160520"/>
+            <a:off x="822960" y="1463040"/>
+            <a:ext cx="6565392" cy="4343400"/>
           </a:xfrm>
           <a:prstGeom prst="rect">
             <a:avLst/>
@@ -6504,7 +6506,7 @@
               <a:buNone/>
             </a:pPr>
             <a:r>
-              <a:rPr lang="en-US" sz="2100" dirty="0">
+              <a:rPr lang="en-US" sz="1920" dirty="0">
                 <a:solidFill>
                   <a:srgbClr val="003A63"/>
                 </a:solidFill>
@@ -6512,16 +6514,16 @@
                 <a:ea typeface="Aptos" pitchFamily="34" charset="-122"/>
                 <a:cs typeface="Aptos" pitchFamily="34" charset="-120"/>
               </a:rPr>
-              <a:t>• Generative AI may require integration with document repositories or systems of record so.</a:t>
-            </a:r>
-            <a:endParaRPr lang="en-US" sz="2100" dirty="0"/>
-          </a:p>
-          <a:p>
-            <a:pPr indent="0" marL="0">
-              <a:buNone/>
-            </a:pPr>
-            <a:r>
-              <a:rPr lang="en-US" sz="2100" dirty="0">
+              <a:t>• Generative AI may require integration with document repositories or systems.</a:t>
+            </a:r>
+            <a:endParaRPr lang="en-US" sz="1920" dirty="0"/>
+          </a:p>
+          <a:p>
+            <a:pPr indent="0" marL="0">
+              <a:buNone/>
+            </a:pPr>
+            <a:r>
+              <a:rPr lang="en-US" sz="1920" dirty="0">
                 <a:solidFill>
                   <a:srgbClr val="003A63"/>
                 </a:solidFill>
@@ -6531,14 +6533,14 @@
               </a:rPr>
               <a:t>• Predictive models may require scheduled data feeds and monitoring dashboards.</a:t>
             </a:r>
-            <a:endParaRPr lang="en-US" sz="2100" dirty="0"/>
-          </a:p>
-          <a:p>
-            <a:pPr indent="0" marL="0">
-              <a:buNone/>
-            </a:pPr>
-            <a:r>
-              <a:rPr lang="en-US" sz="2100" dirty="0">
+            <a:endParaRPr lang="en-US" sz="1920" dirty="0"/>
+          </a:p>
+          <a:p>
+            <a:pPr indent="0" marL="0">
+              <a:buNone/>
+            </a:pPr>
+            <a:r>
+              <a:rPr lang="en-US" sz="1920" dirty="0">
                 <a:solidFill>
                   <a:srgbClr val="003A63"/>
                 </a:solidFill>
@@ -6546,9 +6548,9 @@
                 <a:ea typeface="Aptos" pitchFamily="34" charset="-122"/>
                 <a:cs typeface="Aptos" pitchFamily="34" charset="-120"/>
               </a:rPr>
-              <a:t>• Agentic workflows require the strongest integration controls because they may call tools,.</a:t>
-            </a:r>
-            <a:endParaRPr lang="en-US" sz="2100" dirty="0"/>
+              <a:t>• Agentic workflows require the strongest integration controls because they.</a:t>
+            </a:r>
+            <a:endParaRPr lang="en-US" sz="1920" dirty="0"/>
           </a:p>
         </p:txBody>
       </p:sp>
@@ -6560,12 +6562,12 @@
         </p:nvSpPr>
         <p:spPr>
           <a:xfrm>
-            <a:off x="7635240" y="1325880"/>
-            <a:ext cx="3474720" cy="1255471"/>
+            <a:off x="7543800" y="1325880"/>
+            <a:ext cx="3611880" cy="1261872"/>
           </a:xfrm>
           <a:prstGeom prst="roundRect">
             <a:avLst>
-              <a:gd name="adj" fmla="val 8740"/>
+              <a:gd name="adj" fmla="val 8696"/>
             </a:avLst>
           </a:prstGeom>
           <a:solidFill>
@@ -6587,8 +6589,8 @@
         </p:nvSpPr>
         <p:spPr>
           <a:xfrm>
-            <a:off x="7799832" y="1472184"/>
-            <a:ext cx="3145536" cy="256032"/>
+            <a:off x="7708392" y="1453896"/>
+            <a:ext cx="3282696" cy="228600"/>
           </a:xfrm>
           <a:prstGeom prst="rect">
             <a:avLst/>
@@ -6604,7 +6606,7 @@
               <a:buNone/>
             </a:pPr>
             <a:r>
-              <a:rPr lang="en-US" sz="1300" b="1" dirty="0">
+              <a:rPr lang="en-US" sz="1220" b="1" dirty="0">
                 <a:solidFill>
                   <a:srgbClr val="0068B7"/>
                 </a:solidFill>
@@ -6614,7 +6616,7 @@
               </a:rPr>
               <a:t>Implementation cue</a:t>
             </a:r>
-            <a:endParaRPr lang="en-US" sz="1300" dirty="0"/>
+            <a:endParaRPr lang="en-US" sz="1220" dirty="0"/>
           </a:p>
         </p:txBody>
       </p:sp>
@@ -6626,8 +6628,8 @@
         </p:nvSpPr>
         <p:spPr>
           <a:xfrm>
-            <a:off x="7799832" y="1801368"/>
-            <a:ext cx="3145536" cy="688543"/>
+            <a:off x="7708392" y="1764792"/>
+            <a:ext cx="3282696" cy="749808"/>
           </a:xfrm>
           <a:prstGeom prst="rect">
             <a:avLst/>
@@ -6645,7 +6647,7 @@
               <a:buNone/>
             </a:pPr>
             <a:r>
-              <a:rPr lang="en-US" sz="1320" dirty="0">
+              <a:rPr lang="en-US" sz="1220" dirty="0">
                 <a:solidFill>
                   <a:srgbClr val="17364A"/>
                 </a:solidFill>
@@ -6653,9 +6655,9 @@
                 <a:ea typeface="Aptos" pitchFamily="34" charset="-122"/>
                 <a:cs typeface="Aptos" pitchFamily="34" charset="-120"/>
               </a:rPr>
-              <a:t>Generative AI may require integration with document repositories or systems of record so outputs can be.</a:t>
-            </a:r>
-            <a:endParaRPr lang="en-US" sz="1320" dirty="0"/>
+              <a:t>Generative AI may require integration with document repositories or systems of.</a:t>
+            </a:r>
+            <a:endParaRPr lang="en-US" sz="1220" dirty="0"/>
           </a:p>
         </p:txBody>
       </p:sp>
@@ -6667,12 +6669,12 @@
         </p:nvSpPr>
         <p:spPr>
           <a:xfrm>
-            <a:off x="7635240" y="2718511"/>
-            <a:ext cx="3474720" cy="1328623"/>
+            <a:off x="7543800" y="2724912"/>
+            <a:ext cx="3611880" cy="1527048"/>
           </a:xfrm>
           <a:prstGeom prst="roundRect">
             <a:avLst>
-              <a:gd name="adj" fmla="val 8259"/>
+              <a:gd name="adj" fmla="val 7186"/>
             </a:avLst>
           </a:prstGeom>
           <a:solidFill>
@@ -6694,24 +6696,26 @@
         </p:nvSpPr>
         <p:spPr>
           <a:xfrm>
-            <a:off x="7799832" y="2846527"/>
-            <a:ext cx="3145536" cy="237744"/>
-          </a:xfrm>
-          <a:prstGeom prst="rect">
-            <a:avLst/>
-          </a:prstGeom>
-          <a:noFill/>
-          <a:ln/>
-        </p:spPr>
-        <p:txBody>
-          <a:bodyPr wrap="square" lIns="0" tIns="0" rIns="0" bIns="0" rtlCol="0" anchor="ctr"/>
-          <a:lstStyle/>
-          <a:p>
-            <a:pPr indent="0" marL="0">
-              <a:buNone/>
-            </a:pPr>
-            <a:r>
-              <a:rPr lang="en-US" sz="1250" b="1" dirty="0">
+            <a:off x="7708392" y="2852928"/>
+            <a:ext cx="3282696" cy="219456"/>
+          </a:xfrm>
+          <a:prstGeom prst="rect">
+            <a:avLst/>
+          </a:prstGeom>
+          <a:noFill/>
+          <a:ln/>
+        </p:spPr>
+        <p:txBody>
+          <a:bodyPr wrap="square" lIns="0" tIns="0" rIns="0" bIns="0" rtlCol="0" anchor="ctr">
+            <a:normAutofit/>
+          </a:bodyPr>
+          <a:lstStyle/>
+          <a:p>
+            <a:pPr indent="0" marL="0">
+              <a:buNone/>
+            </a:pPr>
+            <a:r>
+              <a:rPr lang="en-US" sz="1160" b="1" dirty="0">
                 <a:solidFill>
                   <a:srgbClr val="0068B7"/>
                 </a:solidFill>
@@ -6721,7 +6725,7 @@
               </a:rPr>
               <a:t>Implementation path</a:t>
             </a:r>
-            <a:endParaRPr lang="en-US" sz="1250" dirty="0"/>
+            <a:endParaRPr lang="en-US" sz="1160" dirty="0"/>
           </a:p>
         </p:txBody>
       </p:sp>
@@ -6733,7 +6737,7 @@
         </p:nvSpPr>
         <p:spPr>
           <a:xfrm>
-            <a:off x="8763000" y="3399739"/>
+            <a:off x="8717280" y="3406140"/>
             <a:ext cx="164592" cy="0"/>
           </a:xfrm>
           <a:prstGeom prst="line">
@@ -6756,8 +6760,8 @@
         </p:nvSpPr>
         <p:spPr>
           <a:xfrm>
-            <a:off x="7872984" y="3248863"/>
-            <a:ext cx="890016" cy="301752"/>
+            <a:off x="7781544" y="3255264"/>
+            <a:ext cx="935736" cy="301752"/>
           </a:xfrm>
           <a:prstGeom prst="roundRect">
             <a:avLst>
@@ -6783,8 +6787,8 @@
         </p:nvSpPr>
         <p:spPr>
           <a:xfrm>
-            <a:off x="7909560" y="3322015"/>
-            <a:ext cx="816864" cy="146304"/>
+            <a:off x="7818120" y="3328416"/>
+            <a:ext cx="862584" cy="146304"/>
           </a:xfrm>
           <a:prstGeom prst="rect">
             <a:avLst/>
@@ -6824,7 +6828,7 @@
         </p:nvSpPr>
         <p:spPr>
           <a:xfrm>
-            <a:off x="9817608" y="3399739"/>
+            <a:off x="9817608" y="3406140"/>
             <a:ext cx="164592" cy="0"/>
           </a:xfrm>
           <a:prstGeom prst="line">
@@ -6847,8 +6851,8 @@
         </p:nvSpPr>
         <p:spPr>
           <a:xfrm>
-            <a:off x="8927592" y="3248863"/>
-            <a:ext cx="890016" cy="301752"/>
+            <a:off x="8881872" y="3255264"/>
+            <a:ext cx="935736" cy="301752"/>
           </a:xfrm>
           <a:prstGeom prst="roundRect">
             <a:avLst>
@@ -6874,8 +6878,8 @@
         </p:nvSpPr>
         <p:spPr>
           <a:xfrm>
-            <a:off x="8964168" y="3322015"/>
-            <a:ext cx="816864" cy="146304"/>
+            <a:off x="8918448" y="3328416"/>
+            <a:ext cx="862584" cy="146304"/>
           </a:xfrm>
           <a:prstGeom prst="rect">
             <a:avLst/>
@@ -6915,8 +6919,8 @@
         </p:nvSpPr>
         <p:spPr>
           <a:xfrm>
-            <a:off x="9982200" y="3248863"/>
-            <a:ext cx="890016" cy="301752"/>
+            <a:off x="9982200" y="3255264"/>
+            <a:ext cx="935736" cy="301752"/>
           </a:xfrm>
           <a:prstGeom prst="roundRect">
             <a:avLst>
@@ -6942,8 +6946,8 @@
         </p:nvSpPr>
         <p:spPr>
           <a:xfrm>
-            <a:off x="10018776" y="3322015"/>
-            <a:ext cx="816864" cy="146304"/>
+            <a:off x="10018776" y="3328416"/>
+            <a:ext cx="862584" cy="146304"/>
           </a:xfrm>
           <a:prstGeom prst="rect">
             <a:avLst/>
@@ -6983,8 +6987,8 @@
         </p:nvSpPr>
         <p:spPr>
           <a:xfrm>
-            <a:off x="7854696" y="3742639"/>
-            <a:ext cx="3035808" cy="158191"/>
+            <a:off x="7763256" y="3749040"/>
+            <a:ext cx="3172968" cy="356616"/>
           </a:xfrm>
           <a:prstGeom prst="rect">
             <a:avLst/>
@@ -7002,7 +7006,7 @@
               <a:buNone/>
             </a:pPr>
             <a:r>
-              <a:rPr lang="en-US" sz="1120" dirty="0">
+              <a:rPr lang="en-US" sz="1040" dirty="0">
                 <a:solidFill>
                   <a:srgbClr val="17364A"/>
                 </a:solidFill>
@@ -7010,9 +7014,9 @@
                 <a:ea typeface="Aptos" pitchFamily="34" charset="-122"/>
                 <a:cs typeface="Aptos" pitchFamily="34" charset="-120"/>
               </a:rPr>
-              <a:t>Implementation work should make dependencies, approvals, training, and sustainment visible before launch.</a:t>
-            </a:r>
-            <a:endParaRPr lang="en-US" sz="1120" dirty="0"/>
+              <a:t>Implementation work should make dependencies, approvals, training, and.</a:t>
+            </a:r>
+            <a:endParaRPr lang="en-US" sz="1040" dirty="0"/>
           </a:p>
         </p:txBody>
       </p:sp>
@@ -7024,12 +7028,12 @@
         </p:nvSpPr>
         <p:spPr>
           <a:xfrm>
-            <a:off x="7635240" y="4184294"/>
-            <a:ext cx="3474720" cy="1466698"/>
+            <a:off x="7543800" y="4389120"/>
+            <a:ext cx="3611880" cy="1261872"/>
           </a:xfrm>
           <a:prstGeom prst="roundRect">
             <a:avLst>
-              <a:gd name="adj" fmla="val 7481"/>
+              <a:gd name="adj" fmla="val 8696"/>
             </a:avLst>
           </a:prstGeom>
           <a:solidFill>
@@ -7051,8 +7055,8 @@
         </p:nvSpPr>
         <p:spPr>
           <a:xfrm>
-            <a:off x="7799832" y="4330598"/>
-            <a:ext cx="3145536" cy="256032"/>
+            <a:off x="7708392" y="4517136"/>
+            <a:ext cx="3282696" cy="228600"/>
           </a:xfrm>
           <a:prstGeom prst="rect">
             <a:avLst/>
@@ -7068,7 +7072,7 @@
               <a:buNone/>
             </a:pPr>
             <a:r>
-              <a:rPr lang="en-US" sz="1300" b="1" dirty="0">
+              <a:rPr lang="en-US" sz="1220" b="1" dirty="0">
                 <a:solidFill>
                   <a:srgbClr val="0068B7"/>
                 </a:solidFill>
@@ -7078,7 +7082,7 @@
               </a:rPr>
               <a:t>Next action</a:t>
             </a:r>
-            <a:endParaRPr lang="en-US" sz="1300" dirty="0"/>
+            <a:endParaRPr lang="en-US" sz="1220" dirty="0"/>
           </a:p>
         </p:txBody>
       </p:sp>
@@ -7090,8 +7094,8 @@
         </p:nvSpPr>
         <p:spPr>
           <a:xfrm>
-            <a:off x="7799832" y="4659782"/>
-            <a:ext cx="3145536" cy="899770"/>
+            <a:off x="7708392" y="4828032"/>
+            <a:ext cx="3282696" cy="749808"/>
           </a:xfrm>
           <a:prstGeom prst="rect">
             <a:avLst/>
@@ -7109,7 +7113,7 @@
               <a:buNone/>
             </a:pPr>
             <a:r>
-              <a:rPr lang="en-US" sz="1320" dirty="0">
+              <a:rPr lang="en-US" sz="1220" dirty="0">
                 <a:solidFill>
                   <a:srgbClr val="17364A"/>
                 </a:solidFill>
@@ -7117,9 +7121,9 @@
                 <a:ea typeface="Aptos" pitchFamily="34" charset="-122"/>
                 <a:cs typeface="Aptos" pitchFamily="34" charset="-120"/>
               </a:rPr>
-              <a:t>Use the concept to clarify workflow changes, dependencies, staffing, procurement requirements, training needs, and implementation checkpoints.</a:t>
-            </a:r>
-            <a:endParaRPr lang="en-US" sz="1320" dirty="0"/>
+              <a:t>Use the concept to clarify workflow changes, dependencies, staffing, procurement.</a:t>
+            </a:r>
+            <a:endParaRPr lang="en-US" sz="1220" dirty="0"/>
           </a:p>
         </p:txBody>
       </p:sp>
@@ -7410,8 +7414,8 @@
         </p:nvSpPr>
         <p:spPr>
           <a:xfrm>
-            <a:off x="868680" y="1508760"/>
-            <a:ext cx="6309360" cy="4160520"/>
+            <a:off x="822960" y="1463040"/>
+            <a:ext cx="6565392" cy="4343400"/>
           </a:xfrm>
           <a:prstGeom prst="rect">
             <a:avLst/>
@@ -7429,7 +7433,7 @@
               <a:buNone/>
             </a:pPr>
             <a:r>
-              <a:rPr lang="en-US" sz="2100" dirty="0">
+              <a:rPr lang="en-US" sz="1920" dirty="0">
                 <a:solidFill>
                   <a:srgbClr val="003A63"/>
                 </a:solidFill>
@@ -7439,14 +7443,14 @@
               </a:rPr>
               <a:t>• Which workflows currently depend on manual transfer between systems?</a:t>
             </a:r>
-            <a:endParaRPr lang="en-US" sz="2100" dirty="0"/>
-          </a:p>
-          <a:p>
-            <a:pPr indent="0" marL="0">
-              <a:buNone/>
-            </a:pPr>
-            <a:r>
-              <a:rPr lang="en-US" sz="2100" dirty="0">
+            <a:endParaRPr lang="en-US" sz="1920" dirty="0"/>
+          </a:p>
+          <a:p>
+            <a:pPr indent="0" marL="0">
+              <a:buNone/>
+            </a:pPr>
+            <a:r>
+              <a:rPr lang="en-US" sz="1920" dirty="0">
                 <a:solidFill>
                   <a:srgbClr val="003A63"/>
                 </a:solidFill>
@@ -7456,14 +7460,14 @@
               </a:rPr>
               <a:t>• Which systems are the official systems of record?</a:t>
             </a:r>
-            <a:endParaRPr lang="en-US" sz="2100" dirty="0"/>
-          </a:p>
-          <a:p>
-            <a:pPr indent="0" marL="0">
-              <a:buNone/>
-            </a:pPr>
-            <a:r>
-              <a:rPr lang="en-US" sz="2100" dirty="0">
+            <a:endParaRPr lang="en-US" sz="1920" dirty="0"/>
+          </a:p>
+          <a:p>
+            <a:pPr indent="0" marL="0">
+              <a:buNone/>
+            </a:pPr>
+            <a:r>
+              <a:rPr lang="en-US" sz="1920" dirty="0">
                 <a:solidFill>
                   <a:srgbClr val="003A63"/>
                 </a:solidFill>
@@ -7473,7 +7477,7 @@
               </a:rPr>
               <a:t>• Where would API access reduce burden without increasing risk?</a:t>
             </a:r>
-            <a:endParaRPr lang="en-US" sz="2100" dirty="0"/>
+            <a:endParaRPr lang="en-US" sz="1920" dirty="0"/>
           </a:p>
         </p:txBody>
       </p:sp>
@@ -7485,12 +7489,12 @@
         </p:nvSpPr>
         <p:spPr>
           <a:xfrm>
-            <a:off x="7635240" y="1325880"/>
-            <a:ext cx="3474720" cy="1207008"/>
+            <a:off x="7543800" y="1325880"/>
+            <a:ext cx="3611880" cy="1261872"/>
           </a:xfrm>
           <a:prstGeom prst="roundRect">
             <a:avLst>
-              <a:gd name="adj" fmla="val 9091"/>
+              <a:gd name="adj" fmla="val 8696"/>
             </a:avLst>
           </a:prstGeom>
           <a:solidFill>
@@ -7512,8 +7516,8 @@
         </p:nvSpPr>
         <p:spPr>
           <a:xfrm>
-            <a:off x="7799832" y="1472184"/>
-            <a:ext cx="3145536" cy="256032"/>
+            <a:off x="7708392" y="1453896"/>
+            <a:ext cx="3282696" cy="228600"/>
           </a:xfrm>
           <a:prstGeom prst="rect">
             <a:avLst/>
@@ -7529,7 +7533,7 @@
               <a:buNone/>
             </a:pPr>
             <a:r>
-              <a:rPr lang="en-US" sz="1300" b="1" dirty="0">
+              <a:rPr lang="en-US" sz="1220" b="1" dirty="0">
                 <a:solidFill>
                   <a:srgbClr val="0068B7"/>
                 </a:solidFill>
@@ -7539,7 +7543,7 @@
               </a:rPr>
               <a:t>Core concept</a:t>
             </a:r>
-            <a:endParaRPr lang="en-US" sz="1300" dirty="0"/>
+            <a:endParaRPr lang="en-US" sz="1220" dirty="0"/>
           </a:p>
         </p:txBody>
       </p:sp>
@@ -7551,8 +7555,8 @@
         </p:nvSpPr>
         <p:spPr>
           <a:xfrm>
-            <a:off x="7799832" y="1801368"/>
-            <a:ext cx="3145536" cy="640080"/>
+            <a:off x="7708392" y="1764792"/>
+            <a:ext cx="3282696" cy="749808"/>
           </a:xfrm>
           <a:prstGeom prst="rect">
             <a:avLst/>
@@ -7570,7 +7574,7 @@
               <a:buNone/>
             </a:pPr>
             <a:r>
-              <a:rPr lang="en-US" sz="1320" dirty="0">
+              <a:rPr lang="en-US" sz="1220" dirty="0">
                 <a:solidFill>
                   <a:srgbClr val="17364A"/>
                 </a:solidFill>
@@ -7580,7 +7584,7 @@
               </a:rPr>
               <a:t>Which workflows currently depend on manual transfer between systems?</a:t>
             </a:r>
-            <a:endParaRPr lang="en-US" sz="1320" dirty="0"/>
+            <a:endParaRPr lang="en-US" sz="1220" dirty="0"/>
           </a:p>
         </p:txBody>
       </p:sp>
@@ -7592,12 +7596,12 @@
         </p:nvSpPr>
         <p:spPr>
           <a:xfrm>
-            <a:off x="7635240" y="2670048"/>
-            <a:ext cx="3474720" cy="1377086"/>
+            <a:off x="7543800" y="2724912"/>
+            <a:ext cx="3611880" cy="1527048"/>
           </a:xfrm>
           <a:prstGeom prst="roundRect">
             <a:avLst>
-              <a:gd name="adj" fmla="val 7968"/>
+              <a:gd name="adj" fmla="val 7186"/>
             </a:avLst>
           </a:prstGeom>
           <a:solidFill>
@@ -7619,8 +7623,8 @@
         </p:nvSpPr>
         <p:spPr>
           <a:xfrm>
-            <a:off x="7799832" y="2816352"/>
-            <a:ext cx="3145536" cy="256032"/>
+            <a:off x="7708392" y="2852928"/>
+            <a:ext cx="3282696" cy="228600"/>
           </a:xfrm>
           <a:prstGeom prst="rect">
             <a:avLst/>
@@ -7636,7 +7640,7 @@
               <a:buNone/>
             </a:pPr>
             <a:r>
-              <a:rPr lang="en-US" sz="1300" b="1" dirty="0">
+              <a:rPr lang="en-US" sz="1220" b="1" dirty="0">
                 <a:solidFill>
                   <a:srgbClr val="0068B7"/>
                 </a:solidFill>
@@ -7646,7 +7650,7 @@
               </a:rPr>
               <a:t>Concept checkpoints</a:t>
             </a:r>
-            <a:endParaRPr lang="en-US" sz="1300" dirty="0"/>
+            <a:endParaRPr lang="en-US" sz="1220" dirty="0"/>
           </a:p>
         </p:txBody>
       </p:sp>
@@ -7658,8 +7662,8 @@
         </p:nvSpPr>
         <p:spPr>
           <a:xfrm>
-            <a:off x="7818120" y="3182112"/>
-            <a:ext cx="3090672" cy="718718"/>
+            <a:off x="7726680" y="3182112"/>
+            <a:ext cx="3227832" cy="960120"/>
           </a:xfrm>
           <a:prstGeom prst="rect">
             <a:avLst/>
@@ -7677,7 +7681,7 @@
               <a:buNone/>
             </a:pPr>
             <a:r>
-              <a:rPr lang="en-US" sz="1220" dirty="0">
+              <a:rPr lang="en-US" sz="1140" dirty="0">
                 <a:solidFill>
                   <a:srgbClr val="17364A"/>
                 </a:solidFill>
@@ -7685,16 +7689,16 @@
                 <a:ea typeface="Aptos" pitchFamily="34" charset="-122"/>
                 <a:cs typeface="Aptos" pitchFamily="34" charset="-120"/>
               </a:rPr>
-              <a:t>Which workflows currently depend on manual transfer between systems?</a:t>
-            </a:r>
-            <a:endParaRPr lang="en-US" sz="1220" dirty="0"/>
-          </a:p>
-          <a:p>
-            <a:pPr indent="0" marL="0">
-              <a:buNone/>
-            </a:pPr>
-            <a:r>
-              <a:rPr lang="en-US" sz="1220" dirty="0">
+              <a:t>Which workflows currently depend on manual.</a:t>
+            </a:r>
+            <a:endParaRPr lang="en-US" sz="1140" dirty="0"/>
+          </a:p>
+          <a:p>
+            <a:pPr indent="0" marL="0">
+              <a:buNone/>
+            </a:pPr>
+            <a:r>
+              <a:rPr lang="en-US" sz="1140" dirty="0">
                 <a:solidFill>
                   <a:srgbClr val="17364A"/>
                 </a:solidFill>
@@ -7704,14 +7708,14 @@
               </a:rPr>
               <a:t>Which systems are the official systems of record?</a:t>
             </a:r>
-            <a:endParaRPr lang="en-US" sz="1220" dirty="0"/>
-          </a:p>
-          <a:p>
-            <a:pPr indent="0" marL="0">
-              <a:buNone/>
-            </a:pPr>
-            <a:r>
-              <a:rPr lang="en-US" sz="1220" dirty="0">
+            <a:endParaRPr lang="en-US" sz="1140" dirty="0"/>
+          </a:p>
+          <a:p>
+            <a:pPr indent="0" marL="0">
+              <a:buNone/>
+            </a:pPr>
+            <a:r>
+              <a:rPr lang="en-US" sz="1140" dirty="0">
                 <a:solidFill>
                   <a:srgbClr val="17364A"/>
                 </a:solidFill>
@@ -7719,9 +7723,9 @@
                 <a:ea typeface="Aptos" pitchFamily="34" charset="-122"/>
                 <a:cs typeface="Aptos" pitchFamily="34" charset="-120"/>
               </a:rPr>
-              <a:t>Where would API access reduce burden without increasing risk?</a:t>
-            </a:r>
-            <a:endParaRPr lang="en-US" sz="1220" dirty="0"/>
+              <a:t>Where would API access reduce burden without.</a:t>
+            </a:r>
+            <a:endParaRPr lang="en-US" sz="1140" dirty="0"/>
           </a:p>
         </p:txBody>
       </p:sp>
@@ -7733,12 +7737,12 @@
         </p:nvSpPr>
         <p:spPr>
           <a:xfrm>
-            <a:off x="7635240" y="4184294"/>
-            <a:ext cx="3474720" cy="1466698"/>
+            <a:off x="7543800" y="4389120"/>
+            <a:ext cx="3611880" cy="1261872"/>
           </a:xfrm>
           <a:prstGeom prst="roundRect">
             <a:avLst>
-              <a:gd name="adj" fmla="val 7481"/>
+              <a:gd name="adj" fmla="val 8696"/>
             </a:avLst>
           </a:prstGeom>
           <a:solidFill>
@@ -7760,8 +7764,8 @@
         </p:nvSpPr>
         <p:spPr>
           <a:xfrm>
-            <a:off x="7799832" y="4330598"/>
-            <a:ext cx="3145536" cy="256032"/>
+            <a:off x="7708392" y="4517136"/>
+            <a:ext cx="3282696" cy="228600"/>
           </a:xfrm>
           <a:prstGeom prst="rect">
             <a:avLst/>
@@ -7777,7 +7781,7 @@
               <a:buNone/>
             </a:pPr>
             <a:r>
-              <a:rPr lang="en-US" sz="1300" b="1" dirty="0">
+              <a:rPr lang="en-US" sz="1220" b="1" dirty="0">
                 <a:solidFill>
                   <a:srgbClr val="0068B7"/>
                 </a:solidFill>
@@ -7787,7 +7791,7 @@
               </a:rPr>
               <a:t>Apply it</a:t>
             </a:r>
-            <a:endParaRPr lang="en-US" sz="1300" dirty="0"/>
+            <a:endParaRPr lang="en-US" sz="1220" dirty="0"/>
           </a:p>
         </p:txBody>
       </p:sp>
@@ -7799,8 +7803,8 @@
         </p:nvSpPr>
         <p:spPr>
           <a:xfrm>
-            <a:off x="7799832" y="4659782"/>
-            <a:ext cx="3145536" cy="899770"/>
+            <a:off x="7708392" y="4828032"/>
+            <a:ext cx="3282696" cy="749808"/>
           </a:xfrm>
           <a:prstGeom prst="rect">
             <a:avLst/>
@@ -7818,7 +7822,7 @@
               <a:buNone/>
             </a:pPr>
             <a:r>
-              <a:rPr lang="en-US" sz="1320" dirty="0">
+              <a:rPr lang="en-US" sz="1220" dirty="0">
                 <a:solidFill>
                   <a:srgbClr val="17364A"/>
                 </a:solidFill>
@@ -7826,9 +7830,9 @@
                 <a:ea typeface="Aptos" pitchFamily="34" charset="-122"/>
                 <a:cs typeface="Aptos" pitchFamily="34" charset="-120"/>
               </a:rPr>
-              <a:t>Connect the concept to public health purpose, responsible use, required safeguards, documentation, and the next action a department should take.</a:t>
-            </a:r>
-            <a:endParaRPr lang="en-US" sz="1320" dirty="0"/>
+              <a:t>Connect the concept to public health purpose, responsible use, required.</a:t>
+            </a:r>
+            <a:endParaRPr lang="en-US" sz="1220" dirty="0"/>
           </a:p>
         </p:txBody>
       </p:sp>
@@ -8119,8 +8123,8 @@
         </p:nvSpPr>
         <p:spPr>
           <a:xfrm>
-            <a:off x="868680" y="1508760"/>
-            <a:ext cx="6309360" cy="4160520"/>
+            <a:off x="822960" y="1463040"/>
+            <a:ext cx="6565392" cy="4343400"/>
           </a:xfrm>
           <a:prstGeom prst="rect">
             <a:avLst/>
@@ -8138,7 +8142,7 @@
               <a:buNone/>
             </a:pPr>
             <a:r>
-              <a:rPr lang="en-US" sz="2100" dirty="0">
+              <a:rPr lang="en-US" sz="1920" dirty="0">
                 <a:solidFill>
                   <a:srgbClr val="003A63"/>
                 </a:solidFill>
@@ -8148,14 +8152,14 @@
               </a:rPr>
               <a:t>• Which actions should remain read-only?</a:t>
             </a:r>
-            <a:endParaRPr lang="en-US" sz="2100" dirty="0"/>
-          </a:p>
-          <a:p>
-            <a:pPr indent="0" marL="0">
-              <a:buNone/>
-            </a:pPr>
-            <a:r>
-              <a:rPr lang="en-US" sz="2100" dirty="0">
+            <a:endParaRPr lang="en-US" sz="1920" dirty="0"/>
+          </a:p>
+          <a:p>
+            <a:pPr indent="0" marL="0">
+              <a:buNone/>
+            </a:pPr>
+            <a:r>
+              <a:rPr lang="en-US" sz="1920" dirty="0">
                 <a:solidFill>
                   <a:srgbClr val="003A63"/>
                 </a:solidFill>
@@ -8165,7 +8169,7 @@
               </a:rPr>
               <a:t>• What logs would be needed to reconstruct an AI-supported action?</a:t>
             </a:r>
-            <a:endParaRPr lang="en-US" sz="2100" dirty="0"/>
+            <a:endParaRPr lang="en-US" sz="1920" dirty="0"/>
           </a:p>
         </p:txBody>
       </p:sp>
@@ -8177,12 +8181,12 @@
         </p:nvSpPr>
         <p:spPr>
           <a:xfrm>
-            <a:off x="7635240" y="1325880"/>
-            <a:ext cx="3474720" cy="1207008"/>
+            <a:off x="7543800" y="1325880"/>
+            <a:ext cx="3611880" cy="1261872"/>
           </a:xfrm>
           <a:prstGeom prst="roundRect">
             <a:avLst>
-              <a:gd name="adj" fmla="val 9091"/>
+              <a:gd name="adj" fmla="val 8696"/>
             </a:avLst>
           </a:prstGeom>
           <a:solidFill>
@@ -8204,8 +8208,8 @@
         </p:nvSpPr>
         <p:spPr>
           <a:xfrm>
-            <a:off x="7799832" y="1472184"/>
-            <a:ext cx="3145536" cy="256032"/>
+            <a:off x="7708392" y="1453896"/>
+            <a:ext cx="3282696" cy="228600"/>
           </a:xfrm>
           <a:prstGeom prst="rect">
             <a:avLst/>
@@ -8221,7 +8225,7 @@
               <a:buNone/>
             </a:pPr>
             <a:r>
-              <a:rPr lang="en-US" sz="1300" b="1" dirty="0">
+              <a:rPr lang="en-US" sz="1220" b="1" dirty="0">
                 <a:solidFill>
                   <a:srgbClr val="0068B7"/>
                 </a:solidFill>
@@ -8231,7 +8235,7 @@
               </a:rPr>
               <a:t>Core concept</a:t>
             </a:r>
-            <a:endParaRPr lang="en-US" sz="1300" dirty="0"/>
+            <a:endParaRPr lang="en-US" sz="1220" dirty="0"/>
           </a:p>
         </p:txBody>
       </p:sp>
@@ -8243,8 +8247,8 @@
         </p:nvSpPr>
         <p:spPr>
           <a:xfrm>
-            <a:off x="7799832" y="1801368"/>
-            <a:ext cx="3145536" cy="640080"/>
+            <a:off x="7708392" y="1764792"/>
+            <a:ext cx="3282696" cy="749808"/>
           </a:xfrm>
           <a:prstGeom prst="rect">
             <a:avLst/>
@@ -8262,7 +8266,7 @@
               <a:buNone/>
             </a:pPr>
             <a:r>
-              <a:rPr lang="en-US" sz="1320" dirty="0">
+              <a:rPr lang="en-US" sz="1220" dirty="0">
                 <a:solidFill>
                   <a:srgbClr val="17364A"/>
                 </a:solidFill>
@@ -8272,7 +8276,7 @@
               </a:rPr>
               <a:t>Which actions should remain read-only?</a:t>
             </a:r>
-            <a:endParaRPr lang="en-US" sz="1320" dirty="0"/>
+            <a:endParaRPr lang="en-US" sz="1220" dirty="0"/>
           </a:p>
         </p:txBody>
       </p:sp>
@@ -8284,12 +8288,12 @@
         </p:nvSpPr>
         <p:spPr>
           <a:xfrm>
-            <a:off x="7635240" y="2670048"/>
-            <a:ext cx="3474720" cy="1377086"/>
+            <a:off x="7543800" y="2724912"/>
+            <a:ext cx="3611880" cy="1527048"/>
           </a:xfrm>
           <a:prstGeom prst="roundRect">
             <a:avLst>
-              <a:gd name="adj" fmla="val 7968"/>
+              <a:gd name="adj" fmla="val 7186"/>
             </a:avLst>
           </a:prstGeom>
           <a:solidFill>
@@ -8311,8 +8315,8 @@
         </p:nvSpPr>
         <p:spPr>
           <a:xfrm>
-            <a:off x="7799832" y="2816352"/>
-            <a:ext cx="3145536" cy="256032"/>
+            <a:off x="7708392" y="2852928"/>
+            <a:ext cx="3282696" cy="228600"/>
           </a:xfrm>
           <a:prstGeom prst="rect">
             <a:avLst/>
@@ -8328,7 +8332,7 @@
               <a:buNone/>
             </a:pPr>
             <a:r>
-              <a:rPr lang="en-US" sz="1300" b="1" dirty="0">
+              <a:rPr lang="en-US" sz="1220" b="1" dirty="0">
                 <a:solidFill>
                   <a:srgbClr val="0068B7"/>
                 </a:solidFill>
@@ -8338,7 +8342,7 @@
               </a:rPr>
               <a:t>Concept checkpoints</a:t>
             </a:r>
-            <a:endParaRPr lang="en-US" sz="1300" dirty="0"/>
+            <a:endParaRPr lang="en-US" sz="1220" dirty="0"/>
           </a:p>
         </p:txBody>
       </p:sp>
@@ -8350,8 +8354,8 @@
         </p:nvSpPr>
         <p:spPr>
           <a:xfrm>
-            <a:off x="7818120" y="3182112"/>
-            <a:ext cx="3090672" cy="718718"/>
+            <a:off x="7726680" y="3182112"/>
+            <a:ext cx="3227832" cy="960120"/>
           </a:xfrm>
           <a:prstGeom prst="rect">
             <a:avLst/>
@@ -8369,7 +8373,7 @@
               <a:buNone/>
             </a:pPr>
             <a:r>
-              <a:rPr lang="en-US" sz="1220" dirty="0">
+              <a:rPr lang="en-US" sz="1140" dirty="0">
                 <a:solidFill>
                   <a:srgbClr val="17364A"/>
                 </a:solidFill>
@@ -8379,14 +8383,14 @@
               </a:rPr>
               <a:t>Which actions should remain read-only?</a:t>
             </a:r>
-            <a:endParaRPr lang="en-US" sz="1220" dirty="0"/>
-          </a:p>
-          <a:p>
-            <a:pPr indent="0" marL="0">
-              <a:buNone/>
-            </a:pPr>
-            <a:r>
-              <a:rPr lang="en-US" sz="1220" dirty="0">
+            <a:endParaRPr lang="en-US" sz="1140" dirty="0"/>
+          </a:p>
+          <a:p>
+            <a:pPr indent="0" marL="0">
+              <a:buNone/>
+            </a:pPr>
+            <a:r>
+              <a:rPr lang="en-US" sz="1140" dirty="0">
                 <a:solidFill>
                   <a:srgbClr val="17364A"/>
                 </a:solidFill>
@@ -8394,9 +8398,9 @@
                 <a:ea typeface="Aptos" pitchFamily="34" charset="-122"/>
                 <a:cs typeface="Aptos" pitchFamily="34" charset="-120"/>
               </a:rPr>
-              <a:t>What logs would be needed to reconstruct an AI-supported action?</a:t>
-            </a:r>
-            <a:endParaRPr lang="en-US" sz="1220" dirty="0"/>
+              <a:t>What logs would be needed to reconstruct an.</a:t>
+            </a:r>
+            <a:endParaRPr lang="en-US" sz="1140" dirty="0"/>
           </a:p>
         </p:txBody>
       </p:sp>
@@ -8408,12 +8412,12 @@
         </p:nvSpPr>
         <p:spPr>
           <a:xfrm>
-            <a:off x="7635240" y="4184294"/>
-            <a:ext cx="3474720" cy="1466698"/>
+            <a:off x="7543800" y="4389120"/>
+            <a:ext cx="3611880" cy="1261872"/>
           </a:xfrm>
           <a:prstGeom prst="roundRect">
             <a:avLst>
-              <a:gd name="adj" fmla="val 7481"/>
+              <a:gd name="adj" fmla="val 8696"/>
             </a:avLst>
           </a:prstGeom>
           <a:solidFill>
@@ -8435,8 +8439,8 @@
         </p:nvSpPr>
         <p:spPr>
           <a:xfrm>
-            <a:off x="7799832" y="4330598"/>
-            <a:ext cx="3145536" cy="256032"/>
+            <a:off x="7708392" y="4517136"/>
+            <a:ext cx="3282696" cy="228600"/>
           </a:xfrm>
           <a:prstGeom prst="rect">
             <a:avLst/>
@@ -8452,7 +8456,7 @@
               <a:buNone/>
             </a:pPr>
             <a:r>
-              <a:rPr lang="en-US" sz="1300" b="1" dirty="0">
+              <a:rPr lang="en-US" sz="1220" b="1" dirty="0">
                 <a:solidFill>
                   <a:srgbClr val="0068B7"/>
                 </a:solidFill>
@@ -8462,7 +8466,7 @@
               </a:rPr>
               <a:t>Apply it</a:t>
             </a:r>
-            <a:endParaRPr lang="en-US" sz="1300" dirty="0"/>
+            <a:endParaRPr lang="en-US" sz="1220" dirty="0"/>
           </a:p>
         </p:txBody>
       </p:sp>
@@ -8474,8 +8478,8 @@
         </p:nvSpPr>
         <p:spPr>
           <a:xfrm>
-            <a:off x="7799832" y="4659782"/>
-            <a:ext cx="3145536" cy="899770"/>
+            <a:off x="7708392" y="4828032"/>
+            <a:ext cx="3282696" cy="749808"/>
           </a:xfrm>
           <a:prstGeom prst="rect">
             <a:avLst/>
@@ -8493,7 +8497,7 @@
               <a:buNone/>
             </a:pPr>
             <a:r>
-              <a:rPr lang="en-US" sz="1320" dirty="0">
+              <a:rPr lang="en-US" sz="1220" dirty="0">
                 <a:solidFill>
                   <a:srgbClr val="17364A"/>
                 </a:solidFill>
@@ -8501,9 +8505,9 @@
                 <a:ea typeface="Aptos" pitchFamily="34" charset="-122"/>
                 <a:cs typeface="Aptos" pitchFamily="34" charset="-120"/>
               </a:rPr>
-              <a:t>Connect the concept to public health purpose, responsible use, required safeguards, documentation, and the next action a department should take.</a:t>
-            </a:r>
-            <a:endParaRPr lang="en-US" sz="1320" dirty="0"/>
+              <a:t>Connect the concept to public health purpose, responsible use, required.</a:t>
+            </a:r>
+            <a:endParaRPr lang="en-US" sz="1220" dirty="0"/>
           </a:p>
         </p:txBody>
       </p:sp>
@@ -8794,8 +8798,8 @@
         </p:nvSpPr>
         <p:spPr>
           <a:xfrm>
-            <a:off x="868680" y="1508760"/>
-            <a:ext cx="6309360" cy="4160520"/>
+            <a:off x="822960" y="1463040"/>
+            <a:ext cx="6565392" cy="4343400"/>
           </a:xfrm>
           <a:prstGeom prst="rect">
             <a:avLst/>
@@ -8813,7 +8817,7 @@
               <a:buNone/>
             </a:pPr>
             <a:r>
-              <a:rPr lang="en-US" sz="2100" dirty="0">
+              <a:rPr lang="en-US" sz="1920" dirty="0">
                 <a:solidFill>
                   <a:srgbClr val="003A63"/>
                 </a:solidFill>
@@ -8823,14 +8827,14 @@
               </a:rPr>
               <a:t>• Create an integration pattern worksheet for one AI-supported workflow.</a:t>
             </a:r>
-            <a:endParaRPr lang="en-US" sz="2100" dirty="0"/>
-          </a:p>
-          <a:p>
-            <a:pPr indent="0" marL="0">
-              <a:buNone/>
-            </a:pPr>
-            <a:r>
-              <a:rPr lang="en-US" sz="2100" dirty="0">
+            <a:endParaRPr lang="en-US" sz="1920" dirty="0"/>
+          </a:p>
+          <a:p>
+            <a:pPr indent="0" marL="0">
+              <a:buNone/>
+            </a:pPr>
+            <a:r>
+              <a:rPr lang="en-US" sz="1920" dirty="0">
                 <a:solidFill>
                   <a:srgbClr val="003A63"/>
                 </a:solidFill>
@@ -8838,9 +8842,9 @@
                 <a:ea typeface="Aptos" pitchFamily="34" charset="-122"/>
                 <a:cs typeface="Aptos" pitchFamily="34" charset="-120"/>
               </a:rPr>
-              <a:t>• Identify the systems involved, the data exchanged, the integration method, whether the AI tool.</a:t>
-            </a:r>
-            <a:endParaRPr lang="en-US" sz="2100" dirty="0"/>
+              <a:t>• Identify the systems involved, the data exchanged, the integration method,.</a:t>
+            </a:r>
+            <a:endParaRPr lang="en-US" sz="1920" dirty="0"/>
           </a:p>
         </p:txBody>
       </p:sp>
@@ -8852,12 +8856,12 @@
         </p:nvSpPr>
         <p:spPr>
           <a:xfrm>
-            <a:off x="7635240" y="1325880"/>
-            <a:ext cx="3474720" cy="1207008"/>
+            <a:off x="7543800" y="1325880"/>
+            <a:ext cx="3611880" cy="1261872"/>
           </a:xfrm>
           <a:prstGeom prst="roundRect">
             <a:avLst>
-              <a:gd name="adj" fmla="val 9091"/>
+              <a:gd name="adj" fmla="val 8696"/>
             </a:avLst>
           </a:prstGeom>
           <a:solidFill>
@@ -8879,8 +8883,8 @@
         </p:nvSpPr>
         <p:spPr>
           <a:xfrm>
-            <a:off x="7799832" y="1472184"/>
-            <a:ext cx="3145536" cy="256032"/>
+            <a:off x="7708392" y="1453896"/>
+            <a:ext cx="3282696" cy="228600"/>
           </a:xfrm>
           <a:prstGeom prst="rect">
             <a:avLst/>
@@ -8896,7 +8900,7 @@
               <a:buNone/>
             </a:pPr>
             <a:r>
-              <a:rPr lang="en-US" sz="1300" b="1" dirty="0">
+              <a:rPr lang="en-US" sz="1220" b="1" dirty="0">
                 <a:solidFill>
                   <a:srgbClr val="0068B7"/>
                 </a:solidFill>
@@ -8906,7 +8910,7 @@
               </a:rPr>
               <a:t>Practice focus</a:t>
             </a:r>
-            <a:endParaRPr lang="en-US" sz="1300" dirty="0"/>
+            <a:endParaRPr lang="en-US" sz="1220" dirty="0"/>
           </a:p>
         </p:txBody>
       </p:sp>
@@ -8918,8 +8922,8 @@
         </p:nvSpPr>
         <p:spPr>
           <a:xfrm>
-            <a:off x="7799832" y="1801368"/>
-            <a:ext cx="3145536" cy="640080"/>
+            <a:off x="7708392" y="1764792"/>
+            <a:ext cx="3282696" cy="749808"/>
           </a:xfrm>
           <a:prstGeom prst="rect">
             <a:avLst/>
@@ -8937,7 +8941,7 @@
               <a:buNone/>
             </a:pPr>
             <a:r>
-              <a:rPr lang="en-US" sz="1320" dirty="0">
+              <a:rPr lang="en-US" sz="1220" dirty="0">
                 <a:solidFill>
                   <a:srgbClr val="17364A"/>
                 </a:solidFill>
@@ -8947,7 +8951,7 @@
               </a:rPr>
               <a:t>Create an integration pattern worksheet for one AI-supported workflow.</a:t>
             </a:r>
-            <a:endParaRPr lang="en-US" sz="1320" dirty="0"/>
+            <a:endParaRPr lang="en-US" sz="1220" dirty="0"/>
           </a:p>
         </p:txBody>
       </p:sp>
@@ -8959,12 +8963,12 @@
         </p:nvSpPr>
         <p:spPr>
           <a:xfrm>
-            <a:off x="7635240" y="2670048"/>
-            <a:ext cx="3474720" cy="1377086"/>
+            <a:off x="7543800" y="2724912"/>
+            <a:ext cx="3611880" cy="1527048"/>
           </a:xfrm>
           <a:prstGeom prst="roundRect">
             <a:avLst>
-              <a:gd name="adj" fmla="val 7968"/>
+              <a:gd name="adj" fmla="val 7186"/>
             </a:avLst>
           </a:prstGeom>
           <a:solidFill>
@@ -8986,8 +8990,8 @@
         </p:nvSpPr>
         <p:spPr>
           <a:xfrm>
-            <a:off x="7799832" y="2816352"/>
-            <a:ext cx="3145536" cy="256032"/>
+            <a:off x="7708392" y="2852928"/>
+            <a:ext cx="3282696" cy="228600"/>
           </a:xfrm>
           <a:prstGeom prst="rect">
             <a:avLst/>
@@ -9003,7 +9007,7 @@
               <a:buNone/>
             </a:pPr>
             <a:r>
-              <a:rPr lang="en-US" sz="1300" b="1" dirty="0">
+              <a:rPr lang="en-US" sz="1220" b="1" dirty="0">
                 <a:solidFill>
                   <a:srgbClr val="0068B7"/>
                 </a:solidFill>
@@ -9013,7 +9017,7 @@
               </a:rPr>
               <a:t>Concept checkpoints</a:t>
             </a:r>
-            <a:endParaRPr lang="en-US" sz="1300" dirty="0"/>
+            <a:endParaRPr lang="en-US" sz="1220" dirty="0"/>
           </a:p>
         </p:txBody>
       </p:sp>
@@ -9025,8 +9029,8 @@
         </p:nvSpPr>
         <p:spPr>
           <a:xfrm>
-            <a:off x="7818120" y="3182112"/>
-            <a:ext cx="3090672" cy="718718"/>
+            <a:off x="7726680" y="3182112"/>
+            <a:ext cx="3227832" cy="960120"/>
           </a:xfrm>
           <a:prstGeom prst="rect">
             <a:avLst/>
@@ -9044,7 +9048,7 @@
               <a:buNone/>
             </a:pPr>
             <a:r>
-              <a:rPr lang="en-US" sz="1220" dirty="0">
+              <a:rPr lang="en-US" sz="1140" dirty="0">
                 <a:solidFill>
                   <a:srgbClr val="17364A"/>
                 </a:solidFill>
@@ -9052,16 +9056,16 @@
                 <a:ea typeface="Aptos" pitchFamily="34" charset="-122"/>
                 <a:cs typeface="Aptos" pitchFamily="34" charset="-120"/>
               </a:rPr>
-              <a:t>Create an integration pattern worksheet for one AI-supported.</a:t>
-            </a:r>
-            <a:endParaRPr lang="en-US" sz="1220" dirty="0"/>
-          </a:p>
-          <a:p>
-            <a:pPr indent="0" marL="0">
-              <a:buNone/>
-            </a:pPr>
-            <a:r>
-              <a:rPr lang="en-US" sz="1220" dirty="0">
+              <a:t>Create an integration pattern worksheet for one.</a:t>
+            </a:r>
+            <a:endParaRPr lang="en-US" sz="1140" dirty="0"/>
+          </a:p>
+          <a:p>
+            <a:pPr indent="0" marL="0">
+              <a:buNone/>
+            </a:pPr>
+            <a:r>
+              <a:rPr lang="en-US" sz="1140" dirty="0">
                 <a:solidFill>
                   <a:srgbClr val="17364A"/>
                 </a:solidFill>
@@ -9069,9 +9073,9 @@
                 <a:ea typeface="Aptos" pitchFamily="34" charset="-122"/>
                 <a:cs typeface="Aptos" pitchFamily="34" charset="-120"/>
               </a:rPr>
-              <a:t>Identify the systems involved, the data exchanged, the integration.</a:t>
-            </a:r>
-            <a:endParaRPr lang="en-US" sz="1220" dirty="0"/>
+              <a:t>Identify the systems involved, the data exchanged,.</a:t>
+            </a:r>
+            <a:endParaRPr lang="en-US" sz="1140" dirty="0"/>
           </a:p>
         </p:txBody>
       </p:sp>
@@ -9083,12 +9087,12 @@
         </p:nvSpPr>
         <p:spPr>
           <a:xfrm>
-            <a:off x="7635240" y="4184294"/>
-            <a:ext cx="3474720" cy="1466698"/>
+            <a:off x="7543800" y="4389120"/>
+            <a:ext cx="3611880" cy="1261872"/>
           </a:xfrm>
           <a:prstGeom prst="roundRect">
             <a:avLst>
-              <a:gd name="adj" fmla="val 7481"/>
+              <a:gd name="adj" fmla="val 8696"/>
             </a:avLst>
           </a:prstGeom>
           <a:solidFill>
@@ -9110,8 +9114,8 @@
         </p:nvSpPr>
         <p:spPr>
           <a:xfrm>
-            <a:off x="7799832" y="4330598"/>
-            <a:ext cx="3145536" cy="256032"/>
+            <a:off x="7708392" y="4517136"/>
+            <a:ext cx="3282696" cy="228600"/>
           </a:xfrm>
           <a:prstGeom prst="rect">
             <a:avLst/>
@@ -9127,7 +9131,7 @@
               <a:buNone/>
             </a:pPr>
             <a:r>
-              <a:rPr lang="en-US" sz="1300" b="1" dirty="0">
+              <a:rPr lang="en-US" sz="1220" b="1" dirty="0">
                 <a:solidFill>
                   <a:srgbClr val="0068B7"/>
                 </a:solidFill>
@@ -9137,7 +9141,7 @@
               </a:rPr>
               <a:t>What to produce</a:t>
             </a:r>
-            <a:endParaRPr lang="en-US" sz="1300" dirty="0"/>
+            <a:endParaRPr lang="en-US" sz="1220" dirty="0"/>
           </a:p>
         </p:txBody>
       </p:sp>
@@ -9149,8 +9153,8 @@
         </p:nvSpPr>
         <p:spPr>
           <a:xfrm>
-            <a:off x="7799832" y="4659782"/>
-            <a:ext cx="3145536" cy="899770"/>
+            <a:off x="7708392" y="4828032"/>
+            <a:ext cx="3282696" cy="749808"/>
           </a:xfrm>
           <a:prstGeom prst="rect">
             <a:avLst/>
@@ -9168,7 +9172,7 @@
               <a:buNone/>
             </a:pPr>
             <a:r>
-              <a:rPr lang="en-US" sz="1320" dirty="0">
+              <a:rPr lang="en-US" sz="1220" dirty="0">
                 <a:solidFill>
                   <a:srgbClr val="17364A"/>
                 </a:solidFill>
@@ -9176,9 +9180,9 @@
                 <a:ea typeface="Aptos" pitchFamily="34" charset="-122"/>
                 <a:cs typeface="Aptos" pitchFamily="34" charset="-120"/>
               </a:rPr>
-              <a:t>Use the assignment to test whether you can explain the concept, apply it to a realistic public health situation, and identify what would need review before the work moves forward.</a:t>
-            </a:r>
-            <a:endParaRPr lang="en-US" sz="1320" dirty="0"/>
+              <a:t>Use the assignment to test whether you can explain the concept, apply it to a.</a:t>
+            </a:r>
+            <a:endParaRPr lang="en-US" sz="1220" dirty="0"/>
           </a:p>
         </p:txBody>
       </p:sp>
@@ -9469,8 +9473,8 @@
         </p:nvSpPr>
         <p:spPr>
           <a:xfrm>
-            <a:off x="868680" y="1508760"/>
-            <a:ext cx="6309360" cy="4160520"/>
+            <a:off x="822960" y="1463040"/>
+            <a:ext cx="6565392" cy="4343400"/>
           </a:xfrm>
           <a:prstGeom prst="rect">
             <a:avLst/>
@@ -9488,7 +9492,7 @@
               <a:buNone/>
             </a:pPr>
             <a:r>
-              <a:rPr lang="en-US" sz="2100" dirty="0">
+              <a:rPr lang="en-US" sz="1920" dirty="0">
                 <a:solidFill>
                   <a:srgbClr val="003A63"/>
                 </a:solidFill>
@@ -9498,14 +9502,14 @@
               </a:rPr>
               <a:t>• Integration pattern worksheet</a:t>
             </a:r>
-            <a:endParaRPr lang="en-US" sz="2100" dirty="0"/>
-          </a:p>
-          <a:p>
-            <a:pPr indent="0" marL="0">
-              <a:buNone/>
-            </a:pPr>
-            <a:r>
-              <a:rPr lang="en-US" sz="2100" dirty="0">
+            <a:endParaRPr lang="en-US" sz="1920" dirty="0"/>
+          </a:p>
+          <a:p>
+            <a:pPr indent="0" marL="0">
+              <a:buNone/>
+            </a:pPr>
+            <a:r>
+              <a:rPr lang="en-US" sz="1920" dirty="0">
                 <a:solidFill>
                   <a:srgbClr val="003A63"/>
                 </a:solidFill>
@@ -9515,14 +9519,14 @@
               </a:rPr>
               <a:t>• System-of-record and source-system list</a:t>
             </a:r>
-            <a:endParaRPr lang="en-US" sz="2100" dirty="0"/>
-          </a:p>
-          <a:p>
-            <a:pPr indent="0" marL="0">
-              <a:buNone/>
-            </a:pPr>
-            <a:r>
-              <a:rPr lang="en-US" sz="2100" dirty="0">
+            <a:endParaRPr lang="en-US" sz="1920" dirty="0"/>
+          </a:p>
+          <a:p>
+            <a:pPr indent="0" marL="0">
+              <a:buNone/>
+            </a:pPr>
+            <a:r>
+              <a:rPr lang="en-US" sz="1920" dirty="0">
                 <a:solidFill>
                   <a:srgbClr val="003A63"/>
                 </a:solidFill>
@@ -9532,7 +9536,7 @@
               </a:rPr>
               <a:t>• Read/write permission recommendation</a:t>
             </a:r>
-            <a:endParaRPr lang="en-US" sz="2100" dirty="0"/>
+            <a:endParaRPr lang="en-US" sz="1920" dirty="0"/>
           </a:p>
         </p:txBody>
       </p:sp>
@@ -9544,12 +9548,12 @@
         </p:nvSpPr>
         <p:spPr>
           <a:xfrm>
-            <a:off x="7635240" y="1325880"/>
-            <a:ext cx="3474720" cy="1207008"/>
+            <a:off x="7543800" y="1325880"/>
+            <a:ext cx="3611880" cy="1261872"/>
           </a:xfrm>
           <a:prstGeom prst="roundRect">
             <a:avLst>
-              <a:gd name="adj" fmla="val 9091"/>
+              <a:gd name="adj" fmla="val 8696"/>
             </a:avLst>
           </a:prstGeom>
           <a:solidFill>
@@ -9571,8 +9575,8 @@
         </p:nvSpPr>
         <p:spPr>
           <a:xfrm>
-            <a:off x="7799832" y="1472184"/>
-            <a:ext cx="3145536" cy="256032"/>
+            <a:off x="7708392" y="1453896"/>
+            <a:ext cx="3282696" cy="228600"/>
           </a:xfrm>
           <a:prstGeom prst="rect">
             <a:avLst/>
@@ -9588,7 +9592,7 @@
               <a:buNone/>
             </a:pPr>
             <a:r>
-              <a:rPr lang="en-US" sz="1300" b="1" dirty="0">
+              <a:rPr lang="en-US" sz="1220" b="1" dirty="0">
                 <a:solidFill>
                   <a:srgbClr val="0068B7"/>
                 </a:solidFill>
@@ -9598,7 +9602,7 @@
               </a:rPr>
               <a:t>Core concept</a:t>
             </a:r>
-            <a:endParaRPr lang="en-US" sz="1300" dirty="0"/>
+            <a:endParaRPr lang="en-US" sz="1220" dirty="0"/>
           </a:p>
         </p:txBody>
       </p:sp>
@@ -9610,8 +9614,8 @@
         </p:nvSpPr>
         <p:spPr>
           <a:xfrm>
-            <a:off x="7799832" y="1801368"/>
-            <a:ext cx="3145536" cy="640080"/>
+            <a:off x="7708392" y="1764792"/>
+            <a:ext cx="3282696" cy="749808"/>
           </a:xfrm>
           <a:prstGeom prst="rect">
             <a:avLst/>
@@ -9629,7 +9633,7 @@
               <a:buNone/>
             </a:pPr>
             <a:r>
-              <a:rPr lang="en-US" sz="1320" dirty="0">
+              <a:rPr lang="en-US" sz="1220" dirty="0">
                 <a:solidFill>
                   <a:srgbClr val="17364A"/>
                 </a:solidFill>
@@ -9639,7 +9643,7 @@
               </a:rPr>
               <a:t>Integration pattern worksheet</a:t>
             </a:r>
-            <a:endParaRPr lang="en-US" sz="1320" dirty="0"/>
+            <a:endParaRPr lang="en-US" sz="1220" dirty="0"/>
           </a:p>
         </p:txBody>
       </p:sp>
@@ -9651,12 +9655,12 @@
         </p:nvSpPr>
         <p:spPr>
           <a:xfrm>
-            <a:off x="7635240" y="2670048"/>
-            <a:ext cx="3474720" cy="1377086"/>
+            <a:off x="7543800" y="2724912"/>
+            <a:ext cx="3611880" cy="1527048"/>
           </a:xfrm>
           <a:prstGeom prst="roundRect">
             <a:avLst>
-              <a:gd name="adj" fmla="val 7968"/>
+              <a:gd name="adj" fmla="val 7186"/>
             </a:avLst>
           </a:prstGeom>
           <a:solidFill>
@@ -9678,8 +9682,8 @@
         </p:nvSpPr>
         <p:spPr>
           <a:xfrm>
-            <a:off x="7799832" y="2816352"/>
-            <a:ext cx="3145536" cy="256032"/>
+            <a:off x="7708392" y="2852928"/>
+            <a:ext cx="3282696" cy="228600"/>
           </a:xfrm>
           <a:prstGeom prst="rect">
             <a:avLst/>
@@ -9695,7 +9699,7 @@
               <a:buNone/>
             </a:pPr>
             <a:r>
-              <a:rPr lang="en-US" sz="1300" b="1" dirty="0">
+              <a:rPr lang="en-US" sz="1220" b="1" dirty="0">
                 <a:solidFill>
                   <a:srgbClr val="0068B7"/>
                 </a:solidFill>
@@ -9705,7 +9709,7 @@
               </a:rPr>
               <a:t>Concept checkpoints</a:t>
             </a:r>
-            <a:endParaRPr lang="en-US" sz="1300" dirty="0"/>
+            <a:endParaRPr lang="en-US" sz="1220" dirty="0"/>
           </a:p>
         </p:txBody>
       </p:sp>
@@ -9717,8 +9721,8 @@
         </p:nvSpPr>
         <p:spPr>
           <a:xfrm>
-            <a:off x="7818120" y="3182112"/>
-            <a:ext cx="3090672" cy="718718"/>
+            <a:off x="7726680" y="3182112"/>
+            <a:ext cx="3227832" cy="960120"/>
           </a:xfrm>
           <a:prstGeom prst="rect">
             <a:avLst/>
@@ -9736,7 +9740,7 @@
               <a:buNone/>
             </a:pPr>
             <a:r>
-              <a:rPr lang="en-US" sz="1220" dirty="0">
+              <a:rPr lang="en-US" sz="1140" dirty="0">
                 <a:solidFill>
                   <a:srgbClr val="17364A"/>
                 </a:solidFill>
@@ -9746,14 +9750,14 @@
               </a:rPr>
               <a:t>Integration pattern worksheet</a:t>
             </a:r>
-            <a:endParaRPr lang="en-US" sz="1220" dirty="0"/>
-          </a:p>
-          <a:p>
-            <a:pPr indent="0" marL="0">
-              <a:buNone/>
-            </a:pPr>
-            <a:r>
-              <a:rPr lang="en-US" sz="1220" dirty="0">
+            <a:endParaRPr lang="en-US" sz="1140" dirty="0"/>
+          </a:p>
+          <a:p>
+            <a:pPr indent="0" marL="0">
+              <a:buNone/>
+            </a:pPr>
+            <a:r>
+              <a:rPr lang="en-US" sz="1140" dirty="0">
                 <a:solidFill>
                   <a:srgbClr val="17364A"/>
                 </a:solidFill>
@@ -9763,14 +9767,14 @@
               </a:rPr>
               <a:t>System-of-record and source-system list</a:t>
             </a:r>
-            <a:endParaRPr lang="en-US" sz="1220" dirty="0"/>
-          </a:p>
-          <a:p>
-            <a:pPr indent="0" marL="0">
-              <a:buNone/>
-            </a:pPr>
-            <a:r>
-              <a:rPr lang="en-US" sz="1220" dirty="0">
+            <a:endParaRPr lang="en-US" sz="1140" dirty="0"/>
+          </a:p>
+          <a:p>
+            <a:pPr indent="0" marL="0">
+              <a:buNone/>
+            </a:pPr>
+            <a:r>
+              <a:rPr lang="en-US" sz="1140" dirty="0">
                 <a:solidFill>
                   <a:srgbClr val="17364A"/>
                 </a:solidFill>
@@ -9780,7 +9784,7 @@
               </a:rPr>
               <a:t>Read/write permission recommendation</a:t>
             </a:r>
-            <a:endParaRPr lang="en-US" sz="1220" dirty="0"/>
+            <a:endParaRPr lang="en-US" sz="1140" dirty="0"/>
           </a:p>
         </p:txBody>
       </p:sp>
@@ -9792,12 +9796,12 @@
         </p:nvSpPr>
         <p:spPr>
           <a:xfrm>
-            <a:off x="7635240" y="4184294"/>
-            <a:ext cx="3474720" cy="1466698"/>
+            <a:off x="7543800" y="4389120"/>
+            <a:ext cx="3611880" cy="1261872"/>
           </a:xfrm>
           <a:prstGeom prst="roundRect">
             <a:avLst>
-              <a:gd name="adj" fmla="val 7481"/>
+              <a:gd name="adj" fmla="val 8696"/>
             </a:avLst>
           </a:prstGeom>
           <a:solidFill>
@@ -9819,8 +9823,8 @@
         </p:nvSpPr>
         <p:spPr>
           <a:xfrm>
-            <a:off x="7799832" y="4330598"/>
-            <a:ext cx="3145536" cy="256032"/>
+            <a:off x="7708392" y="4517136"/>
+            <a:ext cx="3282696" cy="228600"/>
           </a:xfrm>
           <a:prstGeom prst="rect">
             <a:avLst/>
@@ -9836,7 +9840,7 @@
               <a:buNone/>
             </a:pPr>
             <a:r>
-              <a:rPr lang="en-US" sz="1300" b="1" dirty="0">
+              <a:rPr lang="en-US" sz="1220" b="1" dirty="0">
                 <a:solidFill>
                   <a:srgbClr val="0068B7"/>
                 </a:solidFill>
@@ -9846,7 +9850,7 @@
               </a:rPr>
               <a:t>Apply it</a:t>
             </a:r>
-            <a:endParaRPr lang="en-US" sz="1300" dirty="0"/>
+            <a:endParaRPr lang="en-US" sz="1220" dirty="0"/>
           </a:p>
         </p:txBody>
       </p:sp>
@@ -9858,8 +9862,8 @@
         </p:nvSpPr>
         <p:spPr>
           <a:xfrm>
-            <a:off x="7799832" y="4659782"/>
-            <a:ext cx="3145536" cy="899770"/>
+            <a:off x="7708392" y="4828032"/>
+            <a:ext cx="3282696" cy="749808"/>
           </a:xfrm>
           <a:prstGeom prst="rect">
             <a:avLst/>
@@ -9877,7 +9881,7 @@
               <a:buNone/>
             </a:pPr>
             <a:r>
-              <a:rPr lang="en-US" sz="1320" dirty="0">
+              <a:rPr lang="en-US" sz="1220" dirty="0">
                 <a:solidFill>
                   <a:srgbClr val="17364A"/>
                 </a:solidFill>
@@ -9885,9 +9889,9 @@
                 <a:ea typeface="Aptos" pitchFamily="34" charset="-122"/>
                 <a:cs typeface="Aptos" pitchFamily="34" charset="-120"/>
               </a:rPr>
-              <a:t>Connect the concept to public health purpose, responsible use, required safeguards, documentation, and the next action a department should take.</a:t>
-            </a:r>
-            <a:endParaRPr lang="en-US" sz="1320" dirty="0"/>
+              <a:t>Connect the concept to public health purpose, responsible use, required.</a:t>
+            </a:r>
+            <a:endParaRPr lang="en-US" sz="1220" dirty="0"/>
           </a:p>
         </p:txBody>
       </p:sp>
@@ -10178,8 +10182,8 @@
         </p:nvSpPr>
         <p:spPr>
           <a:xfrm>
-            <a:off x="868680" y="1508760"/>
-            <a:ext cx="6309360" cy="4160520"/>
+            <a:off x="822960" y="1463040"/>
+            <a:ext cx="6565392" cy="4343400"/>
           </a:xfrm>
           <a:prstGeom prst="rect">
             <a:avLst/>
@@ -10197,7 +10201,7 @@
               <a:buNone/>
             </a:pPr>
             <a:r>
-              <a:rPr lang="en-US" sz="2100" dirty="0">
+              <a:rPr lang="en-US" sz="1920" dirty="0">
                 <a:solidFill>
                   <a:srgbClr val="003A63"/>
                 </a:solidFill>
@@ -10207,7 +10211,7 @@
               </a:rPr>
               <a:t>• Error handling and audit log requirements</a:t>
             </a:r>
-            <a:endParaRPr lang="en-US" sz="2100" dirty="0"/>
+            <a:endParaRPr lang="en-US" sz="1920" dirty="0"/>
           </a:p>
         </p:txBody>
       </p:sp>
@@ -10219,12 +10223,12 @@
         </p:nvSpPr>
         <p:spPr>
           <a:xfrm>
-            <a:off x="7635240" y="1325880"/>
-            <a:ext cx="3474720" cy="1207008"/>
+            <a:off x="7543800" y="1325880"/>
+            <a:ext cx="3611880" cy="1261872"/>
           </a:xfrm>
           <a:prstGeom prst="roundRect">
             <a:avLst>
-              <a:gd name="adj" fmla="val 9091"/>
+              <a:gd name="adj" fmla="val 8696"/>
             </a:avLst>
           </a:prstGeom>
           <a:solidFill>
@@ -10246,8 +10250,8 @@
         </p:nvSpPr>
         <p:spPr>
           <a:xfrm>
-            <a:off x="7799832" y="1472184"/>
-            <a:ext cx="3145536" cy="256032"/>
+            <a:off x="7708392" y="1453896"/>
+            <a:ext cx="3282696" cy="228600"/>
           </a:xfrm>
           <a:prstGeom prst="rect">
             <a:avLst/>
@@ -10263,7 +10267,7 @@
               <a:buNone/>
             </a:pPr>
             <a:r>
-              <a:rPr lang="en-US" sz="1300" b="1" dirty="0">
+              <a:rPr lang="en-US" sz="1220" b="1" dirty="0">
                 <a:solidFill>
                   <a:srgbClr val="0068B7"/>
                 </a:solidFill>
@@ -10273,7 +10277,7 @@
               </a:rPr>
               <a:t>Core concept</a:t>
             </a:r>
-            <a:endParaRPr lang="en-US" sz="1300" dirty="0"/>
+            <a:endParaRPr lang="en-US" sz="1220" dirty="0"/>
           </a:p>
         </p:txBody>
       </p:sp>
@@ -10285,8 +10289,8 @@
         </p:nvSpPr>
         <p:spPr>
           <a:xfrm>
-            <a:off x="7799832" y="1801368"/>
-            <a:ext cx="3145536" cy="640080"/>
+            <a:off x="7708392" y="1764792"/>
+            <a:ext cx="3282696" cy="749808"/>
           </a:xfrm>
           <a:prstGeom prst="rect">
             <a:avLst/>
@@ -10304,7 +10308,7 @@
               <a:buNone/>
             </a:pPr>
             <a:r>
-              <a:rPr lang="en-US" sz="1320" dirty="0">
+              <a:rPr lang="en-US" sz="1220" dirty="0">
                 <a:solidFill>
                   <a:srgbClr val="17364A"/>
                 </a:solidFill>
@@ -10314,7 +10318,7 @@
               </a:rPr>
               <a:t>Error handling and audit log requirements</a:t>
             </a:r>
-            <a:endParaRPr lang="en-US" sz="1320" dirty="0"/>
+            <a:endParaRPr lang="en-US" sz="1220" dirty="0"/>
           </a:p>
         </p:txBody>
       </p:sp>
@@ -10326,12 +10330,12 @@
         </p:nvSpPr>
         <p:spPr>
           <a:xfrm>
-            <a:off x="7635240" y="2670048"/>
-            <a:ext cx="3474720" cy="1377086"/>
+            <a:off x="7543800" y="2724912"/>
+            <a:ext cx="3611880" cy="1527048"/>
           </a:xfrm>
           <a:prstGeom prst="roundRect">
             <a:avLst>
-              <a:gd name="adj" fmla="val 7968"/>
+              <a:gd name="adj" fmla="val 7186"/>
             </a:avLst>
           </a:prstGeom>
           <a:solidFill>
@@ -10353,8 +10357,8 @@
         </p:nvSpPr>
         <p:spPr>
           <a:xfrm>
-            <a:off x="7799832" y="2816352"/>
-            <a:ext cx="3145536" cy="256032"/>
+            <a:off x="7708392" y="2852928"/>
+            <a:ext cx="3282696" cy="228600"/>
           </a:xfrm>
           <a:prstGeom prst="rect">
             <a:avLst/>
@@ -10370,7 +10374,7 @@
               <a:buNone/>
             </a:pPr>
             <a:r>
-              <a:rPr lang="en-US" sz="1300" b="1" dirty="0">
+              <a:rPr lang="en-US" sz="1220" b="1" dirty="0">
                 <a:solidFill>
                   <a:srgbClr val="0068B7"/>
                 </a:solidFill>
@@ -10380,7 +10384,7 @@
               </a:rPr>
               <a:t>Concept checkpoints</a:t>
             </a:r>
-            <a:endParaRPr lang="en-US" sz="1300" dirty="0"/>
+            <a:endParaRPr lang="en-US" sz="1220" dirty="0"/>
           </a:p>
         </p:txBody>
       </p:sp>
@@ -10392,8 +10396,8 @@
         </p:nvSpPr>
         <p:spPr>
           <a:xfrm>
-            <a:off x="7818120" y="3182112"/>
-            <a:ext cx="3090672" cy="718718"/>
+            <a:off x="7726680" y="3182112"/>
+            <a:ext cx="3227832" cy="960120"/>
           </a:xfrm>
           <a:prstGeom prst="rect">
             <a:avLst/>
@@ -10411,7 +10415,7 @@
               <a:buNone/>
             </a:pPr>
             <a:r>
-              <a:rPr lang="en-US" sz="1220" dirty="0">
+              <a:rPr lang="en-US" sz="1140" dirty="0">
                 <a:solidFill>
                   <a:srgbClr val="17364A"/>
                 </a:solidFill>
@@ -10421,7 +10425,7 @@
               </a:rPr>
               <a:t>Error handling and audit log requirements</a:t>
             </a:r>
-            <a:endParaRPr lang="en-US" sz="1220" dirty="0"/>
+            <a:endParaRPr lang="en-US" sz="1140" dirty="0"/>
           </a:p>
         </p:txBody>
       </p:sp>
@@ -10433,12 +10437,12 @@
         </p:nvSpPr>
         <p:spPr>
           <a:xfrm>
-            <a:off x="7635240" y="4184294"/>
-            <a:ext cx="3474720" cy="1466698"/>
+            <a:off x="7543800" y="4389120"/>
+            <a:ext cx="3611880" cy="1261872"/>
           </a:xfrm>
           <a:prstGeom prst="roundRect">
             <a:avLst>
-              <a:gd name="adj" fmla="val 7481"/>
+              <a:gd name="adj" fmla="val 8696"/>
             </a:avLst>
           </a:prstGeom>
           <a:solidFill>
@@ -10460,8 +10464,8 @@
         </p:nvSpPr>
         <p:spPr>
           <a:xfrm>
-            <a:off x="7799832" y="4330598"/>
-            <a:ext cx="3145536" cy="256032"/>
+            <a:off x="7708392" y="4517136"/>
+            <a:ext cx="3282696" cy="228600"/>
           </a:xfrm>
           <a:prstGeom prst="rect">
             <a:avLst/>
@@ -10477,7 +10481,7 @@
               <a:buNone/>
             </a:pPr>
             <a:r>
-              <a:rPr lang="en-US" sz="1300" b="1" dirty="0">
+              <a:rPr lang="en-US" sz="1220" b="1" dirty="0">
                 <a:solidFill>
                   <a:srgbClr val="0068B7"/>
                 </a:solidFill>
@@ -10487,7 +10491,7 @@
               </a:rPr>
               <a:t>Apply it</a:t>
             </a:r>
-            <a:endParaRPr lang="en-US" sz="1300" dirty="0"/>
+            <a:endParaRPr lang="en-US" sz="1220" dirty="0"/>
           </a:p>
         </p:txBody>
       </p:sp>
@@ -10499,8 +10503,8 @@
         </p:nvSpPr>
         <p:spPr>
           <a:xfrm>
-            <a:off x="7799832" y="4659782"/>
-            <a:ext cx="3145536" cy="899770"/>
+            <a:off x="7708392" y="4828032"/>
+            <a:ext cx="3282696" cy="749808"/>
           </a:xfrm>
           <a:prstGeom prst="rect">
             <a:avLst/>
@@ -10518,7 +10522,7 @@
               <a:buNone/>
             </a:pPr>
             <a:r>
-              <a:rPr lang="en-US" sz="1320" dirty="0">
+              <a:rPr lang="en-US" sz="1220" dirty="0">
                 <a:solidFill>
                   <a:srgbClr val="17364A"/>
                 </a:solidFill>
@@ -10526,9 +10530,9 @@
                 <a:ea typeface="Aptos" pitchFamily="34" charset="-122"/>
                 <a:cs typeface="Aptos" pitchFamily="34" charset="-120"/>
               </a:rPr>
-              <a:t>Connect the concept to public health purpose, responsible use, required safeguards, documentation, and the next action a department should take.</a:t>
-            </a:r>
-            <a:endParaRPr lang="en-US" sz="1320" dirty="0"/>
+              <a:t>Connect the concept to public health purpose, responsible use, required.</a:t>
+            </a:r>
+            <a:endParaRPr lang="en-US" sz="1220" dirty="0"/>
           </a:p>
         </p:txBody>
       </p:sp>
@@ -10863,7 +10867,7 @@
                 <a:ea typeface="Aptos" pitchFamily="34" charset="-122"/>
                 <a:cs typeface="Aptos" pitchFamily="34" charset="-120"/>
               </a:rPr>
-              <a:t>• The value of an AI-supported workflow depends on how well it is integrated with systems of.</a:t>
+              <a:t>• The value of an AI-supported workflow depends on how well it is integrated.</a:t>
             </a:r>
             <a:endParaRPr lang="en-US" sz="2100" dirty="0"/>
           </a:p>
@@ -10880,7 +10884,7 @@
                 <a:ea typeface="Aptos" pitchFamily="34" charset="-122"/>
                 <a:cs typeface="Aptos" pitchFamily="34" charset="-120"/>
               </a:rPr>
-              <a:t>• This module helps learners understand the integration patterns that allow AI to support public.</a:t>
+              <a:t>• This module helps learners understand the integration patterns that allow AI.</a:t>
             </a:r>
             <a:endParaRPr lang="en-US" sz="2100" dirty="0"/>
           </a:p>
@@ -10921,8 +10925,8 @@
         </p:nvSpPr>
         <p:spPr>
           <a:xfrm>
-            <a:off x="8074152" y="1563624"/>
-            <a:ext cx="2825496" cy="256032"/>
+            <a:off x="8074152" y="1545336"/>
+            <a:ext cx="2825496" cy="228600"/>
           </a:xfrm>
           <a:prstGeom prst="rect">
             <a:avLst/>
@@ -10938,7 +10942,7 @@
               <a:buNone/>
             </a:pPr>
             <a:r>
-              <a:rPr lang="en-US" sz="1300" b="1" dirty="0">
+              <a:rPr lang="en-US" sz="1220" b="1" dirty="0">
                 <a:solidFill>
                   <a:srgbClr val="0068B7"/>
                 </a:solidFill>
@@ -10948,7 +10952,7 @@
               </a:rPr>
               <a:t>Module details</a:t>
             </a:r>
-            <a:endParaRPr lang="en-US" sz="1300" dirty="0"/>
+            <a:endParaRPr lang="en-US" sz="1220" dirty="0"/>
           </a:p>
         </p:txBody>
       </p:sp>
@@ -10960,8 +10964,8 @@
         </p:nvSpPr>
         <p:spPr>
           <a:xfrm>
-            <a:off x="8074152" y="1892808"/>
-            <a:ext cx="2825496" cy="1353312"/>
+            <a:off x="8074152" y="1856232"/>
+            <a:ext cx="2825496" cy="1408176"/>
           </a:xfrm>
           <a:prstGeom prst="rect">
             <a:avLst/>
@@ -10979,7 +10983,7 @@
               <a:buNone/>
             </a:pPr>
             <a:r>
-              <a:rPr lang="en-US" sz="1320" dirty="0">
+              <a:rPr lang="en-US" sz="1220" dirty="0">
                 <a:solidFill>
                   <a:srgbClr val="17364A"/>
                 </a:solidFill>
@@ -10987,9 +10991,9 @@
                 <a:ea typeface="Aptos" pitchFamily="34" charset="-122"/>
                 <a:cs typeface="Aptos" pitchFamily="34" charset="-120"/>
               </a:rPr>
-              <a:t>Level: intermediate/practitioner Primary track: Technical Architecture Track Appears in tracks: technical-architecture, operations-data-quality, program-management, governance-security</a:t>
-            </a:r>
-            <a:endParaRPr lang="en-US" sz="1320" dirty="0"/>
+              <a:t>Level: intermediate/practitioner Primary track: Technical Architecture Track.</a:t>
+            </a:r>
+            <a:endParaRPr lang="en-US" sz="1220" dirty="0"/>
           </a:p>
         </p:txBody>
       </p:sp>
@@ -11028,8 +11032,8 @@
         </p:nvSpPr>
         <p:spPr>
           <a:xfrm>
-            <a:off x="8074152" y="3822192"/>
-            <a:ext cx="2825496" cy="256032"/>
+            <a:off x="8074152" y="3803904"/>
+            <a:ext cx="2825496" cy="228600"/>
           </a:xfrm>
           <a:prstGeom prst="rect">
             <a:avLst/>
@@ -11045,7 +11049,7 @@
               <a:buNone/>
             </a:pPr>
             <a:r>
-              <a:rPr lang="en-US" sz="1300" b="1" dirty="0">
+              <a:rPr lang="en-US" sz="1220" b="1" dirty="0">
                 <a:solidFill>
                   <a:srgbClr val="0068B7"/>
                 </a:solidFill>
@@ -11055,7 +11059,7 @@
               </a:rPr>
               <a:t>Learning sequence</a:t>
             </a:r>
-            <a:endParaRPr lang="en-US" sz="1300" dirty="0"/>
+            <a:endParaRPr lang="en-US" sz="1220" dirty="0"/>
           </a:p>
         </p:txBody>
       </p:sp>
@@ -11067,8 +11071,8 @@
         </p:nvSpPr>
         <p:spPr>
           <a:xfrm>
-            <a:off x="8092440" y="4187952"/>
-            <a:ext cx="2770632" cy="1033272"/>
+            <a:off x="8092440" y="4133088"/>
+            <a:ext cx="2770632" cy="1124712"/>
           </a:xfrm>
           <a:prstGeom prst="rect">
             <a:avLst/>
@@ -11086,7 +11090,7 @@
               <a:buNone/>
             </a:pPr>
             <a:r>
-              <a:rPr lang="en-US" sz="1220" dirty="0">
+              <a:rPr lang="en-US" sz="1140" dirty="0">
                 <a:solidFill>
                   <a:srgbClr val="17364A"/>
                 </a:solidFill>
@@ -11096,14 +11100,14 @@
               </a:rPr>
               <a:t>Read the module for shared vocabulary and context.</a:t>
             </a:r>
-            <a:endParaRPr lang="en-US" sz="1220" dirty="0"/>
-          </a:p>
-          <a:p>
-            <a:pPr indent="0" marL="0">
-              <a:buNone/>
-            </a:pPr>
-            <a:r>
-              <a:rPr lang="en-US" sz="1220" dirty="0">
+            <a:endParaRPr lang="en-US" sz="1140" dirty="0"/>
+          </a:p>
+          <a:p>
+            <a:pPr indent="0" marL="0">
+              <a:buNone/>
+            </a:pPr>
+            <a:r>
+              <a:rPr lang="en-US" sz="1140" dirty="0">
                 <a:solidFill>
                   <a:srgbClr val="17364A"/>
                 </a:solidFill>
@@ -11111,16 +11115,16 @@
                 <a:ea typeface="Aptos" pitchFamily="34" charset="-122"/>
                 <a:cs typeface="Aptos" pitchFamily="34" charset="-120"/>
               </a:rPr>
-              <a:t>Complete the practical exercise to apply the concept.</a:t>
-            </a:r>
-            <a:endParaRPr lang="en-US" sz="1220" dirty="0"/>
-          </a:p>
-          <a:p>
-            <a:pPr indent="0" marL="0">
-              <a:buNone/>
-            </a:pPr>
-            <a:r>
-              <a:rPr lang="en-US" sz="1220" dirty="0">
+              <a:t>Complete the practical exercise to apply the.</a:t>
+            </a:r>
+            <a:endParaRPr lang="en-US" sz="1140" dirty="0"/>
+          </a:p>
+          <a:p>
+            <a:pPr indent="0" marL="0">
+              <a:buNone/>
+            </a:pPr>
+            <a:r>
+              <a:rPr lang="en-US" sz="1140" dirty="0">
                 <a:solidFill>
                   <a:srgbClr val="17364A"/>
                 </a:solidFill>
@@ -11130,7 +11134,7 @@
               </a:rPr>
               <a:t>Use the notes and references for deeper review.</a:t>
             </a:r>
-            <a:endParaRPr lang="en-US" sz="1220" dirty="0"/>
+            <a:endParaRPr lang="en-US" sz="1140" dirty="0"/>
           </a:p>
         </p:txBody>
       </p:sp>
@@ -11421,8 +11425,8 @@
         </p:nvSpPr>
         <p:spPr>
           <a:xfrm>
-            <a:off x="868680" y="1508760"/>
-            <a:ext cx="6309360" cy="4160520"/>
+            <a:off x="822960" y="1463040"/>
+            <a:ext cx="6565392" cy="4343400"/>
           </a:xfrm>
           <a:prstGeom prst="rect">
             <a:avLst/>
@@ -11440,7 +11444,7 @@
               <a:buNone/>
             </a:pPr>
             <a:r>
-              <a:rPr lang="en-US" sz="2100" dirty="0">
+              <a:rPr lang="en-US" sz="1920" dirty="0">
                 <a:solidFill>
                   <a:srgbClr val="003A63"/>
                 </a:solidFill>
@@ -11450,14 +11454,14 @@
               </a:rPr>
               <a:t>• Integration pattern worksheet</a:t>
             </a:r>
-            <a:endParaRPr lang="en-US" sz="2100" dirty="0"/>
-          </a:p>
-          <a:p>
-            <a:pPr indent="0" marL="0">
-              <a:buNone/>
-            </a:pPr>
-            <a:r>
-              <a:rPr lang="en-US" sz="2100" dirty="0">
+            <a:endParaRPr lang="en-US" sz="1920" dirty="0"/>
+          </a:p>
+          <a:p>
+            <a:pPr indent="0" marL="0">
+              <a:buNone/>
+            </a:pPr>
+            <a:r>
+              <a:rPr lang="en-US" sz="1920" dirty="0">
                 <a:solidFill>
                   <a:srgbClr val="003A63"/>
                 </a:solidFill>
@@ -11467,14 +11471,14 @@
               </a:rPr>
               <a:t>• System-of-record and source-system list</a:t>
             </a:r>
-            <a:endParaRPr lang="en-US" sz="2100" dirty="0"/>
-          </a:p>
-          <a:p>
-            <a:pPr indent="0" marL="0">
-              <a:buNone/>
-            </a:pPr>
-            <a:r>
-              <a:rPr lang="en-US" sz="2100" dirty="0">
+            <a:endParaRPr lang="en-US" sz="1920" dirty="0"/>
+          </a:p>
+          <a:p>
+            <a:pPr indent="0" marL="0">
+              <a:buNone/>
+            </a:pPr>
+            <a:r>
+              <a:rPr lang="en-US" sz="1920" dirty="0">
                 <a:solidFill>
                   <a:srgbClr val="003A63"/>
                 </a:solidFill>
@@ -11484,7 +11488,7 @@
               </a:rPr>
               <a:t>• Read/write permission recommendation</a:t>
             </a:r>
-            <a:endParaRPr lang="en-US" sz="2100" dirty="0"/>
+            <a:endParaRPr lang="en-US" sz="1920" dirty="0"/>
           </a:p>
         </p:txBody>
       </p:sp>
@@ -11496,12 +11500,12 @@
         </p:nvSpPr>
         <p:spPr>
           <a:xfrm>
-            <a:off x="7635240" y="1325880"/>
-            <a:ext cx="3474720" cy="1207008"/>
+            <a:off x="7543800" y="1325880"/>
+            <a:ext cx="3611880" cy="1261872"/>
           </a:xfrm>
           <a:prstGeom prst="roundRect">
             <a:avLst>
-              <a:gd name="adj" fmla="val 9091"/>
+              <a:gd name="adj" fmla="val 8696"/>
             </a:avLst>
           </a:prstGeom>
           <a:solidFill>
@@ -11523,8 +11527,8 @@
         </p:nvSpPr>
         <p:spPr>
           <a:xfrm>
-            <a:off x="7799832" y="1472184"/>
-            <a:ext cx="3145536" cy="256032"/>
+            <a:off x="7708392" y="1453896"/>
+            <a:ext cx="3282696" cy="228600"/>
           </a:xfrm>
           <a:prstGeom prst="rect">
             <a:avLst/>
@@ -11540,7 +11544,7 @@
               <a:buNone/>
             </a:pPr>
             <a:r>
-              <a:rPr lang="en-US" sz="1300" b="1" dirty="0">
+              <a:rPr lang="en-US" sz="1220" b="1" dirty="0">
                 <a:solidFill>
                   <a:srgbClr val="0068B7"/>
                 </a:solidFill>
@@ -11550,7 +11554,7 @@
               </a:rPr>
               <a:t>Practice focus</a:t>
             </a:r>
-            <a:endParaRPr lang="en-US" sz="1300" dirty="0"/>
+            <a:endParaRPr lang="en-US" sz="1220" dirty="0"/>
           </a:p>
         </p:txBody>
       </p:sp>
@@ -11562,8 +11566,8 @@
         </p:nvSpPr>
         <p:spPr>
           <a:xfrm>
-            <a:off x="7799832" y="1801368"/>
-            <a:ext cx="3145536" cy="640080"/>
+            <a:off x="7708392" y="1764792"/>
+            <a:ext cx="3282696" cy="749808"/>
           </a:xfrm>
           <a:prstGeom prst="rect">
             <a:avLst/>
@@ -11581,7 +11585,7 @@
               <a:buNone/>
             </a:pPr>
             <a:r>
-              <a:rPr lang="en-US" sz="1320" dirty="0">
+              <a:rPr lang="en-US" sz="1220" dirty="0">
                 <a:solidFill>
                   <a:srgbClr val="17364A"/>
                 </a:solidFill>
@@ -11591,7 +11595,7 @@
               </a:rPr>
               <a:t>Integration pattern worksheet</a:t>
             </a:r>
-            <a:endParaRPr lang="en-US" sz="1320" dirty="0"/>
+            <a:endParaRPr lang="en-US" sz="1220" dirty="0"/>
           </a:p>
         </p:txBody>
       </p:sp>
@@ -11603,12 +11607,12 @@
         </p:nvSpPr>
         <p:spPr>
           <a:xfrm>
-            <a:off x="7635240" y="2670048"/>
-            <a:ext cx="3474720" cy="1377086"/>
+            <a:off x="7543800" y="2724912"/>
+            <a:ext cx="3611880" cy="1527048"/>
           </a:xfrm>
           <a:prstGeom prst="roundRect">
             <a:avLst>
-              <a:gd name="adj" fmla="val 7968"/>
+              <a:gd name="adj" fmla="val 7186"/>
             </a:avLst>
           </a:prstGeom>
           <a:solidFill>
@@ -11630,8 +11634,8 @@
         </p:nvSpPr>
         <p:spPr>
           <a:xfrm>
-            <a:off x="7799832" y="2816352"/>
-            <a:ext cx="3145536" cy="256032"/>
+            <a:off x="7708392" y="2852928"/>
+            <a:ext cx="3282696" cy="228600"/>
           </a:xfrm>
           <a:prstGeom prst="rect">
             <a:avLst/>
@@ -11647,7 +11651,7 @@
               <a:buNone/>
             </a:pPr>
             <a:r>
-              <a:rPr lang="en-US" sz="1300" b="1" dirty="0">
+              <a:rPr lang="en-US" sz="1220" b="1" dirty="0">
                 <a:solidFill>
                   <a:srgbClr val="0068B7"/>
                 </a:solidFill>
@@ -11657,7 +11661,7 @@
               </a:rPr>
               <a:t>Concept checkpoints</a:t>
             </a:r>
-            <a:endParaRPr lang="en-US" sz="1300" dirty="0"/>
+            <a:endParaRPr lang="en-US" sz="1220" dirty="0"/>
           </a:p>
         </p:txBody>
       </p:sp>
@@ -11669,8 +11673,8 @@
         </p:nvSpPr>
         <p:spPr>
           <a:xfrm>
-            <a:off x="7818120" y="3182112"/>
-            <a:ext cx="3090672" cy="718718"/>
+            <a:off x="7726680" y="3182112"/>
+            <a:ext cx="3227832" cy="960120"/>
           </a:xfrm>
           <a:prstGeom prst="rect">
             <a:avLst/>
@@ -11688,7 +11692,7 @@
               <a:buNone/>
             </a:pPr>
             <a:r>
-              <a:rPr lang="en-US" sz="1220" dirty="0">
+              <a:rPr lang="en-US" sz="1140" dirty="0">
                 <a:solidFill>
                   <a:srgbClr val="17364A"/>
                 </a:solidFill>
@@ -11698,14 +11702,14 @@
               </a:rPr>
               <a:t>Integration pattern worksheet</a:t>
             </a:r>
-            <a:endParaRPr lang="en-US" sz="1220" dirty="0"/>
-          </a:p>
-          <a:p>
-            <a:pPr indent="0" marL="0">
-              <a:buNone/>
-            </a:pPr>
-            <a:r>
-              <a:rPr lang="en-US" sz="1220" dirty="0">
+            <a:endParaRPr lang="en-US" sz="1140" dirty="0"/>
+          </a:p>
+          <a:p>
+            <a:pPr indent="0" marL="0">
+              <a:buNone/>
+            </a:pPr>
+            <a:r>
+              <a:rPr lang="en-US" sz="1140" dirty="0">
                 <a:solidFill>
                   <a:srgbClr val="17364A"/>
                 </a:solidFill>
@@ -11715,14 +11719,14 @@
               </a:rPr>
               <a:t>System-of-record and source-system list</a:t>
             </a:r>
-            <a:endParaRPr lang="en-US" sz="1220" dirty="0"/>
-          </a:p>
-          <a:p>
-            <a:pPr indent="0" marL="0">
-              <a:buNone/>
-            </a:pPr>
-            <a:r>
-              <a:rPr lang="en-US" sz="1220" dirty="0">
+            <a:endParaRPr lang="en-US" sz="1140" dirty="0"/>
+          </a:p>
+          <a:p>
+            <a:pPr indent="0" marL="0">
+              <a:buNone/>
+            </a:pPr>
+            <a:r>
+              <a:rPr lang="en-US" sz="1140" dirty="0">
                 <a:solidFill>
                   <a:srgbClr val="17364A"/>
                 </a:solidFill>
@@ -11732,7 +11736,7 @@
               </a:rPr>
               <a:t>Read/write permission recommendation</a:t>
             </a:r>
-            <a:endParaRPr lang="en-US" sz="1220" dirty="0"/>
+            <a:endParaRPr lang="en-US" sz="1140" dirty="0"/>
           </a:p>
         </p:txBody>
       </p:sp>
@@ -11744,12 +11748,12 @@
         </p:nvSpPr>
         <p:spPr>
           <a:xfrm>
-            <a:off x="7635240" y="4184294"/>
-            <a:ext cx="3474720" cy="1466698"/>
+            <a:off x="7543800" y="4389120"/>
+            <a:ext cx="3611880" cy="1261872"/>
           </a:xfrm>
           <a:prstGeom prst="roundRect">
             <a:avLst>
-              <a:gd name="adj" fmla="val 7481"/>
+              <a:gd name="adj" fmla="val 8696"/>
             </a:avLst>
           </a:prstGeom>
           <a:solidFill>
@@ -11771,8 +11775,8 @@
         </p:nvSpPr>
         <p:spPr>
           <a:xfrm>
-            <a:off x="7799832" y="4330598"/>
-            <a:ext cx="3145536" cy="256032"/>
+            <a:off x="7708392" y="4517136"/>
+            <a:ext cx="3282696" cy="228600"/>
           </a:xfrm>
           <a:prstGeom prst="rect">
             <a:avLst/>
@@ -11788,7 +11792,7 @@
               <a:buNone/>
             </a:pPr>
             <a:r>
-              <a:rPr lang="en-US" sz="1300" b="1" dirty="0">
+              <a:rPr lang="en-US" sz="1220" b="1" dirty="0">
                 <a:solidFill>
                   <a:srgbClr val="0068B7"/>
                 </a:solidFill>
@@ -11798,7 +11802,7 @@
               </a:rPr>
               <a:t>What to produce</a:t>
             </a:r>
-            <a:endParaRPr lang="en-US" sz="1300" dirty="0"/>
+            <a:endParaRPr lang="en-US" sz="1220" dirty="0"/>
           </a:p>
         </p:txBody>
       </p:sp>
@@ -11810,8 +11814,8 @@
         </p:nvSpPr>
         <p:spPr>
           <a:xfrm>
-            <a:off x="7799832" y="4659782"/>
-            <a:ext cx="3145536" cy="899770"/>
+            <a:off x="7708392" y="4828032"/>
+            <a:ext cx="3282696" cy="749808"/>
           </a:xfrm>
           <a:prstGeom prst="rect">
             <a:avLst/>
@@ -11829,7 +11833,7 @@
               <a:buNone/>
             </a:pPr>
             <a:r>
-              <a:rPr lang="en-US" sz="1320" dirty="0">
+              <a:rPr lang="en-US" sz="1220" dirty="0">
                 <a:solidFill>
                   <a:srgbClr val="17364A"/>
                 </a:solidFill>
@@ -11837,9 +11841,9 @@
                 <a:ea typeface="Aptos" pitchFamily="34" charset="-122"/>
                 <a:cs typeface="Aptos" pitchFamily="34" charset="-120"/>
               </a:rPr>
-              <a:t>Use the assignment to test whether you can explain the concept, apply it to a realistic public health situation, and identify what would need review before the work moves forward.</a:t>
-            </a:r>
-            <a:endParaRPr lang="en-US" sz="1320" dirty="0"/>
+              <a:t>Use the assignment to test whether you can explain the concept, apply it to a.</a:t>
+            </a:r>
+            <a:endParaRPr lang="en-US" sz="1220" dirty="0"/>
           </a:p>
         </p:txBody>
       </p:sp>
@@ -12130,8 +12134,8 @@
         </p:nvSpPr>
         <p:spPr>
           <a:xfrm>
-            <a:off x="868680" y="1508760"/>
-            <a:ext cx="6309360" cy="4160520"/>
+            <a:off x="822960" y="1463040"/>
+            <a:ext cx="6565392" cy="4343400"/>
           </a:xfrm>
           <a:prstGeom prst="rect">
             <a:avLst/>
@@ -12149,7 +12153,7 @@
               <a:buNone/>
             </a:pPr>
             <a:r>
-              <a:rPr lang="en-US" sz="2100" dirty="0">
+              <a:rPr lang="en-US" sz="1920" dirty="0">
                 <a:solidFill>
                   <a:srgbClr val="003A63"/>
                 </a:solidFill>
@@ -12157,16 +12161,16 @@
                 <a:ea typeface="Aptos" pitchFamily="34" charset="-122"/>
                 <a:cs typeface="Aptos" pitchFamily="34" charset="-120"/>
               </a:rPr>
-              <a:t>• 1. Which integration risk is most concerning for an AI tool that can update a case record?</a:t>
-            </a:r>
-            <a:endParaRPr lang="en-US" sz="2100" dirty="0"/>
-          </a:p>
-          <a:p>
-            <a:pPr indent="0" marL="0">
-              <a:buNone/>
-            </a:pPr>
-            <a:r>
-              <a:rPr lang="en-US" sz="2100" dirty="0">
+              <a:t>• 1. Which integration risk is most concerning for an AI tool that can update.</a:t>
+            </a:r>
+            <a:endParaRPr lang="en-US" sz="1920" dirty="0"/>
+          </a:p>
+          <a:p>
+            <a:pPr indent="0" marL="0">
+              <a:buNone/>
+            </a:pPr>
+            <a:r>
+              <a:rPr lang="en-US" sz="1920" dirty="0">
                 <a:solidFill>
                   <a:srgbClr val="003A63"/>
                 </a:solidFill>
@@ -12176,14 +12180,14 @@
               </a:rPr>
               <a:t>• 2. What is the best reason to assign an accountability owner?</a:t>
             </a:r>
-            <a:endParaRPr lang="en-US" sz="2100" dirty="0"/>
-          </a:p>
-          <a:p>
-            <a:pPr indent="0" marL="0">
-              <a:buNone/>
-            </a:pPr>
-            <a:r>
-              <a:rPr lang="en-US" sz="2100" dirty="0">
+            <a:endParaRPr lang="en-US" sz="1920" dirty="0"/>
+          </a:p>
+          <a:p>
+            <a:pPr indent="0" marL="0">
+              <a:buNone/>
+            </a:pPr>
+            <a:r>
+              <a:rPr lang="en-US" sz="1920" dirty="0">
                 <a:solidFill>
                   <a:srgbClr val="003A63"/>
                 </a:solidFill>
@@ -12193,7 +12197,7 @@
               </a:rPr>
               <a:t>• 3. When should an AI-supported workflow be escalated for review?</a:t>
             </a:r>
-            <a:endParaRPr lang="en-US" sz="2100" dirty="0"/>
+            <a:endParaRPr lang="en-US" sz="1920" dirty="0"/>
           </a:p>
         </p:txBody>
       </p:sp>
@@ -12205,12 +12209,12 @@
         </p:nvSpPr>
         <p:spPr>
           <a:xfrm>
-            <a:off x="7635240" y="1325880"/>
-            <a:ext cx="3474720" cy="1207008"/>
+            <a:off x="7543800" y="1325880"/>
+            <a:ext cx="3611880" cy="1261872"/>
           </a:xfrm>
           <a:prstGeom prst="roundRect">
             <a:avLst>
-              <a:gd name="adj" fmla="val 9091"/>
+              <a:gd name="adj" fmla="val 8696"/>
             </a:avLst>
           </a:prstGeom>
           <a:solidFill>
@@ -12232,8 +12236,8 @@
         </p:nvSpPr>
         <p:spPr>
           <a:xfrm>
-            <a:off x="7799832" y="1472184"/>
-            <a:ext cx="3145536" cy="256032"/>
+            <a:off x="7708392" y="1453896"/>
+            <a:ext cx="3282696" cy="228600"/>
           </a:xfrm>
           <a:prstGeom prst="rect">
             <a:avLst/>
@@ -12249,7 +12253,7 @@
               <a:buNone/>
             </a:pPr>
             <a:r>
-              <a:rPr lang="en-US" sz="1300" b="1" dirty="0">
+              <a:rPr lang="en-US" sz="1220" b="1" dirty="0">
                 <a:solidFill>
                   <a:srgbClr val="0068B7"/>
                 </a:solidFill>
@@ -12259,7 +12263,7 @@
               </a:rPr>
               <a:t>Practice focus</a:t>
             </a:r>
-            <a:endParaRPr lang="en-US" sz="1300" dirty="0"/>
+            <a:endParaRPr lang="en-US" sz="1220" dirty="0"/>
           </a:p>
         </p:txBody>
       </p:sp>
@@ -12271,8 +12275,8 @@
         </p:nvSpPr>
         <p:spPr>
           <a:xfrm>
-            <a:off x="7799832" y="1801368"/>
-            <a:ext cx="3145536" cy="640080"/>
+            <a:off x="7708392" y="1764792"/>
+            <a:ext cx="3282696" cy="749808"/>
           </a:xfrm>
           <a:prstGeom prst="rect">
             <a:avLst/>
@@ -12290,7 +12294,7 @@
               <a:buNone/>
             </a:pPr>
             <a:r>
-              <a:rPr lang="en-US" sz="1320" dirty="0">
+              <a:rPr lang="en-US" sz="1220" dirty="0">
                 <a:solidFill>
                   <a:srgbClr val="17364A"/>
                 </a:solidFill>
@@ -12298,9 +12302,9 @@
                 <a:ea typeface="Aptos" pitchFamily="34" charset="-122"/>
                 <a:cs typeface="Aptos" pitchFamily="34" charset="-120"/>
               </a:rPr>
-              <a:t>1. Which integration risk is most concerning for an AI tool that can update a case.</a:t>
-            </a:r>
-            <a:endParaRPr lang="en-US" sz="1320" dirty="0"/>
+              <a:t>1. Which integration risk is most concerning for an AI tool that can update a.</a:t>
+            </a:r>
+            <a:endParaRPr lang="en-US" sz="1220" dirty="0"/>
           </a:p>
         </p:txBody>
       </p:sp>
@@ -12312,12 +12316,12 @@
         </p:nvSpPr>
         <p:spPr>
           <a:xfrm>
-            <a:off x="7635240" y="2670048"/>
-            <a:ext cx="3474720" cy="1377086"/>
+            <a:off x="7543800" y="2724912"/>
+            <a:ext cx="3611880" cy="1527048"/>
           </a:xfrm>
           <a:prstGeom prst="roundRect">
             <a:avLst>
-              <a:gd name="adj" fmla="val 7968"/>
+              <a:gd name="adj" fmla="val 7186"/>
             </a:avLst>
           </a:prstGeom>
           <a:solidFill>
@@ -12339,8 +12343,8 @@
         </p:nvSpPr>
         <p:spPr>
           <a:xfrm>
-            <a:off x="7799832" y="2816352"/>
-            <a:ext cx="3145536" cy="256032"/>
+            <a:off x="7708392" y="2852928"/>
+            <a:ext cx="3282696" cy="228600"/>
           </a:xfrm>
           <a:prstGeom prst="rect">
             <a:avLst/>
@@ -12356,7 +12360,7 @@
               <a:buNone/>
             </a:pPr>
             <a:r>
-              <a:rPr lang="en-US" sz="1300" b="1" dirty="0">
+              <a:rPr lang="en-US" sz="1220" b="1" dirty="0">
                 <a:solidFill>
                   <a:srgbClr val="0068B7"/>
                 </a:solidFill>
@@ -12366,7 +12370,7 @@
               </a:rPr>
               <a:t>Concept checkpoints</a:t>
             </a:r>
-            <a:endParaRPr lang="en-US" sz="1300" dirty="0"/>
+            <a:endParaRPr lang="en-US" sz="1220" dirty="0"/>
           </a:p>
         </p:txBody>
       </p:sp>
@@ -12378,8 +12382,8 @@
         </p:nvSpPr>
         <p:spPr>
           <a:xfrm>
-            <a:off x="7818120" y="3182112"/>
-            <a:ext cx="3090672" cy="718718"/>
+            <a:off x="7726680" y="3182112"/>
+            <a:ext cx="3227832" cy="960120"/>
           </a:xfrm>
           <a:prstGeom prst="rect">
             <a:avLst/>
@@ -12397,7 +12401,7 @@
               <a:buNone/>
             </a:pPr>
             <a:r>
-              <a:rPr lang="en-US" sz="1220" dirty="0">
+              <a:rPr lang="en-US" sz="1140" dirty="0">
                 <a:solidFill>
                   <a:srgbClr val="17364A"/>
                 </a:solidFill>
@@ -12407,14 +12411,14 @@
               </a:rPr>
               <a:t>1.</a:t>
             </a:r>
-            <a:endParaRPr lang="en-US" sz="1220" dirty="0"/>
-          </a:p>
-          <a:p>
-            <a:pPr indent="0" marL="0">
-              <a:buNone/>
-            </a:pPr>
-            <a:r>
-              <a:rPr lang="en-US" sz="1220" dirty="0">
+            <a:endParaRPr lang="en-US" sz="1140" dirty="0"/>
+          </a:p>
+          <a:p>
+            <a:pPr indent="0" marL="0">
+              <a:buNone/>
+            </a:pPr>
+            <a:r>
+              <a:rPr lang="en-US" sz="1140" dirty="0">
                 <a:solidFill>
                   <a:srgbClr val="17364A"/>
                 </a:solidFill>
@@ -12422,16 +12426,16 @@
                 <a:ea typeface="Aptos" pitchFamily="34" charset="-122"/>
                 <a:cs typeface="Aptos" pitchFamily="34" charset="-120"/>
               </a:rPr>
-              <a:t>Which integration risk is most concerning for an AI tool that can.</a:t>
-            </a:r>
-            <a:endParaRPr lang="en-US" sz="1220" dirty="0"/>
-          </a:p>
-          <a:p>
-            <a:pPr indent="0" marL="0">
-              <a:buNone/>
-            </a:pPr>
-            <a:r>
-              <a:rPr lang="en-US" sz="1220" dirty="0">
+              <a:t>Which integration risk is most concerning for an.</a:t>
+            </a:r>
+            <a:endParaRPr lang="en-US" sz="1140" dirty="0"/>
+          </a:p>
+          <a:p>
+            <a:pPr indent="0" marL="0">
+              <a:buNone/>
+            </a:pPr>
+            <a:r>
+              <a:rPr lang="en-US" sz="1140" dirty="0">
                 <a:solidFill>
                   <a:srgbClr val="17364A"/>
                 </a:solidFill>
@@ -12441,7 +12445,7 @@
               </a:rPr>
               <a:t>2.</a:t>
             </a:r>
-            <a:endParaRPr lang="en-US" sz="1220" dirty="0"/>
+            <a:endParaRPr lang="en-US" sz="1140" dirty="0"/>
           </a:p>
         </p:txBody>
       </p:sp>
@@ -12453,12 +12457,12 @@
         </p:nvSpPr>
         <p:spPr>
           <a:xfrm>
-            <a:off x="7635240" y="4184294"/>
-            <a:ext cx="3474720" cy="1466698"/>
+            <a:off x="7543800" y="4389120"/>
+            <a:ext cx="3611880" cy="1261872"/>
           </a:xfrm>
           <a:prstGeom prst="roundRect">
             <a:avLst>
-              <a:gd name="adj" fmla="val 7481"/>
+              <a:gd name="adj" fmla="val 8696"/>
             </a:avLst>
           </a:prstGeom>
           <a:solidFill>
@@ -12480,8 +12484,8 @@
         </p:nvSpPr>
         <p:spPr>
           <a:xfrm>
-            <a:off x="7799832" y="4330598"/>
-            <a:ext cx="3145536" cy="256032"/>
+            <a:off x="7708392" y="4517136"/>
+            <a:ext cx="3282696" cy="228600"/>
           </a:xfrm>
           <a:prstGeom prst="rect">
             <a:avLst/>
@@ -12497,7 +12501,7 @@
               <a:buNone/>
             </a:pPr>
             <a:r>
-              <a:rPr lang="en-US" sz="1300" b="1" dirty="0">
+              <a:rPr lang="en-US" sz="1220" b="1" dirty="0">
                 <a:solidFill>
                   <a:srgbClr val="0068B7"/>
                 </a:solidFill>
@@ -12507,7 +12511,7 @@
               </a:rPr>
               <a:t>What to produce</a:t>
             </a:r>
-            <a:endParaRPr lang="en-US" sz="1300" dirty="0"/>
+            <a:endParaRPr lang="en-US" sz="1220" dirty="0"/>
           </a:p>
         </p:txBody>
       </p:sp>
@@ -12519,8 +12523,8 @@
         </p:nvSpPr>
         <p:spPr>
           <a:xfrm>
-            <a:off x="7799832" y="4659782"/>
-            <a:ext cx="3145536" cy="899770"/>
+            <a:off x="7708392" y="4828032"/>
+            <a:ext cx="3282696" cy="749808"/>
           </a:xfrm>
           <a:prstGeom prst="rect">
             <a:avLst/>
@@ -12538,7 +12542,7 @@
               <a:buNone/>
             </a:pPr>
             <a:r>
-              <a:rPr lang="en-US" sz="1320" dirty="0">
+              <a:rPr lang="en-US" sz="1220" dirty="0">
                 <a:solidFill>
                   <a:srgbClr val="17364A"/>
                 </a:solidFill>
@@ -12546,9 +12550,9 @@
                 <a:ea typeface="Aptos" pitchFamily="34" charset="-122"/>
                 <a:cs typeface="Aptos" pitchFamily="34" charset="-120"/>
               </a:rPr>
-              <a:t>Use the assignment to test whether you can explain the concept, apply it to a realistic public health situation, and identify what would need review before the work moves forward.</a:t>
-            </a:r>
-            <a:endParaRPr lang="en-US" sz="1320" dirty="0"/>
+              <a:t>Use the assignment to test whether you can explain the concept, apply it to a.</a:t>
+            </a:r>
+            <a:endParaRPr lang="en-US" sz="1220" dirty="0"/>
           </a:p>
         </p:txBody>
       </p:sp>
@@ -12839,8 +12843,8 @@
         </p:nvSpPr>
         <p:spPr>
           <a:xfrm>
-            <a:off x="868680" y="1508760"/>
-            <a:ext cx="6309360" cy="4160520"/>
+            <a:off x="822960" y="1463040"/>
+            <a:ext cx="6565392" cy="4343400"/>
           </a:xfrm>
           <a:prstGeom prst="rect">
             <a:avLst/>
@@ -12858,7 +12862,7 @@
               <a:buNone/>
             </a:pPr>
             <a:r>
-              <a:rPr lang="en-US" sz="2100" dirty="0">
+              <a:rPr lang="en-US" sz="1920" dirty="0">
                 <a:solidFill>
                   <a:srgbClr val="003A63"/>
                 </a:solidFill>
@@ -12868,14 +12872,14 @@
               </a:rPr>
               <a:t>• CDC Public Health Data Strategy and Data Modernization resources:.</a:t>
             </a:r>
-            <a:endParaRPr lang="en-US" sz="2100" dirty="0"/>
-          </a:p>
-          <a:p>
-            <a:pPr indent="0" marL="0">
-              <a:buNone/>
-            </a:pPr>
-            <a:r>
-              <a:rPr lang="en-US" sz="2100" dirty="0">
+            <a:endParaRPr lang="en-US" sz="1920" dirty="0"/>
+          </a:p>
+          <a:p>
+            <a:pPr indent="0" marL="0">
+              <a:buNone/>
+            </a:pPr>
+            <a:r>
+              <a:rPr lang="en-US" sz="1920" dirty="0">
                 <a:solidFill>
                   <a:srgbClr val="003A63"/>
                 </a:solidFill>
@@ -12883,16 +12887,16 @@
                 <a:ea typeface="Aptos" pitchFamily="34" charset="-122"/>
                 <a:cs typeface="Aptos" pitchFamily="34" charset="-120"/>
               </a:rPr>
-              <a:t>• NIST Artificial Intelligence Risk Management Framework and NIST Generative AI Profile:.</a:t>
-            </a:r>
-            <a:endParaRPr lang="en-US" sz="2100" dirty="0"/>
-          </a:p>
-          <a:p>
-            <a:pPr indent="0" marL="0">
-              <a:buNone/>
-            </a:pPr>
-            <a:r>
-              <a:rPr lang="en-US" sz="2100" dirty="0">
+              <a:t>• NIST Artificial Intelligence Risk Management Framework and NIST Generative.</a:t>
+            </a:r>
+            <a:endParaRPr lang="en-US" sz="1920" dirty="0"/>
+          </a:p>
+          <a:p>
+            <a:pPr indent="0" marL="0">
+              <a:buNone/>
+            </a:pPr>
+            <a:r>
+              <a:rPr lang="en-US" sz="1920" dirty="0">
                 <a:solidFill>
                   <a:srgbClr val="003A63"/>
                 </a:solidFill>
@@ -12902,7 +12906,7 @@
               </a:rPr>
               <a:t>• WHO Ethics and Governance of Artificial Intelligence for Health guidance:.</a:t>
             </a:r>
-            <a:endParaRPr lang="en-US" sz="2100" dirty="0"/>
+            <a:endParaRPr lang="en-US" sz="1920" dirty="0"/>
           </a:p>
         </p:txBody>
       </p:sp>
@@ -12914,12 +12918,12 @@
         </p:nvSpPr>
         <p:spPr>
           <a:xfrm>
-            <a:off x="7635240" y="1325880"/>
-            <a:ext cx="3474720" cy="1207008"/>
+            <a:off x="7543800" y="1325880"/>
+            <a:ext cx="3611880" cy="1261872"/>
           </a:xfrm>
           <a:prstGeom prst="roundRect">
             <a:avLst>
-              <a:gd name="adj" fmla="val 9091"/>
+              <a:gd name="adj" fmla="val 8696"/>
             </a:avLst>
           </a:prstGeom>
           <a:solidFill>
@@ -12941,8 +12945,8 @@
         </p:nvSpPr>
         <p:spPr>
           <a:xfrm>
-            <a:off x="7799832" y="1472184"/>
-            <a:ext cx="3145536" cy="256032"/>
+            <a:off x="7708392" y="1453896"/>
+            <a:ext cx="3282696" cy="228600"/>
           </a:xfrm>
           <a:prstGeom prst="rect">
             <a:avLst/>
@@ -12958,7 +12962,7 @@
               <a:buNone/>
             </a:pPr>
             <a:r>
-              <a:rPr lang="en-US" sz="1300" b="1" dirty="0">
+              <a:rPr lang="en-US" sz="1220" b="1" dirty="0">
                 <a:solidFill>
                   <a:srgbClr val="0068B7"/>
                 </a:solidFill>
@@ -12968,7 +12972,7 @@
               </a:rPr>
               <a:t>Core concept</a:t>
             </a:r>
-            <a:endParaRPr lang="en-US" sz="1300" dirty="0"/>
+            <a:endParaRPr lang="en-US" sz="1220" dirty="0"/>
           </a:p>
         </p:txBody>
       </p:sp>
@@ -12980,8 +12984,8 @@
         </p:nvSpPr>
         <p:spPr>
           <a:xfrm>
-            <a:off x="7799832" y="1801368"/>
-            <a:ext cx="3145536" cy="640080"/>
+            <a:off x="7708392" y="1764792"/>
+            <a:ext cx="3282696" cy="749808"/>
           </a:xfrm>
           <a:prstGeom prst="rect">
             <a:avLst/>
@@ -12999,7 +13003,7 @@
               <a:buNone/>
             </a:pPr>
             <a:r>
-              <a:rPr lang="en-US" sz="1320" dirty="0">
+              <a:rPr lang="en-US" sz="1220" dirty="0">
                 <a:solidFill>
                   <a:srgbClr val="17364A"/>
                 </a:solidFill>
@@ -13009,7 +13013,7 @@
               </a:rPr>
               <a:t>CDC Public Health Data Strategy and Data Modernization resources:.</a:t>
             </a:r>
-            <a:endParaRPr lang="en-US" sz="1320" dirty="0"/>
+            <a:endParaRPr lang="en-US" sz="1220" dirty="0"/>
           </a:p>
         </p:txBody>
       </p:sp>
@@ -13021,12 +13025,12 @@
         </p:nvSpPr>
         <p:spPr>
           <a:xfrm>
-            <a:off x="7635240" y="2670048"/>
-            <a:ext cx="3474720" cy="1377086"/>
+            <a:off x="7543800" y="2724912"/>
+            <a:ext cx="3611880" cy="1527048"/>
           </a:xfrm>
           <a:prstGeom prst="roundRect">
             <a:avLst>
-              <a:gd name="adj" fmla="val 7968"/>
+              <a:gd name="adj" fmla="val 7186"/>
             </a:avLst>
           </a:prstGeom>
           <a:solidFill>
@@ -13048,8 +13052,8 @@
         </p:nvSpPr>
         <p:spPr>
           <a:xfrm>
-            <a:off x="7799832" y="2816352"/>
-            <a:ext cx="3145536" cy="256032"/>
+            <a:off x="7708392" y="2852928"/>
+            <a:ext cx="3282696" cy="228600"/>
           </a:xfrm>
           <a:prstGeom prst="rect">
             <a:avLst/>
@@ -13065,7 +13069,7 @@
               <a:buNone/>
             </a:pPr>
             <a:r>
-              <a:rPr lang="en-US" sz="1300" b="1" dirty="0">
+              <a:rPr lang="en-US" sz="1220" b="1" dirty="0">
                 <a:solidFill>
                   <a:srgbClr val="0068B7"/>
                 </a:solidFill>
@@ -13075,7 +13079,7 @@
               </a:rPr>
               <a:t>Concept checkpoints</a:t>
             </a:r>
-            <a:endParaRPr lang="en-US" sz="1300" dirty="0"/>
+            <a:endParaRPr lang="en-US" sz="1220" dirty="0"/>
           </a:p>
         </p:txBody>
       </p:sp>
@@ -13087,8 +13091,8 @@
         </p:nvSpPr>
         <p:spPr>
           <a:xfrm>
-            <a:off x="7818120" y="3182112"/>
-            <a:ext cx="3090672" cy="718718"/>
+            <a:off x="7726680" y="3182112"/>
+            <a:ext cx="3227832" cy="960120"/>
           </a:xfrm>
           <a:prstGeom prst="rect">
             <a:avLst/>
@@ -13106,7 +13110,7 @@
               <a:buNone/>
             </a:pPr>
             <a:r>
-              <a:rPr lang="en-US" sz="1220" dirty="0">
+              <a:rPr lang="en-US" sz="1140" dirty="0">
                 <a:solidFill>
                   <a:srgbClr val="17364A"/>
                 </a:solidFill>
@@ -13116,14 +13120,14 @@
               </a:rPr>
               <a:t>OWASP Top 10 for Large Language Model Applications:.</a:t>
             </a:r>
-            <a:endParaRPr lang="en-US" sz="1220" dirty="0"/>
-          </a:p>
-          <a:p>
-            <a:pPr indent="0" marL="0">
-              <a:buNone/>
-            </a:pPr>
-            <a:r>
-              <a:rPr lang="en-US" sz="1220" dirty="0">
+            <a:endParaRPr lang="en-US" sz="1140" dirty="0"/>
+          </a:p>
+          <a:p>
+            <a:pPr indent="0" marL="0">
+              <a:buNone/>
+            </a:pPr>
+            <a:r>
+              <a:rPr lang="en-US" sz="1140" dirty="0">
                 <a:solidFill>
                   <a:srgbClr val="17364A"/>
                 </a:solidFill>
@@ -13131,9 +13135,9 @@
                 <a:ea typeface="Aptos" pitchFamily="34" charset="-122"/>
                 <a:cs typeface="Aptos" pitchFamily="34" charset="-120"/>
               </a:rPr>
-              <a:t>ONC health IT, interoperability, and information blocking.</a:t>
-            </a:r>
-            <a:endParaRPr lang="en-US" sz="1220" dirty="0"/>
+              <a:t>ONC health IT, interoperability, and information.</a:t>
+            </a:r>
+            <a:endParaRPr lang="en-US" sz="1140" dirty="0"/>
           </a:p>
         </p:txBody>
       </p:sp>
@@ -13145,12 +13149,12 @@
         </p:nvSpPr>
         <p:spPr>
           <a:xfrm>
-            <a:off x="7635240" y="4184294"/>
-            <a:ext cx="3474720" cy="1466698"/>
+            <a:off x="7543800" y="4389120"/>
+            <a:ext cx="3611880" cy="1261872"/>
           </a:xfrm>
           <a:prstGeom prst="roundRect">
             <a:avLst>
-              <a:gd name="adj" fmla="val 7481"/>
+              <a:gd name="adj" fmla="val 8696"/>
             </a:avLst>
           </a:prstGeom>
           <a:solidFill>
@@ -13172,8 +13176,8 @@
         </p:nvSpPr>
         <p:spPr>
           <a:xfrm>
-            <a:off x="7799832" y="4330598"/>
-            <a:ext cx="3145536" cy="256032"/>
+            <a:off x="7708392" y="4517136"/>
+            <a:ext cx="3282696" cy="228600"/>
           </a:xfrm>
           <a:prstGeom prst="rect">
             <a:avLst/>
@@ -13189,7 +13193,7 @@
               <a:buNone/>
             </a:pPr>
             <a:r>
-              <a:rPr lang="en-US" sz="1300" b="1" dirty="0">
+              <a:rPr lang="en-US" sz="1220" b="1" dirty="0">
                 <a:solidFill>
                   <a:srgbClr val="0068B7"/>
                 </a:solidFill>
@@ -13199,7 +13203,7 @@
               </a:rPr>
               <a:t>Apply it</a:t>
             </a:r>
-            <a:endParaRPr lang="en-US" sz="1300" dirty="0"/>
+            <a:endParaRPr lang="en-US" sz="1220" dirty="0"/>
           </a:p>
         </p:txBody>
       </p:sp>
@@ -13211,8 +13215,8 @@
         </p:nvSpPr>
         <p:spPr>
           <a:xfrm>
-            <a:off x="7799832" y="4659782"/>
-            <a:ext cx="3145536" cy="899770"/>
+            <a:off x="7708392" y="4828032"/>
+            <a:ext cx="3282696" cy="749808"/>
           </a:xfrm>
           <a:prstGeom prst="rect">
             <a:avLst/>
@@ -13230,7 +13234,7 @@
               <a:buNone/>
             </a:pPr>
             <a:r>
-              <a:rPr lang="en-US" sz="1320" dirty="0">
+              <a:rPr lang="en-US" sz="1220" dirty="0">
                 <a:solidFill>
                   <a:srgbClr val="17364A"/>
                 </a:solidFill>
@@ -13238,9 +13242,9 @@
                 <a:ea typeface="Aptos" pitchFamily="34" charset="-122"/>
                 <a:cs typeface="Aptos" pitchFamily="34" charset="-120"/>
               </a:rPr>
-              <a:t>Connect the concept to public health purpose, responsible use, required safeguards, documentation, and the next action a department should take.</a:t>
-            </a:r>
-            <a:endParaRPr lang="en-US" sz="1320" dirty="0"/>
+              <a:t>Connect the concept to public health purpose, responsible use, required.</a:t>
+            </a:r>
+            <a:endParaRPr lang="en-US" sz="1220" dirty="0"/>
           </a:p>
         </p:txBody>
       </p:sp>
@@ -13531,8 +13535,8 @@
         </p:nvSpPr>
         <p:spPr>
           <a:xfrm>
-            <a:off x="868680" y="1508760"/>
-            <a:ext cx="6309360" cy="4160520"/>
+            <a:off x="822960" y="1463040"/>
+            <a:ext cx="6565392" cy="4343400"/>
           </a:xfrm>
           <a:prstGeom prst="rect">
             <a:avLst/>
@@ -13550,7 +13554,7 @@
               <a:buNone/>
             </a:pPr>
             <a:r>
-              <a:rPr lang="en-US" sz="2100" dirty="0">
+              <a:rPr lang="en-US" sz="1920" dirty="0">
                 <a:solidFill>
                   <a:srgbClr val="003A63"/>
                 </a:solidFill>
@@ -13558,9 +13562,9 @@
                 <a:ea typeface="Aptos" pitchFamily="34" charset="-122"/>
                 <a:cs typeface="Aptos" pitchFamily="34" charset="-120"/>
               </a:rPr>
-              <a:t>• Agency policies for privacy, public records, cybersecurity, procurement, civil rights,.</a:t>
-            </a:r>
-            <a:endParaRPr lang="en-US" sz="2100" dirty="0"/>
+              <a:t>• Agency policies for privacy, public records, cybersecurity, procurement,.</a:t>
+            </a:r>
+            <a:endParaRPr lang="en-US" sz="1920" dirty="0"/>
           </a:p>
         </p:txBody>
       </p:sp>
@@ -13572,12 +13576,12 @@
         </p:nvSpPr>
         <p:spPr>
           <a:xfrm>
-            <a:off x="7635240" y="1325880"/>
-            <a:ext cx="3474720" cy="1255471"/>
+            <a:off x="7543800" y="1325880"/>
+            <a:ext cx="3611880" cy="1261872"/>
           </a:xfrm>
           <a:prstGeom prst="roundRect">
             <a:avLst>
-              <a:gd name="adj" fmla="val 8740"/>
+              <a:gd name="adj" fmla="val 8696"/>
             </a:avLst>
           </a:prstGeom>
           <a:solidFill>
@@ -13599,8 +13603,8 @@
         </p:nvSpPr>
         <p:spPr>
           <a:xfrm>
-            <a:off x="7799832" y="1472184"/>
-            <a:ext cx="3145536" cy="256032"/>
+            <a:off x="7708392" y="1453896"/>
+            <a:ext cx="3282696" cy="228600"/>
           </a:xfrm>
           <a:prstGeom prst="rect">
             <a:avLst/>
@@ -13616,7 +13620,7 @@
               <a:buNone/>
             </a:pPr>
             <a:r>
-              <a:rPr lang="en-US" sz="1300" b="1" dirty="0">
+              <a:rPr lang="en-US" sz="1220" b="1" dirty="0">
                 <a:solidFill>
                   <a:srgbClr val="0068B7"/>
                 </a:solidFill>
@@ -13626,7 +13630,7 @@
               </a:rPr>
               <a:t>Core concept</a:t>
             </a:r>
-            <a:endParaRPr lang="en-US" sz="1300" dirty="0"/>
+            <a:endParaRPr lang="en-US" sz="1220" dirty="0"/>
           </a:p>
         </p:txBody>
       </p:sp>
@@ -13638,8 +13642,8 @@
         </p:nvSpPr>
         <p:spPr>
           <a:xfrm>
-            <a:off x="7799832" y="1801368"/>
-            <a:ext cx="3145536" cy="688543"/>
+            <a:off x="7708392" y="1764792"/>
+            <a:ext cx="3282696" cy="749808"/>
           </a:xfrm>
           <a:prstGeom prst="rect">
             <a:avLst/>
@@ -13657,7 +13661,7 @@
               <a:buNone/>
             </a:pPr>
             <a:r>
-              <a:rPr lang="en-US" sz="1320" dirty="0">
+              <a:rPr lang="en-US" sz="1220" dirty="0">
                 <a:solidFill>
                   <a:srgbClr val="17364A"/>
                 </a:solidFill>
@@ -13665,9 +13669,9 @@
                 <a:ea typeface="Aptos" pitchFamily="34" charset="-122"/>
                 <a:cs typeface="Aptos" pitchFamily="34" charset="-120"/>
               </a:rPr>
-              <a:t>Agency policies for privacy, public records, cybersecurity, procurement, civil rights, accessibility,.</a:t>
-            </a:r>
-            <a:endParaRPr lang="en-US" sz="1320" dirty="0"/>
+              <a:t>Agency policies for privacy, public records, cybersecurity, procurement, civil.</a:t>
+            </a:r>
+            <a:endParaRPr lang="en-US" sz="1220" dirty="0"/>
           </a:p>
         </p:txBody>
       </p:sp>
@@ -13679,12 +13683,12 @@
         </p:nvSpPr>
         <p:spPr>
           <a:xfrm>
-            <a:off x="7635240" y="2718511"/>
-            <a:ext cx="3474720" cy="1328623"/>
+            <a:off x="7543800" y="2724912"/>
+            <a:ext cx="3611880" cy="1527048"/>
           </a:xfrm>
           <a:prstGeom prst="roundRect">
             <a:avLst>
-              <a:gd name="adj" fmla="val 8259"/>
+              <a:gd name="adj" fmla="val 7186"/>
             </a:avLst>
           </a:prstGeom>
           <a:solidFill>
@@ -13706,8 +13710,8 @@
         </p:nvSpPr>
         <p:spPr>
           <a:xfrm>
-            <a:off x="7799832" y="2864815"/>
-            <a:ext cx="3145536" cy="256032"/>
+            <a:off x="7708392" y="2852928"/>
+            <a:ext cx="3282696" cy="228600"/>
           </a:xfrm>
           <a:prstGeom prst="rect">
             <a:avLst/>
@@ -13723,7 +13727,7 @@
               <a:buNone/>
             </a:pPr>
             <a:r>
-              <a:rPr lang="en-US" sz="1300" b="1" dirty="0">
+              <a:rPr lang="en-US" sz="1220" b="1" dirty="0">
                 <a:solidFill>
                   <a:srgbClr val="0068B7"/>
                 </a:solidFill>
@@ -13733,7 +13737,7 @@
               </a:rPr>
               <a:t>Concept checkpoints</a:t>
             </a:r>
-            <a:endParaRPr lang="en-US" sz="1300" dirty="0"/>
+            <a:endParaRPr lang="en-US" sz="1220" dirty="0"/>
           </a:p>
         </p:txBody>
       </p:sp>
@@ -13745,8 +13749,8 @@
         </p:nvSpPr>
         <p:spPr>
           <a:xfrm>
-            <a:off x="7818120" y="3230575"/>
-            <a:ext cx="3090672" cy="670255"/>
+            <a:off x="7726680" y="3182112"/>
+            <a:ext cx="3227832" cy="960120"/>
           </a:xfrm>
           <a:prstGeom prst="rect">
             <a:avLst/>
@@ -13764,7 +13768,7 @@
               <a:buNone/>
             </a:pPr>
             <a:r>
-              <a:rPr lang="en-US" sz="1220" dirty="0">
+              <a:rPr lang="en-US" sz="1140" dirty="0">
                 <a:solidFill>
                   <a:srgbClr val="17364A"/>
                 </a:solidFill>
@@ -13772,9 +13776,9 @@
                 <a:ea typeface="Aptos" pitchFamily="34" charset="-122"/>
                 <a:cs typeface="Aptos" pitchFamily="34" charset="-120"/>
               </a:rPr>
-              <a:t>Agency policies for privacy, public records, cybersecurity,.</a:t>
-            </a:r>
-            <a:endParaRPr lang="en-US" sz="1220" dirty="0"/>
+              <a:t>Agency policies for privacy, public records,.</a:t>
+            </a:r>
+            <a:endParaRPr lang="en-US" sz="1140" dirty="0"/>
           </a:p>
         </p:txBody>
       </p:sp>
@@ -13786,12 +13790,12 @@
         </p:nvSpPr>
         <p:spPr>
           <a:xfrm>
-            <a:off x="7635240" y="4184294"/>
-            <a:ext cx="3474720" cy="1466698"/>
+            <a:off x="7543800" y="4389120"/>
+            <a:ext cx="3611880" cy="1261872"/>
           </a:xfrm>
           <a:prstGeom prst="roundRect">
             <a:avLst>
-              <a:gd name="adj" fmla="val 7481"/>
+              <a:gd name="adj" fmla="val 8696"/>
             </a:avLst>
           </a:prstGeom>
           <a:solidFill>
@@ -13813,8 +13817,8 @@
         </p:nvSpPr>
         <p:spPr>
           <a:xfrm>
-            <a:off x="7799832" y="4330598"/>
-            <a:ext cx="3145536" cy="256032"/>
+            <a:off x="7708392" y="4517136"/>
+            <a:ext cx="3282696" cy="228600"/>
           </a:xfrm>
           <a:prstGeom prst="rect">
             <a:avLst/>
@@ -13830,7 +13834,7 @@
               <a:buNone/>
             </a:pPr>
             <a:r>
-              <a:rPr lang="en-US" sz="1300" b="1" dirty="0">
+              <a:rPr lang="en-US" sz="1220" b="1" dirty="0">
                 <a:solidFill>
                   <a:srgbClr val="0068B7"/>
                 </a:solidFill>
@@ -13840,7 +13844,7 @@
               </a:rPr>
               <a:t>Apply it</a:t>
             </a:r>
-            <a:endParaRPr lang="en-US" sz="1300" dirty="0"/>
+            <a:endParaRPr lang="en-US" sz="1220" dirty="0"/>
           </a:p>
         </p:txBody>
       </p:sp>
@@ -13852,8 +13856,8 @@
         </p:nvSpPr>
         <p:spPr>
           <a:xfrm>
-            <a:off x="7799832" y="4659782"/>
-            <a:ext cx="3145536" cy="899770"/>
+            <a:off x="7708392" y="4828032"/>
+            <a:ext cx="3282696" cy="749808"/>
           </a:xfrm>
           <a:prstGeom prst="rect">
             <a:avLst/>
@@ -13871,7 +13875,7 @@
               <a:buNone/>
             </a:pPr>
             <a:r>
-              <a:rPr lang="en-US" sz="1320" dirty="0">
+              <a:rPr lang="en-US" sz="1220" dirty="0">
                 <a:solidFill>
                   <a:srgbClr val="17364A"/>
                 </a:solidFill>
@@ -13879,9 +13883,9 @@
                 <a:ea typeface="Aptos" pitchFamily="34" charset="-122"/>
                 <a:cs typeface="Aptos" pitchFamily="34" charset="-120"/>
               </a:rPr>
-              <a:t>Connect the concept to public health purpose, responsible use, required safeguards, documentation, and the next action a department should take.</a:t>
-            </a:r>
-            <a:endParaRPr lang="en-US" sz="1320" dirty="0"/>
+              <a:t>Connect the concept to public health purpose, responsible use, required.</a:t>
+            </a:r>
+            <a:endParaRPr lang="en-US" sz="1220" dirty="0"/>
           </a:p>
         </p:txBody>
       </p:sp>
@@ -14199,7 +14203,7 @@
                 <a:ea typeface="Aptos" pitchFamily="34" charset="-122"/>
                 <a:cs typeface="Aptos" pitchFamily="34" charset="-120"/>
               </a:rPr>
-              <a:t>• Play 11: Build and Deploy AI Solutions - This lesson informs Play 11 by helping learners.</a:t>
+              <a:t>• Play 11: Build and Deploy AI Solutions - This lesson informs Play 11 by.</a:t>
             </a:r>
             <a:endParaRPr lang="en-US" sz="1900" dirty="0"/>
           </a:p>
@@ -14216,7 +14220,7 @@
                 <a:ea typeface="Aptos" pitchFamily="34" charset="-122"/>
                 <a:cs typeface="Aptos" pitchFamily="34" charset="-120"/>
               </a:rPr>
-              <a:t>• Play 2: Readiness Assessment - This lesson informs Play 2 by helping learners connect the.</a:t>
+              <a:t>• Play 2: Readiness Assessment - This lesson informs Play 2 by helping.</a:t>
             </a:r>
             <a:endParaRPr lang="en-US" sz="1900" dirty="0"/>
           </a:p>
@@ -14233,7 +14237,7 @@
                 <a:ea typeface="Aptos" pitchFamily="34" charset="-122"/>
                 <a:cs typeface="Aptos" pitchFamily="34" charset="-120"/>
               </a:rPr>
-              <a:t>• Play 3: Establish AI Governance - This lesson informs Play 3 by helping learners connect the.</a:t>
+              <a:t>• Play 3: Establish AI Governance - This lesson informs Play 3 by helping.</a:t>
             </a:r>
             <a:endParaRPr lang="en-US" sz="1900" dirty="0"/>
           </a:p>
@@ -14250,7 +14254,7 @@
                 <a:ea typeface="Aptos" pitchFamily="34" charset="-122"/>
                 <a:cs typeface="Aptos" pitchFamily="34" charset="-120"/>
               </a:rPr>
-              <a:t>• Play 1: Vision &amp; Guardrails - This lesson informs Play 1 by helping learners connect the.</a:t>
+              <a:t>• Play 1: Vision &amp; Guardrails - This lesson informs Play 1 by helping learners.</a:t>
             </a:r>
             <a:endParaRPr lang="en-US" sz="1900" dirty="0"/>
           </a:p>
@@ -14291,8 +14295,8 @@
         </p:nvSpPr>
         <p:spPr>
           <a:xfrm>
-            <a:off x="8211312" y="1563624"/>
-            <a:ext cx="2734056" cy="256032"/>
+            <a:off x="8211312" y="1545336"/>
+            <a:ext cx="2734056" cy="228600"/>
           </a:xfrm>
           <a:prstGeom prst="rect">
             <a:avLst/>
@@ -14308,7 +14312,7 @@
               <a:buNone/>
             </a:pPr>
             <a:r>
-              <a:rPr lang="en-US" sz="1300" b="1" dirty="0">
+              <a:rPr lang="en-US" sz="1220" b="1" dirty="0">
                 <a:solidFill>
                   <a:srgbClr val="0068B7"/>
                 </a:solidFill>
@@ -14318,7 +14322,7 @@
               </a:rPr>
               <a:t>Apply the lesson</a:t>
             </a:r>
-            <a:endParaRPr lang="en-US" sz="1300" dirty="0"/>
+            <a:endParaRPr lang="en-US" sz="1220" dirty="0"/>
           </a:p>
         </p:txBody>
       </p:sp>
@@ -14330,8 +14334,8 @@
         </p:nvSpPr>
         <p:spPr>
           <a:xfrm>
-            <a:off x="8211312" y="1892808"/>
-            <a:ext cx="2734056" cy="1536192"/>
+            <a:off x="8211312" y="1856232"/>
+            <a:ext cx="2734056" cy="1591056"/>
           </a:xfrm>
           <a:prstGeom prst="rect">
             <a:avLst/>
@@ -14349,7 +14353,7 @@
               <a:buNone/>
             </a:pPr>
             <a:r>
-              <a:rPr lang="en-US" sz="1320" dirty="0">
+              <a:rPr lang="en-US" sz="1220" dirty="0">
                 <a:solidFill>
                   <a:srgbClr val="17364A"/>
                 </a:solidFill>
@@ -14357,9 +14361,9 @@
                 <a:ea typeface="Aptos" pitchFamily="34" charset="-122"/>
                 <a:cs typeface="Aptos" pitchFamily="34" charset="-120"/>
               </a:rPr>
-              <a:t>Use the related plays to identify decisions, participants, timing, approvals, and documentation needed for responsible implementation.</a:t>
-            </a:r>
-            <a:endParaRPr lang="en-US" sz="1320" dirty="0"/>
+              <a:t>Use the related plays to identify decisions, participants, timing, approvals,.</a:t>
+            </a:r>
+            <a:endParaRPr lang="en-US" sz="1220" dirty="0"/>
           </a:p>
         </p:txBody>
       </p:sp>
@@ -14398,8 +14402,8 @@
         </p:nvSpPr>
         <p:spPr>
           <a:xfrm>
-            <a:off x="8211312" y="3941064"/>
-            <a:ext cx="2734056" cy="256032"/>
+            <a:off x="8211312" y="3922776"/>
+            <a:ext cx="2734056" cy="228600"/>
           </a:xfrm>
           <a:prstGeom prst="rect">
             <a:avLst/>
@@ -14415,7 +14419,7 @@
               <a:buNone/>
             </a:pPr>
             <a:r>
-              <a:rPr lang="en-US" sz="1300" b="1" dirty="0">
+              <a:rPr lang="en-US" sz="1220" b="1" dirty="0">
                 <a:solidFill>
                   <a:srgbClr val="0068B7"/>
                 </a:solidFill>
@@ -14425,7 +14429,7 @@
               </a:rPr>
               <a:t>Use the play links to</a:t>
             </a:r>
-            <a:endParaRPr lang="en-US" sz="1300" dirty="0"/>
+            <a:endParaRPr lang="en-US" sz="1220" dirty="0"/>
           </a:p>
         </p:txBody>
       </p:sp>
@@ -14437,8 +14441,8 @@
         </p:nvSpPr>
         <p:spPr>
           <a:xfrm>
-            <a:off x="8229600" y="4306824"/>
-            <a:ext cx="2679192" cy="941832"/>
+            <a:off x="8229600" y="4251960"/>
+            <a:ext cx="2679192" cy="1033272"/>
           </a:xfrm>
           <a:prstGeom prst="rect">
             <a:avLst/>
@@ -14456,7 +14460,7 @@
               <a:buNone/>
             </a:pPr>
             <a:r>
-              <a:rPr lang="en-US" sz="1220" dirty="0">
+              <a:rPr lang="en-US" sz="1140" dirty="0">
                 <a:solidFill>
                   <a:srgbClr val="17364A"/>
                 </a:solidFill>
@@ -14466,14 +14470,14 @@
               </a:rPr>
               <a:t>Locate the decision point in the playbook sequence.</a:t>
             </a:r>
-            <a:endParaRPr lang="en-US" sz="1220" dirty="0"/>
-          </a:p>
-          <a:p>
-            <a:pPr indent="0" marL="0">
-              <a:buNone/>
-            </a:pPr>
-            <a:r>
-              <a:rPr lang="en-US" sz="1220" dirty="0">
+            <a:endParaRPr lang="en-US" sz="1140" dirty="0"/>
+          </a:p>
+          <a:p>
+            <a:pPr indent="0" marL="0">
+              <a:buNone/>
+            </a:pPr>
+            <a:r>
+              <a:rPr lang="en-US" sz="1140" dirty="0">
                 <a:solidFill>
                   <a:srgbClr val="17364A"/>
                 </a:solidFill>
@@ -14483,14 +14487,14 @@
               </a:rPr>
               <a:t>Identify who should participate in the work.</a:t>
             </a:r>
-            <a:endParaRPr lang="en-US" sz="1220" dirty="0"/>
-          </a:p>
-          <a:p>
-            <a:pPr indent="0" marL="0">
-              <a:buNone/>
-            </a:pPr>
-            <a:r>
-              <a:rPr lang="en-US" sz="1220" dirty="0">
+            <a:endParaRPr lang="en-US" sz="1140" dirty="0"/>
+          </a:p>
+          <a:p>
+            <a:pPr indent="0" marL="0">
+              <a:buNone/>
+            </a:pPr>
+            <a:r>
+              <a:rPr lang="en-US" sz="1140" dirty="0">
                 <a:solidFill>
                   <a:srgbClr val="17364A"/>
                 </a:solidFill>
@@ -14498,9 +14502,9 @@
                 <a:ea typeface="Aptos" pitchFamily="34" charset="-122"/>
                 <a:cs typeface="Aptos" pitchFamily="34" charset="-120"/>
               </a:rPr>
-              <a:t>Document the review, approval, or implementation step.</a:t>
-            </a:r>
-            <a:endParaRPr lang="en-US" sz="1220" dirty="0"/>
+              <a:t>Document the review, approval, or implementation.</a:t>
+            </a:r>
+            <a:endParaRPr lang="en-US" sz="1140" dirty="0"/>
           </a:p>
         </p:txBody>
       </p:sp>
@@ -14818,7 +14822,7 @@
                 <a:ea typeface="Aptos" pitchFamily="34" charset="-122"/>
                 <a:cs typeface="Aptos" pitchFamily="34" charset="-120"/>
               </a:rPr>
-              <a:t>• Tool 4: AI Policy Landscape Scan (Worksheet) - Use AI Policy Landscape Scan to translate this.</a:t>
+              <a:t>• Tool 4: AI Policy Landscape Scan (Worksheet) - Use AI Policy Landscape Scan.</a:t>
             </a:r>
             <a:endParaRPr lang="en-US" sz="1850" dirty="0"/>
           </a:p>
@@ -14835,7 +14839,7 @@
                 <a:ea typeface="Aptos" pitchFamily="34" charset="-122"/>
                 <a:cs typeface="Aptos" pitchFamily="34" charset="-120"/>
               </a:rPr>
-              <a:t>• Tool 5: AI Environmental and Resource Impact Review (Checklist) - Use AI Environmental and.</a:t>
+              <a:t>• Tool 5: AI Environmental and Resource Impact Review (Checklist) - Use AI.</a:t>
             </a:r>
             <a:endParaRPr lang="en-US" sz="1850" dirty="0"/>
           </a:p>
@@ -14852,7 +14856,7 @@
                 <a:ea typeface="Aptos" pitchFamily="34" charset="-122"/>
                 <a:cs typeface="Aptos" pitchFamily="34" charset="-120"/>
               </a:rPr>
-              <a:t>• Tool 6: Human-Centered AI Decision Rule Checklist (Checklist) - Use Human-Centered AI Decision.</a:t>
+              <a:t>• Tool 6: Human-Centered AI Decision Rule Checklist (Checklist) - Use.</a:t>
             </a:r>
             <a:endParaRPr lang="en-US" sz="1850" dirty="0"/>
           </a:p>
@@ -14869,7 +14873,7 @@
                 <a:ea typeface="Aptos" pitchFamily="34" charset="-122"/>
                 <a:cs typeface="Aptos" pitchFamily="34" charset="-120"/>
               </a:rPr>
-              <a:t>• Tool 8: AI Project Charter (Planning) - Use AI Project Charter to translate this lesson into a.</a:t>
+              <a:t>• Tool 8: AI Project Charter (Planning) - Use AI Project Charter to translate.</a:t>
             </a:r>
             <a:endParaRPr lang="en-US" sz="1850" dirty="0"/>
           </a:p>
@@ -14910,8 +14914,8 @@
         </p:nvSpPr>
         <p:spPr>
           <a:xfrm>
-            <a:off x="8211312" y="1563624"/>
-            <a:ext cx="2734056" cy="256032"/>
+            <a:off x="8211312" y="1545336"/>
+            <a:ext cx="2734056" cy="228600"/>
           </a:xfrm>
           <a:prstGeom prst="rect">
             <a:avLst/>
@@ -14927,7 +14931,7 @@
               <a:buNone/>
             </a:pPr>
             <a:r>
-              <a:rPr lang="en-US" sz="1300" b="1" dirty="0">
+              <a:rPr lang="en-US" sz="1220" b="1" dirty="0">
                 <a:solidFill>
                   <a:srgbClr val="0068B7"/>
                 </a:solidFill>
@@ -14937,7 +14941,7 @@
               </a:rPr>
               <a:t>Use the tools</a:t>
             </a:r>
-            <a:endParaRPr lang="en-US" sz="1300" dirty="0"/>
+            <a:endParaRPr lang="en-US" sz="1220" dirty="0"/>
           </a:p>
         </p:txBody>
       </p:sp>
@@ -14949,8 +14953,8 @@
         </p:nvSpPr>
         <p:spPr>
           <a:xfrm>
-            <a:off x="8211312" y="1892808"/>
-            <a:ext cx="2734056" cy="1536192"/>
+            <a:off x="8211312" y="1856232"/>
+            <a:ext cx="2734056" cy="1591056"/>
           </a:xfrm>
           <a:prstGeom prst="rect">
             <a:avLst/>
@@ -14968,7 +14972,7 @@
               <a:buNone/>
             </a:pPr>
             <a:r>
-              <a:rPr lang="en-US" sz="1320" dirty="0">
+              <a:rPr lang="en-US" sz="1220" dirty="0">
                 <a:solidFill>
                   <a:srgbClr val="17364A"/>
                 </a:solidFill>
@@ -14976,9 +14980,9 @@
                 <a:ea typeface="Aptos" pitchFamily="34" charset="-122"/>
                 <a:cs typeface="Aptos" pitchFamily="34" charset="-120"/>
               </a:rPr>
-              <a:t>Use linked tools when your department needs a structured worksheet, template, checklist, review process, or documentation artifact.</a:t>
-            </a:r>
-            <a:endParaRPr lang="en-US" sz="1320" dirty="0"/>
+              <a:t>Use linked tools when your department needs a structured worksheet, template,.</a:t>
+            </a:r>
+            <a:endParaRPr lang="en-US" sz="1220" dirty="0"/>
           </a:p>
         </p:txBody>
       </p:sp>
@@ -15017,8 +15021,8 @@
         </p:nvSpPr>
         <p:spPr>
           <a:xfrm>
-            <a:off x="8211312" y="3941064"/>
-            <a:ext cx="2734056" cy="256032"/>
+            <a:off x="8211312" y="3922776"/>
+            <a:ext cx="2734056" cy="228600"/>
           </a:xfrm>
           <a:prstGeom prst="rect">
             <a:avLst/>
@@ -15034,7 +15038,7 @@
               <a:buNone/>
             </a:pPr>
             <a:r>
-              <a:rPr lang="en-US" sz="1300" b="1" dirty="0">
+              <a:rPr lang="en-US" sz="1220" b="1" dirty="0">
                 <a:solidFill>
                   <a:srgbClr val="0068B7"/>
                 </a:solidFill>
@@ -15044,7 +15048,7 @@
               </a:rPr>
               <a:t>Tool selection cues</a:t>
             </a:r>
-            <a:endParaRPr lang="en-US" sz="1300" dirty="0"/>
+            <a:endParaRPr lang="en-US" sz="1220" dirty="0"/>
           </a:p>
         </p:txBody>
       </p:sp>
@@ -15056,8 +15060,8 @@
         </p:nvSpPr>
         <p:spPr>
           <a:xfrm>
-            <a:off x="8229600" y="4306824"/>
-            <a:ext cx="2679192" cy="941832"/>
+            <a:off x="8229600" y="4251960"/>
+            <a:ext cx="2679192" cy="1033272"/>
           </a:xfrm>
           <a:prstGeom prst="rect">
             <a:avLst/>
@@ -15075,7 +15079,7 @@
               <a:buNone/>
             </a:pPr>
             <a:r>
-              <a:rPr lang="en-US" sz="1220" dirty="0">
+              <a:rPr lang="en-US" sz="1140" dirty="0">
                 <a:solidFill>
                   <a:srgbClr val="17364A"/>
                 </a:solidFill>
@@ -15085,14 +15089,14 @@
               </a:rPr>
               <a:t>Use a tool when no comparable local process exists.</a:t>
             </a:r>
-            <a:endParaRPr lang="en-US" sz="1220" dirty="0"/>
-          </a:p>
-          <a:p>
-            <a:pPr indent="0" marL="0">
-              <a:buNone/>
-            </a:pPr>
-            <a:r>
-              <a:rPr lang="en-US" sz="1220" dirty="0">
+            <a:endParaRPr lang="en-US" sz="1140" dirty="0"/>
+          </a:p>
+          <a:p>
+            <a:pPr indent="0" marL="0">
+              <a:buNone/>
+            </a:pPr>
+            <a:r>
+              <a:rPr lang="en-US" sz="1140" dirty="0">
                 <a:solidFill>
                   <a:srgbClr val="17364A"/>
                 </a:solidFill>
@@ -15100,16 +15104,16 @@
                 <a:ea typeface="Aptos" pitchFamily="34" charset="-122"/>
                 <a:cs typeface="Aptos" pitchFamily="34" charset="-120"/>
               </a:rPr>
-              <a:t>Adapt existing department templates when they already fit the.</a:t>
-            </a:r>
-            <a:endParaRPr lang="en-US" sz="1220" dirty="0"/>
-          </a:p>
-          <a:p>
-            <a:pPr indent="0" marL="0">
-              <a:buNone/>
-            </a:pPr>
-            <a:r>
-              <a:rPr lang="en-US" sz="1220" dirty="0">
+              <a:t>Adapt existing department templates when they.</a:t>
+            </a:r>
+            <a:endParaRPr lang="en-US" sz="1140" dirty="0"/>
+          </a:p>
+          <a:p>
+            <a:pPr indent="0" marL="0">
+              <a:buNone/>
+            </a:pPr>
+            <a:r>
+              <a:rPr lang="en-US" sz="1140" dirty="0">
                 <a:solidFill>
                   <a:srgbClr val="17364A"/>
                 </a:solidFill>
@@ -15117,9 +15121,9 @@
                 <a:ea typeface="Aptos" pitchFamily="34" charset="-122"/>
                 <a:cs typeface="Aptos" pitchFamily="34" charset="-120"/>
               </a:rPr>
-              <a:t>Save the completed artifact as evidence of the decision.</a:t>
-            </a:r>
-            <a:endParaRPr lang="en-US" sz="1220" dirty="0"/>
+              <a:t>Save the completed artifact as evidence of the.</a:t>
+            </a:r>
+            <a:endParaRPr lang="en-US" sz="1140" dirty="0"/>
           </a:p>
         </p:txBody>
       </p:sp>
@@ -15410,8 +15414,8 @@
         </p:nvSpPr>
         <p:spPr>
           <a:xfrm>
-            <a:off x="868680" y="1508760"/>
-            <a:ext cx="6309360" cy="4160520"/>
+            <a:off x="822960" y="1463040"/>
+            <a:ext cx="6565392" cy="4343400"/>
           </a:xfrm>
           <a:prstGeom prst="rect">
             <a:avLst/>
@@ -15429,7 +15433,7 @@
               <a:buNone/>
             </a:pPr>
             <a:r>
-              <a:rPr lang="en-US" sz="2100" dirty="0">
+              <a:rPr lang="en-US" sz="1920" dirty="0">
                 <a:solidFill>
                   <a:srgbClr val="003A63"/>
                 </a:solidFill>
@@ -15439,14 +15443,14 @@
               </a:rPr>
               <a:t>• Explain why system integration is central to AI readiness in public health.</a:t>
             </a:r>
-            <a:endParaRPr lang="en-US" sz="2100" dirty="0"/>
-          </a:p>
-          <a:p>
-            <a:pPr indent="0" marL="0">
-              <a:buNone/>
-            </a:pPr>
-            <a:r>
-              <a:rPr lang="en-US" sz="2100" dirty="0">
+            <a:endParaRPr lang="en-US" sz="1920" dirty="0"/>
+          </a:p>
+          <a:p>
+            <a:pPr indent="0" marL="0">
+              <a:buNone/>
+            </a:pPr>
+            <a:r>
+              <a:rPr lang="en-US" sz="1920" dirty="0">
                 <a:solidFill>
                   <a:srgbClr val="003A63"/>
                 </a:solidFill>
@@ -15454,16 +15458,16 @@
                 <a:ea typeface="Aptos" pitchFamily="34" charset="-122"/>
                 <a:cs typeface="Aptos" pitchFamily="34" charset="-120"/>
               </a:rPr>
-              <a:t>• Distinguish among common integration patterns such as point-to-point interfaces, APIs, message.</a:t>
-            </a:r>
-            <a:endParaRPr lang="en-US" sz="2100" dirty="0"/>
-          </a:p>
-          <a:p>
-            <a:pPr indent="0" marL="0">
-              <a:buNone/>
-            </a:pPr>
-            <a:r>
-              <a:rPr lang="en-US" sz="2100" dirty="0">
+              <a:t>• Distinguish among common integration patterns such as point-to-point.</a:t>
+            </a:r>
+            <a:endParaRPr lang="en-US" sz="1920" dirty="0"/>
+          </a:p>
+          <a:p>
+            <a:pPr indent="0" marL="0">
+              <a:buNone/>
+            </a:pPr>
+            <a:r>
+              <a:rPr lang="en-US" sz="1920" dirty="0">
                 <a:solidFill>
                   <a:srgbClr val="003A63"/>
                 </a:solidFill>
@@ -15471,9 +15475,9 @@
                 <a:ea typeface="Aptos" pitchFamily="34" charset="-122"/>
                 <a:cs typeface="Aptos" pitchFamily="34" charset="-120"/>
               </a:rPr>
-              <a:t>• Identify the systems of record, upstream sources, downstream systems, and shared services.</a:t>
-            </a:r>
-            <a:endParaRPr lang="en-US" sz="2100" dirty="0"/>
+              <a:t>• Identify the systems of record, upstream sources, downstream systems, and.</a:t>
+            </a:r>
+            <a:endParaRPr lang="en-US" sz="1920" dirty="0"/>
           </a:p>
         </p:txBody>
       </p:sp>
@@ -15485,12 +15489,12 @@
         </p:nvSpPr>
         <p:spPr>
           <a:xfrm>
-            <a:off x="7635240" y="1325880"/>
-            <a:ext cx="3474720" cy="1207008"/>
+            <a:off x="7543800" y="1325880"/>
+            <a:ext cx="3611880" cy="1261872"/>
           </a:xfrm>
           <a:prstGeom prst="roundRect">
             <a:avLst>
-              <a:gd name="adj" fmla="val 9091"/>
+              <a:gd name="adj" fmla="val 8696"/>
             </a:avLst>
           </a:prstGeom>
           <a:solidFill>
@@ -15512,8 +15516,8 @@
         </p:nvSpPr>
         <p:spPr>
           <a:xfrm>
-            <a:off x="7799832" y="1472184"/>
-            <a:ext cx="3145536" cy="256032"/>
+            <a:off x="7708392" y="1453896"/>
+            <a:ext cx="3282696" cy="228600"/>
           </a:xfrm>
           <a:prstGeom prst="rect">
             <a:avLst/>
@@ -15529,7 +15533,7 @@
               <a:buNone/>
             </a:pPr>
             <a:r>
-              <a:rPr lang="en-US" sz="1300" b="1" dirty="0">
+              <a:rPr lang="en-US" sz="1220" b="1" dirty="0">
                 <a:solidFill>
                   <a:srgbClr val="0068B7"/>
                 </a:solidFill>
@@ -15539,7 +15543,7 @@
               </a:rPr>
               <a:t>Practice focus</a:t>
             </a:r>
-            <a:endParaRPr lang="en-US" sz="1300" dirty="0"/>
+            <a:endParaRPr lang="en-US" sz="1220" dirty="0"/>
           </a:p>
         </p:txBody>
       </p:sp>
@@ -15551,8 +15555,8 @@
         </p:nvSpPr>
         <p:spPr>
           <a:xfrm>
-            <a:off x="7799832" y="1801368"/>
-            <a:ext cx="3145536" cy="640080"/>
+            <a:off x="7708392" y="1764792"/>
+            <a:ext cx="3282696" cy="749808"/>
           </a:xfrm>
           <a:prstGeom prst="rect">
             <a:avLst/>
@@ -15570,7 +15574,7 @@
               <a:buNone/>
             </a:pPr>
             <a:r>
-              <a:rPr lang="en-US" sz="1320" dirty="0">
+              <a:rPr lang="en-US" sz="1220" dirty="0">
                 <a:solidFill>
                   <a:srgbClr val="17364A"/>
                 </a:solidFill>
@@ -15580,7 +15584,7 @@
               </a:rPr>
               <a:t>Explain why system integration is central to AI readiness in public health.</a:t>
             </a:r>
-            <a:endParaRPr lang="en-US" sz="1320" dirty="0"/>
+            <a:endParaRPr lang="en-US" sz="1220" dirty="0"/>
           </a:p>
         </p:txBody>
       </p:sp>
@@ -15592,12 +15596,12 @@
         </p:nvSpPr>
         <p:spPr>
           <a:xfrm>
-            <a:off x="7635240" y="2670048"/>
-            <a:ext cx="3474720" cy="1377086"/>
+            <a:off x="7543800" y="2724912"/>
+            <a:ext cx="3611880" cy="1527048"/>
           </a:xfrm>
           <a:prstGeom prst="roundRect">
             <a:avLst>
-              <a:gd name="adj" fmla="val 7968"/>
+              <a:gd name="adj" fmla="val 7186"/>
             </a:avLst>
           </a:prstGeom>
           <a:solidFill>
@@ -15619,8 +15623,8 @@
         </p:nvSpPr>
         <p:spPr>
           <a:xfrm>
-            <a:off x="7799832" y="2816352"/>
-            <a:ext cx="3145536" cy="256032"/>
+            <a:off x="7708392" y="2852928"/>
+            <a:ext cx="3282696" cy="228600"/>
           </a:xfrm>
           <a:prstGeom prst="rect">
             <a:avLst/>
@@ -15636,7 +15640,7 @@
               <a:buNone/>
             </a:pPr>
             <a:r>
-              <a:rPr lang="en-US" sz="1300" b="1" dirty="0">
+              <a:rPr lang="en-US" sz="1220" b="1" dirty="0">
                 <a:solidFill>
                   <a:srgbClr val="0068B7"/>
                 </a:solidFill>
@@ -15646,7 +15650,7 @@
               </a:rPr>
               <a:t>Concept checkpoints</a:t>
             </a:r>
-            <a:endParaRPr lang="en-US" sz="1300" dirty="0"/>
+            <a:endParaRPr lang="en-US" sz="1220" dirty="0"/>
           </a:p>
         </p:txBody>
       </p:sp>
@@ -15658,8 +15662,8 @@
         </p:nvSpPr>
         <p:spPr>
           <a:xfrm>
-            <a:off x="7818120" y="3182112"/>
-            <a:ext cx="3090672" cy="718718"/>
+            <a:off x="7726680" y="3182112"/>
+            <a:ext cx="3227832" cy="960120"/>
           </a:xfrm>
           <a:prstGeom prst="rect">
             <a:avLst/>
@@ -15677,7 +15681,7 @@
               <a:buNone/>
             </a:pPr>
             <a:r>
-              <a:rPr lang="en-US" sz="1220" dirty="0">
+              <a:rPr lang="en-US" sz="1140" dirty="0">
                 <a:solidFill>
                   <a:srgbClr val="17364A"/>
                 </a:solidFill>
@@ -15685,16 +15689,16 @@
                 <a:ea typeface="Aptos" pitchFamily="34" charset="-122"/>
                 <a:cs typeface="Aptos" pitchFamily="34" charset="-120"/>
               </a:rPr>
-              <a:t>Distinguish among common integration patterns such as.</a:t>
-            </a:r>
-            <a:endParaRPr lang="en-US" sz="1220" dirty="0"/>
-          </a:p>
-          <a:p>
-            <a:pPr indent="0" marL="0">
-              <a:buNone/>
-            </a:pPr>
-            <a:r>
-              <a:rPr lang="en-US" sz="1220" dirty="0">
+              <a:t>Distinguish among common integration patterns such.</a:t>
+            </a:r>
+            <a:endParaRPr lang="en-US" sz="1140" dirty="0"/>
+          </a:p>
+          <a:p>
+            <a:pPr indent="0" marL="0">
+              <a:buNone/>
+            </a:pPr>
+            <a:r>
+              <a:rPr lang="en-US" sz="1140" dirty="0">
                 <a:solidFill>
                   <a:srgbClr val="17364A"/>
                 </a:solidFill>
@@ -15702,16 +15706,16 @@
                 <a:ea typeface="Aptos" pitchFamily="34" charset="-122"/>
                 <a:cs typeface="Aptos" pitchFamily="34" charset="-120"/>
               </a:rPr>
-              <a:t>Identify the systems of record, upstream sources, downstream.</a:t>
-            </a:r>
-            <a:endParaRPr lang="en-US" sz="1220" dirty="0"/>
-          </a:p>
-          <a:p>
-            <a:pPr indent="0" marL="0">
-              <a:buNone/>
-            </a:pPr>
-            <a:r>
-              <a:rPr lang="en-US" sz="1220" dirty="0">
+              <a:t>Identify the systems of record, upstream sources,.</a:t>
+            </a:r>
+            <a:endParaRPr lang="en-US" sz="1140" dirty="0"/>
+          </a:p>
+          <a:p>
+            <a:pPr indent="0" marL="0">
+              <a:buNone/>
+            </a:pPr>
+            <a:r>
+              <a:rPr lang="en-US" sz="1140" dirty="0">
                 <a:solidFill>
                   <a:srgbClr val="17364A"/>
                 </a:solidFill>
@@ -15719,9 +15723,9 @@
                 <a:ea typeface="Aptos" pitchFamily="34" charset="-122"/>
                 <a:cs typeface="Aptos" pitchFamily="34" charset="-120"/>
               </a:rPr>
-              <a:t>Assess whether a proposed AI tool requires read-only access,.</a:t>
-            </a:r>
-            <a:endParaRPr lang="en-US" sz="1220" dirty="0"/>
+              <a:t>Assess whether a proposed AI tool requires.</a:t>
+            </a:r>
+            <a:endParaRPr lang="en-US" sz="1140" dirty="0"/>
           </a:p>
         </p:txBody>
       </p:sp>
@@ -15733,12 +15737,12 @@
         </p:nvSpPr>
         <p:spPr>
           <a:xfrm>
-            <a:off x="7635240" y="4184294"/>
-            <a:ext cx="3474720" cy="1466698"/>
+            <a:off x="7543800" y="4389120"/>
+            <a:ext cx="3611880" cy="1261872"/>
           </a:xfrm>
           <a:prstGeom prst="roundRect">
             <a:avLst>
-              <a:gd name="adj" fmla="val 7481"/>
+              <a:gd name="adj" fmla="val 8696"/>
             </a:avLst>
           </a:prstGeom>
           <a:solidFill>
@@ -15760,8 +15764,8 @@
         </p:nvSpPr>
         <p:spPr>
           <a:xfrm>
-            <a:off x="7799832" y="4330598"/>
-            <a:ext cx="3145536" cy="256032"/>
+            <a:off x="7708392" y="4517136"/>
+            <a:ext cx="3282696" cy="228600"/>
           </a:xfrm>
           <a:prstGeom prst="rect">
             <a:avLst/>
@@ -15777,7 +15781,7 @@
               <a:buNone/>
             </a:pPr>
             <a:r>
-              <a:rPr lang="en-US" sz="1300" b="1" dirty="0">
+              <a:rPr lang="en-US" sz="1220" b="1" dirty="0">
                 <a:solidFill>
                   <a:srgbClr val="0068B7"/>
                 </a:solidFill>
@@ -15787,7 +15791,7 @@
               </a:rPr>
               <a:t>What to produce</a:t>
             </a:r>
-            <a:endParaRPr lang="en-US" sz="1300" dirty="0"/>
+            <a:endParaRPr lang="en-US" sz="1220" dirty="0"/>
           </a:p>
         </p:txBody>
       </p:sp>
@@ -15799,8 +15803,8 @@
         </p:nvSpPr>
         <p:spPr>
           <a:xfrm>
-            <a:off x="7799832" y="4659782"/>
-            <a:ext cx="3145536" cy="899770"/>
+            <a:off x="7708392" y="4828032"/>
+            <a:ext cx="3282696" cy="749808"/>
           </a:xfrm>
           <a:prstGeom prst="rect">
             <a:avLst/>
@@ -15818,7 +15822,7 @@
               <a:buNone/>
             </a:pPr>
             <a:r>
-              <a:rPr lang="en-US" sz="1320" dirty="0">
+              <a:rPr lang="en-US" sz="1220" dirty="0">
                 <a:solidFill>
                   <a:srgbClr val="17364A"/>
                 </a:solidFill>
@@ -15826,9 +15830,9 @@
                 <a:ea typeface="Aptos" pitchFamily="34" charset="-122"/>
                 <a:cs typeface="Aptos" pitchFamily="34" charset="-120"/>
               </a:rPr>
-              <a:t>Use the assignment to test whether you can explain the concept, apply it to a realistic public health situation, and identify what would need review before the work moves forward.</a:t>
-            </a:r>
-            <a:endParaRPr lang="en-US" sz="1320" dirty="0"/>
+              <a:t>Use the assignment to test whether you can explain the concept, apply it to a.</a:t>
+            </a:r>
+            <a:endParaRPr lang="en-US" sz="1220" dirty="0"/>
           </a:p>
         </p:txBody>
       </p:sp>
@@ -16119,8 +16123,8 @@
         </p:nvSpPr>
         <p:spPr>
           <a:xfrm>
-            <a:off x="868680" y="1508760"/>
-            <a:ext cx="6309360" cy="4160520"/>
+            <a:off x="822960" y="1463040"/>
+            <a:ext cx="6565392" cy="4343400"/>
           </a:xfrm>
           <a:prstGeom prst="rect">
             <a:avLst/>
@@ -16138,7 +16142,7 @@
               <a:buNone/>
             </a:pPr>
             <a:r>
-              <a:rPr lang="en-US" sz="2100" dirty="0">
+              <a:rPr lang="en-US" sz="1920" dirty="0">
                 <a:solidFill>
                   <a:srgbClr val="003A63"/>
                 </a:solidFill>
@@ -16148,7 +16152,7 @@
               </a:rPr>
               <a:t>• Produce an integration pattern worksheet for a public health AI use case.</a:t>
             </a:r>
-            <a:endParaRPr lang="en-US" sz="2100" dirty="0"/>
+            <a:endParaRPr lang="en-US" sz="1920" dirty="0"/>
           </a:p>
         </p:txBody>
       </p:sp>
@@ -16160,12 +16164,12 @@
         </p:nvSpPr>
         <p:spPr>
           <a:xfrm>
-            <a:off x="7635240" y="1325880"/>
-            <a:ext cx="3474720" cy="1207008"/>
+            <a:off x="7543800" y="1325880"/>
+            <a:ext cx="3611880" cy="1261872"/>
           </a:xfrm>
           <a:prstGeom prst="roundRect">
             <a:avLst>
-              <a:gd name="adj" fmla="val 9091"/>
+              <a:gd name="adj" fmla="val 8696"/>
             </a:avLst>
           </a:prstGeom>
           <a:solidFill>
@@ -16187,8 +16191,8 @@
         </p:nvSpPr>
         <p:spPr>
           <a:xfrm>
-            <a:off x="7799832" y="1472184"/>
-            <a:ext cx="3145536" cy="256032"/>
+            <a:off x="7708392" y="1453896"/>
+            <a:ext cx="3282696" cy="228600"/>
           </a:xfrm>
           <a:prstGeom prst="rect">
             <a:avLst/>
@@ -16204,7 +16208,7 @@
               <a:buNone/>
             </a:pPr>
             <a:r>
-              <a:rPr lang="en-US" sz="1300" b="1" dirty="0">
+              <a:rPr lang="en-US" sz="1220" b="1" dirty="0">
                 <a:solidFill>
                   <a:srgbClr val="0068B7"/>
                 </a:solidFill>
@@ -16214,7 +16218,7 @@
               </a:rPr>
               <a:t>Practice focus</a:t>
             </a:r>
-            <a:endParaRPr lang="en-US" sz="1300" dirty="0"/>
+            <a:endParaRPr lang="en-US" sz="1220" dirty="0"/>
           </a:p>
         </p:txBody>
       </p:sp>
@@ -16226,8 +16230,8 @@
         </p:nvSpPr>
         <p:spPr>
           <a:xfrm>
-            <a:off x="7799832" y="1801368"/>
-            <a:ext cx="3145536" cy="640080"/>
+            <a:off x="7708392" y="1764792"/>
+            <a:ext cx="3282696" cy="749808"/>
           </a:xfrm>
           <a:prstGeom prst="rect">
             <a:avLst/>
@@ -16245,7 +16249,7 @@
               <a:buNone/>
             </a:pPr>
             <a:r>
-              <a:rPr lang="en-US" sz="1320" dirty="0">
+              <a:rPr lang="en-US" sz="1220" dirty="0">
                 <a:solidFill>
                   <a:srgbClr val="17364A"/>
                 </a:solidFill>
@@ -16255,7 +16259,7 @@
               </a:rPr>
               <a:t>Produce an integration pattern worksheet for a public health AI use case.</a:t>
             </a:r>
-            <a:endParaRPr lang="en-US" sz="1320" dirty="0"/>
+            <a:endParaRPr lang="en-US" sz="1220" dirty="0"/>
           </a:p>
         </p:txBody>
       </p:sp>
@@ -16267,12 +16271,12 @@
         </p:nvSpPr>
         <p:spPr>
           <a:xfrm>
-            <a:off x="7635240" y="2670048"/>
-            <a:ext cx="3474720" cy="1377086"/>
+            <a:off x="7543800" y="2724912"/>
+            <a:ext cx="3611880" cy="1527048"/>
           </a:xfrm>
           <a:prstGeom prst="roundRect">
             <a:avLst>
-              <a:gd name="adj" fmla="val 7968"/>
+              <a:gd name="adj" fmla="val 7186"/>
             </a:avLst>
           </a:prstGeom>
           <a:solidFill>
@@ -16294,8 +16298,8 @@
         </p:nvSpPr>
         <p:spPr>
           <a:xfrm>
-            <a:off x="7799832" y="2816352"/>
-            <a:ext cx="3145536" cy="256032"/>
+            <a:off x="7708392" y="2852928"/>
+            <a:ext cx="3282696" cy="228600"/>
           </a:xfrm>
           <a:prstGeom prst="rect">
             <a:avLst/>
@@ -16311,7 +16315,7 @@
               <a:buNone/>
             </a:pPr>
             <a:r>
-              <a:rPr lang="en-US" sz="1300" b="1" dirty="0">
+              <a:rPr lang="en-US" sz="1220" b="1" dirty="0">
                 <a:solidFill>
                   <a:srgbClr val="0068B7"/>
                 </a:solidFill>
@@ -16321,7 +16325,7 @@
               </a:rPr>
               <a:t>Concept checkpoints</a:t>
             </a:r>
-            <a:endParaRPr lang="en-US" sz="1300" dirty="0"/>
+            <a:endParaRPr lang="en-US" sz="1220" dirty="0"/>
           </a:p>
         </p:txBody>
       </p:sp>
@@ -16333,8 +16337,8 @@
         </p:nvSpPr>
         <p:spPr>
           <a:xfrm>
-            <a:off x="7818120" y="3182112"/>
-            <a:ext cx="3090672" cy="718718"/>
+            <a:off x="7726680" y="3182112"/>
+            <a:ext cx="3227832" cy="960120"/>
           </a:xfrm>
           <a:prstGeom prst="rect">
             <a:avLst/>
@@ -16352,7 +16356,7 @@
               <a:buNone/>
             </a:pPr>
             <a:r>
-              <a:rPr lang="en-US" sz="1220" dirty="0">
+              <a:rPr lang="en-US" sz="1140" dirty="0">
                 <a:solidFill>
                   <a:srgbClr val="17364A"/>
                 </a:solidFill>
@@ -16360,9 +16364,9 @@
                 <a:ea typeface="Aptos" pitchFamily="34" charset="-122"/>
                 <a:cs typeface="Aptos" pitchFamily="34" charset="-120"/>
               </a:rPr>
-              <a:t>Produce an integration pattern worksheet for a public health AI.</a:t>
-            </a:r>
-            <a:endParaRPr lang="en-US" sz="1220" dirty="0"/>
+              <a:t>Produce an integration pattern worksheet for a.</a:t>
+            </a:r>
+            <a:endParaRPr lang="en-US" sz="1140" dirty="0"/>
           </a:p>
         </p:txBody>
       </p:sp>
@@ -16374,12 +16378,12 @@
         </p:nvSpPr>
         <p:spPr>
           <a:xfrm>
-            <a:off x="7635240" y="4184294"/>
-            <a:ext cx="3474720" cy="1466698"/>
+            <a:off x="7543800" y="4389120"/>
+            <a:ext cx="3611880" cy="1261872"/>
           </a:xfrm>
           <a:prstGeom prst="roundRect">
             <a:avLst>
-              <a:gd name="adj" fmla="val 7481"/>
+              <a:gd name="adj" fmla="val 8696"/>
             </a:avLst>
           </a:prstGeom>
           <a:solidFill>
@@ -16401,8 +16405,8 @@
         </p:nvSpPr>
         <p:spPr>
           <a:xfrm>
-            <a:off x="7799832" y="4330598"/>
-            <a:ext cx="3145536" cy="256032"/>
+            <a:off x="7708392" y="4517136"/>
+            <a:ext cx="3282696" cy="228600"/>
           </a:xfrm>
           <a:prstGeom prst="rect">
             <a:avLst/>
@@ -16418,7 +16422,7 @@
               <a:buNone/>
             </a:pPr>
             <a:r>
-              <a:rPr lang="en-US" sz="1300" b="1" dirty="0">
+              <a:rPr lang="en-US" sz="1220" b="1" dirty="0">
                 <a:solidFill>
                   <a:srgbClr val="0068B7"/>
                 </a:solidFill>
@@ -16428,7 +16432,7 @@
               </a:rPr>
               <a:t>What to produce</a:t>
             </a:r>
-            <a:endParaRPr lang="en-US" sz="1300" dirty="0"/>
+            <a:endParaRPr lang="en-US" sz="1220" dirty="0"/>
           </a:p>
         </p:txBody>
       </p:sp>
@@ -16440,8 +16444,8 @@
         </p:nvSpPr>
         <p:spPr>
           <a:xfrm>
-            <a:off x="7799832" y="4659782"/>
-            <a:ext cx="3145536" cy="899770"/>
+            <a:off x="7708392" y="4828032"/>
+            <a:ext cx="3282696" cy="749808"/>
           </a:xfrm>
           <a:prstGeom prst="rect">
             <a:avLst/>
@@ -16459,7 +16463,7 @@
               <a:buNone/>
             </a:pPr>
             <a:r>
-              <a:rPr lang="en-US" sz="1320" dirty="0">
+              <a:rPr lang="en-US" sz="1220" dirty="0">
                 <a:solidFill>
                   <a:srgbClr val="17364A"/>
                 </a:solidFill>
@@ -16467,9 +16471,9 @@
                 <a:ea typeface="Aptos" pitchFamily="34" charset="-122"/>
                 <a:cs typeface="Aptos" pitchFamily="34" charset="-120"/>
               </a:rPr>
-              <a:t>Use the assignment to test whether you can explain the concept, apply it to a realistic public health situation, and identify what would need review before the work moves forward.</a:t>
-            </a:r>
-            <a:endParaRPr lang="en-US" sz="1320" dirty="0"/>
+              <a:t>Use the assignment to test whether you can explain the concept, apply it to a.</a:t>
+            </a:r>
+            <a:endParaRPr lang="en-US" sz="1220" dirty="0"/>
           </a:p>
         </p:txBody>
       </p:sp>
@@ -16760,8 +16764,8 @@
         </p:nvSpPr>
         <p:spPr>
           <a:xfrm>
-            <a:off x="868680" y="1508760"/>
-            <a:ext cx="6309360" cy="4160520"/>
+            <a:off x="822960" y="1463040"/>
+            <a:ext cx="6565392" cy="4343400"/>
           </a:xfrm>
           <a:prstGeom prst="rect">
             <a:avLst/>
@@ -16779,7 +16783,7 @@
               <a:buNone/>
             </a:pPr>
             <a:r>
-              <a:rPr lang="en-US" sz="2100" dirty="0">
+              <a:rPr lang="en-US" sz="1920" dirty="0">
                 <a:solidFill>
                   <a:srgbClr val="003A63"/>
                 </a:solidFill>
@@ -16789,14 +16793,14 @@
               </a:rPr>
               <a:t>• Public health AI rarely succeeds as a stand-alone application.</a:t>
             </a:r>
-            <a:endParaRPr lang="en-US" sz="2100" dirty="0"/>
-          </a:p>
-          <a:p>
-            <a:pPr indent="0" marL="0">
-              <a:buNone/>
-            </a:pPr>
-            <a:r>
-              <a:rPr lang="en-US" sz="2100" dirty="0">
+            <a:endParaRPr lang="en-US" sz="1920" dirty="0"/>
+          </a:p>
+          <a:p>
+            <a:pPr indent="0" marL="0">
+              <a:buNone/>
+            </a:pPr>
+            <a:r>
+              <a:rPr lang="en-US" sz="1920" dirty="0">
                 <a:solidFill>
                   <a:srgbClr val="003A63"/>
                 </a:solidFill>
@@ -16804,16 +16808,16 @@
                 <a:ea typeface="Aptos" pitchFamily="34" charset="-122"/>
                 <a:cs typeface="Aptos" pitchFamily="34" charset="-120"/>
               </a:rPr>
-              <a:t>• The value of an AI-supported workflow depends on how well it is integrated with systems of.</a:t>
-            </a:r>
-            <a:endParaRPr lang="en-US" sz="2100" dirty="0"/>
-          </a:p>
-          <a:p>
-            <a:pPr indent="0" marL="0">
-              <a:buNone/>
-            </a:pPr>
-            <a:r>
-              <a:rPr lang="en-US" sz="2100" dirty="0">
+              <a:t>• The value of an AI-supported workflow depends on how well it is integrated.</a:t>
+            </a:r>
+            <a:endParaRPr lang="en-US" sz="1920" dirty="0"/>
+          </a:p>
+          <a:p>
+            <a:pPr indent="0" marL="0">
+              <a:buNone/>
+            </a:pPr>
+            <a:r>
+              <a:rPr lang="en-US" sz="1920" dirty="0">
                 <a:solidFill>
                   <a:srgbClr val="003A63"/>
                 </a:solidFill>
@@ -16821,9 +16825,9 @@
                 <a:ea typeface="Aptos" pitchFamily="34" charset="-122"/>
                 <a:cs typeface="Aptos" pitchFamily="34" charset="-120"/>
               </a:rPr>
-              <a:t>• This module helps learners understand the integration patterns that allow AI to support public.</a:t>
-            </a:r>
-            <a:endParaRPr lang="en-US" sz="2100" dirty="0"/>
+              <a:t>• This module helps learners understand the integration patterns that allow AI.</a:t>
+            </a:r>
+            <a:endParaRPr lang="en-US" sz="1920" dirty="0"/>
           </a:p>
         </p:txBody>
       </p:sp>
@@ -16835,12 +16839,12 @@
         </p:nvSpPr>
         <p:spPr>
           <a:xfrm>
-            <a:off x="7635240" y="1325880"/>
-            <a:ext cx="3474720" cy="1207008"/>
+            <a:off x="7543800" y="1325880"/>
+            <a:ext cx="3611880" cy="1261872"/>
           </a:xfrm>
           <a:prstGeom prst="roundRect">
             <a:avLst>
-              <a:gd name="adj" fmla="val 9091"/>
+              <a:gd name="adj" fmla="val 8696"/>
             </a:avLst>
           </a:prstGeom>
           <a:solidFill>
@@ -16862,8 +16866,8 @@
         </p:nvSpPr>
         <p:spPr>
           <a:xfrm>
-            <a:off x="7799832" y="1472184"/>
-            <a:ext cx="3145536" cy="256032"/>
+            <a:off x="7708392" y="1453896"/>
+            <a:ext cx="3282696" cy="228600"/>
           </a:xfrm>
           <a:prstGeom prst="rect">
             <a:avLst/>
@@ -16879,7 +16883,7 @@
               <a:buNone/>
             </a:pPr>
             <a:r>
-              <a:rPr lang="en-US" sz="1300" b="1" dirty="0">
+              <a:rPr lang="en-US" sz="1220" b="1" dirty="0">
                 <a:solidFill>
                   <a:srgbClr val="0068B7"/>
                 </a:solidFill>
@@ -16889,7 +16893,7 @@
               </a:rPr>
               <a:t>Core concept</a:t>
             </a:r>
-            <a:endParaRPr lang="en-US" sz="1300" dirty="0"/>
+            <a:endParaRPr lang="en-US" sz="1220" dirty="0"/>
           </a:p>
         </p:txBody>
       </p:sp>
@@ -16901,8 +16905,8 @@
         </p:nvSpPr>
         <p:spPr>
           <a:xfrm>
-            <a:off x="7799832" y="1801368"/>
-            <a:ext cx="3145536" cy="640080"/>
+            <a:off x="7708392" y="1764792"/>
+            <a:ext cx="3282696" cy="749808"/>
           </a:xfrm>
           <a:prstGeom prst="rect">
             <a:avLst/>
@@ -16920,7 +16924,7 @@
               <a:buNone/>
             </a:pPr>
             <a:r>
-              <a:rPr lang="en-US" sz="1320" dirty="0">
+              <a:rPr lang="en-US" sz="1220" dirty="0">
                 <a:solidFill>
                   <a:srgbClr val="17364A"/>
                 </a:solidFill>
@@ -16930,7 +16934,7 @@
               </a:rPr>
               <a:t>Public health AI rarely succeeds as a stand-alone application.</a:t>
             </a:r>
-            <a:endParaRPr lang="en-US" sz="1320" dirty="0"/>
+            <a:endParaRPr lang="en-US" sz="1220" dirty="0"/>
           </a:p>
         </p:txBody>
       </p:sp>
@@ -16942,12 +16946,12 @@
         </p:nvSpPr>
         <p:spPr>
           <a:xfrm>
-            <a:off x="7635240" y="2670048"/>
-            <a:ext cx="3474720" cy="1377086"/>
+            <a:off x="7543800" y="2724912"/>
+            <a:ext cx="3611880" cy="1527048"/>
           </a:xfrm>
           <a:prstGeom prst="roundRect">
             <a:avLst>
-              <a:gd name="adj" fmla="val 7968"/>
+              <a:gd name="adj" fmla="val 7186"/>
             </a:avLst>
           </a:prstGeom>
           <a:solidFill>
@@ -16969,8 +16973,8 @@
         </p:nvSpPr>
         <p:spPr>
           <a:xfrm>
-            <a:off x="7799832" y="2816352"/>
-            <a:ext cx="3145536" cy="256032"/>
+            <a:off x="7708392" y="2852928"/>
+            <a:ext cx="3282696" cy="228600"/>
           </a:xfrm>
           <a:prstGeom prst="rect">
             <a:avLst/>
@@ -16986,7 +16990,7 @@
               <a:buNone/>
             </a:pPr>
             <a:r>
-              <a:rPr lang="en-US" sz="1300" b="1" dirty="0">
+              <a:rPr lang="en-US" sz="1220" b="1" dirty="0">
                 <a:solidFill>
                   <a:srgbClr val="0068B7"/>
                 </a:solidFill>
@@ -16996,7 +17000,7 @@
               </a:rPr>
               <a:t>Concept checkpoints</a:t>
             </a:r>
-            <a:endParaRPr lang="en-US" sz="1300" dirty="0"/>
+            <a:endParaRPr lang="en-US" sz="1220" dirty="0"/>
           </a:p>
         </p:txBody>
       </p:sp>
@@ -17008,8 +17012,8 @@
         </p:nvSpPr>
         <p:spPr>
           <a:xfrm>
-            <a:off x="7818120" y="3182112"/>
-            <a:ext cx="3090672" cy="718718"/>
+            <a:off x="7726680" y="3182112"/>
+            <a:ext cx="3227832" cy="960120"/>
           </a:xfrm>
           <a:prstGeom prst="rect">
             <a:avLst/>
@@ -17027,7 +17031,7 @@
               <a:buNone/>
             </a:pPr>
             <a:r>
-              <a:rPr lang="en-US" sz="1220" dirty="0">
+              <a:rPr lang="en-US" sz="1140" dirty="0">
                 <a:solidFill>
                   <a:srgbClr val="17364A"/>
                 </a:solidFill>
@@ -17035,16 +17039,16 @@
                 <a:ea typeface="Aptos" pitchFamily="34" charset="-122"/>
                 <a:cs typeface="Aptos" pitchFamily="34" charset="-120"/>
               </a:rPr>
-              <a:t>The value of an AI-supported workflow depends on how well it is.</a:t>
-            </a:r>
-            <a:endParaRPr lang="en-US" sz="1220" dirty="0"/>
-          </a:p>
-          <a:p>
-            <a:pPr indent="0" marL="0">
-              <a:buNone/>
-            </a:pPr>
-            <a:r>
-              <a:rPr lang="en-US" sz="1220" dirty="0">
+              <a:t>The value of an AI-supported workflow depends on.</a:t>
+            </a:r>
+            <a:endParaRPr lang="en-US" sz="1140" dirty="0"/>
+          </a:p>
+          <a:p>
+            <a:pPr indent="0" marL="0">
+              <a:buNone/>
+            </a:pPr>
+            <a:r>
+              <a:rPr lang="en-US" sz="1140" dirty="0">
                 <a:solidFill>
                   <a:srgbClr val="17364A"/>
                 </a:solidFill>
@@ -17052,16 +17056,16 @@
                 <a:ea typeface="Aptos" pitchFamily="34" charset="-122"/>
                 <a:cs typeface="Aptos" pitchFamily="34" charset="-120"/>
               </a:rPr>
-              <a:t>This module helps learners understand the integration patterns.</a:t>
-            </a:r>
-            <a:endParaRPr lang="en-US" sz="1220" dirty="0"/>
-          </a:p>
-          <a:p>
-            <a:pPr indent="0" marL="0">
-              <a:buNone/>
-            </a:pPr>
-            <a:r>
-              <a:rPr lang="en-US" sz="1220" dirty="0">
+              <a:t>This module helps learners understand the.</a:t>
+            </a:r>
+            <a:endParaRPr lang="en-US" sz="1140" dirty="0"/>
+          </a:p>
+          <a:p>
+            <a:pPr indent="0" marL="0">
+              <a:buNone/>
+            </a:pPr>
+            <a:r>
+              <a:rPr lang="en-US" sz="1140" dirty="0">
                 <a:solidFill>
                   <a:srgbClr val="17364A"/>
                 </a:solidFill>
@@ -17069,9 +17073,9 @@
                 <a:ea typeface="Aptos" pitchFamily="34" charset="-122"/>
                 <a:cs typeface="Aptos" pitchFamily="34" charset="-120"/>
               </a:rPr>
-              <a:t>The module focuses on practical integration choices rather than.</a:t>
-            </a:r>
-            <a:endParaRPr lang="en-US" sz="1220" dirty="0"/>
+              <a:t>The module focuses on practical integration.</a:t>
+            </a:r>
+            <a:endParaRPr lang="en-US" sz="1140" dirty="0"/>
           </a:p>
         </p:txBody>
       </p:sp>
@@ -17083,12 +17087,12 @@
         </p:nvSpPr>
         <p:spPr>
           <a:xfrm>
-            <a:off x="7635240" y="4184294"/>
-            <a:ext cx="3474720" cy="1466698"/>
+            <a:off x="7543800" y="4389120"/>
+            <a:ext cx="3611880" cy="1261872"/>
           </a:xfrm>
           <a:prstGeom prst="roundRect">
             <a:avLst>
-              <a:gd name="adj" fmla="val 7481"/>
+              <a:gd name="adj" fmla="val 8696"/>
             </a:avLst>
           </a:prstGeom>
           <a:solidFill>
@@ -17110,8 +17114,8 @@
         </p:nvSpPr>
         <p:spPr>
           <a:xfrm>
-            <a:off x="7799832" y="4330598"/>
-            <a:ext cx="3145536" cy="256032"/>
+            <a:off x="7708392" y="4517136"/>
+            <a:ext cx="3282696" cy="228600"/>
           </a:xfrm>
           <a:prstGeom prst="rect">
             <a:avLst/>
@@ -17127,7 +17131,7 @@
               <a:buNone/>
             </a:pPr>
             <a:r>
-              <a:rPr lang="en-US" sz="1300" b="1" dirty="0">
+              <a:rPr lang="en-US" sz="1220" b="1" dirty="0">
                 <a:solidFill>
                   <a:srgbClr val="0068B7"/>
                 </a:solidFill>
@@ -17137,7 +17141,7 @@
               </a:rPr>
               <a:t>Apply it</a:t>
             </a:r>
-            <a:endParaRPr lang="en-US" sz="1300" dirty="0"/>
+            <a:endParaRPr lang="en-US" sz="1220" dirty="0"/>
           </a:p>
         </p:txBody>
       </p:sp>
@@ -17149,8 +17153,8 @@
         </p:nvSpPr>
         <p:spPr>
           <a:xfrm>
-            <a:off x="7799832" y="4659782"/>
-            <a:ext cx="3145536" cy="899770"/>
+            <a:off x="7708392" y="4828032"/>
+            <a:ext cx="3282696" cy="749808"/>
           </a:xfrm>
           <a:prstGeom prst="rect">
             <a:avLst/>
@@ -17168,7 +17172,7 @@
               <a:buNone/>
             </a:pPr>
             <a:r>
-              <a:rPr lang="en-US" sz="1320" dirty="0">
+              <a:rPr lang="en-US" sz="1220" dirty="0">
                 <a:solidFill>
                   <a:srgbClr val="17364A"/>
                 </a:solidFill>
@@ -17176,9 +17180,9 @@
                 <a:ea typeface="Aptos" pitchFamily="34" charset="-122"/>
                 <a:cs typeface="Aptos" pitchFamily="34" charset="-120"/>
               </a:rPr>
-              <a:t>Connect the concept to public health purpose, responsible use, required safeguards, documentation, and the next action a department should take.</a:t>
-            </a:r>
-            <a:endParaRPr lang="en-US" sz="1320" dirty="0"/>
+              <a:t>Connect the concept to public health purpose, responsible use, required.</a:t>
+            </a:r>
+            <a:endParaRPr lang="en-US" sz="1220" dirty="0"/>
           </a:p>
         </p:txBody>
       </p:sp>
@@ -17469,8 +17473,8 @@
         </p:nvSpPr>
         <p:spPr>
           <a:xfrm>
-            <a:off x="868680" y="1508760"/>
-            <a:ext cx="6309360" cy="4160520"/>
+            <a:off x="822960" y="1463040"/>
+            <a:ext cx="6565392" cy="4343400"/>
           </a:xfrm>
           <a:prstGeom prst="rect">
             <a:avLst/>
@@ -17488,7 +17492,7 @@
               <a:buNone/>
             </a:pPr>
             <a:r>
-              <a:rPr lang="en-US" sz="2100" dirty="0">
+              <a:rPr lang="en-US" sz="1920" dirty="0">
                 <a:solidFill>
                   <a:srgbClr val="003A63"/>
                 </a:solidFill>
@@ -17496,16 +17500,16 @@
                 <a:ea typeface="Aptos" pitchFamily="34" charset="-122"/>
                 <a:cs typeface="Aptos" pitchFamily="34" charset="-120"/>
               </a:rPr>
-              <a:t>• Integration pattern: A reusable approach for connecting systems, services, data flows, and.</a:t>
-            </a:r>
-            <a:endParaRPr lang="en-US" sz="2100" dirty="0"/>
-          </a:p>
-          <a:p>
-            <a:pPr indent="0" marL="0">
-              <a:buNone/>
-            </a:pPr>
-            <a:r>
-              <a:rPr lang="en-US" sz="2100" dirty="0">
+              <a:t>• Integration pattern: A reusable approach for connecting systems, services,.</a:t>
+            </a:r>
+            <a:endParaRPr lang="en-US" sz="1920" dirty="0"/>
+          </a:p>
+          <a:p>
+            <a:pPr indent="0" marL="0">
+              <a:buNone/>
+            </a:pPr>
+            <a:r>
+              <a:rPr lang="en-US" sz="1920" dirty="0">
                 <a:solidFill>
                   <a:srgbClr val="003A63"/>
                 </a:solidFill>
@@ -17513,16 +17517,16 @@
                 <a:ea typeface="Aptos" pitchFamily="34" charset="-122"/>
                 <a:cs typeface="Aptos" pitchFamily="34" charset="-120"/>
               </a:rPr>
-              <a:t>• Interface engine: Software that routes, transforms, validates, and monitors messages between.</a:t>
-            </a:r>
-            <a:endParaRPr lang="en-US" sz="2100" dirty="0"/>
-          </a:p>
-          <a:p>
-            <a:pPr indent="0" marL="0">
-              <a:buNone/>
-            </a:pPr>
-            <a:r>
-              <a:rPr lang="en-US" sz="2100" dirty="0">
+              <a:t>• Interface engine: Software that routes, transforms, validates, and monitors.</a:t>
+            </a:r>
+            <a:endParaRPr lang="en-US" sz="1920" dirty="0"/>
+          </a:p>
+          <a:p>
+            <a:pPr indent="0" marL="0">
+              <a:buNone/>
+            </a:pPr>
+            <a:r>
+              <a:rPr lang="en-US" sz="1920" dirty="0">
                 <a:solidFill>
                   <a:srgbClr val="003A63"/>
                 </a:solidFill>
@@ -17530,9 +17534,9 @@
                 <a:ea typeface="Aptos" pitchFamily="34" charset="-122"/>
                 <a:cs typeface="Aptos" pitchFamily="34" charset="-120"/>
               </a:rPr>
-              <a:t>• Message broker: A service that allows systems to send and receive messages through a managed.</a:t>
-            </a:r>
-            <a:endParaRPr lang="en-US" sz="2100" dirty="0"/>
+              <a:t>• Message broker: A service that allows systems to send and receive messages.</a:t>
+            </a:r>
+            <a:endParaRPr lang="en-US" sz="1920" dirty="0"/>
           </a:p>
         </p:txBody>
       </p:sp>
@@ -17544,12 +17548,12 @@
         </p:nvSpPr>
         <p:spPr>
           <a:xfrm>
-            <a:off x="7635240" y="1325880"/>
-            <a:ext cx="3474720" cy="1255471"/>
+            <a:off x="7543800" y="1325880"/>
+            <a:ext cx="3611880" cy="1261872"/>
           </a:xfrm>
           <a:prstGeom prst="roundRect">
             <a:avLst>
-              <a:gd name="adj" fmla="val 8740"/>
+              <a:gd name="adj" fmla="val 8696"/>
             </a:avLst>
           </a:prstGeom>
           <a:solidFill>
@@ -17571,8 +17575,8 @@
         </p:nvSpPr>
         <p:spPr>
           <a:xfrm>
-            <a:off x="7799832" y="1472184"/>
-            <a:ext cx="3145536" cy="256032"/>
+            <a:off x="7708392" y="1453896"/>
+            <a:ext cx="3282696" cy="228600"/>
           </a:xfrm>
           <a:prstGeom prst="rect">
             <a:avLst/>
@@ -17588,7 +17592,7 @@
               <a:buNone/>
             </a:pPr>
             <a:r>
-              <a:rPr lang="en-US" sz="1300" b="1" dirty="0">
+              <a:rPr lang="en-US" sz="1220" b="1" dirty="0">
                 <a:solidFill>
                   <a:srgbClr val="0068B7"/>
                 </a:solidFill>
@@ -17598,7 +17602,7 @@
               </a:rPr>
               <a:t>Core concept</a:t>
             </a:r>
-            <a:endParaRPr lang="en-US" sz="1300" dirty="0"/>
+            <a:endParaRPr lang="en-US" sz="1220" dirty="0"/>
           </a:p>
         </p:txBody>
       </p:sp>
@@ -17610,8 +17614,8 @@
         </p:nvSpPr>
         <p:spPr>
           <a:xfrm>
-            <a:off x="7799832" y="1801368"/>
-            <a:ext cx="3145536" cy="688543"/>
+            <a:off x="7708392" y="1764792"/>
+            <a:ext cx="3282696" cy="749808"/>
           </a:xfrm>
           <a:prstGeom prst="rect">
             <a:avLst/>
@@ -17629,7 +17633,7 @@
               <a:buNone/>
             </a:pPr>
             <a:r>
-              <a:rPr lang="en-US" sz="1320" dirty="0">
+              <a:rPr lang="en-US" sz="1220" dirty="0">
                 <a:solidFill>
                   <a:srgbClr val="17364A"/>
                 </a:solidFill>
@@ -17637,9 +17641,9 @@
                 <a:ea typeface="Aptos" pitchFamily="34" charset="-122"/>
                 <a:cs typeface="Aptos" pitchFamily="34" charset="-120"/>
               </a:rPr>
-              <a:t>Integration pattern: A reusable approach for connecting systems, services, data flows, and workflows.</a:t>
-            </a:r>
-            <a:endParaRPr lang="en-US" sz="1320" dirty="0"/>
+              <a:t>Integration pattern: A reusable approach for connecting systems, services, data.</a:t>
+            </a:r>
+            <a:endParaRPr lang="en-US" sz="1220" dirty="0"/>
           </a:p>
         </p:txBody>
       </p:sp>
@@ -17651,12 +17655,12 @@
         </p:nvSpPr>
         <p:spPr>
           <a:xfrm>
-            <a:off x="7635240" y="2718511"/>
-            <a:ext cx="3474720" cy="1328623"/>
+            <a:off x="7543800" y="2724912"/>
+            <a:ext cx="3611880" cy="1527048"/>
           </a:xfrm>
           <a:prstGeom prst="roundRect">
             <a:avLst>
-              <a:gd name="adj" fmla="val 8259"/>
+              <a:gd name="adj" fmla="val 7186"/>
             </a:avLst>
           </a:prstGeom>
           <a:solidFill>
@@ -17678,8 +17682,8 @@
         </p:nvSpPr>
         <p:spPr>
           <a:xfrm>
-            <a:off x="7799832" y="2864815"/>
-            <a:ext cx="3145536" cy="256032"/>
+            <a:off x="7708392" y="2852928"/>
+            <a:ext cx="3282696" cy="228600"/>
           </a:xfrm>
           <a:prstGeom prst="rect">
             <a:avLst/>
@@ -17695,7 +17699,7 @@
               <a:buNone/>
             </a:pPr>
             <a:r>
-              <a:rPr lang="en-US" sz="1300" b="1" dirty="0">
+              <a:rPr lang="en-US" sz="1220" b="1" dirty="0">
                 <a:solidFill>
                   <a:srgbClr val="0068B7"/>
                 </a:solidFill>
@@ -17705,7 +17709,7 @@
               </a:rPr>
               <a:t>Concept checkpoints</a:t>
             </a:r>
-            <a:endParaRPr lang="en-US" sz="1300" dirty="0"/>
+            <a:endParaRPr lang="en-US" sz="1220" dirty="0"/>
           </a:p>
         </p:txBody>
       </p:sp>
@@ -17717,8 +17721,8 @@
         </p:nvSpPr>
         <p:spPr>
           <a:xfrm>
-            <a:off x="7818120" y="3230575"/>
-            <a:ext cx="3090672" cy="670255"/>
+            <a:off x="7726680" y="3182112"/>
+            <a:ext cx="3227832" cy="960120"/>
           </a:xfrm>
           <a:prstGeom prst="rect">
             <a:avLst/>
@@ -17736,7 +17740,7 @@
               <a:buNone/>
             </a:pPr>
             <a:r>
-              <a:rPr lang="en-US" sz="1220" dirty="0">
+              <a:rPr lang="en-US" sz="1140" dirty="0">
                 <a:solidFill>
                   <a:srgbClr val="17364A"/>
                 </a:solidFill>
@@ -17744,16 +17748,16 @@
                 <a:ea typeface="Aptos" pitchFamily="34" charset="-122"/>
                 <a:cs typeface="Aptos" pitchFamily="34" charset="-120"/>
               </a:rPr>
-              <a:t>Message broker: A service that allows systems to send and receive.</a:t>
-            </a:r>
-            <a:endParaRPr lang="en-US" sz="1220" dirty="0"/>
-          </a:p>
-          <a:p>
-            <a:pPr indent="0" marL="0">
-              <a:buNone/>
-            </a:pPr>
-            <a:r>
-              <a:rPr lang="en-US" sz="1220" dirty="0">
+              <a:t>Message broker: A service that allows systems to.</a:t>
+            </a:r>
+            <a:endParaRPr lang="en-US" sz="1140" dirty="0"/>
+          </a:p>
+          <a:p>
+            <a:pPr indent="0" marL="0">
+              <a:buNone/>
+            </a:pPr>
+            <a:r>
+              <a:rPr lang="en-US" sz="1140" dirty="0">
                 <a:solidFill>
                   <a:srgbClr val="17364A"/>
                 </a:solidFill>
@@ -17761,16 +17765,16 @@
                 <a:ea typeface="Aptos" pitchFamily="34" charset="-122"/>
                 <a:cs typeface="Aptos" pitchFamily="34" charset="-120"/>
               </a:rPr>
-              <a:t>Bulk data exchange: The transfer of large datasets at scheduled.</a:t>
-            </a:r>
-            <a:endParaRPr lang="en-US" sz="1220" dirty="0"/>
-          </a:p>
-          <a:p>
-            <a:pPr indent="0" marL="0">
-              <a:buNone/>
-            </a:pPr>
-            <a:r>
-              <a:rPr lang="en-US" sz="1220" dirty="0">
+              <a:t>Bulk data exchange: The transfer of large datasets.</a:t>
+            </a:r>
+            <a:endParaRPr lang="en-US" sz="1140" dirty="0"/>
+          </a:p>
+          <a:p>
+            <a:pPr indent="0" marL="0">
+              <a:buNone/>
+            </a:pPr>
+            <a:r>
+              <a:rPr lang="en-US" sz="1140" dirty="0">
                 <a:solidFill>
                   <a:srgbClr val="17364A"/>
                 </a:solidFill>
@@ -17778,9 +17782,9 @@
                 <a:ea typeface="Aptos" pitchFamily="34" charset="-122"/>
                 <a:cs typeface="Aptos" pitchFamily="34" charset="-120"/>
               </a:rPr>
-              <a:t>Write-back: A system action that updates, creates, or changes.</a:t>
-            </a:r>
-            <a:endParaRPr lang="en-US" sz="1220" dirty="0"/>
+              <a:t>Write-back: A system action that updates, creates,.</a:t>
+            </a:r>
+            <a:endParaRPr lang="en-US" sz="1140" dirty="0"/>
           </a:p>
         </p:txBody>
       </p:sp>
@@ -17792,12 +17796,12 @@
         </p:nvSpPr>
         <p:spPr>
           <a:xfrm>
-            <a:off x="7635240" y="4184294"/>
-            <a:ext cx="3474720" cy="1466698"/>
+            <a:off x="7543800" y="4389120"/>
+            <a:ext cx="3611880" cy="1261872"/>
           </a:xfrm>
           <a:prstGeom prst="roundRect">
             <a:avLst>
-              <a:gd name="adj" fmla="val 7481"/>
+              <a:gd name="adj" fmla="val 8696"/>
             </a:avLst>
           </a:prstGeom>
           <a:solidFill>
@@ -17819,8 +17823,8 @@
         </p:nvSpPr>
         <p:spPr>
           <a:xfrm>
-            <a:off x="7799832" y="4330598"/>
-            <a:ext cx="3145536" cy="256032"/>
+            <a:off x="7708392" y="4517136"/>
+            <a:ext cx="3282696" cy="228600"/>
           </a:xfrm>
           <a:prstGeom prst="rect">
             <a:avLst/>
@@ -17836,7 +17840,7 @@
               <a:buNone/>
             </a:pPr>
             <a:r>
-              <a:rPr lang="en-US" sz="1300" b="1" dirty="0">
+              <a:rPr lang="en-US" sz="1220" b="1" dirty="0">
                 <a:solidFill>
                   <a:srgbClr val="0068B7"/>
                 </a:solidFill>
@@ -17846,7 +17850,7 @@
               </a:rPr>
               <a:t>Apply it</a:t>
             </a:r>
-            <a:endParaRPr lang="en-US" sz="1300" dirty="0"/>
+            <a:endParaRPr lang="en-US" sz="1220" dirty="0"/>
           </a:p>
         </p:txBody>
       </p:sp>
@@ -17858,8 +17862,8 @@
         </p:nvSpPr>
         <p:spPr>
           <a:xfrm>
-            <a:off x="7799832" y="4659782"/>
-            <a:ext cx="3145536" cy="899770"/>
+            <a:off x="7708392" y="4828032"/>
+            <a:ext cx="3282696" cy="749808"/>
           </a:xfrm>
           <a:prstGeom prst="rect">
             <a:avLst/>
@@ -17877,7 +17881,7 @@
               <a:buNone/>
             </a:pPr>
             <a:r>
-              <a:rPr lang="en-US" sz="1320" dirty="0">
+              <a:rPr lang="en-US" sz="1220" dirty="0">
                 <a:solidFill>
                   <a:srgbClr val="17364A"/>
                 </a:solidFill>
@@ -17885,9 +17889,9 @@
                 <a:ea typeface="Aptos" pitchFamily="34" charset="-122"/>
                 <a:cs typeface="Aptos" pitchFamily="34" charset="-120"/>
               </a:rPr>
-              <a:t>Connect the concept to public health purpose, responsible use, required safeguards, documentation, and the next action a department should take.</a:t>
-            </a:r>
-            <a:endParaRPr lang="en-US" sz="1320" dirty="0"/>
+              <a:t>Connect the concept to public health purpose, responsible use, required.</a:t>
+            </a:r>
+            <a:endParaRPr lang="en-US" sz="1220" dirty="0"/>
           </a:p>
         </p:txBody>
       </p:sp>
@@ -18178,8 +18182,8 @@
         </p:nvSpPr>
         <p:spPr>
           <a:xfrm>
-            <a:off x="868680" y="1508760"/>
-            <a:ext cx="6309360" cy="4160520"/>
+            <a:off x="822960" y="1463040"/>
+            <a:ext cx="6565392" cy="4343400"/>
           </a:xfrm>
           <a:prstGeom prst="rect">
             <a:avLst/>
@@ -18197,7 +18201,7 @@
               <a:buNone/>
             </a:pPr>
             <a:r>
-              <a:rPr lang="en-US" sz="2100" dirty="0">
+              <a:rPr lang="en-US" sz="1920" dirty="0">
                 <a:solidFill>
                   <a:srgbClr val="003A63"/>
                 </a:solidFill>
@@ -18207,14 +18211,14 @@
               </a:rPr>
               <a:t>• This national-level module is intended for training and planning purposes.</a:t>
             </a:r>
-            <a:endParaRPr lang="en-US" sz="2100" dirty="0"/>
-          </a:p>
-          <a:p>
-            <a:pPr indent="0" marL="0">
-              <a:buNone/>
-            </a:pPr>
-            <a:r>
-              <a:rPr lang="en-US" sz="2100" dirty="0">
+            <a:endParaRPr lang="en-US" sz="1920" dirty="0"/>
+          </a:p>
+          <a:p>
+            <a:pPr indent="0" marL="0">
+              <a:buNone/>
+            </a:pPr>
+            <a:r>
+              <a:rPr lang="en-US" sz="1920" dirty="0">
                 <a:solidFill>
                   <a:srgbClr val="003A63"/>
                 </a:solidFill>
@@ -18222,16 +18226,16 @@
                 <a:ea typeface="Aptos" pitchFamily="34" charset="-122"/>
                 <a:cs typeface="Aptos" pitchFamily="34" charset="-120"/>
               </a:rPr>
-              <a:t>• It does not replace legal, privacy, procurement, civil rights, records, or agency policy review.</a:t>
-            </a:r>
-            <a:endParaRPr lang="en-US" sz="2100" dirty="0"/>
-          </a:p>
-          <a:p>
-            <a:pPr indent="0" marL="0">
-              <a:buNone/>
-            </a:pPr>
-            <a:r>
-              <a:rPr lang="en-US" sz="2100" dirty="0">
+              <a:t>• It does not replace legal, privacy, procurement, civil rights, records, or.</a:t>
+            </a:r>
+            <a:endParaRPr lang="en-US" sz="1920" dirty="0"/>
+          </a:p>
+          <a:p>
+            <a:pPr indent="0" marL="0">
+              <a:buNone/>
+            </a:pPr>
+            <a:r>
+              <a:rPr lang="en-US" sz="1920" dirty="0">
                 <a:solidFill>
                   <a:srgbClr val="003A63"/>
                 </a:solidFill>
@@ -18239,9 +18243,9 @@
                 <a:ea typeface="Aptos" pitchFamily="34" charset="-122"/>
                 <a:cs typeface="Aptos" pitchFamily="34" charset="-120"/>
               </a:rPr>
-              <a:t>• Learners should confirm applicable requirements in their own jurisdiction and organization.</a:t>
-            </a:r>
-            <a:endParaRPr lang="en-US" sz="2100" dirty="0"/>
+              <a:t>• Learners should confirm applicable requirements in their own jurisdiction.</a:t>
+            </a:r>
+            <a:endParaRPr lang="en-US" sz="1920" dirty="0"/>
           </a:p>
         </p:txBody>
       </p:sp>
@@ -18253,12 +18257,12 @@
         </p:nvSpPr>
         <p:spPr>
           <a:xfrm>
-            <a:off x="7635240" y="1325880"/>
-            <a:ext cx="3474720" cy="1207008"/>
+            <a:off x="7543800" y="1325880"/>
+            <a:ext cx="3611880" cy="1261872"/>
           </a:xfrm>
           <a:prstGeom prst="roundRect">
             <a:avLst>
-              <a:gd name="adj" fmla="val 9091"/>
+              <a:gd name="adj" fmla="val 8696"/>
             </a:avLst>
           </a:prstGeom>
           <a:solidFill>
@@ -18280,8 +18284,8 @@
         </p:nvSpPr>
         <p:spPr>
           <a:xfrm>
-            <a:off x="7799832" y="1472184"/>
-            <a:ext cx="3145536" cy="256032"/>
+            <a:off x="7708392" y="1453896"/>
+            <a:ext cx="3282696" cy="228600"/>
           </a:xfrm>
           <a:prstGeom prst="rect">
             <a:avLst/>
@@ -18297,7 +18301,7 @@
               <a:buNone/>
             </a:pPr>
             <a:r>
-              <a:rPr lang="en-US" sz="1300" b="1" dirty="0">
+              <a:rPr lang="en-US" sz="1220" b="1" dirty="0">
                 <a:solidFill>
                   <a:srgbClr val="0068B7"/>
                 </a:solidFill>
@@ -18307,7 +18311,7 @@
               </a:rPr>
               <a:t>Governance lens</a:t>
             </a:r>
-            <a:endParaRPr lang="en-US" sz="1300" dirty="0"/>
+            <a:endParaRPr lang="en-US" sz="1220" dirty="0"/>
           </a:p>
         </p:txBody>
       </p:sp>
@@ -18319,8 +18323,8 @@
         </p:nvSpPr>
         <p:spPr>
           <a:xfrm>
-            <a:off x="7799832" y="1801368"/>
-            <a:ext cx="3145536" cy="640080"/>
+            <a:off x="7708392" y="1764792"/>
+            <a:ext cx="3282696" cy="749808"/>
           </a:xfrm>
           <a:prstGeom prst="rect">
             <a:avLst/>
@@ -18338,7 +18342,7 @@
               <a:buNone/>
             </a:pPr>
             <a:r>
-              <a:rPr lang="en-US" sz="1320" dirty="0">
+              <a:rPr lang="en-US" sz="1220" dirty="0">
                 <a:solidFill>
                   <a:srgbClr val="17364A"/>
                 </a:solidFill>
@@ -18348,7 +18352,7 @@
               </a:rPr>
               <a:t>This national-level module is intended for training and planning purposes.</a:t>
             </a:r>
-            <a:endParaRPr lang="en-US" sz="1320" dirty="0"/>
+            <a:endParaRPr lang="en-US" sz="1220" dirty="0"/>
           </a:p>
         </p:txBody>
       </p:sp>
@@ -18360,12 +18364,12 @@
         </p:nvSpPr>
         <p:spPr>
           <a:xfrm>
-            <a:off x="7635240" y="2670048"/>
-            <a:ext cx="3474720" cy="1377086"/>
+            <a:off x="7543800" y="2724912"/>
+            <a:ext cx="3611880" cy="1527048"/>
           </a:xfrm>
           <a:prstGeom prst="roundRect">
             <a:avLst>
-              <a:gd name="adj" fmla="val 7968"/>
+              <a:gd name="adj" fmla="val 7186"/>
             </a:avLst>
           </a:prstGeom>
           <a:solidFill>
@@ -18387,24 +18391,26 @@
         </p:nvSpPr>
         <p:spPr>
           <a:xfrm>
-            <a:off x="7799832" y="2798064"/>
-            <a:ext cx="3145536" cy="237744"/>
-          </a:xfrm>
-          <a:prstGeom prst="rect">
-            <a:avLst/>
-          </a:prstGeom>
-          <a:noFill/>
-          <a:ln/>
-        </p:spPr>
-        <p:txBody>
-          <a:bodyPr wrap="square" lIns="0" tIns="0" rIns="0" bIns="0" rtlCol="0" anchor="ctr"/>
-          <a:lstStyle/>
-          <a:p>
-            <a:pPr indent="0" marL="0">
-              <a:buNone/>
-            </a:pPr>
-            <a:r>
-              <a:rPr lang="en-US" sz="1250" b="1" dirty="0">
+            <a:off x="7708392" y="2852928"/>
+            <a:ext cx="3282696" cy="219456"/>
+          </a:xfrm>
+          <a:prstGeom prst="rect">
+            <a:avLst/>
+          </a:prstGeom>
+          <a:noFill/>
+          <a:ln/>
+        </p:spPr>
+        <p:txBody>
+          <a:bodyPr wrap="square" lIns="0" tIns="0" rIns="0" bIns="0" rtlCol="0" anchor="ctr">
+            <a:normAutofit/>
+          </a:bodyPr>
+          <a:lstStyle/>
+          <a:p>
+            <a:pPr indent="0" marL="0">
+              <a:buNone/>
+            </a:pPr>
+            <a:r>
+              <a:rPr lang="en-US" sz="1160" b="1" dirty="0">
                 <a:solidFill>
                   <a:srgbClr val="0068B7"/>
                 </a:solidFill>
@@ -18414,7 +18420,7 @@
               </a:rPr>
               <a:t>Governance pathway</a:t>
             </a:r>
-            <a:endParaRPr lang="en-US" sz="1250" dirty="0"/>
+            <a:endParaRPr lang="en-US" sz="1160" dirty="0"/>
           </a:p>
         </p:txBody>
       </p:sp>
@@ -18426,7 +18432,7 @@
         </p:nvSpPr>
         <p:spPr>
           <a:xfrm>
-            <a:off x="8763000" y="3351276"/>
+            <a:off x="8717280" y="3406140"/>
             <a:ext cx="164592" cy="0"/>
           </a:xfrm>
           <a:prstGeom prst="line">
@@ -18449,8 +18455,8 @@
         </p:nvSpPr>
         <p:spPr>
           <a:xfrm>
-            <a:off x="7872984" y="3200400"/>
-            <a:ext cx="890016" cy="301752"/>
+            <a:off x="7781544" y="3255264"/>
+            <a:ext cx="935736" cy="301752"/>
           </a:xfrm>
           <a:prstGeom prst="roundRect">
             <a:avLst>
@@ -18476,8 +18482,8 @@
         </p:nvSpPr>
         <p:spPr>
           <a:xfrm>
-            <a:off x="7909560" y="3273552"/>
-            <a:ext cx="816864" cy="146304"/>
+            <a:off x="7818120" y="3328416"/>
+            <a:ext cx="862584" cy="146304"/>
           </a:xfrm>
           <a:prstGeom prst="rect">
             <a:avLst/>
@@ -18517,7 +18523,7 @@
         </p:nvSpPr>
         <p:spPr>
           <a:xfrm>
-            <a:off x="9817608" y="3351276"/>
+            <a:off x="9817608" y="3406140"/>
             <a:ext cx="164592" cy="0"/>
           </a:xfrm>
           <a:prstGeom prst="line">
@@ -18540,8 +18546,8 @@
         </p:nvSpPr>
         <p:spPr>
           <a:xfrm>
-            <a:off x="8927592" y="3200400"/>
-            <a:ext cx="890016" cy="301752"/>
+            <a:off x="8881872" y="3255264"/>
+            <a:ext cx="935736" cy="301752"/>
           </a:xfrm>
           <a:prstGeom prst="roundRect">
             <a:avLst>
@@ -18567,8 +18573,8 @@
         </p:nvSpPr>
         <p:spPr>
           <a:xfrm>
-            <a:off x="8964168" y="3273552"/>
-            <a:ext cx="816864" cy="146304"/>
+            <a:off x="8918448" y="3328416"/>
+            <a:ext cx="862584" cy="146304"/>
           </a:xfrm>
           <a:prstGeom prst="rect">
             <a:avLst/>
@@ -18608,8 +18614,8 @@
         </p:nvSpPr>
         <p:spPr>
           <a:xfrm>
-            <a:off x="9982200" y="3200400"/>
-            <a:ext cx="890016" cy="301752"/>
+            <a:off x="9982200" y="3255264"/>
+            <a:ext cx="935736" cy="301752"/>
           </a:xfrm>
           <a:prstGeom prst="roundRect">
             <a:avLst>
@@ -18635,8 +18641,8 @@
         </p:nvSpPr>
         <p:spPr>
           <a:xfrm>
-            <a:off x="10018776" y="3273552"/>
-            <a:ext cx="816864" cy="146304"/>
+            <a:off x="10018776" y="3328416"/>
+            <a:ext cx="862584" cy="146304"/>
           </a:xfrm>
           <a:prstGeom prst="rect">
             <a:avLst/>
@@ -18676,8 +18682,8 @@
         </p:nvSpPr>
         <p:spPr>
           <a:xfrm>
-            <a:off x="7854696" y="3694176"/>
-            <a:ext cx="3035808" cy="206654"/>
+            <a:off x="7763256" y="3749040"/>
+            <a:ext cx="3172968" cy="356616"/>
           </a:xfrm>
           <a:prstGeom prst="rect">
             <a:avLst/>
@@ -18695,7 +18701,7 @@
               <a:buNone/>
             </a:pPr>
             <a:r>
-              <a:rPr lang="en-US" sz="1120" dirty="0">
+              <a:rPr lang="en-US" sz="1040" dirty="0">
                 <a:solidFill>
                   <a:srgbClr val="17364A"/>
                 </a:solidFill>
@@ -18703,9 +18709,9 @@
                 <a:ea typeface="Aptos" pitchFamily="34" charset="-122"/>
                 <a:cs typeface="Aptos" pitchFamily="34" charset="-120"/>
               </a:rPr>
-              <a:t>A proposed AI use should move through documented review before it becomes an operational workflow.</a:t>
-            </a:r>
-            <a:endParaRPr lang="en-US" sz="1120" dirty="0"/>
+              <a:t>A proposed AI use should move through documented review before it.</a:t>
+            </a:r>
+            <a:endParaRPr lang="en-US" sz="1040" dirty="0"/>
           </a:p>
         </p:txBody>
       </p:sp>
@@ -18717,12 +18723,12 @@
         </p:nvSpPr>
         <p:spPr>
           <a:xfrm>
-            <a:off x="7635240" y="4184294"/>
-            <a:ext cx="3474720" cy="1466698"/>
+            <a:off x="7543800" y="4389120"/>
+            <a:ext cx="3611880" cy="1261872"/>
           </a:xfrm>
           <a:prstGeom prst="roundRect">
             <a:avLst>
-              <a:gd name="adj" fmla="val 7481"/>
+              <a:gd name="adj" fmla="val 8696"/>
             </a:avLst>
           </a:prstGeom>
           <a:solidFill>
@@ -18744,8 +18750,8 @@
         </p:nvSpPr>
         <p:spPr>
           <a:xfrm>
-            <a:off x="7799832" y="4330598"/>
-            <a:ext cx="3145536" cy="256032"/>
+            <a:off x="7708392" y="4517136"/>
+            <a:ext cx="3282696" cy="228600"/>
           </a:xfrm>
           <a:prstGeom prst="rect">
             <a:avLst/>
@@ -18761,7 +18767,7 @@
               <a:buNone/>
             </a:pPr>
             <a:r>
-              <a:rPr lang="en-US" sz="1300" b="1" dirty="0">
+              <a:rPr lang="en-US" sz="1220" b="1" dirty="0">
                 <a:solidFill>
                   <a:srgbClr val="0068B7"/>
                 </a:solidFill>
@@ -18771,7 +18777,7 @@
               </a:rPr>
               <a:t>What to document</a:t>
             </a:r>
-            <a:endParaRPr lang="en-US" sz="1300" dirty="0"/>
+            <a:endParaRPr lang="en-US" sz="1220" dirty="0"/>
           </a:p>
         </p:txBody>
       </p:sp>
@@ -18783,8 +18789,8 @@
         </p:nvSpPr>
         <p:spPr>
           <a:xfrm>
-            <a:off x="7799832" y="4659782"/>
-            <a:ext cx="3145536" cy="899770"/>
+            <a:off x="7708392" y="4828032"/>
+            <a:ext cx="3282696" cy="749808"/>
           </a:xfrm>
           <a:prstGeom prst="rect">
             <a:avLst/>
@@ -18802,7 +18808,7 @@
               <a:buNone/>
             </a:pPr>
             <a:r>
-              <a:rPr lang="en-US" sz="1320" dirty="0">
+              <a:rPr lang="en-US" sz="1220" dirty="0">
                 <a:solidFill>
                   <a:srgbClr val="17364A"/>
                 </a:solidFill>
@@ -18810,9 +18816,9 @@
                 <a:ea typeface="Aptos" pitchFamily="34" charset="-122"/>
                 <a:cs typeface="Aptos" pitchFamily="34" charset="-120"/>
               </a:rPr>
-              <a:t>Translate this concept into clear decision rights, review steps, documentation expectations, and escalation paths before an AI-supported workflow is approved.</a:t>
-            </a:r>
-            <a:endParaRPr lang="en-US" sz="1320" dirty="0"/>
+              <a:t>Translate this concept into clear decision rights, review steps, documentation.</a:t>
+            </a:r>
+            <a:endParaRPr lang="en-US" sz="1220" dirty="0"/>
           </a:p>
         </p:txBody>
       </p:sp>

--- a/downloads/presentations/modules/arc-340.pptx
+++ b/downloads/presentations/modules/arc-340.pptx
@@ -12161,7 +12161,7 @@
                 <a:ea typeface="Aptos" pitchFamily="34" charset="-122"/>
                 <a:cs typeface="Aptos" pitchFamily="34" charset="-120"/>
               </a:rPr>
-              <a:t>• 1. Which integration risk is most concerning for an AI tool that can update.</a:t>
+              <a:t>1. Which integration risk is most concerning for an AI tool that can update.</a:t>
             </a:r>
             <a:endParaRPr lang="en-US" sz="1920" dirty="0"/>
           </a:p>
@@ -12178,7 +12178,7 @@
                 <a:ea typeface="Aptos" pitchFamily="34" charset="-122"/>
                 <a:cs typeface="Aptos" pitchFamily="34" charset="-120"/>
               </a:rPr>
-              <a:t>• 2. What is the best reason to assign an accountability owner?</a:t>
+              <a:t>2. What is the best reason to assign an accountability owner?</a:t>
             </a:r>
             <a:endParaRPr lang="en-US" sz="1920" dirty="0"/>
           </a:p>
@@ -12195,7 +12195,7 @@
                 <a:ea typeface="Aptos" pitchFamily="34" charset="-122"/>
                 <a:cs typeface="Aptos" pitchFamily="34" charset="-120"/>
               </a:rPr>
-              <a:t>• 3. When should an AI-supported workflow be escalated for review?</a:t>
+              <a:t>3. When should an AI-supported workflow be escalated for review?</a:t>
             </a:r>
             <a:endParaRPr lang="en-US" sz="1920" dirty="0"/>
           </a:p>
@@ -12302,7 +12302,7 @@
                 <a:ea typeface="Aptos" pitchFamily="34" charset="-122"/>
                 <a:cs typeface="Aptos" pitchFamily="34" charset="-120"/>
               </a:rPr>
-              <a:t>1. Which integration risk is most concerning for an AI tool that can update a.</a:t>
+              <a:t>Which integration risk is most concerning for an AI tool that can update a case.</a:t>
             </a:r>
             <a:endParaRPr lang="en-US" sz="1220" dirty="0"/>
           </a:p>
@@ -12409,41 +12409,7 @@
                 <a:ea typeface="Aptos" pitchFamily="34" charset="-122"/>
                 <a:cs typeface="Aptos" pitchFamily="34" charset="-120"/>
               </a:rPr>
-              <a:t>1.</a:t>
-            </a:r>
-            <a:endParaRPr lang="en-US" sz="1140" dirty="0"/>
-          </a:p>
-          <a:p>
-            <a:pPr indent="0" marL="0">
-              <a:buNone/>
-            </a:pPr>
-            <a:r>
-              <a:rPr lang="en-US" sz="1140" dirty="0">
-                <a:solidFill>
-                  <a:srgbClr val="17364A"/>
-                </a:solidFill>
-                <a:latin typeface="Aptos" pitchFamily="34" charset="0"/>
-                <a:ea typeface="Aptos" pitchFamily="34" charset="-122"/>
-                <a:cs typeface="Aptos" pitchFamily="34" charset="-120"/>
-              </a:rPr>
               <a:t>Which integration risk is most concerning for an.</a:t>
-            </a:r>
-            <a:endParaRPr lang="en-US" sz="1140" dirty="0"/>
-          </a:p>
-          <a:p>
-            <a:pPr indent="0" marL="0">
-              <a:buNone/>
-            </a:pPr>
-            <a:r>
-              <a:rPr lang="en-US" sz="1140" dirty="0">
-                <a:solidFill>
-                  <a:srgbClr val="17364A"/>
-                </a:solidFill>
-                <a:latin typeface="Aptos" pitchFamily="34" charset="0"/>
-                <a:ea typeface="Aptos" pitchFamily="34" charset="-122"/>
-                <a:cs typeface="Aptos" pitchFamily="34" charset="-120"/>
-              </a:rPr>
-              <a:t>2.</a:t>
             </a:r>
             <a:endParaRPr lang="en-US" sz="1140" dirty="0"/>
           </a:p>
